--- a/course/modules/M01/L004/M01-L004-canva-deck.pptx
+++ b/course/modules/M01/L004/M01-L004-canva-deck.pptx
@@ -4223,7 +4223,7 @@
       <p:grpSpPr/>
       <p:pic>
         <p:nvPicPr>
-          <p:cNvPr id="2" name="Picture 1" descr="slide-04.png"/>
+          <p:cNvPr id="2" name="Picture 1" descr="slide-03.png"/>
           <p:cNvPicPr>
             <a:picLocks noChangeAspect="1"/>
           </p:cNvPicPr>
@@ -4253,7 +4253,7 @@
         </p:nvSpPr>
         <p:spPr>
           <a:xfrm>
-            <a:off x="731527" y="809138"/>
+            <a:off x="731527" y="1719200"/>
             <a:ext cx="1210500" cy="320100"/>
           </a:xfrm>
           <a:prstGeom prst="rect">
@@ -4290,8 +4290,8 @@
         </p:nvSpPr>
         <p:spPr>
           <a:xfrm>
-            <a:off x="2029374" y="720278"/>
-            <a:ext cx="7030500" cy="621900"/>
+            <a:off x="2063268" y="1582106"/>
+            <a:ext cx="5943600" cy="457200"/>
           </a:xfrm>
           <a:prstGeom prst="rect">
             <a:avLst/>
@@ -4327,8 +4327,8 @@
         </p:nvSpPr>
         <p:spPr>
           <a:xfrm>
-            <a:off x="731520" y="1193328"/>
-            <a:ext cx="6858000" cy="365700"/>
+            <a:off x="1142988" y="2332605"/>
+            <a:ext cx="5303400" cy="1042060"/>
           </a:xfrm>
           <a:prstGeom prst="rect">
             <a:avLst/>
@@ -4343,7 +4343,18 @@
           <a:p>
             <a:pPr algn="l"/>
             <a:r>
-              <a:rPr sz="1500" b="0" i="0" lang="en-US" altLang="en-US">
+              <a:rPr sz="3200" b="1" i="0" lang="th-TH" altLang="en-US">
+                <a:solidFill>
+                  <a:srgbClr val="24333D"/>
+                </a:solidFill>
+                <a:latin typeface="Sarabun"/>
+                <a:ea typeface="Sarabun"/>
+                <a:cs typeface="Sarabun"/>
+              </a:rPr>
+              <a:t>หก</a:t>
+            </a:r>
+            <a:r>
+              <a:rPr sz="1980" b="0" i="1" lang="en-US" altLang="en-US">
                 <a:solidFill>
                   <a:srgbClr val="566873"/>
                 </a:solidFill>
@@ -4351,7 +4362,7 @@
                 <a:ea typeface="Sarabun"/>
                 <a:cs typeface="Sarabun"/>
               </a:rPr>
-              <a:t>Contrast the sound-shapes of 6-10 so you can see which are short/clipped and which are longer.</a:t>
+              <a:t> (hòk)</a:t>
             </a:r>
           </a:p>
         </p:txBody>
@@ -4364,8 +4375,8 @@
         </p:nvSpPr>
         <p:spPr>
           <a:xfrm>
-            <a:off x="731533" y="1623118"/>
-            <a:ext cx="1645800" cy="274200"/>
+            <a:off x="1143000" y="3374675"/>
+            <a:ext cx="5303400" cy="365700"/>
           </a:xfrm>
           <a:prstGeom prst="rect">
             <a:avLst/>
@@ -4380,15 +4391,15 @@
           <a:p>
             <a:pPr algn="l"/>
             <a:r>
-              <a:rPr sz="1300" b="1" i="0" lang="en-US" altLang="en-US">
-                <a:solidFill>
-                  <a:srgbClr val="24333D"/>
-                </a:solidFill>
-                <a:latin typeface="Sarabun"/>
-                <a:ea typeface="Sarabun"/>
-                <a:cs typeface="Sarabun"/>
-              </a:rPr>
-              <a:t>Direct answers</a:t>
+              <a:rPr sz="1500" b="0" i="0" lang="en-US" altLang="en-US">
+                <a:solidFill>
+                  <a:srgbClr val="82909A"/>
+                </a:solidFill>
+                <a:latin typeface="Sarabun"/>
+                <a:ea typeface="Sarabun"/>
+                <a:cs typeface="Sarabun"/>
+              </a:rPr>
+              <a:t>six</a:t>
             </a:r>
           </a:p>
         </p:txBody>
@@ -4401,8 +4412,8 @@
         </p:nvSpPr>
         <p:spPr>
           <a:xfrm>
-            <a:off x="1051560" y="2057400"/>
-            <a:ext cx="2286000" cy="731520"/>
+            <a:off x="731520" y="4142240"/>
+            <a:ext cx="6858000" cy="914400"/>
           </a:xfrm>
           <a:prstGeom prst="rect">
             <a:avLst/>
@@ -4417,7 +4428,7 @@
           <a:p>
             <a:pPr algn="l"/>
             <a:r>
-              <a:rPr sz="2300" b="1" i="0" lang="th-TH" altLang="en-US">
+              <a:rPr sz="1600" b="0" i="0" lang="th-TH" altLang="en-US">
                 <a:solidFill>
                   <a:srgbClr val="24333D"/>
                 </a:solidFill>
@@ -4425,47 +4436,13 @@
                 <a:ea typeface="Sarabun"/>
                 <a:cs typeface="Sarabun"/>
               </a:rPr>
-              <a:t>หก</a:t>
-            </a:r>
-            <a:r>
-              <a:rPr sz="1500" b="0" i="1" lang="en-US" altLang="en-US">
-                <a:solidFill>
-                  <a:srgbClr val="566873"/>
-                </a:solidFill>
-                <a:latin typeface="Sarabun"/>
-                <a:ea typeface="Sarabun"/>
-                <a:cs typeface="Sarabun"/>
-              </a:rPr>
-              <a:t> (hòk)</a:t>
-            </a:r>
-          </a:p>
-        </p:txBody>
-      </p:sp>
-      <p:sp>
-        <p:nvSpPr>
-          <p:cNvPr id="8" name="TextBox 7"/>
-          <p:cNvSpPr txBox="1"/>
-          <p:nvPr/>
-        </p:nvSpPr>
-        <p:spPr>
-          <a:xfrm>
-            <a:off x="3474720" y="2148840"/>
-            <a:ext cx="3657600" cy="365760"/>
-          </a:xfrm>
-          <a:prstGeom prst="rect">
-            <a:avLst/>
-          </a:prstGeom>
-          <a:noFill/>
-        </p:spPr>
-        <p:txBody>
-          <a:bodyPr wrap="square" anchor="t">
-            <a:spAutoFit/>
-          </a:bodyPr>
-          <a:lstStyle/>
+              <a:t>หก | hòk | six</a:t>
+            </a:r>
+          </a:p>
           <a:p>
             <a:pPr algn="l"/>
             <a:r>
-              <a:rPr sz="1300" b="1" i="0" lang="en-US" altLang="en-US">
+              <a:rPr sz="1600" b="0" i="0" lang="th-TH" altLang="en-US">
                 <a:solidFill>
                   <a:srgbClr val="24333D"/>
                 </a:solidFill>
@@ -4473,398 +4450,14 @@
                 <a:ea typeface="Sarabun"/>
                 <a:cs typeface="Sarabun"/>
               </a:rPr>
-              <a:t>six</a:t>
-            </a:r>
-          </a:p>
-        </p:txBody>
-      </p:sp>
-      <p:sp>
-        <p:nvSpPr>
-          <p:cNvPr id="9" name="TextBox 8"/>
-          <p:cNvSpPr txBox="1"/>
-          <p:nvPr/>
-        </p:nvSpPr>
-        <p:spPr>
-          <a:xfrm>
-            <a:off x="3474720" y="2514600"/>
-            <a:ext cx="3657600" cy="365760"/>
-          </a:xfrm>
-          <a:prstGeom prst="rect">
-            <a:avLst/>
-          </a:prstGeom>
-          <a:noFill/>
-        </p:spPr>
-        <p:txBody>
-          <a:bodyPr wrap="square" anchor="t">
-            <a:spAutoFit/>
-          </a:bodyPr>
-          <a:lstStyle/>
-          <a:p>
-            <a:pPr algn="l"/>
-            <a:r>
-              <a:rPr sz="1500" b="0" i="0" lang="th-TH" altLang="en-US">
-                <a:solidFill>
-                  <a:srgbClr val="566873"/>
-                </a:solidFill>
-                <a:latin typeface="Sarabun"/>
-                <a:ea typeface="Sarabun"/>
-                <a:cs typeface="Sarabun"/>
-              </a:rPr>
-              <a:t>หก</a:t>
-            </a:r>
-            <a:r>
-              <a:rPr sz="1500" b="0" i="1" lang="en-US" altLang="en-US">
-                <a:solidFill>
-                  <a:srgbClr val="566873"/>
-                </a:solidFill>
-                <a:latin typeface="Sarabun"/>
-                <a:ea typeface="Sarabun"/>
-                <a:cs typeface="Sarabun"/>
-              </a:rPr>
-              <a:t> (hòk)</a:t>
-            </a:r>
-            <a:r>
-              <a:rPr sz="1500" b="0" i="0" lang="en-US" altLang="en-US">
-                <a:solidFill>
-                  <a:srgbClr val="566873"/>
-                </a:solidFill>
-                <a:latin typeface="Sarabun"/>
-                <a:ea typeface="Sarabun"/>
-                <a:cs typeface="Sarabun"/>
-              </a:rPr>
-              <a:t> | hòk | six</a:t>
-            </a:r>
-          </a:p>
-        </p:txBody>
-      </p:sp>
-      <p:sp>
-        <p:nvSpPr>
-          <p:cNvPr id="10" name="TextBox 9"/>
-          <p:cNvSpPr txBox="1"/>
-          <p:nvPr/>
-        </p:nvSpPr>
-        <p:spPr>
-          <a:xfrm>
-            <a:off x="1051560" y="3291840"/>
-            <a:ext cx="2286000" cy="731520"/>
-          </a:xfrm>
-          <a:prstGeom prst="rect">
-            <a:avLst/>
-          </a:prstGeom>
-          <a:noFill/>
-        </p:spPr>
-        <p:txBody>
-          <a:bodyPr wrap="square" anchor="t">
-            <a:spAutoFit/>
-          </a:bodyPr>
-          <a:lstStyle/>
-          <a:p>
-            <a:pPr algn="l"/>
-            <a:r>
-              <a:rPr sz="2300" b="1" i="0" lang="th-TH" altLang="en-US">
-                <a:solidFill>
-                  <a:srgbClr val="24333D"/>
-                </a:solidFill>
-                <a:latin typeface="Sarabun"/>
-                <a:ea typeface="Sarabun"/>
-                <a:cs typeface="Sarabun"/>
-              </a:rPr>
-              <a:t>เจ็ด</a:t>
-            </a:r>
-            <a:r>
-              <a:rPr sz="1500" b="0" i="1" lang="en-US" altLang="en-US">
-                <a:solidFill>
-                  <a:srgbClr val="566873"/>
-                </a:solidFill>
-                <a:latin typeface="Sarabun"/>
-                <a:ea typeface="Sarabun"/>
-                <a:cs typeface="Sarabun"/>
-              </a:rPr>
-              <a:t> (jèt)</a:t>
-            </a:r>
-          </a:p>
-        </p:txBody>
-      </p:sp>
-      <p:sp>
-        <p:nvSpPr>
-          <p:cNvPr id="11" name="TextBox 10"/>
-          <p:cNvSpPr txBox="1"/>
-          <p:nvPr/>
-        </p:nvSpPr>
-        <p:spPr>
-          <a:xfrm>
-            <a:off x="3474720" y="3383280"/>
-            <a:ext cx="3657600" cy="365760"/>
-          </a:xfrm>
-          <a:prstGeom prst="rect">
-            <a:avLst/>
-          </a:prstGeom>
-          <a:noFill/>
-        </p:spPr>
-        <p:txBody>
-          <a:bodyPr wrap="square" anchor="t">
-            <a:spAutoFit/>
-          </a:bodyPr>
-          <a:lstStyle/>
-          <a:p>
-            <a:pPr algn="l"/>
-            <a:r>
-              <a:rPr sz="1300" b="1" i="0" lang="en-US" altLang="en-US">
-                <a:solidFill>
-                  <a:srgbClr val="24333D"/>
-                </a:solidFill>
-                <a:latin typeface="Sarabun"/>
-                <a:ea typeface="Sarabun"/>
-                <a:cs typeface="Sarabun"/>
-              </a:rPr>
-              <a:t>seven</a:t>
-            </a:r>
-          </a:p>
-        </p:txBody>
-      </p:sp>
-      <p:sp>
-        <p:nvSpPr>
-          <p:cNvPr id="12" name="TextBox 11"/>
-          <p:cNvSpPr txBox="1"/>
-          <p:nvPr/>
-        </p:nvSpPr>
-        <p:spPr>
-          <a:xfrm>
-            <a:off x="3474720" y="3749040"/>
-            <a:ext cx="3657600" cy="365760"/>
-          </a:xfrm>
-          <a:prstGeom prst="rect">
-            <a:avLst/>
-          </a:prstGeom>
-          <a:noFill/>
-        </p:spPr>
-        <p:txBody>
-          <a:bodyPr wrap="square" anchor="t">
-            <a:spAutoFit/>
-          </a:bodyPr>
-          <a:lstStyle/>
-          <a:p>
-            <a:pPr algn="l"/>
-            <a:r>
-              <a:rPr sz="1500" b="0" i="0" lang="th-TH" altLang="en-US">
-                <a:solidFill>
-                  <a:srgbClr val="566873"/>
-                </a:solidFill>
-                <a:latin typeface="Sarabun"/>
-                <a:ea typeface="Sarabun"/>
-                <a:cs typeface="Sarabun"/>
-              </a:rPr>
-              <a:t>เจ็ด</a:t>
-            </a:r>
-            <a:r>
-              <a:rPr sz="1500" b="0" i="1" lang="en-US" altLang="en-US">
-                <a:solidFill>
-                  <a:srgbClr val="566873"/>
-                </a:solidFill>
-                <a:latin typeface="Sarabun"/>
-                <a:ea typeface="Sarabun"/>
-                <a:cs typeface="Sarabun"/>
-              </a:rPr>
-              <a:t> (jèt)</a:t>
-            </a:r>
-            <a:r>
-              <a:rPr sz="1500" b="0" i="0" lang="en-US" altLang="en-US">
-                <a:solidFill>
-                  <a:srgbClr val="566873"/>
-                </a:solidFill>
-                <a:latin typeface="Sarabun"/>
-                <a:ea typeface="Sarabun"/>
-                <a:cs typeface="Sarabun"/>
-              </a:rPr>
-              <a:t> | jèt | seven</a:t>
-            </a:r>
-          </a:p>
-        </p:txBody>
-      </p:sp>
-      <p:sp>
-        <p:nvSpPr>
-          <p:cNvPr id="13" name="TextBox 12"/>
-          <p:cNvSpPr txBox="1"/>
-          <p:nvPr/>
-        </p:nvSpPr>
-        <p:spPr>
-          <a:xfrm>
-            <a:off x="731520" y="4594866"/>
-            <a:ext cx="1828800" cy="274200"/>
-          </a:xfrm>
-          <a:prstGeom prst="rect">
-            <a:avLst/>
-          </a:prstGeom>
-          <a:noFill/>
-        </p:spPr>
-        <p:txBody>
-          <a:bodyPr wrap="square" anchor="t">
-            <a:spAutoFit/>
-          </a:bodyPr>
-          <a:lstStyle/>
-          <a:p>
-            <a:pPr algn="l"/>
-            <a:r>
-              <a:rPr sz="1300" b="1" i="0" lang="en-US" altLang="en-US">
-                <a:solidFill>
-                  <a:srgbClr val="24333D"/>
-                </a:solidFill>
-                <a:latin typeface="Sarabun"/>
-                <a:ea typeface="Sarabun"/>
-                <a:cs typeface="Sarabun"/>
-              </a:rPr>
-              <a:t>Softener</a:t>
-            </a:r>
-          </a:p>
-        </p:txBody>
-      </p:sp>
-      <p:sp>
-        <p:nvSpPr>
-          <p:cNvPr id="14" name="TextBox 13"/>
-          <p:cNvSpPr txBox="1"/>
-          <p:nvPr/>
-        </p:nvSpPr>
-        <p:spPr>
-          <a:xfrm>
-            <a:off x="1042422" y="5029235"/>
-            <a:ext cx="2286000" cy="777088"/>
-          </a:xfrm>
-          <a:prstGeom prst="rect">
-            <a:avLst/>
-          </a:prstGeom>
-          <a:noFill/>
-        </p:spPr>
-        <p:txBody>
-          <a:bodyPr wrap="square" anchor="t">
-            <a:spAutoFit/>
-          </a:bodyPr>
-          <a:lstStyle/>
-          <a:p>
-            <a:pPr algn="l"/>
-            <a:r>
-              <a:rPr sz="2300" b="1" i="0" lang="th-TH" altLang="en-US">
-                <a:solidFill>
-                  <a:srgbClr val="24333D"/>
-                </a:solidFill>
-                <a:latin typeface="Sarabun"/>
-                <a:ea typeface="Sarabun"/>
-                <a:cs typeface="Sarabun"/>
-              </a:rPr>
-              <a:t>แปด</a:t>
-            </a:r>
-            <a:r>
-              <a:rPr sz="1500" b="0" i="1" lang="en-US" altLang="en-US">
-                <a:solidFill>
-                  <a:srgbClr val="566873"/>
-                </a:solidFill>
-                <a:latin typeface="Sarabun"/>
-                <a:ea typeface="Sarabun"/>
-                <a:cs typeface="Sarabun"/>
-              </a:rPr>
-              <a:t> (bpàet)</a:t>
-            </a:r>
-          </a:p>
-        </p:txBody>
-      </p:sp>
-      <p:sp>
-        <p:nvSpPr>
-          <p:cNvPr id="15" name="TextBox 14"/>
-          <p:cNvSpPr txBox="1"/>
-          <p:nvPr/>
-        </p:nvSpPr>
-        <p:spPr>
-          <a:xfrm>
-            <a:off x="3474670" y="5120700"/>
-            <a:ext cx="3657600" cy="365700"/>
-          </a:xfrm>
-          <a:prstGeom prst="rect">
-            <a:avLst/>
-          </a:prstGeom>
-          <a:noFill/>
-        </p:spPr>
-        <p:txBody>
-          <a:bodyPr wrap="square" anchor="t">
-            <a:spAutoFit/>
-          </a:bodyPr>
-          <a:lstStyle/>
-          <a:p>
-            <a:pPr algn="l"/>
-            <a:r>
-              <a:rPr sz="1300" b="1" i="0" lang="en-US" altLang="en-US">
-                <a:solidFill>
-                  <a:srgbClr val="24333D"/>
-                </a:solidFill>
-                <a:latin typeface="Sarabun"/>
-                <a:ea typeface="Sarabun"/>
-                <a:cs typeface="Sarabun"/>
-              </a:rPr>
-              <a:t>eight</a:t>
-            </a:r>
-          </a:p>
-        </p:txBody>
-      </p:sp>
-      <p:sp>
-        <p:nvSpPr>
-          <p:cNvPr id="16" name="TextBox 15"/>
-          <p:cNvSpPr txBox="1"/>
-          <p:nvPr/>
-        </p:nvSpPr>
-        <p:spPr>
-          <a:xfrm>
-            <a:off x="3474670" y="5486348"/>
-            <a:ext cx="3657600" cy="365700"/>
-          </a:xfrm>
-          <a:prstGeom prst="rect">
-            <a:avLst/>
-          </a:prstGeom>
-          <a:noFill/>
-        </p:spPr>
-        <p:txBody>
-          <a:bodyPr wrap="square" anchor="t">
-            <a:spAutoFit/>
-          </a:bodyPr>
-          <a:lstStyle/>
-          <a:p>
-            <a:pPr algn="l"/>
-            <a:r>
-              <a:rPr sz="1500" b="0" i="0" lang="th-TH" altLang="en-US">
-                <a:solidFill>
-                  <a:srgbClr val="566873"/>
-                </a:solidFill>
-                <a:latin typeface="Sarabun"/>
-                <a:ea typeface="Sarabun"/>
-                <a:cs typeface="Sarabun"/>
-              </a:rPr>
-              <a:t>แปด</a:t>
-            </a:r>
-            <a:r>
-              <a:rPr sz="1500" b="0" i="1" lang="en-US" altLang="en-US">
-                <a:solidFill>
-                  <a:srgbClr val="566873"/>
-                </a:solidFill>
-                <a:latin typeface="Sarabun"/>
-                <a:ea typeface="Sarabun"/>
-                <a:cs typeface="Sarabun"/>
-              </a:rPr>
-              <a:t> (bpàet)</a:t>
-            </a:r>
-            <a:r>
-              <a:rPr sz="1500" b="0" i="0" lang="en-US" altLang="en-US">
-                <a:solidFill>
-                  <a:srgbClr val="566873"/>
-                </a:solidFill>
-                <a:latin typeface="Sarabun"/>
-                <a:ea typeface="Sarabun"/>
-                <a:cs typeface="Sarabun"/>
-              </a:rPr>
-              <a:t> | bpàet | eight</a:t>
-            </a:r>
-          </a:p>
-        </p:txBody>
-      </p:sp>
-      <p:sp>
-        <p:nvSpPr>
-          <p:cNvPr id="17" name="__pip_placeholder__"/>
+              <a:t>เจ็ด | jèt | seven</a:t>
+            </a:r>
+          </a:p>
+        </p:txBody>
+      </p:sp>
+      <p:sp>
+        <p:nvSpPr>
+          <p:cNvPr id="8" name="__pip_placeholder__"/>
           <p:cNvSpPr/>
           <p:nvPr/>
         </p:nvSpPr>
@@ -7240,370 +6833,7 @@
                 <a:ea typeface="Sarabun"/>
                 <a:cs typeface="Sarabun"/>
               </a:rPr>
-              <a:t>Look away and count from zero to ten in Thai. Say each digit aloud before looking back: </a:t>
-            </a:r>
-            <a:r>
-              <a:rPr sz="1600" b="0" i="0" lang="th-TH" altLang="en-US">
-                <a:solidFill>
-                  <a:srgbClr val="24333D"/>
-                </a:solidFill>
-                <a:latin typeface="Sarabun"/>
-                <a:ea typeface="Sarabun"/>
-                <a:cs typeface="Sarabun"/>
-              </a:rPr>
-              <a:t>ศูนย์</a:t>
-            </a:r>
-            <a:r>
-              <a:rPr sz="1500" b="0" i="1" lang="en-US" altLang="en-US">
-                <a:solidFill>
-                  <a:srgbClr val="566873"/>
-                </a:solidFill>
-                <a:latin typeface="Sarabun"/>
-                <a:ea typeface="Sarabun"/>
-                <a:cs typeface="Sarabun"/>
-              </a:rPr>
-              <a:t> (sǔun)</a:t>
-            </a:r>
-            <a:r>
-              <a:rPr sz="1600" b="0" i="0" lang="en-US" altLang="en-US">
-                <a:solidFill>
-                  <a:srgbClr val="24333D"/>
-                </a:solidFill>
-                <a:latin typeface="Sarabun"/>
-                <a:ea typeface="Sarabun"/>
-                <a:cs typeface="Sarabun"/>
-              </a:rPr>
-              <a:t>, </a:t>
-            </a:r>
-            <a:r>
-              <a:rPr sz="1600" b="0" i="0" lang="th-TH" altLang="en-US">
-                <a:solidFill>
-                  <a:srgbClr val="24333D"/>
-                </a:solidFill>
-                <a:latin typeface="Sarabun"/>
-                <a:ea typeface="Sarabun"/>
-                <a:cs typeface="Sarabun"/>
-              </a:rPr>
-              <a:t>หนึ่ง</a:t>
-            </a:r>
-            <a:r>
-              <a:rPr sz="1500" b="0" i="1" lang="en-US" altLang="en-US">
-                <a:solidFill>
-                  <a:srgbClr val="566873"/>
-                </a:solidFill>
-                <a:latin typeface="Sarabun"/>
-                <a:ea typeface="Sarabun"/>
-                <a:cs typeface="Sarabun"/>
-              </a:rPr>
-              <a:t> (nùeng)</a:t>
-            </a:r>
-            <a:r>
-              <a:rPr sz="1600" b="0" i="0" lang="en-US" altLang="en-US">
-                <a:solidFill>
-                  <a:srgbClr val="24333D"/>
-                </a:solidFill>
-                <a:latin typeface="Sarabun"/>
-                <a:ea typeface="Sarabun"/>
-                <a:cs typeface="Sarabun"/>
-              </a:rPr>
-              <a:t>, </a:t>
-            </a:r>
-            <a:r>
-              <a:rPr sz="1600" b="0" i="0" lang="th-TH" altLang="en-US">
-                <a:solidFill>
-                  <a:srgbClr val="24333D"/>
-                </a:solidFill>
-                <a:latin typeface="Sarabun"/>
-                <a:ea typeface="Sarabun"/>
-                <a:cs typeface="Sarabun"/>
-              </a:rPr>
-              <a:t>สอง</a:t>
-            </a:r>
-            <a:r>
-              <a:rPr sz="1500" b="0" i="1" lang="en-US" altLang="en-US">
-                <a:solidFill>
-                  <a:srgbClr val="566873"/>
-                </a:solidFill>
-                <a:latin typeface="Sarabun"/>
-                <a:ea typeface="Sarabun"/>
-                <a:cs typeface="Sarabun"/>
-              </a:rPr>
-              <a:t> (sǎawng)</a:t>
-            </a:r>
-            <a:r>
-              <a:rPr sz="1600" b="0" i="0" lang="en-US" altLang="en-US">
-                <a:solidFill>
-                  <a:srgbClr val="24333D"/>
-                </a:solidFill>
-                <a:latin typeface="Sarabun"/>
-                <a:ea typeface="Sarabun"/>
-                <a:cs typeface="Sarabun"/>
-              </a:rPr>
-              <a:t>, </a:t>
-            </a:r>
-            <a:r>
-              <a:rPr sz="1600" b="0" i="0" lang="th-TH" altLang="en-US">
-                <a:solidFill>
-                  <a:srgbClr val="24333D"/>
-                </a:solidFill>
-                <a:latin typeface="Sarabun"/>
-                <a:ea typeface="Sarabun"/>
-                <a:cs typeface="Sarabun"/>
-              </a:rPr>
-              <a:t>สาม</a:t>
-            </a:r>
-            <a:r>
-              <a:rPr sz="1500" b="0" i="1" lang="en-US" altLang="en-US">
-                <a:solidFill>
-                  <a:srgbClr val="566873"/>
-                </a:solidFill>
-                <a:latin typeface="Sarabun"/>
-                <a:ea typeface="Sarabun"/>
-                <a:cs typeface="Sarabun"/>
-              </a:rPr>
-              <a:t> (sǎam)</a:t>
-            </a:r>
-            <a:r>
-              <a:rPr sz="1600" b="0" i="0" lang="en-US" altLang="en-US">
-                <a:solidFill>
-                  <a:srgbClr val="24333D"/>
-                </a:solidFill>
-                <a:latin typeface="Sarabun"/>
-                <a:ea typeface="Sarabun"/>
-                <a:cs typeface="Sarabun"/>
-              </a:rPr>
-              <a:t>, </a:t>
-            </a:r>
-            <a:r>
-              <a:rPr sz="1600" b="0" i="0" lang="th-TH" altLang="en-US">
-                <a:solidFill>
-                  <a:srgbClr val="24333D"/>
-                </a:solidFill>
-                <a:latin typeface="Sarabun"/>
-                <a:ea typeface="Sarabun"/>
-                <a:cs typeface="Sarabun"/>
-              </a:rPr>
-              <a:t>สี่</a:t>
-            </a:r>
-            <a:r>
-              <a:rPr sz="1500" b="0" i="1" lang="en-US" altLang="en-US">
-                <a:solidFill>
-                  <a:srgbClr val="566873"/>
-                </a:solidFill>
-                <a:latin typeface="Sarabun"/>
-                <a:ea typeface="Sarabun"/>
-                <a:cs typeface="Sarabun"/>
-              </a:rPr>
-              <a:t> (sìi)</a:t>
-            </a:r>
-            <a:r>
-              <a:rPr sz="1600" b="0" i="0" lang="en-US" altLang="en-US">
-                <a:solidFill>
-                  <a:srgbClr val="24333D"/>
-                </a:solidFill>
-                <a:latin typeface="Sarabun"/>
-                <a:ea typeface="Sarabun"/>
-                <a:cs typeface="Sarabun"/>
-              </a:rPr>
-              <a:t>, </a:t>
-            </a:r>
-            <a:r>
-              <a:rPr sz="1600" b="0" i="0" lang="th-TH" altLang="en-US">
-                <a:solidFill>
-                  <a:srgbClr val="24333D"/>
-                </a:solidFill>
-                <a:latin typeface="Sarabun"/>
-                <a:ea typeface="Sarabun"/>
-                <a:cs typeface="Sarabun"/>
-              </a:rPr>
-              <a:t>ห้า</a:t>
-            </a:r>
-            <a:r>
-              <a:rPr sz="1500" b="0" i="1" lang="en-US" altLang="en-US">
-                <a:solidFill>
-                  <a:srgbClr val="566873"/>
-                </a:solidFill>
-                <a:latin typeface="Sarabun"/>
-                <a:ea typeface="Sarabun"/>
-                <a:cs typeface="Sarabun"/>
-              </a:rPr>
-              <a:t> (hâa)</a:t>
-            </a:r>
-            <a:r>
-              <a:rPr sz="1600" b="0" i="0" lang="en-US" altLang="en-US">
-                <a:solidFill>
-                  <a:srgbClr val="24333D"/>
-                </a:solidFill>
-                <a:latin typeface="Sarabun"/>
-                <a:ea typeface="Sarabun"/>
-                <a:cs typeface="Sarabun"/>
-              </a:rPr>
-              <a:t>, </a:t>
-            </a:r>
-            <a:r>
-              <a:rPr sz="1600" b="0" i="0" lang="th-TH" altLang="en-US">
-                <a:solidFill>
-                  <a:srgbClr val="24333D"/>
-                </a:solidFill>
-                <a:latin typeface="Sarabun"/>
-                <a:ea typeface="Sarabun"/>
-                <a:cs typeface="Sarabun"/>
-              </a:rPr>
-              <a:t>หก</a:t>
-            </a:r>
-            <a:r>
-              <a:rPr sz="1500" b="0" i="1" lang="en-US" altLang="en-US">
-                <a:solidFill>
-                  <a:srgbClr val="566873"/>
-                </a:solidFill>
-                <a:latin typeface="Sarabun"/>
-                <a:ea typeface="Sarabun"/>
-                <a:cs typeface="Sarabun"/>
-              </a:rPr>
-              <a:t> (hòk)</a:t>
-            </a:r>
-            <a:r>
-              <a:rPr sz="1600" b="0" i="0" lang="en-US" altLang="en-US">
-                <a:solidFill>
-                  <a:srgbClr val="24333D"/>
-                </a:solidFill>
-                <a:latin typeface="Sarabun"/>
-                <a:ea typeface="Sarabun"/>
-                <a:cs typeface="Sarabun"/>
-              </a:rPr>
-              <a:t>, </a:t>
-            </a:r>
-            <a:r>
-              <a:rPr sz="1600" b="0" i="0" lang="th-TH" altLang="en-US">
-                <a:solidFill>
-                  <a:srgbClr val="24333D"/>
-                </a:solidFill>
-                <a:latin typeface="Sarabun"/>
-                <a:ea typeface="Sarabun"/>
-                <a:cs typeface="Sarabun"/>
-              </a:rPr>
-              <a:t>เจ็ด</a:t>
-            </a:r>
-            <a:r>
-              <a:rPr sz="1500" b="0" i="1" lang="en-US" altLang="en-US">
-                <a:solidFill>
-                  <a:srgbClr val="566873"/>
-                </a:solidFill>
-                <a:latin typeface="Sarabun"/>
-                <a:ea typeface="Sarabun"/>
-                <a:cs typeface="Sarabun"/>
-              </a:rPr>
-              <a:t> (jèt)</a:t>
-            </a:r>
-            <a:r>
-              <a:rPr sz="1600" b="0" i="0" lang="en-US" altLang="en-US">
-                <a:solidFill>
-                  <a:srgbClr val="24333D"/>
-                </a:solidFill>
-                <a:latin typeface="Sarabun"/>
-                <a:ea typeface="Sarabun"/>
-                <a:cs typeface="Sarabun"/>
-              </a:rPr>
-              <a:t>, </a:t>
-            </a:r>
-            <a:r>
-              <a:rPr sz="1600" b="0" i="0" lang="th-TH" altLang="en-US">
-                <a:solidFill>
-                  <a:srgbClr val="24333D"/>
-                </a:solidFill>
-                <a:latin typeface="Sarabun"/>
-                <a:ea typeface="Sarabun"/>
-                <a:cs typeface="Sarabun"/>
-              </a:rPr>
-              <a:t>แปด</a:t>
-            </a:r>
-            <a:r>
-              <a:rPr sz="1500" b="0" i="1" lang="en-US" altLang="en-US">
-                <a:solidFill>
-                  <a:srgbClr val="566873"/>
-                </a:solidFill>
-                <a:latin typeface="Sarabun"/>
-                <a:ea typeface="Sarabun"/>
-                <a:cs typeface="Sarabun"/>
-              </a:rPr>
-              <a:t> (bpàet)</a:t>
-            </a:r>
-            <a:r>
-              <a:rPr sz="1600" b="0" i="0" lang="en-US" altLang="en-US">
-                <a:solidFill>
-                  <a:srgbClr val="24333D"/>
-                </a:solidFill>
-                <a:latin typeface="Sarabun"/>
-                <a:ea typeface="Sarabun"/>
-                <a:cs typeface="Sarabun"/>
-              </a:rPr>
-              <a:t>, </a:t>
-            </a:r>
-            <a:r>
-              <a:rPr sz="1600" b="0" i="0" lang="th-TH" altLang="en-US">
-                <a:solidFill>
-                  <a:srgbClr val="24333D"/>
-                </a:solidFill>
-                <a:latin typeface="Sarabun"/>
-                <a:ea typeface="Sarabun"/>
-                <a:cs typeface="Sarabun"/>
-              </a:rPr>
-              <a:t>เก้า</a:t>
-            </a:r>
-            <a:r>
-              <a:rPr sz="1500" b="0" i="1" lang="en-US" altLang="en-US">
-                <a:solidFill>
-                  <a:srgbClr val="566873"/>
-                </a:solidFill>
-                <a:latin typeface="Sarabun"/>
-                <a:ea typeface="Sarabun"/>
-                <a:cs typeface="Sarabun"/>
-              </a:rPr>
-              <a:t> (gâo)</a:t>
-            </a:r>
-            <a:r>
-              <a:rPr sz="1600" b="0" i="0" lang="en-US" altLang="en-US">
-                <a:solidFill>
-                  <a:srgbClr val="24333D"/>
-                </a:solidFill>
-                <a:latin typeface="Sarabun"/>
-                <a:ea typeface="Sarabun"/>
-                <a:cs typeface="Sarabun"/>
-              </a:rPr>
-              <a:t>, </a:t>
-            </a:r>
-            <a:r>
-              <a:rPr sz="1600" b="0" i="0" lang="th-TH" altLang="en-US">
-                <a:solidFill>
-                  <a:srgbClr val="24333D"/>
-                </a:solidFill>
-                <a:latin typeface="Sarabun"/>
-                <a:ea typeface="Sarabun"/>
-                <a:cs typeface="Sarabun"/>
-              </a:rPr>
-              <a:t>สิบ</a:t>
-            </a:r>
-            <a:r>
-              <a:rPr sz="1500" b="0" i="1" lang="en-US" altLang="en-US">
-                <a:solidFill>
-                  <a:srgbClr val="566873"/>
-                </a:solidFill>
-                <a:latin typeface="Sarabun"/>
-                <a:ea typeface="Sarabun"/>
-                <a:cs typeface="Sarabun"/>
-              </a:rPr>
-              <a:t> (sìp)</a:t>
-            </a:r>
-            <a:r>
-              <a:rPr sz="1600" b="0" i="0" lang="en-US" altLang="en-US">
-                <a:solidFill>
-                  <a:srgbClr val="24333D"/>
-                </a:solidFill>
-                <a:latin typeface="Sarabun"/>
-                <a:ea typeface="Sarabun"/>
-                <a:cs typeface="Sarabun"/>
-              </a:rPr>
-              <a:t>.</a:t>
+              <a:t>Count 0 to 5 in Thai. Go.</a:t>
             </a:r>
           </a:p>
         </p:txBody>
@@ -7640,40 +6870,7 @@
                 <a:ea typeface="Sarabun"/>
                 <a:cs typeface="Sarabun"/>
               </a:rPr>
-              <a:t>How do you ask for a room number or table number? </a:t>
-            </a:r>
-            <a:r>
-              <a:rPr sz="1600" b="0" i="0" lang="th-TH" altLang="en-US">
-                <a:solidFill>
-                  <a:srgbClr val="24333D"/>
-                </a:solidFill>
-                <a:latin typeface="Sarabun"/>
-                <a:ea typeface="Sarabun"/>
-                <a:cs typeface="Sarabun"/>
-              </a:rPr>
-              <a:t>เบอร์อะไร</a:t>
-            </a:r>
-            <a:r>
-              <a:rPr sz="1500" b="0" i="1" lang="en-US" altLang="en-US">
-                <a:solidFill>
-                  <a:srgbClr val="566873"/>
-                </a:solidFill>
-                <a:latin typeface="Sarabun"/>
-                <a:ea typeface="Sarabun"/>
-                <a:cs typeface="Sarabun"/>
-              </a:rPr>
-              <a:t> (ber à-rai)</a:t>
-            </a:r>
-            <a:r>
-              <a:rPr sz="1600" b="0" i="0" lang="en-US" altLang="en-US">
-                <a:solidFill>
-                  <a:srgbClr val="24333D"/>
-                </a:solidFill>
-                <a:latin typeface="Sarabun"/>
-                <a:ea typeface="Sarabun"/>
-                <a:cs typeface="Sarabun"/>
-              </a:rPr>
-              <a:t>.</a:t>
+              <a:t>Now 6 to 10.</a:t>
             </a:r>
           </a:p>
         </p:txBody>
@@ -7710,7 +6907,7 @@
                 <a:ea typeface="Sarabun"/>
                 <a:cs typeface="Sarabun"/>
               </a:rPr>
-              <a:t>How do you say I am eight years old? </a:t>
+              <a:t>How do you ask 'what number?' </a:t>
             </a:r>
             <a:r>
               <a:rPr sz="1600" b="0" i="0" lang="th-TH" altLang="en-US">
@@ -7721,7 +6918,7 @@
                 <a:ea typeface="Sarabun"/>
                 <a:cs typeface="Sarabun"/>
               </a:rPr>
-              <a:t>ฉันอายุแปดปี</a:t>
+              <a:t>เบอร์อะไร</a:t>
             </a:r>
             <a:r>
               <a:rPr sz="1500" b="0" i="1" lang="en-US" altLang="en-US">
@@ -7732,10 +6929,10 @@
                 <a:ea typeface="Sarabun"/>
                 <a:cs typeface="Sarabun"/>
               </a:rPr>
-              <a:t> (chǎn aa-yú bpàet bpii)</a:t>
-            </a:r>
-            <a:r>
-              <a:rPr sz="1600" b="0" i="0" lang="th-TH" altLang="en-US">
+              <a:t> (ber à-rai)</a:t>
+            </a:r>
+            <a:r>
+              <a:rPr sz="1600" b="0" i="0" lang="en-US" altLang="en-US">
                 <a:solidFill>
                   <a:srgbClr val="24333D"/>
                 </a:solidFill>
@@ -7743,7 +6940,7 @@
                 <a:ea typeface="Sarabun"/>
                 <a:cs typeface="Sarabun"/>
               </a:rPr>
-              <a:t> — pronoun, then อายุ, then the number, then ปี.</a:t>
+              <a:t>.</a:t>
             </a:r>
           </a:p>
         </p:txBody>
@@ -7780,73 +6977,7 @@
                 <a:ea typeface="Sarabun"/>
                 <a:cs typeface="Sarabun"/>
               </a:rPr>
-              <a:t>What is the difference between </a:t>
-            </a:r>
-            <a:r>
-              <a:rPr sz="1600" b="0" i="0" lang="th-TH" altLang="en-US">
-                <a:solidFill>
-                  <a:srgbClr val="24333D"/>
-                </a:solidFill>
-                <a:latin typeface="Sarabun"/>
-                <a:ea typeface="Sarabun"/>
-                <a:cs typeface="Sarabun"/>
-              </a:rPr>
-              <a:t>สี่</a:t>
-            </a:r>
-            <a:r>
-              <a:rPr sz="1500" b="0" i="1" lang="en-US" altLang="en-US">
-                <a:solidFill>
-                  <a:srgbClr val="566873"/>
-                </a:solidFill>
-                <a:latin typeface="Sarabun"/>
-                <a:ea typeface="Sarabun"/>
-                <a:cs typeface="Sarabun"/>
-              </a:rPr>
-              <a:t> (sìi)</a:t>
-            </a:r>
-            <a:r>
-              <a:rPr sz="1600" b="0" i="0" lang="en-US" altLang="en-US">
-                <a:solidFill>
-                  <a:srgbClr val="24333D"/>
-                </a:solidFill>
-                <a:latin typeface="Sarabun"/>
-                <a:ea typeface="Sarabun"/>
-                <a:cs typeface="Sarabun"/>
-              </a:rPr>
-              <a:t> sìi and </a:t>
-            </a:r>
-            <a:r>
-              <a:rPr sz="1600" b="0" i="0" lang="th-TH" altLang="en-US">
-                <a:solidFill>
-                  <a:srgbClr val="24333D"/>
-                </a:solidFill>
-                <a:latin typeface="Sarabun"/>
-                <a:ea typeface="Sarabun"/>
-                <a:cs typeface="Sarabun"/>
-              </a:rPr>
-              <a:t>สี</a:t>
-            </a:r>
-            <a:r>
-              <a:rPr sz="1500" b="0" i="1" lang="en-US" altLang="en-US">
-                <a:solidFill>
-                  <a:srgbClr val="566873"/>
-                </a:solidFill>
-                <a:latin typeface="Sarabun"/>
-                <a:ea typeface="Sarabun"/>
-                <a:cs typeface="Sarabun"/>
-              </a:rPr>
-              <a:t> (sǐi)</a:t>
-            </a:r>
-            <a:r>
-              <a:rPr sz="1600" b="0" i="0" lang="en-US" altLang="en-US">
-                <a:solidFill>
-                  <a:srgbClr val="24333D"/>
-                </a:solidFill>
-                <a:latin typeface="Sarabun"/>
-                <a:ea typeface="Sarabun"/>
-                <a:cs typeface="Sarabun"/>
-              </a:rPr>
-              <a:t> sǐi? Low tone means four. Rising tone means colour.</a:t>
+              <a:t>Say 'I am 8 years old' in Thai.</a:t>
             </a:r>
           </a:p>
         </p:txBody>
@@ -7875,6 +7006,28 @@
           <a:p>
             <a:pPr algn="l"/>
             <a:r>
+              <a:rPr sz="1600" b="0" i="0" lang="th-TH" altLang="en-US">
+                <a:solidFill>
+                  <a:srgbClr val="24333D"/>
+                </a:solidFill>
+                <a:latin typeface="Sarabun"/>
+                <a:ea typeface="Sarabun"/>
+                <a:cs typeface="Sarabun"/>
+              </a:rPr>
+              <a:t>สี่</a:t>
+            </a:r>
+            <a:r>
+              <a:rPr sz="1500" b="0" i="1" lang="en-US" altLang="en-US">
+                <a:solidFill>
+                  <a:srgbClr val="566873"/>
+                </a:solidFill>
+                <a:latin typeface="Sarabun"/>
+                <a:ea typeface="Sarabun"/>
+                <a:cs typeface="Sarabun"/>
+              </a:rPr>
+              <a:t> (sìi)</a:t>
+            </a:r>
+            <a:r>
               <a:rPr sz="1600" b="0" i="0" lang="en-US" altLang="en-US">
                 <a:solidFill>
                   <a:srgbClr val="24333D"/>
@@ -7883,73 +7036,7 @@
                 <a:ea typeface="Sarabun"/>
                 <a:cs typeface="Sarabun"/>
               </a:rPr>
-              <a:t>If you miss a number, what do you say? </a:t>
-            </a:r>
-            <a:r>
-              <a:rPr sz="1600" b="0" i="0" lang="th-TH" altLang="en-US">
-                <a:solidFill>
-                  <a:srgbClr val="24333D"/>
-                </a:solidFill>
-                <a:latin typeface="Sarabun"/>
-                <a:ea typeface="Sarabun"/>
-                <a:cs typeface="Sarabun"/>
-              </a:rPr>
-              <a:t>ขอโทษ</a:t>
-            </a:r>
-            <a:r>
-              <a:rPr sz="1500" b="0" i="1" lang="en-US" altLang="en-US">
-                <a:solidFill>
-                  <a:srgbClr val="566873"/>
-                </a:solidFill>
-                <a:latin typeface="Sarabun"/>
-                <a:ea typeface="Sarabun"/>
-                <a:cs typeface="Sarabun"/>
-              </a:rPr>
-              <a:t> (khǎaw-thôot)</a:t>
-            </a:r>
-            <a:r>
-              <a:rPr sz="1600" b="0" i="0" lang="th-TH" altLang="en-US">
-                <a:solidFill>
-                  <a:srgbClr val="24333D"/>
-                </a:solidFill>
-                <a:latin typeface="Sarabun"/>
-                <a:ea typeface="Sarabun"/>
-                <a:cs typeface="Sarabun"/>
-              </a:rPr>
-              <a:t>ครับ or </a:t>
-            </a:r>
-            <a:r>
-              <a:rPr sz="1600" b="0" i="0" lang="th-TH" altLang="en-US">
-                <a:solidFill>
-                  <a:srgbClr val="24333D"/>
-                </a:solidFill>
-                <a:latin typeface="Sarabun"/>
-                <a:ea typeface="Sarabun"/>
-                <a:cs typeface="Sarabun"/>
-              </a:rPr>
-              <a:t>ขอโทษ</a:t>
-            </a:r>
-            <a:r>
-              <a:rPr sz="1500" b="0" i="1" lang="en-US" altLang="en-US">
-                <a:solidFill>
-                  <a:srgbClr val="566873"/>
-                </a:solidFill>
-                <a:latin typeface="Sarabun"/>
-                <a:ea typeface="Sarabun"/>
-                <a:cs typeface="Sarabun"/>
-              </a:rPr>
-              <a:t> (khǎaw-thôot)</a:t>
-            </a:r>
-            <a:r>
-              <a:rPr sz="1600" b="0" i="0" lang="th-TH" altLang="en-US">
-                <a:solidFill>
-                  <a:srgbClr val="24333D"/>
-                </a:solidFill>
-                <a:latin typeface="Sarabun"/>
-                <a:ea typeface="Sarabun"/>
-                <a:cs typeface="Sarabun"/>
-              </a:rPr>
-              <a:t>ค่ะ, then listen again.</a:t>
+              <a:t> has a low tone. What happens with a rising tone?</a:t>
             </a:r>
           </a:p>
         </p:txBody>

--- a/course/modules/M01/L004/M01-L004-canva-deck.pptx
+++ b/course/modules/M01/L004/M01-L004-canva-deck.pptx
@@ -14,7 +14,6 @@
     <p:sldId id="262" r:id="rId13"/>
     <p:sldId id="263" r:id="rId14"/>
     <p:sldId id="264" r:id="rId15"/>
-    <p:sldId id="265" r:id="rId16"/>
   </p:sldIdLst>
   <p:sldSz cx="12191695" cy="6858000" type="screen4x3"/>
   <p:notesSz cx="6858000" cy="9144000"/>
@@ -3334,290 +3333,6 @@
 </p:sld>
 </file>
 
-<file path=ppt/slides/slide10.xml><?xml version="1.0" encoding="utf-8"?>
-<p:sld xmlns:a="http://schemas.openxmlformats.org/drawingml/2006/main" xmlns:p="http://schemas.openxmlformats.org/presentationml/2006/main" xmlns:r="http://schemas.openxmlformats.org/officeDocument/2006/relationships">
-  <p:cSld>
-    <p:spTree>
-      <p:nvGrpSpPr>
-        <p:cNvPr id="1" name=""/>
-        <p:cNvGrpSpPr/>
-        <p:nvPr/>
-      </p:nvGrpSpPr>
-      <p:grpSpPr/>
-      <p:pic>
-        <p:nvPicPr>
-          <p:cNvPr id="2" name="Picture 1" descr="slide-01.png"/>
-          <p:cNvPicPr>
-            <a:picLocks noChangeAspect="1"/>
-          </p:cNvPicPr>
-          <p:nvPr/>
-        </p:nvPicPr>
-        <p:blipFill>
-          <a:blip r:embed="rId2"/>
-          <a:stretch>
-            <a:fillRect/>
-          </a:stretch>
-        </p:blipFill>
-        <p:spPr>
-          <a:xfrm>
-            <a:off x="0" y="0"/>
-            <a:ext cx="12191695" cy="6858000"/>
-          </a:xfrm>
-          <a:prstGeom prst="rect">
-            <a:avLst/>
-          </a:prstGeom>
-        </p:spPr>
-      </p:pic>
-      <p:sp>
-        <p:nvSpPr>
-          <p:cNvPr id="3" name="TextBox 2"/>
-          <p:cNvSpPr txBox="1"/>
-          <p:nvPr/>
-        </p:nvSpPr>
-        <p:spPr>
-          <a:xfrm>
-            <a:off x="731520" y="1371600"/>
-            <a:ext cx="6858000" cy="365760"/>
-          </a:xfrm>
-          <a:prstGeom prst="rect">
-            <a:avLst/>
-          </a:prstGeom>
-          <a:noFill/>
-        </p:spPr>
-        <p:txBody>
-          <a:bodyPr wrap="square" anchor="t">
-            <a:spAutoFit/>
-          </a:bodyPr>
-          <a:lstStyle/>
-          <a:p>
-            <a:pPr algn="l"/>
-            <a:r>
-              <a:rPr sz="1900" b="0" i="0" lang="en-US" altLang="en-US">
-                <a:solidFill>
-                  <a:srgbClr val="566873"/>
-                </a:solidFill>
-                <a:latin typeface="Sarabun"/>
-                <a:ea typeface="Sarabun"/>
-                <a:cs typeface="Sarabun"/>
-              </a:rPr>
-              <a:t>M01-L004</a:t>
-            </a:r>
-          </a:p>
-        </p:txBody>
-      </p:sp>
-      <p:sp>
-        <p:nvSpPr>
-          <p:cNvPr id="4" name="TextBox 3"/>
-          <p:cNvSpPr txBox="1"/>
-          <p:nvPr/>
-        </p:nvSpPr>
-        <p:spPr>
-          <a:xfrm>
-            <a:off x="731520" y="1920240"/>
-            <a:ext cx="6858000" cy="914400"/>
-          </a:xfrm>
-          <a:prstGeom prst="rect">
-            <a:avLst/>
-          </a:prstGeom>
-          <a:noFill/>
-        </p:spPr>
-        <p:txBody>
-          <a:bodyPr wrap="square" anchor="t">
-            <a:spAutoFit/>
-          </a:bodyPr>
-          <a:lstStyle/>
-          <a:p>
-            <a:pPr algn="l"/>
-            <a:r>
-              <a:rPr sz="3800" b="1" i="0" lang="en-US" altLang="en-US">
-                <a:solidFill>
-                  <a:srgbClr val="24333D"/>
-                </a:solidFill>
-                <a:latin typeface="Sarabun"/>
-                <a:ea typeface="Sarabun"/>
-                <a:cs typeface="Sarabun"/>
-              </a:rPr>
-              <a:t>Closing</a:t>
-            </a:r>
-          </a:p>
-        </p:txBody>
-      </p:sp>
-      <p:sp>
-        <p:nvSpPr>
-          <p:cNvPr id="5" name="TextBox 4"/>
-          <p:cNvSpPr txBox="1"/>
-          <p:nvPr/>
-        </p:nvSpPr>
-        <p:spPr>
-          <a:xfrm>
-            <a:off x="731520" y="3200400"/>
-            <a:ext cx="6858000" cy="411480"/>
-          </a:xfrm>
-          <a:prstGeom prst="rect">
-            <a:avLst/>
-          </a:prstGeom>
-          <a:noFill/>
-        </p:spPr>
-        <p:txBody>
-          <a:bodyPr wrap="square" anchor="t">
-            <a:spAutoFit/>
-          </a:bodyPr>
-          <a:lstStyle/>
-          <a:p>
-            <a:pPr algn="l"/>
-            <a:r>
-              <a:rPr sz="1600" b="0" i="0" lang="en-US" altLang="en-US">
-                <a:solidFill>
-                  <a:srgbClr val="24333D"/>
-                </a:solidFill>
-                <a:latin typeface="Sarabun"/>
-                <a:ea typeface="Sarabun"/>
-                <a:cs typeface="Sarabun"/>
-              </a:rPr>
-              <a:t>By the end, you can hear, repeat, and produce Thai digits 0-10 in room-number, counting, and simple age exchanges.</a:t>
-            </a:r>
-          </a:p>
-        </p:txBody>
-      </p:sp>
-      <p:sp>
-        <p:nvSpPr>
-          <p:cNvPr id="6" name="TextBox 5"/>
-          <p:cNvSpPr txBox="1"/>
-          <p:nvPr/>
-        </p:nvSpPr>
-        <p:spPr>
-          <a:xfrm>
-            <a:off x="731520" y="3657600"/>
-            <a:ext cx="6858000" cy="411480"/>
-          </a:xfrm>
-          <a:prstGeom prst="rect">
-            <a:avLst/>
-          </a:prstGeom>
-          <a:noFill/>
-        </p:spPr>
-        <p:txBody>
-          <a:bodyPr wrap="square" anchor="t">
-            <a:spAutoFit/>
-          </a:bodyPr>
-          <a:lstStyle/>
-          <a:p>
-            <a:pPr algn="l"/>
-            <a:r>
-              <a:rPr sz="1600" b="0" i="0" lang="en-US" altLang="en-US">
-                <a:solidFill>
-                  <a:srgbClr val="24333D"/>
-                </a:solidFill>
-                <a:latin typeface="Sarabun"/>
-                <a:ea typeface="Sarabun"/>
-                <a:cs typeface="Sarabun"/>
-              </a:rPr>
-              <a:t>Next: First Contact and Courtesy continues.</a:t>
-            </a:r>
-          </a:p>
-        </p:txBody>
-      </p:sp>
-      <p:sp>
-        <p:nvSpPr>
-          <p:cNvPr id="7" name="TextBox 6"/>
-          <p:cNvSpPr txBox="1"/>
-          <p:nvPr/>
-        </p:nvSpPr>
-        <p:spPr>
-          <a:xfrm>
-            <a:off x="731520" y="5303520"/>
-            <a:ext cx="6858000" cy="365760"/>
-          </a:xfrm>
-          <a:prstGeom prst="rect">
-            <a:avLst/>
-          </a:prstGeom>
-          <a:noFill/>
-        </p:spPr>
-        <p:txBody>
-          <a:bodyPr wrap="square" anchor="t">
-            <a:spAutoFit/>
-          </a:bodyPr>
-          <a:lstStyle/>
-          <a:p>
-            <a:pPr algn="l"/>
-            <a:r>
-              <a:rPr sz="1500" b="0" i="0" lang="en-US" altLang="en-US">
-                <a:solidFill>
-                  <a:srgbClr val="566873"/>
-                </a:solidFill>
-                <a:latin typeface="Sarabun"/>
-                <a:ea typeface="Sarabun"/>
-                <a:cs typeface="Sarabun"/>
-              </a:rPr>
-              <a:t>Immersion Thai with Nine</a:t>
-            </a:r>
-          </a:p>
-        </p:txBody>
-      </p:sp>
-      <p:sp>
-        <p:nvSpPr>
-          <p:cNvPr id="8" name="__pip_placeholder__"/>
-          <p:cNvSpPr/>
-          <p:nvPr/>
-        </p:nvSpPr>
-        <p:spPr>
-          <a:xfrm>
-            <a:off x="8351215" y="0"/>
-            <a:ext cx="3840480" cy="2880360"/>
-          </a:xfrm>
-          <a:prstGeom prst="rect">
-            <a:avLst/>
-          </a:prstGeom>
-          <a:solidFill>
-            <a:srgbClr val="DBE7EC">
-              <a:alpha val="30000"/>
-            </a:srgbClr>
-          </a:solidFill>
-          <a:ln w="19050">
-            <a:solidFill>
-              <a:srgbClr val="355C7D"/>
-            </a:solidFill>
-            <a:prstDash val="sysDash"/>
-          </a:ln>
-        </p:spPr>
-        <p:style>
-          <a:lnRef idx="1">
-            <a:schemeClr val="accent1"/>
-          </a:lnRef>
-          <a:fillRef idx="3">
-            <a:schemeClr val="accent1"/>
-          </a:fillRef>
-          <a:effectRef idx="2">
-            <a:schemeClr val="accent1"/>
-          </a:effectRef>
-          <a:fontRef idx="minor">
-            <a:schemeClr val="lt1"/>
-          </a:fontRef>
-        </p:style>
-        <p:txBody>
-          <a:bodyPr rtlCol="0" anchor="ctr" wrap="none"/>
-          <a:lstStyle/>
-          <a:p>
-            <a:pPr algn="ctr"/>
-            <a:r>
-              <a:rPr sz="1800" b="1">
-                <a:solidFill>
-                  <a:srgbClr val="355C7D"/>
-                </a:solidFill>
-                <a:latin typeface="Sarabun"/>
-              </a:rPr>
-              <a:t>Nine</a:t>
-            </a:r>
-          </a:p>
-        </p:txBody>
-      </p:sp>
-    </p:spTree>
-  </p:cSld>
-  <p:clrMapOvr>
-    <a:masterClrMapping/>
-  </p:clrMapOvr>
-</p:sld>
-</file>
-
 <file path=ppt/slides/slide2.xml><?xml version="1.0" encoding="utf-8"?>
 <p:sld xmlns:a="http://schemas.openxmlformats.org/drawingml/2006/main" xmlns:p="http://schemas.openxmlformats.org/presentationml/2006/main" xmlns:r="http://schemas.openxmlformats.org/officeDocument/2006/relationships">
   <p:cSld>
@@ -4005,7 +3720,7 @@
                 <a:ea typeface="Sarabun"/>
                 <a:cs typeface="Sarabun"/>
               </a:rPr>
-              <a:t>The first six digits: 0 to 5</a:t>
+              <a:t>Digits 0 to 5</a:t>
             </a:r>
           </a:p>
         </p:txBody>
@@ -4127,7 +3842,7 @@
                 <a:ea typeface="Sarabun"/>
                 <a:cs typeface="Sarabun"/>
               </a:rPr>
-              <a:t>ศูนย์ | sǔun | zero</a:t>
+              <a:t>ศูนย์ | sǔun | 0 — zero</a:t>
             </a:r>
           </a:p>
           <a:p>
@@ -4141,7 +3856,7 @@
                 <a:ea typeface="Sarabun"/>
                 <a:cs typeface="Sarabun"/>
               </a:rPr>
-              <a:t>หนึ่ง | nùeng | one</a:t>
+              <a:t>หนึ่ง | nùeng | 1 — one</a:t>
             </a:r>
           </a:p>
         </p:txBody>
@@ -4314,7 +4029,7 @@
                 <a:ea typeface="Sarabun"/>
                 <a:cs typeface="Sarabun"/>
               </a:rPr>
-              <a:t>Finish the set: 6 to 10</a:t>
+              <a:t>Digits 6 to 10</a:t>
             </a:r>
           </a:p>
         </p:txBody>
@@ -4436,7 +4151,7 @@
                 <a:ea typeface="Sarabun"/>
                 <a:cs typeface="Sarabun"/>
               </a:rPr>
-              <a:t>หก | hòk | six</a:t>
+              <a:t>หก | hòk | 6 — six</a:t>
             </a:r>
           </a:p>
           <a:p>
@@ -4450,7 +4165,7 @@
                 <a:ea typeface="Sarabun"/>
                 <a:cs typeface="Sarabun"/>
               </a:rPr>
-              <a:t>เจ็ด | jèt | seven</a:t>
+              <a:t>เจ็ด | jèt | 7 — seven</a:t>
             </a:r>
           </a:p>
         </p:txBody>
@@ -4562,7 +4277,7 @@
         </p:nvSpPr>
         <p:spPr>
           <a:xfrm>
-            <a:off x="731527" y="694913"/>
+            <a:off x="731527" y="642588"/>
             <a:ext cx="1210500" cy="320100"/>
           </a:xfrm>
           <a:prstGeom prst="rect">
@@ -4599,7 +4314,7 @@
         </p:nvSpPr>
         <p:spPr>
           <a:xfrm>
-            <a:off x="2063268" y="552443"/>
+            <a:off x="2063268" y="505418"/>
             <a:ext cx="5943600" cy="457200"/>
           </a:xfrm>
           <a:prstGeom prst="rect">
@@ -4636,7 +4351,7 @@
         </p:nvSpPr>
         <p:spPr>
           <a:xfrm>
-            <a:off x="731520" y="1051560"/>
+            <a:off x="731520" y="1075703"/>
             <a:ext cx="6858000" cy="365700"/>
           </a:xfrm>
           <a:prstGeom prst="rect">
@@ -4660,7 +4375,73 @@
                 <a:ea typeface="Sarabun"/>
                 <a:cs typeface="Sarabun"/>
               </a:rPr>
-              <a:t>Anchor digit use in a real-world number context and show the age pattern as a fill-in frame.</a:t>
+              <a:t>Show the two practical patterns: </a:t>
+            </a:r>
+            <a:r>
+              <a:rPr sz="1500" b="0" i="0" lang="th-TH" altLang="en-US">
+                <a:solidFill>
+                  <a:srgbClr val="566873"/>
+                </a:solidFill>
+                <a:latin typeface="Sarabun"/>
+                <a:ea typeface="Sarabun"/>
+                <a:cs typeface="Sarabun"/>
+              </a:rPr>
+              <a:t>เบอร์อะไร</a:t>
+            </a:r>
+            <a:r>
+              <a:rPr sz="1500" b="0" i="1" lang="en-US" altLang="en-US">
+                <a:solidFill>
+                  <a:srgbClr val="566873"/>
+                </a:solidFill>
+                <a:latin typeface="Sarabun"/>
+                <a:ea typeface="Sarabun"/>
+                <a:cs typeface="Sarabun"/>
+              </a:rPr>
+              <a:t> (ber à-rai)</a:t>
+            </a:r>
+            <a:r>
+              <a:rPr sz="1500" b="0" i="0" lang="en-US" altLang="en-US">
+                <a:solidFill>
+                  <a:srgbClr val="566873"/>
+                </a:solidFill>
+                <a:latin typeface="Sarabun"/>
+                <a:ea typeface="Sarabun"/>
+                <a:cs typeface="Sarabun"/>
+              </a:rPr>
+              <a:t> question and </a:t>
+            </a:r>
+            <a:r>
+              <a:rPr sz="1500" b="0" i="0" lang="th-TH" altLang="en-US">
+                <a:solidFill>
+                  <a:srgbClr val="566873"/>
+                </a:solidFill>
+                <a:latin typeface="Sarabun"/>
+                <a:ea typeface="Sarabun"/>
+                <a:cs typeface="Sarabun"/>
+              </a:rPr>
+              <a:t>อายุ...ปี</a:t>
+            </a:r>
+            <a:r>
+              <a:rPr sz="1500" b="0" i="1" lang="en-US" altLang="en-US">
+                <a:solidFill>
+                  <a:srgbClr val="566873"/>
+                </a:solidFill>
+                <a:latin typeface="Sarabun"/>
+                <a:ea typeface="Sarabun"/>
+                <a:cs typeface="Sarabun"/>
+              </a:rPr>
+              <a:t> (aa-yú ... bpii)</a:t>
+            </a:r>
+            <a:r>
+              <a:rPr sz="1500" b="0" i="0" lang="en-US" altLang="en-US">
+                <a:solidFill>
+                  <a:srgbClr val="566873"/>
+                </a:solidFill>
+                <a:latin typeface="Sarabun"/>
+                <a:ea typeface="Sarabun"/>
+                <a:cs typeface="Sarabun"/>
+              </a:rPr>
+              <a:t> answer frame.</a:t>
             </a:r>
           </a:p>
         </p:txBody>
@@ -4673,8 +4454,8 @@
         </p:nvSpPr>
         <p:spPr>
           <a:xfrm>
-            <a:off x="1097280" y="1659140"/>
-            <a:ext cx="5029200" cy="858203"/>
+            <a:off x="1188720" y="1627632"/>
+            <a:ext cx="3200400" cy="658368"/>
           </a:xfrm>
           <a:prstGeom prst="rect">
             <a:avLst/>
@@ -4689,7 +4470,7 @@
           <a:p>
             <a:pPr algn="l"/>
             <a:r>
-              <a:rPr sz="2700" b="1" i="0" lang="th-TH" altLang="en-US">
+              <a:rPr sz="2300" b="1" i="0" lang="th-TH" altLang="en-US">
                 <a:solidFill>
                   <a:srgbClr val="24333D"/>
                 </a:solidFill>
@@ -4697,10 +4478,10 @@
                 <a:ea typeface="Sarabun"/>
                 <a:cs typeface="Sarabun"/>
               </a:rPr>
-              <a:t>เบอร์อะไร</a:t>
-            </a:r>
-            <a:r>
-              <a:rPr sz="1670" b="0" i="1" lang="en-US" altLang="en-US">
+              <a:t>1. เบอร์อะไร</a:t>
+            </a:r>
+            <a:r>
+              <a:rPr sz="1500" b="0" i="1" lang="en-US" altLang="en-US">
                 <a:solidFill>
                   <a:srgbClr val="566873"/>
                 </a:solidFill>
@@ -4721,8 +4502,8 @@
         </p:nvSpPr>
         <p:spPr>
           <a:xfrm>
-            <a:off x="1097280" y="2475000"/>
-            <a:ext cx="5029200" cy="280000"/>
+            <a:off x="4846320" y="1737360"/>
+            <a:ext cx="2286000" cy="365760"/>
           </a:xfrm>
           <a:prstGeom prst="rect">
             <a:avLst/>
@@ -4737,15 +4518,37 @@
           <a:p>
             <a:pPr algn="l"/>
             <a:r>
-              <a:rPr sz="1500" b="0" i="0" lang="en-US" altLang="en-US">
-                <a:solidFill>
-                  <a:srgbClr val="82909A"/>
-                </a:solidFill>
-                <a:latin typeface="Sarabun"/>
-                <a:ea typeface="Sarabun"/>
-                <a:cs typeface="Sarabun"/>
-              </a:rPr>
-              <a:t>what number?</a:t>
+              <a:rPr sz="1300" b="1" i="0" lang="th-TH" altLang="en-US">
+                <a:solidFill>
+                  <a:srgbClr val="24333D"/>
+                </a:solidFill>
+                <a:latin typeface="Sarabun"/>
+                <a:ea typeface="Sarabun"/>
+                <a:cs typeface="Sarabun"/>
+              </a:rPr>
+              <a:t>เบอร์อะไร</a:t>
+            </a:r>
+            <a:r>
+              <a:rPr sz="1500" b="0" i="1" lang="en-US" altLang="en-US">
+                <a:solidFill>
+                  <a:srgbClr val="566873"/>
+                </a:solidFill>
+                <a:latin typeface="Sarabun"/>
+                <a:ea typeface="Sarabun"/>
+                <a:cs typeface="Sarabun"/>
+              </a:rPr>
+              <a:t> (ber à-rai)</a:t>
+            </a:r>
+            <a:r>
+              <a:rPr sz="1300" b="1" i="0" lang="en-US" altLang="en-US">
+                <a:solidFill>
+                  <a:srgbClr val="24333D"/>
+                </a:solidFill>
+                <a:latin typeface="Sarabun"/>
+                <a:ea typeface="Sarabun"/>
+                <a:cs typeface="Sarabun"/>
+              </a:rPr>
+              <a:t> | ber à-rai | what number?</a:t>
             </a:r>
           </a:p>
         </p:txBody>
@@ -4758,8 +4561,8 @@
         </p:nvSpPr>
         <p:spPr>
           <a:xfrm>
-            <a:off x="1097280" y="3063303"/>
-            <a:ext cx="5029200" cy="845740"/>
+            <a:off x="1188720" y="2478024"/>
+            <a:ext cx="3200400" cy="658368"/>
           </a:xfrm>
           <a:prstGeom prst="rect">
             <a:avLst/>
@@ -4774,7 +4577,7 @@
           <a:p>
             <a:pPr algn="l"/>
             <a:r>
-              <a:rPr sz="2700" b="1" i="0" lang="th-TH" altLang="en-US">
+              <a:rPr sz="2300" b="1" i="0" lang="th-TH" altLang="en-US">
                 <a:solidFill>
                   <a:srgbClr val="24333D"/>
                 </a:solidFill>
@@ -4782,10 +4585,10 @@
                 <a:ea typeface="Sarabun"/>
                 <a:cs typeface="Sarabun"/>
               </a:rPr>
-              <a:t>ฉันอายุ...ปี</a:t>
-            </a:r>
-            <a:r>
-              <a:rPr sz="1670" b="0" i="1" lang="en-US" altLang="en-US">
+              <a:t>2. อายุ</a:t>
+            </a:r>
+            <a:r>
+              <a:rPr sz="1500" b="0" i="1" lang="en-US" altLang="en-US">
                 <a:solidFill>
                   <a:srgbClr val="566873"/>
                 </a:solidFill>
@@ -4793,7 +4596,7 @@
                 <a:ea typeface="Sarabun"/>
                 <a:cs typeface="Sarabun"/>
               </a:rPr>
-              <a:t> (chǎn aa-yú ... bpii)</a:t>
+              <a:t> (aa-yú)</a:t>
             </a:r>
           </a:p>
         </p:txBody>
@@ -4806,8 +4609,8 @@
         </p:nvSpPr>
         <p:spPr>
           <a:xfrm>
-            <a:off x="1097280" y="3865000"/>
-            <a:ext cx="5029200" cy="280000"/>
+            <a:off x="4846320" y="2587752"/>
+            <a:ext cx="2286000" cy="365760"/>
           </a:xfrm>
           <a:prstGeom prst="rect">
             <a:avLst/>
@@ -4822,22 +4625,343 @@
           <a:p>
             <a:pPr algn="l"/>
             <a:r>
-              <a:rPr sz="1500" b="0" i="0" lang="en-US" altLang="en-US">
-                <a:solidFill>
-                  <a:srgbClr val="82909A"/>
-                </a:solidFill>
-                <a:latin typeface="Sarabun"/>
-                <a:ea typeface="Sarabun"/>
-                <a:cs typeface="Sarabun"/>
-              </a:rPr>
-              <a:t>I am ... years old</a:t>
-            </a:r>
-          </a:p>
-        </p:txBody>
-      </p:sp>
-      <p:sp>
-        <p:nvSpPr>
-          <p:cNvPr id="10" name="__pip_placeholder__"/>
+              <a:rPr sz="1300" b="1" i="0" lang="th-TH" altLang="en-US">
+                <a:solidFill>
+                  <a:srgbClr val="24333D"/>
+                </a:solidFill>
+                <a:latin typeface="Sarabun"/>
+                <a:ea typeface="Sarabun"/>
+                <a:cs typeface="Sarabun"/>
+              </a:rPr>
+              <a:t>อายุ...ปี</a:t>
+            </a:r>
+            <a:r>
+              <a:rPr sz="1500" b="0" i="1" lang="en-US" altLang="en-US">
+                <a:solidFill>
+                  <a:srgbClr val="566873"/>
+                </a:solidFill>
+                <a:latin typeface="Sarabun"/>
+                <a:ea typeface="Sarabun"/>
+                <a:cs typeface="Sarabun"/>
+              </a:rPr>
+              <a:t> (aa-yú ... bpii)</a:t>
+            </a:r>
+            <a:r>
+              <a:rPr sz="1300" b="1" i="0" lang="en-US" altLang="en-US">
+                <a:solidFill>
+                  <a:srgbClr val="24333D"/>
+                </a:solidFill>
+                <a:latin typeface="Sarabun"/>
+                <a:ea typeface="Sarabun"/>
+                <a:cs typeface="Sarabun"/>
+              </a:rPr>
+              <a:t> | aa-yú ... bpii | ... years old</a:t>
+            </a:r>
+          </a:p>
+        </p:txBody>
+      </p:sp>
+      <p:sp>
+        <p:nvSpPr>
+          <p:cNvPr id="10" name="TextBox 9"/>
+          <p:cNvSpPr txBox="1"/>
+          <p:nvPr/>
+        </p:nvSpPr>
+        <p:spPr>
+          <a:xfrm>
+            <a:off x="1188720" y="3328416"/>
+            <a:ext cx="3200400" cy="658368"/>
+          </a:xfrm>
+          <a:prstGeom prst="rect">
+            <a:avLst/>
+          </a:prstGeom>
+          <a:noFill/>
+        </p:spPr>
+        <p:txBody>
+          <a:bodyPr wrap="square" anchor="t">
+            <a:spAutoFit/>
+          </a:bodyPr>
+          <a:lstStyle/>
+          <a:p>
+            <a:pPr algn="l"/>
+            <a:r>
+              <a:rPr sz="2300" b="1" i="0" lang="th-TH" altLang="en-US">
+                <a:solidFill>
+                  <a:srgbClr val="24333D"/>
+                </a:solidFill>
+                <a:latin typeface="Sarabun"/>
+                <a:ea typeface="Sarabun"/>
+                <a:cs typeface="Sarabun"/>
+              </a:rPr>
+              <a:t>3. ปี</a:t>
+            </a:r>
+            <a:r>
+              <a:rPr sz="1500" b="0" i="1" lang="en-US" altLang="en-US">
+                <a:solidFill>
+                  <a:srgbClr val="566873"/>
+                </a:solidFill>
+                <a:latin typeface="Sarabun"/>
+                <a:ea typeface="Sarabun"/>
+                <a:cs typeface="Sarabun"/>
+              </a:rPr>
+              <a:t> (bpii)</a:t>
+            </a:r>
+          </a:p>
+        </p:txBody>
+      </p:sp>
+      <p:sp>
+        <p:nvSpPr>
+          <p:cNvPr id="11" name="TextBox 10"/>
+          <p:cNvSpPr txBox="1"/>
+          <p:nvPr/>
+        </p:nvSpPr>
+        <p:spPr>
+          <a:xfrm>
+            <a:off x="4846320" y="3438144"/>
+            <a:ext cx="2286000" cy="365760"/>
+          </a:xfrm>
+          <a:prstGeom prst="rect">
+            <a:avLst/>
+          </a:prstGeom>
+          <a:noFill/>
+        </p:spPr>
+        <p:txBody>
+          <a:bodyPr wrap="square" anchor="t">
+            <a:spAutoFit/>
+          </a:bodyPr>
+          <a:lstStyle/>
+          <a:p>
+            <a:pPr algn="l"/>
+            <a:r>
+              <a:rPr sz="1300" b="1" i="0" lang="th-TH" altLang="en-US">
+                <a:solidFill>
+                  <a:srgbClr val="24333D"/>
+                </a:solidFill>
+                <a:latin typeface="Sarabun"/>
+                <a:ea typeface="Sarabun"/>
+                <a:cs typeface="Sarabun"/>
+              </a:rPr>
+              <a:t>ผมอายุ...ปี</a:t>
+            </a:r>
+            <a:r>
+              <a:rPr sz="1500" b="0" i="1" lang="en-US" altLang="en-US">
+                <a:solidFill>
+                  <a:srgbClr val="566873"/>
+                </a:solidFill>
+                <a:latin typeface="Sarabun"/>
+                <a:ea typeface="Sarabun"/>
+                <a:cs typeface="Sarabun"/>
+              </a:rPr>
+              <a:t> (phǒm aa-yú ... bpii)</a:t>
+            </a:r>
+            <a:r>
+              <a:rPr sz="1300" b="1" i="0" lang="en-US" altLang="en-US">
+                <a:solidFill>
+                  <a:srgbClr val="24333D"/>
+                </a:solidFill>
+                <a:latin typeface="Sarabun"/>
+                <a:ea typeface="Sarabun"/>
+                <a:cs typeface="Sarabun"/>
+              </a:rPr>
+              <a:t> | phǒm aa-yú ... bpii | I am ... years old (male)</a:t>
+            </a:r>
+          </a:p>
+        </p:txBody>
+      </p:sp>
+      <p:sp>
+        <p:nvSpPr>
+          <p:cNvPr id="12" name="TextBox 11"/>
+          <p:cNvSpPr txBox="1"/>
+          <p:nvPr/>
+        </p:nvSpPr>
+        <p:spPr>
+          <a:xfrm>
+            <a:off x="1188720" y="4178808"/>
+            <a:ext cx="3200400" cy="658368"/>
+          </a:xfrm>
+          <a:prstGeom prst="rect">
+            <a:avLst/>
+          </a:prstGeom>
+          <a:noFill/>
+        </p:spPr>
+        <p:txBody>
+          <a:bodyPr wrap="square" anchor="t">
+            <a:spAutoFit/>
+          </a:bodyPr>
+          <a:lstStyle/>
+          <a:p>
+            <a:pPr algn="l"/>
+            <a:r>
+              <a:rPr sz="2300" b="1" i="0" lang="th-TH" altLang="en-US">
+                <a:solidFill>
+                  <a:srgbClr val="24333D"/>
+                </a:solidFill>
+                <a:latin typeface="Sarabun"/>
+                <a:ea typeface="Sarabun"/>
+                <a:cs typeface="Sarabun"/>
+              </a:rPr>
+              <a:t>4. สิบ</a:t>
+            </a:r>
+            <a:r>
+              <a:rPr sz="1500" b="0" i="1" lang="en-US" altLang="en-US">
+                <a:solidFill>
+                  <a:srgbClr val="566873"/>
+                </a:solidFill>
+                <a:latin typeface="Sarabun"/>
+                <a:ea typeface="Sarabun"/>
+                <a:cs typeface="Sarabun"/>
+              </a:rPr>
+              <a:t> (sìp)</a:t>
+            </a:r>
+          </a:p>
+        </p:txBody>
+      </p:sp>
+      <p:sp>
+        <p:nvSpPr>
+          <p:cNvPr id="13" name="TextBox 12"/>
+          <p:cNvSpPr txBox="1"/>
+          <p:nvPr/>
+        </p:nvSpPr>
+        <p:spPr>
+          <a:xfrm>
+            <a:off x="4846320" y="4288536"/>
+            <a:ext cx="2286000" cy="365760"/>
+          </a:xfrm>
+          <a:prstGeom prst="rect">
+            <a:avLst/>
+          </a:prstGeom>
+          <a:noFill/>
+        </p:spPr>
+        <p:txBody>
+          <a:bodyPr wrap="square" anchor="t">
+            <a:spAutoFit/>
+          </a:bodyPr>
+          <a:lstStyle/>
+          <a:p>
+            <a:pPr algn="l"/>
+            <a:r>
+              <a:rPr sz="1300" b="1" i="0" lang="th-TH" altLang="en-US">
+                <a:solidFill>
+                  <a:srgbClr val="24333D"/>
+                </a:solidFill>
+                <a:latin typeface="Sarabun"/>
+                <a:ea typeface="Sarabun"/>
+                <a:cs typeface="Sarabun"/>
+              </a:rPr>
+              <a:t>ฉันอายุ...ปี</a:t>
+            </a:r>
+            <a:r>
+              <a:rPr sz="1500" b="0" i="1" lang="en-US" altLang="en-US">
+                <a:solidFill>
+                  <a:srgbClr val="566873"/>
+                </a:solidFill>
+                <a:latin typeface="Sarabun"/>
+                <a:ea typeface="Sarabun"/>
+                <a:cs typeface="Sarabun"/>
+              </a:rPr>
+              <a:t> (chǎn aa-yú ... bpii)</a:t>
+            </a:r>
+            <a:r>
+              <a:rPr sz="1300" b="1" i="0" lang="en-US" altLang="en-US">
+                <a:solidFill>
+                  <a:srgbClr val="24333D"/>
+                </a:solidFill>
+                <a:latin typeface="Sarabun"/>
+                <a:ea typeface="Sarabun"/>
+                <a:cs typeface="Sarabun"/>
+              </a:rPr>
+              <a:t> | chǎn aa-yú ... bpii | I am ... years old (female)</a:t>
+            </a:r>
+          </a:p>
+        </p:txBody>
+      </p:sp>
+      <p:sp>
+        <p:nvSpPr>
+          <p:cNvPr id="14" name="TextBox 13"/>
+          <p:cNvSpPr txBox="1"/>
+          <p:nvPr/>
+        </p:nvSpPr>
+        <p:spPr>
+          <a:xfrm>
+            <a:off x="1188720" y="5029200"/>
+            <a:ext cx="3200400" cy="658368"/>
+          </a:xfrm>
+          <a:prstGeom prst="rect">
+            <a:avLst/>
+          </a:prstGeom>
+          <a:noFill/>
+        </p:spPr>
+        <p:txBody>
+          <a:bodyPr wrap="square" anchor="t">
+            <a:spAutoFit/>
+          </a:bodyPr>
+          <a:lstStyle/>
+          <a:p>
+            <a:pPr algn="l"/>
+            <a:r>
+              <a:rPr sz="2300" b="1" i="0" lang="th-TH" altLang="en-US">
+                <a:solidFill>
+                  <a:srgbClr val="24333D"/>
+                </a:solidFill>
+                <a:latin typeface="Sarabun"/>
+                <a:ea typeface="Sarabun"/>
+                <a:cs typeface="Sarabun"/>
+              </a:rPr>
+              <a:t>5. สวัสดี</a:t>
+            </a:r>
+            <a:r>
+              <a:rPr sz="1500" b="0" i="1" lang="en-US" altLang="en-US">
+                <a:solidFill>
+                  <a:srgbClr val="566873"/>
+                </a:solidFill>
+                <a:latin typeface="Sarabun"/>
+                <a:ea typeface="Sarabun"/>
+                <a:cs typeface="Sarabun"/>
+              </a:rPr>
+              <a:t> (sà-wàt-dii)</a:t>
+            </a:r>
+          </a:p>
+        </p:txBody>
+      </p:sp>
+      <p:sp>
+        <p:nvSpPr>
+          <p:cNvPr id="15" name="TextBox 14"/>
+          <p:cNvSpPr txBox="1"/>
+          <p:nvPr/>
+        </p:nvSpPr>
+        <p:spPr>
+          <a:xfrm>
+            <a:off x="4846320" y="5138928"/>
+            <a:ext cx="2286000" cy="365760"/>
+          </a:xfrm>
+          <a:prstGeom prst="rect">
+            <a:avLst/>
+          </a:prstGeom>
+          <a:noFill/>
+        </p:spPr>
+        <p:txBody>
+          <a:bodyPr wrap="square" anchor="t">
+            <a:spAutoFit/>
+          </a:bodyPr>
+          <a:lstStyle/>
+          <a:p>
+            <a:pPr algn="l"/>
+            <a:r>
+              <a:rPr sz="1300" b="1" i="0" lang="en-US" altLang="en-US">
+                <a:solidFill>
+                  <a:srgbClr val="24333D"/>
+                </a:solidFill>
+                <a:latin typeface="Sarabun"/>
+                <a:ea typeface="Sarabun"/>
+                <a:cs typeface="Sarabun"/>
+              </a:rPr>
+              <a:t>Practise aloud</a:t>
+            </a:r>
+          </a:p>
+        </p:txBody>
+      </p:sp>
+      <p:sp>
+        <p:nvSpPr>
+          <p:cNvPr id="16" name="__pip_placeholder__"/>
           <p:cNvSpPr/>
           <p:nvPr/>
         </p:nvSpPr>
@@ -4942,7 +5066,7 @@
         </p:nvSpPr>
         <p:spPr>
           <a:xfrm>
-            <a:off x="731527" y="642588"/>
+            <a:off x="731527" y="809138"/>
             <a:ext cx="1210500" cy="320100"/>
           </a:xfrm>
           <a:prstGeom prst="rect">
@@ -4979,8 +5103,8 @@
         </p:nvSpPr>
         <p:spPr>
           <a:xfrm>
-            <a:off x="2063268" y="505418"/>
-            <a:ext cx="5943600" cy="457200"/>
+            <a:off x="2029374" y="720278"/>
+            <a:ext cx="7030500" cy="621900"/>
           </a:xfrm>
           <a:prstGeom prst="rect">
             <a:avLst/>
@@ -5003,7 +5127,62 @@
                 <a:ea typeface="Sarabun"/>
                 <a:cs typeface="Sarabun"/>
               </a:rPr>
-              <a:t>Numbers in real exchanges</a:t>
+              <a:t>Pronunciation: </a:t>
+            </a:r>
+            <a:r>
+              <a:rPr sz="3000" b="1" i="0" lang="th-TH" altLang="en-US">
+                <a:solidFill>
+                  <a:srgbClr val="24333D"/>
+                </a:solidFill>
+                <a:latin typeface="Sarabun"/>
+                <a:ea typeface="Sarabun"/>
+                <a:cs typeface="Sarabun"/>
+              </a:rPr>
+              <a:t>สี่</a:t>
+            </a:r>
+            <a:r>
+              <a:rPr sz="1860" b="0" i="1" lang="en-US" altLang="en-US">
+                <a:solidFill>
+                  <a:srgbClr val="566873"/>
+                </a:solidFill>
+                <a:latin typeface="Sarabun"/>
+                <a:ea typeface="Sarabun"/>
+                <a:cs typeface="Sarabun"/>
+              </a:rPr>
+              <a:t> (sìi)</a:t>
+            </a:r>
+            <a:r>
+              <a:rPr sz="3000" b="1" i="0" lang="en-US" altLang="en-US">
+                <a:solidFill>
+                  <a:srgbClr val="24333D"/>
+                </a:solidFill>
+                <a:latin typeface="Sarabun"/>
+                <a:ea typeface="Sarabun"/>
+                <a:cs typeface="Sarabun"/>
+              </a:rPr>
+              <a:t> vs </a:t>
+            </a:r>
+            <a:r>
+              <a:rPr sz="3000" b="1" i="0" lang="th-TH" altLang="en-US">
+                <a:solidFill>
+                  <a:srgbClr val="24333D"/>
+                </a:solidFill>
+                <a:latin typeface="Sarabun"/>
+                <a:ea typeface="Sarabun"/>
+                <a:cs typeface="Sarabun"/>
+              </a:rPr>
+              <a:t>สี</a:t>
+            </a:r>
+            <a:r>
+              <a:rPr sz="1860" b="0" i="1" lang="en-US" altLang="en-US">
+                <a:solidFill>
+                  <a:srgbClr val="566873"/>
+                </a:solidFill>
+                <a:latin typeface="Sarabun"/>
+                <a:ea typeface="Sarabun"/>
+                <a:cs typeface="Sarabun"/>
+              </a:rPr>
+              <a:t> (sǐi)</a:t>
             </a:r>
           </a:p>
         </p:txBody>
@@ -5016,7 +5195,7 @@
         </p:nvSpPr>
         <p:spPr>
           <a:xfrm>
-            <a:off x="731520" y="1075703"/>
+            <a:off x="731520" y="1193328"/>
             <a:ext cx="6858000" cy="365700"/>
           </a:xfrm>
           <a:prstGeom prst="rect">
@@ -5040,7 +5219,40 @@
                 <a:ea typeface="Sarabun"/>
                 <a:cs typeface="Sarabun"/>
               </a:rPr>
-              <a:t>Show combined exchanges that use digits with pronouns and courtesy phrases as a unified system.</a:t>
+              <a:t>Contrast </a:t>
+            </a:r>
+            <a:r>
+              <a:rPr sz="1500" b="0" i="0" lang="th-TH" altLang="en-US">
+                <a:solidFill>
+                  <a:srgbClr val="566873"/>
+                </a:solidFill>
+                <a:latin typeface="Sarabun"/>
+                <a:ea typeface="Sarabun"/>
+                <a:cs typeface="Sarabun"/>
+              </a:rPr>
+              <a:t>สี</a:t>
+            </a:r>
+            <a:r>
+              <a:rPr sz="1500" b="0" i="1" lang="en-US" altLang="en-US">
+                <a:solidFill>
+                  <a:srgbClr val="566873"/>
+                </a:solidFill>
+                <a:latin typeface="Sarabun"/>
+                <a:ea typeface="Sarabun"/>
+                <a:cs typeface="Sarabun"/>
+              </a:rPr>
+              <a:t> (sǐi)</a:t>
+            </a:r>
+            <a:r>
+              <a:rPr sz="1500" b="0" i="0" lang="th-TH" altLang="en-US">
+                <a:solidFill>
+                  <a:srgbClr val="566873"/>
+                </a:solidFill>
+                <a:latin typeface="Sarabun"/>
+                <a:ea typeface="Sarabun"/>
+                <a:cs typeface="Sarabun"/>
+              </a:rPr>
+              <a:t>่ (four) and สี (colour) with tone direction arrows.</a:t>
             </a:r>
           </a:p>
         </p:txBody>
@@ -5053,8 +5265,8 @@
         </p:nvSpPr>
         <p:spPr>
           <a:xfrm>
-            <a:off x="1188720" y="1627632"/>
-            <a:ext cx="3200400" cy="658368"/>
+            <a:off x="731533" y="1623118"/>
+            <a:ext cx="1645800" cy="274200"/>
           </a:xfrm>
           <a:prstGeom prst="rect">
             <a:avLst/>
@@ -5069,7 +5281,7 @@
           <a:p>
             <a:pPr algn="l"/>
             <a:r>
-              <a:rPr sz="2300" b="1" i="0" lang="th-TH" altLang="en-US">
+              <a:rPr sz="1300" b="1" i="0" lang="en-US" altLang="en-US">
                 <a:solidFill>
                   <a:srgbClr val="24333D"/>
                 </a:solidFill>
@@ -5077,18 +5289,7 @@
                 <a:ea typeface="Sarabun"/>
                 <a:cs typeface="Sarabun"/>
               </a:rPr>
-              <a:t>1. ฉัน</a:t>
-            </a:r>
-            <a:r>
-              <a:rPr sz="1500" b="0" i="1" lang="en-US" altLang="en-US">
-                <a:solidFill>
-                  <a:srgbClr val="566873"/>
-                </a:solidFill>
-                <a:latin typeface="Sarabun"/>
-                <a:ea typeface="Sarabun"/>
-                <a:cs typeface="Sarabun"/>
-              </a:rPr>
-              <a:t> (chǎn)</a:t>
+              <a:t>Direct answers</a:t>
             </a:r>
           </a:p>
         </p:txBody>
@@ -5101,8 +5302,8 @@
         </p:nvSpPr>
         <p:spPr>
           <a:xfrm>
-            <a:off x="4846320" y="1737360"/>
-            <a:ext cx="2286000" cy="365760"/>
+            <a:off x="1051560" y="2057400"/>
+            <a:ext cx="2286000" cy="731520"/>
           </a:xfrm>
           <a:prstGeom prst="rect">
             <a:avLst/>
@@ -5117,7 +5318,7 @@
           <a:p>
             <a:pPr algn="l"/>
             <a:r>
-              <a:rPr sz="1300" b="1" i="0" lang="th-TH" altLang="en-US">
+              <a:rPr sz="2300" b="1" i="0" lang="th-TH" altLang="en-US">
                 <a:solidFill>
                   <a:srgbClr val="24333D"/>
                 </a:solidFill>
@@ -5125,7 +5326,7 @@
                 <a:ea typeface="Sarabun"/>
                 <a:cs typeface="Sarabun"/>
               </a:rPr>
-              <a:t>คุณอายุเท่าไหร่</a:t>
+              <a:t>สี่</a:t>
             </a:r>
             <a:r>
               <a:rPr sz="1500" b="0" i="1" lang="en-US" altLang="en-US">
@@ -5136,18 +5337,7 @@
                 <a:ea typeface="Sarabun"/>
                 <a:cs typeface="Sarabun"/>
               </a:rPr>
-              <a:t> (khun aa-yú thâo-rài)</a:t>
-            </a:r>
-            <a:r>
-              <a:rPr sz="1300" b="1" i="0" lang="en-US" altLang="en-US">
-                <a:solidFill>
-                  <a:srgbClr val="24333D"/>
-                </a:solidFill>
-                <a:latin typeface="Sarabun"/>
-                <a:ea typeface="Sarabun"/>
-                <a:cs typeface="Sarabun"/>
-              </a:rPr>
-              <a:t> | khun aa-yú thâo-rài | how old are you?</a:t>
+              <a:t> (sìi)</a:t>
             </a:r>
           </a:p>
         </p:txBody>
@@ -5160,8 +5350,8 @@
         </p:nvSpPr>
         <p:spPr>
           <a:xfrm>
-            <a:off x="1188720" y="2478024"/>
-            <a:ext cx="3200400" cy="658368"/>
+            <a:off x="3474720" y="2148840"/>
+            <a:ext cx="3657600" cy="365760"/>
           </a:xfrm>
           <a:prstGeom prst="rect">
             <a:avLst/>
@@ -5176,7 +5366,7 @@
           <a:p>
             <a:pPr algn="l"/>
             <a:r>
-              <a:rPr sz="2300" b="1" i="0" lang="th-TH" altLang="en-US">
+              <a:rPr sz="1300" b="1" i="0" lang="en-US" altLang="en-US">
                 <a:solidFill>
                   <a:srgbClr val="24333D"/>
                 </a:solidFill>
@@ -5184,18 +5374,7 @@
                 <a:ea typeface="Sarabun"/>
                 <a:cs typeface="Sarabun"/>
               </a:rPr>
-              <a:t>2. เขา</a:t>
-            </a:r>
-            <a:r>
-              <a:rPr sz="1500" b="0" i="1" lang="en-US" altLang="en-US">
-                <a:solidFill>
-                  <a:srgbClr val="566873"/>
-                </a:solidFill>
-                <a:latin typeface="Sarabun"/>
-                <a:ea typeface="Sarabun"/>
-                <a:cs typeface="Sarabun"/>
-              </a:rPr>
-              <a:t> (khǎo)</a:t>
+              <a:t>four (low tone)</a:t>
             </a:r>
           </a:p>
         </p:txBody>
@@ -5208,8 +5387,8 @@
         </p:nvSpPr>
         <p:spPr>
           <a:xfrm>
-            <a:off x="4846320" y="2587752"/>
-            <a:ext cx="2286000" cy="365760"/>
+            <a:off x="3474720" y="2514600"/>
+            <a:ext cx="3657600" cy="365760"/>
           </a:xfrm>
           <a:prstGeom prst="rect">
             <a:avLst/>
@@ -5224,15 +5403,15 @@
           <a:p>
             <a:pPr algn="l"/>
             <a:r>
-              <a:rPr sz="1300" b="1" i="0" lang="th-TH" altLang="en-US">
-                <a:solidFill>
-                  <a:srgbClr val="24333D"/>
-                </a:solidFill>
-                <a:latin typeface="Sarabun"/>
-                <a:ea typeface="Sarabun"/>
-                <a:cs typeface="Sarabun"/>
-              </a:rPr>
-              <a:t>ฉันอายุแปดปี</a:t>
+              <a:rPr sz="1500" b="0" i="0" lang="th-TH" altLang="en-US">
+                <a:solidFill>
+                  <a:srgbClr val="566873"/>
+                </a:solidFill>
+                <a:latin typeface="Sarabun"/>
+                <a:ea typeface="Sarabun"/>
+                <a:cs typeface="Sarabun"/>
+              </a:rPr>
+              <a:t>สี่</a:t>
             </a:r>
             <a:r>
               <a:rPr sz="1500" b="0" i="1" lang="en-US" altLang="en-US">
@@ -5243,18 +5422,18 @@
                 <a:ea typeface="Sarabun"/>
                 <a:cs typeface="Sarabun"/>
               </a:rPr>
-              <a:t> (chǎn aa-yú bpàet bpii)</a:t>
-            </a:r>
-            <a:r>
-              <a:rPr sz="1300" b="1" i="0" lang="en-US" altLang="en-US">
-                <a:solidFill>
-                  <a:srgbClr val="24333D"/>
-                </a:solidFill>
-                <a:latin typeface="Sarabun"/>
-                <a:ea typeface="Sarabun"/>
-                <a:cs typeface="Sarabun"/>
-              </a:rPr>
-              <a:t> | chǎn aa-yú bpàet bpii | I am eight years old</a:t>
+              <a:t> (sìi)</a:t>
+            </a:r>
+            <a:r>
+              <a:rPr sz="1500" b="0" i="0" lang="en-US" altLang="en-US">
+                <a:solidFill>
+                  <a:srgbClr val="566873"/>
+                </a:solidFill>
+                <a:latin typeface="Sarabun"/>
+                <a:ea typeface="Sarabun"/>
+                <a:cs typeface="Sarabun"/>
+              </a:rPr>
+              <a:t> | sìi | four — low tone (voice stays low)</a:t>
             </a:r>
           </a:p>
         </p:txBody>
@@ -5267,8 +5446,8 @@
         </p:nvSpPr>
         <p:spPr>
           <a:xfrm>
-            <a:off x="1188720" y="3328416"/>
-            <a:ext cx="3200400" cy="658368"/>
+            <a:off x="731520" y="4594866"/>
+            <a:ext cx="1828800" cy="274200"/>
           </a:xfrm>
           <a:prstGeom prst="rect">
             <a:avLst/>
@@ -5283,7 +5462,7 @@
           <a:p>
             <a:pPr algn="l"/>
             <a:r>
-              <a:rPr sz="2300" b="1" i="0" lang="th-TH" altLang="en-US">
+              <a:rPr sz="1300" b="1" i="0" lang="en-US" altLang="en-US">
                 <a:solidFill>
                   <a:srgbClr val="24333D"/>
                 </a:solidFill>
@@ -5291,169 +5470,14 @@
                 <a:ea typeface="Sarabun"/>
                 <a:cs typeface="Sarabun"/>
               </a:rPr>
-              <a:t>3. ขอโทษ</a:t>
-            </a:r>
-            <a:r>
-              <a:rPr sz="1500" b="0" i="1" lang="en-US" altLang="en-US">
-                <a:solidFill>
-                  <a:srgbClr val="566873"/>
-                </a:solidFill>
-                <a:latin typeface="Sarabun"/>
-                <a:ea typeface="Sarabun"/>
-                <a:cs typeface="Sarabun"/>
-              </a:rPr>
-              <a:t> (khǎaw-thôot)</a:t>
-            </a:r>
-          </a:p>
-        </p:txBody>
-      </p:sp>
-      <p:sp>
-        <p:nvSpPr>
-          <p:cNvPr id="11" name="TextBox 10"/>
-          <p:cNvSpPr txBox="1"/>
-          <p:nvPr/>
-        </p:nvSpPr>
-        <p:spPr>
-          <a:xfrm>
-            <a:off x="4846320" y="3438144"/>
-            <a:ext cx="2286000" cy="365760"/>
-          </a:xfrm>
-          <a:prstGeom prst="rect">
-            <a:avLst/>
-          </a:prstGeom>
-          <a:noFill/>
-        </p:spPr>
-        <p:txBody>
-          <a:bodyPr wrap="square" anchor="t">
-            <a:spAutoFit/>
-          </a:bodyPr>
-          <a:lstStyle/>
-          <a:p>
-            <a:pPr algn="l"/>
-            <a:r>
-              <a:rPr sz="1300" b="1" i="0" lang="th-TH" altLang="en-US">
-                <a:solidFill>
-                  <a:srgbClr val="24333D"/>
-                </a:solidFill>
-                <a:latin typeface="Sarabun"/>
-                <a:ea typeface="Sarabun"/>
-                <a:cs typeface="Sarabun"/>
-              </a:rPr>
-              <a:t>ขอโทษครับ / ค่ะ</a:t>
-            </a:r>
-            <a:r>
-              <a:rPr sz="1500" b="0" i="1" lang="en-US" altLang="en-US">
-                <a:solidFill>
-                  <a:srgbClr val="566873"/>
-                </a:solidFill>
-                <a:latin typeface="Sarabun"/>
-                <a:ea typeface="Sarabun"/>
-                <a:cs typeface="Sarabun"/>
-              </a:rPr>
-              <a:t> (khǎaw-thôot khráp / khâ)</a:t>
-            </a:r>
-            <a:r>
-              <a:rPr sz="1300" b="1" i="0" lang="en-US" altLang="en-US">
-                <a:solidFill>
-                  <a:srgbClr val="24333D"/>
-                </a:solidFill>
-                <a:latin typeface="Sarabun"/>
-                <a:ea typeface="Sarabun"/>
-                <a:cs typeface="Sarabun"/>
-              </a:rPr>
-              <a:t> | khǎaw-thôot khráp / khâ | excuse me (polite)</a:t>
-            </a:r>
-          </a:p>
-        </p:txBody>
-      </p:sp>
-      <p:sp>
-        <p:nvSpPr>
-          <p:cNvPr id="12" name="TextBox 11"/>
-          <p:cNvSpPr txBox="1"/>
-          <p:nvPr/>
-        </p:nvSpPr>
-        <p:spPr>
-          <a:xfrm>
-            <a:off x="1188720" y="4178808"/>
-            <a:ext cx="3200400" cy="658368"/>
-          </a:xfrm>
-          <a:prstGeom prst="rect">
-            <a:avLst/>
-          </a:prstGeom>
-          <a:noFill/>
-        </p:spPr>
-        <p:txBody>
-          <a:bodyPr wrap="square" anchor="t">
-            <a:spAutoFit/>
-          </a:bodyPr>
-          <a:lstStyle/>
-          <a:p>
-            <a:pPr algn="l"/>
-            <a:r>
-              <a:rPr sz="2300" b="1" i="0" lang="th-TH" altLang="en-US">
-                <a:solidFill>
-                  <a:srgbClr val="24333D"/>
-                </a:solidFill>
-                <a:latin typeface="Sarabun"/>
-                <a:ea typeface="Sarabun"/>
-                <a:cs typeface="Sarabun"/>
-              </a:rPr>
-              <a:t>4. ขอบคุณ</a:t>
-            </a:r>
-            <a:r>
-              <a:rPr sz="1500" b="0" i="1" lang="en-US" altLang="en-US">
-                <a:solidFill>
-                  <a:srgbClr val="566873"/>
-                </a:solidFill>
-                <a:latin typeface="Sarabun"/>
-                <a:ea typeface="Sarabun"/>
-                <a:cs typeface="Sarabun"/>
-              </a:rPr>
-              <a:t> (khàawp-khun)</a:t>
-            </a:r>
-          </a:p>
-        </p:txBody>
-      </p:sp>
-      <p:sp>
-        <p:nvSpPr>
-          <p:cNvPr id="13" name="TextBox 12"/>
-          <p:cNvSpPr txBox="1"/>
-          <p:nvPr/>
-        </p:nvSpPr>
-        <p:spPr>
-          <a:xfrm>
-            <a:off x="4846320" y="4288536"/>
-            <a:ext cx="2286000" cy="365760"/>
-          </a:xfrm>
-          <a:prstGeom prst="rect">
-            <a:avLst/>
-          </a:prstGeom>
-          <a:noFill/>
-        </p:spPr>
-        <p:txBody>
-          <a:bodyPr wrap="square" anchor="t">
-            <a:spAutoFit/>
-          </a:bodyPr>
-          <a:lstStyle/>
-          <a:p>
-            <a:pPr algn="l"/>
-            <a:r>
-              <a:rPr sz="1300" b="1" i="0" lang="en-US" altLang="en-US">
-                <a:solidFill>
-                  <a:srgbClr val="24333D"/>
-                </a:solidFill>
-                <a:latin typeface="Sarabun"/>
-                <a:ea typeface="Sarabun"/>
-                <a:cs typeface="Sarabun"/>
-              </a:rPr>
-              <a:t>Practise aloud</a:t>
-            </a:r>
-          </a:p>
-        </p:txBody>
-      </p:sp>
-      <p:sp>
-        <p:nvSpPr>
-          <p:cNvPr id="14" name="__pip_placeholder__"/>
+              <a:t>Softener</a:t>
+            </a:r>
+          </a:p>
+        </p:txBody>
+      </p:sp>
+      <p:sp>
+        <p:nvSpPr>
+          <p:cNvPr id="11" name="__pip_placeholder__"/>
           <p:cNvSpPr/>
           <p:nvPr/>
         </p:nvSpPr>
@@ -5528,7 +5552,7 @@
       <p:grpSpPr/>
       <p:pic>
         <p:nvPicPr>
-          <p:cNvPr id="2" name="Picture 1" descr="slide-03.png"/>
+          <p:cNvPr id="2" name="Picture 1" descr="slide-07.png"/>
           <p:cNvPicPr>
             <a:picLocks noChangeAspect="1"/>
           </p:cNvPicPr>
@@ -5558,8 +5582,8 @@
         </p:nvSpPr>
         <p:spPr>
           <a:xfrm>
-            <a:off x="731527" y="1719200"/>
-            <a:ext cx="1210500" cy="320100"/>
+            <a:off x="731520" y="429768"/>
+            <a:ext cx="6858000" cy="457200"/>
           </a:xfrm>
           <a:prstGeom prst="rect">
             <a:avLst/>
@@ -5572,17 +5596,17 @@
           </a:bodyPr>
           <a:lstStyle/>
           <a:p>
-            <a:pPr algn="ctr"/>
-            <a:r>
-              <a:rPr sz="1200" b="1" i="0" lang="en-US" altLang="en-US">
-                <a:solidFill>
-                  <a:srgbClr val="FFFFFF"/>
-                </a:solidFill>
-                <a:latin typeface="Sarabun"/>
-                <a:ea typeface="Sarabun"/>
-                <a:cs typeface="Sarabun"/>
-              </a:rPr>
-              <a:t>Section 5</a:t>
+            <a:pPr algn="l"/>
+            <a:r>
+              <a:rPr sz="3000" b="1" i="0" lang="en-US" altLang="en-US">
+                <a:solidFill>
+                  <a:srgbClr val="24333D"/>
+                </a:solidFill>
+                <a:latin typeface="Sarabun"/>
+                <a:ea typeface="Sarabun"/>
+                <a:cs typeface="Sarabun"/>
+              </a:rPr>
+              <a:t>Roleplay</a:t>
             </a:r>
           </a:p>
         </p:txBody>
@@ -5595,8 +5619,8 @@
         </p:nvSpPr>
         <p:spPr>
           <a:xfrm>
-            <a:off x="2063268" y="1582106"/>
-            <a:ext cx="5943600" cy="457200"/>
+            <a:off x="731520" y="992138"/>
+            <a:ext cx="6858000" cy="365700"/>
           </a:xfrm>
           <a:prstGeom prst="rect">
             <a:avLst/>
@@ -5611,15 +5635,15 @@
           <a:p>
             <a:pPr algn="l"/>
             <a:r>
-              <a:rPr sz="3000" b="1" i="0" lang="en-US" altLang="en-US">
-                <a:solidFill>
-                  <a:srgbClr val="24333D"/>
-                </a:solidFill>
-                <a:latin typeface="Sarabun"/>
-                <a:ea typeface="Sarabun"/>
-                <a:cs typeface="Sarabun"/>
-              </a:rPr>
-              <a:t>Pronunciation beat: low tone vs rising tone</a:t>
+              <a:rPr sz="1500" b="0" i="0" lang="en-US" altLang="en-US">
+                <a:solidFill>
+                  <a:srgbClr val="566873"/>
+                </a:solidFill>
+                <a:latin typeface="Sarabun"/>
+                <a:ea typeface="Sarabun"/>
+                <a:cs typeface="Sarabun"/>
+              </a:rPr>
+              <a:t>Support the roleplay recording with clean turn-taking.</a:t>
             </a:r>
           </a:p>
         </p:txBody>
@@ -5632,8 +5656,8 @@
         </p:nvSpPr>
         <p:spPr>
           <a:xfrm>
-            <a:off x="1142988" y="2332605"/>
-            <a:ext cx="5303400" cy="1042060"/>
+            <a:off x="731520" y="1463040"/>
+            <a:ext cx="1097280" cy="292608"/>
           </a:xfrm>
           <a:prstGeom prst="rect">
             <a:avLst/>
@@ -5646,28 +5670,17 @@
           </a:bodyPr>
           <a:lstStyle/>
           <a:p>
-            <a:pPr algn="l"/>
-            <a:r>
-              <a:rPr sz="3200" b="1" i="0" lang="th-TH" altLang="en-US">
-                <a:solidFill>
-                  <a:srgbClr val="24333D"/>
-                </a:solidFill>
-                <a:latin typeface="Sarabun"/>
-                <a:ea typeface="Sarabun"/>
-                <a:cs typeface="Sarabun"/>
-              </a:rPr>
-              <a:t>สี่</a:t>
-            </a:r>
-            <a:r>
-              <a:rPr sz="1980" b="0" i="1" lang="en-US" altLang="en-US">
-                <a:solidFill>
-                  <a:srgbClr val="566873"/>
-                </a:solidFill>
-                <a:latin typeface="Sarabun"/>
-                <a:ea typeface="Sarabun"/>
-                <a:cs typeface="Sarabun"/>
-              </a:rPr>
-              <a:t> (sìi)</a:t>
+            <a:pPr algn="ctr"/>
+            <a:r>
+              <a:rPr sz="1200" b="1" i="0" lang="en-US" altLang="en-US">
+                <a:solidFill>
+                  <a:srgbClr val="FFFFFF"/>
+                </a:solidFill>
+                <a:latin typeface="Sarabun"/>
+                <a:ea typeface="Sarabun"/>
+                <a:cs typeface="Sarabun"/>
+              </a:rPr>
+              <a:t>You</a:t>
             </a:r>
           </a:p>
         </p:txBody>
@@ -5680,8 +5693,8 @@
         </p:nvSpPr>
         <p:spPr>
           <a:xfrm>
-            <a:off x="1143000" y="3374675"/>
-            <a:ext cx="5303400" cy="365700"/>
+            <a:off x="2011680" y="1339583"/>
+            <a:ext cx="5303400" cy="411600"/>
           </a:xfrm>
           <a:prstGeom prst="rect">
             <a:avLst/>
@@ -5696,15 +5709,26 @@
           <a:p>
             <a:pPr algn="l"/>
             <a:r>
-              <a:rPr sz="1500" b="0" i="0" lang="en-US" altLang="en-US">
-                <a:solidFill>
-                  <a:srgbClr val="82909A"/>
-                </a:solidFill>
-                <a:latin typeface="Sarabun"/>
-                <a:ea typeface="Sarabun"/>
-                <a:cs typeface="Sarabun"/>
-              </a:rPr>
-              <a:t>four (low tone)</a:t>
+              <a:rPr sz="2300" b="1" i="0" lang="th-TH" altLang="en-US">
+                <a:solidFill>
+                  <a:srgbClr val="24333D"/>
+                </a:solidFill>
+                <a:latin typeface="Sarabun"/>
+                <a:ea typeface="Sarabun"/>
+                <a:cs typeface="Sarabun"/>
+              </a:rPr>
+              <a:t>สวัสดีครับ</a:t>
+            </a:r>
+            <a:r>
+              <a:rPr sz="1500" b="0" i="1" lang="en-US" altLang="en-US">
+                <a:solidFill>
+                  <a:srgbClr val="566873"/>
+                </a:solidFill>
+                <a:latin typeface="Sarabun"/>
+                <a:ea typeface="Sarabun"/>
+                <a:cs typeface="Sarabun"/>
+              </a:rPr>
+              <a:t> (sà-wàt-dii khráp)</a:t>
             </a:r>
           </a:p>
         </p:txBody>
@@ -5717,8 +5741,8 @@
         </p:nvSpPr>
         <p:spPr>
           <a:xfrm>
-            <a:off x="731520" y="4142240"/>
-            <a:ext cx="6858000" cy="914400"/>
+            <a:off x="2011693" y="1721362"/>
+            <a:ext cx="5303400" cy="320100"/>
           </a:xfrm>
           <a:prstGeom prst="rect">
             <a:avLst/>
@@ -5733,7 +5757,81 @@
           <a:p>
             <a:pPr algn="l"/>
             <a:r>
-              <a:rPr sz="1600" b="0" i="0" lang="th-TH" altLang="en-US">
+              <a:rPr sz="1500" b="0" i="0" lang="en-US" altLang="en-US">
+                <a:solidFill>
+                  <a:srgbClr val="566873"/>
+                </a:solidFill>
+                <a:latin typeface="Sarabun"/>
+                <a:ea typeface="Sarabun"/>
+                <a:cs typeface="Sarabun"/>
+              </a:rPr>
+              <a:t>Hello.</a:t>
+            </a:r>
+          </a:p>
+        </p:txBody>
+      </p:sp>
+      <p:sp>
+        <p:nvSpPr>
+          <p:cNvPr id="8" name="TextBox 7"/>
+          <p:cNvSpPr txBox="1"/>
+          <p:nvPr/>
+        </p:nvSpPr>
+        <p:spPr>
+          <a:xfrm>
+            <a:off x="731520" y="2199095"/>
+            <a:ext cx="1097400" cy="292500"/>
+          </a:xfrm>
+          <a:prstGeom prst="rect">
+            <a:avLst/>
+          </a:prstGeom>
+          <a:noFill/>
+        </p:spPr>
+        <p:txBody>
+          <a:bodyPr wrap="square" anchor="t">
+            <a:spAutoFit/>
+          </a:bodyPr>
+          <a:lstStyle/>
+          <a:p>
+            <a:pPr algn="ctr"/>
+            <a:r>
+              <a:rPr sz="1200" b="1" i="0" lang="en-US" altLang="en-US">
+                <a:solidFill>
+                  <a:srgbClr val="FFFFFF"/>
+                </a:solidFill>
+                <a:latin typeface="Sarabun"/>
+                <a:ea typeface="Sarabun"/>
+                <a:cs typeface="Sarabun"/>
+              </a:rPr>
+              <a:t>Staff</a:t>
+            </a:r>
+          </a:p>
+        </p:txBody>
+      </p:sp>
+      <p:sp>
+        <p:nvSpPr>
+          <p:cNvPr id="9" name="TextBox 8"/>
+          <p:cNvSpPr txBox="1"/>
+          <p:nvPr/>
+        </p:nvSpPr>
+        <p:spPr>
+          <a:xfrm>
+            <a:off x="2011743" y="2048200"/>
+            <a:ext cx="5303400" cy="411600"/>
+          </a:xfrm>
+          <a:prstGeom prst="rect">
+            <a:avLst/>
+          </a:prstGeom>
+          <a:noFill/>
+        </p:spPr>
+        <p:txBody>
+          <a:bodyPr wrap="square" anchor="t">
+            <a:spAutoFit/>
+          </a:bodyPr>
+          <a:lstStyle/>
+          <a:p>
+            <a:pPr algn="l"/>
+            <a:r>
+              <a:rPr sz="2300" b="1" i="0" lang="th-TH" altLang="en-US">
                 <a:solidFill>
                   <a:srgbClr val="24333D"/>
                 </a:solidFill>
@@ -5741,13 +5839,121 @@
                 <a:ea typeface="Sarabun"/>
                 <a:cs typeface="Sarabun"/>
               </a:rPr>
-              <a:t>สี่ | sìi | four (low tone — voice stays low and flat)</a:t>
-            </a:r>
-          </a:p>
+              <a:t>สวัสดีค่ะ เบอร์ห้องอะไรคะ</a:t>
+            </a:r>
+            <a:r>
+              <a:rPr sz="1500" b="0" i="1" lang="en-US" altLang="en-US">
+                <a:solidFill>
+                  <a:srgbClr val="566873"/>
+                </a:solidFill>
+                <a:latin typeface="Sarabun"/>
+                <a:ea typeface="Sarabun"/>
+                <a:cs typeface="Sarabun"/>
+              </a:rPr>
+              <a:t> (sà-wàt-dii khâ ber hâwng à-rai khá)</a:t>
+            </a:r>
+          </a:p>
+        </p:txBody>
+      </p:sp>
+      <p:sp>
+        <p:nvSpPr>
+          <p:cNvPr id="10" name="TextBox 9"/>
+          <p:cNvSpPr txBox="1"/>
+          <p:nvPr/>
+        </p:nvSpPr>
+        <p:spPr>
+          <a:xfrm>
+            <a:off x="2011693" y="2482592"/>
+            <a:ext cx="5303400" cy="320100"/>
+          </a:xfrm>
+          <a:prstGeom prst="rect">
+            <a:avLst/>
+          </a:prstGeom>
+          <a:noFill/>
+        </p:spPr>
+        <p:txBody>
+          <a:bodyPr wrap="square" anchor="t">
+            <a:spAutoFit/>
+          </a:bodyPr>
+          <a:lstStyle/>
           <a:p>
             <a:pPr algn="l"/>
             <a:r>
-              <a:rPr sz="1600" b="0" i="0" lang="th-TH" altLang="en-US">
+              <a:rPr sz="1500" b="0" i="0" lang="en-US" altLang="en-US">
+                <a:solidFill>
+                  <a:srgbClr val="566873"/>
+                </a:solidFill>
+                <a:latin typeface="Sarabun"/>
+                <a:ea typeface="Sarabun"/>
+                <a:cs typeface="Sarabun"/>
+              </a:rPr>
+              <a:t>Hello. What is the room number?</a:t>
+            </a:r>
+          </a:p>
+        </p:txBody>
+      </p:sp>
+      <p:sp>
+        <p:nvSpPr>
+          <p:cNvPr id="11" name="TextBox 10"/>
+          <p:cNvSpPr txBox="1"/>
+          <p:nvPr/>
+        </p:nvSpPr>
+        <p:spPr>
+          <a:xfrm>
+            <a:off x="731583" y="2962650"/>
+            <a:ext cx="1097400" cy="292500"/>
+          </a:xfrm>
+          <a:prstGeom prst="rect">
+            <a:avLst/>
+          </a:prstGeom>
+          <a:noFill/>
+        </p:spPr>
+        <p:txBody>
+          <a:bodyPr wrap="square" anchor="t">
+            <a:spAutoFit/>
+          </a:bodyPr>
+          <a:lstStyle/>
+          <a:p>
+            <a:pPr algn="ctr"/>
+            <a:r>
+              <a:rPr sz="1200" b="1" i="0" lang="en-US" altLang="en-US">
+                <a:solidFill>
+                  <a:srgbClr val="FFFFFF"/>
+                </a:solidFill>
+                <a:latin typeface="Sarabun"/>
+                <a:ea typeface="Sarabun"/>
+                <a:cs typeface="Sarabun"/>
+              </a:rPr>
+              <a:t>You</a:t>
+            </a:r>
+          </a:p>
+        </p:txBody>
+      </p:sp>
+      <p:sp>
+        <p:nvSpPr>
+          <p:cNvPr id="12" name="TextBox 11"/>
+          <p:cNvSpPr txBox="1"/>
+          <p:nvPr/>
+        </p:nvSpPr>
+        <p:spPr>
+          <a:xfrm>
+            <a:off x="2011693" y="2878130"/>
+            <a:ext cx="5303400" cy="411600"/>
+          </a:xfrm>
+          <a:prstGeom prst="rect">
+            <a:avLst/>
+          </a:prstGeom>
+          <a:noFill/>
+        </p:spPr>
+        <p:txBody>
+          <a:bodyPr wrap="square" anchor="t">
+            <a:spAutoFit/>
+          </a:bodyPr>
+          <a:lstStyle/>
+          <a:p>
+            <a:pPr algn="l"/>
+            <a:r>
+              <a:rPr sz="2300" b="1" i="0" lang="th-TH" altLang="en-US">
                 <a:solidFill>
                   <a:srgbClr val="24333D"/>
                 </a:solidFill>
@@ -5755,14 +5961,428 @@
                 <a:ea typeface="Sarabun"/>
                 <a:cs typeface="Sarabun"/>
               </a:rPr>
-              <a:t>สี | sǐi | colour (rising tone — voice lifts up)</a:t>
-            </a:r>
-          </a:p>
-        </p:txBody>
-      </p:sp>
-      <p:sp>
-        <p:nvSpPr>
-          <p:cNvPr id="8" name="__pip_placeholder__"/>
+              <a:t>ห้า-ศูนย์-สองครับ</a:t>
+            </a:r>
+            <a:r>
+              <a:rPr sz="1500" b="0" i="1" lang="en-US" altLang="en-US">
+                <a:solidFill>
+                  <a:srgbClr val="566873"/>
+                </a:solidFill>
+                <a:latin typeface="Sarabun"/>
+                <a:ea typeface="Sarabun"/>
+                <a:cs typeface="Sarabun"/>
+              </a:rPr>
+              <a:t> (hâa-sǔun-sǎawng khráp)</a:t>
+            </a:r>
+          </a:p>
+        </p:txBody>
+      </p:sp>
+      <p:sp>
+        <p:nvSpPr>
+          <p:cNvPr id="13" name="TextBox 12"/>
+          <p:cNvSpPr txBox="1"/>
+          <p:nvPr/>
+        </p:nvSpPr>
+        <p:spPr>
+          <a:xfrm>
+            <a:off x="2011693" y="3253010"/>
+            <a:ext cx="5303400" cy="320100"/>
+          </a:xfrm>
+          <a:prstGeom prst="rect">
+            <a:avLst/>
+          </a:prstGeom>
+          <a:noFill/>
+        </p:spPr>
+        <p:txBody>
+          <a:bodyPr wrap="square" anchor="t">
+            <a:spAutoFit/>
+          </a:bodyPr>
+          <a:lstStyle/>
+          <a:p>
+            <a:pPr algn="l"/>
+            <a:r>
+              <a:rPr sz="1500" b="0" i="0" lang="en-US" altLang="en-US">
+                <a:solidFill>
+                  <a:srgbClr val="566873"/>
+                </a:solidFill>
+                <a:latin typeface="Sarabun"/>
+                <a:ea typeface="Sarabun"/>
+                <a:cs typeface="Sarabun"/>
+              </a:rPr>
+              <a:t>Five-zero-two.</a:t>
+            </a:r>
+          </a:p>
+        </p:txBody>
+      </p:sp>
+      <p:sp>
+        <p:nvSpPr>
+          <p:cNvPr id="14" name="TextBox 13"/>
+          <p:cNvSpPr txBox="1"/>
+          <p:nvPr/>
+        </p:nvSpPr>
+        <p:spPr>
+          <a:xfrm>
+            <a:off x="731583" y="3726205"/>
+            <a:ext cx="1097400" cy="292500"/>
+          </a:xfrm>
+          <a:prstGeom prst="rect">
+            <a:avLst/>
+          </a:prstGeom>
+          <a:noFill/>
+        </p:spPr>
+        <p:txBody>
+          <a:bodyPr wrap="square" anchor="t">
+            <a:spAutoFit/>
+          </a:bodyPr>
+          <a:lstStyle/>
+          <a:p>
+            <a:pPr algn="ctr"/>
+            <a:r>
+              <a:rPr sz="1200" b="1" i="0" lang="en-US" altLang="en-US">
+                <a:solidFill>
+                  <a:srgbClr val="FFFFFF"/>
+                </a:solidFill>
+                <a:latin typeface="Sarabun"/>
+                <a:ea typeface="Sarabun"/>
+                <a:cs typeface="Sarabun"/>
+              </a:rPr>
+              <a:t>Staff</a:t>
+            </a:r>
+          </a:p>
+        </p:txBody>
+      </p:sp>
+      <p:sp>
+        <p:nvSpPr>
+          <p:cNvPr id="15" name="TextBox 14"/>
+          <p:cNvSpPr txBox="1"/>
+          <p:nvPr/>
+        </p:nvSpPr>
+        <p:spPr>
+          <a:xfrm>
+            <a:off x="2011693" y="3666773"/>
+            <a:ext cx="5303400" cy="411600"/>
+          </a:xfrm>
+          <a:prstGeom prst="rect">
+            <a:avLst/>
+          </a:prstGeom>
+          <a:noFill/>
+        </p:spPr>
+        <p:txBody>
+          <a:bodyPr wrap="square" anchor="t">
+            <a:spAutoFit/>
+          </a:bodyPr>
+          <a:lstStyle/>
+          <a:p>
+            <a:pPr algn="l"/>
+            <a:r>
+              <a:rPr sz="2300" b="1" i="0" lang="th-TH" altLang="en-US">
+                <a:solidFill>
+                  <a:srgbClr val="24333D"/>
+                </a:solidFill>
+                <a:latin typeface="Sarabun"/>
+                <a:ea typeface="Sarabun"/>
+                <a:cs typeface="Sarabun"/>
+              </a:rPr>
+              <a:t>ค่ะ คุณอายุเท่าไหร่คะ</a:t>
+            </a:r>
+            <a:r>
+              <a:rPr sz="1500" b="0" i="1" lang="en-US" altLang="en-US">
+                <a:solidFill>
+                  <a:srgbClr val="566873"/>
+                </a:solidFill>
+                <a:latin typeface="Sarabun"/>
+                <a:ea typeface="Sarabun"/>
+                <a:cs typeface="Sarabun"/>
+              </a:rPr>
+              <a:t> (khâ khun aa-yú thâo-rài khá)</a:t>
+            </a:r>
+          </a:p>
+        </p:txBody>
+      </p:sp>
+      <p:sp>
+        <p:nvSpPr>
+          <p:cNvPr id="16" name="TextBox 15"/>
+          <p:cNvSpPr txBox="1"/>
+          <p:nvPr/>
+        </p:nvSpPr>
+        <p:spPr>
+          <a:xfrm>
+            <a:off x="2011680" y="4072527"/>
+            <a:ext cx="5303400" cy="320100"/>
+          </a:xfrm>
+          <a:prstGeom prst="rect">
+            <a:avLst/>
+          </a:prstGeom>
+          <a:noFill/>
+        </p:spPr>
+        <p:txBody>
+          <a:bodyPr wrap="square" anchor="t">
+            <a:spAutoFit/>
+          </a:bodyPr>
+          <a:lstStyle/>
+          <a:p>
+            <a:pPr algn="l"/>
+            <a:r>
+              <a:rPr sz="1500" b="0" i="0" lang="en-US" altLang="en-US">
+                <a:solidFill>
+                  <a:srgbClr val="566873"/>
+                </a:solidFill>
+                <a:latin typeface="Sarabun"/>
+                <a:ea typeface="Sarabun"/>
+                <a:cs typeface="Sarabun"/>
+              </a:rPr>
+              <a:t>Okay. How old are you?</a:t>
+            </a:r>
+          </a:p>
+        </p:txBody>
+      </p:sp>
+      <p:sp>
+        <p:nvSpPr>
+          <p:cNvPr id="17" name="TextBox 16"/>
+          <p:cNvSpPr txBox="1"/>
+          <p:nvPr/>
+        </p:nvSpPr>
+        <p:spPr>
+          <a:xfrm>
+            <a:off x="791795" y="4489760"/>
+            <a:ext cx="1097400" cy="292500"/>
+          </a:xfrm>
+          <a:prstGeom prst="rect">
+            <a:avLst/>
+          </a:prstGeom>
+          <a:noFill/>
+        </p:spPr>
+        <p:txBody>
+          <a:bodyPr wrap="square" anchor="t">
+            <a:spAutoFit/>
+          </a:bodyPr>
+          <a:lstStyle/>
+          <a:p>
+            <a:pPr algn="ctr"/>
+            <a:r>
+              <a:rPr sz="1200" b="1" i="0" lang="en-US" altLang="en-US">
+                <a:solidFill>
+                  <a:srgbClr val="FFFFFF"/>
+                </a:solidFill>
+                <a:latin typeface="Sarabun"/>
+                <a:ea typeface="Sarabun"/>
+                <a:cs typeface="Sarabun"/>
+              </a:rPr>
+              <a:t>You</a:t>
+            </a:r>
+          </a:p>
+        </p:txBody>
+      </p:sp>
+      <p:sp>
+        <p:nvSpPr>
+          <p:cNvPr id="18" name="TextBox 17"/>
+          <p:cNvSpPr txBox="1"/>
+          <p:nvPr/>
+        </p:nvSpPr>
+        <p:spPr>
+          <a:xfrm>
+            <a:off x="2011755" y="4366290"/>
+            <a:ext cx="5303400" cy="411600"/>
+          </a:xfrm>
+          <a:prstGeom prst="rect">
+            <a:avLst/>
+          </a:prstGeom>
+          <a:noFill/>
+        </p:spPr>
+        <p:txBody>
+          <a:bodyPr wrap="square" anchor="t">
+            <a:spAutoFit/>
+          </a:bodyPr>
+          <a:lstStyle/>
+          <a:p>
+            <a:pPr algn="l"/>
+            <a:r>
+              <a:rPr sz="2300" b="1" i="0" lang="th-TH" altLang="en-US">
+                <a:solidFill>
+                  <a:srgbClr val="24333D"/>
+                </a:solidFill>
+                <a:latin typeface="Sarabun"/>
+                <a:ea typeface="Sarabun"/>
+                <a:cs typeface="Sarabun"/>
+              </a:rPr>
+              <a:t>ผมอายุสามสิบปีครับ</a:t>
+            </a:r>
+            <a:r>
+              <a:rPr sz="1500" b="0" i="1" lang="en-US" altLang="en-US">
+                <a:solidFill>
+                  <a:srgbClr val="566873"/>
+                </a:solidFill>
+                <a:latin typeface="Sarabun"/>
+                <a:ea typeface="Sarabun"/>
+                <a:cs typeface="Sarabun"/>
+              </a:rPr>
+              <a:t> (phǒm aa-yú sǎam-sìp bpii khráp)</a:t>
+            </a:r>
+          </a:p>
+        </p:txBody>
+      </p:sp>
+      <p:sp>
+        <p:nvSpPr>
+          <p:cNvPr id="19" name="TextBox 18"/>
+          <p:cNvSpPr txBox="1"/>
+          <p:nvPr/>
+        </p:nvSpPr>
+        <p:spPr>
+          <a:xfrm>
+            <a:off x="2011693" y="4759532"/>
+            <a:ext cx="5303400" cy="320100"/>
+          </a:xfrm>
+          <a:prstGeom prst="rect">
+            <a:avLst/>
+          </a:prstGeom>
+          <a:noFill/>
+        </p:spPr>
+        <p:txBody>
+          <a:bodyPr wrap="square" anchor="t">
+            <a:spAutoFit/>
+          </a:bodyPr>
+          <a:lstStyle/>
+          <a:p>
+            <a:pPr algn="l"/>
+            <a:r>
+              <a:rPr sz="1500" b="0" i="0" lang="en-US" altLang="en-US">
+                <a:solidFill>
+                  <a:srgbClr val="566873"/>
+                </a:solidFill>
+                <a:latin typeface="Sarabun"/>
+                <a:ea typeface="Sarabun"/>
+                <a:cs typeface="Sarabun"/>
+              </a:rPr>
+              <a:t>I am thirty years old.</a:t>
+            </a:r>
+          </a:p>
+        </p:txBody>
+      </p:sp>
+      <p:sp>
+        <p:nvSpPr>
+          <p:cNvPr id="20" name="TextBox 19"/>
+          <p:cNvSpPr txBox="1"/>
+          <p:nvPr/>
+        </p:nvSpPr>
+        <p:spPr>
+          <a:xfrm>
+            <a:off x="731633" y="5253290"/>
+            <a:ext cx="1097400" cy="292500"/>
+          </a:xfrm>
+          <a:prstGeom prst="rect">
+            <a:avLst/>
+          </a:prstGeom>
+          <a:noFill/>
+        </p:spPr>
+        <p:txBody>
+          <a:bodyPr wrap="square" anchor="t">
+            <a:spAutoFit/>
+          </a:bodyPr>
+          <a:lstStyle/>
+          <a:p>
+            <a:pPr algn="ctr"/>
+            <a:r>
+              <a:rPr sz="1200" b="1" i="0" lang="en-US" altLang="en-US">
+                <a:solidFill>
+                  <a:srgbClr val="FFFFFF"/>
+                </a:solidFill>
+                <a:latin typeface="Sarabun"/>
+                <a:ea typeface="Sarabun"/>
+                <a:cs typeface="Sarabun"/>
+              </a:rPr>
+              <a:t>Staff</a:t>
+            </a:r>
+          </a:p>
+        </p:txBody>
+      </p:sp>
+      <p:sp>
+        <p:nvSpPr>
+          <p:cNvPr id="21" name="TextBox 20"/>
+          <p:cNvSpPr txBox="1"/>
+          <p:nvPr/>
+        </p:nvSpPr>
+        <p:spPr>
+          <a:xfrm>
+            <a:off x="2011680" y="5175433"/>
+            <a:ext cx="5303400" cy="411600"/>
+          </a:xfrm>
+          <a:prstGeom prst="rect">
+            <a:avLst/>
+          </a:prstGeom>
+          <a:noFill/>
+        </p:spPr>
+        <p:txBody>
+          <a:bodyPr wrap="square" anchor="t">
+            <a:spAutoFit/>
+          </a:bodyPr>
+          <a:lstStyle/>
+          <a:p>
+            <a:pPr algn="l"/>
+            <a:r>
+              <a:rPr sz="2300" b="1" i="0" lang="th-TH" altLang="en-US">
+                <a:solidFill>
+                  <a:srgbClr val="24333D"/>
+                </a:solidFill>
+                <a:latin typeface="Sarabun"/>
+                <a:ea typeface="Sarabun"/>
+                <a:cs typeface="Sarabun"/>
+              </a:rPr>
+              <a:t>ค่ะ ขอบคุณค่ะ</a:t>
+            </a:r>
+            <a:r>
+              <a:rPr sz="1500" b="0" i="1" lang="en-US" altLang="en-US">
+                <a:solidFill>
+                  <a:srgbClr val="566873"/>
+                </a:solidFill>
+                <a:latin typeface="Sarabun"/>
+                <a:ea typeface="Sarabun"/>
+                <a:cs typeface="Sarabun"/>
+              </a:rPr>
+              <a:t> (khâ khàawp-khun khâ)</a:t>
+            </a:r>
+          </a:p>
+        </p:txBody>
+      </p:sp>
+      <p:sp>
+        <p:nvSpPr>
+          <p:cNvPr id="22" name="TextBox 21"/>
+          <p:cNvSpPr txBox="1"/>
+          <p:nvPr/>
+        </p:nvSpPr>
+        <p:spPr>
+          <a:xfrm>
+            <a:off x="2011693" y="5571112"/>
+            <a:ext cx="5303400" cy="320100"/>
+          </a:xfrm>
+          <a:prstGeom prst="rect">
+            <a:avLst/>
+          </a:prstGeom>
+          <a:noFill/>
+        </p:spPr>
+        <p:txBody>
+          <a:bodyPr wrap="square" anchor="t">
+            <a:spAutoFit/>
+          </a:bodyPr>
+          <a:lstStyle/>
+          <a:p>
+            <a:pPr algn="l"/>
+            <a:r>
+              <a:rPr sz="1500" b="0" i="0" lang="en-US" altLang="en-US">
+                <a:solidFill>
+                  <a:srgbClr val="566873"/>
+                </a:solidFill>
+                <a:latin typeface="Sarabun"/>
+                <a:ea typeface="Sarabun"/>
+                <a:cs typeface="Sarabun"/>
+              </a:rPr>
+              <a:t>Okay. Thank you.</a:t>
+            </a:r>
+          </a:p>
+        </p:txBody>
+      </p:sp>
+      <p:sp>
+        <p:nvSpPr>
+          <p:cNvPr id="23" name="__pip_placeholder__"/>
           <p:cNvSpPr/>
           <p:nvPr/>
         </p:nvSpPr>
@@ -5867,7 +6487,7 @@
         </p:nvSpPr>
         <p:spPr>
           <a:xfrm>
-            <a:off x="731520" y="429768"/>
+            <a:off x="1137970" y="1015518"/>
             <a:ext cx="6858000" cy="457200"/>
           </a:xfrm>
           <a:prstGeom prst="rect">
@@ -5891,7 +6511,7 @@
                 <a:ea typeface="Sarabun"/>
                 <a:cs typeface="Sarabun"/>
               </a:rPr>
-              <a:t>Roleplay</a:t>
+              <a:t>Recap</a:t>
             </a:r>
           </a:p>
         </p:txBody>
@@ -5904,8 +6524,8 @@
         </p:nvSpPr>
         <p:spPr>
           <a:xfrm>
-            <a:off x="731520" y="992138"/>
-            <a:ext cx="6858000" cy="365700"/>
+            <a:off x="1097280" y="1776945"/>
+            <a:ext cx="6400800" cy="457200"/>
           </a:xfrm>
           <a:prstGeom prst="rect">
             <a:avLst/>
@@ -5920,15 +6540,15 @@
           <a:p>
             <a:pPr algn="l"/>
             <a:r>
-              <a:rPr sz="1500" b="0" i="0" lang="en-US" altLang="en-US">
-                <a:solidFill>
-                  <a:srgbClr val="566873"/>
-                </a:solidFill>
-                <a:latin typeface="Sarabun"/>
-                <a:ea typeface="Sarabun"/>
-                <a:cs typeface="Sarabun"/>
-              </a:rPr>
-              <a:t>Support the roleplay recording with clean turn-taking.</a:t>
+              <a:rPr sz="1600" b="0" i="0" lang="en-US" altLang="en-US">
+                <a:solidFill>
+                  <a:srgbClr val="24333D"/>
+                </a:solidFill>
+                <a:latin typeface="Sarabun"/>
+                <a:ea typeface="Sarabun"/>
+                <a:cs typeface="Sarabun"/>
+              </a:rPr>
+              <a:t>Count 0 to 5 in Thai. Go.</a:t>
             </a:r>
           </a:p>
         </p:txBody>
@@ -5941,8 +6561,8 @@
         </p:nvSpPr>
         <p:spPr>
           <a:xfrm>
-            <a:off x="731520" y="1463040"/>
-            <a:ext cx="1097280" cy="292608"/>
+            <a:off x="1097280" y="2437455"/>
+            <a:ext cx="6400800" cy="457200"/>
           </a:xfrm>
           <a:prstGeom prst="rect">
             <a:avLst/>
@@ -5955,17 +6575,17 @@
           </a:bodyPr>
           <a:lstStyle/>
           <a:p>
-            <a:pPr algn="ctr"/>
-            <a:r>
-              <a:rPr sz="1200" b="1" i="0" lang="en-US" altLang="en-US">
-                <a:solidFill>
-                  <a:srgbClr val="FFFFFF"/>
-                </a:solidFill>
-                <a:latin typeface="Sarabun"/>
-                <a:ea typeface="Sarabun"/>
-                <a:cs typeface="Sarabun"/>
-              </a:rPr>
-              <a:t>You</a:t>
+            <a:pPr algn="l"/>
+            <a:r>
+              <a:rPr sz="1600" b="0" i="0" lang="en-US" altLang="en-US">
+                <a:solidFill>
+                  <a:srgbClr val="24333D"/>
+                </a:solidFill>
+                <a:latin typeface="Sarabun"/>
+                <a:ea typeface="Sarabun"/>
+                <a:cs typeface="Sarabun"/>
+              </a:rPr>
+              <a:t>Now 6 to 10.</a:t>
             </a:r>
           </a:p>
         </p:txBody>
@@ -5978,8 +6598,8 @@
         </p:nvSpPr>
         <p:spPr>
           <a:xfrm>
-            <a:off x="2011680" y="1339583"/>
-            <a:ext cx="5303400" cy="411600"/>
+            <a:off x="1005855" y="3097940"/>
+            <a:ext cx="6400800" cy="457200"/>
           </a:xfrm>
           <a:prstGeom prst="rect">
             <a:avLst/>
@@ -5994,7 +6614,7 @@
           <a:p>
             <a:pPr algn="l"/>
             <a:r>
-              <a:rPr sz="2300" b="1" i="0" lang="th-TH" altLang="en-US">
+              <a:rPr sz="1600" b="0" i="0" lang="en-US" altLang="en-US">
                 <a:solidFill>
                   <a:srgbClr val="24333D"/>
                 </a:solidFill>
@@ -6002,7 +6622,18 @@
                 <a:ea typeface="Sarabun"/>
                 <a:cs typeface="Sarabun"/>
               </a:rPr>
-              <a:t>สวัสดีครับ</a:t>
+              <a:t>How do you ask 'what number?' </a:t>
+            </a:r>
+            <a:r>
+              <a:rPr sz="1600" b="0" i="0" lang="th-TH" altLang="en-US">
+                <a:solidFill>
+                  <a:srgbClr val="24333D"/>
+                </a:solidFill>
+                <a:latin typeface="Sarabun"/>
+                <a:ea typeface="Sarabun"/>
+                <a:cs typeface="Sarabun"/>
+              </a:rPr>
+              <a:t>เบอร์อะไร</a:t>
             </a:r>
             <a:r>
               <a:rPr sz="1500" b="0" i="1" lang="en-US" altLang="en-US">
@@ -6013,7 +6644,18 @@
                 <a:ea typeface="Sarabun"/>
                 <a:cs typeface="Sarabun"/>
               </a:rPr>
-              <a:t> (sà-wàt-dii khráp)</a:t>
+              <a:t> (ber à-rai)</a:t>
+            </a:r>
+            <a:r>
+              <a:rPr sz="1600" b="0" i="0" lang="en-US" altLang="en-US">
+                <a:solidFill>
+                  <a:srgbClr val="24333D"/>
+                </a:solidFill>
+                <a:latin typeface="Sarabun"/>
+                <a:ea typeface="Sarabun"/>
+                <a:cs typeface="Sarabun"/>
+              </a:rPr>
+              <a:t>.</a:t>
             </a:r>
           </a:p>
         </p:txBody>
@@ -6026,8 +6668,8 @@
         </p:nvSpPr>
         <p:spPr>
           <a:xfrm>
-            <a:off x="2011693" y="1721362"/>
-            <a:ext cx="5303400" cy="320100"/>
+            <a:off x="1097280" y="3686175"/>
+            <a:ext cx="6400800" cy="457200"/>
           </a:xfrm>
           <a:prstGeom prst="rect">
             <a:avLst/>
@@ -6042,15 +6684,15 @@
           <a:p>
             <a:pPr algn="l"/>
             <a:r>
-              <a:rPr sz="1500" b="0" i="0" lang="en-US" altLang="en-US">
-                <a:solidFill>
-                  <a:srgbClr val="566873"/>
-                </a:solidFill>
-                <a:latin typeface="Sarabun"/>
-                <a:ea typeface="Sarabun"/>
-                <a:cs typeface="Sarabun"/>
-              </a:rPr>
-              <a:t>Hello.</a:t>
+              <a:rPr sz="1600" b="0" i="0" lang="en-US" altLang="en-US">
+                <a:solidFill>
+                  <a:srgbClr val="24333D"/>
+                </a:solidFill>
+                <a:latin typeface="Sarabun"/>
+                <a:ea typeface="Sarabun"/>
+                <a:cs typeface="Sarabun"/>
+              </a:rPr>
+              <a:t>Say 'I am 30 years old' in Thai.</a:t>
             </a:r>
           </a:p>
         </p:txBody>
@@ -6063,8 +6705,8 @@
         </p:nvSpPr>
         <p:spPr>
           <a:xfrm>
-            <a:off x="731520" y="2199095"/>
-            <a:ext cx="1097400" cy="292500"/>
+            <a:off x="1005855" y="4412835"/>
+            <a:ext cx="6400800" cy="457200"/>
           </a:xfrm>
           <a:prstGeom prst="rect">
             <a:avLst/>
@@ -6077,46 +6719,9 @@
           </a:bodyPr>
           <a:lstStyle/>
           <a:p>
-            <a:pPr algn="ctr"/>
-            <a:r>
-              <a:rPr sz="1200" b="1" i="0" lang="en-US" altLang="en-US">
-                <a:solidFill>
-                  <a:srgbClr val="FFFFFF"/>
-                </a:solidFill>
-                <a:latin typeface="Sarabun"/>
-                <a:ea typeface="Sarabun"/>
-                <a:cs typeface="Sarabun"/>
-              </a:rPr>
-              <a:t>Staff</a:t>
-            </a:r>
-          </a:p>
-        </p:txBody>
-      </p:sp>
-      <p:sp>
-        <p:nvSpPr>
-          <p:cNvPr id="9" name="TextBox 8"/>
-          <p:cNvSpPr txBox="1"/>
-          <p:nvPr/>
-        </p:nvSpPr>
-        <p:spPr>
-          <a:xfrm>
-            <a:off x="2011743" y="2048200"/>
-            <a:ext cx="5303400" cy="411600"/>
-          </a:xfrm>
-          <a:prstGeom prst="rect">
-            <a:avLst/>
-          </a:prstGeom>
-          <a:noFill/>
-        </p:spPr>
-        <p:txBody>
-          <a:bodyPr wrap="square" anchor="t">
-            <a:spAutoFit/>
-          </a:bodyPr>
-          <a:lstStyle/>
-          <a:p>
             <a:pPr algn="l"/>
             <a:r>
-              <a:rPr sz="2300" b="1" i="0" lang="th-TH" altLang="en-US">
+              <a:rPr sz="1600" b="0" i="0" lang="th-TH" altLang="en-US">
                 <a:solidFill>
                   <a:srgbClr val="24333D"/>
                 </a:solidFill>
@@ -6124,7 +6729,7 @@
                 <a:ea typeface="Sarabun"/>
                 <a:cs typeface="Sarabun"/>
               </a:rPr>
-              <a:t>สวัสดีค่ะ ห้องเบอร์อะไรคะ</a:t>
+              <a:t>สี่</a:t>
             </a:r>
             <a:r>
               <a:rPr sz="1500" b="0" i="1" lang="en-US" altLang="en-US">
@@ -6135,110 +6740,10 @@
                 <a:ea typeface="Sarabun"/>
                 <a:cs typeface="Sarabun"/>
               </a:rPr>
-              <a:t> (sà-wàt-dii khâ hâawng ber à-rai khá)</a:t>
-            </a:r>
-          </a:p>
-        </p:txBody>
-      </p:sp>
-      <p:sp>
-        <p:nvSpPr>
-          <p:cNvPr id="10" name="TextBox 9"/>
-          <p:cNvSpPr txBox="1"/>
-          <p:nvPr/>
-        </p:nvSpPr>
-        <p:spPr>
-          <a:xfrm>
-            <a:off x="2011693" y="2482592"/>
-            <a:ext cx="5303400" cy="320100"/>
-          </a:xfrm>
-          <a:prstGeom prst="rect">
-            <a:avLst/>
-          </a:prstGeom>
-          <a:noFill/>
-        </p:spPr>
-        <p:txBody>
-          <a:bodyPr wrap="square" anchor="t">
-            <a:spAutoFit/>
-          </a:bodyPr>
-          <a:lstStyle/>
-          <a:p>
-            <a:pPr algn="l"/>
-            <a:r>
-              <a:rPr sz="1500" b="0" i="0" lang="en-US" altLang="en-US">
-                <a:solidFill>
-                  <a:srgbClr val="566873"/>
-                </a:solidFill>
-                <a:latin typeface="Sarabun"/>
-                <a:ea typeface="Sarabun"/>
-                <a:cs typeface="Sarabun"/>
-              </a:rPr>
-              <a:t>Hello. What is the room number?</a:t>
-            </a:r>
-          </a:p>
-        </p:txBody>
-      </p:sp>
-      <p:sp>
-        <p:nvSpPr>
-          <p:cNvPr id="11" name="TextBox 10"/>
-          <p:cNvSpPr txBox="1"/>
-          <p:nvPr/>
-        </p:nvSpPr>
-        <p:spPr>
-          <a:xfrm>
-            <a:off x="731583" y="2962650"/>
-            <a:ext cx="1097400" cy="292500"/>
-          </a:xfrm>
-          <a:prstGeom prst="rect">
-            <a:avLst/>
-          </a:prstGeom>
-          <a:noFill/>
-        </p:spPr>
-        <p:txBody>
-          <a:bodyPr wrap="square" anchor="t">
-            <a:spAutoFit/>
-          </a:bodyPr>
-          <a:lstStyle/>
-          <a:p>
-            <a:pPr algn="ctr"/>
-            <a:r>
-              <a:rPr sz="1200" b="1" i="0" lang="en-US" altLang="en-US">
-                <a:solidFill>
-                  <a:srgbClr val="FFFFFF"/>
-                </a:solidFill>
-                <a:latin typeface="Sarabun"/>
-                <a:ea typeface="Sarabun"/>
-                <a:cs typeface="Sarabun"/>
-              </a:rPr>
-              <a:t>You</a:t>
-            </a:r>
-          </a:p>
-        </p:txBody>
-      </p:sp>
-      <p:sp>
-        <p:nvSpPr>
-          <p:cNvPr id="12" name="TextBox 11"/>
-          <p:cNvSpPr txBox="1"/>
-          <p:nvPr/>
-        </p:nvSpPr>
-        <p:spPr>
-          <a:xfrm>
-            <a:off x="2011693" y="2878130"/>
-            <a:ext cx="5303400" cy="411600"/>
-          </a:xfrm>
-          <a:prstGeom prst="rect">
-            <a:avLst/>
-          </a:prstGeom>
-          <a:noFill/>
-        </p:spPr>
-        <p:txBody>
-          <a:bodyPr wrap="square" anchor="t">
-            <a:spAutoFit/>
-          </a:bodyPr>
-          <a:lstStyle/>
-          <a:p>
-            <a:pPr algn="l"/>
-            <a:r>
-              <a:rPr sz="2300" b="1" i="0" lang="th-TH" altLang="en-US">
+              <a:t> (sìi)</a:t>
+            </a:r>
+            <a:r>
+              <a:rPr sz="1600" b="0" i="0" lang="en-US" altLang="en-US">
                 <a:solidFill>
                   <a:srgbClr val="24333D"/>
                 </a:solidFill>
@@ -6246,428 +6751,14 @@
                 <a:ea typeface="Sarabun"/>
                 <a:cs typeface="Sarabun"/>
               </a:rPr>
-              <a:t>ห้า-ศูนย์-สองครับ</a:t>
-            </a:r>
-            <a:r>
-              <a:rPr sz="1500" b="0" i="1" lang="en-US" altLang="en-US">
-                <a:solidFill>
-                  <a:srgbClr val="566873"/>
-                </a:solidFill>
-                <a:latin typeface="Sarabun"/>
-                <a:ea typeface="Sarabun"/>
-                <a:cs typeface="Sarabun"/>
-              </a:rPr>
-              <a:t> (hâa-sǔun-sǎawng khráp)</a:t>
-            </a:r>
-          </a:p>
-        </p:txBody>
-      </p:sp>
-      <p:sp>
-        <p:nvSpPr>
-          <p:cNvPr id="13" name="TextBox 12"/>
-          <p:cNvSpPr txBox="1"/>
-          <p:nvPr/>
-        </p:nvSpPr>
-        <p:spPr>
-          <a:xfrm>
-            <a:off x="2011693" y="3253010"/>
-            <a:ext cx="5303400" cy="320100"/>
-          </a:xfrm>
-          <a:prstGeom prst="rect">
-            <a:avLst/>
-          </a:prstGeom>
-          <a:noFill/>
-        </p:spPr>
-        <p:txBody>
-          <a:bodyPr wrap="square" anchor="t">
-            <a:spAutoFit/>
-          </a:bodyPr>
-          <a:lstStyle/>
-          <a:p>
-            <a:pPr algn="l"/>
-            <a:r>
-              <a:rPr sz="1500" b="0" i="0" lang="en-US" altLang="en-US">
-                <a:solidFill>
-                  <a:srgbClr val="566873"/>
-                </a:solidFill>
-                <a:latin typeface="Sarabun"/>
-                <a:ea typeface="Sarabun"/>
-                <a:cs typeface="Sarabun"/>
-              </a:rPr>
-              <a:t>Five-zero-two.</a:t>
-            </a:r>
-          </a:p>
-        </p:txBody>
-      </p:sp>
-      <p:sp>
-        <p:nvSpPr>
-          <p:cNvPr id="14" name="TextBox 13"/>
-          <p:cNvSpPr txBox="1"/>
-          <p:nvPr/>
-        </p:nvSpPr>
-        <p:spPr>
-          <a:xfrm>
-            <a:off x="731583" y="3726205"/>
-            <a:ext cx="1097400" cy="292500"/>
-          </a:xfrm>
-          <a:prstGeom prst="rect">
-            <a:avLst/>
-          </a:prstGeom>
-          <a:noFill/>
-        </p:spPr>
-        <p:txBody>
-          <a:bodyPr wrap="square" anchor="t">
-            <a:spAutoFit/>
-          </a:bodyPr>
-          <a:lstStyle/>
-          <a:p>
-            <a:pPr algn="ctr"/>
-            <a:r>
-              <a:rPr sz="1200" b="1" i="0" lang="en-US" altLang="en-US">
-                <a:solidFill>
-                  <a:srgbClr val="FFFFFF"/>
-                </a:solidFill>
-                <a:latin typeface="Sarabun"/>
-                <a:ea typeface="Sarabun"/>
-                <a:cs typeface="Sarabun"/>
-              </a:rPr>
-              <a:t>Staff</a:t>
-            </a:r>
-          </a:p>
-        </p:txBody>
-      </p:sp>
-      <p:sp>
-        <p:nvSpPr>
-          <p:cNvPr id="15" name="TextBox 14"/>
-          <p:cNvSpPr txBox="1"/>
-          <p:nvPr/>
-        </p:nvSpPr>
-        <p:spPr>
-          <a:xfrm>
-            <a:off x="2011693" y="3666773"/>
-            <a:ext cx="5303400" cy="411600"/>
-          </a:xfrm>
-          <a:prstGeom prst="rect">
-            <a:avLst/>
-          </a:prstGeom>
-          <a:noFill/>
-        </p:spPr>
-        <p:txBody>
-          <a:bodyPr wrap="square" anchor="t">
-            <a:spAutoFit/>
-          </a:bodyPr>
-          <a:lstStyle/>
-          <a:p>
-            <a:pPr algn="l"/>
-            <a:r>
-              <a:rPr sz="2300" b="1" i="0" lang="th-TH" altLang="en-US">
-                <a:solidFill>
-                  <a:srgbClr val="24333D"/>
-                </a:solidFill>
-                <a:latin typeface="Sarabun"/>
-                <a:ea typeface="Sarabun"/>
-                <a:cs typeface="Sarabun"/>
-              </a:rPr>
-              <a:t>ค่ะ คุณอายุเท่าไหร่คะ</a:t>
-            </a:r>
-            <a:r>
-              <a:rPr sz="1500" b="0" i="1" lang="en-US" altLang="en-US">
-                <a:solidFill>
-                  <a:srgbClr val="566873"/>
-                </a:solidFill>
-                <a:latin typeface="Sarabun"/>
-                <a:ea typeface="Sarabun"/>
-                <a:cs typeface="Sarabun"/>
-              </a:rPr>
-              <a:t> (khâ khun aa-yú thâo-rài khá)</a:t>
-            </a:r>
-          </a:p>
-        </p:txBody>
-      </p:sp>
-      <p:sp>
-        <p:nvSpPr>
-          <p:cNvPr id="16" name="TextBox 15"/>
-          <p:cNvSpPr txBox="1"/>
-          <p:nvPr/>
-        </p:nvSpPr>
-        <p:spPr>
-          <a:xfrm>
-            <a:off x="2011680" y="4072527"/>
-            <a:ext cx="5303400" cy="320100"/>
-          </a:xfrm>
-          <a:prstGeom prst="rect">
-            <a:avLst/>
-          </a:prstGeom>
-          <a:noFill/>
-        </p:spPr>
-        <p:txBody>
-          <a:bodyPr wrap="square" anchor="t">
-            <a:spAutoFit/>
-          </a:bodyPr>
-          <a:lstStyle/>
-          <a:p>
-            <a:pPr algn="l"/>
-            <a:r>
-              <a:rPr sz="1500" b="0" i="0" lang="en-US" altLang="en-US">
-                <a:solidFill>
-                  <a:srgbClr val="566873"/>
-                </a:solidFill>
-                <a:latin typeface="Sarabun"/>
-                <a:ea typeface="Sarabun"/>
-                <a:cs typeface="Sarabun"/>
-              </a:rPr>
-              <a:t>Okay. How old are you?</a:t>
-            </a:r>
-          </a:p>
-        </p:txBody>
-      </p:sp>
-      <p:sp>
-        <p:nvSpPr>
-          <p:cNvPr id="17" name="TextBox 16"/>
-          <p:cNvSpPr txBox="1"/>
-          <p:nvPr/>
-        </p:nvSpPr>
-        <p:spPr>
-          <a:xfrm>
-            <a:off x="791795" y="4489760"/>
-            <a:ext cx="1097400" cy="292500"/>
-          </a:xfrm>
-          <a:prstGeom prst="rect">
-            <a:avLst/>
-          </a:prstGeom>
-          <a:noFill/>
-        </p:spPr>
-        <p:txBody>
-          <a:bodyPr wrap="square" anchor="t">
-            <a:spAutoFit/>
-          </a:bodyPr>
-          <a:lstStyle/>
-          <a:p>
-            <a:pPr algn="ctr"/>
-            <a:r>
-              <a:rPr sz="1200" b="1" i="0" lang="en-US" altLang="en-US">
-                <a:solidFill>
-                  <a:srgbClr val="FFFFFF"/>
-                </a:solidFill>
-                <a:latin typeface="Sarabun"/>
-                <a:ea typeface="Sarabun"/>
-                <a:cs typeface="Sarabun"/>
-              </a:rPr>
-              <a:t>You</a:t>
-            </a:r>
-          </a:p>
-        </p:txBody>
-      </p:sp>
-      <p:sp>
-        <p:nvSpPr>
-          <p:cNvPr id="18" name="TextBox 17"/>
-          <p:cNvSpPr txBox="1"/>
-          <p:nvPr/>
-        </p:nvSpPr>
-        <p:spPr>
-          <a:xfrm>
-            <a:off x="2011755" y="4366290"/>
-            <a:ext cx="5303400" cy="411600"/>
-          </a:xfrm>
-          <a:prstGeom prst="rect">
-            <a:avLst/>
-          </a:prstGeom>
-          <a:noFill/>
-        </p:spPr>
-        <p:txBody>
-          <a:bodyPr wrap="square" anchor="t">
-            <a:spAutoFit/>
-          </a:bodyPr>
-          <a:lstStyle/>
-          <a:p>
-            <a:pPr algn="l"/>
-            <a:r>
-              <a:rPr sz="2300" b="1" i="0" lang="th-TH" altLang="en-US">
-                <a:solidFill>
-                  <a:srgbClr val="24333D"/>
-                </a:solidFill>
-                <a:latin typeface="Sarabun"/>
-                <a:ea typeface="Sarabun"/>
-                <a:cs typeface="Sarabun"/>
-              </a:rPr>
-              <a:t>ผมอายุสิบปีครับ</a:t>
-            </a:r>
-            <a:r>
-              <a:rPr sz="1500" b="0" i="1" lang="en-US" altLang="en-US">
-                <a:solidFill>
-                  <a:srgbClr val="566873"/>
-                </a:solidFill>
-                <a:latin typeface="Sarabun"/>
-                <a:ea typeface="Sarabun"/>
-                <a:cs typeface="Sarabun"/>
-              </a:rPr>
-              <a:t> (phǒm aa-yú sìp bpii khráp)</a:t>
-            </a:r>
-          </a:p>
-        </p:txBody>
-      </p:sp>
-      <p:sp>
-        <p:nvSpPr>
-          <p:cNvPr id="19" name="TextBox 18"/>
-          <p:cNvSpPr txBox="1"/>
-          <p:nvPr/>
-        </p:nvSpPr>
-        <p:spPr>
-          <a:xfrm>
-            <a:off x="2011693" y="4759532"/>
-            <a:ext cx="5303400" cy="320100"/>
-          </a:xfrm>
-          <a:prstGeom prst="rect">
-            <a:avLst/>
-          </a:prstGeom>
-          <a:noFill/>
-        </p:spPr>
-        <p:txBody>
-          <a:bodyPr wrap="square" anchor="t">
-            <a:spAutoFit/>
-          </a:bodyPr>
-          <a:lstStyle/>
-          <a:p>
-            <a:pPr algn="l"/>
-            <a:r>
-              <a:rPr sz="1500" b="0" i="0" lang="en-US" altLang="en-US">
-                <a:solidFill>
-                  <a:srgbClr val="566873"/>
-                </a:solidFill>
-                <a:latin typeface="Sarabun"/>
-                <a:ea typeface="Sarabun"/>
-                <a:cs typeface="Sarabun"/>
-              </a:rPr>
-              <a:t>I am ten years old.</a:t>
-            </a:r>
-          </a:p>
-        </p:txBody>
-      </p:sp>
-      <p:sp>
-        <p:nvSpPr>
-          <p:cNvPr id="20" name="TextBox 19"/>
-          <p:cNvSpPr txBox="1"/>
-          <p:nvPr/>
-        </p:nvSpPr>
-        <p:spPr>
-          <a:xfrm>
-            <a:off x="731633" y="5253290"/>
-            <a:ext cx="1097400" cy="292500"/>
-          </a:xfrm>
-          <a:prstGeom prst="rect">
-            <a:avLst/>
-          </a:prstGeom>
-          <a:noFill/>
-        </p:spPr>
-        <p:txBody>
-          <a:bodyPr wrap="square" anchor="t">
-            <a:spAutoFit/>
-          </a:bodyPr>
-          <a:lstStyle/>
-          <a:p>
-            <a:pPr algn="ctr"/>
-            <a:r>
-              <a:rPr sz="1200" b="1" i="0" lang="en-US" altLang="en-US">
-                <a:solidFill>
-                  <a:srgbClr val="FFFFFF"/>
-                </a:solidFill>
-                <a:latin typeface="Sarabun"/>
-                <a:ea typeface="Sarabun"/>
-                <a:cs typeface="Sarabun"/>
-              </a:rPr>
-              <a:t>Staff</a:t>
-            </a:r>
-          </a:p>
-        </p:txBody>
-      </p:sp>
-      <p:sp>
-        <p:nvSpPr>
-          <p:cNvPr id="21" name="TextBox 20"/>
-          <p:cNvSpPr txBox="1"/>
-          <p:nvPr/>
-        </p:nvSpPr>
-        <p:spPr>
-          <a:xfrm>
-            <a:off x="2011680" y="5175433"/>
-            <a:ext cx="5303400" cy="411600"/>
-          </a:xfrm>
-          <a:prstGeom prst="rect">
-            <a:avLst/>
-          </a:prstGeom>
-          <a:noFill/>
-        </p:spPr>
-        <p:txBody>
-          <a:bodyPr wrap="square" anchor="t">
-            <a:spAutoFit/>
-          </a:bodyPr>
-          <a:lstStyle/>
-          <a:p>
-            <a:pPr algn="l"/>
-            <a:r>
-              <a:rPr sz="2300" b="1" i="0" lang="th-TH" altLang="en-US">
-                <a:solidFill>
-                  <a:srgbClr val="24333D"/>
-                </a:solidFill>
-                <a:latin typeface="Sarabun"/>
-                <a:ea typeface="Sarabun"/>
-                <a:cs typeface="Sarabun"/>
-              </a:rPr>
-              <a:t>สิบปีค่ะ ขอบคุณค่ะ</a:t>
-            </a:r>
-            <a:r>
-              <a:rPr sz="1500" b="0" i="1" lang="en-US" altLang="en-US">
-                <a:solidFill>
-                  <a:srgbClr val="566873"/>
-                </a:solidFill>
-                <a:latin typeface="Sarabun"/>
-                <a:ea typeface="Sarabun"/>
-                <a:cs typeface="Sarabun"/>
-              </a:rPr>
-              <a:t> (sìp bpii khâ khàawp-khun khâ)</a:t>
-            </a:r>
-          </a:p>
-        </p:txBody>
-      </p:sp>
-      <p:sp>
-        <p:nvSpPr>
-          <p:cNvPr id="22" name="TextBox 21"/>
-          <p:cNvSpPr txBox="1"/>
-          <p:nvPr/>
-        </p:nvSpPr>
-        <p:spPr>
-          <a:xfrm>
-            <a:off x="2011693" y="5571112"/>
-            <a:ext cx="5303400" cy="320100"/>
-          </a:xfrm>
-          <a:prstGeom prst="rect">
-            <a:avLst/>
-          </a:prstGeom>
-          <a:noFill/>
-        </p:spPr>
-        <p:txBody>
-          <a:bodyPr wrap="square" anchor="t">
-            <a:spAutoFit/>
-          </a:bodyPr>
-          <a:lstStyle/>
-          <a:p>
-            <a:pPr algn="l"/>
-            <a:r>
-              <a:rPr sz="1500" b="0" i="0" lang="en-US" altLang="en-US">
-                <a:solidFill>
-                  <a:srgbClr val="566873"/>
-                </a:solidFill>
-                <a:latin typeface="Sarabun"/>
-                <a:ea typeface="Sarabun"/>
-                <a:cs typeface="Sarabun"/>
-              </a:rPr>
-              <a:t>Ten years old. Thank you.</a:t>
-            </a:r>
-          </a:p>
-        </p:txBody>
-      </p:sp>
-      <p:sp>
-        <p:nvSpPr>
-          <p:cNvPr id="23" name="__pip_placeholder__"/>
+              <a:t> has a low tone. What happens with a rising tone?</a:t>
+            </a:r>
+          </a:p>
+        </p:txBody>
+      </p:sp>
+      <p:sp>
+        <p:nvSpPr>
+          <p:cNvPr id="9" name="__pip_placeholder__"/>
           <p:cNvSpPr/>
           <p:nvPr/>
         </p:nvSpPr>
@@ -6742,7 +6833,7 @@
       <p:grpSpPr/>
       <p:pic>
         <p:nvPicPr>
-          <p:cNvPr id="2" name="Picture 1" descr="slide-09.png"/>
+          <p:cNvPr id="2" name="Picture 1" descr="slide-01.png"/>
           <p:cNvPicPr>
             <a:picLocks noChangeAspect="1"/>
           </p:cNvPicPr>
@@ -6772,8 +6863,8 @@
         </p:nvSpPr>
         <p:spPr>
           <a:xfrm>
-            <a:off x="1137970" y="1015518"/>
-            <a:ext cx="6858000" cy="457200"/>
+            <a:off x="731520" y="1371600"/>
+            <a:ext cx="6858000" cy="365760"/>
           </a:xfrm>
           <a:prstGeom prst="rect">
             <a:avLst/>
@@ -6788,15 +6879,15 @@
           <a:p>
             <a:pPr algn="l"/>
             <a:r>
-              <a:rPr sz="3000" b="1" i="0" lang="en-US" altLang="en-US">
-                <a:solidFill>
-                  <a:srgbClr val="24333D"/>
-                </a:solidFill>
-                <a:latin typeface="Sarabun"/>
-                <a:ea typeface="Sarabun"/>
-                <a:cs typeface="Sarabun"/>
-              </a:rPr>
-              <a:t>Recap</a:t>
+              <a:rPr sz="1900" b="0" i="0" lang="en-US" altLang="en-US">
+                <a:solidFill>
+                  <a:srgbClr val="566873"/>
+                </a:solidFill>
+                <a:latin typeface="Sarabun"/>
+                <a:ea typeface="Sarabun"/>
+                <a:cs typeface="Sarabun"/>
+              </a:rPr>
+              <a:t>M01-L004</a:t>
             </a:r>
           </a:p>
         </p:txBody>
@@ -6809,8 +6900,8 @@
         </p:nvSpPr>
         <p:spPr>
           <a:xfrm>
-            <a:off x="1097280" y="1776945"/>
-            <a:ext cx="6400800" cy="457200"/>
+            <a:off x="731520" y="1920240"/>
+            <a:ext cx="6858000" cy="914400"/>
           </a:xfrm>
           <a:prstGeom prst="rect">
             <a:avLst/>
@@ -6825,7 +6916,7 @@
           <a:p>
             <a:pPr algn="l"/>
             <a:r>
-              <a:rPr sz="1600" b="0" i="0" lang="en-US" altLang="en-US">
+              <a:rPr sz="3800" b="1" i="0" lang="en-US" altLang="en-US">
                 <a:solidFill>
                   <a:srgbClr val="24333D"/>
                 </a:solidFill>
@@ -6833,7 +6924,7 @@
                 <a:ea typeface="Sarabun"/>
                 <a:cs typeface="Sarabun"/>
               </a:rPr>
-              <a:t>Count 0 to 5 in Thai. Go.</a:t>
+              <a:t>Closing</a:t>
             </a:r>
           </a:p>
         </p:txBody>
@@ -6846,8 +6937,8 @@
         </p:nvSpPr>
         <p:spPr>
           <a:xfrm>
-            <a:off x="1097280" y="2437455"/>
-            <a:ext cx="6400800" cy="457200"/>
+            <a:off x="731520" y="3200400"/>
+            <a:ext cx="6858000" cy="411480"/>
           </a:xfrm>
           <a:prstGeom prst="rect">
             <a:avLst/>
@@ -6870,7 +6961,7 @@
                 <a:ea typeface="Sarabun"/>
                 <a:cs typeface="Sarabun"/>
               </a:rPr>
-              <a:t>Now 6 to 10.</a:t>
+              <a:t>By the end, you can hear, repeat, and produce Thai digits 0-10 in room-number, counting, and simple age exchanges.</a:t>
             </a:r>
           </a:p>
         </p:txBody>
@@ -6883,8 +6974,8 @@
         </p:nvSpPr>
         <p:spPr>
           <a:xfrm>
-            <a:off x="1005855" y="3097940"/>
-            <a:ext cx="6400800" cy="457200"/>
+            <a:off x="731520" y="3657600"/>
+            <a:ext cx="6858000" cy="411480"/>
           </a:xfrm>
           <a:prstGeom prst="rect">
             <a:avLst/>
@@ -6907,40 +6998,7 @@
                 <a:ea typeface="Sarabun"/>
                 <a:cs typeface="Sarabun"/>
               </a:rPr>
-              <a:t>How do you ask 'what number?' </a:t>
-            </a:r>
-            <a:r>
-              <a:rPr sz="1600" b="0" i="0" lang="th-TH" altLang="en-US">
-                <a:solidFill>
-                  <a:srgbClr val="24333D"/>
-                </a:solidFill>
-                <a:latin typeface="Sarabun"/>
-                <a:ea typeface="Sarabun"/>
-                <a:cs typeface="Sarabun"/>
-              </a:rPr>
-              <a:t>เบอร์อะไร</a:t>
-            </a:r>
-            <a:r>
-              <a:rPr sz="1500" b="0" i="1" lang="en-US" altLang="en-US">
-                <a:solidFill>
-                  <a:srgbClr val="566873"/>
-                </a:solidFill>
-                <a:latin typeface="Sarabun"/>
-                <a:ea typeface="Sarabun"/>
-                <a:cs typeface="Sarabun"/>
-              </a:rPr>
-              <a:t> (ber à-rai)</a:t>
-            </a:r>
-            <a:r>
-              <a:rPr sz="1600" b="0" i="0" lang="en-US" altLang="en-US">
-                <a:solidFill>
-                  <a:srgbClr val="24333D"/>
-                </a:solidFill>
-                <a:latin typeface="Sarabun"/>
-                <a:ea typeface="Sarabun"/>
-                <a:cs typeface="Sarabun"/>
-              </a:rPr>
-              <a:t>.</a:t>
+              <a:t>Next: First Contact and Courtesy continues.</a:t>
             </a:r>
           </a:p>
         </p:txBody>
@@ -6953,8 +7011,8 @@
         </p:nvSpPr>
         <p:spPr>
           <a:xfrm>
-            <a:off x="1097280" y="3686175"/>
-            <a:ext cx="6400800" cy="457200"/>
+            <a:off x="731520" y="5303520"/>
+            <a:ext cx="6858000" cy="365760"/>
           </a:xfrm>
           <a:prstGeom prst="rect">
             <a:avLst/>
@@ -6969,55 +7027,7 @@
           <a:p>
             <a:pPr algn="l"/>
             <a:r>
-              <a:rPr sz="1600" b="0" i="0" lang="en-US" altLang="en-US">
-                <a:solidFill>
-                  <a:srgbClr val="24333D"/>
-                </a:solidFill>
-                <a:latin typeface="Sarabun"/>
-                <a:ea typeface="Sarabun"/>
-                <a:cs typeface="Sarabun"/>
-              </a:rPr>
-              <a:t>Say 'I am 8 years old' in Thai.</a:t>
-            </a:r>
-          </a:p>
-        </p:txBody>
-      </p:sp>
-      <p:sp>
-        <p:nvSpPr>
-          <p:cNvPr id="8" name="TextBox 7"/>
-          <p:cNvSpPr txBox="1"/>
-          <p:nvPr/>
-        </p:nvSpPr>
-        <p:spPr>
-          <a:xfrm>
-            <a:off x="1005855" y="4412835"/>
-            <a:ext cx="6400800" cy="457200"/>
-          </a:xfrm>
-          <a:prstGeom prst="rect">
-            <a:avLst/>
-          </a:prstGeom>
-          <a:noFill/>
-        </p:spPr>
-        <p:txBody>
-          <a:bodyPr wrap="square" anchor="t">
-            <a:spAutoFit/>
-          </a:bodyPr>
-          <a:lstStyle/>
-          <a:p>
-            <a:pPr algn="l"/>
-            <a:r>
-              <a:rPr sz="1600" b="0" i="0" lang="th-TH" altLang="en-US">
-                <a:solidFill>
-                  <a:srgbClr val="24333D"/>
-                </a:solidFill>
-                <a:latin typeface="Sarabun"/>
-                <a:ea typeface="Sarabun"/>
-                <a:cs typeface="Sarabun"/>
-              </a:rPr>
-              <a:t>สี่</a:t>
-            </a:r>
-            <a:r>
-              <a:rPr sz="1500" b="0" i="1" lang="en-US" altLang="en-US">
+              <a:rPr sz="1500" b="0" i="0" lang="en-US" altLang="en-US">
                 <a:solidFill>
                   <a:srgbClr val="566873"/>
                 </a:solidFill>
@@ -7025,25 +7035,14 @@
                 <a:ea typeface="Sarabun"/>
                 <a:cs typeface="Sarabun"/>
               </a:rPr>
-              <a:t> (sìi)</a:t>
-            </a:r>
-            <a:r>
-              <a:rPr sz="1600" b="0" i="0" lang="en-US" altLang="en-US">
-                <a:solidFill>
-                  <a:srgbClr val="24333D"/>
-                </a:solidFill>
-                <a:latin typeface="Sarabun"/>
-                <a:ea typeface="Sarabun"/>
-                <a:cs typeface="Sarabun"/>
-              </a:rPr>
-              <a:t> has a low tone. What happens with a rising tone?</a:t>
-            </a:r>
-          </a:p>
-        </p:txBody>
-      </p:sp>
-      <p:sp>
-        <p:nvSpPr>
-          <p:cNvPr id="9" name="__pip_placeholder__"/>
+              <a:t>Immersion Thai with Nine</a:t>
+            </a:r>
+          </a:p>
+        </p:txBody>
+      </p:sp>
+      <p:sp>
+        <p:nvSpPr>
+          <p:cNvPr id="8" name="__pip_placeholder__"/>
           <p:cNvSpPr/>
           <p:nvPr/>
         </p:nvSpPr>

--- a/course/modules/M01/L004/M01-L004-canva-deck.pptx
+++ b/course/modules/M01/L004/M01-L004-canva-deck.pptx
@@ -4338,7 +4338,7 @@
                 <a:ea typeface="Sarabun"/>
                 <a:cs typeface="Sarabun"/>
               </a:rPr>
-              <a:t>Ask for a number and say your age</a:t>
+              <a:t>Ask what number and say your age</a:t>
             </a:r>
           </a:p>
         </p:txBody>
@@ -4375,7 +4375,7 @@
                 <a:ea typeface="Sarabun"/>
                 <a:cs typeface="Sarabun"/>
               </a:rPr>
-              <a:t>Show the two practical patterns: </a:t>
+              <a:t>Show </a:t>
             </a:r>
             <a:r>
               <a:rPr sz="1500" b="0" i="0" lang="th-TH" altLang="en-US">
@@ -4799,7 +4799,7 @@
                 <a:ea typeface="Sarabun"/>
                 <a:cs typeface="Sarabun"/>
               </a:rPr>
-              <a:t>4. สิบ</a:t>
+              <a:t>4. ฉัน</a:t>
             </a:r>
             <a:r>
               <a:rPr sz="1500" b="0" i="1" lang="en-US" altLang="en-US">
@@ -4810,7 +4810,7 @@
                 <a:ea typeface="Sarabun"/>
                 <a:cs typeface="Sarabun"/>
               </a:rPr>
-              <a:t> (sìp)</a:t>
+              <a:t> (chǎn)</a:t>
             </a:r>
           </a:p>
         </p:txBody>
@@ -4869,7 +4869,7 @@
                 <a:ea typeface="Sarabun"/>
                 <a:cs typeface="Sarabun"/>
               </a:rPr>
-              <a:t> | chǎn aa-yú ... bpii | I am ... years old (female)</a:t>
+              <a:t> | chǎn aa-yú ... bpii | I am ... years old</a:t>
             </a:r>
           </a:p>
         </p:txBody>
@@ -4906,7 +4906,7 @@
                 <a:ea typeface="Sarabun"/>
                 <a:cs typeface="Sarabun"/>
               </a:rPr>
-              <a:t>5. สวัสดี</a:t>
+              <a:t>5. ผม</a:t>
             </a:r>
             <a:r>
               <a:rPr sz="1500" b="0" i="1" lang="en-US" altLang="en-US">
@@ -4917,7 +4917,7 @@
                 <a:ea typeface="Sarabun"/>
                 <a:cs typeface="Sarabun"/>
               </a:rPr>
-              <a:t> (sà-wàt-dii)</a:t>
+              <a:t> (phǒm)</a:t>
             </a:r>
           </a:p>
         </p:txBody>
@@ -5252,7 +5252,7 @@
                 <a:ea typeface="Sarabun"/>
                 <a:cs typeface="Sarabun"/>
               </a:rPr>
-              <a:t>่ (four) and สี (colour) with tone direction arrows.</a:t>
+              <a:t>่ (four) and สี (colour) with tone arrows.</a:t>
             </a:r>
           </a:p>
         </p:txBody>
@@ -5887,7 +5887,7 @@
                 <a:ea typeface="Sarabun"/>
                 <a:cs typeface="Sarabun"/>
               </a:rPr>
-              <a:t>Hello. What is the room number?</a:t>
+              <a:t>Hello. What room number?</a:t>
             </a:r>
           </a:p>
         </p:txBody>
@@ -6009,7 +6009,7 @@
                 <a:ea typeface="Sarabun"/>
                 <a:cs typeface="Sarabun"/>
               </a:rPr>
-              <a:t>Five-zero-two.</a:t>
+              <a:t>502.</a:t>
             </a:r>
           </a:p>
         </p:txBody>
@@ -6131,7 +6131,7 @@
                 <a:ea typeface="Sarabun"/>
                 <a:cs typeface="Sarabun"/>
               </a:rPr>
-              <a:t>Okay. How old are you?</a:t>
+              <a:t>How old are you?</a:t>
             </a:r>
           </a:p>
         </p:txBody>
@@ -6253,7 +6253,7 @@
                 <a:ea typeface="Sarabun"/>
                 <a:cs typeface="Sarabun"/>
               </a:rPr>
-              <a:t>I am thirty years old.</a:t>
+              <a:t>I am thirty.</a:t>
             </a:r>
           </a:p>
         </p:txBody>
@@ -6327,7 +6327,7 @@
                 <a:ea typeface="Sarabun"/>
                 <a:cs typeface="Sarabun"/>
               </a:rPr>
-              <a:t>ค่ะ ขอบคุณค่ะ</a:t>
+              <a:t>ขอบคุณค่ะ</a:t>
             </a:r>
             <a:r>
               <a:rPr sz="1500" b="0" i="1" lang="en-US" altLang="en-US">
@@ -6338,7 +6338,7 @@
                 <a:ea typeface="Sarabun"/>
                 <a:cs typeface="Sarabun"/>
               </a:rPr>
-              <a:t> (khâ khàawp-khun khâ)</a:t>
+              <a:t> (khàawp-khun khâ)</a:t>
             </a:r>
           </a:p>
         </p:txBody>
@@ -6375,7 +6375,7 @@
                 <a:ea typeface="Sarabun"/>
                 <a:cs typeface="Sarabun"/>
               </a:rPr>
-              <a:t>Okay. Thank you.</a:t>
+              <a:t>Thank you.</a:t>
             </a:r>
           </a:p>
         </p:txBody>
@@ -6622,7 +6622,7 @@
                 <a:ea typeface="Sarabun"/>
                 <a:cs typeface="Sarabun"/>
               </a:rPr>
-              <a:t>How do you ask 'what number?' </a:t>
+              <a:t>Ask 'what number?' </a:t>
             </a:r>
             <a:r>
               <a:rPr sz="1600" b="0" i="0" lang="th-TH" altLang="en-US">
@@ -6751,7 +6751,7 @@
                 <a:ea typeface="Sarabun"/>
                 <a:cs typeface="Sarabun"/>
               </a:rPr>
-              <a:t> has a low tone. What happens with a rising tone?</a:t>
+              <a:t> is low tone. Rising tone means what?</a:t>
             </a:r>
           </a:p>
         </p:txBody>
@@ -6961,7 +6961,7 @@
                 <a:ea typeface="Sarabun"/>
                 <a:cs typeface="Sarabun"/>
               </a:rPr>
-              <a:t>By the end, you can hear, repeat, and produce Thai digits 0-10 in room-number, counting, and simple age exchanges.</a:t>
+              <a:t>By the end, you can count 0-10, ask what number, say your age, and handle digit-by-digit codes like room numbers.</a:t>
             </a:r>
           </a:p>
         </p:txBody>

--- a/course/modules/M01/L004/M01-L004-canva-deck.pptx
+++ b/course/modules/M01/L004/M01-L004-canva-deck.pptx
@@ -3317,54 +3317,7 @@
       </p:sp>
       <p:sp>
         <p:nvSpPr>
-          <p:cNvPr id="7" name="Rounded Rectangle 6"/>
-          <p:cNvSpPr/>
-          <p:nvPr/>
-        </p:nvSpPr>
-        <p:spPr>
-          <a:xfrm>
-            <a:off x="731520" y="4114800"/>
-            <a:ext cx="7071055" cy="1289304"/>
-          </a:xfrm>
-          <a:prstGeom prst="roundRect">
-            <a:avLst>
-              <a:gd name="adj" fmla="val 6000"/>
-            </a:avLst>
-          </a:prstGeom>
-          <a:solidFill>
-            <a:srgbClr val="FFFFFF"/>
-          </a:solidFill>
-          <a:ln>
-            <a:solidFill>
-              <a:srgbClr val="D7DEE3"/>
-            </a:solidFill>
-          </a:ln>
-        </p:spPr>
-        <p:style>
-          <a:lnRef idx="1">
-            <a:schemeClr val="accent1"/>
-          </a:lnRef>
-          <a:fillRef idx="3">
-            <a:schemeClr val="accent1"/>
-          </a:fillRef>
-          <a:effectRef idx="2">
-            <a:schemeClr val="accent1"/>
-          </a:effectRef>
-          <a:fontRef idx="minor">
-            <a:schemeClr val="lt1"/>
-          </a:fontRef>
-        </p:style>
-        <p:txBody>
-          <a:bodyPr rtlCol="0" anchor="ctr"/>
-          <a:lstStyle/>
-          <a:p>
-            <a:pPr algn="ctr"/>
-          </a:p>
-        </p:txBody>
-      </p:sp>
-      <p:sp>
-        <p:nvSpPr>
-          <p:cNvPr id="8" name="TextBox 7"/>
+          <p:cNvPr id="7" name="TextBox 6"/>
           <p:cNvSpPr txBox="1"/>
           <p:nvPr/>
         </p:nvSpPr>
@@ -3386,7 +3339,7 @@
           <a:p>
             <a:pPr algn="l"/>
             <a:r>
-              <a:rPr sz="1500" b="1" i="0" lang="en-US" altLang="en-US">
+              <a:rPr sz="1700" b="1" i="0" lang="en-US" altLang="en-US">
                 <a:solidFill>
                   <a:srgbClr val="355C7D"/>
                 </a:solidFill>
@@ -3401,7 +3354,7 @@
       </p:sp>
       <p:sp>
         <p:nvSpPr>
-          <p:cNvPr id="9" name="Oval 8"/>
+          <p:cNvPr id="8" name="Oval 7"/>
           <p:cNvSpPr/>
           <p:nvPr/>
         </p:nvSpPr>
@@ -3444,7 +3397,7 @@
       </p:sp>
       <p:sp>
         <p:nvSpPr>
-          <p:cNvPr id="10" name="TextBox 9"/>
+          <p:cNvPr id="9" name="TextBox 8"/>
           <p:cNvSpPr txBox="1"/>
           <p:nvPr/>
         </p:nvSpPr>
@@ -3466,7 +3419,7 @@
           <a:p>
             <a:pPr algn="l"/>
             <a:r>
-              <a:rPr sz="1500" b="0" i="0" lang="en-US" altLang="en-US">
+              <a:rPr sz="1700" b="0" i="0" lang="en-US" altLang="en-US">
                 <a:solidFill>
                   <a:srgbClr val="24333D"/>
                 </a:solidFill>
@@ -3481,7 +3434,7 @@
       </p:sp>
       <p:sp>
         <p:nvSpPr>
-          <p:cNvPr id="11" name="Oval 10"/>
+          <p:cNvPr id="10" name="Oval 9"/>
           <p:cNvSpPr/>
           <p:nvPr/>
         </p:nvSpPr>
@@ -3524,7 +3477,7 @@
       </p:sp>
       <p:sp>
         <p:nvSpPr>
-          <p:cNvPr id="12" name="TextBox 11"/>
+          <p:cNvPr id="11" name="TextBox 10"/>
           <p:cNvSpPr txBox="1"/>
           <p:nvPr/>
         </p:nvSpPr>
@@ -3546,7 +3499,7 @@
           <a:p>
             <a:pPr algn="l"/>
             <a:r>
-              <a:rPr sz="1500" b="0" i="0" lang="en-US" altLang="en-US">
+              <a:rPr sz="1700" b="0" i="0" lang="en-US" altLang="en-US">
                 <a:solidFill>
                   <a:srgbClr val="24333D"/>
                 </a:solidFill>
@@ -3561,7 +3514,7 @@
       </p:sp>
       <p:sp>
         <p:nvSpPr>
-          <p:cNvPr id="13" name="TextBox 12"/>
+          <p:cNvPr id="12" name="TextBox 11"/>
           <p:cNvSpPr txBox="1"/>
           <p:nvPr/>
         </p:nvSpPr>
@@ -3808,17 +3761,11 @@
             <a:ext cx="3200400" cy="1234440"/>
           </a:xfrm>
           <a:prstGeom prst="roundRect">
-            <a:avLst>
-              <a:gd name="adj" fmla="val 6000"/>
-            </a:avLst>
-          </a:prstGeom>
-          <a:solidFill>
-            <a:srgbClr val="FFFFFF"/>
-          </a:solidFill>
+            <a:avLst/>
+          </a:prstGeom>
+          <a:noFill/>
           <a:ln>
-            <a:solidFill>
-              <a:srgbClr val="D7DEE3"/>
-            </a:solidFill>
+            <a:noFill/>
           </a:ln>
         </p:spPr>
         <p:style>
@@ -3904,7 +3851,7 @@
           <a:p>
             <a:pPr algn="l"/>
             <a:r>
-              <a:rPr sz="1500" b="0" i="0" lang="en-US" altLang="en-US">
+              <a:rPr sz="1700" b="0" i="0" lang="en-US" altLang="en-US">
                 <a:solidFill>
                   <a:srgbClr val="24333D"/>
                 </a:solidFill>
@@ -3929,17 +3876,11 @@
             <a:ext cx="3200400" cy="1234440"/>
           </a:xfrm>
           <a:prstGeom prst="roundRect">
-            <a:avLst>
-              <a:gd name="adj" fmla="val 6000"/>
-            </a:avLst>
-          </a:prstGeom>
-          <a:solidFill>
-            <a:srgbClr val="FFFFFF"/>
-          </a:solidFill>
+            <a:avLst/>
+          </a:prstGeom>
+          <a:noFill/>
           <a:ln>
-            <a:solidFill>
-              <a:srgbClr val="D7DEE3"/>
-            </a:solidFill>
+            <a:noFill/>
           </a:ln>
         </p:spPr>
         <p:style>
@@ -4025,7 +3966,7 @@
           <a:p>
             <a:pPr algn="l"/>
             <a:r>
-              <a:rPr sz="1500" b="0" i="0" lang="en-US" altLang="en-US">
+              <a:rPr sz="1700" b="0" i="0" lang="en-US" altLang="en-US">
                 <a:solidFill>
                   <a:srgbClr val="24333D"/>
                 </a:solidFill>
@@ -4050,17 +3991,11 @@
             <a:ext cx="3200400" cy="1234440"/>
           </a:xfrm>
           <a:prstGeom prst="roundRect">
-            <a:avLst>
-              <a:gd name="adj" fmla="val 6000"/>
-            </a:avLst>
-          </a:prstGeom>
-          <a:solidFill>
-            <a:srgbClr val="FFFFFF"/>
-          </a:solidFill>
+            <a:avLst/>
+          </a:prstGeom>
+          <a:noFill/>
           <a:ln>
-            <a:solidFill>
-              <a:srgbClr val="D7DEE3"/>
-            </a:solidFill>
+            <a:noFill/>
           </a:ln>
         </p:spPr>
         <p:style>
@@ -4146,7 +4081,7 @@
           <a:p>
             <a:pPr algn="l"/>
             <a:r>
-              <a:rPr sz="1500" b="0" i="0" lang="en-US" altLang="en-US">
+              <a:rPr sz="1700" b="0" i="0" lang="en-US" altLang="en-US">
                 <a:solidFill>
                   <a:srgbClr val="24333D"/>
                 </a:solidFill>
@@ -4171,17 +4106,11 @@
             <a:ext cx="3200400" cy="1234440"/>
           </a:xfrm>
           <a:prstGeom prst="roundRect">
-            <a:avLst>
-              <a:gd name="adj" fmla="val 6000"/>
-            </a:avLst>
-          </a:prstGeom>
-          <a:solidFill>
-            <a:srgbClr val="FFFFFF"/>
-          </a:solidFill>
+            <a:avLst/>
+          </a:prstGeom>
+          <a:noFill/>
           <a:ln>
-            <a:solidFill>
-              <a:srgbClr val="D7DEE3"/>
-            </a:solidFill>
+            <a:noFill/>
           </a:ln>
         </p:spPr>
         <p:style>
@@ -4267,7 +4196,7 @@
           <a:p>
             <a:pPr algn="l"/>
             <a:r>
-              <a:rPr sz="1500" b="0" i="0" lang="en-US" altLang="en-US">
+              <a:rPr sz="1700" b="0" i="0" lang="en-US" altLang="en-US">
                 <a:solidFill>
                   <a:srgbClr val="24333D"/>
                 </a:solidFill>
@@ -4492,17 +4421,11 @@
             <a:ext cx="2828422" cy="2240280"/>
           </a:xfrm>
           <a:prstGeom prst="roundRect">
-            <a:avLst>
-              <a:gd name="adj" fmla="val 6000"/>
-            </a:avLst>
-          </a:prstGeom>
-          <a:solidFill>
-            <a:srgbClr val="FFFFFF"/>
-          </a:solidFill>
+            <a:avLst/>
+          </a:prstGeom>
+          <a:noFill/>
           <a:ln>
-            <a:solidFill>
-              <a:srgbClr val="D7DEE3"/>
-            </a:solidFill>
+            <a:noFill/>
           </a:ln>
         </p:spPr>
         <p:style>
@@ -4553,54 +4476,7 @@
       </p:pic>
       <p:sp>
         <p:nvSpPr>
-          <p:cNvPr id="8" name="Rounded Rectangle 7"/>
-          <p:cNvSpPr/>
-          <p:nvPr/>
-        </p:nvSpPr>
-        <p:spPr>
-          <a:xfrm>
-            <a:off x="4832731" y="3703320"/>
-            <a:ext cx="2828422" cy="1289304"/>
-          </a:xfrm>
-          <a:prstGeom prst="roundRect">
-            <a:avLst>
-              <a:gd name="adj" fmla="val 6000"/>
-            </a:avLst>
-          </a:prstGeom>
-          <a:solidFill>
-            <a:srgbClr val="FFFFFF"/>
-          </a:solidFill>
-          <a:ln>
-            <a:solidFill>
-              <a:srgbClr val="D7DEE3"/>
-            </a:solidFill>
-          </a:ln>
-        </p:spPr>
-        <p:style>
-          <a:lnRef idx="1">
-            <a:schemeClr val="accent1"/>
-          </a:lnRef>
-          <a:fillRef idx="3">
-            <a:schemeClr val="accent1"/>
-          </a:fillRef>
-          <a:effectRef idx="2">
-            <a:schemeClr val="accent1"/>
-          </a:effectRef>
-          <a:fontRef idx="minor">
-            <a:schemeClr val="lt1"/>
-          </a:fontRef>
-        </p:style>
-        <p:txBody>
-          <a:bodyPr rtlCol="0" anchor="ctr"/>
-          <a:lstStyle/>
-          <a:p>
-            <a:pPr algn="ctr"/>
-          </a:p>
-        </p:txBody>
-      </p:sp>
-      <p:sp>
-        <p:nvSpPr>
-          <p:cNvPr id="9" name="TextBox 8"/>
+          <p:cNvPr id="8" name="TextBox 7"/>
           <p:cNvSpPr txBox="1"/>
           <p:nvPr/>
         </p:nvSpPr>
@@ -4622,7 +4498,7 @@
           <a:p>
             <a:pPr algn="l"/>
             <a:r>
-              <a:rPr sz="1500" b="1" i="0" lang="en-US" altLang="en-US">
+              <a:rPr sz="1700" b="1" i="0" lang="en-US" altLang="en-US">
                 <a:solidFill>
                   <a:srgbClr val="7A8F54"/>
                 </a:solidFill>
@@ -4637,7 +4513,7 @@
       </p:sp>
       <p:sp>
         <p:nvSpPr>
-          <p:cNvPr id="10" name="Oval 9"/>
+          <p:cNvPr id="9" name="Oval 8"/>
           <p:cNvSpPr/>
           <p:nvPr/>
         </p:nvSpPr>
@@ -4680,7 +4556,7 @@
       </p:sp>
       <p:sp>
         <p:nvSpPr>
-          <p:cNvPr id="11" name="TextBox 10"/>
+          <p:cNvPr id="10" name="TextBox 9"/>
           <p:cNvSpPr txBox="1"/>
           <p:nvPr/>
         </p:nvSpPr>
@@ -4702,7 +4578,7 @@
           <a:p>
             <a:pPr algn="l"/>
             <a:r>
-              <a:rPr sz="1500" b="0" i="0" lang="en-US" altLang="en-US">
+              <a:rPr sz="1700" b="0" i="0" lang="en-US" altLang="en-US">
                 <a:solidFill>
                   <a:srgbClr val="24333D"/>
                 </a:solidFill>
@@ -4717,7 +4593,7 @@
       </p:sp>
       <p:sp>
         <p:nvSpPr>
-          <p:cNvPr id="12" name="Rounded Rectangle 11"/>
+          <p:cNvPr id="11" name="Rounded Rectangle 10"/>
           <p:cNvSpPr/>
           <p:nvPr/>
         </p:nvSpPr>
@@ -4727,17 +4603,11 @@
             <a:ext cx="3889080" cy="685800"/>
           </a:xfrm>
           <a:prstGeom prst="roundRect">
-            <a:avLst>
-              <a:gd name="adj" fmla="val 6000"/>
-            </a:avLst>
-          </a:prstGeom>
-          <a:solidFill>
-            <a:srgbClr val="FFFFFF"/>
-          </a:solidFill>
+            <a:avLst/>
+          </a:prstGeom>
+          <a:noFill/>
           <a:ln>
-            <a:solidFill>
-              <a:srgbClr val="D7DEE3"/>
-            </a:solidFill>
+            <a:noFill/>
           </a:ln>
         </p:spPr>
         <p:style>
@@ -4764,7 +4634,7 @@
       </p:sp>
       <p:sp>
         <p:nvSpPr>
-          <p:cNvPr id="13" name="Rectangle 12"/>
+          <p:cNvPr id="12" name="Rectangle 11"/>
           <p:cNvSpPr/>
           <p:nvPr/>
         </p:nvSpPr>
@@ -4807,7 +4677,7 @@
       </p:sp>
       <p:sp>
         <p:nvSpPr>
-          <p:cNvPr id="14" name="TextBox 13"/>
+          <p:cNvPr id="13" name="TextBox 12"/>
           <p:cNvSpPr txBox="1"/>
           <p:nvPr/>
         </p:nvSpPr>
@@ -4829,7 +4699,7 @@
           <a:p>
             <a:pPr algn="l"/>
             <a:r>
-              <a:rPr sz="2200" b="1" i="0" lang="th-TH" altLang="en-US">
+              <a:rPr sz="2600" b="1" i="0" lang="th-TH" altLang="en-US">
                 <a:solidFill>
                   <a:srgbClr val="24333D"/>
                 </a:solidFill>
@@ -4840,7 +4710,7 @@
               <a:t>ศูนย์</a:t>
             </a:r>
             <a:r>
-              <a:rPr sz="1500" b="0" i="1" lang="en-US" altLang="en-US">
+              <a:rPr sz="1700" b="0" i="1" lang="en-US" altLang="en-US">
                 <a:solidFill>
                   <a:srgbClr val="566873"/>
                 </a:solidFill>
@@ -4855,7 +4725,7 @@
       </p:sp>
       <p:sp>
         <p:nvSpPr>
-          <p:cNvPr id="15" name="TextBox 14"/>
+          <p:cNvPr id="14" name="TextBox 13"/>
           <p:cNvSpPr txBox="1"/>
           <p:nvPr/>
         </p:nvSpPr>
@@ -4892,7 +4762,7 @@
       </p:sp>
       <p:sp>
         <p:nvSpPr>
-          <p:cNvPr id="16" name="Rounded Rectangle 15"/>
+          <p:cNvPr id="15" name="Rounded Rectangle 14"/>
           <p:cNvSpPr/>
           <p:nvPr/>
         </p:nvSpPr>
@@ -4902,17 +4772,11 @@
             <a:ext cx="3889080" cy="685800"/>
           </a:xfrm>
           <a:prstGeom prst="roundRect">
-            <a:avLst>
-              <a:gd name="adj" fmla="val 6000"/>
-            </a:avLst>
-          </a:prstGeom>
-          <a:solidFill>
-            <a:srgbClr val="FFFFFF"/>
-          </a:solidFill>
+            <a:avLst/>
+          </a:prstGeom>
+          <a:noFill/>
           <a:ln>
-            <a:solidFill>
-              <a:srgbClr val="D7DEE3"/>
-            </a:solidFill>
+            <a:noFill/>
           </a:ln>
         </p:spPr>
         <p:style>
@@ -4939,7 +4803,7 @@
       </p:sp>
       <p:sp>
         <p:nvSpPr>
-          <p:cNvPr id="17" name="Rectangle 16"/>
+          <p:cNvPr id="16" name="Rectangle 15"/>
           <p:cNvSpPr/>
           <p:nvPr/>
         </p:nvSpPr>
@@ -4982,7 +4846,7 @@
       </p:sp>
       <p:sp>
         <p:nvSpPr>
-          <p:cNvPr id="18" name="TextBox 17"/>
+          <p:cNvPr id="17" name="TextBox 16"/>
           <p:cNvSpPr txBox="1"/>
           <p:nvPr/>
         </p:nvSpPr>
@@ -5004,7 +4868,7 @@
           <a:p>
             <a:pPr algn="l"/>
             <a:r>
-              <a:rPr sz="2200" b="1" i="0" lang="th-TH" altLang="en-US">
+              <a:rPr sz="2600" b="1" i="0" lang="th-TH" altLang="en-US">
                 <a:solidFill>
                   <a:srgbClr val="24333D"/>
                 </a:solidFill>
@@ -5015,7 +4879,7 @@
               <a:t>หนึ่ง</a:t>
             </a:r>
             <a:r>
-              <a:rPr sz="1500" b="0" i="1" lang="en-US" altLang="en-US">
+              <a:rPr sz="1700" b="0" i="1" lang="en-US" altLang="en-US">
                 <a:solidFill>
                   <a:srgbClr val="566873"/>
                 </a:solidFill>
@@ -5030,7 +4894,7 @@
       </p:sp>
       <p:sp>
         <p:nvSpPr>
-          <p:cNvPr id="19" name="TextBox 18"/>
+          <p:cNvPr id="18" name="TextBox 17"/>
           <p:cNvSpPr txBox="1"/>
           <p:nvPr/>
         </p:nvSpPr>
@@ -5067,7 +4931,7 @@
       </p:sp>
       <p:sp>
         <p:nvSpPr>
-          <p:cNvPr id="20" name="Rounded Rectangle 19"/>
+          <p:cNvPr id="19" name="Rounded Rectangle 18"/>
           <p:cNvSpPr/>
           <p:nvPr/>
         </p:nvSpPr>
@@ -5077,17 +4941,11 @@
             <a:ext cx="3889080" cy="685800"/>
           </a:xfrm>
           <a:prstGeom prst="roundRect">
-            <a:avLst>
-              <a:gd name="adj" fmla="val 6000"/>
-            </a:avLst>
-          </a:prstGeom>
-          <a:solidFill>
-            <a:srgbClr val="FFFFFF"/>
-          </a:solidFill>
+            <a:avLst/>
+          </a:prstGeom>
+          <a:noFill/>
           <a:ln>
-            <a:solidFill>
-              <a:srgbClr val="D7DEE3"/>
-            </a:solidFill>
+            <a:noFill/>
           </a:ln>
         </p:spPr>
         <p:style>
@@ -5114,7 +4972,7 @@
       </p:sp>
       <p:sp>
         <p:nvSpPr>
-          <p:cNvPr id="21" name="Rectangle 20"/>
+          <p:cNvPr id="20" name="Rectangle 19"/>
           <p:cNvSpPr/>
           <p:nvPr/>
         </p:nvSpPr>
@@ -5157,7 +5015,7 @@
       </p:sp>
       <p:sp>
         <p:nvSpPr>
-          <p:cNvPr id="22" name="TextBox 21"/>
+          <p:cNvPr id="21" name="TextBox 20"/>
           <p:cNvSpPr txBox="1"/>
           <p:nvPr/>
         </p:nvSpPr>
@@ -5179,7 +5037,7 @@
           <a:p>
             <a:pPr algn="l"/>
             <a:r>
-              <a:rPr sz="2200" b="1" i="0" lang="th-TH" altLang="en-US">
+              <a:rPr sz="2600" b="1" i="0" lang="th-TH" altLang="en-US">
                 <a:solidFill>
                   <a:srgbClr val="24333D"/>
                 </a:solidFill>
@@ -5190,7 +5048,7 @@
               <a:t>สอง</a:t>
             </a:r>
             <a:r>
-              <a:rPr sz="1500" b="0" i="1" lang="en-US" altLang="en-US">
+              <a:rPr sz="1700" b="0" i="1" lang="en-US" altLang="en-US">
                 <a:solidFill>
                   <a:srgbClr val="566873"/>
                 </a:solidFill>
@@ -5205,7 +5063,7 @@
       </p:sp>
       <p:sp>
         <p:nvSpPr>
-          <p:cNvPr id="23" name="TextBox 22"/>
+          <p:cNvPr id="22" name="TextBox 21"/>
           <p:cNvSpPr txBox="1"/>
           <p:nvPr/>
         </p:nvSpPr>
@@ -5242,7 +5100,7 @@
       </p:sp>
       <p:sp>
         <p:nvSpPr>
-          <p:cNvPr id="24" name="Rounded Rectangle 23"/>
+          <p:cNvPr id="23" name="Rounded Rectangle 22"/>
           <p:cNvSpPr/>
           <p:nvPr/>
         </p:nvSpPr>
@@ -5252,17 +5110,11 @@
             <a:ext cx="3889080" cy="685800"/>
           </a:xfrm>
           <a:prstGeom prst="roundRect">
-            <a:avLst>
-              <a:gd name="adj" fmla="val 6000"/>
-            </a:avLst>
-          </a:prstGeom>
-          <a:solidFill>
-            <a:srgbClr val="FFFFFF"/>
-          </a:solidFill>
+            <a:avLst/>
+          </a:prstGeom>
+          <a:noFill/>
           <a:ln>
-            <a:solidFill>
-              <a:srgbClr val="D7DEE3"/>
-            </a:solidFill>
+            <a:noFill/>
           </a:ln>
         </p:spPr>
         <p:style>
@@ -5289,7 +5141,7 @@
       </p:sp>
       <p:sp>
         <p:nvSpPr>
-          <p:cNvPr id="25" name="Rectangle 24"/>
+          <p:cNvPr id="24" name="Rectangle 23"/>
           <p:cNvSpPr/>
           <p:nvPr/>
         </p:nvSpPr>
@@ -5332,7 +5184,7 @@
       </p:sp>
       <p:sp>
         <p:nvSpPr>
-          <p:cNvPr id="26" name="TextBox 25"/>
+          <p:cNvPr id="25" name="TextBox 24"/>
           <p:cNvSpPr txBox="1"/>
           <p:nvPr/>
         </p:nvSpPr>
@@ -5354,7 +5206,7 @@
           <a:p>
             <a:pPr algn="l"/>
             <a:r>
-              <a:rPr sz="2200" b="1" i="0" lang="th-TH" altLang="en-US">
+              <a:rPr sz="2600" b="1" i="0" lang="th-TH" altLang="en-US">
                 <a:solidFill>
                   <a:srgbClr val="24333D"/>
                 </a:solidFill>
@@ -5365,7 +5217,7 @@
               <a:t>สาม</a:t>
             </a:r>
             <a:r>
-              <a:rPr sz="1500" b="0" i="1" lang="en-US" altLang="en-US">
+              <a:rPr sz="1700" b="0" i="1" lang="en-US" altLang="en-US">
                 <a:solidFill>
                   <a:srgbClr val="566873"/>
                 </a:solidFill>
@@ -5380,7 +5232,7 @@
       </p:sp>
       <p:sp>
         <p:nvSpPr>
-          <p:cNvPr id="27" name="TextBox 26"/>
+          <p:cNvPr id="26" name="TextBox 25"/>
           <p:cNvSpPr txBox="1"/>
           <p:nvPr/>
         </p:nvSpPr>
@@ -5417,7 +5269,7 @@
       </p:sp>
       <p:sp>
         <p:nvSpPr>
-          <p:cNvPr id="28" name="Rounded Rectangle 27"/>
+          <p:cNvPr id="27" name="Rounded Rectangle 26"/>
           <p:cNvSpPr/>
           <p:nvPr/>
         </p:nvSpPr>
@@ -5427,17 +5279,11 @@
             <a:ext cx="3889080" cy="685800"/>
           </a:xfrm>
           <a:prstGeom prst="roundRect">
-            <a:avLst>
-              <a:gd name="adj" fmla="val 6000"/>
-            </a:avLst>
-          </a:prstGeom>
-          <a:solidFill>
-            <a:srgbClr val="FFFFFF"/>
-          </a:solidFill>
+            <a:avLst/>
+          </a:prstGeom>
+          <a:noFill/>
           <a:ln>
-            <a:solidFill>
-              <a:srgbClr val="D7DEE3"/>
-            </a:solidFill>
+            <a:noFill/>
           </a:ln>
         </p:spPr>
         <p:style>
@@ -5464,7 +5310,7 @@
       </p:sp>
       <p:sp>
         <p:nvSpPr>
-          <p:cNvPr id="29" name="Rectangle 28"/>
+          <p:cNvPr id="28" name="Rectangle 27"/>
           <p:cNvSpPr/>
           <p:nvPr/>
         </p:nvSpPr>
@@ -5507,7 +5353,7 @@
       </p:sp>
       <p:sp>
         <p:nvSpPr>
-          <p:cNvPr id="30" name="TextBox 29"/>
+          <p:cNvPr id="29" name="TextBox 28"/>
           <p:cNvSpPr txBox="1"/>
           <p:nvPr/>
         </p:nvSpPr>
@@ -5529,7 +5375,7 @@
           <a:p>
             <a:pPr algn="l"/>
             <a:r>
-              <a:rPr sz="2200" b="1" i="0" lang="th-TH" altLang="en-US">
+              <a:rPr sz="2600" b="1" i="0" lang="th-TH" altLang="en-US">
                 <a:solidFill>
                   <a:srgbClr val="24333D"/>
                 </a:solidFill>
@@ -5540,7 +5386,7 @@
               <a:t>สี่</a:t>
             </a:r>
             <a:r>
-              <a:rPr sz="1500" b="0" i="1" lang="en-US" altLang="en-US">
+              <a:rPr sz="1700" b="0" i="1" lang="en-US" altLang="en-US">
                 <a:solidFill>
                   <a:srgbClr val="566873"/>
                 </a:solidFill>
@@ -5555,7 +5401,7 @@
       </p:sp>
       <p:sp>
         <p:nvSpPr>
-          <p:cNvPr id="31" name="TextBox 30"/>
+          <p:cNvPr id="30" name="TextBox 29"/>
           <p:cNvSpPr txBox="1"/>
           <p:nvPr/>
         </p:nvSpPr>
@@ -5592,7 +5438,7 @@
       </p:sp>
       <p:sp>
         <p:nvSpPr>
-          <p:cNvPr id="32" name="Rounded Rectangle 31"/>
+          <p:cNvPr id="31" name="Rounded Rectangle 30"/>
           <p:cNvSpPr/>
           <p:nvPr/>
         </p:nvSpPr>
@@ -5602,17 +5448,11 @@
             <a:ext cx="3889080" cy="685800"/>
           </a:xfrm>
           <a:prstGeom prst="roundRect">
-            <a:avLst>
-              <a:gd name="adj" fmla="val 6000"/>
-            </a:avLst>
-          </a:prstGeom>
-          <a:solidFill>
-            <a:srgbClr val="FFFFFF"/>
-          </a:solidFill>
+            <a:avLst/>
+          </a:prstGeom>
+          <a:noFill/>
           <a:ln>
-            <a:solidFill>
-              <a:srgbClr val="D7DEE3"/>
-            </a:solidFill>
+            <a:noFill/>
           </a:ln>
         </p:spPr>
         <p:style>
@@ -5639,7 +5479,7 @@
       </p:sp>
       <p:sp>
         <p:nvSpPr>
-          <p:cNvPr id="33" name="Rectangle 32"/>
+          <p:cNvPr id="32" name="Rectangle 31"/>
           <p:cNvSpPr/>
           <p:nvPr/>
         </p:nvSpPr>
@@ -5682,7 +5522,7 @@
       </p:sp>
       <p:sp>
         <p:nvSpPr>
-          <p:cNvPr id="34" name="TextBox 33"/>
+          <p:cNvPr id="33" name="TextBox 32"/>
           <p:cNvSpPr txBox="1"/>
           <p:nvPr/>
         </p:nvSpPr>
@@ -5704,7 +5544,7 @@
           <a:p>
             <a:pPr algn="l"/>
             <a:r>
-              <a:rPr sz="2200" b="1" i="0" lang="th-TH" altLang="en-US">
+              <a:rPr sz="2600" b="1" i="0" lang="th-TH" altLang="en-US">
                 <a:solidFill>
                   <a:srgbClr val="24333D"/>
                 </a:solidFill>
@@ -5715,7 +5555,7 @@
               <a:t>ห้า</a:t>
             </a:r>
             <a:r>
-              <a:rPr sz="1500" b="0" i="1" lang="en-US" altLang="en-US">
+              <a:rPr sz="1700" b="0" i="1" lang="en-US" altLang="en-US">
                 <a:solidFill>
                   <a:srgbClr val="566873"/>
                 </a:solidFill>
@@ -5730,7 +5570,7 @@
       </p:sp>
       <p:sp>
         <p:nvSpPr>
-          <p:cNvPr id="35" name="TextBox 34"/>
+          <p:cNvPr id="34" name="TextBox 33"/>
           <p:cNvSpPr txBox="1"/>
           <p:nvPr/>
         </p:nvSpPr>
@@ -5767,54 +5607,7 @@
       </p:sp>
       <p:sp>
         <p:nvSpPr>
-          <p:cNvPr id="36" name="Rounded Rectangle 35"/>
-          <p:cNvSpPr/>
-          <p:nvPr/>
-        </p:nvSpPr>
-        <p:spPr>
-          <a:xfrm>
-            <a:off x="731520" y="6336792"/>
-            <a:ext cx="10058400" cy="1636776"/>
-          </a:xfrm>
-          <a:prstGeom prst="roundRect">
-            <a:avLst>
-              <a:gd name="adj" fmla="val 6000"/>
-            </a:avLst>
-          </a:prstGeom>
-          <a:solidFill>
-            <a:srgbClr val="FFFFFF"/>
-          </a:solidFill>
-          <a:ln>
-            <a:solidFill>
-              <a:srgbClr val="D7DEE3"/>
-            </a:solidFill>
-          </a:ln>
-        </p:spPr>
-        <p:style>
-          <a:lnRef idx="1">
-            <a:schemeClr val="accent1"/>
-          </a:lnRef>
-          <a:fillRef idx="3">
-            <a:schemeClr val="accent1"/>
-          </a:fillRef>
-          <a:effectRef idx="2">
-            <a:schemeClr val="accent1"/>
-          </a:effectRef>
-          <a:fontRef idx="minor">
-            <a:schemeClr val="lt1"/>
-          </a:fontRef>
-        </p:style>
-        <p:txBody>
-          <a:bodyPr rtlCol="0" anchor="ctr"/>
-          <a:lstStyle/>
-          <a:p>
-            <a:pPr algn="ctr"/>
-          </a:p>
-        </p:txBody>
-      </p:sp>
-      <p:sp>
-        <p:nvSpPr>
-          <p:cNvPr id="37" name="TextBox 36"/>
+          <p:cNvPr id="35" name="TextBox 34"/>
           <p:cNvSpPr txBox="1"/>
           <p:nvPr/>
         </p:nvSpPr>
@@ -5836,7 +5629,7 @@
           <a:p>
             <a:pPr algn="l"/>
             <a:r>
-              <a:rPr sz="1500" b="1" i="0" lang="en-US" altLang="en-US">
+              <a:rPr sz="1700" b="1" i="0" lang="en-US" altLang="en-US">
                 <a:solidFill>
                   <a:srgbClr val="C96F4A"/>
                 </a:solidFill>
@@ -5851,7 +5644,7 @@
       </p:sp>
       <p:sp>
         <p:nvSpPr>
-          <p:cNvPr id="38" name="Oval 37"/>
+          <p:cNvPr id="36" name="Oval 35"/>
           <p:cNvSpPr/>
           <p:nvPr/>
         </p:nvSpPr>
@@ -5894,7 +5687,7 @@
       </p:sp>
       <p:sp>
         <p:nvSpPr>
-          <p:cNvPr id="39" name="TextBox 38"/>
+          <p:cNvPr id="37" name="TextBox 36"/>
           <p:cNvSpPr txBox="1"/>
           <p:nvPr/>
         </p:nvSpPr>
@@ -5916,7 +5709,7 @@
           <a:p>
             <a:pPr algn="l"/>
             <a:r>
-              <a:rPr sz="1500" b="0" i="0" lang="en-US" altLang="en-US">
+              <a:rPr sz="1700" b="0" i="0" lang="en-US" altLang="en-US">
                 <a:solidFill>
                   <a:srgbClr val="24333D"/>
                 </a:solidFill>
@@ -5927,7 +5720,7 @@
               <a:t>Listen and repeat: </a:t>
             </a:r>
             <a:r>
-              <a:rPr sz="1500" b="0" i="0" lang="th-TH" altLang="en-US">
+              <a:rPr sz="1700" b="0" i="0" lang="th-TH" altLang="en-US">
                 <a:solidFill>
                   <a:srgbClr val="24333D"/>
                 </a:solidFill>
@@ -5938,7 +5731,7 @@
               <a:t>ศูนย์</a:t>
             </a:r>
             <a:r>
-              <a:rPr sz="1500" b="0" i="1" lang="en-US" altLang="en-US">
+              <a:rPr sz="1700" b="0" i="1" lang="en-US" altLang="en-US">
                 <a:solidFill>
                   <a:srgbClr val="566873"/>
                 </a:solidFill>
@@ -5949,7 +5742,7 @@
               <a:t> (sǔun)</a:t>
             </a:r>
             <a:r>
-              <a:rPr sz="1500" b="0" i="0" lang="en-US" altLang="en-US">
+              <a:rPr sz="1700" b="0" i="0" lang="en-US" altLang="en-US">
                 <a:solidFill>
                   <a:srgbClr val="24333D"/>
                 </a:solidFill>
@@ -5960,7 +5753,7 @@
               <a:t>, </a:t>
             </a:r>
             <a:r>
-              <a:rPr sz="1500" b="0" i="0" lang="th-TH" altLang="en-US">
+              <a:rPr sz="1700" b="0" i="0" lang="th-TH" altLang="en-US">
                 <a:solidFill>
                   <a:srgbClr val="24333D"/>
                 </a:solidFill>
@@ -5971,7 +5764,7 @@
               <a:t>หนึ่ง</a:t>
             </a:r>
             <a:r>
-              <a:rPr sz="1500" b="0" i="1" lang="en-US" altLang="en-US">
+              <a:rPr sz="1700" b="0" i="1" lang="en-US" altLang="en-US">
                 <a:solidFill>
                   <a:srgbClr val="566873"/>
                 </a:solidFill>
@@ -5982,7 +5775,7 @@
               <a:t> (nùeng)</a:t>
             </a:r>
             <a:r>
-              <a:rPr sz="1500" b="0" i="0" lang="en-US" altLang="en-US">
+              <a:rPr sz="1700" b="0" i="0" lang="en-US" altLang="en-US">
                 <a:solidFill>
                   <a:srgbClr val="24333D"/>
                 </a:solidFill>
@@ -5993,7 +5786,7 @@
               <a:t>, </a:t>
             </a:r>
             <a:r>
-              <a:rPr sz="1500" b="0" i="0" lang="th-TH" altLang="en-US">
+              <a:rPr sz="1700" b="0" i="0" lang="th-TH" altLang="en-US">
                 <a:solidFill>
                   <a:srgbClr val="24333D"/>
                 </a:solidFill>
@@ -6004,7 +5797,7 @@
               <a:t>สอง</a:t>
             </a:r>
             <a:r>
-              <a:rPr sz="1500" b="0" i="1" lang="en-US" altLang="en-US">
+              <a:rPr sz="1700" b="0" i="1" lang="en-US" altLang="en-US">
                 <a:solidFill>
                   <a:srgbClr val="566873"/>
                 </a:solidFill>
@@ -6015,7 +5808,7 @@
               <a:t> (sǎawng)</a:t>
             </a:r>
             <a:r>
-              <a:rPr sz="1500" b="0" i="0" lang="en-US" altLang="en-US">
+              <a:rPr sz="1700" b="0" i="0" lang="en-US" altLang="en-US">
                 <a:solidFill>
                   <a:srgbClr val="24333D"/>
                 </a:solidFill>
@@ -6026,7 +5819,7 @@
               <a:t>, </a:t>
             </a:r>
             <a:r>
-              <a:rPr sz="1500" b="0" i="0" lang="th-TH" altLang="en-US">
+              <a:rPr sz="1700" b="0" i="0" lang="th-TH" altLang="en-US">
                 <a:solidFill>
                   <a:srgbClr val="24333D"/>
                 </a:solidFill>
@@ -6037,7 +5830,7 @@
               <a:t>สาม</a:t>
             </a:r>
             <a:r>
-              <a:rPr sz="1500" b="0" i="1" lang="en-US" altLang="en-US">
+              <a:rPr sz="1700" b="0" i="1" lang="en-US" altLang="en-US">
                 <a:solidFill>
                   <a:srgbClr val="566873"/>
                 </a:solidFill>
@@ -6048,7 +5841,7 @@
               <a:t> (sǎam)</a:t>
             </a:r>
             <a:r>
-              <a:rPr sz="1500" b="0" i="0" lang="en-US" altLang="en-US">
+              <a:rPr sz="1700" b="0" i="0" lang="en-US" altLang="en-US">
                 <a:solidFill>
                   <a:srgbClr val="24333D"/>
                 </a:solidFill>
@@ -6059,7 +5852,7 @@
               <a:t>, </a:t>
             </a:r>
             <a:r>
-              <a:rPr sz="1500" b="0" i="0" lang="th-TH" altLang="en-US">
+              <a:rPr sz="1700" b="0" i="0" lang="th-TH" altLang="en-US">
                 <a:solidFill>
                   <a:srgbClr val="24333D"/>
                 </a:solidFill>
@@ -6070,7 +5863,7 @@
               <a:t>สี่</a:t>
             </a:r>
             <a:r>
-              <a:rPr sz="1500" b="0" i="1" lang="en-US" altLang="en-US">
+              <a:rPr sz="1700" b="0" i="1" lang="en-US" altLang="en-US">
                 <a:solidFill>
                   <a:srgbClr val="566873"/>
                 </a:solidFill>
@@ -6081,7 +5874,7 @@
               <a:t> (sìi)</a:t>
             </a:r>
             <a:r>
-              <a:rPr sz="1500" b="0" i="0" lang="en-US" altLang="en-US">
+              <a:rPr sz="1700" b="0" i="0" lang="en-US" altLang="en-US">
                 <a:solidFill>
                   <a:srgbClr val="24333D"/>
                 </a:solidFill>
@@ -6092,7 +5885,7 @@
               <a:t>, </a:t>
             </a:r>
             <a:r>
-              <a:rPr sz="1500" b="0" i="0" lang="th-TH" altLang="en-US">
+              <a:rPr sz="1700" b="0" i="0" lang="th-TH" altLang="en-US">
                 <a:solidFill>
                   <a:srgbClr val="24333D"/>
                 </a:solidFill>
@@ -6103,7 +5896,7 @@
               <a:t>ห้า</a:t>
             </a:r>
             <a:r>
-              <a:rPr sz="1500" b="0" i="1" lang="en-US" altLang="en-US">
+              <a:rPr sz="1700" b="0" i="1" lang="en-US" altLang="en-US">
                 <a:solidFill>
                   <a:srgbClr val="566873"/>
                 </a:solidFill>
@@ -6114,7 +5907,7 @@
               <a:t> (hâa)</a:t>
             </a:r>
             <a:r>
-              <a:rPr sz="1500" b="0" i="0" lang="en-US" altLang="en-US">
+              <a:rPr sz="1700" b="0" i="0" lang="en-US" altLang="en-US">
                 <a:solidFill>
                   <a:srgbClr val="24333D"/>
                 </a:solidFill>
@@ -6123,364 +5916,6 @@
                 <a:cs typeface="Sarabun"/>
               </a:rPr>
               <a:t>. Now backwards.</a:t>
-            </a:r>
-          </a:p>
-        </p:txBody>
-      </p:sp>
-      <p:sp>
-        <p:nvSpPr>
-          <p:cNvPr id="40" name="Oval 39"/>
-          <p:cNvSpPr/>
-          <p:nvPr/>
-        </p:nvSpPr>
-        <p:spPr>
-          <a:xfrm>
-            <a:off x="932688" y="7178040"/>
-            <a:ext cx="82296" cy="82296"/>
-          </a:xfrm>
-          <a:prstGeom prst="ellipse">
-            <a:avLst/>
-          </a:prstGeom>
-          <a:solidFill>
-            <a:srgbClr val="C96F4A"/>
-          </a:solidFill>
-          <a:ln>
-            <a:noFill/>
-          </a:ln>
-        </p:spPr>
-        <p:style>
-          <a:lnRef idx="1">
-            <a:schemeClr val="accent1"/>
-          </a:lnRef>
-          <a:fillRef idx="3">
-            <a:schemeClr val="accent1"/>
-          </a:fillRef>
-          <a:effectRef idx="2">
-            <a:schemeClr val="accent1"/>
-          </a:effectRef>
-          <a:fontRef idx="minor">
-            <a:schemeClr val="lt1"/>
-          </a:fontRef>
-        </p:style>
-        <p:txBody>
-          <a:bodyPr rtlCol="0" anchor="ctr"/>
-          <a:lstStyle/>
-          <a:p>
-            <a:pPr algn="ctr"/>
-          </a:p>
-        </p:txBody>
-      </p:sp>
-      <p:sp>
-        <p:nvSpPr>
-          <p:cNvPr id="41" name="TextBox 40"/>
-          <p:cNvSpPr txBox="1"/>
-          <p:nvPr/>
-        </p:nvSpPr>
-        <p:spPr>
-          <a:xfrm>
-            <a:off x="1078992" y="7086600"/>
-            <a:ext cx="9555480" cy="274320"/>
-          </a:xfrm>
-          <a:prstGeom prst="rect">
-            <a:avLst/>
-          </a:prstGeom>
-          <a:noFill/>
-        </p:spPr>
-        <p:txBody>
-          <a:bodyPr wrap="square" anchor="t">
-            <a:spAutoFit/>
-          </a:bodyPr>
-          <a:lstStyle/>
-          <a:p>
-            <a:pPr algn="l"/>
-            <a:r>
-              <a:rPr sz="1500" b="0" i="0" lang="en-US" altLang="en-US">
-                <a:solidFill>
-                  <a:srgbClr val="24333D"/>
-                </a:solidFill>
-                <a:latin typeface="Sarabun"/>
-                <a:ea typeface="Sarabun"/>
-                <a:cs typeface="Sarabun"/>
-              </a:rPr>
-              <a:t>Pause-and-produce: I say a number in English. Say the Thai before I show it. Two. Four. Zero. Five.</a:t>
-            </a:r>
-          </a:p>
-        </p:txBody>
-      </p:sp>
-      <p:sp>
-        <p:nvSpPr>
-          <p:cNvPr id="42" name="Oval 41"/>
-          <p:cNvSpPr/>
-          <p:nvPr/>
-        </p:nvSpPr>
-        <p:spPr>
-          <a:xfrm>
-            <a:off x="932688" y="7488936"/>
-            <a:ext cx="82296" cy="82296"/>
-          </a:xfrm>
-          <a:prstGeom prst="ellipse">
-            <a:avLst/>
-          </a:prstGeom>
-          <a:solidFill>
-            <a:srgbClr val="C96F4A"/>
-          </a:solidFill>
-          <a:ln>
-            <a:noFill/>
-          </a:ln>
-        </p:spPr>
-        <p:style>
-          <a:lnRef idx="1">
-            <a:schemeClr val="accent1"/>
-          </a:lnRef>
-          <a:fillRef idx="3">
-            <a:schemeClr val="accent1"/>
-          </a:fillRef>
-          <a:effectRef idx="2">
-            <a:schemeClr val="accent1"/>
-          </a:effectRef>
-          <a:fontRef idx="minor">
-            <a:schemeClr val="lt1"/>
-          </a:fontRef>
-        </p:style>
-        <p:txBody>
-          <a:bodyPr rtlCol="0" anchor="ctr"/>
-          <a:lstStyle/>
-          <a:p>
-            <a:pPr algn="ctr"/>
-          </a:p>
-        </p:txBody>
-      </p:sp>
-      <p:sp>
-        <p:nvSpPr>
-          <p:cNvPr id="43" name="TextBox 42"/>
-          <p:cNvSpPr txBox="1"/>
-          <p:nvPr/>
-        </p:nvSpPr>
-        <p:spPr>
-          <a:xfrm>
-            <a:off x="1078992" y="7397496"/>
-            <a:ext cx="9555480" cy="274320"/>
-          </a:xfrm>
-          <a:prstGeom prst="rect">
-            <a:avLst/>
-          </a:prstGeom>
-          <a:noFill/>
-        </p:spPr>
-        <p:txBody>
-          <a:bodyPr wrap="square" anchor="t">
-            <a:spAutoFit/>
-          </a:bodyPr>
-          <a:lstStyle/>
-          <a:p>
-            <a:pPr algn="l"/>
-            <a:r>
-              <a:rPr sz="1500" b="0" i="0" lang="en-US" altLang="en-US">
-                <a:solidFill>
-                  <a:srgbClr val="24333D"/>
-                </a:solidFill>
-                <a:latin typeface="Sarabun"/>
-                <a:ea typeface="Sarabun"/>
-                <a:cs typeface="Sarabun"/>
-              </a:rPr>
-              <a:t>Room number drill: room 301? </a:t>
-            </a:r>
-            <a:r>
-              <a:rPr sz="1500" b="0" i="0" lang="th-TH" altLang="en-US">
-                <a:solidFill>
-                  <a:srgbClr val="24333D"/>
-                </a:solidFill>
-                <a:latin typeface="Sarabun"/>
-                <a:ea typeface="Sarabun"/>
-                <a:cs typeface="Sarabun"/>
-              </a:rPr>
-              <a:t>สาม</a:t>
-            </a:r>
-            <a:r>
-              <a:rPr sz="1500" b="0" i="1" lang="en-US" altLang="en-US">
-                <a:solidFill>
-                  <a:srgbClr val="566873"/>
-                </a:solidFill>
-                <a:latin typeface="Sarabun"/>
-                <a:ea typeface="Sarabun"/>
-                <a:cs typeface="Sarabun"/>
-              </a:rPr>
-              <a:t> (sǎam)</a:t>
-            </a:r>
-            <a:r>
-              <a:rPr sz="1500" b="0" i="0" lang="en-US" altLang="en-US">
-                <a:solidFill>
-                  <a:srgbClr val="24333D"/>
-                </a:solidFill>
-                <a:latin typeface="Sarabun"/>
-                <a:ea typeface="Sarabun"/>
-                <a:cs typeface="Sarabun"/>
-              </a:rPr>
-              <a:t>-</a:t>
-            </a:r>
-            <a:r>
-              <a:rPr sz="1500" b="0" i="0" lang="th-TH" altLang="en-US">
-                <a:solidFill>
-                  <a:srgbClr val="24333D"/>
-                </a:solidFill>
-                <a:latin typeface="Sarabun"/>
-                <a:ea typeface="Sarabun"/>
-                <a:cs typeface="Sarabun"/>
-              </a:rPr>
-              <a:t>ศูนย์</a:t>
-            </a:r>
-            <a:r>
-              <a:rPr sz="1500" b="0" i="1" lang="en-US" altLang="en-US">
-                <a:solidFill>
-                  <a:srgbClr val="566873"/>
-                </a:solidFill>
-                <a:latin typeface="Sarabun"/>
-                <a:ea typeface="Sarabun"/>
-                <a:cs typeface="Sarabun"/>
-              </a:rPr>
-              <a:t> (sǔun)</a:t>
-            </a:r>
-            <a:r>
-              <a:rPr sz="1500" b="0" i="0" lang="en-US" altLang="en-US">
-                <a:solidFill>
-                  <a:srgbClr val="24333D"/>
-                </a:solidFill>
-                <a:latin typeface="Sarabun"/>
-                <a:ea typeface="Sarabun"/>
-                <a:cs typeface="Sarabun"/>
-              </a:rPr>
-              <a:t>-</a:t>
-            </a:r>
-            <a:r>
-              <a:rPr sz="1500" b="0" i="0" lang="th-TH" altLang="en-US">
-                <a:solidFill>
-                  <a:srgbClr val="24333D"/>
-                </a:solidFill>
-                <a:latin typeface="Sarabun"/>
-                <a:ea typeface="Sarabun"/>
-                <a:cs typeface="Sarabun"/>
-              </a:rPr>
-              <a:t>หนึ่ง</a:t>
-            </a:r>
-            <a:r>
-              <a:rPr sz="1500" b="0" i="1" lang="en-US" altLang="en-US">
-                <a:solidFill>
-                  <a:srgbClr val="566873"/>
-                </a:solidFill>
-                <a:latin typeface="Sarabun"/>
-                <a:ea typeface="Sarabun"/>
-                <a:cs typeface="Sarabun"/>
-              </a:rPr>
-              <a:t> (nùeng)</a:t>
-            </a:r>
-            <a:r>
-              <a:rPr sz="1500" b="0" i="0" lang="en-US" altLang="en-US">
-                <a:solidFill>
-                  <a:srgbClr val="24333D"/>
-                </a:solidFill>
-                <a:latin typeface="Sarabun"/>
-                <a:ea typeface="Sarabun"/>
-                <a:cs typeface="Sarabun"/>
-              </a:rPr>
-              <a:t>. Room 205? </a:t>
-            </a:r>
-            <a:r>
-              <a:rPr sz="1500" b="0" i="0" lang="th-TH" altLang="en-US">
-                <a:solidFill>
-                  <a:srgbClr val="24333D"/>
-                </a:solidFill>
-                <a:latin typeface="Sarabun"/>
-                <a:ea typeface="Sarabun"/>
-                <a:cs typeface="Sarabun"/>
-              </a:rPr>
-              <a:t>สอง</a:t>
-            </a:r>
-            <a:r>
-              <a:rPr sz="1500" b="0" i="1" lang="en-US" altLang="en-US">
-                <a:solidFill>
-                  <a:srgbClr val="566873"/>
-                </a:solidFill>
-                <a:latin typeface="Sarabun"/>
-                <a:ea typeface="Sarabun"/>
-                <a:cs typeface="Sarabun"/>
-              </a:rPr>
-              <a:t> (sǎawng)</a:t>
-            </a:r>
-            <a:r>
-              <a:rPr sz="1500" b="0" i="0" lang="en-US" altLang="en-US">
-                <a:solidFill>
-                  <a:srgbClr val="24333D"/>
-                </a:solidFill>
-                <a:latin typeface="Sarabun"/>
-                <a:ea typeface="Sarabun"/>
-                <a:cs typeface="Sarabun"/>
-              </a:rPr>
-              <a:t>-</a:t>
-            </a:r>
-            <a:r>
-              <a:rPr sz="1500" b="0" i="0" lang="th-TH" altLang="en-US">
-                <a:solidFill>
-                  <a:srgbClr val="24333D"/>
-                </a:solidFill>
-                <a:latin typeface="Sarabun"/>
-                <a:ea typeface="Sarabun"/>
-                <a:cs typeface="Sarabun"/>
-              </a:rPr>
-              <a:t>ศูนย์</a:t>
-            </a:r>
-            <a:r>
-              <a:rPr sz="1500" b="0" i="1" lang="en-US" altLang="en-US">
-                <a:solidFill>
-                  <a:srgbClr val="566873"/>
-                </a:solidFill>
-                <a:latin typeface="Sarabun"/>
-                <a:ea typeface="Sarabun"/>
-                <a:cs typeface="Sarabun"/>
-              </a:rPr>
-              <a:t> (sǔun)</a:t>
-            </a:r>
-            <a:r>
-              <a:rPr sz="1500" b="0" i="0" lang="en-US" altLang="en-US">
-                <a:solidFill>
-                  <a:srgbClr val="24333D"/>
-                </a:solidFill>
-                <a:latin typeface="Sarabun"/>
-                <a:ea typeface="Sarabun"/>
-                <a:cs typeface="Sarabun"/>
-              </a:rPr>
-              <a:t>-</a:t>
-            </a:r>
-            <a:r>
-              <a:rPr sz="1500" b="0" i="0" lang="th-TH" altLang="en-US">
-                <a:solidFill>
-                  <a:srgbClr val="24333D"/>
-                </a:solidFill>
-                <a:latin typeface="Sarabun"/>
-                <a:ea typeface="Sarabun"/>
-                <a:cs typeface="Sarabun"/>
-              </a:rPr>
-              <a:t>ห้า</a:t>
-            </a:r>
-            <a:r>
-              <a:rPr sz="1500" b="0" i="1" lang="en-US" altLang="en-US">
-                <a:solidFill>
-                  <a:srgbClr val="566873"/>
-                </a:solidFill>
-                <a:latin typeface="Sarabun"/>
-                <a:ea typeface="Sarabun"/>
-                <a:cs typeface="Sarabun"/>
-              </a:rPr>
-              <a:t> (hâa)</a:t>
-            </a:r>
-            <a:r>
-              <a:rPr sz="1500" b="0" i="0" lang="en-US" altLang="en-US">
-                <a:solidFill>
-                  <a:srgbClr val="24333D"/>
-                </a:solidFill>
-                <a:latin typeface="Sarabun"/>
-                <a:ea typeface="Sarabun"/>
-                <a:cs typeface="Sarabun"/>
-              </a:rPr>
-              <a:t>. Your turn.</a:t>
             </a:r>
           </a:p>
         </p:txBody>
@@ -6697,17 +6132,11 @@
             <a:ext cx="3889080" cy="685800"/>
           </a:xfrm>
           <a:prstGeom prst="roundRect">
-            <a:avLst>
-              <a:gd name="adj" fmla="val 6000"/>
-            </a:avLst>
-          </a:prstGeom>
-          <a:solidFill>
-            <a:srgbClr val="FFFFFF"/>
-          </a:solidFill>
+            <a:avLst/>
+          </a:prstGeom>
+          <a:noFill/>
           <a:ln>
-            <a:solidFill>
-              <a:srgbClr val="D7DEE3"/>
-            </a:solidFill>
+            <a:noFill/>
           </a:ln>
         </p:spPr>
         <p:style>
@@ -6799,7 +6228,7 @@
           <a:p>
             <a:pPr algn="l"/>
             <a:r>
-              <a:rPr sz="2200" b="1" i="0" lang="th-TH" altLang="en-US">
+              <a:rPr sz="2600" b="1" i="0" lang="th-TH" altLang="en-US">
                 <a:solidFill>
                   <a:srgbClr val="24333D"/>
                 </a:solidFill>
@@ -6810,7 +6239,7 @@
               <a:t>หก</a:t>
             </a:r>
             <a:r>
-              <a:rPr sz="1500" b="0" i="1" lang="en-US" altLang="en-US">
+              <a:rPr sz="1700" b="0" i="1" lang="en-US" altLang="en-US">
                 <a:solidFill>
                   <a:srgbClr val="566873"/>
                 </a:solidFill>
@@ -6872,17 +6301,11 @@
             <a:ext cx="3889080" cy="685800"/>
           </a:xfrm>
           <a:prstGeom prst="roundRect">
-            <a:avLst>
-              <a:gd name="adj" fmla="val 6000"/>
-            </a:avLst>
-          </a:prstGeom>
-          <a:solidFill>
-            <a:srgbClr val="FFFFFF"/>
-          </a:solidFill>
+            <a:avLst/>
+          </a:prstGeom>
+          <a:noFill/>
           <a:ln>
-            <a:solidFill>
-              <a:srgbClr val="D7DEE3"/>
-            </a:solidFill>
+            <a:noFill/>
           </a:ln>
         </p:spPr>
         <p:style>
@@ -6974,7 +6397,7 @@
           <a:p>
             <a:pPr algn="l"/>
             <a:r>
-              <a:rPr sz="2200" b="1" i="0" lang="th-TH" altLang="en-US">
+              <a:rPr sz="2600" b="1" i="0" lang="th-TH" altLang="en-US">
                 <a:solidFill>
                   <a:srgbClr val="24333D"/>
                 </a:solidFill>
@@ -6985,7 +6408,7 @@
               <a:t>เจ็ด</a:t>
             </a:r>
             <a:r>
-              <a:rPr sz="1500" b="0" i="1" lang="en-US" altLang="en-US">
+              <a:rPr sz="1700" b="0" i="1" lang="en-US" altLang="en-US">
                 <a:solidFill>
                   <a:srgbClr val="566873"/>
                 </a:solidFill>
@@ -7047,17 +6470,11 @@
             <a:ext cx="3889080" cy="685800"/>
           </a:xfrm>
           <a:prstGeom prst="roundRect">
-            <a:avLst>
-              <a:gd name="adj" fmla="val 6000"/>
-            </a:avLst>
-          </a:prstGeom>
-          <a:solidFill>
-            <a:srgbClr val="FFFFFF"/>
-          </a:solidFill>
+            <a:avLst/>
+          </a:prstGeom>
+          <a:noFill/>
           <a:ln>
-            <a:solidFill>
-              <a:srgbClr val="D7DEE3"/>
-            </a:solidFill>
+            <a:noFill/>
           </a:ln>
         </p:spPr>
         <p:style>
@@ -7149,7 +6566,7 @@
           <a:p>
             <a:pPr algn="l"/>
             <a:r>
-              <a:rPr sz="2200" b="1" i="0" lang="th-TH" altLang="en-US">
+              <a:rPr sz="2600" b="1" i="0" lang="th-TH" altLang="en-US">
                 <a:solidFill>
                   <a:srgbClr val="24333D"/>
                 </a:solidFill>
@@ -7160,7 +6577,7 @@
               <a:t>แปด</a:t>
             </a:r>
             <a:r>
-              <a:rPr sz="1500" b="0" i="1" lang="en-US" altLang="en-US">
+              <a:rPr sz="1700" b="0" i="1" lang="en-US" altLang="en-US">
                 <a:solidFill>
                   <a:srgbClr val="566873"/>
                 </a:solidFill>
@@ -7222,17 +6639,11 @@
             <a:ext cx="3889080" cy="685800"/>
           </a:xfrm>
           <a:prstGeom prst="roundRect">
-            <a:avLst>
-              <a:gd name="adj" fmla="val 6000"/>
-            </a:avLst>
-          </a:prstGeom>
-          <a:solidFill>
-            <a:srgbClr val="FFFFFF"/>
-          </a:solidFill>
+            <a:avLst/>
+          </a:prstGeom>
+          <a:noFill/>
           <a:ln>
-            <a:solidFill>
-              <a:srgbClr val="D7DEE3"/>
-            </a:solidFill>
+            <a:noFill/>
           </a:ln>
         </p:spPr>
         <p:style>
@@ -7324,7 +6735,7 @@
           <a:p>
             <a:pPr algn="l"/>
             <a:r>
-              <a:rPr sz="2200" b="1" i="0" lang="th-TH" altLang="en-US">
+              <a:rPr sz="2600" b="1" i="0" lang="th-TH" altLang="en-US">
                 <a:solidFill>
                   <a:srgbClr val="24333D"/>
                 </a:solidFill>
@@ -7335,7 +6746,7 @@
               <a:t>เก้า</a:t>
             </a:r>
             <a:r>
-              <a:rPr sz="1500" b="0" i="1" lang="en-US" altLang="en-US">
+              <a:rPr sz="1700" b="0" i="1" lang="en-US" altLang="en-US">
                 <a:solidFill>
                   <a:srgbClr val="566873"/>
                 </a:solidFill>
@@ -7397,17 +6808,11 @@
             <a:ext cx="3889080" cy="685800"/>
           </a:xfrm>
           <a:prstGeom prst="roundRect">
-            <a:avLst>
-              <a:gd name="adj" fmla="val 6000"/>
-            </a:avLst>
-          </a:prstGeom>
-          <a:solidFill>
-            <a:srgbClr val="FFFFFF"/>
-          </a:solidFill>
+            <a:avLst/>
+          </a:prstGeom>
+          <a:noFill/>
           <a:ln>
-            <a:solidFill>
-              <a:srgbClr val="D7DEE3"/>
-            </a:solidFill>
+            <a:noFill/>
           </a:ln>
         </p:spPr>
         <p:style>
@@ -7499,7 +6904,7 @@
           <a:p>
             <a:pPr algn="l"/>
             <a:r>
-              <a:rPr sz="2200" b="1" i="0" lang="th-TH" altLang="en-US">
+              <a:rPr sz="2600" b="1" i="0" lang="th-TH" altLang="en-US">
                 <a:solidFill>
                   <a:srgbClr val="24333D"/>
                 </a:solidFill>
@@ -7510,7 +6915,7 @@
               <a:t>สิบ</a:t>
             </a:r>
             <a:r>
-              <a:rPr sz="1500" b="0" i="1" lang="en-US" altLang="en-US">
+              <a:rPr sz="1700" b="0" i="1" lang="en-US" altLang="en-US">
                 <a:solidFill>
                   <a:srgbClr val="566873"/>
                 </a:solidFill>
@@ -7562,54 +6967,7 @@
       </p:sp>
       <p:sp>
         <p:nvSpPr>
-          <p:cNvPr id="26" name="Rounded Rectangle 25"/>
-          <p:cNvSpPr/>
-          <p:nvPr/>
-        </p:nvSpPr>
-        <p:spPr>
-          <a:xfrm>
-            <a:off x="731520" y="5532120"/>
-            <a:ext cx="10058400" cy="1636776"/>
-          </a:xfrm>
-          <a:prstGeom prst="roundRect">
-            <a:avLst>
-              <a:gd name="adj" fmla="val 6000"/>
-            </a:avLst>
-          </a:prstGeom>
-          <a:solidFill>
-            <a:srgbClr val="FFFFFF"/>
-          </a:solidFill>
-          <a:ln>
-            <a:solidFill>
-              <a:srgbClr val="D7DEE3"/>
-            </a:solidFill>
-          </a:ln>
-        </p:spPr>
-        <p:style>
-          <a:lnRef idx="1">
-            <a:schemeClr val="accent1"/>
-          </a:lnRef>
-          <a:fillRef idx="3">
-            <a:schemeClr val="accent1"/>
-          </a:fillRef>
-          <a:effectRef idx="2">
-            <a:schemeClr val="accent1"/>
-          </a:effectRef>
-          <a:fontRef idx="minor">
-            <a:schemeClr val="lt1"/>
-          </a:fontRef>
-        </p:style>
-        <p:txBody>
-          <a:bodyPr rtlCol="0" anchor="ctr"/>
-          <a:lstStyle/>
-          <a:p>
-            <a:pPr algn="ctr"/>
-          </a:p>
-        </p:txBody>
-      </p:sp>
-      <p:sp>
-        <p:nvSpPr>
-          <p:cNvPr id="27" name="TextBox 26"/>
+          <p:cNvPr id="26" name="TextBox 25"/>
           <p:cNvSpPr txBox="1"/>
           <p:nvPr/>
         </p:nvSpPr>
@@ -7631,7 +6989,7 @@
           <a:p>
             <a:pPr algn="l"/>
             <a:r>
-              <a:rPr sz="1500" b="1" i="0" lang="en-US" altLang="en-US">
+              <a:rPr sz="1700" b="1" i="0" lang="en-US" altLang="en-US">
                 <a:solidFill>
                   <a:srgbClr val="C96F4A"/>
                 </a:solidFill>
@@ -7646,7 +7004,7 @@
       </p:sp>
       <p:sp>
         <p:nvSpPr>
-          <p:cNvPr id="28" name="Oval 27"/>
+          <p:cNvPr id="27" name="Oval 26"/>
           <p:cNvSpPr/>
           <p:nvPr/>
         </p:nvSpPr>
@@ -7689,7 +7047,7 @@
       </p:sp>
       <p:sp>
         <p:nvSpPr>
-          <p:cNvPr id="29" name="TextBox 28"/>
+          <p:cNvPr id="28" name="TextBox 27"/>
           <p:cNvSpPr txBox="1"/>
           <p:nvPr/>
         </p:nvSpPr>
@@ -7711,7 +7069,7 @@
           <a:p>
             <a:pPr algn="l"/>
             <a:r>
-              <a:rPr sz="1500" b="0" i="0" lang="en-US" altLang="en-US">
+              <a:rPr sz="1700" b="0" i="0" lang="en-US" altLang="en-US">
                 <a:solidFill>
                   <a:srgbClr val="24333D"/>
                 </a:solidFill>
@@ -7722,7 +7080,7 @@
               <a:t>Listen and repeat: </a:t>
             </a:r>
             <a:r>
-              <a:rPr sz="1500" b="0" i="0" lang="th-TH" altLang="en-US">
+              <a:rPr sz="1700" b="0" i="0" lang="th-TH" altLang="en-US">
                 <a:solidFill>
                   <a:srgbClr val="24333D"/>
                 </a:solidFill>
@@ -7733,7 +7091,7 @@
               <a:t>หก</a:t>
             </a:r>
             <a:r>
-              <a:rPr sz="1500" b="0" i="1" lang="en-US" altLang="en-US">
+              <a:rPr sz="1700" b="0" i="1" lang="en-US" altLang="en-US">
                 <a:solidFill>
                   <a:srgbClr val="566873"/>
                 </a:solidFill>
@@ -7744,7 +7102,7 @@
               <a:t> (hòk)</a:t>
             </a:r>
             <a:r>
-              <a:rPr sz="1500" b="0" i="0" lang="en-US" altLang="en-US">
+              <a:rPr sz="1700" b="0" i="0" lang="en-US" altLang="en-US">
                 <a:solidFill>
                   <a:srgbClr val="24333D"/>
                 </a:solidFill>
@@ -7755,7 +7113,7 @@
               <a:t>, </a:t>
             </a:r>
             <a:r>
-              <a:rPr sz="1500" b="0" i="0" lang="th-TH" altLang="en-US">
+              <a:rPr sz="1700" b="0" i="0" lang="th-TH" altLang="en-US">
                 <a:solidFill>
                   <a:srgbClr val="24333D"/>
                 </a:solidFill>
@@ -7766,7 +7124,7 @@
               <a:t>เจ็ด</a:t>
             </a:r>
             <a:r>
-              <a:rPr sz="1500" b="0" i="1" lang="en-US" altLang="en-US">
+              <a:rPr sz="1700" b="0" i="1" lang="en-US" altLang="en-US">
                 <a:solidFill>
                   <a:srgbClr val="566873"/>
                 </a:solidFill>
@@ -7777,7 +7135,7 @@
               <a:t> (jèt)</a:t>
             </a:r>
             <a:r>
-              <a:rPr sz="1500" b="0" i="0" lang="en-US" altLang="en-US">
+              <a:rPr sz="1700" b="0" i="0" lang="en-US" altLang="en-US">
                 <a:solidFill>
                   <a:srgbClr val="24333D"/>
                 </a:solidFill>
@@ -7788,7 +7146,7 @@
               <a:t>, </a:t>
             </a:r>
             <a:r>
-              <a:rPr sz="1500" b="0" i="0" lang="th-TH" altLang="en-US">
+              <a:rPr sz="1700" b="0" i="0" lang="th-TH" altLang="en-US">
                 <a:solidFill>
                   <a:srgbClr val="24333D"/>
                 </a:solidFill>
@@ -7799,7 +7157,7 @@
               <a:t>แปด</a:t>
             </a:r>
             <a:r>
-              <a:rPr sz="1500" b="0" i="1" lang="en-US" altLang="en-US">
+              <a:rPr sz="1700" b="0" i="1" lang="en-US" altLang="en-US">
                 <a:solidFill>
                   <a:srgbClr val="566873"/>
                 </a:solidFill>
@@ -7810,7 +7168,7 @@
               <a:t> (bpàet)</a:t>
             </a:r>
             <a:r>
-              <a:rPr sz="1500" b="0" i="0" lang="en-US" altLang="en-US">
+              <a:rPr sz="1700" b="0" i="0" lang="en-US" altLang="en-US">
                 <a:solidFill>
                   <a:srgbClr val="24333D"/>
                 </a:solidFill>
@@ -7821,7 +7179,7 @@
               <a:t>, </a:t>
             </a:r>
             <a:r>
-              <a:rPr sz="1500" b="0" i="0" lang="th-TH" altLang="en-US">
+              <a:rPr sz="1700" b="0" i="0" lang="th-TH" altLang="en-US">
                 <a:solidFill>
                   <a:srgbClr val="24333D"/>
                 </a:solidFill>
@@ -7832,7 +7190,7 @@
               <a:t>เก้า</a:t>
             </a:r>
             <a:r>
-              <a:rPr sz="1500" b="0" i="1" lang="en-US" altLang="en-US">
+              <a:rPr sz="1700" b="0" i="1" lang="en-US" altLang="en-US">
                 <a:solidFill>
                   <a:srgbClr val="566873"/>
                 </a:solidFill>
@@ -7843,7 +7201,7 @@
               <a:t> (gâo)</a:t>
             </a:r>
             <a:r>
-              <a:rPr sz="1500" b="0" i="0" lang="en-US" altLang="en-US">
+              <a:rPr sz="1700" b="0" i="0" lang="en-US" altLang="en-US">
                 <a:solidFill>
                   <a:srgbClr val="24333D"/>
                 </a:solidFill>
@@ -7854,7 +7212,7 @@
               <a:t>, </a:t>
             </a:r>
             <a:r>
-              <a:rPr sz="1500" b="0" i="0" lang="th-TH" altLang="en-US">
+              <a:rPr sz="1700" b="0" i="0" lang="th-TH" altLang="en-US">
                 <a:solidFill>
                   <a:srgbClr val="24333D"/>
                 </a:solidFill>
@@ -7865,7 +7223,7 @@
               <a:t>สิบ</a:t>
             </a:r>
             <a:r>
-              <a:rPr sz="1500" b="0" i="1" lang="en-US" altLang="en-US">
+              <a:rPr sz="1700" b="0" i="1" lang="en-US" altLang="en-US">
                 <a:solidFill>
                   <a:srgbClr val="566873"/>
                 </a:solidFill>
@@ -7876,7 +7234,7 @@
               <a:t> (sìp)</a:t>
             </a:r>
             <a:r>
-              <a:rPr sz="1500" b="0" i="0" lang="en-US" altLang="en-US">
+              <a:rPr sz="1700" b="0" i="0" lang="en-US" altLang="en-US">
                 <a:solidFill>
                   <a:srgbClr val="24333D"/>
                 </a:solidFill>
@@ -7885,430 +7243,6 @@
                 <a:cs typeface="Sarabun"/>
               </a:rPr>
               <a:t>. Now count 0 to 10 from memory.</a:t>
-            </a:r>
-          </a:p>
-        </p:txBody>
-      </p:sp>
-      <p:sp>
-        <p:nvSpPr>
-          <p:cNvPr id="30" name="Oval 29"/>
-          <p:cNvSpPr/>
-          <p:nvPr/>
-        </p:nvSpPr>
-        <p:spPr>
-          <a:xfrm>
-            <a:off x="932688" y="6373368"/>
-            <a:ext cx="82296" cy="82296"/>
-          </a:xfrm>
-          <a:prstGeom prst="ellipse">
-            <a:avLst/>
-          </a:prstGeom>
-          <a:solidFill>
-            <a:srgbClr val="C96F4A"/>
-          </a:solidFill>
-          <a:ln>
-            <a:noFill/>
-          </a:ln>
-        </p:spPr>
-        <p:style>
-          <a:lnRef idx="1">
-            <a:schemeClr val="accent1"/>
-          </a:lnRef>
-          <a:fillRef idx="3">
-            <a:schemeClr val="accent1"/>
-          </a:fillRef>
-          <a:effectRef idx="2">
-            <a:schemeClr val="accent1"/>
-          </a:effectRef>
-          <a:fontRef idx="minor">
-            <a:schemeClr val="lt1"/>
-          </a:fontRef>
-        </p:style>
-        <p:txBody>
-          <a:bodyPr rtlCol="0" anchor="ctr"/>
-          <a:lstStyle/>
-          <a:p>
-            <a:pPr algn="ctr"/>
-          </a:p>
-        </p:txBody>
-      </p:sp>
-      <p:sp>
-        <p:nvSpPr>
-          <p:cNvPr id="31" name="TextBox 30"/>
-          <p:cNvSpPr txBox="1"/>
-          <p:nvPr/>
-        </p:nvSpPr>
-        <p:spPr>
-          <a:xfrm>
-            <a:off x="1078992" y="6281928"/>
-            <a:ext cx="9555480" cy="274320"/>
-          </a:xfrm>
-          <a:prstGeom prst="rect">
-            <a:avLst/>
-          </a:prstGeom>
-          <a:noFill/>
-        </p:spPr>
-        <p:txBody>
-          <a:bodyPr wrap="square" anchor="t">
-            <a:spAutoFit/>
-          </a:bodyPr>
-          <a:lstStyle/>
-          <a:p>
-            <a:pPr algn="l"/>
-            <a:r>
-              <a:rPr sz="1500" b="0" i="0" lang="en-US" altLang="en-US">
-                <a:solidFill>
-                  <a:srgbClr val="24333D"/>
-                </a:solidFill>
-                <a:latin typeface="Sarabun"/>
-                <a:ea typeface="Sarabun"/>
-                <a:cs typeface="Sarabun"/>
-              </a:rPr>
-              <a:t>Pause-and-produce: Seven? </a:t>
-            </a:r>
-            <a:r>
-              <a:rPr sz="1500" b="0" i="0" lang="th-TH" altLang="en-US">
-                <a:solidFill>
-                  <a:srgbClr val="24333D"/>
-                </a:solidFill>
-                <a:latin typeface="Sarabun"/>
-                <a:ea typeface="Sarabun"/>
-                <a:cs typeface="Sarabun"/>
-              </a:rPr>
-              <a:t>เจ็ด</a:t>
-            </a:r>
-            <a:r>
-              <a:rPr sz="1500" b="0" i="1" lang="en-US" altLang="en-US">
-                <a:solidFill>
-                  <a:srgbClr val="566873"/>
-                </a:solidFill>
-                <a:latin typeface="Sarabun"/>
-                <a:ea typeface="Sarabun"/>
-                <a:cs typeface="Sarabun"/>
-              </a:rPr>
-              <a:t> (jèt)</a:t>
-            </a:r>
-            <a:r>
-              <a:rPr sz="1500" b="0" i="0" lang="en-US" altLang="en-US">
-                <a:solidFill>
-                  <a:srgbClr val="24333D"/>
-                </a:solidFill>
-                <a:latin typeface="Sarabun"/>
-                <a:ea typeface="Sarabun"/>
-                <a:cs typeface="Sarabun"/>
-              </a:rPr>
-              <a:t>. Ten? </a:t>
-            </a:r>
-            <a:r>
-              <a:rPr sz="1500" b="0" i="0" lang="th-TH" altLang="en-US">
-                <a:solidFill>
-                  <a:srgbClr val="24333D"/>
-                </a:solidFill>
-                <a:latin typeface="Sarabun"/>
-                <a:ea typeface="Sarabun"/>
-                <a:cs typeface="Sarabun"/>
-              </a:rPr>
-              <a:t>สิบ</a:t>
-            </a:r>
-            <a:r>
-              <a:rPr sz="1500" b="0" i="1" lang="en-US" altLang="en-US">
-                <a:solidFill>
-                  <a:srgbClr val="566873"/>
-                </a:solidFill>
-                <a:latin typeface="Sarabun"/>
-                <a:ea typeface="Sarabun"/>
-                <a:cs typeface="Sarabun"/>
-              </a:rPr>
-              <a:t> (sìp)</a:t>
-            </a:r>
-            <a:r>
-              <a:rPr sz="1500" b="0" i="0" lang="en-US" altLang="en-US">
-                <a:solidFill>
-                  <a:srgbClr val="24333D"/>
-                </a:solidFill>
-                <a:latin typeface="Sarabun"/>
-                <a:ea typeface="Sarabun"/>
-                <a:cs typeface="Sarabun"/>
-              </a:rPr>
-              <a:t>. Eight? </a:t>
-            </a:r>
-            <a:r>
-              <a:rPr sz="1500" b="0" i="0" lang="th-TH" altLang="en-US">
-                <a:solidFill>
-                  <a:srgbClr val="24333D"/>
-                </a:solidFill>
-                <a:latin typeface="Sarabun"/>
-                <a:ea typeface="Sarabun"/>
-                <a:cs typeface="Sarabun"/>
-              </a:rPr>
-              <a:t>แปด</a:t>
-            </a:r>
-            <a:r>
-              <a:rPr sz="1500" b="0" i="1" lang="en-US" altLang="en-US">
-                <a:solidFill>
-                  <a:srgbClr val="566873"/>
-                </a:solidFill>
-                <a:latin typeface="Sarabun"/>
-                <a:ea typeface="Sarabun"/>
-                <a:cs typeface="Sarabun"/>
-              </a:rPr>
-              <a:t> (bpàet)</a:t>
-            </a:r>
-            <a:r>
-              <a:rPr sz="1500" b="0" i="0" lang="en-US" altLang="en-US">
-                <a:solidFill>
-                  <a:srgbClr val="24333D"/>
-                </a:solidFill>
-                <a:latin typeface="Sarabun"/>
-                <a:ea typeface="Sarabun"/>
-                <a:cs typeface="Sarabun"/>
-              </a:rPr>
-              <a:t>. Six? </a:t>
-            </a:r>
-            <a:r>
-              <a:rPr sz="1500" b="0" i="0" lang="th-TH" altLang="en-US">
-                <a:solidFill>
-                  <a:srgbClr val="24333D"/>
-                </a:solidFill>
-                <a:latin typeface="Sarabun"/>
-                <a:ea typeface="Sarabun"/>
-                <a:cs typeface="Sarabun"/>
-              </a:rPr>
-              <a:t>หก</a:t>
-            </a:r>
-            <a:r>
-              <a:rPr sz="1500" b="0" i="1" lang="en-US" altLang="en-US">
-                <a:solidFill>
-                  <a:srgbClr val="566873"/>
-                </a:solidFill>
-                <a:latin typeface="Sarabun"/>
-                <a:ea typeface="Sarabun"/>
-                <a:cs typeface="Sarabun"/>
-              </a:rPr>
-              <a:t> (hòk)</a:t>
-            </a:r>
-            <a:r>
-              <a:rPr sz="1500" b="0" i="0" lang="en-US" altLang="en-US">
-                <a:solidFill>
-                  <a:srgbClr val="24333D"/>
-                </a:solidFill>
-                <a:latin typeface="Sarabun"/>
-                <a:ea typeface="Sarabun"/>
-                <a:cs typeface="Sarabun"/>
-              </a:rPr>
-              <a:t>. Nine? </a:t>
-            </a:r>
-            <a:r>
-              <a:rPr sz="1500" b="0" i="0" lang="th-TH" altLang="en-US">
-                <a:solidFill>
-                  <a:srgbClr val="24333D"/>
-                </a:solidFill>
-                <a:latin typeface="Sarabun"/>
-                <a:ea typeface="Sarabun"/>
-                <a:cs typeface="Sarabun"/>
-              </a:rPr>
-              <a:t>เก้า</a:t>
-            </a:r>
-            <a:r>
-              <a:rPr sz="1500" b="0" i="1" lang="en-US" altLang="en-US">
-                <a:solidFill>
-                  <a:srgbClr val="566873"/>
-                </a:solidFill>
-                <a:latin typeface="Sarabun"/>
-                <a:ea typeface="Sarabun"/>
-                <a:cs typeface="Sarabun"/>
-              </a:rPr>
-              <a:t> (gâo)</a:t>
-            </a:r>
-            <a:r>
-              <a:rPr sz="1500" b="0" i="0" lang="en-US" altLang="en-US">
-                <a:solidFill>
-                  <a:srgbClr val="24333D"/>
-                </a:solidFill>
-                <a:latin typeface="Sarabun"/>
-                <a:ea typeface="Sarabun"/>
-                <a:cs typeface="Sarabun"/>
-              </a:rPr>
-              <a:t>.</a:t>
-            </a:r>
-          </a:p>
-        </p:txBody>
-      </p:sp>
-      <p:sp>
-        <p:nvSpPr>
-          <p:cNvPr id="32" name="Oval 31"/>
-          <p:cNvSpPr/>
-          <p:nvPr/>
-        </p:nvSpPr>
-        <p:spPr>
-          <a:xfrm>
-            <a:off x="932688" y="6684264"/>
-            <a:ext cx="82296" cy="82296"/>
-          </a:xfrm>
-          <a:prstGeom prst="ellipse">
-            <a:avLst/>
-          </a:prstGeom>
-          <a:solidFill>
-            <a:srgbClr val="C96F4A"/>
-          </a:solidFill>
-          <a:ln>
-            <a:noFill/>
-          </a:ln>
-        </p:spPr>
-        <p:style>
-          <a:lnRef idx="1">
-            <a:schemeClr val="accent1"/>
-          </a:lnRef>
-          <a:fillRef idx="3">
-            <a:schemeClr val="accent1"/>
-          </a:fillRef>
-          <a:effectRef idx="2">
-            <a:schemeClr val="accent1"/>
-          </a:effectRef>
-          <a:fontRef idx="minor">
-            <a:schemeClr val="lt1"/>
-          </a:fontRef>
-        </p:style>
-        <p:txBody>
-          <a:bodyPr rtlCol="0" anchor="ctr"/>
-          <a:lstStyle/>
-          <a:p>
-            <a:pPr algn="ctr"/>
-          </a:p>
-        </p:txBody>
-      </p:sp>
-      <p:sp>
-        <p:nvSpPr>
-          <p:cNvPr id="33" name="TextBox 32"/>
-          <p:cNvSpPr txBox="1"/>
-          <p:nvPr/>
-        </p:nvSpPr>
-        <p:spPr>
-          <a:xfrm>
-            <a:off x="1078992" y="6592824"/>
-            <a:ext cx="9555480" cy="274320"/>
-          </a:xfrm>
-          <a:prstGeom prst="rect">
-            <a:avLst/>
-          </a:prstGeom>
-          <a:noFill/>
-        </p:spPr>
-        <p:txBody>
-          <a:bodyPr wrap="square" anchor="t">
-            <a:spAutoFit/>
-          </a:bodyPr>
-          <a:lstStyle/>
-          <a:p>
-            <a:pPr algn="l"/>
-            <a:r>
-              <a:rPr sz="1500" b="0" i="0" lang="en-US" altLang="en-US">
-                <a:solidFill>
-                  <a:srgbClr val="24333D"/>
-                </a:solidFill>
-                <a:latin typeface="Sarabun"/>
-                <a:ea typeface="Sarabun"/>
-                <a:cs typeface="Sarabun"/>
-              </a:rPr>
-              <a:t>Substitution: what floor? Floor 9? </a:t>
-            </a:r>
-            <a:r>
-              <a:rPr sz="1500" b="0" i="0" lang="th-TH" altLang="en-US">
-                <a:solidFill>
-                  <a:srgbClr val="24333D"/>
-                </a:solidFill>
-                <a:latin typeface="Sarabun"/>
-                <a:ea typeface="Sarabun"/>
-                <a:cs typeface="Sarabun"/>
-              </a:rPr>
-              <a:t>เก้า</a:t>
-            </a:r>
-            <a:r>
-              <a:rPr sz="1500" b="0" i="1" lang="en-US" altLang="en-US">
-                <a:solidFill>
-                  <a:srgbClr val="566873"/>
-                </a:solidFill>
-                <a:latin typeface="Sarabun"/>
-                <a:ea typeface="Sarabun"/>
-                <a:cs typeface="Sarabun"/>
-              </a:rPr>
-              <a:t> (gâo)</a:t>
-            </a:r>
-            <a:r>
-              <a:rPr sz="1500" b="0" i="0" lang="en-US" altLang="en-US">
-                <a:solidFill>
-                  <a:srgbClr val="24333D"/>
-                </a:solidFill>
-                <a:latin typeface="Sarabun"/>
-                <a:ea typeface="Sarabun"/>
-                <a:cs typeface="Sarabun"/>
-              </a:rPr>
-              <a:t>. Floor 6? </a:t>
-            </a:r>
-            <a:r>
-              <a:rPr sz="1500" b="0" i="0" lang="th-TH" altLang="en-US">
-                <a:solidFill>
-                  <a:srgbClr val="24333D"/>
-                </a:solidFill>
-                <a:latin typeface="Sarabun"/>
-                <a:ea typeface="Sarabun"/>
-                <a:cs typeface="Sarabun"/>
-              </a:rPr>
-              <a:t>หก</a:t>
-            </a:r>
-            <a:r>
-              <a:rPr sz="1500" b="0" i="1" lang="en-US" altLang="en-US">
-                <a:solidFill>
-                  <a:srgbClr val="566873"/>
-                </a:solidFill>
-                <a:latin typeface="Sarabun"/>
-                <a:ea typeface="Sarabun"/>
-                <a:cs typeface="Sarabun"/>
-              </a:rPr>
-              <a:t> (hòk)</a:t>
-            </a:r>
-            <a:r>
-              <a:rPr sz="1500" b="0" i="0" lang="en-US" altLang="en-US">
-                <a:solidFill>
-                  <a:srgbClr val="24333D"/>
-                </a:solidFill>
-                <a:latin typeface="Sarabun"/>
-                <a:ea typeface="Sarabun"/>
-                <a:cs typeface="Sarabun"/>
-              </a:rPr>
-              <a:t>. Floor 10? </a:t>
-            </a:r>
-            <a:r>
-              <a:rPr sz="1500" b="0" i="0" lang="th-TH" altLang="en-US">
-                <a:solidFill>
-                  <a:srgbClr val="24333D"/>
-                </a:solidFill>
-                <a:latin typeface="Sarabun"/>
-                <a:ea typeface="Sarabun"/>
-                <a:cs typeface="Sarabun"/>
-              </a:rPr>
-              <a:t>สิบ</a:t>
-            </a:r>
-            <a:r>
-              <a:rPr sz="1500" b="0" i="1" lang="en-US" altLang="en-US">
-                <a:solidFill>
-                  <a:srgbClr val="566873"/>
-                </a:solidFill>
-                <a:latin typeface="Sarabun"/>
-                <a:ea typeface="Sarabun"/>
-                <a:cs typeface="Sarabun"/>
-              </a:rPr>
-              <a:t> (sìp)</a:t>
-            </a:r>
-            <a:r>
-              <a:rPr sz="1500" b="0" i="0" lang="en-US" altLang="en-US">
-                <a:solidFill>
-                  <a:srgbClr val="24333D"/>
-                </a:solidFill>
-                <a:latin typeface="Sarabun"/>
-                <a:ea typeface="Sarabun"/>
-                <a:cs typeface="Sarabun"/>
-              </a:rPr>
-              <a:t>.</a:t>
             </a:r>
           </a:p>
         </p:txBody>
@@ -8525,17 +7459,11 @@
             <a:ext cx="3889080" cy="1572768"/>
           </a:xfrm>
           <a:prstGeom prst="roundRect">
-            <a:avLst>
-              <a:gd name="adj" fmla="val 6000"/>
-            </a:avLst>
-          </a:prstGeom>
-          <a:solidFill>
-            <a:srgbClr val="FFFFFF"/>
-          </a:solidFill>
+            <a:avLst/>
+          </a:prstGeom>
+          <a:noFill/>
           <a:ln>
-            <a:solidFill>
-              <a:srgbClr val="D7DEE3"/>
-            </a:solidFill>
+            <a:noFill/>
           </a:ln>
         </p:spPr>
         <p:style>
@@ -8627,7 +7555,7 @@
           <a:p>
             <a:pPr algn="l"/>
             <a:r>
-              <a:rPr sz="3200" b="1" i="0" lang="th-TH" altLang="en-US">
+              <a:rPr sz="3600" b="1" i="0" lang="th-TH" altLang="en-US">
                 <a:solidFill>
                   <a:srgbClr val="24333D"/>
                 </a:solidFill>
@@ -8638,7 +7566,7 @@
               <a:t>เบอร์อะไร</a:t>
             </a:r>
             <a:r>
-              <a:rPr sz="1980" b="0" i="1" lang="en-US" altLang="en-US">
+              <a:rPr sz="2230" b="0" i="1" lang="en-US" altLang="en-US">
                 <a:solidFill>
                   <a:srgbClr val="566873"/>
                 </a:solidFill>
@@ -8675,7 +7603,7 @@
           <a:p>
             <a:pPr algn="l"/>
             <a:r>
-              <a:rPr sz="1500" b="0" i="0" lang="en-US" altLang="en-US">
+              <a:rPr sz="1700" b="0" i="0" lang="en-US" altLang="en-US">
                 <a:solidFill>
                   <a:srgbClr val="82909A"/>
                 </a:solidFill>
@@ -8700,17 +7628,11 @@
             <a:ext cx="3889080" cy="1572768"/>
           </a:xfrm>
           <a:prstGeom prst="roundRect">
-            <a:avLst>
-              <a:gd name="adj" fmla="val 6000"/>
-            </a:avLst>
-          </a:prstGeom>
-          <a:solidFill>
-            <a:srgbClr val="FFFFFF"/>
-          </a:solidFill>
+            <a:avLst/>
+          </a:prstGeom>
+          <a:noFill/>
           <a:ln>
-            <a:solidFill>
-              <a:srgbClr val="D7DEE3"/>
-            </a:solidFill>
+            <a:noFill/>
           </a:ln>
         </p:spPr>
         <p:style>
@@ -8802,7 +7724,7 @@
           <a:p>
             <a:pPr algn="l"/>
             <a:r>
-              <a:rPr sz="3200" b="1" i="0" lang="th-TH" altLang="en-US">
+              <a:rPr sz="3600" b="1" i="0" lang="th-TH" altLang="en-US">
                 <a:solidFill>
                   <a:srgbClr val="24333D"/>
                 </a:solidFill>
@@ -8813,7 +7735,7 @@
               <a:t>อายุ...ปี</a:t>
             </a:r>
             <a:r>
-              <a:rPr sz="1980" b="0" i="1" lang="en-US" altLang="en-US">
+              <a:rPr sz="2230" b="0" i="1" lang="en-US" altLang="en-US">
                 <a:solidFill>
                   <a:srgbClr val="566873"/>
                 </a:solidFill>
@@ -8850,7 +7772,7 @@
           <a:p>
             <a:pPr algn="l"/>
             <a:r>
-              <a:rPr sz="1500" b="0" i="0" lang="en-US" altLang="en-US">
+              <a:rPr sz="1700" b="0" i="0" lang="en-US" altLang="en-US">
                 <a:solidFill>
                   <a:srgbClr val="82909A"/>
                 </a:solidFill>
@@ -8875,17 +7797,11 @@
             <a:ext cx="3889080" cy="1572768"/>
           </a:xfrm>
           <a:prstGeom prst="roundRect">
-            <a:avLst>
-              <a:gd name="adj" fmla="val 6000"/>
-            </a:avLst>
-          </a:prstGeom>
-          <a:solidFill>
-            <a:srgbClr val="FFFFFF"/>
-          </a:solidFill>
+            <a:avLst/>
+          </a:prstGeom>
+          <a:noFill/>
           <a:ln>
-            <a:solidFill>
-              <a:srgbClr val="D7DEE3"/>
-            </a:solidFill>
+            <a:noFill/>
           </a:ln>
         </p:spPr>
         <p:style>
@@ -8977,7 +7893,7 @@
           <a:p>
             <a:pPr algn="l"/>
             <a:r>
-              <a:rPr sz="3200" b="1" i="0" lang="th-TH" altLang="en-US">
+              <a:rPr sz="3600" b="1" i="0" lang="th-TH" altLang="en-US">
                 <a:solidFill>
                   <a:srgbClr val="24333D"/>
                 </a:solidFill>
@@ -8988,7 +7904,7 @@
               <a:t>ผมอายุ...ปี</a:t>
             </a:r>
             <a:r>
-              <a:rPr sz="1980" b="0" i="1" lang="en-US" altLang="en-US">
+              <a:rPr sz="2230" b="0" i="1" lang="en-US" altLang="en-US">
                 <a:solidFill>
                   <a:srgbClr val="566873"/>
                 </a:solidFill>
@@ -9025,7 +7941,7 @@
           <a:p>
             <a:pPr algn="l"/>
             <a:r>
-              <a:rPr sz="1500" b="0" i="0" lang="en-US" altLang="en-US">
+              <a:rPr sz="1700" b="0" i="0" lang="en-US" altLang="en-US">
                 <a:solidFill>
                   <a:srgbClr val="82909A"/>
                 </a:solidFill>
@@ -9050,17 +7966,11 @@
             <a:ext cx="3889080" cy="1572768"/>
           </a:xfrm>
           <a:prstGeom prst="roundRect">
-            <a:avLst>
-              <a:gd name="adj" fmla="val 6000"/>
-            </a:avLst>
-          </a:prstGeom>
-          <a:solidFill>
-            <a:srgbClr val="FFFFFF"/>
-          </a:solidFill>
+            <a:avLst/>
+          </a:prstGeom>
+          <a:noFill/>
           <a:ln>
-            <a:solidFill>
-              <a:srgbClr val="D7DEE3"/>
-            </a:solidFill>
+            <a:noFill/>
           </a:ln>
         </p:spPr>
         <p:style>
@@ -9152,7 +8062,7 @@
           <a:p>
             <a:pPr algn="l"/>
             <a:r>
-              <a:rPr sz="3200" b="1" i="0" lang="th-TH" altLang="en-US">
+              <a:rPr sz="3600" b="1" i="0" lang="th-TH" altLang="en-US">
                 <a:solidFill>
                   <a:srgbClr val="24333D"/>
                 </a:solidFill>
@@ -9163,7 +8073,7 @@
               <a:t>ฉันอายุ...ปี</a:t>
             </a:r>
             <a:r>
-              <a:rPr sz="1980" b="0" i="1" lang="en-US" altLang="en-US">
+              <a:rPr sz="2230" b="0" i="1" lang="en-US" altLang="en-US">
                 <a:solidFill>
                   <a:srgbClr val="566873"/>
                 </a:solidFill>
@@ -9200,7 +8110,7 @@
           <a:p>
             <a:pPr algn="l"/>
             <a:r>
-              <a:rPr sz="1500" b="0" i="0" lang="en-US" altLang="en-US">
+              <a:rPr sz="1700" b="0" i="0" lang="en-US" altLang="en-US">
                 <a:solidFill>
                   <a:srgbClr val="82909A"/>
                 </a:solidFill>
@@ -9215,54 +8125,7 @@
       </p:sp>
       <p:sp>
         <p:nvSpPr>
-          <p:cNvPr id="22" name="Rounded Rectangle 21"/>
-          <p:cNvSpPr/>
-          <p:nvPr/>
-        </p:nvSpPr>
-        <p:spPr>
-          <a:xfrm>
-            <a:off x="731520" y="6629400"/>
-            <a:ext cx="10058400" cy="1636776"/>
-          </a:xfrm>
-          <a:prstGeom prst="roundRect">
-            <a:avLst>
-              <a:gd name="adj" fmla="val 6000"/>
-            </a:avLst>
-          </a:prstGeom>
-          <a:solidFill>
-            <a:srgbClr val="FFFFFF"/>
-          </a:solidFill>
-          <a:ln>
-            <a:solidFill>
-              <a:srgbClr val="D7DEE3"/>
-            </a:solidFill>
-          </a:ln>
-        </p:spPr>
-        <p:style>
-          <a:lnRef idx="1">
-            <a:schemeClr val="accent1"/>
-          </a:lnRef>
-          <a:fillRef idx="3">
-            <a:schemeClr val="accent1"/>
-          </a:fillRef>
-          <a:effectRef idx="2">
-            <a:schemeClr val="accent1"/>
-          </a:effectRef>
-          <a:fontRef idx="minor">
-            <a:schemeClr val="lt1"/>
-          </a:fontRef>
-        </p:style>
-        <p:txBody>
-          <a:bodyPr rtlCol="0" anchor="ctr"/>
-          <a:lstStyle/>
-          <a:p>
-            <a:pPr algn="ctr"/>
-          </a:p>
-        </p:txBody>
-      </p:sp>
-      <p:sp>
-        <p:nvSpPr>
-          <p:cNvPr id="23" name="TextBox 22"/>
+          <p:cNvPr id="22" name="TextBox 21"/>
           <p:cNvSpPr txBox="1"/>
           <p:nvPr/>
         </p:nvSpPr>
@@ -9284,7 +8147,7 @@
           <a:p>
             <a:pPr algn="l"/>
             <a:r>
-              <a:rPr sz="1500" b="1" i="0" lang="en-US" altLang="en-US">
+              <a:rPr sz="1700" b="1" i="0" lang="en-US" altLang="en-US">
                 <a:solidFill>
                   <a:srgbClr val="C96F4A"/>
                 </a:solidFill>
@@ -9299,7 +8162,7 @@
       </p:sp>
       <p:sp>
         <p:nvSpPr>
-          <p:cNvPr id="24" name="Oval 23"/>
+          <p:cNvPr id="23" name="Oval 22"/>
           <p:cNvSpPr/>
           <p:nvPr/>
         </p:nvSpPr>
@@ -9342,7 +8205,7 @@
       </p:sp>
       <p:sp>
         <p:nvSpPr>
-          <p:cNvPr id="25" name="TextBox 24"/>
+          <p:cNvPr id="24" name="TextBox 23"/>
           <p:cNvSpPr txBox="1"/>
           <p:nvPr/>
         </p:nvSpPr>
@@ -9364,7 +8227,7 @@
           <a:p>
             <a:pPr algn="l"/>
             <a:r>
-              <a:rPr sz="1500" b="0" i="0" lang="en-US" altLang="en-US">
+              <a:rPr sz="1700" b="0" i="0" lang="en-US" altLang="en-US">
                 <a:solidFill>
                   <a:srgbClr val="24333D"/>
                 </a:solidFill>
@@ -9375,7 +8238,7 @@
               <a:t>Response-building: I ask </a:t>
             </a:r>
             <a:r>
-              <a:rPr sz="1500" b="0" i="0" lang="th-TH" altLang="en-US">
+              <a:rPr sz="1700" b="0" i="0" lang="th-TH" altLang="en-US">
                 <a:solidFill>
                   <a:srgbClr val="24333D"/>
                 </a:solidFill>
@@ -9386,7 +8249,7 @@
               <a:t>เบอร์อะไร</a:t>
             </a:r>
             <a:r>
-              <a:rPr sz="1500" b="0" i="1" lang="en-US" altLang="en-US">
+              <a:rPr sz="1700" b="0" i="1" lang="en-US" altLang="en-US">
                 <a:solidFill>
                   <a:srgbClr val="566873"/>
                 </a:solidFill>
@@ -9397,7 +8260,7 @@
               <a:t> (ber à-rai)</a:t>
             </a:r>
             <a:r>
-              <a:rPr sz="1500" b="0" i="0" lang="en-US" altLang="en-US">
+              <a:rPr sz="1700" b="0" i="0" lang="en-US" altLang="en-US">
                 <a:solidFill>
                   <a:srgbClr val="24333D"/>
                 </a:solidFill>
@@ -9408,7 +8271,7 @@
               <a:t>. Room 409? </a:t>
             </a:r>
             <a:r>
-              <a:rPr sz="1500" b="0" i="0" lang="th-TH" altLang="en-US">
+              <a:rPr sz="1700" b="0" i="0" lang="th-TH" altLang="en-US">
                 <a:solidFill>
                   <a:srgbClr val="24333D"/>
                 </a:solidFill>
@@ -9419,7 +8282,7 @@
               <a:t>สี่</a:t>
             </a:r>
             <a:r>
-              <a:rPr sz="1500" b="0" i="1" lang="en-US" altLang="en-US">
+              <a:rPr sz="1700" b="0" i="1" lang="en-US" altLang="en-US">
                 <a:solidFill>
                   <a:srgbClr val="566873"/>
                 </a:solidFill>
@@ -9430,7 +8293,7 @@
               <a:t> (sìi)</a:t>
             </a:r>
             <a:r>
-              <a:rPr sz="1500" b="0" i="0" lang="en-US" altLang="en-US">
+              <a:rPr sz="1700" b="0" i="0" lang="en-US" altLang="en-US">
                 <a:solidFill>
                   <a:srgbClr val="24333D"/>
                 </a:solidFill>
@@ -9441,7 +8304,7 @@
               <a:t>-</a:t>
             </a:r>
             <a:r>
-              <a:rPr sz="1500" b="0" i="0" lang="th-TH" altLang="en-US">
+              <a:rPr sz="1700" b="0" i="0" lang="th-TH" altLang="en-US">
                 <a:solidFill>
                   <a:srgbClr val="24333D"/>
                 </a:solidFill>
@@ -9452,7 +8315,7 @@
               <a:t>ศูนย์</a:t>
             </a:r>
             <a:r>
-              <a:rPr sz="1500" b="0" i="1" lang="en-US" altLang="en-US">
+              <a:rPr sz="1700" b="0" i="1" lang="en-US" altLang="en-US">
                 <a:solidFill>
                   <a:srgbClr val="566873"/>
                 </a:solidFill>
@@ -9463,7 +8326,7 @@
               <a:t> (sǔun)</a:t>
             </a:r>
             <a:r>
-              <a:rPr sz="1500" b="0" i="0" lang="en-US" altLang="en-US">
+              <a:rPr sz="1700" b="0" i="0" lang="en-US" altLang="en-US">
                 <a:solidFill>
                   <a:srgbClr val="24333D"/>
                 </a:solidFill>
@@ -9474,7 +8337,7 @@
               <a:t>-</a:t>
             </a:r>
             <a:r>
-              <a:rPr sz="1500" b="0" i="0" lang="th-TH" altLang="en-US">
+              <a:rPr sz="1700" b="0" i="0" lang="th-TH" altLang="en-US">
                 <a:solidFill>
                   <a:srgbClr val="24333D"/>
                 </a:solidFill>
@@ -9485,7 +8348,7 @@
               <a:t>เก้า</a:t>
             </a:r>
             <a:r>
-              <a:rPr sz="1500" b="0" i="1" lang="en-US" altLang="en-US">
+              <a:rPr sz="1700" b="0" i="1" lang="en-US" altLang="en-US">
                 <a:solidFill>
                   <a:srgbClr val="566873"/>
                 </a:solidFill>
@@ -9496,7 +8359,7 @@
               <a:t> (gâo)</a:t>
             </a:r>
             <a:r>
-              <a:rPr sz="1500" b="0" i="0" lang="en-US" altLang="en-US">
+              <a:rPr sz="1700" b="0" i="0" lang="en-US" altLang="en-US">
                 <a:solidFill>
                   <a:srgbClr val="24333D"/>
                 </a:solidFill>
@@ -9507,7 +8370,7 @@
               <a:t>. Room 108? </a:t>
             </a:r>
             <a:r>
-              <a:rPr sz="1500" b="0" i="0" lang="th-TH" altLang="en-US">
+              <a:rPr sz="1700" b="0" i="0" lang="th-TH" altLang="en-US">
                 <a:solidFill>
                   <a:srgbClr val="24333D"/>
                 </a:solidFill>
@@ -9518,7 +8381,7 @@
               <a:t>หนึ่ง</a:t>
             </a:r>
             <a:r>
-              <a:rPr sz="1500" b="0" i="1" lang="en-US" altLang="en-US">
+              <a:rPr sz="1700" b="0" i="1" lang="en-US" altLang="en-US">
                 <a:solidFill>
                   <a:srgbClr val="566873"/>
                 </a:solidFill>
@@ -9529,7 +8392,7 @@
               <a:t> (nùeng)</a:t>
             </a:r>
             <a:r>
-              <a:rPr sz="1500" b="0" i="0" lang="en-US" altLang="en-US">
+              <a:rPr sz="1700" b="0" i="0" lang="en-US" altLang="en-US">
                 <a:solidFill>
                   <a:srgbClr val="24333D"/>
                 </a:solidFill>
@@ -9540,7 +8403,7 @@
               <a:t>-</a:t>
             </a:r>
             <a:r>
-              <a:rPr sz="1500" b="0" i="0" lang="th-TH" altLang="en-US">
+              <a:rPr sz="1700" b="0" i="0" lang="th-TH" altLang="en-US">
                 <a:solidFill>
                   <a:srgbClr val="24333D"/>
                 </a:solidFill>
@@ -9551,7 +8414,7 @@
               <a:t>ศูนย์</a:t>
             </a:r>
             <a:r>
-              <a:rPr sz="1500" b="0" i="1" lang="en-US" altLang="en-US">
+              <a:rPr sz="1700" b="0" i="1" lang="en-US" altLang="en-US">
                 <a:solidFill>
                   <a:srgbClr val="566873"/>
                 </a:solidFill>
@@ -9562,7 +8425,7 @@
               <a:t> (sǔun)</a:t>
             </a:r>
             <a:r>
-              <a:rPr sz="1500" b="0" i="0" lang="en-US" altLang="en-US">
+              <a:rPr sz="1700" b="0" i="0" lang="en-US" altLang="en-US">
                 <a:solidFill>
                   <a:srgbClr val="24333D"/>
                 </a:solidFill>
@@ -9573,7 +8436,7 @@
               <a:t>-</a:t>
             </a:r>
             <a:r>
-              <a:rPr sz="1500" b="0" i="0" lang="th-TH" altLang="en-US">
+              <a:rPr sz="1700" b="0" i="0" lang="th-TH" altLang="en-US">
                 <a:solidFill>
                   <a:srgbClr val="24333D"/>
                 </a:solidFill>
@@ -9584,7 +8447,7 @@
               <a:t>แปด</a:t>
             </a:r>
             <a:r>
-              <a:rPr sz="1500" b="0" i="1" lang="en-US" altLang="en-US">
+              <a:rPr sz="1700" b="0" i="1" lang="en-US" altLang="en-US">
                 <a:solidFill>
                   <a:srgbClr val="566873"/>
                 </a:solidFill>
@@ -9595,7 +8458,7 @@
               <a:t> (bpàet)</a:t>
             </a:r>
             <a:r>
-              <a:rPr sz="1500" b="0" i="0" lang="en-US" altLang="en-US">
+              <a:rPr sz="1700" b="0" i="0" lang="en-US" altLang="en-US">
                 <a:solidFill>
                   <a:srgbClr val="24333D"/>
                 </a:solidFill>
@@ -9604,364 +8467,6 @@
                 <a:cs typeface="Sarabun"/>
               </a:rPr>
               <a:t>.</a:t>
-            </a:r>
-          </a:p>
-        </p:txBody>
-      </p:sp>
-      <p:sp>
-        <p:nvSpPr>
-          <p:cNvPr id="26" name="Oval 25"/>
-          <p:cNvSpPr/>
-          <p:nvPr/>
-        </p:nvSpPr>
-        <p:spPr>
-          <a:xfrm>
-            <a:off x="932688" y="7470648"/>
-            <a:ext cx="82296" cy="82296"/>
-          </a:xfrm>
-          <a:prstGeom prst="ellipse">
-            <a:avLst/>
-          </a:prstGeom>
-          <a:solidFill>
-            <a:srgbClr val="C96F4A"/>
-          </a:solidFill>
-          <a:ln>
-            <a:noFill/>
-          </a:ln>
-        </p:spPr>
-        <p:style>
-          <a:lnRef idx="1">
-            <a:schemeClr val="accent1"/>
-          </a:lnRef>
-          <a:fillRef idx="3">
-            <a:schemeClr val="accent1"/>
-          </a:fillRef>
-          <a:effectRef idx="2">
-            <a:schemeClr val="accent1"/>
-          </a:effectRef>
-          <a:fontRef idx="minor">
-            <a:schemeClr val="lt1"/>
-          </a:fontRef>
-        </p:style>
-        <p:txBody>
-          <a:bodyPr rtlCol="0" anchor="ctr"/>
-          <a:lstStyle/>
-          <a:p>
-            <a:pPr algn="ctr"/>
-          </a:p>
-        </p:txBody>
-      </p:sp>
-      <p:sp>
-        <p:nvSpPr>
-          <p:cNvPr id="27" name="TextBox 26"/>
-          <p:cNvSpPr txBox="1"/>
-          <p:nvPr/>
-        </p:nvSpPr>
-        <p:spPr>
-          <a:xfrm>
-            <a:off x="1078992" y="7379208"/>
-            <a:ext cx="9555480" cy="274320"/>
-          </a:xfrm>
-          <a:prstGeom prst="rect">
-            <a:avLst/>
-          </a:prstGeom>
-          <a:noFill/>
-        </p:spPr>
-        <p:txBody>
-          <a:bodyPr wrap="square" anchor="t">
-            <a:spAutoFit/>
-          </a:bodyPr>
-          <a:lstStyle/>
-          <a:p>
-            <a:pPr algn="l"/>
-            <a:r>
-              <a:rPr sz="1500" b="0" i="0" lang="en-US" altLang="en-US">
-                <a:solidFill>
-                  <a:srgbClr val="24333D"/>
-                </a:solidFill>
-                <a:latin typeface="Sarabun"/>
-                <a:ea typeface="Sarabun"/>
-                <a:cs typeface="Sarabun"/>
-              </a:rPr>
-              <a:t>Substitution: build your age sentence. Thirty? </a:t>
-            </a:r>
-            <a:r>
-              <a:rPr sz="1500" b="0" i="0" lang="th-TH" altLang="en-US">
-                <a:solidFill>
-                  <a:srgbClr val="24333D"/>
-                </a:solidFill>
-                <a:latin typeface="Sarabun"/>
-                <a:ea typeface="Sarabun"/>
-                <a:cs typeface="Sarabun"/>
-              </a:rPr>
-              <a:t>ผมอายุสามสิบปีครับ</a:t>
-            </a:r>
-            <a:r>
-              <a:rPr sz="1500" b="0" i="1" lang="en-US" altLang="en-US">
-                <a:solidFill>
-                  <a:srgbClr val="566873"/>
-                </a:solidFill>
-                <a:latin typeface="Sarabun"/>
-                <a:ea typeface="Sarabun"/>
-                <a:cs typeface="Sarabun"/>
-              </a:rPr>
-              <a:t> (phǒm aa-yú sǎam-sìp bpii khráp)</a:t>
-            </a:r>
-            <a:r>
-              <a:rPr sz="1500" b="0" i="0" lang="en-US" altLang="en-US">
-                <a:solidFill>
-                  <a:srgbClr val="24333D"/>
-                </a:solidFill>
-                <a:latin typeface="Sarabun"/>
-                <a:ea typeface="Sarabun"/>
-                <a:cs typeface="Sarabun"/>
-              </a:rPr>
-              <a:t>. Twenty-five? </a:t>
-            </a:r>
-            <a:r>
-              <a:rPr sz="1500" b="0" i="0" lang="th-TH" altLang="en-US">
-                <a:solidFill>
-                  <a:srgbClr val="24333D"/>
-                </a:solidFill>
-                <a:latin typeface="Sarabun"/>
-                <a:ea typeface="Sarabun"/>
-                <a:cs typeface="Sarabun"/>
-              </a:rPr>
-              <a:t>ฉัน</a:t>
-            </a:r>
-            <a:r>
-              <a:rPr sz="1500" b="0" i="1" lang="en-US" altLang="en-US">
-                <a:solidFill>
-                  <a:srgbClr val="566873"/>
-                </a:solidFill>
-                <a:latin typeface="Sarabun"/>
-                <a:ea typeface="Sarabun"/>
-                <a:cs typeface="Sarabun"/>
-              </a:rPr>
-              <a:t> (chǎn)</a:t>
-            </a:r>
-            <a:r>
-              <a:rPr sz="1500" b="0" i="0" lang="th-TH" altLang="en-US">
-                <a:solidFill>
-                  <a:srgbClr val="24333D"/>
-                </a:solidFill>
-                <a:latin typeface="Sarabun"/>
-                <a:ea typeface="Sarabun"/>
-                <a:cs typeface="Sarabun"/>
-              </a:rPr>
-              <a:t>อายุ</a:t>
-            </a:r>
-            <a:r>
-              <a:rPr sz="1500" b="0" i="1" lang="en-US" altLang="en-US">
-                <a:solidFill>
-                  <a:srgbClr val="566873"/>
-                </a:solidFill>
-                <a:latin typeface="Sarabun"/>
-                <a:ea typeface="Sarabun"/>
-                <a:cs typeface="Sarabun"/>
-              </a:rPr>
-              <a:t> (aa-yú)</a:t>
-            </a:r>
-            <a:r>
-              <a:rPr sz="1500" b="0" i="0" lang="th-TH" altLang="en-US">
-                <a:solidFill>
-                  <a:srgbClr val="24333D"/>
-                </a:solidFill>
-                <a:latin typeface="Sarabun"/>
-                <a:ea typeface="Sarabun"/>
-                <a:cs typeface="Sarabun"/>
-              </a:rPr>
-              <a:t>ยี่</a:t>
-            </a:r>
-            <a:r>
-              <a:rPr sz="1500" b="0" i="0" lang="th-TH" altLang="en-US">
-                <a:solidFill>
-                  <a:srgbClr val="24333D"/>
-                </a:solidFill>
-                <a:latin typeface="Sarabun"/>
-                <a:ea typeface="Sarabun"/>
-                <a:cs typeface="Sarabun"/>
-              </a:rPr>
-              <a:t>สิบ</a:t>
-            </a:r>
-            <a:r>
-              <a:rPr sz="1500" b="0" i="1" lang="en-US" altLang="en-US">
-                <a:solidFill>
-                  <a:srgbClr val="566873"/>
-                </a:solidFill>
-                <a:latin typeface="Sarabun"/>
-                <a:ea typeface="Sarabun"/>
-                <a:cs typeface="Sarabun"/>
-              </a:rPr>
-              <a:t> (sìp)</a:t>
-            </a:r>
-            <a:r>
-              <a:rPr sz="1500" b="0" i="0" lang="th-TH" altLang="en-US">
-                <a:solidFill>
-                  <a:srgbClr val="24333D"/>
-                </a:solidFill>
-                <a:latin typeface="Sarabun"/>
-                <a:ea typeface="Sarabun"/>
-                <a:cs typeface="Sarabun"/>
-              </a:rPr>
-              <a:t>ห้า</a:t>
-            </a:r>
-            <a:r>
-              <a:rPr sz="1500" b="0" i="1" lang="en-US" altLang="en-US">
-                <a:solidFill>
-                  <a:srgbClr val="566873"/>
-                </a:solidFill>
-                <a:latin typeface="Sarabun"/>
-                <a:ea typeface="Sarabun"/>
-                <a:cs typeface="Sarabun"/>
-              </a:rPr>
-              <a:t> (hâa)</a:t>
-            </a:r>
-            <a:r>
-              <a:rPr sz="1500" b="0" i="0" lang="th-TH" altLang="en-US">
-                <a:solidFill>
-                  <a:srgbClr val="24333D"/>
-                </a:solidFill>
-                <a:latin typeface="Sarabun"/>
-                <a:ea typeface="Sarabun"/>
-                <a:cs typeface="Sarabun"/>
-              </a:rPr>
-              <a:t>ปี</a:t>
-            </a:r>
-            <a:r>
-              <a:rPr sz="1500" b="0" i="1" lang="en-US" altLang="en-US">
-                <a:solidFill>
-                  <a:srgbClr val="566873"/>
-                </a:solidFill>
-                <a:latin typeface="Sarabun"/>
-                <a:ea typeface="Sarabun"/>
-                <a:cs typeface="Sarabun"/>
-              </a:rPr>
-              <a:t> (bpii)</a:t>
-            </a:r>
-            <a:r>
-              <a:rPr sz="1500" b="0" i="0" lang="th-TH" altLang="en-US">
-                <a:solidFill>
-                  <a:srgbClr val="24333D"/>
-                </a:solidFill>
-                <a:latin typeface="Sarabun"/>
-                <a:ea typeface="Sarabun"/>
-                <a:cs typeface="Sarabun"/>
-              </a:rPr>
-              <a:t>ค่ะ.</a:t>
-            </a:r>
-          </a:p>
-        </p:txBody>
-      </p:sp>
-      <p:sp>
-        <p:nvSpPr>
-          <p:cNvPr id="28" name="Oval 27"/>
-          <p:cNvSpPr/>
-          <p:nvPr/>
-        </p:nvSpPr>
-        <p:spPr>
-          <a:xfrm>
-            <a:off x="932688" y="7781544"/>
-            <a:ext cx="82296" cy="82296"/>
-          </a:xfrm>
-          <a:prstGeom prst="ellipse">
-            <a:avLst/>
-          </a:prstGeom>
-          <a:solidFill>
-            <a:srgbClr val="C96F4A"/>
-          </a:solidFill>
-          <a:ln>
-            <a:noFill/>
-          </a:ln>
-        </p:spPr>
-        <p:style>
-          <a:lnRef idx="1">
-            <a:schemeClr val="accent1"/>
-          </a:lnRef>
-          <a:fillRef idx="3">
-            <a:schemeClr val="accent1"/>
-          </a:fillRef>
-          <a:effectRef idx="2">
-            <a:schemeClr val="accent1"/>
-          </a:effectRef>
-          <a:fontRef idx="minor">
-            <a:schemeClr val="lt1"/>
-          </a:fontRef>
-        </p:style>
-        <p:txBody>
-          <a:bodyPr rtlCol="0" anchor="ctr"/>
-          <a:lstStyle/>
-          <a:p>
-            <a:pPr algn="ctr"/>
-          </a:p>
-        </p:txBody>
-      </p:sp>
-      <p:sp>
-        <p:nvSpPr>
-          <p:cNvPr id="29" name="TextBox 28"/>
-          <p:cNvSpPr txBox="1"/>
-          <p:nvPr/>
-        </p:nvSpPr>
-        <p:spPr>
-          <a:xfrm>
-            <a:off x="1078992" y="7690104"/>
-            <a:ext cx="9555480" cy="274320"/>
-          </a:xfrm>
-          <a:prstGeom prst="rect">
-            <a:avLst/>
-          </a:prstGeom>
-          <a:noFill/>
-        </p:spPr>
-        <p:txBody>
-          <a:bodyPr wrap="square" anchor="t">
-            <a:spAutoFit/>
-          </a:bodyPr>
-          <a:lstStyle/>
-          <a:p>
-            <a:pPr algn="l"/>
-            <a:r>
-              <a:rPr sz="1500" b="0" i="0" lang="th-TH" altLang="en-US">
-                <a:solidFill>
-                  <a:srgbClr val="24333D"/>
-                </a:solidFill>
-                <a:latin typeface="Sarabun"/>
-                <a:ea typeface="Sarabun"/>
-                <a:cs typeface="Sarabun"/>
-              </a:rPr>
-              <a:t>Pause-and-produce: someone asks คุณ</a:t>
-            </a:r>
-            <a:r>
-              <a:rPr sz="1500" b="0" i="0" lang="th-TH" altLang="en-US">
-                <a:solidFill>
-                  <a:srgbClr val="24333D"/>
-                </a:solidFill>
-                <a:latin typeface="Sarabun"/>
-                <a:ea typeface="Sarabun"/>
-                <a:cs typeface="Sarabun"/>
-              </a:rPr>
-              <a:t>อายุ</a:t>
-            </a:r>
-            <a:r>
-              <a:rPr sz="1500" b="0" i="1" lang="en-US" altLang="en-US">
-                <a:solidFill>
-                  <a:srgbClr val="566873"/>
-                </a:solidFill>
-                <a:latin typeface="Sarabun"/>
-                <a:ea typeface="Sarabun"/>
-                <a:cs typeface="Sarabun"/>
-              </a:rPr>
-              <a:t> (aa-yú)</a:t>
-            </a:r>
-            <a:r>
-              <a:rPr sz="1500" b="0" i="0" lang="th-TH" altLang="en-US">
-                <a:solidFill>
-                  <a:srgbClr val="24333D"/>
-                </a:solidFill>
-                <a:latin typeface="Sarabun"/>
-                <a:ea typeface="Sarabun"/>
-                <a:cs typeface="Sarabun"/>
-              </a:rPr>
-              <a:t>เท่าไหร่. Say your real age in Thai.</a:t>
             </a:r>
           </a:p>
         </p:txBody>
@@ -10233,17 +8738,11 @@
             <a:ext cx="3889080" cy="1572768"/>
           </a:xfrm>
           <a:prstGeom prst="roundRect">
-            <a:avLst>
-              <a:gd name="adj" fmla="val 6000"/>
-            </a:avLst>
-          </a:prstGeom>
-          <a:solidFill>
-            <a:srgbClr val="FFFFFF"/>
-          </a:solidFill>
+            <a:avLst/>
+          </a:prstGeom>
+          <a:noFill/>
           <a:ln>
-            <a:solidFill>
-              <a:srgbClr val="D7DEE3"/>
-            </a:solidFill>
+            <a:noFill/>
           </a:ln>
         </p:spPr>
         <p:style>
@@ -10335,7 +8834,7 @@
           <a:p>
             <a:pPr algn="l"/>
             <a:r>
-              <a:rPr sz="3200" b="1" i="0" lang="th-TH" altLang="en-US">
+              <a:rPr sz="3600" b="1" i="0" lang="th-TH" altLang="en-US">
                 <a:solidFill>
                   <a:srgbClr val="24333D"/>
                 </a:solidFill>
@@ -10346,7 +8845,7 @@
               <a:t>สี่</a:t>
             </a:r>
             <a:r>
-              <a:rPr sz="1980" b="0" i="1" lang="en-US" altLang="en-US">
+              <a:rPr sz="2230" b="0" i="1" lang="en-US" altLang="en-US">
                 <a:solidFill>
                   <a:srgbClr val="566873"/>
                 </a:solidFill>
@@ -10383,7 +8882,7 @@
           <a:p>
             <a:pPr algn="l"/>
             <a:r>
-              <a:rPr sz="1500" b="0" i="0" lang="en-US" altLang="en-US">
+              <a:rPr sz="1700" b="0" i="0" lang="en-US" altLang="en-US">
                 <a:solidFill>
                   <a:srgbClr val="82909A"/>
                 </a:solidFill>
@@ -10408,17 +8907,11 @@
             <a:ext cx="3889080" cy="1572768"/>
           </a:xfrm>
           <a:prstGeom prst="roundRect">
-            <a:avLst>
-              <a:gd name="adj" fmla="val 6000"/>
-            </a:avLst>
-          </a:prstGeom>
-          <a:solidFill>
-            <a:srgbClr val="FFFFFF"/>
-          </a:solidFill>
+            <a:avLst/>
+          </a:prstGeom>
+          <a:noFill/>
           <a:ln>
-            <a:solidFill>
-              <a:srgbClr val="D7DEE3"/>
-            </a:solidFill>
+            <a:noFill/>
           </a:ln>
         </p:spPr>
         <p:style>
@@ -10510,7 +9003,7 @@
           <a:p>
             <a:pPr algn="l"/>
             <a:r>
-              <a:rPr sz="3200" b="1" i="0" lang="th-TH" altLang="en-US">
+              <a:rPr sz="3600" b="1" i="0" lang="th-TH" altLang="en-US">
                 <a:solidFill>
                   <a:srgbClr val="24333D"/>
                 </a:solidFill>
@@ -10521,7 +9014,7 @@
               <a:t>สี</a:t>
             </a:r>
             <a:r>
-              <a:rPr sz="1980" b="0" i="1" lang="en-US" altLang="en-US">
+              <a:rPr sz="2230" b="0" i="1" lang="en-US" altLang="en-US">
                 <a:solidFill>
                   <a:srgbClr val="566873"/>
                 </a:solidFill>
@@ -10558,7 +9051,7 @@
           <a:p>
             <a:pPr algn="l"/>
             <a:r>
-              <a:rPr sz="1500" b="0" i="0" lang="en-US" altLang="en-US">
+              <a:rPr sz="1700" b="0" i="0" lang="en-US" altLang="en-US">
                 <a:solidFill>
                   <a:srgbClr val="82909A"/>
                 </a:solidFill>
@@ -10583,17 +9076,11 @@
             <a:ext cx="3889080" cy="1572768"/>
           </a:xfrm>
           <a:prstGeom prst="roundRect">
-            <a:avLst>
-              <a:gd name="adj" fmla="val 6000"/>
-            </a:avLst>
-          </a:prstGeom>
-          <a:solidFill>
-            <a:srgbClr val="FFFFFF"/>
-          </a:solidFill>
+            <a:avLst/>
+          </a:prstGeom>
+          <a:noFill/>
           <a:ln>
-            <a:solidFill>
-              <a:srgbClr val="D7DEE3"/>
-            </a:solidFill>
+            <a:noFill/>
           </a:ln>
         </p:spPr>
         <p:style>
@@ -10685,7 +9172,7 @@
           <a:p>
             <a:pPr algn="l"/>
             <a:r>
-              <a:rPr sz="3200" b="1" i="0" lang="th-TH" altLang="en-US">
+              <a:rPr sz="3600" b="1" i="0" lang="th-TH" altLang="en-US">
                 <a:solidFill>
                   <a:srgbClr val="24333D"/>
                 </a:solidFill>
@@ -10696,7 +9183,7 @@
               <a:t>เก้า</a:t>
             </a:r>
             <a:r>
-              <a:rPr sz="1980" b="0" i="1" lang="en-US" altLang="en-US">
+              <a:rPr sz="2230" b="0" i="1" lang="en-US" altLang="en-US">
                 <a:solidFill>
                   <a:srgbClr val="566873"/>
                 </a:solidFill>
@@ -10733,7 +9220,7 @@
           <a:p>
             <a:pPr algn="l"/>
             <a:r>
-              <a:rPr sz="1500" b="0" i="0" lang="en-US" altLang="en-US">
+              <a:rPr sz="1700" b="0" i="0" lang="en-US" altLang="en-US">
                 <a:solidFill>
                   <a:srgbClr val="82909A"/>
                 </a:solidFill>
@@ -10748,54 +9235,7 @@
       </p:sp>
       <p:sp>
         <p:nvSpPr>
-          <p:cNvPr id="18" name="Rounded Rectangle 17"/>
-          <p:cNvSpPr/>
-          <p:nvPr/>
-        </p:nvSpPr>
-        <p:spPr>
-          <a:xfrm>
-            <a:off x="731520" y="6775704"/>
-            <a:ext cx="10058400" cy="1289304"/>
-          </a:xfrm>
-          <a:prstGeom prst="roundRect">
-            <a:avLst>
-              <a:gd name="adj" fmla="val 6000"/>
-            </a:avLst>
-          </a:prstGeom>
-          <a:solidFill>
-            <a:srgbClr val="FFFFFF"/>
-          </a:solidFill>
-          <a:ln>
-            <a:solidFill>
-              <a:srgbClr val="D7DEE3"/>
-            </a:solidFill>
-          </a:ln>
-        </p:spPr>
-        <p:style>
-          <a:lnRef idx="1">
-            <a:schemeClr val="accent1"/>
-          </a:lnRef>
-          <a:fillRef idx="3">
-            <a:schemeClr val="accent1"/>
-          </a:fillRef>
-          <a:effectRef idx="2">
-            <a:schemeClr val="accent1"/>
-          </a:effectRef>
-          <a:fontRef idx="minor">
-            <a:schemeClr val="lt1"/>
-          </a:fontRef>
-        </p:style>
-        <p:txBody>
-          <a:bodyPr rtlCol="0" anchor="ctr"/>
-          <a:lstStyle/>
-          <a:p>
-            <a:pPr algn="ctr"/>
-          </a:p>
-        </p:txBody>
-      </p:sp>
-      <p:sp>
-        <p:nvSpPr>
-          <p:cNvPr id="19" name="TextBox 18"/>
+          <p:cNvPr id="18" name="TextBox 17"/>
           <p:cNvSpPr txBox="1"/>
           <p:nvPr/>
         </p:nvSpPr>
@@ -10817,7 +9257,7 @@
           <a:p>
             <a:pPr algn="l"/>
             <a:r>
-              <a:rPr sz="1500" b="1" i="0" lang="en-US" altLang="en-US">
+              <a:rPr sz="1700" b="1" i="0" lang="en-US" altLang="en-US">
                 <a:solidFill>
                   <a:srgbClr val="C96F4A"/>
                 </a:solidFill>
@@ -10832,7 +9272,7 @@
       </p:sp>
       <p:sp>
         <p:nvSpPr>
-          <p:cNvPr id="20" name="Oval 19"/>
+          <p:cNvPr id="19" name="Oval 18"/>
           <p:cNvSpPr/>
           <p:nvPr/>
         </p:nvSpPr>
@@ -10875,7 +9315,7 @@
       </p:sp>
       <p:sp>
         <p:nvSpPr>
-          <p:cNvPr id="21" name="TextBox 20"/>
+          <p:cNvPr id="20" name="TextBox 19"/>
           <p:cNvSpPr txBox="1"/>
           <p:nvPr/>
         </p:nvSpPr>
@@ -10897,7 +9337,7 @@
           <a:p>
             <a:pPr algn="l"/>
             <a:r>
-              <a:rPr sz="1500" b="0" i="0" lang="en-US" altLang="en-US">
+              <a:rPr sz="1700" b="0" i="0" lang="en-US" altLang="en-US">
                 <a:solidFill>
                   <a:srgbClr val="24333D"/>
                 </a:solidFill>
@@ -10908,7 +9348,7 @@
               <a:t>Tone echo: </a:t>
             </a:r>
             <a:r>
-              <a:rPr sz="1500" b="0" i="0" lang="th-TH" altLang="en-US">
+              <a:rPr sz="1700" b="0" i="0" lang="th-TH" altLang="en-US">
                 <a:solidFill>
                   <a:srgbClr val="24333D"/>
                 </a:solidFill>
@@ -10919,7 +9359,7 @@
               <a:t>สี่</a:t>
             </a:r>
             <a:r>
-              <a:rPr sz="1500" b="0" i="1" lang="en-US" altLang="en-US">
+              <a:rPr sz="1700" b="0" i="1" lang="en-US" altLang="en-US">
                 <a:solidFill>
                   <a:srgbClr val="566873"/>
                 </a:solidFill>
@@ -10930,7 +9370,7 @@
               <a:t> (sìi)</a:t>
             </a:r>
             <a:r>
-              <a:rPr sz="1500" b="0" i="0" lang="en-US" altLang="en-US">
+              <a:rPr sz="1700" b="0" i="0" lang="en-US" altLang="en-US">
                 <a:solidFill>
                   <a:srgbClr val="24333D"/>
                 </a:solidFill>
@@ -10941,7 +9381,7 @@
               <a:t> sìi — repeat low. </a:t>
             </a:r>
             <a:r>
-              <a:rPr sz="1500" b="0" i="0" lang="th-TH" altLang="en-US">
+              <a:rPr sz="1700" b="0" i="0" lang="th-TH" altLang="en-US">
                 <a:solidFill>
                   <a:srgbClr val="24333D"/>
                 </a:solidFill>
@@ -10952,7 +9392,7 @@
               <a:t>สี</a:t>
             </a:r>
             <a:r>
-              <a:rPr sz="1500" b="0" i="1" lang="en-US" altLang="en-US">
+              <a:rPr sz="1700" b="0" i="1" lang="en-US" altLang="en-US">
                 <a:solidFill>
                   <a:srgbClr val="566873"/>
                 </a:solidFill>
@@ -10963,7 +9403,7 @@
               <a:t> (sǐi)</a:t>
             </a:r>
             <a:r>
-              <a:rPr sz="1500" b="0" i="0" lang="en-US" altLang="en-US">
+              <a:rPr sz="1700" b="0" i="0" lang="en-US" altLang="en-US">
                 <a:solidFill>
                   <a:srgbClr val="24333D"/>
                 </a:solidFill>
@@ -10972,86 +9412,6 @@
                 <a:cs typeface="Sarabun"/>
               </a:rPr>
               <a:t> sǐi — repeat rising.</a:t>
-            </a:r>
-          </a:p>
-        </p:txBody>
-      </p:sp>
-      <p:sp>
-        <p:nvSpPr>
-          <p:cNvPr id="22" name="Oval 21"/>
-          <p:cNvSpPr/>
-          <p:nvPr/>
-        </p:nvSpPr>
-        <p:spPr>
-          <a:xfrm>
-            <a:off x="932688" y="7616952"/>
-            <a:ext cx="82296" cy="82296"/>
-          </a:xfrm>
-          <a:prstGeom prst="ellipse">
-            <a:avLst/>
-          </a:prstGeom>
-          <a:solidFill>
-            <a:srgbClr val="C96F4A"/>
-          </a:solidFill>
-          <a:ln>
-            <a:noFill/>
-          </a:ln>
-        </p:spPr>
-        <p:style>
-          <a:lnRef idx="1">
-            <a:schemeClr val="accent1"/>
-          </a:lnRef>
-          <a:fillRef idx="3">
-            <a:schemeClr val="accent1"/>
-          </a:fillRef>
-          <a:effectRef idx="2">
-            <a:schemeClr val="accent1"/>
-          </a:effectRef>
-          <a:fontRef idx="minor">
-            <a:schemeClr val="lt1"/>
-          </a:fontRef>
-        </p:style>
-        <p:txBody>
-          <a:bodyPr rtlCol="0" anchor="ctr"/>
-          <a:lstStyle/>
-          <a:p>
-            <a:pPr algn="ctr"/>
-          </a:p>
-        </p:txBody>
-      </p:sp>
-      <p:sp>
-        <p:nvSpPr>
-          <p:cNvPr id="23" name="TextBox 22"/>
-          <p:cNvSpPr txBox="1"/>
-          <p:nvPr/>
-        </p:nvSpPr>
-        <p:spPr>
-          <a:xfrm>
-            <a:off x="1078992" y="7525512"/>
-            <a:ext cx="9555480" cy="274320"/>
-          </a:xfrm>
-          <a:prstGeom prst="rect">
-            <a:avLst/>
-          </a:prstGeom>
-          <a:noFill/>
-        </p:spPr>
-        <p:txBody>
-          <a:bodyPr wrap="square" anchor="t">
-            <a:spAutoFit/>
-          </a:bodyPr>
-          <a:lstStyle/>
-          <a:p>
-            <a:pPr algn="l"/>
-            <a:r>
-              <a:rPr sz="1500" b="0" i="0" lang="en-US" altLang="en-US">
-                <a:solidFill>
-                  <a:srgbClr val="24333D"/>
-                </a:solidFill>
-                <a:latin typeface="Sarabun"/>
-                <a:ea typeface="Sarabun"/>
-                <a:cs typeface="Sarabun"/>
-              </a:rPr>
-              <a:t>Minimal pair: I say one. Is it four or colour? Answer before I show it.</a:t>
             </a:r>
           </a:p>
         </p:txBody>
@@ -11336,7 +9696,7 @@
           <a:p>
             <a:pPr algn="l"/>
             <a:r>
-              <a:rPr sz="2200" b="1" i="0" lang="th-TH" altLang="en-US">
+              <a:rPr sz="2600" b="1" i="0" lang="th-TH" altLang="en-US">
                 <a:solidFill>
                   <a:srgbClr val="24333D"/>
                 </a:solidFill>
@@ -11347,7 +9707,7 @@
               <a:t>สวัสดีครับ</a:t>
             </a:r>
             <a:r>
-              <a:rPr sz="1500" b="0" i="1" lang="en-US" altLang="en-US">
+              <a:rPr sz="1700" b="0" i="1" lang="en-US" altLang="en-US">
                 <a:solidFill>
                   <a:srgbClr val="566873"/>
                 </a:solidFill>
@@ -11477,7 +9837,7 @@
           <a:p>
             <a:pPr algn="l"/>
             <a:r>
-              <a:rPr sz="2200" b="1" i="0" lang="th-TH" altLang="en-US">
+              <a:rPr sz="2600" b="1" i="0" lang="th-TH" altLang="en-US">
                 <a:solidFill>
                   <a:srgbClr val="24333D"/>
                 </a:solidFill>
@@ -11488,7 +9848,7 @@
               <a:t>สวัสดีค่ะ เบอร์ห้องอะไรคะ</a:t>
             </a:r>
             <a:r>
-              <a:rPr sz="1500" b="0" i="1" lang="en-US" altLang="en-US">
+              <a:rPr sz="1700" b="0" i="1" lang="en-US" altLang="en-US">
                 <a:solidFill>
                   <a:srgbClr val="566873"/>
                 </a:solidFill>
@@ -11618,7 +9978,7 @@
           <a:p>
             <a:pPr algn="l"/>
             <a:r>
-              <a:rPr sz="2200" b="1" i="0" lang="th-TH" altLang="en-US">
+              <a:rPr sz="2600" b="1" i="0" lang="th-TH" altLang="en-US">
                 <a:solidFill>
                   <a:srgbClr val="24333D"/>
                 </a:solidFill>
@@ -11629,7 +9989,7 @@
               <a:t>ห้า-ศูนย์-สองครับ</a:t>
             </a:r>
             <a:r>
-              <a:rPr sz="1500" b="0" i="1" lang="en-US" altLang="en-US">
+              <a:rPr sz="1700" b="0" i="1" lang="en-US" altLang="en-US">
                 <a:solidFill>
                   <a:srgbClr val="566873"/>
                 </a:solidFill>
@@ -11759,7 +10119,7 @@
           <a:p>
             <a:pPr algn="l"/>
             <a:r>
-              <a:rPr sz="2200" b="1" i="0" lang="th-TH" altLang="en-US">
+              <a:rPr sz="2600" b="1" i="0" lang="th-TH" altLang="en-US">
                 <a:solidFill>
                   <a:srgbClr val="24333D"/>
                 </a:solidFill>
@@ -11770,7 +10130,7 @@
               <a:t>ค่ะ คุณอายุเท่าไหร่คะ</a:t>
             </a:r>
             <a:r>
-              <a:rPr sz="1500" b="0" i="1" lang="en-US" altLang="en-US">
+              <a:rPr sz="1700" b="0" i="1" lang="en-US" altLang="en-US">
                 <a:solidFill>
                   <a:srgbClr val="566873"/>
                 </a:solidFill>
@@ -11900,7 +10260,7 @@
           <a:p>
             <a:pPr algn="l"/>
             <a:r>
-              <a:rPr sz="2200" b="1" i="0" lang="th-TH" altLang="en-US">
+              <a:rPr sz="2600" b="1" i="0" lang="th-TH" altLang="en-US">
                 <a:solidFill>
                   <a:srgbClr val="24333D"/>
                 </a:solidFill>
@@ -11911,7 +10271,7 @@
               <a:t>ผมอายุสามสิบปีครับ</a:t>
             </a:r>
             <a:r>
-              <a:rPr sz="1500" b="0" i="1" lang="en-US" altLang="en-US">
+              <a:rPr sz="1700" b="0" i="1" lang="en-US" altLang="en-US">
                 <a:solidFill>
                   <a:srgbClr val="566873"/>
                 </a:solidFill>
@@ -12041,7 +10401,7 @@
           <a:p>
             <a:pPr algn="l"/>
             <a:r>
-              <a:rPr sz="2200" b="1" i="0" lang="th-TH" altLang="en-US">
+              <a:rPr sz="2600" b="1" i="0" lang="th-TH" altLang="en-US">
                 <a:solidFill>
                   <a:srgbClr val="24333D"/>
                 </a:solidFill>
@@ -12052,7 +10412,7 @@
               <a:t>ขอบคุณค่ะ</a:t>
             </a:r>
             <a:r>
-              <a:rPr sz="1500" b="0" i="1" lang="en-US" altLang="en-US">
+              <a:rPr sz="1700" b="0" i="1" lang="en-US" altLang="en-US">
                 <a:solidFill>
                   <a:srgbClr val="566873"/>
                 </a:solidFill>
@@ -12304,54 +10664,7 @@
       </p:sp>
       <p:sp>
         <p:nvSpPr>
-          <p:cNvPr id="6" name="Rounded Rectangle 5"/>
-          <p:cNvSpPr/>
-          <p:nvPr/>
-        </p:nvSpPr>
-        <p:spPr>
-          <a:xfrm>
-            <a:off x="731520" y="1417320"/>
-            <a:ext cx="7071055" cy="2331720"/>
-          </a:xfrm>
-          <a:prstGeom prst="roundRect">
-            <a:avLst>
-              <a:gd name="adj" fmla="val 6000"/>
-            </a:avLst>
-          </a:prstGeom>
-          <a:solidFill>
-            <a:srgbClr val="FFFFFF"/>
-          </a:solidFill>
-          <a:ln>
-            <a:solidFill>
-              <a:srgbClr val="D7DEE3"/>
-            </a:solidFill>
-          </a:ln>
-        </p:spPr>
-        <p:style>
-          <a:lnRef idx="1">
-            <a:schemeClr val="accent1"/>
-          </a:lnRef>
-          <a:fillRef idx="3">
-            <a:schemeClr val="accent1"/>
-          </a:fillRef>
-          <a:effectRef idx="2">
-            <a:schemeClr val="accent1"/>
-          </a:effectRef>
-          <a:fontRef idx="minor">
-            <a:schemeClr val="lt1"/>
-          </a:fontRef>
-        </p:style>
-        <p:txBody>
-          <a:bodyPr rtlCol="0" anchor="ctr"/>
-          <a:lstStyle/>
-          <a:p>
-            <a:pPr algn="ctr"/>
-          </a:p>
-        </p:txBody>
-      </p:sp>
-      <p:sp>
-        <p:nvSpPr>
-          <p:cNvPr id="7" name="TextBox 6"/>
+          <p:cNvPr id="6" name="TextBox 5"/>
           <p:cNvSpPr txBox="1"/>
           <p:nvPr/>
         </p:nvSpPr>
@@ -12373,7 +10686,7 @@
           <a:p>
             <a:pPr algn="l"/>
             <a:r>
-              <a:rPr sz="1500" b="1" i="0" lang="en-US" altLang="en-US">
+              <a:rPr sz="1700" b="1" i="0" lang="en-US" altLang="en-US">
                 <a:solidFill>
                   <a:srgbClr val="355C7D"/>
                 </a:solidFill>
@@ -12388,7 +10701,7 @@
       </p:sp>
       <p:sp>
         <p:nvSpPr>
-          <p:cNvPr id="8" name="Oval 7"/>
+          <p:cNvPr id="7" name="Oval 6"/>
           <p:cNvSpPr/>
           <p:nvPr/>
         </p:nvSpPr>
@@ -12431,7 +10744,7 @@
       </p:sp>
       <p:sp>
         <p:nvSpPr>
-          <p:cNvPr id="9" name="TextBox 8"/>
+          <p:cNvPr id="8" name="TextBox 7"/>
           <p:cNvSpPr txBox="1"/>
           <p:nvPr/>
         </p:nvSpPr>
@@ -12453,7 +10766,7 @@
           <a:p>
             <a:pPr algn="l"/>
             <a:r>
-              <a:rPr sz="1500" b="0" i="0" lang="en-US" altLang="en-US">
+              <a:rPr sz="1700" b="0" i="0" lang="en-US" altLang="en-US">
                 <a:solidFill>
                   <a:srgbClr val="24333D"/>
                 </a:solidFill>
@@ -12468,7 +10781,7 @@
       </p:sp>
       <p:sp>
         <p:nvSpPr>
-          <p:cNvPr id="10" name="Oval 9"/>
+          <p:cNvPr id="9" name="Oval 8"/>
           <p:cNvSpPr/>
           <p:nvPr/>
         </p:nvSpPr>
@@ -12511,7 +10824,7 @@
       </p:sp>
       <p:sp>
         <p:nvSpPr>
-          <p:cNvPr id="11" name="TextBox 10"/>
+          <p:cNvPr id="10" name="TextBox 9"/>
           <p:cNvSpPr txBox="1"/>
           <p:nvPr/>
         </p:nvSpPr>
@@ -12533,7 +10846,7 @@
           <a:p>
             <a:pPr algn="l"/>
             <a:r>
-              <a:rPr sz="1500" b="0" i="0" lang="en-US" altLang="en-US">
+              <a:rPr sz="1700" b="0" i="0" lang="en-US" altLang="en-US">
                 <a:solidFill>
                   <a:srgbClr val="24333D"/>
                 </a:solidFill>
@@ -12548,7 +10861,7 @@
       </p:sp>
       <p:sp>
         <p:nvSpPr>
-          <p:cNvPr id="12" name="Oval 11"/>
+          <p:cNvPr id="11" name="Oval 10"/>
           <p:cNvSpPr/>
           <p:nvPr/>
         </p:nvSpPr>
@@ -12591,7 +10904,7 @@
       </p:sp>
       <p:sp>
         <p:nvSpPr>
-          <p:cNvPr id="13" name="TextBox 12"/>
+          <p:cNvPr id="12" name="TextBox 11"/>
           <p:cNvSpPr txBox="1"/>
           <p:nvPr/>
         </p:nvSpPr>
@@ -12613,7 +10926,7 @@
           <a:p>
             <a:pPr algn="l"/>
             <a:r>
-              <a:rPr sz="1500" b="0" i="0" lang="en-US" altLang="en-US">
+              <a:rPr sz="1700" b="0" i="0" lang="en-US" altLang="en-US">
                 <a:solidFill>
                   <a:srgbClr val="24333D"/>
                 </a:solidFill>
@@ -12624,7 +10937,7 @@
               <a:t>Ask 'what number?' </a:t>
             </a:r>
             <a:r>
-              <a:rPr sz="1500" b="0" i="0" lang="th-TH" altLang="en-US">
+              <a:rPr sz="1700" b="0" i="0" lang="th-TH" altLang="en-US">
                 <a:solidFill>
                   <a:srgbClr val="24333D"/>
                 </a:solidFill>
@@ -12635,7 +10948,7 @@
               <a:t>เบอร์อะไร</a:t>
             </a:r>
             <a:r>
-              <a:rPr sz="1500" b="0" i="1" lang="en-US" altLang="en-US">
+              <a:rPr sz="1700" b="0" i="1" lang="en-US" altLang="en-US">
                 <a:solidFill>
                   <a:srgbClr val="566873"/>
                 </a:solidFill>
@@ -12646,7 +10959,7 @@
               <a:t> (ber à-rai)</a:t>
             </a:r>
             <a:r>
-              <a:rPr sz="1500" b="0" i="0" lang="en-US" altLang="en-US">
+              <a:rPr sz="1700" b="0" i="0" lang="en-US" altLang="en-US">
                 <a:solidFill>
                   <a:srgbClr val="24333D"/>
                 </a:solidFill>
@@ -12661,7 +10974,7 @@
       </p:sp>
       <p:sp>
         <p:nvSpPr>
-          <p:cNvPr id="14" name="Oval 13"/>
+          <p:cNvPr id="13" name="Oval 12"/>
           <p:cNvSpPr/>
           <p:nvPr/>
         </p:nvSpPr>
@@ -12704,7 +11017,7 @@
       </p:sp>
       <p:sp>
         <p:nvSpPr>
-          <p:cNvPr id="15" name="TextBox 14"/>
+          <p:cNvPr id="14" name="TextBox 13"/>
           <p:cNvSpPr txBox="1"/>
           <p:nvPr/>
         </p:nvSpPr>
@@ -12726,7 +11039,7 @@
           <a:p>
             <a:pPr algn="l"/>
             <a:r>
-              <a:rPr sz="1500" b="0" i="0" lang="en-US" altLang="en-US">
+              <a:rPr sz="1700" b="0" i="0" lang="en-US" altLang="en-US">
                 <a:solidFill>
                   <a:srgbClr val="24333D"/>
                 </a:solidFill>
@@ -12741,7 +11054,7 @@
       </p:sp>
       <p:sp>
         <p:nvSpPr>
-          <p:cNvPr id="16" name="Oval 15"/>
+          <p:cNvPr id="15" name="Oval 14"/>
           <p:cNvSpPr/>
           <p:nvPr/>
         </p:nvSpPr>
@@ -12784,7 +11097,7 @@
       </p:sp>
       <p:sp>
         <p:nvSpPr>
-          <p:cNvPr id="17" name="TextBox 16"/>
+          <p:cNvPr id="16" name="TextBox 15"/>
           <p:cNvSpPr txBox="1"/>
           <p:nvPr/>
         </p:nvSpPr>
@@ -12806,7 +11119,7 @@
           <a:p>
             <a:pPr algn="l"/>
             <a:r>
-              <a:rPr sz="1500" b="0" i="0" lang="th-TH" altLang="en-US">
+              <a:rPr sz="1700" b="0" i="0" lang="th-TH" altLang="en-US">
                 <a:solidFill>
                   <a:srgbClr val="24333D"/>
                 </a:solidFill>
@@ -12817,7 +11130,7 @@
               <a:t>สี่</a:t>
             </a:r>
             <a:r>
-              <a:rPr sz="1500" b="0" i="1" lang="en-US" altLang="en-US">
+              <a:rPr sz="1700" b="0" i="1" lang="en-US" altLang="en-US">
                 <a:solidFill>
                   <a:srgbClr val="566873"/>
                 </a:solidFill>
@@ -12828,7 +11141,7 @@
               <a:t> (sìi)</a:t>
             </a:r>
             <a:r>
-              <a:rPr sz="1500" b="0" i="0" lang="en-US" altLang="en-US">
+              <a:rPr sz="1700" b="0" i="0" lang="en-US" altLang="en-US">
                 <a:solidFill>
                   <a:srgbClr val="24333D"/>
                 </a:solidFill>
@@ -12843,54 +11156,7 @@
       </p:sp>
       <p:sp>
         <p:nvSpPr>
-          <p:cNvPr id="18" name="Rounded Rectangle 17"/>
-          <p:cNvSpPr/>
-          <p:nvPr/>
-        </p:nvSpPr>
-        <p:spPr>
-          <a:xfrm>
-            <a:off x="731520" y="4160520"/>
-            <a:ext cx="10058400" cy="1289304"/>
-          </a:xfrm>
-          <a:prstGeom prst="roundRect">
-            <a:avLst>
-              <a:gd name="adj" fmla="val 6000"/>
-            </a:avLst>
-          </a:prstGeom>
-          <a:solidFill>
-            <a:srgbClr val="FFFFFF"/>
-          </a:solidFill>
-          <a:ln>
-            <a:solidFill>
-              <a:srgbClr val="D7DEE3"/>
-            </a:solidFill>
-          </a:ln>
-        </p:spPr>
-        <p:style>
-          <a:lnRef idx="1">
-            <a:schemeClr val="accent1"/>
-          </a:lnRef>
-          <a:fillRef idx="3">
-            <a:schemeClr val="accent1"/>
-          </a:fillRef>
-          <a:effectRef idx="2">
-            <a:schemeClr val="accent1"/>
-          </a:effectRef>
-          <a:fontRef idx="minor">
-            <a:schemeClr val="lt1"/>
-          </a:fontRef>
-        </p:style>
-        <p:txBody>
-          <a:bodyPr rtlCol="0" anchor="ctr"/>
-          <a:lstStyle/>
-          <a:p>
-            <a:pPr algn="ctr"/>
-          </a:p>
-        </p:txBody>
-      </p:sp>
-      <p:sp>
-        <p:nvSpPr>
-          <p:cNvPr id="19" name="TextBox 18"/>
+          <p:cNvPr id="17" name="TextBox 16"/>
           <p:cNvSpPr txBox="1"/>
           <p:nvPr/>
         </p:nvSpPr>
@@ -12912,7 +11178,7 @@
           <a:p>
             <a:pPr algn="l"/>
             <a:r>
-              <a:rPr sz="1500" b="1" i="0" lang="en-US" altLang="en-US">
+              <a:rPr sz="1700" b="1" i="0" lang="en-US" altLang="en-US">
                 <a:solidFill>
                   <a:srgbClr val="7A8F54"/>
                 </a:solidFill>
@@ -12927,7 +11193,7 @@
       </p:sp>
       <p:sp>
         <p:nvSpPr>
-          <p:cNvPr id="20" name="Oval 19"/>
+          <p:cNvPr id="18" name="Oval 17"/>
           <p:cNvSpPr/>
           <p:nvPr/>
         </p:nvSpPr>
@@ -12970,7 +11236,7 @@
       </p:sp>
       <p:sp>
         <p:nvSpPr>
-          <p:cNvPr id="21" name="TextBox 20"/>
+          <p:cNvPr id="19" name="TextBox 18"/>
           <p:cNvSpPr txBox="1"/>
           <p:nvPr/>
         </p:nvSpPr>
@@ -12992,7 +11258,7 @@
           <a:p>
             <a:pPr algn="l"/>
             <a:r>
-              <a:rPr sz="1500" b="0" i="0" lang="th-TH" altLang="en-US">
+              <a:rPr sz="1700" b="0" i="0" lang="th-TH" altLang="en-US">
                 <a:solidFill>
                   <a:srgbClr val="24333D"/>
                 </a:solidFill>
@@ -13003,7 +11269,7 @@
               <a:t>สี่</a:t>
             </a:r>
             <a:r>
-              <a:rPr sz="1500" b="0" i="1" lang="en-US" altLang="en-US">
+              <a:rPr sz="1700" b="0" i="1" lang="en-US" altLang="en-US">
                 <a:solidFill>
                   <a:srgbClr val="566873"/>
                 </a:solidFill>
@@ -13014,7 +11280,7 @@
               <a:t> (sìi)</a:t>
             </a:r>
             <a:r>
-              <a:rPr sz="1500" b="0" i="0" lang="en-US" altLang="en-US">
+              <a:rPr sz="1700" b="0" i="0" lang="en-US" altLang="en-US">
                 <a:solidFill>
                   <a:srgbClr val="24333D"/>
                 </a:solidFill>
@@ -13229,54 +11495,7 @@
       </p:sp>
       <p:sp>
         <p:nvSpPr>
-          <p:cNvPr id="6" name="Rounded Rectangle 5"/>
-          <p:cNvSpPr/>
-          <p:nvPr/>
-        </p:nvSpPr>
-        <p:spPr>
-          <a:xfrm>
-            <a:off x="731520" y="1600200"/>
-            <a:ext cx="7071055" cy="1289304"/>
-          </a:xfrm>
-          <a:prstGeom prst="roundRect">
-            <a:avLst>
-              <a:gd name="adj" fmla="val 6000"/>
-            </a:avLst>
-          </a:prstGeom>
-          <a:solidFill>
-            <a:srgbClr val="FFFFFF"/>
-          </a:solidFill>
-          <a:ln>
-            <a:solidFill>
-              <a:srgbClr val="D7DEE3"/>
-            </a:solidFill>
-          </a:ln>
-        </p:spPr>
-        <p:style>
-          <a:lnRef idx="1">
-            <a:schemeClr val="accent1"/>
-          </a:lnRef>
-          <a:fillRef idx="3">
-            <a:schemeClr val="accent1"/>
-          </a:fillRef>
-          <a:effectRef idx="2">
-            <a:schemeClr val="accent1"/>
-          </a:effectRef>
-          <a:fontRef idx="minor">
-            <a:schemeClr val="lt1"/>
-          </a:fontRef>
-        </p:style>
-        <p:txBody>
-          <a:bodyPr rtlCol="0" anchor="ctr"/>
-          <a:lstStyle/>
-          <a:p>
-            <a:pPr algn="ctr"/>
-          </a:p>
-        </p:txBody>
-      </p:sp>
-      <p:sp>
-        <p:nvSpPr>
-          <p:cNvPr id="7" name="TextBox 6"/>
+          <p:cNvPr id="6" name="TextBox 5"/>
           <p:cNvSpPr txBox="1"/>
           <p:nvPr/>
         </p:nvSpPr>
@@ -13298,7 +11517,7 @@
           <a:p>
             <a:pPr algn="l"/>
             <a:r>
-              <a:rPr sz="1500" b="1" i="0" lang="en-US" altLang="en-US">
+              <a:rPr sz="1700" b="1" i="0" lang="en-US" altLang="en-US">
                 <a:solidFill>
                   <a:srgbClr val="C96F4A"/>
                 </a:solidFill>
@@ -13313,7 +11532,7 @@
       </p:sp>
       <p:sp>
         <p:nvSpPr>
-          <p:cNvPr id="8" name="Oval 7"/>
+          <p:cNvPr id="7" name="Oval 6"/>
           <p:cNvSpPr/>
           <p:nvPr/>
         </p:nvSpPr>
@@ -13356,7 +11575,7 @@
       </p:sp>
       <p:sp>
         <p:nvSpPr>
-          <p:cNvPr id="9" name="TextBox 8"/>
+          <p:cNvPr id="8" name="TextBox 7"/>
           <p:cNvSpPr txBox="1"/>
           <p:nvPr/>
         </p:nvSpPr>
@@ -13378,7 +11597,7 @@
           <a:p>
             <a:pPr algn="l"/>
             <a:r>
-              <a:rPr sz="1500" b="0" i="0" lang="en-US" altLang="en-US">
+              <a:rPr sz="1700" b="0" i="0" lang="en-US" altLang="en-US">
                 <a:solidFill>
                   <a:srgbClr val="24333D"/>
                 </a:solidFill>
@@ -13393,7 +11612,7 @@
       </p:sp>
       <p:sp>
         <p:nvSpPr>
-          <p:cNvPr id="10" name="Oval 9"/>
+          <p:cNvPr id="9" name="Oval 8"/>
           <p:cNvSpPr/>
           <p:nvPr/>
         </p:nvSpPr>
@@ -13436,7 +11655,7 @@
       </p:sp>
       <p:sp>
         <p:nvSpPr>
-          <p:cNvPr id="11" name="TextBox 10"/>
+          <p:cNvPr id="10" name="TextBox 9"/>
           <p:cNvSpPr txBox="1"/>
           <p:nvPr/>
         </p:nvSpPr>
@@ -13458,7 +11677,7 @@
           <a:p>
             <a:pPr algn="l"/>
             <a:r>
-              <a:rPr sz="1500" b="0" i="0" lang="en-US" altLang="en-US">
+              <a:rPr sz="1700" b="0" i="0" lang="en-US" altLang="en-US">
                 <a:solidFill>
                   <a:srgbClr val="24333D"/>
                 </a:solidFill>

--- a/course/modules/M01/L004/M01-L004-canva-deck.pptx
+++ b/course/modules/M01/L004/M01-L004-canva-deck.pptx
@@ -4417,8 +4417,8 @@
         </p:nvSpPr>
         <p:spPr>
           <a:xfrm>
-            <a:off x="4832731" y="1325880"/>
-            <a:ext cx="2828422" cy="2240280"/>
+            <a:off x="731520" y="1325880"/>
+            <a:ext cx="7071055" cy="685800"/>
           </a:xfrm>
           <a:prstGeom prst="roundRect">
             <a:avLst/>
@@ -4450,191 +4450,9 @@
           </a:p>
         </p:txBody>
       </p:sp>
-      <p:pic>
-        <p:nvPicPr>
-          <p:cNvPr id="7" name="Picture 6" descr="slide-03-digits-0-to-5-thai-number-chart.png"/>
-          <p:cNvPicPr>
-            <a:picLocks noChangeAspect="1"/>
-          </p:cNvPicPr>
-          <p:nvPr/>
-        </p:nvPicPr>
-        <p:blipFill>
-          <a:blip r:embed="rId2"/>
-          <a:stretch>
-            <a:fillRect/>
-          </a:stretch>
-        </p:blipFill>
-        <p:spPr>
-          <a:xfrm>
-            <a:off x="4997323" y="1490472"/>
-            <a:ext cx="2506648" cy="1901952"/>
-          </a:xfrm>
-          <a:prstGeom prst="rect">
-            <a:avLst/>
-          </a:prstGeom>
-        </p:spPr>
-      </p:pic>
-      <p:sp>
-        <p:nvSpPr>
-          <p:cNvPr id="8" name="TextBox 7"/>
-          <p:cNvSpPr txBox="1"/>
-          <p:nvPr/>
-        </p:nvSpPr>
-        <p:spPr>
-          <a:xfrm>
-            <a:off x="5033899" y="3849624"/>
-            <a:ext cx="2462662" cy="228600"/>
-          </a:xfrm>
-          <a:prstGeom prst="rect">
-            <a:avLst/>
-          </a:prstGeom>
-          <a:noFill/>
-        </p:spPr>
-        <p:txBody>
-          <a:bodyPr wrap="square" anchor="t">
-            <a:spAutoFit/>
-          </a:bodyPr>
-          <a:lstStyle/>
-          <a:p>
-            <a:pPr algn="l"/>
-            <a:r>
-              <a:rPr sz="1700" b="1" i="0" lang="en-US" altLang="en-US">
-                <a:solidFill>
-                  <a:srgbClr val="7A8F54"/>
-                </a:solidFill>
-                <a:latin typeface="Sarabun"/>
-                <a:ea typeface="Sarabun"/>
-                <a:cs typeface="Sarabun"/>
-              </a:rPr>
-              <a:t>Visual rationale</a:t>
-            </a:r>
-          </a:p>
-        </p:txBody>
-      </p:sp>
-      <p:sp>
-        <p:nvSpPr>
-          <p:cNvPr id="9" name="Oval 8"/>
-          <p:cNvSpPr/>
-          <p:nvPr/>
-        </p:nvSpPr>
-        <p:spPr>
-          <a:xfrm>
-            <a:off x="5033899" y="4233672"/>
-            <a:ext cx="82296" cy="82296"/>
-          </a:xfrm>
-          <a:prstGeom prst="ellipse">
-            <a:avLst/>
-          </a:prstGeom>
-          <a:solidFill>
-            <a:srgbClr val="7A8F54"/>
-          </a:solidFill>
-          <a:ln>
-            <a:noFill/>
-          </a:ln>
-        </p:spPr>
-        <p:style>
-          <a:lnRef idx="1">
-            <a:schemeClr val="accent1"/>
-          </a:lnRef>
-          <a:fillRef idx="3">
-            <a:schemeClr val="accent1"/>
-          </a:fillRef>
-          <a:effectRef idx="2">
-            <a:schemeClr val="accent1"/>
-          </a:effectRef>
-          <a:fontRef idx="minor">
-            <a:schemeClr val="lt1"/>
-          </a:fontRef>
-        </p:style>
-        <p:txBody>
-          <a:bodyPr rtlCol="0" anchor="ctr"/>
-          <a:lstStyle/>
-          <a:p>
-            <a:pPr algn="ctr"/>
-          </a:p>
-        </p:txBody>
-      </p:sp>
-      <p:sp>
-        <p:nvSpPr>
-          <p:cNvPr id="10" name="TextBox 9"/>
-          <p:cNvSpPr txBox="1"/>
-          <p:nvPr/>
-        </p:nvSpPr>
-        <p:spPr>
-          <a:xfrm>
-            <a:off x="5180203" y="4142232"/>
-            <a:ext cx="2325502" cy="274320"/>
-          </a:xfrm>
-          <a:prstGeom prst="rect">
-            <a:avLst/>
-          </a:prstGeom>
-          <a:noFill/>
-        </p:spPr>
-        <p:txBody>
-          <a:bodyPr wrap="square" anchor="t">
-            <a:spAutoFit/>
-          </a:bodyPr>
-          <a:lstStyle/>
-          <a:p>
-            <a:pPr algn="l"/>
-            <a:r>
-              <a:rPr sz="1700" b="0" i="0" lang="en-US" altLang="en-US">
-                <a:solidFill>
-                  <a:srgbClr val="24333D"/>
-                </a:solidFill>
-                <a:latin typeface="Sarabun"/>
-                <a:ea typeface="Sarabun"/>
-                <a:cs typeface="Sarabun"/>
-              </a:rPr>
-              <a:t>A simple 0-5 digit chart with Arabic numerals helps visual anchoring.</a:t>
-            </a:r>
-          </a:p>
-        </p:txBody>
-      </p:sp>
-      <p:sp>
-        <p:nvSpPr>
-          <p:cNvPr id="11" name="Rounded Rectangle 10"/>
-          <p:cNvSpPr/>
-          <p:nvPr/>
-        </p:nvSpPr>
-        <p:spPr>
-          <a:xfrm>
-            <a:off x="731520" y="1325880"/>
-            <a:ext cx="3889080" cy="685800"/>
-          </a:xfrm>
-          <a:prstGeom prst="roundRect">
-            <a:avLst/>
-          </a:prstGeom>
-          <a:noFill/>
-          <a:ln>
-            <a:noFill/>
-          </a:ln>
-        </p:spPr>
-        <p:style>
-          <a:lnRef idx="1">
-            <a:schemeClr val="accent1"/>
-          </a:lnRef>
-          <a:fillRef idx="3">
-            <a:schemeClr val="accent1"/>
-          </a:fillRef>
-          <a:effectRef idx="2">
-            <a:schemeClr val="accent1"/>
-          </a:effectRef>
-          <a:fontRef idx="minor">
-            <a:schemeClr val="lt1"/>
-          </a:fontRef>
-        </p:style>
-        <p:txBody>
-          <a:bodyPr rtlCol="0" anchor="ctr"/>
-          <a:lstStyle/>
-          <a:p>
-            <a:pPr algn="ctr"/>
-          </a:p>
-        </p:txBody>
-      </p:sp>
-      <p:sp>
-        <p:nvSpPr>
-          <p:cNvPr id="12" name="Rectangle 11"/>
+      <p:sp>
+        <p:nvSpPr>
+          <p:cNvPr id="7" name="Rectangle 6"/>
           <p:cNvSpPr/>
           <p:nvPr/>
         </p:nvSpPr>
@@ -4677,14 +4495,14 @@
       </p:sp>
       <p:sp>
         <p:nvSpPr>
-          <p:cNvPr id="13" name="TextBox 12"/>
+          <p:cNvPr id="8" name="TextBox 7"/>
           <p:cNvSpPr txBox="1"/>
           <p:nvPr/>
         </p:nvSpPr>
         <p:spPr>
           <a:xfrm>
             <a:off x="1078992" y="1399032"/>
-            <a:ext cx="3431880" cy="320040"/>
+            <a:ext cx="6613855" cy="320040"/>
           </a:xfrm>
           <a:prstGeom prst="rect">
             <a:avLst/>
@@ -4725,14 +4543,14 @@
       </p:sp>
       <p:sp>
         <p:nvSpPr>
-          <p:cNvPr id="14" name="TextBox 13"/>
+          <p:cNvPr id="9" name="TextBox 8"/>
           <p:cNvSpPr txBox="1"/>
           <p:nvPr/>
         </p:nvSpPr>
         <p:spPr>
           <a:xfrm>
             <a:off x="1078992" y="1709928"/>
-            <a:ext cx="3431880" cy="228600"/>
+            <a:ext cx="6613855" cy="228600"/>
           </a:xfrm>
           <a:prstGeom prst="rect">
             <a:avLst/>
@@ -4762,14 +4580,14 @@
       </p:sp>
       <p:sp>
         <p:nvSpPr>
-          <p:cNvPr id="15" name="Rounded Rectangle 14"/>
+          <p:cNvPr id="10" name="Rounded Rectangle 9"/>
           <p:cNvSpPr/>
           <p:nvPr/>
         </p:nvSpPr>
         <p:spPr>
           <a:xfrm>
             <a:off x="731520" y="2130552"/>
-            <a:ext cx="3889080" cy="685800"/>
+            <a:ext cx="7071055" cy="685800"/>
           </a:xfrm>
           <a:prstGeom prst="roundRect">
             <a:avLst/>
@@ -4803,7 +4621,7 @@
       </p:sp>
       <p:sp>
         <p:nvSpPr>
-          <p:cNvPr id="16" name="Rectangle 15"/>
+          <p:cNvPr id="11" name="Rectangle 10"/>
           <p:cNvSpPr/>
           <p:nvPr/>
         </p:nvSpPr>
@@ -4846,14 +4664,14 @@
       </p:sp>
       <p:sp>
         <p:nvSpPr>
-          <p:cNvPr id="17" name="TextBox 16"/>
+          <p:cNvPr id="12" name="TextBox 11"/>
           <p:cNvSpPr txBox="1"/>
           <p:nvPr/>
         </p:nvSpPr>
         <p:spPr>
           <a:xfrm>
             <a:off x="1078992" y="2203704"/>
-            <a:ext cx="3431880" cy="320040"/>
+            <a:ext cx="6613855" cy="320040"/>
           </a:xfrm>
           <a:prstGeom prst="rect">
             <a:avLst/>
@@ -4894,14 +4712,14 @@
       </p:sp>
       <p:sp>
         <p:nvSpPr>
-          <p:cNvPr id="18" name="TextBox 17"/>
+          <p:cNvPr id="13" name="TextBox 12"/>
           <p:cNvSpPr txBox="1"/>
           <p:nvPr/>
         </p:nvSpPr>
         <p:spPr>
           <a:xfrm>
             <a:off x="1078992" y="2514600"/>
-            <a:ext cx="3431880" cy="228600"/>
+            <a:ext cx="6613855" cy="228600"/>
           </a:xfrm>
           <a:prstGeom prst="rect">
             <a:avLst/>
@@ -4931,14 +4749,14 @@
       </p:sp>
       <p:sp>
         <p:nvSpPr>
-          <p:cNvPr id="19" name="Rounded Rectangle 18"/>
+          <p:cNvPr id="14" name="Rounded Rectangle 13"/>
           <p:cNvSpPr/>
           <p:nvPr/>
         </p:nvSpPr>
         <p:spPr>
           <a:xfrm>
             <a:off x="731520" y="2935224"/>
-            <a:ext cx="3889080" cy="685800"/>
+            <a:ext cx="7071055" cy="685800"/>
           </a:xfrm>
           <a:prstGeom prst="roundRect">
             <a:avLst/>
@@ -4972,7 +4790,7 @@
       </p:sp>
       <p:sp>
         <p:nvSpPr>
-          <p:cNvPr id="20" name="Rectangle 19"/>
+          <p:cNvPr id="15" name="Rectangle 14"/>
           <p:cNvSpPr/>
           <p:nvPr/>
         </p:nvSpPr>
@@ -5015,14 +4833,14 @@
       </p:sp>
       <p:sp>
         <p:nvSpPr>
-          <p:cNvPr id="21" name="TextBox 20"/>
+          <p:cNvPr id="16" name="TextBox 15"/>
           <p:cNvSpPr txBox="1"/>
           <p:nvPr/>
         </p:nvSpPr>
         <p:spPr>
           <a:xfrm>
             <a:off x="1078992" y="3008376"/>
-            <a:ext cx="3431880" cy="320040"/>
+            <a:ext cx="6613855" cy="320040"/>
           </a:xfrm>
           <a:prstGeom prst="rect">
             <a:avLst/>
@@ -5063,14 +4881,14 @@
       </p:sp>
       <p:sp>
         <p:nvSpPr>
-          <p:cNvPr id="22" name="TextBox 21"/>
+          <p:cNvPr id="17" name="TextBox 16"/>
           <p:cNvSpPr txBox="1"/>
           <p:nvPr/>
         </p:nvSpPr>
         <p:spPr>
           <a:xfrm>
             <a:off x="1078992" y="3319272"/>
-            <a:ext cx="3431880" cy="228600"/>
+            <a:ext cx="6613855" cy="228600"/>
           </a:xfrm>
           <a:prstGeom prst="rect">
             <a:avLst/>
@@ -5100,14 +4918,14 @@
       </p:sp>
       <p:sp>
         <p:nvSpPr>
-          <p:cNvPr id="23" name="Rounded Rectangle 22"/>
+          <p:cNvPr id="18" name="Rounded Rectangle 17"/>
           <p:cNvSpPr/>
           <p:nvPr/>
         </p:nvSpPr>
         <p:spPr>
           <a:xfrm>
             <a:off x="731520" y="3739896"/>
-            <a:ext cx="3889080" cy="685800"/>
+            <a:ext cx="7071055" cy="685800"/>
           </a:xfrm>
           <a:prstGeom prst="roundRect">
             <a:avLst/>
@@ -5141,7 +4959,7 @@
       </p:sp>
       <p:sp>
         <p:nvSpPr>
-          <p:cNvPr id="24" name="Rectangle 23"/>
+          <p:cNvPr id="19" name="Rectangle 18"/>
           <p:cNvSpPr/>
           <p:nvPr/>
         </p:nvSpPr>
@@ -5184,14 +5002,14 @@
       </p:sp>
       <p:sp>
         <p:nvSpPr>
-          <p:cNvPr id="25" name="TextBox 24"/>
+          <p:cNvPr id="20" name="TextBox 19"/>
           <p:cNvSpPr txBox="1"/>
           <p:nvPr/>
         </p:nvSpPr>
         <p:spPr>
           <a:xfrm>
             <a:off x="1078992" y="3813048"/>
-            <a:ext cx="3431880" cy="320040"/>
+            <a:ext cx="6613855" cy="320040"/>
           </a:xfrm>
           <a:prstGeom prst="rect">
             <a:avLst/>
@@ -5232,14 +5050,14 @@
       </p:sp>
       <p:sp>
         <p:nvSpPr>
-          <p:cNvPr id="26" name="TextBox 25"/>
+          <p:cNvPr id="21" name="TextBox 20"/>
           <p:cNvSpPr txBox="1"/>
           <p:nvPr/>
         </p:nvSpPr>
         <p:spPr>
           <a:xfrm>
             <a:off x="1078992" y="4123944"/>
-            <a:ext cx="3431880" cy="228600"/>
+            <a:ext cx="6613855" cy="228600"/>
           </a:xfrm>
           <a:prstGeom prst="rect">
             <a:avLst/>
@@ -5269,14 +5087,14 @@
       </p:sp>
       <p:sp>
         <p:nvSpPr>
-          <p:cNvPr id="27" name="Rounded Rectangle 26"/>
+          <p:cNvPr id="22" name="Rounded Rectangle 21"/>
           <p:cNvSpPr/>
           <p:nvPr/>
         </p:nvSpPr>
         <p:spPr>
           <a:xfrm>
             <a:off x="731520" y="4544568"/>
-            <a:ext cx="3889080" cy="685800"/>
+            <a:ext cx="7071055" cy="685800"/>
           </a:xfrm>
           <a:prstGeom prst="roundRect">
             <a:avLst/>
@@ -5310,7 +5128,7 @@
       </p:sp>
       <p:sp>
         <p:nvSpPr>
-          <p:cNvPr id="28" name="Rectangle 27"/>
+          <p:cNvPr id="23" name="Rectangle 22"/>
           <p:cNvSpPr/>
           <p:nvPr/>
         </p:nvSpPr>
@@ -5353,14 +5171,14 @@
       </p:sp>
       <p:sp>
         <p:nvSpPr>
-          <p:cNvPr id="29" name="TextBox 28"/>
+          <p:cNvPr id="24" name="TextBox 23"/>
           <p:cNvSpPr txBox="1"/>
           <p:nvPr/>
         </p:nvSpPr>
         <p:spPr>
           <a:xfrm>
             <a:off x="1078992" y="4617720"/>
-            <a:ext cx="3431880" cy="320040"/>
+            <a:ext cx="6613855" cy="320040"/>
           </a:xfrm>
           <a:prstGeom prst="rect">
             <a:avLst/>
@@ -5401,14 +5219,14 @@
       </p:sp>
       <p:sp>
         <p:nvSpPr>
-          <p:cNvPr id="30" name="TextBox 29"/>
+          <p:cNvPr id="25" name="TextBox 24"/>
           <p:cNvSpPr txBox="1"/>
           <p:nvPr/>
         </p:nvSpPr>
         <p:spPr>
           <a:xfrm>
             <a:off x="1078992" y="4928616"/>
-            <a:ext cx="3431880" cy="228600"/>
+            <a:ext cx="6613855" cy="228600"/>
           </a:xfrm>
           <a:prstGeom prst="rect">
             <a:avLst/>
@@ -5438,14 +5256,14 @@
       </p:sp>
       <p:sp>
         <p:nvSpPr>
-          <p:cNvPr id="31" name="Rounded Rectangle 30"/>
+          <p:cNvPr id="26" name="Rounded Rectangle 25"/>
           <p:cNvSpPr/>
           <p:nvPr/>
         </p:nvSpPr>
         <p:spPr>
           <a:xfrm>
             <a:off x="731520" y="5349240"/>
-            <a:ext cx="3889080" cy="685800"/>
+            <a:ext cx="7071055" cy="685800"/>
           </a:xfrm>
           <a:prstGeom prst="roundRect">
             <a:avLst/>
@@ -5479,7 +5297,7 @@
       </p:sp>
       <p:sp>
         <p:nvSpPr>
-          <p:cNvPr id="32" name="Rectangle 31"/>
+          <p:cNvPr id="27" name="Rectangle 26"/>
           <p:cNvSpPr/>
           <p:nvPr/>
         </p:nvSpPr>
@@ -5522,14 +5340,14 @@
       </p:sp>
       <p:sp>
         <p:nvSpPr>
-          <p:cNvPr id="33" name="TextBox 32"/>
+          <p:cNvPr id="28" name="TextBox 27"/>
           <p:cNvSpPr txBox="1"/>
           <p:nvPr/>
         </p:nvSpPr>
         <p:spPr>
           <a:xfrm>
             <a:off x="1078992" y="5422392"/>
-            <a:ext cx="3431880" cy="320040"/>
+            <a:ext cx="6613855" cy="320040"/>
           </a:xfrm>
           <a:prstGeom prst="rect">
             <a:avLst/>
@@ -5570,14 +5388,14 @@
       </p:sp>
       <p:sp>
         <p:nvSpPr>
-          <p:cNvPr id="34" name="TextBox 33"/>
+          <p:cNvPr id="29" name="TextBox 28"/>
           <p:cNvSpPr txBox="1"/>
           <p:nvPr/>
         </p:nvSpPr>
         <p:spPr>
           <a:xfrm>
             <a:off x="1078992" y="5733288"/>
-            <a:ext cx="3431880" cy="228600"/>
+            <a:ext cx="6613855" cy="228600"/>
           </a:xfrm>
           <a:prstGeom prst="rect">
             <a:avLst/>
@@ -5607,13 +5425,13 @@
       </p:sp>
       <p:sp>
         <p:nvSpPr>
-          <p:cNvPr id="35" name="TextBox 34"/>
+          <p:cNvPr id="30" name="TextBox 29"/>
           <p:cNvSpPr txBox="1"/>
           <p:nvPr/>
         </p:nvSpPr>
         <p:spPr>
           <a:xfrm>
-            <a:off x="932688" y="6483096"/>
+            <a:off x="932688" y="6437376"/>
             <a:ext cx="9692640" cy="228600"/>
           </a:xfrm>
           <a:prstGeom prst="rect">
@@ -5644,13 +5462,13 @@
       </p:sp>
       <p:sp>
         <p:nvSpPr>
-          <p:cNvPr id="36" name="Oval 35"/>
+          <p:cNvPr id="31" name="Oval 30"/>
           <p:cNvSpPr/>
           <p:nvPr/>
         </p:nvSpPr>
         <p:spPr>
           <a:xfrm>
-            <a:off x="932688" y="6867144"/>
+            <a:off x="932688" y="6821424"/>
             <a:ext cx="82296" cy="82296"/>
           </a:xfrm>
           <a:prstGeom prst="ellipse">
@@ -5687,13 +5505,13 @@
       </p:sp>
       <p:sp>
         <p:nvSpPr>
-          <p:cNvPr id="37" name="TextBox 36"/>
+          <p:cNvPr id="32" name="TextBox 31"/>
           <p:cNvSpPr txBox="1"/>
           <p:nvPr/>
         </p:nvSpPr>
         <p:spPr>
           <a:xfrm>
-            <a:off x="1078992" y="6775704"/>
+            <a:off x="1078992" y="6729984"/>
             <a:ext cx="9555480" cy="274320"/>
           </a:xfrm>
           <a:prstGeom prst="rect">
@@ -6129,7 +5947,7 @@
         <p:spPr>
           <a:xfrm>
             <a:off x="731520" y="1325880"/>
-            <a:ext cx="3889080" cy="685800"/>
+            <a:ext cx="7071055" cy="685800"/>
           </a:xfrm>
           <a:prstGeom prst="roundRect">
             <a:avLst/>
@@ -6213,7 +6031,7 @@
         <p:spPr>
           <a:xfrm>
             <a:off x="1078992" y="1399032"/>
-            <a:ext cx="3431880" cy="320040"/>
+            <a:ext cx="6613855" cy="320040"/>
           </a:xfrm>
           <a:prstGeom prst="rect">
             <a:avLst/>
@@ -6261,7 +6079,7 @@
         <p:spPr>
           <a:xfrm>
             <a:off x="1078992" y="1709928"/>
-            <a:ext cx="3431880" cy="228600"/>
+            <a:ext cx="6613855" cy="228600"/>
           </a:xfrm>
           <a:prstGeom prst="rect">
             <a:avLst/>
@@ -6298,7 +6116,7 @@
         <p:spPr>
           <a:xfrm>
             <a:off x="731520" y="2130552"/>
-            <a:ext cx="3889080" cy="685800"/>
+            <a:ext cx="7071055" cy="685800"/>
           </a:xfrm>
           <a:prstGeom prst="roundRect">
             <a:avLst/>
@@ -6382,7 +6200,7 @@
         <p:spPr>
           <a:xfrm>
             <a:off x="1078992" y="2203704"/>
-            <a:ext cx="3431880" cy="320040"/>
+            <a:ext cx="6613855" cy="320040"/>
           </a:xfrm>
           <a:prstGeom prst="rect">
             <a:avLst/>
@@ -6430,7 +6248,7 @@
         <p:spPr>
           <a:xfrm>
             <a:off x="1078992" y="2514600"/>
-            <a:ext cx="3431880" cy="228600"/>
+            <a:ext cx="6613855" cy="228600"/>
           </a:xfrm>
           <a:prstGeom prst="rect">
             <a:avLst/>
@@ -6467,7 +6285,7 @@
         <p:spPr>
           <a:xfrm>
             <a:off x="731520" y="2935224"/>
-            <a:ext cx="3889080" cy="685800"/>
+            <a:ext cx="7071055" cy="685800"/>
           </a:xfrm>
           <a:prstGeom prst="roundRect">
             <a:avLst/>
@@ -6551,7 +6369,7 @@
         <p:spPr>
           <a:xfrm>
             <a:off x="1078992" y="3008376"/>
-            <a:ext cx="3431880" cy="320040"/>
+            <a:ext cx="6613855" cy="320040"/>
           </a:xfrm>
           <a:prstGeom prst="rect">
             <a:avLst/>
@@ -6599,7 +6417,7 @@
         <p:spPr>
           <a:xfrm>
             <a:off x="1078992" y="3319272"/>
-            <a:ext cx="3431880" cy="228600"/>
+            <a:ext cx="6613855" cy="228600"/>
           </a:xfrm>
           <a:prstGeom prst="rect">
             <a:avLst/>
@@ -6636,7 +6454,7 @@
         <p:spPr>
           <a:xfrm>
             <a:off x="731520" y="3739896"/>
-            <a:ext cx="3889080" cy="685800"/>
+            <a:ext cx="7071055" cy="685800"/>
           </a:xfrm>
           <a:prstGeom prst="roundRect">
             <a:avLst/>
@@ -6720,7 +6538,7 @@
         <p:spPr>
           <a:xfrm>
             <a:off x="1078992" y="3813048"/>
-            <a:ext cx="3431880" cy="320040"/>
+            <a:ext cx="6613855" cy="320040"/>
           </a:xfrm>
           <a:prstGeom prst="rect">
             <a:avLst/>
@@ -6768,7 +6586,7 @@
         <p:spPr>
           <a:xfrm>
             <a:off x="1078992" y="4123944"/>
-            <a:ext cx="3431880" cy="228600"/>
+            <a:ext cx="6613855" cy="228600"/>
           </a:xfrm>
           <a:prstGeom prst="rect">
             <a:avLst/>
@@ -6805,7 +6623,7 @@
         <p:spPr>
           <a:xfrm>
             <a:off x="731520" y="4544568"/>
-            <a:ext cx="3889080" cy="685800"/>
+            <a:ext cx="7071055" cy="685800"/>
           </a:xfrm>
           <a:prstGeom prst="roundRect">
             <a:avLst/>
@@ -6889,7 +6707,7 @@
         <p:spPr>
           <a:xfrm>
             <a:off x="1078992" y="4617720"/>
-            <a:ext cx="3431880" cy="320040"/>
+            <a:ext cx="6613855" cy="320040"/>
           </a:xfrm>
           <a:prstGeom prst="rect">
             <a:avLst/>
@@ -6937,7 +6755,7 @@
         <p:spPr>
           <a:xfrm>
             <a:off x="1078992" y="4928616"/>
-            <a:ext cx="3431880" cy="228600"/>
+            <a:ext cx="6613855" cy="228600"/>
           </a:xfrm>
           <a:prstGeom prst="rect">
             <a:avLst/>
@@ -6973,7 +6791,7 @@
         </p:nvSpPr>
         <p:spPr>
           <a:xfrm>
-            <a:off x="932688" y="5678424"/>
+            <a:off x="932688" y="5632704"/>
             <a:ext cx="9692640" cy="228600"/>
           </a:xfrm>
           <a:prstGeom prst="rect">
@@ -7010,7 +6828,7 @@
         </p:nvSpPr>
         <p:spPr>
           <a:xfrm>
-            <a:off x="932688" y="6062472"/>
+            <a:off x="932688" y="6016752"/>
             <a:ext cx="82296" cy="82296"/>
           </a:xfrm>
           <a:prstGeom prst="ellipse">
@@ -7053,7 +6871,7 @@
         </p:nvSpPr>
         <p:spPr>
           <a:xfrm>
-            <a:off x="1078992" y="5971032"/>
+            <a:off x="1078992" y="5925312"/>
             <a:ext cx="9555480" cy="274320"/>
           </a:xfrm>
           <a:prstGeom prst="rect">
@@ -7456,7 +7274,7 @@
         <p:spPr>
           <a:xfrm>
             <a:off x="731520" y="1325880"/>
-            <a:ext cx="3889080" cy="1572768"/>
+            <a:ext cx="7071055" cy="1572768"/>
           </a:xfrm>
           <a:prstGeom prst="roundRect">
             <a:avLst/>
@@ -7540,7 +7358,7 @@
         <p:spPr>
           <a:xfrm>
             <a:off x="1078992" y="1435608"/>
-            <a:ext cx="3431880" cy="658368"/>
+            <a:ext cx="6613855" cy="658368"/>
           </a:xfrm>
           <a:prstGeom prst="rect">
             <a:avLst/>
@@ -7588,7 +7406,7 @@
         <p:spPr>
           <a:xfrm>
             <a:off x="1078992" y="2203704"/>
-            <a:ext cx="3431880" cy="274320"/>
+            <a:ext cx="6613855" cy="274320"/>
           </a:xfrm>
           <a:prstGeom prst="rect">
             <a:avLst/>
@@ -7625,7 +7443,7 @@
         <p:spPr>
           <a:xfrm>
             <a:off x="731520" y="2606040"/>
-            <a:ext cx="3889080" cy="1572768"/>
+            <a:ext cx="7071055" cy="1572768"/>
           </a:xfrm>
           <a:prstGeom prst="roundRect">
             <a:avLst/>
@@ -7709,7 +7527,7 @@
         <p:spPr>
           <a:xfrm>
             <a:off x="1078992" y="2715768"/>
-            <a:ext cx="3431880" cy="658368"/>
+            <a:ext cx="6613855" cy="658368"/>
           </a:xfrm>
           <a:prstGeom prst="rect">
             <a:avLst/>
@@ -7757,7 +7575,7 @@
         <p:spPr>
           <a:xfrm>
             <a:off x="1078992" y="3483864"/>
-            <a:ext cx="3431880" cy="274320"/>
+            <a:ext cx="6613855" cy="274320"/>
           </a:xfrm>
           <a:prstGeom prst="rect">
             <a:avLst/>
@@ -7794,7 +7612,7 @@
         <p:spPr>
           <a:xfrm>
             <a:off x="731520" y="3886200"/>
-            <a:ext cx="3889080" cy="1572768"/>
+            <a:ext cx="7071055" cy="1572768"/>
           </a:xfrm>
           <a:prstGeom prst="roundRect">
             <a:avLst/>
@@ -7878,7 +7696,7 @@
         <p:spPr>
           <a:xfrm>
             <a:off x="1078992" y="3995928"/>
-            <a:ext cx="3431880" cy="658368"/>
+            <a:ext cx="6613855" cy="658368"/>
           </a:xfrm>
           <a:prstGeom prst="rect">
             <a:avLst/>
@@ -7926,7 +7744,7 @@
         <p:spPr>
           <a:xfrm>
             <a:off x="1078992" y="4764024"/>
-            <a:ext cx="3431880" cy="274320"/>
+            <a:ext cx="6613855" cy="274320"/>
           </a:xfrm>
           <a:prstGeom prst="rect">
             <a:avLst/>
@@ -7963,7 +7781,7 @@
         <p:spPr>
           <a:xfrm>
             <a:off x="731520" y="5166360"/>
-            <a:ext cx="3889080" cy="1572768"/>
+            <a:ext cx="7071055" cy="1572768"/>
           </a:xfrm>
           <a:prstGeom prst="roundRect">
             <a:avLst/>
@@ -8047,7 +7865,7 @@
         <p:spPr>
           <a:xfrm>
             <a:off x="1078992" y="5276088"/>
-            <a:ext cx="3431880" cy="658368"/>
+            <a:ext cx="6613855" cy="658368"/>
           </a:xfrm>
           <a:prstGeom prst="rect">
             <a:avLst/>
@@ -8095,7 +7913,7 @@
         <p:spPr>
           <a:xfrm>
             <a:off x="1078992" y="6044184"/>
-            <a:ext cx="3431880" cy="274320"/>
+            <a:ext cx="6613855" cy="274320"/>
           </a:xfrm>
           <a:prstGeom prst="rect">
             <a:avLst/>
@@ -8131,7 +7949,7 @@
         </p:nvSpPr>
         <p:spPr>
           <a:xfrm>
-            <a:off x="932688" y="6775704"/>
+            <a:off x="932688" y="6729984"/>
             <a:ext cx="9692640" cy="228600"/>
           </a:xfrm>
           <a:prstGeom prst="rect">
@@ -8168,7 +7986,7 @@
         </p:nvSpPr>
         <p:spPr>
           <a:xfrm>
-            <a:off x="932688" y="7159752"/>
+            <a:off x="932688" y="7114032"/>
             <a:ext cx="82296" cy="82296"/>
           </a:xfrm>
           <a:prstGeom prst="ellipse">
@@ -8211,7 +8029,7 @@
         </p:nvSpPr>
         <p:spPr>
           <a:xfrm>
-            <a:off x="1078992" y="7068312"/>
+            <a:off x="1078992" y="7022592"/>
             <a:ext cx="9555480" cy="274320"/>
           </a:xfrm>
           <a:prstGeom prst="rect">
@@ -8735,7 +8553,7 @@
         <p:spPr>
           <a:xfrm>
             <a:off x="731520" y="1325880"/>
-            <a:ext cx="3889080" cy="1572768"/>
+            <a:ext cx="7071055" cy="1572768"/>
           </a:xfrm>
           <a:prstGeom prst="roundRect">
             <a:avLst/>
@@ -8819,7 +8637,7 @@
         <p:spPr>
           <a:xfrm>
             <a:off x="1078992" y="1435608"/>
-            <a:ext cx="3431880" cy="658368"/>
+            <a:ext cx="6613855" cy="658368"/>
           </a:xfrm>
           <a:prstGeom prst="rect">
             <a:avLst/>
@@ -8867,7 +8685,7 @@
         <p:spPr>
           <a:xfrm>
             <a:off x="1078992" y="2203704"/>
-            <a:ext cx="3431880" cy="274320"/>
+            <a:ext cx="6613855" cy="274320"/>
           </a:xfrm>
           <a:prstGeom prst="rect">
             <a:avLst/>
@@ -8904,7 +8722,7 @@
         <p:spPr>
           <a:xfrm>
             <a:off x="731520" y="3081528"/>
-            <a:ext cx="3889080" cy="1572768"/>
+            <a:ext cx="7071055" cy="1572768"/>
           </a:xfrm>
           <a:prstGeom prst="roundRect">
             <a:avLst/>
@@ -8988,7 +8806,7 @@
         <p:spPr>
           <a:xfrm>
             <a:off x="1078992" y="3191256"/>
-            <a:ext cx="3431880" cy="658368"/>
+            <a:ext cx="6613855" cy="658368"/>
           </a:xfrm>
           <a:prstGeom prst="rect">
             <a:avLst/>
@@ -9036,7 +8854,7 @@
         <p:spPr>
           <a:xfrm>
             <a:off x="1078992" y="3959352"/>
-            <a:ext cx="3431880" cy="274320"/>
+            <a:ext cx="6613855" cy="274320"/>
           </a:xfrm>
           <a:prstGeom prst="rect">
             <a:avLst/>
@@ -9073,7 +8891,7 @@
         <p:spPr>
           <a:xfrm>
             <a:off x="731520" y="4837176"/>
-            <a:ext cx="3889080" cy="1572768"/>
+            <a:ext cx="7071055" cy="1572768"/>
           </a:xfrm>
           <a:prstGeom prst="roundRect">
             <a:avLst/>
@@ -9157,7 +8975,7 @@
         <p:spPr>
           <a:xfrm>
             <a:off x="1078992" y="4946904"/>
-            <a:ext cx="3431880" cy="658368"/>
+            <a:ext cx="6613855" cy="658368"/>
           </a:xfrm>
           <a:prstGeom prst="rect">
             <a:avLst/>
@@ -9205,7 +9023,7 @@
         <p:spPr>
           <a:xfrm>
             <a:off x="1078992" y="5715000"/>
-            <a:ext cx="3431880" cy="274320"/>
+            <a:ext cx="6613855" cy="274320"/>
           </a:xfrm>
           <a:prstGeom prst="rect">
             <a:avLst/>
@@ -9241,7 +9059,7 @@
         </p:nvSpPr>
         <p:spPr>
           <a:xfrm>
-            <a:off x="932688" y="6922008"/>
+            <a:off x="932688" y="6876288"/>
             <a:ext cx="9692640" cy="228600"/>
           </a:xfrm>
           <a:prstGeom prst="rect">
@@ -9278,7 +9096,7 @@
         </p:nvSpPr>
         <p:spPr>
           <a:xfrm>
-            <a:off x="932688" y="7306056"/>
+            <a:off x="932688" y="7260336"/>
             <a:ext cx="82296" cy="82296"/>
           </a:xfrm>
           <a:prstGeom prst="ellipse">
@@ -9321,7 +9139,7 @@
         </p:nvSpPr>
         <p:spPr>
           <a:xfrm>
-            <a:off x="1078992" y="7214616"/>
+            <a:off x="1078992" y="7168896"/>
             <a:ext cx="9555480" cy="274320"/>
           </a:xfrm>
           <a:prstGeom prst="rect">

--- a/course/modules/M01/L004/M01-L004-canva-deck.pptx
+++ b/course/modules/M01/L004/M01-L004-canva-deck.pptx
@@ -8,12 +8,12 @@
     <p:sldId id="256" r:id="rId7"/>
     <p:sldId id="257" r:id="rId8"/>
     <p:sldId id="258" r:id="rId9"/>
-    <p:sldId id="259" r:id="rId10"/>
-    <p:sldId id="260" r:id="rId11"/>
-    <p:sldId id="261" r:id="rId12"/>
-    <p:sldId id="262" r:id="rId13"/>
-    <p:sldId id="263" r:id="rId14"/>
-    <p:sldId id="264" r:id="rId15"/>
+    <p:sldId id="259" r:id="rId11"/>
+    <p:sldId id="260" r:id="rId12"/>
+    <p:sldId id="261" r:id="rId13"/>
+    <p:sldId id="262" r:id="rId14"/>
+    <p:sldId id="263" r:id="rId15"/>
+    <p:sldId id="264" r:id="rId16"/>
   </p:sldIdLst>
   <p:sldSz cx="12191695" cy="6858000" type="screen4x3"/>
   <p:notesSz cx="6858000" cy="9144000"/>
@@ -113,6 +113,615 @@
     </a:lvl9pPr>
   </p:defaultTextStyle>
 </p:presentation>
+</file>
+
+<file path=ppt/notesMasters/notesMaster1.xml><?xml version="1.0" encoding="utf-8"?>
+<p:notesMaster xmlns:a="http://schemas.openxmlformats.org/drawingml/2006/main" xmlns:p="http://schemas.openxmlformats.org/presentationml/2006/main" xmlns:r="http://schemas.openxmlformats.org/officeDocument/2006/relationships">
+  <p:cSld>
+    <p:bg>
+      <p:bgRef idx="1001">
+        <a:schemeClr val="bg1"/>
+      </p:bgRef>
+    </p:bg>
+    <p:spTree>
+      <p:nvGrpSpPr>
+        <p:cNvPr id="1" name=""/>
+        <p:cNvGrpSpPr/>
+        <p:nvPr/>
+      </p:nvGrpSpPr>
+      <p:grpSpPr>
+        <a:xfrm>
+          <a:off x="0" y="0"/>
+          <a:ext cx="0" cy="0"/>
+          <a:chOff x="0" y="0"/>
+          <a:chExt cx="0" cy="0"/>
+        </a:xfrm>
+      </p:grpSpPr>
+      <p:sp>
+        <p:nvSpPr>
+          <p:cNvPr id="2" name="Header Placeholder 1"/>
+          <p:cNvSpPr>
+            <a:spLocks noGrp="1"/>
+          </p:cNvSpPr>
+          <p:nvPr>
+            <p:ph type="hdr" sz="quarter"/>
+          </p:nvPr>
+        </p:nvSpPr>
+        <p:spPr>
+          <a:xfrm>
+            <a:off x="0" y="0"/>
+            <a:ext cx="2971800" cy="457200"/>
+          </a:xfrm>
+          <a:prstGeom prst="rect">
+            <a:avLst/>
+          </a:prstGeom>
+        </p:spPr>
+        <p:txBody>
+          <a:bodyPr vert="horz" lIns="91440" tIns="45720" rIns="91440" bIns="45720" rtlCol="0"/>
+          <a:lstStyle>
+            <a:lvl1pPr algn="l">
+              <a:defRPr sz="1200"/>
+            </a:lvl1pPr>
+          </a:lstStyle>
+          <a:p>
+            <a:endParaRPr lang="en-US"/>
+          </a:p>
+        </p:txBody>
+      </p:sp>
+      <p:sp>
+        <p:nvSpPr>
+          <p:cNvPr id="3" name="Date Placeholder 2"/>
+          <p:cNvSpPr>
+            <a:spLocks noGrp="1"/>
+          </p:cNvSpPr>
+          <p:nvPr>
+            <p:ph type="dt" idx="1"/>
+          </p:nvPr>
+        </p:nvSpPr>
+        <p:spPr>
+          <a:xfrm>
+            <a:off x="3884613" y="0"/>
+            <a:ext cx="2971800" cy="457200"/>
+          </a:xfrm>
+          <a:prstGeom prst="rect">
+            <a:avLst/>
+          </a:prstGeom>
+        </p:spPr>
+        <p:txBody>
+          <a:bodyPr vert="horz" lIns="91440" tIns="45720" rIns="91440" bIns="45720" rtlCol="0"/>
+          <a:lstStyle>
+            <a:lvl1pPr algn="r">
+              <a:defRPr sz="1200"/>
+            </a:lvl1pPr>
+          </a:lstStyle>
+          <a:p>
+            <a:fld id="{0F89C1C7-3DCD-1040-A9CF-14679D8B5DDD}" type="datetimeFigureOut">
+              <a:rPr lang="en-US" smtClean="0"/>
+              <a:t>10/17/16</a:t>
+            </a:fld>
+            <a:endParaRPr lang="en-US"/>
+          </a:p>
+        </p:txBody>
+      </p:sp>
+      <p:sp>
+        <p:nvSpPr>
+          <p:cNvPr id="4" name="Slide Image Placeholder 3"/>
+          <p:cNvSpPr>
+            <a:spLocks noGrp="1" noRot="1" noChangeAspect="1"/>
+          </p:cNvSpPr>
+          <p:nvPr>
+            <p:ph type="sldImg" idx="2"/>
+          </p:nvPr>
+        </p:nvSpPr>
+        <p:spPr>
+          <a:xfrm>
+            <a:off x="1143000" y="685800"/>
+            <a:ext cx="4572000" cy="3429000"/>
+          </a:xfrm>
+          <a:prstGeom prst="rect">
+            <a:avLst/>
+          </a:prstGeom>
+          <a:noFill/>
+          <a:ln w="12700">
+            <a:solidFill>
+              <a:prstClr val="black"/>
+            </a:solidFill>
+          </a:ln>
+        </p:spPr>
+        <p:txBody>
+          <a:bodyPr vert="horz" lIns="91440" tIns="45720" rIns="91440" bIns="45720" rtlCol="0" anchor="ctr"/>
+          <a:lstStyle/>
+          <a:p>
+            <a:endParaRPr lang="en-US"/>
+          </a:p>
+        </p:txBody>
+      </p:sp>
+      <p:sp>
+        <p:nvSpPr>
+          <p:cNvPr id="5" name="Notes Placeholder 4"/>
+          <p:cNvSpPr>
+            <a:spLocks noGrp="1"/>
+          </p:cNvSpPr>
+          <p:nvPr>
+            <p:ph type="body" sz="quarter" idx="3"/>
+          </p:nvPr>
+        </p:nvSpPr>
+        <p:spPr>
+          <a:xfrm>
+            <a:off x="685800" y="4343400"/>
+            <a:ext cx="5486400" cy="4114800"/>
+          </a:xfrm>
+          <a:prstGeom prst="rect">
+            <a:avLst/>
+          </a:prstGeom>
+        </p:spPr>
+        <p:txBody>
+          <a:bodyPr vert="horz" lIns="91440" tIns="45720" rIns="91440" bIns="45720" rtlCol="0"/>
+          <a:lstStyle/>
+          <a:p>
+            <a:pPr lvl="0"/>
+            <a:r>
+              <a:rPr lang="en-US" smtClean="0"/>
+              <a:t>Click to edit Master text styles</a:t>
+            </a:r>
+          </a:p>
+          <a:p>
+            <a:pPr lvl="1"/>
+            <a:r>
+              <a:rPr lang="en-US" smtClean="0"/>
+              <a:t>Second level</a:t>
+            </a:r>
+          </a:p>
+          <a:p>
+            <a:pPr lvl="2"/>
+            <a:r>
+              <a:rPr lang="en-US" smtClean="0"/>
+              <a:t>Third level</a:t>
+            </a:r>
+          </a:p>
+          <a:p>
+            <a:pPr lvl="3"/>
+            <a:r>
+              <a:rPr lang="en-US" smtClean="0"/>
+              <a:t>Fourth level</a:t>
+            </a:r>
+          </a:p>
+          <a:p>
+            <a:pPr lvl="4"/>
+            <a:r>
+              <a:rPr lang="en-US" smtClean="0"/>
+              <a:t>Fifth level</a:t>
+            </a:r>
+            <a:endParaRPr lang="en-US"/>
+          </a:p>
+        </p:txBody>
+      </p:sp>
+      <p:sp>
+        <p:nvSpPr>
+          <p:cNvPr id="6" name="Footer Placeholder 5"/>
+          <p:cNvSpPr>
+            <a:spLocks noGrp="1"/>
+          </p:cNvSpPr>
+          <p:nvPr>
+            <p:ph type="ftr" sz="quarter" idx="4"/>
+          </p:nvPr>
+        </p:nvSpPr>
+        <p:spPr>
+          <a:xfrm>
+            <a:off x="0" y="8685213"/>
+            <a:ext cx="2971800" cy="457200"/>
+          </a:xfrm>
+          <a:prstGeom prst="rect">
+            <a:avLst/>
+          </a:prstGeom>
+        </p:spPr>
+        <p:txBody>
+          <a:bodyPr vert="horz" lIns="91440" tIns="45720" rIns="91440" bIns="45720" rtlCol="0" anchor="b"/>
+          <a:lstStyle>
+            <a:lvl1pPr algn="l">
+              <a:defRPr sz="1200"/>
+            </a:lvl1pPr>
+          </a:lstStyle>
+          <a:p>
+            <a:endParaRPr lang="en-US"/>
+          </a:p>
+        </p:txBody>
+      </p:sp>
+      <p:sp>
+        <p:nvSpPr>
+          <p:cNvPr id="7" name="Slide Number Placeholder 6"/>
+          <p:cNvSpPr>
+            <a:spLocks noGrp="1"/>
+          </p:cNvSpPr>
+          <p:nvPr>
+            <p:ph type="sldNum" sz="quarter" idx="5"/>
+          </p:nvPr>
+        </p:nvSpPr>
+        <p:spPr>
+          <a:xfrm>
+            <a:off x="3884613" y="8685213"/>
+            <a:ext cx="2971800" cy="457200"/>
+          </a:xfrm>
+          <a:prstGeom prst="rect">
+            <a:avLst/>
+          </a:prstGeom>
+        </p:spPr>
+        <p:txBody>
+          <a:bodyPr vert="horz" lIns="91440" tIns="45720" rIns="91440" bIns="45720" rtlCol="0" anchor="b"/>
+          <a:lstStyle>
+            <a:lvl1pPr algn="r">
+              <a:defRPr sz="1200"/>
+            </a:lvl1pPr>
+          </a:lstStyle>
+          <a:p>
+            <a:fld id="{BB5E49A5-4136-284D-997B-48E1D791AD67}" type="slidenum">
+              <a:rPr lang="en-US" smtClean="0"/>
+              <a:t>‹#›</a:t>
+            </a:fld>
+            <a:endParaRPr lang="en-US"/>
+          </a:p>
+        </p:txBody>
+      </p:sp>
+    </p:spTree>
+    <p:extLst>
+      <p:ext uri="{BB962C8B-B14F-4D97-AF65-F5344CB8AC3E}">
+        <p14:creationId xmlns:p14="http://schemas.microsoft.com/office/powerpoint/2010/main" val="2623252185"/>
+      </p:ext>
+    </p:extLst>
+  </p:cSld>
+  <p:clrMap bg1="lt1" tx1="dk1" bg2="lt2" tx2="dk2" accent1="accent1" accent2="accent2" accent3="accent3" accent4="accent4" accent5="accent5" accent6="accent6" hlink="hlink" folHlink="folHlink"/>
+  <p:notesStyle>
+    <a:lvl1pPr marL="0" algn="l" defTabSz="457200" rtl="0" eaLnBrk="1" latinLnBrk="0" hangingPunct="1">
+      <a:defRPr sz="1200" kern="1200">
+        <a:solidFill>
+          <a:schemeClr val="tx1"/>
+        </a:solidFill>
+        <a:latin typeface="+mn-lt"/>
+        <a:ea typeface="+mn-ea"/>
+        <a:cs typeface="+mn-cs"/>
+      </a:defRPr>
+    </a:lvl1pPr>
+    <a:lvl2pPr marL="457200" algn="l" defTabSz="457200" rtl="0" eaLnBrk="1" latinLnBrk="0" hangingPunct="1">
+      <a:defRPr sz="1200" kern="1200">
+        <a:solidFill>
+          <a:schemeClr val="tx1"/>
+        </a:solidFill>
+        <a:latin typeface="+mn-lt"/>
+        <a:ea typeface="+mn-ea"/>
+        <a:cs typeface="+mn-cs"/>
+      </a:defRPr>
+    </a:lvl2pPr>
+    <a:lvl3pPr marL="914400" algn="l" defTabSz="457200" rtl="0" eaLnBrk="1" latinLnBrk="0" hangingPunct="1">
+      <a:defRPr sz="1200" kern="1200">
+        <a:solidFill>
+          <a:schemeClr val="tx1"/>
+        </a:solidFill>
+        <a:latin typeface="+mn-lt"/>
+        <a:ea typeface="+mn-ea"/>
+        <a:cs typeface="+mn-cs"/>
+      </a:defRPr>
+    </a:lvl3pPr>
+    <a:lvl4pPr marL="1371600" algn="l" defTabSz="457200" rtl="0" eaLnBrk="1" latinLnBrk="0" hangingPunct="1">
+      <a:defRPr sz="1200" kern="1200">
+        <a:solidFill>
+          <a:schemeClr val="tx1"/>
+        </a:solidFill>
+        <a:latin typeface="+mn-lt"/>
+        <a:ea typeface="+mn-ea"/>
+        <a:cs typeface="+mn-cs"/>
+      </a:defRPr>
+    </a:lvl4pPr>
+    <a:lvl5pPr marL="1828800" algn="l" defTabSz="457200" rtl="0" eaLnBrk="1" latinLnBrk="0" hangingPunct="1">
+      <a:defRPr sz="1200" kern="1200">
+        <a:solidFill>
+          <a:schemeClr val="tx1"/>
+        </a:solidFill>
+        <a:latin typeface="+mn-lt"/>
+        <a:ea typeface="+mn-ea"/>
+        <a:cs typeface="+mn-cs"/>
+      </a:defRPr>
+    </a:lvl5pPr>
+    <a:lvl6pPr marL="2286000" algn="l" defTabSz="457200" rtl="0" eaLnBrk="1" latinLnBrk="0" hangingPunct="1">
+      <a:defRPr sz="1200" kern="1200">
+        <a:solidFill>
+          <a:schemeClr val="tx1"/>
+        </a:solidFill>
+        <a:latin typeface="+mn-lt"/>
+        <a:ea typeface="+mn-ea"/>
+        <a:cs typeface="+mn-cs"/>
+      </a:defRPr>
+    </a:lvl6pPr>
+    <a:lvl7pPr marL="2743200" algn="l" defTabSz="457200" rtl="0" eaLnBrk="1" latinLnBrk="0" hangingPunct="1">
+      <a:defRPr sz="1200" kern="1200">
+        <a:solidFill>
+          <a:schemeClr val="tx1"/>
+        </a:solidFill>
+        <a:latin typeface="+mn-lt"/>
+        <a:ea typeface="+mn-ea"/>
+        <a:cs typeface="+mn-cs"/>
+      </a:defRPr>
+    </a:lvl7pPr>
+    <a:lvl8pPr marL="3200400" algn="l" defTabSz="457200" rtl="0" eaLnBrk="1" latinLnBrk="0" hangingPunct="1">
+      <a:defRPr sz="1200" kern="1200">
+        <a:solidFill>
+          <a:schemeClr val="tx1"/>
+        </a:solidFill>
+        <a:latin typeface="+mn-lt"/>
+        <a:ea typeface="+mn-ea"/>
+        <a:cs typeface="+mn-cs"/>
+      </a:defRPr>
+    </a:lvl8pPr>
+    <a:lvl9pPr marL="3657600" algn="l" defTabSz="457200" rtl="0" eaLnBrk="1" latinLnBrk="0" hangingPunct="1">
+      <a:defRPr sz="1200" kern="1200">
+        <a:solidFill>
+          <a:schemeClr val="tx1"/>
+        </a:solidFill>
+        <a:latin typeface="+mn-lt"/>
+        <a:ea typeface="+mn-ea"/>
+        <a:cs typeface="+mn-cs"/>
+      </a:defRPr>
+    </a:lvl9pPr>
+  </p:notesStyle>
+</p:notesMaster>
+</file>
+
+<file path=ppt/notesSlides/notesSlide1.xml><?xml version="1.0" encoding="utf-8"?>
+<p:notes xmlns:a="http://schemas.openxmlformats.org/drawingml/2006/main" xmlns:p="http://schemas.openxmlformats.org/presentationml/2006/main" xmlns:r="http://schemas.openxmlformats.org/officeDocument/2006/relationships">
+  <p:cSld>
+    <p:spTree>
+      <p:nvGrpSpPr>
+        <p:cNvPr id="1" name=""/>
+        <p:cNvGrpSpPr/>
+        <p:nvPr/>
+      </p:nvGrpSpPr>
+      <p:grpSpPr>
+        <a:xfrm>
+          <a:off x="0" y="0"/>
+          <a:ext cx="0" cy="0"/>
+          <a:chOff x="0" y="0"/>
+          <a:chExt cx="0" cy="0"/>
+        </a:xfrm>
+      </p:grpSpPr>
+      <p:sp>
+        <p:nvSpPr>
+          <p:cNvPr id="2" name="Slide Image Placeholder 1"/>
+          <p:cNvSpPr>
+            <a:spLocks noGrp="1"/>
+          </p:cNvSpPr>
+          <p:nvPr>
+            <p:ph type="sldImg" idx="2"/>
+          </p:nvPr>
+        </p:nvSpPr>
+        <p:spPr/>
+      </p:sp>
+      <p:sp>
+        <p:nvSpPr>
+          <p:cNvPr id="3" name="Notes Placeholder 2"/>
+          <p:cNvSpPr>
+            <a:spLocks noGrp="1"/>
+          </p:cNvSpPr>
+          <p:nvPr>
+            <p:ph type="body" idx="3" sz="quarter"/>
+          </p:nvPr>
+        </p:nvSpPr>
+        <p:spPr/>
+        <p:txBody>
+          <a:bodyPr/>
+          <a:lstStyle/>
+          <a:p/>
+          <a:p/>
+          <a:p>
+            <a:r>
+              <a:t>[Practice — moved to notes, no room on slide]</a:t>
+            </a:r>
+          </a:p>
+          <a:p>
+            <a:r>
+              <a:t>• Listen and repeat: ศูนย์, หนึ่ง, สอง, สาม, สี่, ห้า. Now backwards.</a:t>
+            </a:r>
+          </a:p>
+          <a:p>
+            <a:r>
+              <a:t>• Pause-and-produce: I say a number in English. Say the Thai before I show it. Two. Four. Zero. Five.</a:t>
+            </a:r>
+          </a:p>
+          <a:p>
+            <a:r>
+              <a:t>• Room number drill: room 301? สาม-ศูนย์-หนึ่ง. Room 205? สอง-ศูนย์-ห้า. Your turn.</a:t>
+            </a:r>
+          </a:p>
+          <a:p/>
+        </p:txBody>
+      </p:sp>
+      <p:sp>
+        <p:nvSpPr>
+          <p:cNvPr id="4" name="Slide Number Placeholder 3"/>
+          <p:cNvSpPr>
+            <a:spLocks noGrp="1"/>
+          </p:cNvSpPr>
+          <p:nvPr>
+            <p:ph type="sldNum" idx="5" sz="quarter"/>
+          </p:nvPr>
+        </p:nvSpPr>
+        <p:spPr/>
+      </p:sp>
+    </p:spTree>
+  </p:cSld>
+  <p:clrMapOvr>
+    <a:masterClrMapping/>
+  </p:clrMapOvr>
+</p:notes>
+</file>
+
+<file path=ppt/notesSlides/notesSlide2.xml><?xml version="1.0" encoding="utf-8"?>
+<p:notes xmlns:a="http://schemas.openxmlformats.org/drawingml/2006/main" xmlns:p="http://schemas.openxmlformats.org/presentationml/2006/main" xmlns:r="http://schemas.openxmlformats.org/officeDocument/2006/relationships">
+  <p:cSld>
+    <p:spTree>
+      <p:nvGrpSpPr>
+        <p:cNvPr id="1" name=""/>
+        <p:cNvGrpSpPr/>
+        <p:nvPr/>
+      </p:nvGrpSpPr>
+      <p:grpSpPr>
+        <a:xfrm>
+          <a:off x="0" y="0"/>
+          <a:ext cx="0" cy="0"/>
+          <a:chOff x="0" y="0"/>
+          <a:chExt cx="0" cy="0"/>
+        </a:xfrm>
+      </p:grpSpPr>
+      <p:sp>
+        <p:nvSpPr>
+          <p:cNvPr id="2" name="Slide Image Placeholder 1"/>
+          <p:cNvSpPr>
+            <a:spLocks noGrp="1"/>
+          </p:cNvSpPr>
+          <p:nvPr>
+            <p:ph type="sldImg" idx="2"/>
+          </p:nvPr>
+        </p:nvSpPr>
+        <p:spPr/>
+      </p:sp>
+      <p:sp>
+        <p:nvSpPr>
+          <p:cNvPr id="3" name="Notes Placeholder 2"/>
+          <p:cNvSpPr>
+            <a:spLocks noGrp="1"/>
+          </p:cNvSpPr>
+          <p:nvPr>
+            <p:ph type="body" idx="3" sz="quarter"/>
+          </p:nvPr>
+        </p:nvSpPr>
+        <p:spPr/>
+        <p:txBody>
+          <a:bodyPr/>
+          <a:lstStyle/>
+          <a:p/>
+          <a:p/>
+          <a:p>
+            <a:r>
+              <a:t>[Practice — moved to notes, no room on slide]</a:t>
+            </a:r>
+          </a:p>
+          <a:p>
+            <a:r>
+              <a:t>• Response-building: I ask เบอร์อะไร. Room 409? สี่-ศูนย์-เก้า. Room 108? หนึ่ง-ศูนย์-แปด.</a:t>
+            </a:r>
+          </a:p>
+          <a:p>
+            <a:r>
+              <a:t>• Substitution: build your age sentence. Thirty? ผมอายุสามสิบปีครับ. Twenty-five? ฉันอายุยี่สิบห้าปีค่ะ.</a:t>
+            </a:r>
+          </a:p>
+          <a:p>
+            <a:r>
+              <a:t>• Pause-and-produce: someone asks คุณอายุเท่าไหร่. Say your real age in Thai.</a:t>
+            </a:r>
+          </a:p>
+          <a:p/>
+        </p:txBody>
+      </p:sp>
+      <p:sp>
+        <p:nvSpPr>
+          <p:cNvPr id="4" name="Slide Number Placeholder 3"/>
+          <p:cNvSpPr>
+            <a:spLocks noGrp="1"/>
+          </p:cNvSpPr>
+          <p:nvPr>
+            <p:ph type="sldNum" idx="5" sz="quarter"/>
+          </p:nvPr>
+        </p:nvSpPr>
+        <p:spPr/>
+      </p:sp>
+    </p:spTree>
+  </p:cSld>
+  <p:clrMapOvr>
+    <a:masterClrMapping/>
+  </p:clrMapOvr>
+</p:notes>
+</file>
+
+<file path=ppt/notesSlides/notesSlide3.xml><?xml version="1.0" encoding="utf-8"?>
+<p:notes xmlns:a="http://schemas.openxmlformats.org/drawingml/2006/main" xmlns:p="http://schemas.openxmlformats.org/presentationml/2006/main" xmlns:r="http://schemas.openxmlformats.org/officeDocument/2006/relationships">
+  <p:cSld>
+    <p:spTree>
+      <p:nvGrpSpPr>
+        <p:cNvPr id="1" name=""/>
+        <p:cNvGrpSpPr/>
+        <p:nvPr/>
+      </p:nvGrpSpPr>
+      <p:grpSpPr>
+        <a:xfrm>
+          <a:off x="0" y="0"/>
+          <a:ext cx="0" cy="0"/>
+          <a:chOff x="0" y="0"/>
+          <a:chExt cx="0" cy="0"/>
+        </a:xfrm>
+      </p:grpSpPr>
+      <p:sp>
+        <p:nvSpPr>
+          <p:cNvPr id="2" name="Slide Image Placeholder 1"/>
+          <p:cNvSpPr>
+            <a:spLocks noGrp="1"/>
+          </p:cNvSpPr>
+          <p:nvPr>
+            <p:ph type="sldImg" idx="2"/>
+          </p:nvPr>
+        </p:nvSpPr>
+        <p:spPr/>
+      </p:sp>
+      <p:sp>
+        <p:nvSpPr>
+          <p:cNvPr id="3" name="Notes Placeholder 2"/>
+          <p:cNvSpPr>
+            <a:spLocks noGrp="1"/>
+          </p:cNvSpPr>
+          <p:nvPr>
+            <p:ph type="body" idx="3" sz="quarter"/>
+          </p:nvPr>
+        </p:nvSpPr>
+        <p:spPr/>
+        <p:txBody>
+          <a:bodyPr/>
+          <a:lstStyle/>
+          <a:p/>
+          <a:p/>
+          <a:p>
+            <a:r>
+              <a:t>[Practice — moved to notes, no room on slide]</a:t>
+            </a:r>
+          </a:p>
+          <a:p>
+            <a:r>
+              <a:t>• Tone echo: สี่ sìi — repeat low. สี sǐi — repeat rising.</a:t>
+            </a:r>
+          </a:p>
+          <a:p>
+            <a:r>
+              <a:t>• Minimal pair: I say one. Is it four or colour? Answer before I show it.</a:t>
+            </a:r>
+          </a:p>
+          <a:p/>
+        </p:txBody>
+      </p:sp>
+      <p:sp>
+        <p:nvSpPr>
+          <p:cNvPr id="4" name="Slide Number Placeholder 3"/>
+          <p:cNvSpPr>
+            <a:spLocks noGrp="1"/>
+          </p:cNvSpPr>
+          <p:nvPr>
+            <p:ph type="sldNum" idx="5" sz="quarter"/>
+          </p:nvPr>
+        </p:nvSpPr>
+        <p:spPr/>
+      </p:sp>
+    </p:spTree>
+  </p:cSld>
+  <p:clrMapOvr>
+    <a:masterClrMapping/>
+  </p:clrMapOvr>
+</p:notes>
 </file>
 
 <file path=ppt/slideLayouts/slideLayout1.xml><?xml version="1.0" encoding="utf-8"?>
@@ -5423,321 +6032,6 @@
           </a:p>
         </p:txBody>
       </p:sp>
-      <p:sp>
-        <p:nvSpPr>
-          <p:cNvPr id="30" name="TextBox 29"/>
-          <p:cNvSpPr txBox="1"/>
-          <p:nvPr/>
-        </p:nvSpPr>
-        <p:spPr>
-          <a:xfrm>
-            <a:off x="932688" y="6437376"/>
-            <a:ext cx="9692640" cy="228600"/>
-          </a:xfrm>
-          <a:prstGeom prst="rect">
-            <a:avLst/>
-          </a:prstGeom>
-          <a:noFill/>
-        </p:spPr>
-        <p:txBody>
-          <a:bodyPr wrap="square" anchor="t">
-            <a:spAutoFit/>
-          </a:bodyPr>
-          <a:lstStyle/>
-          <a:p>
-            <a:pPr algn="l"/>
-            <a:r>
-              <a:rPr sz="1700" b="1" i="0" lang="en-US" altLang="en-US">
-                <a:solidFill>
-                  <a:srgbClr val="C96F4A"/>
-                </a:solidFill>
-                <a:latin typeface="Sarabun"/>
-                <a:ea typeface="Sarabun"/>
-                <a:cs typeface="Sarabun"/>
-              </a:rPr>
-              <a:t>Practice</a:t>
-            </a:r>
-          </a:p>
-        </p:txBody>
-      </p:sp>
-      <p:sp>
-        <p:nvSpPr>
-          <p:cNvPr id="31" name="Oval 30"/>
-          <p:cNvSpPr/>
-          <p:nvPr/>
-        </p:nvSpPr>
-        <p:spPr>
-          <a:xfrm>
-            <a:off x="932688" y="6821424"/>
-            <a:ext cx="82296" cy="82296"/>
-          </a:xfrm>
-          <a:prstGeom prst="ellipse">
-            <a:avLst/>
-          </a:prstGeom>
-          <a:solidFill>
-            <a:srgbClr val="C96F4A"/>
-          </a:solidFill>
-          <a:ln>
-            <a:noFill/>
-          </a:ln>
-        </p:spPr>
-        <p:style>
-          <a:lnRef idx="1">
-            <a:schemeClr val="accent1"/>
-          </a:lnRef>
-          <a:fillRef idx="3">
-            <a:schemeClr val="accent1"/>
-          </a:fillRef>
-          <a:effectRef idx="2">
-            <a:schemeClr val="accent1"/>
-          </a:effectRef>
-          <a:fontRef idx="minor">
-            <a:schemeClr val="lt1"/>
-          </a:fontRef>
-        </p:style>
-        <p:txBody>
-          <a:bodyPr rtlCol="0" anchor="ctr"/>
-          <a:lstStyle/>
-          <a:p>
-            <a:pPr algn="ctr"/>
-          </a:p>
-        </p:txBody>
-      </p:sp>
-      <p:sp>
-        <p:nvSpPr>
-          <p:cNvPr id="32" name="TextBox 31"/>
-          <p:cNvSpPr txBox="1"/>
-          <p:nvPr/>
-        </p:nvSpPr>
-        <p:spPr>
-          <a:xfrm>
-            <a:off x="1078992" y="6729984"/>
-            <a:ext cx="9555480" cy="274320"/>
-          </a:xfrm>
-          <a:prstGeom prst="rect">
-            <a:avLst/>
-          </a:prstGeom>
-          <a:noFill/>
-        </p:spPr>
-        <p:txBody>
-          <a:bodyPr wrap="square" anchor="t">
-            <a:spAutoFit/>
-          </a:bodyPr>
-          <a:lstStyle/>
-          <a:p>
-            <a:pPr algn="l"/>
-            <a:r>
-              <a:rPr sz="1700" b="0" i="0" lang="en-US" altLang="en-US">
-                <a:solidFill>
-                  <a:srgbClr val="24333D"/>
-                </a:solidFill>
-                <a:latin typeface="Sarabun"/>
-                <a:ea typeface="Sarabun"/>
-                <a:cs typeface="Sarabun"/>
-              </a:rPr>
-              <a:t>Listen and repeat: </a:t>
-            </a:r>
-            <a:r>
-              <a:rPr sz="1700" b="0" i="0" lang="th-TH" altLang="en-US">
-                <a:solidFill>
-                  <a:srgbClr val="24333D"/>
-                </a:solidFill>
-                <a:latin typeface="Sarabun"/>
-                <a:ea typeface="Sarabun"/>
-                <a:cs typeface="Sarabun"/>
-              </a:rPr>
-              <a:t>ศูนย์</a:t>
-            </a:r>
-            <a:r>
-              <a:rPr sz="1700" b="0" i="1" lang="en-US" altLang="en-US">
-                <a:solidFill>
-                  <a:srgbClr val="566873"/>
-                </a:solidFill>
-                <a:latin typeface="Sarabun"/>
-                <a:ea typeface="Sarabun"/>
-                <a:cs typeface="Sarabun"/>
-              </a:rPr>
-              <a:t> (sǔun)</a:t>
-            </a:r>
-            <a:r>
-              <a:rPr sz="1700" b="0" i="0" lang="en-US" altLang="en-US">
-                <a:solidFill>
-                  <a:srgbClr val="24333D"/>
-                </a:solidFill>
-                <a:latin typeface="Sarabun"/>
-                <a:ea typeface="Sarabun"/>
-                <a:cs typeface="Sarabun"/>
-              </a:rPr>
-              <a:t>, </a:t>
-            </a:r>
-            <a:r>
-              <a:rPr sz="1700" b="0" i="0" lang="th-TH" altLang="en-US">
-                <a:solidFill>
-                  <a:srgbClr val="24333D"/>
-                </a:solidFill>
-                <a:latin typeface="Sarabun"/>
-                <a:ea typeface="Sarabun"/>
-                <a:cs typeface="Sarabun"/>
-              </a:rPr>
-              <a:t>หนึ่ง</a:t>
-            </a:r>
-            <a:r>
-              <a:rPr sz="1700" b="0" i="1" lang="en-US" altLang="en-US">
-                <a:solidFill>
-                  <a:srgbClr val="566873"/>
-                </a:solidFill>
-                <a:latin typeface="Sarabun"/>
-                <a:ea typeface="Sarabun"/>
-                <a:cs typeface="Sarabun"/>
-              </a:rPr>
-              <a:t> (nùeng)</a:t>
-            </a:r>
-            <a:r>
-              <a:rPr sz="1700" b="0" i="0" lang="en-US" altLang="en-US">
-                <a:solidFill>
-                  <a:srgbClr val="24333D"/>
-                </a:solidFill>
-                <a:latin typeface="Sarabun"/>
-                <a:ea typeface="Sarabun"/>
-                <a:cs typeface="Sarabun"/>
-              </a:rPr>
-              <a:t>, </a:t>
-            </a:r>
-            <a:r>
-              <a:rPr sz="1700" b="0" i="0" lang="th-TH" altLang="en-US">
-                <a:solidFill>
-                  <a:srgbClr val="24333D"/>
-                </a:solidFill>
-                <a:latin typeface="Sarabun"/>
-                <a:ea typeface="Sarabun"/>
-                <a:cs typeface="Sarabun"/>
-              </a:rPr>
-              <a:t>สอง</a:t>
-            </a:r>
-            <a:r>
-              <a:rPr sz="1700" b="0" i="1" lang="en-US" altLang="en-US">
-                <a:solidFill>
-                  <a:srgbClr val="566873"/>
-                </a:solidFill>
-                <a:latin typeface="Sarabun"/>
-                <a:ea typeface="Sarabun"/>
-                <a:cs typeface="Sarabun"/>
-              </a:rPr>
-              <a:t> (sǎawng)</a:t>
-            </a:r>
-            <a:r>
-              <a:rPr sz="1700" b="0" i="0" lang="en-US" altLang="en-US">
-                <a:solidFill>
-                  <a:srgbClr val="24333D"/>
-                </a:solidFill>
-                <a:latin typeface="Sarabun"/>
-                <a:ea typeface="Sarabun"/>
-                <a:cs typeface="Sarabun"/>
-              </a:rPr>
-              <a:t>, </a:t>
-            </a:r>
-            <a:r>
-              <a:rPr sz="1700" b="0" i="0" lang="th-TH" altLang="en-US">
-                <a:solidFill>
-                  <a:srgbClr val="24333D"/>
-                </a:solidFill>
-                <a:latin typeface="Sarabun"/>
-                <a:ea typeface="Sarabun"/>
-                <a:cs typeface="Sarabun"/>
-              </a:rPr>
-              <a:t>สาม</a:t>
-            </a:r>
-            <a:r>
-              <a:rPr sz="1700" b="0" i="1" lang="en-US" altLang="en-US">
-                <a:solidFill>
-                  <a:srgbClr val="566873"/>
-                </a:solidFill>
-                <a:latin typeface="Sarabun"/>
-                <a:ea typeface="Sarabun"/>
-                <a:cs typeface="Sarabun"/>
-              </a:rPr>
-              <a:t> (sǎam)</a:t>
-            </a:r>
-            <a:r>
-              <a:rPr sz="1700" b="0" i="0" lang="en-US" altLang="en-US">
-                <a:solidFill>
-                  <a:srgbClr val="24333D"/>
-                </a:solidFill>
-                <a:latin typeface="Sarabun"/>
-                <a:ea typeface="Sarabun"/>
-                <a:cs typeface="Sarabun"/>
-              </a:rPr>
-              <a:t>, </a:t>
-            </a:r>
-            <a:r>
-              <a:rPr sz="1700" b="0" i="0" lang="th-TH" altLang="en-US">
-                <a:solidFill>
-                  <a:srgbClr val="24333D"/>
-                </a:solidFill>
-                <a:latin typeface="Sarabun"/>
-                <a:ea typeface="Sarabun"/>
-                <a:cs typeface="Sarabun"/>
-              </a:rPr>
-              <a:t>สี่</a:t>
-            </a:r>
-            <a:r>
-              <a:rPr sz="1700" b="0" i="1" lang="en-US" altLang="en-US">
-                <a:solidFill>
-                  <a:srgbClr val="566873"/>
-                </a:solidFill>
-                <a:latin typeface="Sarabun"/>
-                <a:ea typeface="Sarabun"/>
-                <a:cs typeface="Sarabun"/>
-              </a:rPr>
-              <a:t> (sìi)</a:t>
-            </a:r>
-            <a:r>
-              <a:rPr sz="1700" b="0" i="0" lang="en-US" altLang="en-US">
-                <a:solidFill>
-                  <a:srgbClr val="24333D"/>
-                </a:solidFill>
-                <a:latin typeface="Sarabun"/>
-                <a:ea typeface="Sarabun"/>
-                <a:cs typeface="Sarabun"/>
-              </a:rPr>
-              <a:t>, </a:t>
-            </a:r>
-            <a:r>
-              <a:rPr sz="1700" b="0" i="0" lang="th-TH" altLang="en-US">
-                <a:solidFill>
-                  <a:srgbClr val="24333D"/>
-                </a:solidFill>
-                <a:latin typeface="Sarabun"/>
-                <a:ea typeface="Sarabun"/>
-                <a:cs typeface="Sarabun"/>
-              </a:rPr>
-              <a:t>ห้า</a:t>
-            </a:r>
-            <a:r>
-              <a:rPr sz="1700" b="0" i="1" lang="en-US" altLang="en-US">
-                <a:solidFill>
-                  <a:srgbClr val="566873"/>
-                </a:solidFill>
-                <a:latin typeface="Sarabun"/>
-                <a:ea typeface="Sarabun"/>
-                <a:cs typeface="Sarabun"/>
-              </a:rPr>
-              <a:t> (hâa)</a:t>
-            </a:r>
-            <a:r>
-              <a:rPr sz="1700" b="0" i="0" lang="en-US" altLang="en-US">
-                <a:solidFill>
-                  <a:srgbClr val="24333D"/>
-                </a:solidFill>
-                <a:latin typeface="Sarabun"/>
-                <a:ea typeface="Sarabun"/>
-                <a:cs typeface="Sarabun"/>
-              </a:rPr>
-              <a:t>. Now backwards.</a:t>
-            </a:r>
-          </a:p>
-        </p:txBody>
-      </p:sp>
     </p:spTree>
   </p:cSld>
   <p:clrMapOvr>
@@ -7941,354 +8235,6 @@
           </a:p>
         </p:txBody>
       </p:sp>
-      <p:sp>
-        <p:nvSpPr>
-          <p:cNvPr id="22" name="TextBox 21"/>
-          <p:cNvSpPr txBox="1"/>
-          <p:nvPr/>
-        </p:nvSpPr>
-        <p:spPr>
-          <a:xfrm>
-            <a:off x="932688" y="6729984"/>
-            <a:ext cx="9692640" cy="228600"/>
-          </a:xfrm>
-          <a:prstGeom prst="rect">
-            <a:avLst/>
-          </a:prstGeom>
-          <a:noFill/>
-        </p:spPr>
-        <p:txBody>
-          <a:bodyPr wrap="square" anchor="t">
-            <a:spAutoFit/>
-          </a:bodyPr>
-          <a:lstStyle/>
-          <a:p>
-            <a:pPr algn="l"/>
-            <a:r>
-              <a:rPr sz="1700" b="1" i="0" lang="en-US" altLang="en-US">
-                <a:solidFill>
-                  <a:srgbClr val="C96F4A"/>
-                </a:solidFill>
-                <a:latin typeface="Sarabun"/>
-                <a:ea typeface="Sarabun"/>
-                <a:cs typeface="Sarabun"/>
-              </a:rPr>
-              <a:t>Practice</a:t>
-            </a:r>
-          </a:p>
-        </p:txBody>
-      </p:sp>
-      <p:sp>
-        <p:nvSpPr>
-          <p:cNvPr id="23" name="Oval 22"/>
-          <p:cNvSpPr/>
-          <p:nvPr/>
-        </p:nvSpPr>
-        <p:spPr>
-          <a:xfrm>
-            <a:off x="932688" y="7114032"/>
-            <a:ext cx="82296" cy="82296"/>
-          </a:xfrm>
-          <a:prstGeom prst="ellipse">
-            <a:avLst/>
-          </a:prstGeom>
-          <a:solidFill>
-            <a:srgbClr val="C96F4A"/>
-          </a:solidFill>
-          <a:ln>
-            <a:noFill/>
-          </a:ln>
-        </p:spPr>
-        <p:style>
-          <a:lnRef idx="1">
-            <a:schemeClr val="accent1"/>
-          </a:lnRef>
-          <a:fillRef idx="3">
-            <a:schemeClr val="accent1"/>
-          </a:fillRef>
-          <a:effectRef idx="2">
-            <a:schemeClr val="accent1"/>
-          </a:effectRef>
-          <a:fontRef idx="minor">
-            <a:schemeClr val="lt1"/>
-          </a:fontRef>
-        </p:style>
-        <p:txBody>
-          <a:bodyPr rtlCol="0" anchor="ctr"/>
-          <a:lstStyle/>
-          <a:p>
-            <a:pPr algn="ctr"/>
-          </a:p>
-        </p:txBody>
-      </p:sp>
-      <p:sp>
-        <p:nvSpPr>
-          <p:cNvPr id="24" name="TextBox 23"/>
-          <p:cNvSpPr txBox="1"/>
-          <p:nvPr/>
-        </p:nvSpPr>
-        <p:spPr>
-          <a:xfrm>
-            <a:off x="1078992" y="7022592"/>
-            <a:ext cx="9555480" cy="274320"/>
-          </a:xfrm>
-          <a:prstGeom prst="rect">
-            <a:avLst/>
-          </a:prstGeom>
-          <a:noFill/>
-        </p:spPr>
-        <p:txBody>
-          <a:bodyPr wrap="square" anchor="t">
-            <a:spAutoFit/>
-          </a:bodyPr>
-          <a:lstStyle/>
-          <a:p>
-            <a:pPr algn="l"/>
-            <a:r>
-              <a:rPr sz="1700" b="0" i="0" lang="en-US" altLang="en-US">
-                <a:solidFill>
-                  <a:srgbClr val="24333D"/>
-                </a:solidFill>
-                <a:latin typeface="Sarabun"/>
-                <a:ea typeface="Sarabun"/>
-                <a:cs typeface="Sarabun"/>
-              </a:rPr>
-              <a:t>Response-building: I ask </a:t>
-            </a:r>
-            <a:r>
-              <a:rPr sz="1700" b="0" i="0" lang="th-TH" altLang="en-US">
-                <a:solidFill>
-                  <a:srgbClr val="24333D"/>
-                </a:solidFill>
-                <a:latin typeface="Sarabun"/>
-                <a:ea typeface="Sarabun"/>
-                <a:cs typeface="Sarabun"/>
-              </a:rPr>
-              <a:t>เบอร์อะไร</a:t>
-            </a:r>
-            <a:r>
-              <a:rPr sz="1700" b="0" i="1" lang="en-US" altLang="en-US">
-                <a:solidFill>
-                  <a:srgbClr val="566873"/>
-                </a:solidFill>
-                <a:latin typeface="Sarabun"/>
-                <a:ea typeface="Sarabun"/>
-                <a:cs typeface="Sarabun"/>
-              </a:rPr>
-              <a:t> (ber à-rai)</a:t>
-            </a:r>
-            <a:r>
-              <a:rPr sz="1700" b="0" i="0" lang="en-US" altLang="en-US">
-                <a:solidFill>
-                  <a:srgbClr val="24333D"/>
-                </a:solidFill>
-                <a:latin typeface="Sarabun"/>
-                <a:ea typeface="Sarabun"/>
-                <a:cs typeface="Sarabun"/>
-              </a:rPr>
-              <a:t>. Room 409? </a:t>
-            </a:r>
-            <a:r>
-              <a:rPr sz="1700" b="0" i="0" lang="th-TH" altLang="en-US">
-                <a:solidFill>
-                  <a:srgbClr val="24333D"/>
-                </a:solidFill>
-                <a:latin typeface="Sarabun"/>
-                <a:ea typeface="Sarabun"/>
-                <a:cs typeface="Sarabun"/>
-              </a:rPr>
-              <a:t>สี่</a:t>
-            </a:r>
-            <a:r>
-              <a:rPr sz="1700" b="0" i="1" lang="en-US" altLang="en-US">
-                <a:solidFill>
-                  <a:srgbClr val="566873"/>
-                </a:solidFill>
-                <a:latin typeface="Sarabun"/>
-                <a:ea typeface="Sarabun"/>
-                <a:cs typeface="Sarabun"/>
-              </a:rPr>
-              <a:t> (sìi)</a:t>
-            </a:r>
-            <a:r>
-              <a:rPr sz="1700" b="0" i="0" lang="en-US" altLang="en-US">
-                <a:solidFill>
-                  <a:srgbClr val="24333D"/>
-                </a:solidFill>
-                <a:latin typeface="Sarabun"/>
-                <a:ea typeface="Sarabun"/>
-                <a:cs typeface="Sarabun"/>
-              </a:rPr>
-              <a:t>-</a:t>
-            </a:r>
-            <a:r>
-              <a:rPr sz="1700" b="0" i="0" lang="th-TH" altLang="en-US">
-                <a:solidFill>
-                  <a:srgbClr val="24333D"/>
-                </a:solidFill>
-                <a:latin typeface="Sarabun"/>
-                <a:ea typeface="Sarabun"/>
-                <a:cs typeface="Sarabun"/>
-              </a:rPr>
-              <a:t>ศูนย์</a:t>
-            </a:r>
-            <a:r>
-              <a:rPr sz="1700" b="0" i="1" lang="en-US" altLang="en-US">
-                <a:solidFill>
-                  <a:srgbClr val="566873"/>
-                </a:solidFill>
-                <a:latin typeface="Sarabun"/>
-                <a:ea typeface="Sarabun"/>
-                <a:cs typeface="Sarabun"/>
-              </a:rPr>
-              <a:t> (sǔun)</a:t>
-            </a:r>
-            <a:r>
-              <a:rPr sz="1700" b="0" i="0" lang="en-US" altLang="en-US">
-                <a:solidFill>
-                  <a:srgbClr val="24333D"/>
-                </a:solidFill>
-                <a:latin typeface="Sarabun"/>
-                <a:ea typeface="Sarabun"/>
-                <a:cs typeface="Sarabun"/>
-              </a:rPr>
-              <a:t>-</a:t>
-            </a:r>
-            <a:r>
-              <a:rPr sz="1700" b="0" i="0" lang="th-TH" altLang="en-US">
-                <a:solidFill>
-                  <a:srgbClr val="24333D"/>
-                </a:solidFill>
-                <a:latin typeface="Sarabun"/>
-                <a:ea typeface="Sarabun"/>
-                <a:cs typeface="Sarabun"/>
-              </a:rPr>
-              <a:t>เก้า</a:t>
-            </a:r>
-            <a:r>
-              <a:rPr sz="1700" b="0" i="1" lang="en-US" altLang="en-US">
-                <a:solidFill>
-                  <a:srgbClr val="566873"/>
-                </a:solidFill>
-                <a:latin typeface="Sarabun"/>
-                <a:ea typeface="Sarabun"/>
-                <a:cs typeface="Sarabun"/>
-              </a:rPr>
-              <a:t> (gâo)</a:t>
-            </a:r>
-            <a:r>
-              <a:rPr sz="1700" b="0" i="0" lang="en-US" altLang="en-US">
-                <a:solidFill>
-                  <a:srgbClr val="24333D"/>
-                </a:solidFill>
-                <a:latin typeface="Sarabun"/>
-                <a:ea typeface="Sarabun"/>
-                <a:cs typeface="Sarabun"/>
-              </a:rPr>
-              <a:t>. Room 108? </a:t>
-            </a:r>
-            <a:r>
-              <a:rPr sz="1700" b="0" i="0" lang="th-TH" altLang="en-US">
-                <a:solidFill>
-                  <a:srgbClr val="24333D"/>
-                </a:solidFill>
-                <a:latin typeface="Sarabun"/>
-                <a:ea typeface="Sarabun"/>
-                <a:cs typeface="Sarabun"/>
-              </a:rPr>
-              <a:t>หนึ่ง</a:t>
-            </a:r>
-            <a:r>
-              <a:rPr sz="1700" b="0" i="1" lang="en-US" altLang="en-US">
-                <a:solidFill>
-                  <a:srgbClr val="566873"/>
-                </a:solidFill>
-                <a:latin typeface="Sarabun"/>
-                <a:ea typeface="Sarabun"/>
-                <a:cs typeface="Sarabun"/>
-              </a:rPr>
-              <a:t> (nùeng)</a:t>
-            </a:r>
-            <a:r>
-              <a:rPr sz="1700" b="0" i="0" lang="en-US" altLang="en-US">
-                <a:solidFill>
-                  <a:srgbClr val="24333D"/>
-                </a:solidFill>
-                <a:latin typeface="Sarabun"/>
-                <a:ea typeface="Sarabun"/>
-                <a:cs typeface="Sarabun"/>
-              </a:rPr>
-              <a:t>-</a:t>
-            </a:r>
-            <a:r>
-              <a:rPr sz="1700" b="0" i="0" lang="th-TH" altLang="en-US">
-                <a:solidFill>
-                  <a:srgbClr val="24333D"/>
-                </a:solidFill>
-                <a:latin typeface="Sarabun"/>
-                <a:ea typeface="Sarabun"/>
-                <a:cs typeface="Sarabun"/>
-              </a:rPr>
-              <a:t>ศูนย์</a:t>
-            </a:r>
-            <a:r>
-              <a:rPr sz="1700" b="0" i="1" lang="en-US" altLang="en-US">
-                <a:solidFill>
-                  <a:srgbClr val="566873"/>
-                </a:solidFill>
-                <a:latin typeface="Sarabun"/>
-                <a:ea typeface="Sarabun"/>
-                <a:cs typeface="Sarabun"/>
-              </a:rPr>
-              <a:t> (sǔun)</a:t>
-            </a:r>
-            <a:r>
-              <a:rPr sz="1700" b="0" i="0" lang="en-US" altLang="en-US">
-                <a:solidFill>
-                  <a:srgbClr val="24333D"/>
-                </a:solidFill>
-                <a:latin typeface="Sarabun"/>
-                <a:ea typeface="Sarabun"/>
-                <a:cs typeface="Sarabun"/>
-              </a:rPr>
-              <a:t>-</a:t>
-            </a:r>
-            <a:r>
-              <a:rPr sz="1700" b="0" i="0" lang="th-TH" altLang="en-US">
-                <a:solidFill>
-                  <a:srgbClr val="24333D"/>
-                </a:solidFill>
-                <a:latin typeface="Sarabun"/>
-                <a:ea typeface="Sarabun"/>
-                <a:cs typeface="Sarabun"/>
-              </a:rPr>
-              <a:t>แปด</a:t>
-            </a:r>
-            <a:r>
-              <a:rPr sz="1700" b="0" i="1" lang="en-US" altLang="en-US">
-                <a:solidFill>
-                  <a:srgbClr val="566873"/>
-                </a:solidFill>
-                <a:latin typeface="Sarabun"/>
-                <a:ea typeface="Sarabun"/>
-                <a:cs typeface="Sarabun"/>
-              </a:rPr>
-              <a:t> (bpàet)</a:t>
-            </a:r>
-            <a:r>
-              <a:rPr sz="1700" b="0" i="0" lang="en-US" altLang="en-US">
-                <a:solidFill>
-                  <a:srgbClr val="24333D"/>
-                </a:solidFill>
-                <a:latin typeface="Sarabun"/>
-                <a:ea typeface="Sarabun"/>
-                <a:cs typeface="Sarabun"/>
-              </a:rPr>
-              <a:t>.</a:t>
-            </a:r>
-          </a:p>
-        </p:txBody>
-      </p:sp>
     </p:spTree>
   </p:cSld>
   <p:clrMapOvr>
@@ -9047,189 +8993,6 @@
                 <a:cs typeface="Sarabun"/>
               </a:rPr>
               <a:t>nine — falling tone (voice drops)</a:t>
-            </a:r>
-          </a:p>
-        </p:txBody>
-      </p:sp>
-      <p:sp>
-        <p:nvSpPr>
-          <p:cNvPr id="18" name="TextBox 17"/>
-          <p:cNvSpPr txBox="1"/>
-          <p:nvPr/>
-        </p:nvSpPr>
-        <p:spPr>
-          <a:xfrm>
-            <a:off x="932688" y="6876288"/>
-            <a:ext cx="9692640" cy="228600"/>
-          </a:xfrm>
-          <a:prstGeom prst="rect">
-            <a:avLst/>
-          </a:prstGeom>
-          <a:noFill/>
-        </p:spPr>
-        <p:txBody>
-          <a:bodyPr wrap="square" anchor="t">
-            <a:spAutoFit/>
-          </a:bodyPr>
-          <a:lstStyle/>
-          <a:p>
-            <a:pPr algn="l"/>
-            <a:r>
-              <a:rPr sz="1700" b="1" i="0" lang="en-US" altLang="en-US">
-                <a:solidFill>
-                  <a:srgbClr val="C96F4A"/>
-                </a:solidFill>
-                <a:latin typeface="Sarabun"/>
-                <a:ea typeface="Sarabun"/>
-                <a:cs typeface="Sarabun"/>
-              </a:rPr>
-              <a:t>Practice</a:t>
-            </a:r>
-          </a:p>
-        </p:txBody>
-      </p:sp>
-      <p:sp>
-        <p:nvSpPr>
-          <p:cNvPr id="19" name="Oval 18"/>
-          <p:cNvSpPr/>
-          <p:nvPr/>
-        </p:nvSpPr>
-        <p:spPr>
-          <a:xfrm>
-            <a:off x="932688" y="7260336"/>
-            <a:ext cx="82296" cy="82296"/>
-          </a:xfrm>
-          <a:prstGeom prst="ellipse">
-            <a:avLst/>
-          </a:prstGeom>
-          <a:solidFill>
-            <a:srgbClr val="C96F4A"/>
-          </a:solidFill>
-          <a:ln>
-            <a:noFill/>
-          </a:ln>
-        </p:spPr>
-        <p:style>
-          <a:lnRef idx="1">
-            <a:schemeClr val="accent1"/>
-          </a:lnRef>
-          <a:fillRef idx="3">
-            <a:schemeClr val="accent1"/>
-          </a:fillRef>
-          <a:effectRef idx="2">
-            <a:schemeClr val="accent1"/>
-          </a:effectRef>
-          <a:fontRef idx="minor">
-            <a:schemeClr val="lt1"/>
-          </a:fontRef>
-        </p:style>
-        <p:txBody>
-          <a:bodyPr rtlCol="0" anchor="ctr"/>
-          <a:lstStyle/>
-          <a:p>
-            <a:pPr algn="ctr"/>
-          </a:p>
-        </p:txBody>
-      </p:sp>
-      <p:sp>
-        <p:nvSpPr>
-          <p:cNvPr id="20" name="TextBox 19"/>
-          <p:cNvSpPr txBox="1"/>
-          <p:nvPr/>
-        </p:nvSpPr>
-        <p:spPr>
-          <a:xfrm>
-            <a:off x="1078992" y="7168896"/>
-            <a:ext cx="9555480" cy="274320"/>
-          </a:xfrm>
-          <a:prstGeom prst="rect">
-            <a:avLst/>
-          </a:prstGeom>
-          <a:noFill/>
-        </p:spPr>
-        <p:txBody>
-          <a:bodyPr wrap="square" anchor="t">
-            <a:spAutoFit/>
-          </a:bodyPr>
-          <a:lstStyle/>
-          <a:p>
-            <a:pPr algn="l"/>
-            <a:r>
-              <a:rPr sz="1700" b="0" i="0" lang="en-US" altLang="en-US">
-                <a:solidFill>
-                  <a:srgbClr val="24333D"/>
-                </a:solidFill>
-                <a:latin typeface="Sarabun"/>
-                <a:ea typeface="Sarabun"/>
-                <a:cs typeface="Sarabun"/>
-              </a:rPr>
-              <a:t>Tone echo: </a:t>
-            </a:r>
-            <a:r>
-              <a:rPr sz="1700" b="0" i="0" lang="th-TH" altLang="en-US">
-                <a:solidFill>
-                  <a:srgbClr val="24333D"/>
-                </a:solidFill>
-                <a:latin typeface="Sarabun"/>
-                <a:ea typeface="Sarabun"/>
-                <a:cs typeface="Sarabun"/>
-              </a:rPr>
-              <a:t>สี่</a:t>
-            </a:r>
-            <a:r>
-              <a:rPr sz="1700" b="0" i="1" lang="en-US" altLang="en-US">
-                <a:solidFill>
-                  <a:srgbClr val="566873"/>
-                </a:solidFill>
-                <a:latin typeface="Sarabun"/>
-                <a:ea typeface="Sarabun"/>
-                <a:cs typeface="Sarabun"/>
-              </a:rPr>
-              <a:t> (sìi)</a:t>
-            </a:r>
-            <a:r>
-              <a:rPr sz="1700" b="0" i="0" lang="en-US" altLang="en-US">
-                <a:solidFill>
-                  <a:srgbClr val="24333D"/>
-                </a:solidFill>
-                <a:latin typeface="Sarabun"/>
-                <a:ea typeface="Sarabun"/>
-                <a:cs typeface="Sarabun"/>
-              </a:rPr>
-              <a:t> sìi — repeat low. </a:t>
-            </a:r>
-            <a:r>
-              <a:rPr sz="1700" b="0" i="0" lang="th-TH" altLang="en-US">
-                <a:solidFill>
-                  <a:srgbClr val="24333D"/>
-                </a:solidFill>
-                <a:latin typeface="Sarabun"/>
-                <a:ea typeface="Sarabun"/>
-                <a:cs typeface="Sarabun"/>
-              </a:rPr>
-              <a:t>สี</a:t>
-            </a:r>
-            <a:r>
-              <a:rPr sz="1700" b="0" i="1" lang="en-US" altLang="en-US">
-                <a:solidFill>
-                  <a:srgbClr val="566873"/>
-                </a:solidFill>
-                <a:latin typeface="Sarabun"/>
-                <a:ea typeface="Sarabun"/>
-                <a:cs typeface="Sarabun"/>
-              </a:rPr>
-              <a:t> (sǐi)</a:t>
-            </a:r>
-            <a:r>
-              <a:rPr sz="1700" b="0" i="0" lang="en-US" altLang="en-US">
-                <a:solidFill>
-                  <a:srgbClr val="24333D"/>
-                </a:solidFill>
-                <a:latin typeface="Sarabun"/>
-                <a:ea typeface="Sarabun"/>
-                <a:cs typeface="Sarabun"/>
-              </a:rPr>
-              <a:t> sǐi — repeat rising.</a:t>
             </a:r>
           </a:p>
         </p:txBody>
@@ -11834,4 +11597,324 @@
   </ns0:objectDefaults>
   <ns0:extraClrSchemeLst/>
 </ns0:theme>
+</file>
+
+<file path=ppt/theme/theme2.xml><?xml version="1.0" encoding="utf-8"?>
+<a:theme xmlns:a="http://schemas.openxmlformats.org/drawingml/2006/main" name="Office Theme">
+  <a:themeElements>
+    <a:clrScheme name="Office">
+      <a:dk1>
+        <a:sysClr val="windowText" lastClr="000000"/>
+      </a:dk1>
+      <a:lt1>
+        <a:sysClr val="window" lastClr="FFFFFF"/>
+      </a:lt1>
+      <a:dk2>
+        <a:srgbClr val="1F497D"/>
+      </a:dk2>
+      <a:lt2>
+        <a:srgbClr val="EEECE1"/>
+      </a:lt2>
+      <a:accent1>
+        <a:srgbClr val="4F81BD"/>
+      </a:accent1>
+      <a:accent2>
+        <a:srgbClr val="C0504D"/>
+      </a:accent2>
+      <a:accent3>
+        <a:srgbClr val="9BBB59"/>
+      </a:accent3>
+      <a:accent4>
+        <a:srgbClr val="8064A2"/>
+      </a:accent4>
+      <a:accent5>
+        <a:srgbClr val="4BACC6"/>
+      </a:accent5>
+      <a:accent6>
+        <a:srgbClr val="F79646"/>
+      </a:accent6>
+      <a:hlink>
+        <a:srgbClr val="0000FF"/>
+      </a:hlink>
+      <a:folHlink>
+        <a:srgbClr val="800080"/>
+      </a:folHlink>
+    </a:clrScheme>
+    <a:fontScheme name="Office">
+      <a:majorFont>
+        <a:latin typeface="Calibri"/>
+        <a:ea typeface=""/>
+        <a:cs typeface=""/>
+        <a:font script="Jpan" typeface="ＭＳ Ｐゴシック"/>
+        <a:font script="Hang" typeface="맑은 고딕"/>
+        <a:font script="Hans" typeface="宋体"/>
+        <a:font script="Hant" typeface="新細明體"/>
+        <a:font script="Arab" typeface="Times New Roman"/>
+        <a:font script="Hebr" typeface="Times New Roman"/>
+        <a:font script="Thai" typeface="Angsana New"/>
+        <a:font script="Ethi" typeface="Nyala"/>
+        <a:font script="Beng" typeface="Vrinda"/>
+        <a:font script="Gujr" typeface="Shruti"/>
+        <a:font script="Khmr" typeface="MoolBoran"/>
+        <a:font script="Knda" typeface="Tunga"/>
+        <a:font script="Guru" typeface="Raavi"/>
+        <a:font script="Cans" typeface="Euphemia"/>
+        <a:font script="Cher" typeface="Plantagenet Cherokee"/>
+        <a:font script="Yiii" typeface="Microsoft Yi Baiti"/>
+        <a:font script="Tibt" typeface="Microsoft Himalaya"/>
+        <a:font script="Thaa" typeface="MV Boli"/>
+        <a:font script="Deva" typeface="Mangal"/>
+        <a:font script="Telu" typeface="Gautami"/>
+        <a:font script="Taml" typeface="Latha"/>
+        <a:font script="Syrc" typeface="Estrangelo Edessa"/>
+        <a:font script="Orya" typeface="Kalinga"/>
+        <a:font script="Mlym" typeface="Kartika"/>
+        <a:font script="Laoo" typeface="DokChampa"/>
+        <a:font script="Sinh" typeface="Iskoola Pota"/>
+        <a:font script="Mong" typeface="Mongolian Baiti"/>
+        <a:font script="Viet" typeface="Times New Roman"/>
+        <a:font script="Uigh" typeface="Microsoft Uighur"/>
+        <a:font script="Geor" typeface="Sylfaen"/>
+      </a:majorFont>
+      <a:minorFont>
+        <a:latin typeface="Calibri"/>
+        <a:ea typeface=""/>
+        <a:cs typeface=""/>
+        <a:font script="Jpan" typeface="ＭＳ Ｐゴシック"/>
+        <a:font script="Hang" typeface="맑은 고딕"/>
+        <a:font script="Hans" typeface="宋体"/>
+        <a:font script="Hant" typeface="新細明體"/>
+        <a:font script="Arab" typeface="Arial"/>
+        <a:font script="Hebr" typeface="Arial"/>
+        <a:font script="Thai" typeface="Cordia New"/>
+        <a:font script="Ethi" typeface="Nyala"/>
+        <a:font script="Beng" typeface="Vrinda"/>
+        <a:font script="Gujr" typeface="Shruti"/>
+        <a:font script="Khmr" typeface="DaunPenh"/>
+        <a:font script="Knda" typeface="Tunga"/>
+        <a:font script="Guru" typeface="Raavi"/>
+        <a:font script="Cans" typeface="Euphemia"/>
+        <a:font script="Cher" typeface="Plantagenet Cherokee"/>
+        <a:font script="Yiii" typeface="Microsoft Yi Baiti"/>
+        <a:font script="Tibt" typeface="Microsoft Himalaya"/>
+        <a:font script="Thaa" typeface="MV Boli"/>
+        <a:font script="Deva" typeface="Mangal"/>
+        <a:font script="Telu" typeface="Gautami"/>
+        <a:font script="Taml" typeface="Latha"/>
+        <a:font script="Syrc" typeface="Estrangelo Edessa"/>
+        <a:font script="Orya" typeface="Kalinga"/>
+        <a:font script="Mlym" typeface="Kartika"/>
+        <a:font script="Laoo" typeface="DokChampa"/>
+        <a:font script="Sinh" typeface="Iskoola Pota"/>
+        <a:font script="Mong" typeface="Mongolian Baiti"/>
+        <a:font script="Viet" typeface="Arial"/>
+        <a:font script="Uigh" typeface="Microsoft Uighur"/>
+        <a:font script="Geor" typeface="Sylfaen"/>
+      </a:minorFont>
+    </a:fontScheme>
+    <a:fmtScheme name="Office">
+      <a:fillStyleLst>
+        <a:solidFill>
+          <a:schemeClr val="phClr"/>
+        </a:solidFill>
+        <a:gradFill rotWithShape="1">
+          <a:gsLst>
+            <a:gs pos="0">
+              <a:schemeClr val="phClr">
+                <a:tint val="50000"/>
+                <a:satMod val="300000"/>
+              </a:schemeClr>
+            </a:gs>
+            <a:gs pos="35000">
+              <a:schemeClr val="phClr">
+                <a:tint val="37000"/>
+                <a:satMod val="300000"/>
+              </a:schemeClr>
+            </a:gs>
+            <a:gs pos="100000">
+              <a:schemeClr val="phClr">
+                <a:tint val="15000"/>
+                <a:satMod val="350000"/>
+              </a:schemeClr>
+            </a:gs>
+          </a:gsLst>
+          <a:lin ang="16200000" scaled="1"/>
+        </a:gradFill>
+        <a:gradFill rotWithShape="1">
+          <a:gsLst>
+            <a:gs pos="0">
+              <a:schemeClr val="phClr">
+                <a:tint val="100000"/>
+                <a:shade val="100000"/>
+                <a:satMod val="130000"/>
+              </a:schemeClr>
+            </a:gs>
+            <a:gs pos="100000">
+              <a:schemeClr val="phClr">
+                <a:tint val="50000"/>
+                <a:shade val="100000"/>
+                <a:satMod val="350000"/>
+              </a:schemeClr>
+            </a:gs>
+          </a:gsLst>
+          <a:lin ang="16200000" scaled="0"/>
+        </a:gradFill>
+      </a:fillStyleLst>
+      <a:lnStyleLst>
+        <a:ln w="9525" cap="flat" cmpd="sng" algn="ctr">
+          <a:solidFill>
+            <a:schemeClr val="phClr">
+              <a:shade val="95000"/>
+              <a:satMod val="105000"/>
+            </a:schemeClr>
+          </a:solidFill>
+          <a:prstDash val="solid"/>
+        </a:ln>
+        <a:ln w="25400" cap="flat" cmpd="sng" algn="ctr">
+          <a:solidFill>
+            <a:schemeClr val="phClr"/>
+          </a:solidFill>
+          <a:prstDash val="solid"/>
+        </a:ln>
+        <a:ln w="38100" cap="flat" cmpd="sng" algn="ctr">
+          <a:solidFill>
+            <a:schemeClr val="phClr"/>
+          </a:solidFill>
+          <a:prstDash val="solid"/>
+        </a:ln>
+      </a:lnStyleLst>
+      <a:effectStyleLst>
+        <a:effectStyle>
+          <a:effectLst>
+            <a:outerShdw blurRad="40000" dist="20000" dir="5400000" rotWithShape="0">
+              <a:srgbClr val="000000">
+                <a:alpha val="38000"/>
+              </a:srgbClr>
+            </a:outerShdw>
+          </a:effectLst>
+        </a:effectStyle>
+        <a:effectStyle>
+          <a:effectLst>
+            <a:outerShdw blurRad="40000" dist="23000" dir="5400000" rotWithShape="0">
+              <a:srgbClr val="000000">
+                <a:alpha val="35000"/>
+              </a:srgbClr>
+            </a:outerShdw>
+          </a:effectLst>
+        </a:effectStyle>
+        <a:effectStyle>
+          <a:effectLst>
+            <a:outerShdw blurRad="40000" dist="23000" dir="5400000" rotWithShape="0">
+              <a:srgbClr val="000000">
+                <a:alpha val="35000"/>
+              </a:srgbClr>
+            </a:outerShdw>
+          </a:effectLst>
+          <a:scene3d>
+            <a:camera prst="orthographicFront">
+              <a:rot lat="0" lon="0" rev="0"/>
+            </a:camera>
+            <a:lightRig rig="threePt" dir="t">
+              <a:rot lat="0" lon="0" rev="1200000"/>
+            </a:lightRig>
+          </a:scene3d>
+          <a:sp3d>
+            <a:bevelT w="63500" h="25400"/>
+          </a:sp3d>
+        </a:effectStyle>
+      </a:effectStyleLst>
+      <a:bgFillStyleLst>
+        <a:solidFill>
+          <a:schemeClr val="phClr"/>
+        </a:solidFill>
+        <a:gradFill rotWithShape="1">
+          <a:gsLst>
+            <a:gs pos="0">
+              <a:schemeClr val="phClr">
+                <a:tint val="40000"/>
+                <a:satMod val="350000"/>
+              </a:schemeClr>
+            </a:gs>
+            <a:gs pos="40000">
+              <a:schemeClr val="phClr">
+                <a:tint val="45000"/>
+                <a:shade val="99000"/>
+                <a:satMod val="350000"/>
+              </a:schemeClr>
+            </a:gs>
+            <a:gs pos="100000">
+              <a:schemeClr val="phClr">
+                <a:shade val="20000"/>
+                <a:satMod val="255000"/>
+              </a:schemeClr>
+            </a:gs>
+          </a:gsLst>
+          <a:path path="circle">
+            <a:fillToRect l="50000" t="-80000" r="50000" b="180000"/>
+          </a:path>
+        </a:gradFill>
+        <a:gradFill rotWithShape="1">
+          <a:gsLst>
+            <a:gs pos="0">
+              <a:schemeClr val="phClr">
+                <a:tint val="80000"/>
+                <a:satMod val="300000"/>
+              </a:schemeClr>
+            </a:gs>
+            <a:gs pos="100000">
+              <a:schemeClr val="phClr">
+                <a:shade val="30000"/>
+                <a:satMod val="200000"/>
+              </a:schemeClr>
+            </a:gs>
+          </a:gsLst>
+          <a:path path="circle">
+            <a:fillToRect l="50000" t="50000" r="50000" b="50000"/>
+          </a:path>
+        </a:gradFill>
+      </a:bgFillStyleLst>
+    </a:fmtScheme>
+  </a:themeElements>
+  <a:objectDefaults>
+    <a:spDef>
+      <a:spPr/>
+      <a:bodyPr/>
+      <a:lstStyle/>
+      <a:style>
+        <a:lnRef idx="1">
+          <a:schemeClr val="accent1"/>
+        </a:lnRef>
+        <a:fillRef idx="3">
+          <a:schemeClr val="accent1"/>
+        </a:fillRef>
+        <a:effectRef idx="2">
+          <a:schemeClr val="accent1"/>
+        </a:effectRef>
+        <a:fontRef idx="minor">
+          <a:schemeClr val="lt1"/>
+        </a:fontRef>
+      </a:style>
+    </a:spDef>
+    <a:lnDef>
+      <a:spPr/>
+      <a:bodyPr/>
+      <a:lstStyle/>
+      <a:style>
+        <a:lnRef idx="2">
+          <a:schemeClr val="accent1"/>
+        </a:lnRef>
+        <a:fillRef idx="0">
+          <a:schemeClr val="accent1"/>
+        </a:fillRef>
+        <a:effectRef idx="1">
+          <a:schemeClr val="accent1"/>
+        </a:effectRef>
+        <a:fontRef idx="minor">
+          <a:schemeClr val="tx1"/>
+        </a:fontRef>
+      </a:style>
+    </a:lnDef>
+  </a:objectDefaults>
+  <a:extraClrSchemeLst/>
+</a:theme>
 </file>
--- a/course/modules/M01/L004/M01-L004-canva-deck.pptx
+++ b/course/modules/M01/L004/M01-L004-canva-deck.pptx
@@ -4013,7 +4013,7 @@
         <p:spPr>
           <a:xfrm>
             <a:off x="1078992" y="4553712"/>
-            <a:ext cx="6568135" cy="274320"/>
+            <a:ext cx="6568135" cy="475488"/>
           </a:xfrm>
           <a:prstGeom prst="rect">
             <a:avLst/>
@@ -4049,7 +4049,7 @@
         </p:nvSpPr>
         <p:spPr>
           <a:xfrm>
-            <a:off x="932688" y="4956048"/>
+            <a:off x="932688" y="5175504"/>
             <a:ext cx="82296" cy="82296"/>
           </a:xfrm>
           <a:prstGeom prst="ellipse">
@@ -4092,8 +4092,8 @@
         </p:nvSpPr>
         <p:spPr>
           <a:xfrm>
-            <a:off x="1078992" y="4864608"/>
-            <a:ext cx="6568135" cy="274320"/>
+            <a:off x="1078992" y="5084064"/>
+            <a:ext cx="6568135" cy="475488"/>
           </a:xfrm>
           <a:prstGeom prst="rect">
             <a:avLst/>
@@ -7166,7 +7166,7 @@
         <p:spPr>
           <a:xfrm>
             <a:off x="1078992" y="5925312"/>
-            <a:ext cx="9555480" cy="274320"/>
+            <a:ext cx="9555480" cy="475488"/>
           </a:xfrm>
           <a:prstGeom prst="rect">
             <a:avLst/>
@@ -10368,7 +10368,7 @@
         </p:nvSpPr>
         <p:spPr>
           <a:xfrm>
-            <a:off x="932688" y="2258568"/>
+            <a:off x="932688" y="2276856"/>
             <a:ext cx="82296" cy="82296"/>
           </a:xfrm>
           <a:prstGeom prst="ellipse">
@@ -10411,7 +10411,7 @@
         </p:nvSpPr>
         <p:spPr>
           <a:xfrm>
-            <a:off x="1078992" y="2167128"/>
+            <a:off x="1078992" y="2185416"/>
             <a:ext cx="6568135" cy="274320"/>
           </a:xfrm>
           <a:prstGeom prst="rect">
@@ -10448,7 +10448,7 @@
         </p:nvSpPr>
         <p:spPr>
           <a:xfrm>
-            <a:off x="932688" y="2569464"/>
+            <a:off x="932688" y="2606040"/>
             <a:ext cx="82296" cy="82296"/>
           </a:xfrm>
           <a:prstGeom prst="ellipse">
@@ -10491,7 +10491,7 @@
         </p:nvSpPr>
         <p:spPr>
           <a:xfrm>
-            <a:off x="1078992" y="2478024"/>
+            <a:off x="1078992" y="2514600"/>
             <a:ext cx="6568135" cy="274320"/>
           </a:xfrm>
           <a:prstGeom prst="rect">
@@ -10561,7 +10561,7 @@
         </p:nvSpPr>
         <p:spPr>
           <a:xfrm>
-            <a:off x="932688" y="2880360"/>
+            <a:off x="932688" y="2935224"/>
             <a:ext cx="82296" cy="82296"/>
           </a:xfrm>
           <a:prstGeom prst="ellipse">
@@ -10604,7 +10604,7 @@
         </p:nvSpPr>
         <p:spPr>
           <a:xfrm>
-            <a:off x="1078992" y="2788920"/>
+            <a:off x="1078992" y="2843784"/>
             <a:ext cx="6568135" cy="274320"/>
           </a:xfrm>
           <a:prstGeom prst="rect">
@@ -10641,7 +10641,7 @@
         </p:nvSpPr>
         <p:spPr>
           <a:xfrm>
-            <a:off x="932688" y="3191256"/>
+            <a:off x="932688" y="3264408"/>
             <a:ext cx="82296" cy="82296"/>
           </a:xfrm>
           <a:prstGeom prst="ellipse">
@@ -10684,7 +10684,7 @@
         </p:nvSpPr>
         <p:spPr>
           <a:xfrm>
-            <a:off x="1078992" y="3099816"/>
+            <a:off x="1078992" y="3172968"/>
             <a:ext cx="6568135" cy="274320"/>
           </a:xfrm>
           <a:prstGeom prst="rect">
@@ -11163,7 +11163,7 @@
         <p:spPr>
           <a:xfrm>
             <a:off x="1078992" y="2039112"/>
-            <a:ext cx="6568135" cy="274320"/>
+            <a:ext cx="6568135" cy="676656"/>
           </a:xfrm>
           <a:prstGeom prst="rect">
             <a:avLst/>
@@ -11199,7 +11199,7 @@
         </p:nvSpPr>
         <p:spPr>
           <a:xfrm>
-            <a:off x="932688" y="2441448"/>
+            <a:off x="932688" y="2862072"/>
             <a:ext cx="82296" cy="82296"/>
           </a:xfrm>
           <a:prstGeom prst="ellipse">
@@ -11242,7 +11242,7 @@
         </p:nvSpPr>
         <p:spPr>
           <a:xfrm>
-            <a:off x="1078992" y="2350008"/>
+            <a:off x="1078992" y="2770632"/>
             <a:ext cx="6568135" cy="274320"/>
           </a:xfrm>
           <a:prstGeom prst="rect">

--- a/course/modules/M01/L004/M01-L004-canva-deck.pptx
+++ b/course/modules/M01/L004/M01-L004-canva-deck.pptx
@@ -5027,7 +5027,7 @@
         <p:spPr>
           <a:xfrm>
             <a:off x="731520" y="1325880"/>
-            <a:ext cx="7071055" cy="685800"/>
+            <a:ext cx="7071055" cy="804672"/>
           </a:xfrm>
           <a:prstGeom prst="roundRect">
             <a:avLst/>
@@ -5068,7 +5068,7 @@
         <p:spPr>
           <a:xfrm>
             <a:off x="868680" y="1435608"/>
-            <a:ext cx="73152" cy="411480"/>
+            <a:ext cx="73152" cy="548640"/>
           </a:xfrm>
           <a:prstGeom prst="rect">
             <a:avLst/>
@@ -5111,7 +5111,7 @@
         <p:spPr>
           <a:xfrm>
             <a:off x="1078992" y="1399032"/>
-            <a:ext cx="6613855" cy="320040"/>
+            <a:ext cx="6613855" cy="228600"/>
           </a:xfrm>
           <a:prstGeom prst="rect">
             <a:avLst/>
@@ -5126,7 +5126,7 @@
           <a:p>
             <a:pPr algn="l"/>
             <a:r>
-              <a:rPr sz="2600" b="1" i="0" lang="th-TH" altLang="en-US">
+              <a:rPr sz="1700" b="0" i="0" lang="th-TH" altLang="en-US">
                 <a:solidFill>
                   <a:srgbClr val="24333D"/>
                 </a:solidFill>
@@ -5135,17 +5135,6 @@
                 <a:cs typeface="Sarabun"/>
               </a:rPr>
               <a:t>ศูนย์</a:t>
-            </a:r>
-            <a:r>
-              <a:rPr sz="1700" b="0" i="1" lang="en-US" altLang="en-US">
-                <a:solidFill>
-                  <a:srgbClr val="566873"/>
-                </a:solidFill>
-                <a:latin typeface="Sarabun"/>
-                <a:ea typeface="Sarabun"/>
-                <a:cs typeface="Sarabun"/>
-              </a:rPr>
-              <a:t> (sǔun)</a:t>
             </a:r>
           </a:p>
         </p:txBody>
@@ -5158,8 +5147,8 @@
         </p:nvSpPr>
         <p:spPr>
           <a:xfrm>
-            <a:off x="1078992" y="1709928"/>
-            <a:ext cx="6613855" cy="228600"/>
+            <a:off x="1078992" y="1627632"/>
+            <a:ext cx="6613855" cy="201168"/>
           </a:xfrm>
           <a:prstGeom prst="rect">
             <a:avLst/>
@@ -5174,7 +5163,44 @@
           <a:p>
             <a:pPr algn="l"/>
             <a:r>
-              <a:rPr sz="1300" b="0" i="0" lang="en-US" altLang="en-US">
+              <a:rPr sz="1700" b="0" i="1" lang="en-US" altLang="en-US">
+                <a:solidFill>
+                  <a:srgbClr val="566873"/>
+                </a:solidFill>
+                <a:latin typeface="Sarabun"/>
+                <a:ea typeface="Sarabun"/>
+                <a:cs typeface="Sarabun"/>
+              </a:rPr>
+              <a:t>sǔun</a:t>
+            </a:r>
+          </a:p>
+        </p:txBody>
+      </p:sp>
+      <p:sp>
+        <p:nvSpPr>
+          <p:cNvPr id="10" name="TextBox 9"/>
+          <p:cNvSpPr txBox="1"/>
+          <p:nvPr/>
+        </p:nvSpPr>
+        <p:spPr>
+          <a:xfrm>
+            <a:off x="1078992" y="1828800"/>
+            <a:ext cx="6613855" cy="201168"/>
+          </a:xfrm>
+          <a:prstGeom prst="rect">
+            <a:avLst/>
+          </a:prstGeom>
+          <a:noFill/>
+        </p:spPr>
+        <p:txBody>
+          <a:bodyPr wrap="square" anchor="t">
+            <a:spAutoFit/>
+          </a:bodyPr>
+          <a:lstStyle/>
+          <a:p>
+            <a:pPr algn="l"/>
+            <a:r>
+              <a:rPr sz="1700" b="0" i="0" lang="en-US" altLang="en-US">
                 <a:solidFill>
                   <a:srgbClr val="82909A"/>
                 </a:solidFill>
@@ -5189,14 +5215,14 @@
       </p:sp>
       <p:sp>
         <p:nvSpPr>
-          <p:cNvPr id="10" name="Rounded Rectangle 9"/>
+          <p:cNvPr id="11" name="Rounded Rectangle 10"/>
           <p:cNvSpPr/>
           <p:nvPr/>
         </p:nvSpPr>
         <p:spPr>
           <a:xfrm>
             <a:off x="731520" y="2130552"/>
-            <a:ext cx="7071055" cy="685800"/>
+            <a:ext cx="7071055" cy="804672"/>
           </a:xfrm>
           <a:prstGeom prst="roundRect">
             <a:avLst/>
@@ -5230,14 +5256,14 @@
       </p:sp>
       <p:sp>
         <p:nvSpPr>
-          <p:cNvPr id="11" name="Rectangle 10"/>
+          <p:cNvPr id="12" name="Rectangle 11"/>
           <p:cNvSpPr/>
           <p:nvPr/>
         </p:nvSpPr>
         <p:spPr>
           <a:xfrm>
             <a:off x="868680" y="2240280"/>
-            <a:ext cx="73152" cy="411480"/>
+            <a:ext cx="73152" cy="548640"/>
           </a:xfrm>
           <a:prstGeom prst="rect">
             <a:avLst/>
@@ -5273,14 +5299,14 @@
       </p:sp>
       <p:sp>
         <p:nvSpPr>
-          <p:cNvPr id="12" name="TextBox 11"/>
+          <p:cNvPr id="13" name="TextBox 12"/>
           <p:cNvSpPr txBox="1"/>
           <p:nvPr/>
         </p:nvSpPr>
         <p:spPr>
           <a:xfrm>
             <a:off x="1078992" y="2203704"/>
-            <a:ext cx="6613855" cy="320040"/>
+            <a:ext cx="6613855" cy="228600"/>
           </a:xfrm>
           <a:prstGeom prst="rect">
             <a:avLst/>
@@ -5295,7 +5321,7 @@
           <a:p>
             <a:pPr algn="l"/>
             <a:r>
-              <a:rPr sz="2600" b="1" i="0" lang="th-TH" altLang="en-US">
+              <a:rPr sz="1700" b="0" i="0" lang="th-TH" altLang="en-US">
                 <a:solidFill>
                   <a:srgbClr val="24333D"/>
                 </a:solidFill>
@@ -5305,30 +5331,19 @@
               </a:rPr>
               <a:t>หนึ่ง</a:t>
             </a:r>
-            <a:r>
-              <a:rPr sz="1700" b="0" i="1" lang="en-US" altLang="en-US">
-                <a:solidFill>
-                  <a:srgbClr val="566873"/>
-                </a:solidFill>
-                <a:latin typeface="Sarabun"/>
-                <a:ea typeface="Sarabun"/>
-                <a:cs typeface="Sarabun"/>
-              </a:rPr>
-              <a:t> (nùeng)</a:t>
-            </a:r>
-          </a:p>
-        </p:txBody>
-      </p:sp>
-      <p:sp>
-        <p:nvSpPr>
-          <p:cNvPr id="13" name="TextBox 12"/>
+          </a:p>
+        </p:txBody>
+      </p:sp>
+      <p:sp>
+        <p:nvSpPr>
+          <p:cNvPr id="14" name="TextBox 13"/>
           <p:cNvSpPr txBox="1"/>
           <p:nvPr/>
         </p:nvSpPr>
         <p:spPr>
           <a:xfrm>
-            <a:off x="1078992" y="2514600"/>
-            <a:ext cx="6613855" cy="228600"/>
+            <a:off x="1078992" y="2432304"/>
+            <a:ext cx="6613855" cy="201168"/>
           </a:xfrm>
           <a:prstGeom prst="rect">
             <a:avLst/>
@@ -5343,7 +5358,44 @@
           <a:p>
             <a:pPr algn="l"/>
             <a:r>
-              <a:rPr sz="1300" b="0" i="0" lang="en-US" altLang="en-US">
+              <a:rPr sz="1700" b="0" i="1" lang="en-US" altLang="en-US">
+                <a:solidFill>
+                  <a:srgbClr val="566873"/>
+                </a:solidFill>
+                <a:latin typeface="Sarabun"/>
+                <a:ea typeface="Sarabun"/>
+                <a:cs typeface="Sarabun"/>
+              </a:rPr>
+              <a:t>nùeng</a:t>
+            </a:r>
+          </a:p>
+        </p:txBody>
+      </p:sp>
+      <p:sp>
+        <p:nvSpPr>
+          <p:cNvPr id="15" name="TextBox 14"/>
+          <p:cNvSpPr txBox="1"/>
+          <p:nvPr/>
+        </p:nvSpPr>
+        <p:spPr>
+          <a:xfrm>
+            <a:off x="1078992" y="2633472"/>
+            <a:ext cx="6613855" cy="201168"/>
+          </a:xfrm>
+          <a:prstGeom prst="rect">
+            <a:avLst/>
+          </a:prstGeom>
+          <a:noFill/>
+        </p:spPr>
+        <p:txBody>
+          <a:bodyPr wrap="square" anchor="t">
+            <a:spAutoFit/>
+          </a:bodyPr>
+          <a:lstStyle/>
+          <a:p>
+            <a:pPr algn="l"/>
+            <a:r>
+              <a:rPr sz="1700" b="0" i="0" lang="en-US" altLang="en-US">
                 <a:solidFill>
                   <a:srgbClr val="82909A"/>
                 </a:solidFill>
@@ -5358,14 +5410,14 @@
       </p:sp>
       <p:sp>
         <p:nvSpPr>
-          <p:cNvPr id="14" name="Rounded Rectangle 13"/>
+          <p:cNvPr id="16" name="Rounded Rectangle 15"/>
           <p:cNvSpPr/>
           <p:nvPr/>
         </p:nvSpPr>
         <p:spPr>
           <a:xfrm>
             <a:off x="731520" y="2935224"/>
-            <a:ext cx="7071055" cy="685800"/>
+            <a:ext cx="7071055" cy="804672"/>
           </a:xfrm>
           <a:prstGeom prst="roundRect">
             <a:avLst/>
@@ -5399,14 +5451,14 @@
       </p:sp>
       <p:sp>
         <p:nvSpPr>
-          <p:cNvPr id="15" name="Rectangle 14"/>
+          <p:cNvPr id="17" name="Rectangle 16"/>
           <p:cNvSpPr/>
           <p:nvPr/>
         </p:nvSpPr>
         <p:spPr>
           <a:xfrm>
             <a:off x="868680" y="3044952"/>
-            <a:ext cx="73152" cy="411480"/>
+            <a:ext cx="73152" cy="548640"/>
           </a:xfrm>
           <a:prstGeom prst="rect">
             <a:avLst/>
@@ -5442,14 +5494,14 @@
       </p:sp>
       <p:sp>
         <p:nvSpPr>
-          <p:cNvPr id="16" name="TextBox 15"/>
+          <p:cNvPr id="18" name="TextBox 17"/>
           <p:cNvSpPr txBox="1"/>
           <p:nvPr/>
         </p:nvSpPr>
         <p:spPr>
           <a:xfrm>
             <a:off x="1078992" y="3008376"/>
-            <a:ext cx="6613855" cy="320040"/>
+            <a:ext cx="6613855" cy="228600"/>
           </a:xfrm>
           <a:prstGeom prst="rect">
             <a:avLst/>
@@ -5464,7 +5516,7 @@
           <a:p>
             <a:pPr algn="l"/>
             <a:r>
-              <a:rPr sz="2600" b="1" i="0" lang="th-TH" altLang="en-US">
+              <a:rPr sz="1700" b="0" i="0" lang="th-TH" altLang="en-US">
                 <a:solidFill>
                   <a:srgbClr val="24333D"/>
                 </a:solidFill>
@@ -5474,30 +5526,19 @@
               </a:rPr>
               <a:t>สอง</a:t>
             </a:r>
-            <a:r>
-              <a:rPr sz="1700" b="0" i="1" lang="en-US" altLang="en-US">
-                <a:solidFill>
-                  <a:srgbClr val="566873"/>
-                </a:solidFill>
-                <a:latin typeface="Sarabun"/>
-                <a:ea typeface="Sarabun"/>
-                <a:cs typeface="Sarabun"/>
-              </a:rPr>
-              <a:t> (sǎawng)</a:t>
-            </a:r>
-          </a:p>
-        </p:txBody>
-      </p:sp>
-      <p:sp>
-        <p:nvSpPr>
-          <p:cNvPr id="17" name="TextBox 16"/>
+          </a:p>
+        </p:txBody>
+      </p:sp>
+      <p:sp>
+        <p:nvSpPr>
+          <p:cNvPr id="19" name="TextBox 18"/>
           <p:cNvSpPr txBox="1"/>
           <p:nvPr/>
         </p:nvSpPr>
         <p:spPr>
           <a:xfrm>
-            <a:off x="1078992" y="3319272"/>
-            <a:ext cx="6613855" cy="228600"/>
+            <a:off x="1078992" y="3236976"/>
+            <a:ext cx="6613855" cy="201168"/>
           </a:xfrm>
           <a:prstGeom prst="rect">
             <a:avLst/>
@@ -5512,7 +5553,44 @@
           <a:p>
             <a:pPr algn="l"/>
             <a:r>
-              <a:rPr sz="1300" b="0" i="0" lang="en-US" altLang="en-US">
+              <a:rPr sz="1700" b="0" i="1" lang="en-US" altLang="en-US">
+                <a:solidFill>
+                  <a:srgbClr val="566873"/>
+                </a:solidFill>
+                <a:latin typeface="Sarabun"/>
+                <a:ea typeface="Sarabun"/>
+                <a:cs typeface="Sarabun"/>
+              </a:rPr>
+              <a:t>sǎawng</a:t>
+            </a:r>
+          </a:p>
+        </p:txBody>
+      </p:sp>
+      <p:sp>
+        <p:nvSpPr>
+          <p:cNvPr id="20" name="TextBox 19"/>
+          <p:cNvSpPr txBox="1"/>
+          <p:nvPr/>
+        </p:nvSpPr>
+        <p:spPr>
+          <a:xfrm>
+            <a:off x="1078992" y="3438144"/>
+            <a:ext cx="6613855" cy="201168"/>
+          </a:xfrm>
+          <a:prstGeom prst="rect">
+            <a:avLst/>
+          </a:prstGeom>
+          <a:noFill/>
+        </p:spPr>
+        <p:txBody>
+          <a:bodyPr wrap="square" anchor="t">
+            <a:spAutoFit/>
+          </a:bodyPr>
+          <a:lstStyle/>
+          <a:p>
+            <a:pPr algn="l"/>
+            <a:r>
+              <a:rPr sz="1700" b="0" i="0" lang="en-US" altLang="en-US">
                 <a:solidFill>
                   <a:srgbClr val="82909A"/>
                 </a:solidFill>
@@ -5527,14 +5605,14 @@
       </p:sp>
       <p:sp>
         <p:nvSpPr>
-          <p:cNvPr id="18" name="Rounded Rectangle 17"/>
+          <p:cNvPr id="21" name="Rounded Rectangle 20"/>
           <p:cNvSpPr/>
           <p:nvPr/>
         </p:nvSpPr>
         <p:spPr>
           <a:xfrm>
             <a:off x="731520" y="3739896"/>
-            <a:ext cx="7071055" cy="685800"/>
+            <a:ext cx="7071055" cy="804672"/>
           </a:xfrm>
           <a:prstGeom prst="roundRect">
             <a:avLst/>
@@ -5568,14 +5646,14 @@
       </p:sp>
       <p:sp>
         <p:nvSpPr>
-          <p:cNvPr id="19" name="Rectangle 18"/>
+          <p:cNvPr id="22" name="Rectangle 21"/>
           <p:cNvSpPr/>
           <p:nvPr/>
         </p:nvSpPr>
         <p:spPr>
           <a:xfrm>
             <a:off x="868680" y="3849624"/>
-            <a:ext cx="73152" cy="411480"/>
+            <a:ext cx="73152" cy="548640"/>
           </a:xfrm>
           <a:prstGeom prst="rect">
             <a:avLst/>
@@ -5611,14 +5689,14 @@
       </p:sp>
       <p:sp>
         <p:nvSpPr>
-          <p:cNvPr id="20" name="TextBox 19"/>
+          <p:cNvPr id="23" name="TextBox 22"/>
           <p:cNvSpPr txBox="1"/>
           <p:nvPr/>
         </p:nvSpPr>
         <p:spPr>
           <a:xfrm>
             <a:off x="1078992" y="3813048"/>
-            <a:ext cx="6613855" cy="320040"/>
+            <a:ext cx="6613855" cy="228600"/>
           </a:xfrm>
           <a:prstGeom prst="rect">
             <a:avLst/>
@@ -5633,7 +5711,7 @@
           <a:p>
             <a:pPr algn="l"/>
             <a:r>
-              <a:rPr sz="2600" b="1" i="0" lang="th-TH" altLang="en-US">
+              <a:rPr sz="1700" b="0" i="0" lang="th-TH" altLang="en-US">
                 <a:solidFill>
                   <a:srgbClr val="24333D"/>
                 </a:solidFill>
@@ -5643,30 +5721,19 @@
               </a:rPr>
               <a:t>สาม</a:t>
             </a:r>
-            <a:r>
-              <a:rPr sz="1700" b="0" i="1" lang="en-US" altLang="en-US">
-                <a:solidFill>
-                  <a:srgbClr val="566873"/>
-                </a:solidFill>
-                <a:latin typeface="Sarabun"/>
-                <a:ea typeface="Sarabun"/>
-                <a:cs typeface="Sarabun"/>
-              </a:rPr>
-              <a:t> (sǎam)</a:t>
-            </a:r>
-          </a:p>
-        </p:txBody>
-      </p:sp>
-      <p:sp>
-        <p:nvSpPr>
-          <p:cNvPr id="21" name="TextBox 20"/>
+          </a:p>
+        </p:txBody>
+      </p:sp>
+      <p:sp>
+        <p:nvSpPr>
+          <p:cNvPr id="24" name="TextBox 23"/>
           <p:cNvSpPr txBox="1"/>
           <p:nvPr/>
         </p:nvSpPr>
         <p:spPr>
           <a:xfrm>
-            <a:off x="1078992" y="4123944"/>
-            <a:ext cx="6613855" cy="228600"/>
+            <a:off x="1078992" y="4041648"/>
+            <a:ext cx="6613855" cy="201168"/>
           </a:xfrm>
           <a:prstGeom prst="rect">
             <a:avLst/>
@@ -5681,7 +5748,44 @@
           <a:p>
             <a:pPr algn="l"/>
             <a:r>
-              <a:rPr sz="1300" b="0" i="0" lang="en-US" altLang="en-US">
+              <a:rPr sz="1700" b="0" i="1" lang="en-US" altLang="en-US">
+                <a:solidFill>
+                  <a:srgbClr val="566873"/>
+                </a:solidFill>
+                <a:latin typeface="Sarabun"/>
+                <a:ea typeface="Sarabun"/>
+                <a:cs typeface="Sarabun"/>
+              </a:rPr>
+              <a:t>sǎam</a:t>
+            </a:r>
+          </a:p>
+        </p:txBody>
+      </p:sp>
+      <p:sp>
+        <p:nvSpPr>
+          <p:cNvPr id="25" name="TextBox 24"/>
+          <p:cNvSpPr txBox="1"/>
+          <p:nvPr/>
+        </p:nvSpPr>
+        <p:spPr>
+          <a:xfrm>
+            <a:off x="1078992" y="4242816"/>
+            <a:ext cx="6613855" cy="201168"/>
+          </a:xfrm>
+          <a:prstGeom prst="rect">
+            <a:avLst/>
+          </a:prstGeom>
+          <a:noFill/>
+        </p:spPr>
+        <p:txBody>
+          <a:bodyPr wrap="square" anchor="t">
+            <a:spAutoFit/>
+          </a:bodyPr>
+          <a:lstStyle/>
+          <a:p>
+            <a:pPr algn="l"/>
+            <a:r>
+              <a:rPr sz="1700" b="0" i="0" lang="en-US" altLang="en-US">
                 <a:solidFill>
                   <a:srgbClr val="82909A"/>
                 </a:solidFill>
@@ -5696,14 +5800,14 @@
       </p:sp>
       <p:sp>
         <p:nvSpPr>
-          <p:cNvPr id="22" name="Rounded Rectangle 21"/>
+          <p:cNvPr id="26" name="Rounded Rectangle 25"/>
           <p:cNvSpPr/>
           <p:nvPr/>
         </p:nvSpPr>
         <p:spPr>
           <a:xfrm>
             <a:off x="731520" y="4544568"/>
-            <a:ext cx="7071055" cy="685800"/>
+            <a:ext cx="7071055" cy="804672"/>
           </a:xfrm>
           <a:prstGeom prst="roundRect">
             <a:avLst/>
@@ -5737,14 +5841,14 @@
       </p:sp>
       <p:sp>
         <p:nvSpPr>
-          <p:cNvPr id="23" name="Rectangle 22"/>
+          <p:cNvPr id="27" name="Rectangle 26"/>
           <p:cNvSpPr/>
           <p:nvPr/>
         </p:nvSpPr>
         <p:spPr>
           <a:xfrm>
             <a:off x="868680" y="4654296"/>
-            <a:ext cx="73152" cy="411480"/>
+            <a:ext cx="73152" cy="548640"/>
           </a:xfrm>
           <a:prstGeom prst="rect">
             <a:avLst/>
@@ -5780,14 +5884,14 @@
       </p:sp>
       <p:sp>
         <p:nvSpPr>
-          <p:cNvPr id="24" name="TextBox 23"/>
+          <p:cNvPr id="28" name="TextBox 27"/>
           <p:cNvSpPr txBox="1"/>
           <p:nvPr/>
         </p:nvSpPr>
         <p:spPr>
           <a:xfrm>
             <a:off x="1078992" y="4617720"/>
-            <a:ext cx="6613855" cy="320040"/>
+            <a:ext cx="6613855" cy="228600"/>
           </a:xfrm>
           <a:prstGeom prst="rect">
             <a:avLst/>
@@ -5802,7 +5906,7 @@
           <a:p>
             <a:pPr algn="l"/>
             <a:r>
-              <a:rPr sz="2600" b="1" i="0" lang="th-TH" altLang="en-US">
+              <a:rPr sz="1700" b="0" i="0" lang="th-TH" altLang="en-US">
                 <a:solidFill>
                   <a:srgbClr val="24333D"/>
                 </a:solidFill>
@@ -5812,30 +5916,19 @@
               </a:rPr>
               <a:t>สี่</a:t>
             </a:r>
-            <a:r>
-              <a:rPr sz="1700" b="0" i="1" lang="en-US" altLang="en-US">
-                <a:solidFill>
-                  <a:srgbClr val="566873"/>
-                </a:solidFill>
-                <a:latin typeface="Sarabun"/>
-                <a:ea typeface="Sarabun"/>
-                <a:cs typeface="Sarabun"/>
-              </a:rPr>
-              <a:t> (sìi)</a:t>
-            </a:r>
-          </a:p>
-        </p:txBody>
-      </p:sp>
-      <p:sp>
-        <p:nvSpPr>
-          <p:cNvPr id="25" name="TextBox 24"/>
+          </a:p>
+        </p:txBody>
+      </p:sp>
+      <p:sp>
+        <p:nvSpPr>
+          <p:cNvPr id="29" name="TextBox 28"/>
           <p:cNvSpPr txBox="1"/>
           <p:nvPr/>
         </p:nvSpPr>
         <p:spPr>
           <a:xfrm>
-            <a:off x="1078992" y="4928616"/>
-            <a:ext cx="6613855" cy="228600"/>
+            <a:off x="1078992" y="4846320"/>
+            <a:ext cx="6613855" cy="201168"/>
           </a:xfrm>
           <a:prstGeom prst="rect">
             <a:avLst/>
@@ -5850,7 +5943,44 @@
           <a:p>
             <a:pPr algn="l"/>
             <a:r>
-              <a:rPr sz="1300" b="0" i="0" lang="en-US" altLang="en-US">
+              <a:rPr sz="1700" b="0" i="1" lang="en-US" altLang="en-US">
+                <a:solidFill>
+                  <a:srgbClr val="566873"/>
+                </a:solidFill>
+                <a:latin typeface="Sarabun"/>
+                <a:ea typeface="Sarabun"/>
+                <a:cs typeface="Sarabun"/>
+              </a:rPr>
+              <a:t>sìi</a:t>
+            </a:r>
+          </a:p>
+        </p:txBody>
+      </p:sp>
+      <p:sp>
+        <p:nvSpPr>
+          <p:cNvPr id="30" name="TextBox 29"/>
+          <p:cNvSpPr txBox="1"/>
+          <p:nvPr/>
+        </p:nvSpPr>
+        <p:spPr>
+          <a:xfrm>
+            <a:off x="1078992" y="5047488"/>
+            <a:ext cx="6613855" cy="201168"/>
+          </a:xfrm>
+          <a:prstGeom prst="rect">
+            <a:avLst/>
+          </a:prstGeom>
+          <a:noFill/>
+        </p:spPr>
+        <p:txBody>
+          <a:bodyPr wrap="square" anchor="t">
+            <a:spAutoFit/>
+          </a:bodyPr>
+          <a:lstStyle/>
+          <a:p>
+            <a:pPr algn="l"/>
+            <a:r>
+              <a:rPr sz="1700" b="0" i="0" lang="en-US" altLang="en-US">
                 <a:solidFill>
                   <a:srgbClr val="82909A"/>
                 </a:solidFill>
@@ -5865,14 +5995,14 @@
       </p:sp>
       <p:sp>
         <p:nvSpPr>
-          <p:cNvPr id="26" name="Rounded Rectangle 25"/>
+          <p:cNvPr id="31" name="Rounded Rectangle 30"/>
           <p:cNvSpPr/>
           <p:nvPr/>
         </p:nvSpPr>
         <p:spPr>
           <a:xfrm>
             <a:off x="731520" y="5349240"/>
-            <a:ext cx="7071055" cy="685800"/>
+            <a:ext cx="7071055" cy="804672"/>
           </a:xfrm>
           <a:prstGeom prst="roundRect">
             <a:avLst/>
@@ -5906,14 +6036,14 @@
       </p:sp>
       <p:sp>
         <p:nvSpPr>
-          <p:cNvPr id="27" name="Rectangle 26"/>
+          <p:cNvPr id="32" name="Rectangle 31"/>
           <p:cNvSpPr/>
           <p:nvPr/>
         </p:nvSpPr>
         <p:spPr>
           <a:xfrm>
             <a:off x="868680" y="5458968"/>
-            <a:ext cx="73152" cy="411480"/>
+            <a:ext cx="73152" cy="548640"/>
           </a:xfrm>
           <a:prstGeom prst="rect">
             <a:avLst/>
@@ -5949,14 +6079,14 @@
       </p:sp>
       <p:sp>
         <p:nvSpPr>
-          <p:cNvPr id="28" name="TextBox 27"/>
+          <p:cNvPr id="33" name="TextBox 32"/>
           <p:cNvSpPr txBox="1"/>
           <p:nvPr/>
         </p:nvSpPr>
         <p:spPr>
           <a:xfrm>
             <a:off x="1078992" y="5422392"/>
-            <a:ext cx="6613855" cy="320040"/>
+            <a:ext cx="6613855" cy="228600"/>
           </a:xfrm>
           <a:prstGeom prst="rect">
             <a:avLst/>
@@ -5971,7 +6101,7 @@
           <a:p>
             <a:pPr algn="l"/>
             <a:r>
-              <a:rPr sz="2600" b="1" i="0" lang="th-TH" altLang="en-US">
+              <a:rPr sz="1700" b="0" i="0" lang="th-TH" altLang="en-US">
                 <a:solidFill>
                   <a:srgbClr val="24333D"/>
                 </a:solidFill>
@@ -5981,30 +6111,19 @@
               </a:rPr>
               <a:t>ห้า</a:t>
             </a:r>
-            <a:r>
-              <a:rPr sz="1700" b="0" i="1" lang="en-US" altLang="en-US">
-                <a:solidFill>
-                  <a:srgbClr val="566873"/>
-                </a:solidFill>
-                <a:latin typeface="Sarabun"/>
-                <a:ea typeface="Sarabun"/>
-                <a:cs typeface="Sarabun"/>
-              </a:rPr>
-              <a:t> (hâa)</a:t>
-            </a:r>
-          </a:p>
-        </p:txBody>
-      </p:sp>
-      <p:sp>
-        <p:nvSpPr>
-          <p:cNvPr id="29" name="TextBox 28"/>
+          </a:p>
+        </p:txBody>
+      </p:sp>
+      <p:sp>
+        <p:nvSpPr>
+          <p:cNvPr id="34" name="TextBox 33"/>
           <p:cNvSpPr txBox="1"/>
           <p:nvPr/>
         </p:nvSpPr>
         <p:spPr>
           <a:xfrm>
-            <a:off x="1078992" y="5733288"/>
-            <a:ext cx="6613855" cy="228600"/>
+            <a:off x="1078992" y="5650992"/>
+            <a:ext cx="6613855" cy="201168"/>
           </a:xfrm>
           <a:prstGeom prst="rect">
             <a:avLst/>
@@ -6019,7 +6138,44 @@
           <a:p>
             <a:pPr algn="l"/>
             <a:r>
-              <a:rPr sz="1300" b="0" i="0" lang="en-US" altLang="en-US">
+              <a:rPr sz="1700" b="0" i="1" lang="en-US" altLang="en-US">
+                <a:solidFill>
+                  <a:srgbClr val="566873"/>
+                </a:solidFill>
+                <a:latin typeface="Sarabun"/>
+                <a:ea typeface="Sarabun"/>
+                <a:cs typeface="Sarabun"/>
+              </a:rPr>
+              <a:t>hâa</a:t>
+            </a:r>
+          </a:p>
+        </p:txBody>
+      </p:sp>
+      <p:sp>
+        <p:nvSpPr>
+          <p:cNvPr id="35" name="TextBox 34"/>
+          <p:cNvSpPr txBox="1"/>
+          <p:nvPr/>
+        </p:nvSpPr>
+        <p:spPr>
+          <a:xfrm>
+            <a:off x="1078992" y="5852160"/>
+            <a:ext cx="6613855" cy="201168"/>
+          </a:xfrm>
+          <a:prstGeom prst="rect">
+            <a:avLst/>
+          </a:prstGeom>
+          <a:noFill/>
+        </p:spPr>
+        <p:txBody>
+          <a:bodyPr wrap="square" anchor="t">
+            <a:spAutoFit/>
+          </a:bodyPr>
+          <a:lstStyle/>
+          <a:p>
+            <a:pPr algn="l"/>
+            <a:r>
+              <a:rPr sz="1700" b="0" i="0" lang="en-US" altLang="en-US">
                 <a:solidFill>
                   <a:srgbClr val="82909A"/>
                 </a:solidFill>
@@ -6241,7 +6397,7 @@
         <p:spPr>
           <a:xfrm>
             <a:off x="731520" y="1325880"/>
-            <a:ext cx="7071055" cy="685800"/>
+            <a:ext cx="7071055" cy="804672"/>
           </a:xfrm>
           <a:prstGeom prst="roundRect">
             <a:avLst/>
@@ -6282,7 +6438,7 @@
         <p:spPr>
           <a:xfrm>
             <a:off x="868680" y="1435608"/>
-            <a:ext cx="73152" cy="411480"/>
+            <a:ext cx="73152" cy="548640"/>
           </a:xfrm>
           <a:prstGeom prst="rect">
             <a:avLst/>
@@ -6325,7 +6481,7 @@
         <p:spPr>
           <a:xfrm>
             <a:off x="1078992" y="1399032"/>
-            <a:ext cx="6613855" cy="320040"/>
+            <a:ext cx="6613855" cy="228600"/>
           </a:xfrm>
           <a:prstGeom prst="rect">
             <a:avLst/>
@@ -6340,7 +6496,7 @@
           <a:p>
             <a:pPr algn="l"/>
             <a:r>
-              <a:rPr sz="2600" b="1" i="0" lang="th-TH" altLang="en-US">
+              <a:rPr sz="1700" b="0" i="0" lang="th-TH" altLang="en-US">
                 <a:solidFill>
                   <a:srgbClr val="24333D"/>
                 </a:solidFill>
@@ -6349,17 +6505,6 @@
                 <a:cs typeface="Sarabun"/>
               </a:rPr>
               <a:t>หก</a:t>
-            </a:r>
-            <a:r>
-              <a:rPr sz="1700" b="0" i="1" lang="en-US" altLang="en-US">
-                <a:solidFill>
-                  <a:srgbClr val="566873"/>
-                </a:solidFill>
-                <a:latin typeface="Sarabun"/>
-                <a:ea typeface="Sarabun"/>
-                <a:cs typeface="Sarabun"/>
-              </a:rPr>
-              <a:t> (hòk)</a:t>
             </a:r>
           </a:p>
         </p:txBody>
@@ -6372,8 +6517,8 @@
         </p:nvSpPr>
         <p:spPr>
           <a:xfrm>
-            <a:off x="1078992" y="1709928"/>
-            <a:ext cx="6613855" cy="228600"/>
+            <a:off x="1078992" y="1627632"/>
+            <a:ext cx="6613855" cy="201168"/>
           </a:xfrm>
           <a:prstGeom prst="rect">
             <a:avLst/>
@@ -6388,7 +6533,44 @@
           <a:p>
             <a:pPr algn="l"/>
             <a:r>
-              <a:rPr sz="1300" b="0" i="0" lang="en-US" altLang="en-US">
+              <a:rPr sz="1700" b="0" i="1" lang="en-US" altLang="en-US">
+                <a:solidFill>
+                  <a:srgbClr val="566873"/>
+                </a:solidFill>
+                <a:latin typeface="Sarabun"/>
+                <a:ea typeface="Sarabun"/>
+                <a:cs typeface="Sarabun"/>
+              </a:rPr>
+              <a:t>hòk</a:t>
+            </a:r>
+          </a:p>
+        </p:txBody>
+      </p:sp>
+      <p:sp>
+        <p:nvSpPr>
+          <p:cNvPr id="10" name="TextBox 9"/>
+          <p:cNvSpPr txBox="1"/>
+          <p:nvPr/>
+        </p:nvSpPr>
+        <p:spPr>
+          <a:xfrm>
+            <a:off x="1078992" y="1828800"/>
+            <a:ext cx="6613855" cy="201168"/>
+          </a:xfrm>
+          <a:prstGeom prst="rect">
+            <a:avLst/>
+          </a:prstGeom>
+          <a:noFill/>
+        </p:spPr>
+        <p:txBody>
+          <a:bodyPr wrap="square" anchor="t">
+            <a:spAutoFit/>
+          </a:bodyPr>
+          <a:lstStyle/>
+          <a:p>
+            <a:pPr algn="l"/>
+            <a:r>
+              <a:rPr sz="1700" b="0" i="0" lang="en-US" altLang="en-US">
                 <a:solidFill>
                   <a:srgbClr val="82909A"/>
                 </a:solidFill>
@@ -6403,14 +6585,14 @@
       </p:sp>
       <p:sp>
         <p:nvSpPr>
-          <p:cNvPr id="10" name="Rounded Rectangle 9"/>
+          <p:cNvPr id="11" name="Rounded Rectangle 10"/>
           <p:cNvSpPr/>
           <p:nvPr/>
         </p:nvSpPr>
         <p:spPr>
           <a:xfrm>
             <a:off x="731520" y="2130552"/>
-            <a:ext cx="7071055" cy="685800"/>
+            <a:ext cx="7071055" cy="804672"/>
           </a:xfrm>
           <a:prstGeom prst="roundRect">
             <a:avLst/>
@@ -6444,14 +6626,14 @@
       </p:sp>
       <p:sp>
         <p:nvSpPr>
-          <p:cNvPr id="11" name="Rectangle 10"/>
+          <p:cNvPr id="12" name="Rectangle 11"/>
           <p:cNvSpPr/>
           <p:nvPr/>
         </p:nvSpPr>
         <p:spPr>
           <a:xfrm>
             <a:off x="868680" y="2240280"/>
-            <a:ext cx="73152" cy="411480"/>
+            <a:ext cx="73152" cy="548640"/>
           </a:xfrm>
           <a:prstGeom prst="rect">
             <a:avLst/>
@@ -6487,14 +6669,14 @@
       </p:sp>
       <p:sp>
         <p:nvSpPr>
-          <p:cNvPr id="12" name="TextBox 11"/>
+          <p:cNvPr id="13" name="TextBox 12"/>
           <p:cNvSpPr txBox="1"/>
           <p:nvPr/>
         </p:nvSpPr>
         <p:spPr>
           <a:xfrm>
             <a:off x="1078992" y="2203704"/>
-            <a:ext cx="6613855" cy="320040"/>
+            <a:ext cx="6613855" cy="228600"/>
           </a:xfrm>
           <a:prstGeom prst="rect">
             <a:avLst/>
@@ -6509,7 +6691,7 @@
           <a:p>
             <a:pPr algn="l"/>
             <a:r>
-              <a:rPr sz="2600" b="1" i="0" lang="th-TH" altLang="en-US">
+              <a:rPr sz="1700" b="0" i="0" lang="th-TH" altLang="en-US">
                 <a:solidFill>
                   <a:srgbClr val="24333D"/>
                 </a:solidFill>
@@ -6519,30 +6701,19 @@
               </a:rPr>
               <a:t>เจ็ด</a:t>
             </a:r>
-            <a:r>
-              <a:rPr sz="1700" b="0" i="1" lang="en-US" altLang="en-US">
-                <a:solidFill>
-                  <a:srgbClr val="566873"/>
-                </a:solidFill>
-                <a:latin typeface="Sarabun"/>
-                <a:ea typeface="Sarabun"/>
-                <a:cs typeface="Sarabun"/>
-              </a:rPr>
-              <a:t> (jèt)</a:t>
-            </a:r>
-          </a:p>
-        </p:txBody>
-      </p:sp>
-      <p:sp>
-        <p:nvSpPr>
-          <p:cNvPr id="13" name="TextBox 12"/>
+          </a:p>
+        </p:txBody>
+      </p:sp>
+      <p:sp>
+        <p:nvSpPr>
+          <p:cNvPr id="14" name="TextBox 13"/>
           <p:cNvSpPr txBox="1"/>
           <p:nvPr/>
         </p:nvSpPr>
         <p:spPr>
           <a:xfrm>
-            <a:off x="1078992" y="2514600"/>
-            <a:ext cx="6613855" cy="228600"/>
+            <a:off x="1078992" y="2432304"/>
+            <a:ext cx="6613855" cy="201168"/>
           </a:xfrm>
           <a:prstGeom prst="rect">
             <a:avLst/>
@@ -6557,7 +6728,44 @@
           <a:p>
             <a:pPr algn="l"/>
             <a:r>
-              <a:rPr sz="1300" b="0" i="0" lang="en-US" altLang="en-US">
+              <a:rPr sz="1700" b="0" i="1" lang="en-US" altLang="en-US">
+                <a:solidFill>
+                  <a:srgbClr val="566873"/>
+                </a:solidFill>
+                <a:latin typeface="Sarabun"/>
+                <a:ea typeface="Sarabun"/>
+                <a:cs typeface="Sarabun"/>
+              </a:rPr>
+              <a:t>jèt</a:t>
+            </a:r>
+          </a:p>
+        </p:txBody>
+      </p:sp>
+      <p:sp>
+        <p:nvSpPr>
+          <p:cNvPr id="15" name="TextBox 14"/>
+          <p:cNvSpPr txBox="1"/>
+          <p:nvPr/>
+        </p:nvSpPr>
+        <p:spPr>
+          <a:xfrm>
+            <a:off x="1078992" y="2633472"/>
+            <a:ext cx="6613855" cy="201168"/>
+          </a:xfrm>
+          <a:prstGeom prst="rect">
+            <a:avLst/>
+          </a:prstGeom>
+          <a:noFill/>
+        </p:spPr>
+        <p:txBody>
+          <a:bodyPr wrap="square" anchor="t">
+            <a:spAutoFit/>
+          </a:bodyPr>
+          <a:lstStyle/>
+          <a:p>
+            <a:pPr algn="l"/>
+            <a:r>
+              <a:rPr sz="1700" b="0" i="0" lang="en-US" altLang="en-US">
                 <a:solidFill>
                   <a:srgbClr val="82909A"/>
                 </a:solidFill>
@@ -6572,14 +6780,14 @@
       </p:sp>
       <p:sp>
         <p:nvSpPr>
-          <p:cNvPr id="14" name="Rounded Rectangle 13"/>
+          <p:cNvPr id="16" name="Rounded Rectangle 15"/>
           <p:cNvSpPr/>
           <p:nvPr/>
         </p:nvSpPr>
         <p:spPr>
           <a:xfrm>
             <a:off x="731520" y="2935224"/>
-            <a:ext cx="7071055" cy="685800"/>
+            <a:ext cx="7071055" cy="804672"/>
           </a:xfrm>
           <a:prstGeom prst="roundRect">
             <a:avLst/>
@@ -6613,14 +6821,14 @@
       </p:sp>
       <p:sp>
         <p:nvSpPr>
-          <p:cNvPr id="15" name="Rectangle 14"/>
+          <p:cNvPr id="17" name="Rectangle 16"/>
           <p:cNvSpPr/>
           <p:nvPr/>
         </p:nvSpPr>
         <p:spPr>
           <a:xfrm>
             <a:off x="868680" y="3044952"/>
-            <a:ext cx="73152" cy="411480"/>
+            <a:ext cx="73152" cy="548640"/>
           </a:xfrm>
           <a:prstGeom prst="rect">
             <a:avLst/>
@@ -6656,14 +6864,14 @@
       </p:sp>
       <p:sp>
         <p:nvSpPr>
-          <p:cNvPr id="16" name="TextBox 15"/>
+          <p:cNvPr id="18" name="TextBox 17"/>
           <p:cNvSpPr txBox="1"/>
           <p:nvPr/>
         </p:nvSpPr>
         <p:spPr>
           <a:xfrm>
             <a:off x="1078992" y="3008376"/>
-            <a:ext cx="6613855" cy="320040"/>
+            <a:ext cx="6613855" cy="228600"/>
           </a:xfrm>
           <a:prstGeom prst="rect">
             <a:avLst/>
@@ -6678,7 +6886,7 @@
           <a:p>
             <a:pPr algn="l"/>
             <a:r>
-              <a:rPr sz="2600" b="1" i="0" lang="th-TH" altLang="en-US">
+              <a:rPr sz="1700" b="0" i="0" lang="th-TH" altLang="en-US">
                 <a:solidFill>
                   <a:srgbClr val="24333D"/>
                 </a:solidFill>
@@ -6688,30 +6896,19 @@
               </a:rPr>
               <a:t>แปด</a:t>
             </a:r>
-            <a:r>
-              <a:rPr sz="1700" b="0" i="1" lang="en-US" altLang="en-US">
-                <a:solidFill>
-                  <a:srgbClr val="566873"/>
-                </a:solidFill>
-                <a:latin typeface="Sarabun"/>
-                <a:ea typeface="Sarabun"/>
-                <a:cs typeface="Sarabun"/>
-              </a:rPr>
-              <a:t> (bpàet)</a:t>
-            </a:r>
-          </a:p>
-        </p:txBody>
-      </p:sp>
-      <p:sp>
-        <p:nvSpPr>
-          <p:cNvPr id="17" name="TextBox 16"/>
+          </a:p>
+        </p:txBody>
+      </p:sp>
+      <p:sp>
+        <p:nvSpPr>
+          <p:cNvPr id="19" name="TextBox 18"/>
           <p:cNvSpPr txBox="1"/>
           <p:nvPr/>
         </p:nvSpPr>
         <p:spPr>
           <a:xfrm>
-            <a:off x="1078992" y="3319272"/>
-            <a:ext cx="6613855" cy="228600"/>
+            <a:off x="1078992" y="3236976"/>
+            <a:ext cx="6613855" cy="201168"/>
           </a:xfrm>
           <a:prstGeom prst="rect">
             <a:avLst/>
@@ -6726,7 +6923,44 @@
           <a:p>
             <a:pPr algn="l"/>
             <a:r>
-              <a:rPr sz="1300" b="0" i="0" lang="en-US" altLang="en-US">
+              <a:rPr sz="1700" b="0" i="1" lang="en-US" altLang="en-US">
+                <a:solidFill>
+                  <a:srgbClr val="566873"/>
+                </a:solidFill>
+                <a:latin typeface="Sarabun"/>
+                <a:ea typeface="Sarabun"/>
+                <a:cs typeface="Sarabun"/>
+              </a:rPr>
+              <a:t>bpàet</a:t>
+            </a:r>
+          </a:p>
+        </p:txBody>
+      </p:sp>
+      <p:sp>
+        <p:nvSpPr>
+          <p:cNvPr id="20" name="TextBox 19"/>
+          <p:cNvSpPr txBox="1"/>
+          <p:nvPr/>
+        </p:nvSpPr>
+        <p:spPr>
+          <a:xfrm>
+            <a:off x="1078992" y="3438144"/>
+            <a:ext cx="6613855" cy="201168"/>
+          </a:xfrm>
+          <a:prstGeom prst="rect">
+            <a:avLst/>
+          </a:prstGeom>
+          <a:noFill/>
+        </p:spPr>
+        <p:txBody>
+          <a:bodyPr wrap="square" anchor="t">
+            <a:spAutoFit/>
+          </a:bodyPr>
+          <a:lstStyle/>
+          <a:p>
+            <a:pPr algn="l"/>
+            <a:r>
+              <a:rPr sz="1700" b="0" i="0" lang="en-US" altLang="en-US">
                 <a:solidFill>
                   <a:srgbClr val="82909A"/>
                 </a:solidFill>
@@ -6741,14 +6975,14 @@
       </p:sp>
       <p:sp>
         <p:nvSpPr>
-          <p:cNvPr id="18" name="Rounded Rectangle 17"/>
+          <p:cNvPr id="21" name="Rounded Rectangle 20"/>
           <p:cNvSpPr/>
           <p:nvPr/>
         </p:nvSpPr>
         <p:spPr>
           <a:xfrm>
             <a:off x="731520" y="3739896"/>
-            <a:ext cx="7071055" cy="685800"/>
+            <a:ext cx="7071055" cy="804672"/>
           </a:xfrm>
           <a:prstGeom prst="roundRect">
             <a:avLst/>
@@ -6782,14 +7016,14 @@
       </p:sp>
       <p:sp>
         <p:nvSpPr>
-          <p:cNvPr id="19" name="Rectangle 18"/>
+          <p:cNvPr id="22" name="Rectangle 21"/>
           <p:cNvSpPr/>
           <p:nvPr/>
         </p:nvSpPr>
         <p:spPr>
           <a:xfrm>
             <a:off x="868680" y="3849624"/>
-            <a:ext cx="73152" cy="411480"/>
+            <a:ext cx="73152" cy="548640"/>
           </a:xfrm>
           <a:prstGeom prst="rect">
             <a:avLst/>
@@ -6825,14 +7059,14 @@
       </p:sp>
       <p:sp>
         <p:nvSpPr>
-          <p:cNvPr id="20" name="TextBox 19"/>
+          <p:cNvPr id="23" name="TextBox 22"/>
           <p:cNvSpPr txBox="1"/>
           <p:nvPr/>
         </p:nvSpPr>
         <p:spPr>
           <a:xfrm>
             <a:off x="1078992" y="3813048"/>
-            <a:ext cx="6613855" cy="320040"/>
+            <a:ext cx="6613855" cy="228600"/>
           </a:xfrm>
           <a:prstGeom prst="rect">
             <a:avLst/>
@@ -6847,7 +7081,7 @@
           <a:p>
             <a:pPr algn="l"/>
             <a:r>
-              <a:rPr sz="2600" b="1" i="0" lang="th-TH" altLang="en-US">
+              <a:rPr sz="1700" b="0" i="0" lang="th-TH" altLang="en-US">
                 <a:solidFill>
                   <a:srgbClr val="24333D"/>
                 </a:solidFill>
@@ -6857,30 +7091,19 @@
               </a:rPr>
               <a:t>เก้า</a:t>
             </a:r>
-            <a:r>
-              <a:rPr sz="1700" b="0" i="1" lang="en-US" altLang="en-US">
-                <a:solidFill>
-                  <a:srgbClr val="566873"/>
-                </a:solidFill>
-                <a:latin typeface="Sarabun"/>
-                <a:ea typeface="Sarabun"/>
-                <a:cs typeface="Sarabun"/>
-              </a:rPr>
-              <a:t> (gâo)</a:t>
-            </a:r>
-          </a:p>
-        </p:txBody>
-      </p:sp>
-      <p:sp>
-        <p:nvSpPr>
-          <p:cNvPr id="21" name="TextBox 20"/>
+          </a:p>
+        </p:txBody>
+      </p:sp>
+      <p:sp>
+        <p:nvSpPr>
+          <p:cNvPr id="24" name="TextBox 23"/>
           <p:cNvSpPr txBox="1"/>
           <p:nvPr/>
         </p:nvSpPr>
         <p:spPr>
           <a:xfrm>
-            <a:off x="1078992" y="4123944"/>
-            <a:ext cx="6613855" cy="228600"/>
+            <a:off x="1078992" y="4041648"/>
+            <a:ext cx="6613855" cy="201168"/>
           </a:xfrm>
           <a:prstGeom prst="rect">
             <a:avLst/>
@@ -6895,7 +7118,44 @@
           <a:p>
             <a:pPr algn="l"/>
             <a:r>
-              <a:rPr sz="1300" b="0" i="0" lang="en-US" altLang="en-US">
+              <a:rPr sz="1700" b="0" i="1" lang="en-US" altLang="en-US">
+                <a:solidFill>
+                  <a:srgbClr val="566873"/>
+                </a:solidFill>
+                <a:latin typeface="Sarabun"/>
+                <a:ea typeface="Sarabun"/>
+                <a:cs typeface="Sarabun"/>
+              </a:rPr>
+              <a:t>gâo</a:t>
+            </a:r>
+          </a:p>
+        </p:txBody>
+      </p:sp>
+      <p:sp>
+        <p:nvSpPr>
+          <p:cNvPr id="25" name="TextBox 24"/>
+          <p:cNvSpPr txBox="1"/>
+          <p:nvPr/>
+        </p:nvSpPr>
+        <p:spPr>
+          <a:xfrm>
+            <a:off x="1078992" y="4242816"/>
+            <a:ext cx="6613855" cy="201168"/>
+          </a:xfrm>
+          <a:prstGeom prst="rect">
+            <a:avLst/>
+          </a:prstGeom>
+          <a:noFill/>
+        </p:spPr>
+        <p:txBody>
+          <a:bodyPr wrap="square" anchor="t">
+            <a:spAutoFit/>
+          </a:bodyPr>
+          <a:lstStyle/>
+          <a:p>
+            <a:pPr algn="l"/>
+            <a:r>
+              <a:rPr sz="1700" b="0" i="0" lang="en-US" altLang="en-US">
                 <a:solidFill>
                   <a:srgbClr val="82909A"/>
                 </a:solidFill>
@@ -6910,14 +7170,14 @@
       </p:sp>
       <p:sp>
         <p:nvSpPr>
-          <p:cNvPr id="22" name="Rounded Rectangle 21"/>
+          <p:cNvPr id="26" name="Rounded Rectangle 25"/>
           <p:cNvSpPr/>
           <p:nvPr/>
         </p:nvSpPr>
         <p:spPr>
           <a:xfrm>
             <a:off x="731520" y="4544568"/>
-            <a:ext cx="7071055" cy="685800"/>
+            <a:ext cx="7071055" cy="804672"/>
           </a:xfrm>
           <a:prstGeom prst="roundRect">
             <a:avLst/>
@@ -6951,14 +7211,14 @@
       </p:sp>
       <p:sp>
         <p:nvSpPr>
-          <p:cNvPr id="23" name="Rectangle 22"/>
+          <p:cNvPr id="27" name="Rectangle 26"/>
           <p:cNvSpPr/>
           <p:nvPr/>
         </p:nvSpPr>
         <p:spPr>
           <a:xfrm>
             <a:off x="868680" y="4654296"/>
-            <a:ext cx="73152" cy="411480"/>
+            <a:ext cx="73152" cy="548640"/>
           </a:xfrm>
           <a:prstGeom prst="rect">
             <a:avLst/>
@@ -6994,14 +7254,14 @@
       </p:sp>
       <p:sp>
         <p:nvSpPr>
-          <p:cNvPr id="24" name="TextBox 23"/>
+          <p:cNvPr id="28" name="TextBox 27"/>
           <p:cNvSpPr txBox="1"/>
           <p:nvPr/>
         </p:nvSpPr>
         <p:spPr>
           <a:xfrm>
             <a:off x="1078992" y="4617720"/>
-            <a:ext cx="6613855" cy="320040"/>
+            <a:ext cx="6613855" cy="228600"/>
           </a:xfrm>
           <a:prstGeom prst="rect">
             <a:avLst/>
@@ -7016,7 +7276,7 @@
           <a:p>
             <a:pPr algn="l"/>
             <a:r>
-              <a:rPr sz="2600" b="1" i="0" lang="th-TH" altLang="en-US">
+              <a:rPr sz="1700" b="0" i="0" lang="th-TH" altLang="en-US">
                 <a:solidFill>
                   <a:srgbClr val="24333D"/>
                 </a:solidFill>
@@ -7026,30 +7286,19 @@
               </a:rPr>
               <a:t>สิบ</a:t>
             </a:r>
-            <a:r>
-              <a:rPr sz="1700" b="0" i="1" lang="en-US" altLang="en-US">
-                <a:solidFill>
-                  <a:srgbClr val="566873"/>
-                </a:solidFill>
-                <a:latin typeface="Sarabun"/>
-                <a:ea typeface="Sarabun"/>
-                <a:cs typeface="Sarabun"/>
-              </a:rPr>
-              <a:t> (sìp)</a:t>
-            </a:r>
-          </a:p>
-        </p:txBody>
-      </p:sp>
-      <p:sp>
-        <p:nvSpPr>
-          <p:cNvPr id="25" name="TextBox 24"/>
+          </a:p>
+        </p:txBody>
+      </p:sp>
+      <p:sp>
+        <p:nvSpPr>
+          <p:cNvPr id="29" name="TextBox 28"/>
           <p:cNvSpPr txBox="1"/>
           <p:nvPr/>
         </p:nvSpPr>
         <p:spPr>
           <a:xfrm>
-            <a:off x="1078992" y="4928616"/>
-            <a:ext cx="6613855" cy="228600"/>
+            <a:off x="1078992" y="4846320"/>
+            <a:ext cx="6613855" cy="201168"/>
           </a:xfrm>
           <a:prstGeom prst="rect">
             <a:avLst/>
@@ -7064,29 +7313,29 @@
           <a:p>
             <a:pPr algn="l"/>
             <a:r>
-              <a:rPr sz="1300" b="0" i="0" lang="en-US" altLang="en-US">
-                <a:solidFill>
-                  <a:srgbClr val="82909A"/>
-                </a:solidFill>
-                <a:latin typeface="Sarabun"/>
-                <a:ea typeface="Sarabun"/>
-                <a:cs typeface="Sarabun"/>
-              </a:rPr>
-              <a:t>10 — ten</a:t>
-            </a:r>
-          </a:p>
-        </p:txBody>
-      </p:sp>
-      <p:sp>
-        <p:nvSpPr>
-          <p:cNvPr id="26" name="TextBox 25"/>
+              <a:rPr sz="1700" b="0" i="1" lang="en-US" altLang="en-US">
+                <a:solidFill>
+                  <a:srgbClr val="566873"/>
+                </a:solidFill>
+                <a:latin typeface="Sarabun"/>
+                <a:ea typeface="Sarabun"/>
+                <a:cs typeface="Sarabun"/>
+              </a:rPr>
+              <a:t>sìp</a:t>
+            </a:r>
+          </a:p>
+        </p:txBody>
+      </p:sp>
+      <p:sp>
+        <p:nvSpPr>
+          <p:cNvPr id="30" name="TextBox 29"/>
           <p:cNvSpPr txBox="1"/>
           <p:nvPr/>
         </p:nvSpPr>
         <p:spPr>
           <a:xfrm>
-            <a:off x="932688" y="5632704"/>
-            <a:ext cx="9692640" cy="228600"/>
+            <a:off x="1078992" y="5047488"/>
+            <a:ext cx="6613855" cy="201168"/>
           </a:xfrm>
           <a:prstGeom prst="rect">
             <a:avLst/>
@@ -7101,6 +7350,43 @@
           <a:p>
             <a:pPr algn="l"/>
             <a:r>
+              <a:rPr sz="1700" b="0" i="0" lang="en-US" altLang="en-US">
+                <a:solidFill>
+                  <a:srgbClr val="82909A"/>
+                </a:solidFill>
+                <a:latin typeface="Sarabun"/>
+                <a:ea typeface="Sarabun"/>
+                <a:cs typeface="Sarabun"/>
+              </a:rPr>
+              <a:t>10 — ten</a:t>
+            </a:r>
+          </a:p>
+        </p:txBody>
+      </p:sp>
+      <p:sp>
+        <p:nvSpPr>
+          <p:cNvPr id="31" name="TextBox 30"/>
+          <p:cNvSpPr txBox="1"/>
+          <p:nvPr/>
+        </p:nvSpPr>
+        <p:spPr>
+          <a:xfrm>
+            <a:off x="932688" y="5632704"/>
+            <a:ext cx="9692640" cy="228600"/>
+          </a:xfrm>
+          <a:prstGeom prst="rect">
+            <a:avLst/>
+          </a:prstGeom>
+          <a:noFill/>
+        </p:spPr>
+        <p:txBody>
+          <a:bodyPr wrap="square" anchor="t">
+            <a:spAutoFit/>
+          </a:bodyPr>
+          <a:lstStyle/>
+          <a:p>
+            <a:pPr algn="l"/>
+            <a:r>
               <a:rPr sz="1700" b="1" i="0" lang="en-US" altLang="en-US">
                 <a:solidFill>
                   <a:srgbClr val="C96F4A"/>
@@ -7116,7 +7402,7 @@
       </p:sp>
       <p:sp>
         <p:nvSpPr>
-          <p:cNvPr id="27" name="Oval 26"/>
+          <p:cNvPr id="32" name="Oval 31"/>
           <p:cNvSpPr/>
           <p:nvPr/>
         </p:nvSpPr>
@@ -7159,7 +7445,7 @@
       </p:sp>
       <p:sp>
         <p:nvSpPr>
-          <p:cNvPr id="28" name="TextBox 27"/>
+          <p:cNvPr id="33" name="TextBox 32"/>
           <p:cNvSpPr txBox="1"/>
           <p:nvPr/>
         </p:nvSpPr>
@@ -7651,8 +7937,8 @@
         </p:nvSpPr>
         <p:spPr>
           <a:xfrm>
-            <a:off x="1078992" y="1435608"/>
-            <a:ext cx="6613855" cy="658368"/>
+            <a:off x="1078992" y="1463040"/>
+            <a:ext cx="6613855" cy="320040"/>
           </a:xfrm>
           <a:prstGeom prst="rect">
             <a:avLst/>
@@ -7667,7 +7953,7 @@
           <a:p>
             <a:pPr algn="l"/>
             <a:r>
-              <a:rPr sz="3600" b="1" i="0" lang="th-TH" altLang="en-US">
+              <a:rPr sz="1700" b="0" i="0" lang="th-TH" altLang="en-US">
                 <a:solidFill>
                   <a:srgbClr val="24333D"/>
                 </a:solidFill>
@@ -7676,17 +7962,6 @@
                 <a:cs typeface="Sarabun"/>
               </a:rPr>
               <a:t>เบอร์อะไร</a:t>
-            </a:r>
-            <a:r>
-              <a:rPr sz="2230" b="0" i="1" lang="en-US" altLang="en-US">
-                <a:solidFill>
-                  <a:srgbClr val="566873"/>
-                </a:solidFill>
-                <a:latin typeface="Sarabun"/>
-                <a:ea typeface="Sarabun"/>
-                <a:cs typeface="Sarabun"/>
-              </a:rPr>
-              <a:t> (ber à-rai)</a:t>
             </a:r>
           </a:p>
         </p:txBody>
@@ -7699,7 +7974,7 @@
         </p:nvSpPr>
         <p:spPr>
           <a:xfrm>
-            <a:off x="1078992" y="2203704"/>
+            <a:off x="1078992" y="1828800"/>
             <a:ext cx="6613855" cy="274320"/>
           </a:xfrm>
           <a:prstGeom prst="rect">
@@ -7715,6 +7990,43 @@
           <a:p>
             <a:pPr algn="l"/>
             <a:r>
+              <a:rPr sz="1700" b="0" i="1" lang="en-US" altLang="en-US">
+                <a:solidFill>
+                  <a:srgbClr val="566873"/>
+                </a:solidFill>
+                <a:latin typeface="Sarabun"/>
+                <a:ea typeface="Sarabun"/>
+                <a:cs typeface="Sarabun"/>
+              </a:rPr>
+              <a:t>ber à-rai</a:t>
+            </a:r>
+          </a:p>
+        </p:txBody>
+      </p:sp>
+      <p:sp>
+        <p:nvSpPr>
+          <p:cNvPr id="10" name="TextBox 9"/>
+          <p:cNvSpPr txBox="1"/>
+          <p:nvPr/>
+        </p:nvSpPr>
+        <p:spPr>
+          <a:xfrm>
+            <a:off x="1078992" y="2203704"/>
+            <a:ext cx="6613855" cy="274320"/>
+          </a:xfrm>
+          <a:prstGeom prst="rect">
+            <a:avLst/>
+          </a:prstGeom>
+          <a:noFill/>
+        </p:spPr>
+        <p:txBody>
+          <a:bodyPr wrap="square" anchor="t">
+            <a:spAutoFit/>
+          </a:bodyPr>
+          <a:lstStyle/>
+          <a:p>
+            <a:pPr algn="l"/>
+            <a:r>
               <a:rPr sz="1700" b="0" i="0" lang="en-US" altLang="en-US">
                 <a:solidFill>
                   <a:srgbClr val="82909A"/>
@@ -7730,7 +8042,7 @@
       </p:sp>
       <p:sp>
         <p:nvSpPr>
-          <p:cNvPr id="10" name="Rounded Rectangle 9"/>
+          <p:cNvPr id="11" name="Rounded Rectangle 10"/>
           <p:cNvSpPr/>
           <p:nvPr/>
         </p:nvSpPr>
@@ -7771,7 +8083,7 @@
       </p:sp>
       <p:sp>
         <p:nvSpPr>
-          <p:cNvPr id="11" name="Rectangle 10"/>
+          <p:cNvPr id="12" name="Rectangle 11"/>
           <p:cNvSpPr/>
           <p:nvPr/>
         </p:nvSpPr>
@@ -7814,14 +8126,14 @@
       </p:sp>
       <p:sp>
         <p:nvSpPr>
-          <p:cNvPr id="12" name="TextBox 11"/>
+          <p:cNvPr id="13" name="TextBox 12"/>
           <p:cNvSpPr txBox="1"/>
           <p:nvPr/>
         </p:nvSpPr>
         <p:spPr>
           <a:xfrm>
-            <a:off x="1078992" y="2715768"/>
-            <a:ext cx="6613855" cy="658368"/>
+            <a:off x="1078992" y="2743200"/>
+            <a:ext cx="6613855" cy="320040"/>
           </a:xfrm>
           <a:prstGeom prst="rect">
             <a:avLst/>
@@ -7836,7 +8148,7 @@
           <a:p>
             <a:pPr algn="l"/>
             <a:r>
-              <a:rPr sz="3600" b="1" i="0" lang="th-TH" altLang="en-US">
+              <a:rPr sz="1700" b="0" i="0" lang="th-TH" altLang="en-US">
                 <a:solidFill>
                   <a:srgbClr val="24333D"/>
                 </a:solidFill>
@@ -7846,29 +8158,18 @@
               </a:rPr>
               <a:t>อายุ...ปี</a:t>
             </a:r>
-            <a:r>
-              <a:rPr sz="2230" b="0" i="1" lang="en-US" altLang="en-US">
-                <a:solidFill>
-                  <a:srgbClr val="566873"/>
-                </a:solidFill>
-                <a:latin typeface="Sarabun"/>
-                <a:ea typeface="Sarabun"/>
-                <a:cs typeface="Sarabun"/>
-              </a:rPr>
-              <a:t> (aa-yú ... bpii)</a:t>
-            </a:r>
-          </a:p>
-        </p:txBody>
-      </p:sp>
-      <p:sp>
-        <p:nvSpPr>
-          <p:cNvPr id="13" name="TextBox 12"/>
+          </a:p>
+        </p:txBody>
+      </p:sp>
+      <p:sp>
+        <p:nvSpPr>
+          <p:cNvPr id="14" name="TextBox 13"/>
           <p:cNvSpPr txBox="1"/>
           <p:nvPr/>
         </p:nvSpPr>
         <p:spPr>
           <a:xfrm>
-            <a:off x="1078992" y="3483864"/>
+            <a:off x="1078992" y="3108960"/>
             <a:ext cx="6613855" cy="274320"/>
           </a:xfrm>
           <a:prstGeom prst="rect">
@@ -7884,6 +8185,43 @@
           <a:p>
             <a:pPr algn="l"/>
             <a:r>
+              <a:rPr sz="1700" b="0" i="1" lang="en-US" altLang="en-US">
+                <a:solidFill>
+                  <a:srgbClr val="566873"/>
+                </a:solidFill>
+                <a:latin typeface="Sarabun"/>
+                <a:ea typeface="Sarabun"/>
+                <a:cs typeface="Sarabun"/>
+              </a:rPr>
+              <a:t>aa-yú ... bpii</a:t>
+            </a:r>
+          </a:p>
+        </p:txBody>
+      </p:sp>
+      <p:sp>
+        <p:nvSpPr>
+          <p:cNvPr id="15" name="TextBox 14"/>
+          <p:cNvSpPr txBox="1"/>
+          <p:nvPr/>
+        </p:nvSpPr>
+        <p:spPr>
+          <a:xfrm>
+            <a:off x="1078992" y="3483864"/>
+            <a:ext cx="6613855" cy="274320"/>
+          </a:xfrm>
+          <a:prstGeom prst="rect">
+            <a:avLst/>
+          </a:prstGeom>
+          <a:noFill/>
+        </p:spPr>
+        <p:txBody>
+          <a:bodyPr wrap="square" anchor="t">
+            <a:spAutoFit/>
+          </a:bodyPr>
+          <a:lstStyle/>
+          <a:p>
+            <a:pPr algn="l"/>
+            <a:r>
               <a:rPr sz="1700" b="0" i="0" lang="en-US" altLang="en-US">
                 <a:solidFill>
                   <a:srgbClr val="82909A"/>
@@ -7899,7 +8237,7 @@
       </p:sp>
       <p:sp>
         <p:nvSpPr>
-          <p:cNvPr id="14" name="Rounded Rectangle 13"/>
+          <p:cNvPr id="16" name="Rounded Rectangle 15"/>
           <p:cNvSpPr/>
           <p:nvPr/>
         </p:nvSpPr>
@@ -7940,7 +8278,7 @@
       </p:sp>
       <p:sp>
         <p:nvSpPr>
-          <p:cNvPr id="15" name="Rectangle 14"/>
+          <p:cNvPr id="17" name="Rectangle 16"/>
           <p:cNvSpPr/>
           <p:nvPr/>
         </p:nvSpPr>
@@ -7983,14 +8321,14 @@
       </p:sp>
       <p:sp>
         <p:nvSpPr>
-          <p:cNvPr id="16" name="TextBox 15"/>
+          <p:cNvPr id="18" name="TextBox 17"/>
           <p:cNvSpPr txBox="1"/>
           <p:nvPr/>
         </p:nvSpPr>
         <p:spPr>
           <a:xfrm>
-            <a:off x="1078992" y="3995928"/>
-            <a:ext cx="6613855" cy="658368"/>
+            <a:off x="1078992" y="4023360"/>
+            <a:ext cx="6613855" cy="320040"/>
           </a:xfrm>
           <a:prstGeom prst="rect">
             <a:avLst/>
@@ -8005,7 +8343,7 @@
           <a:p>
             <a:pPr algn="l"/>
             <a:r>
-              <a:rPr sz="3600" b="1" i="0" lang="th-TH" altLang="en-US">
+              <a:rPr sz="1700" b="0" i="0" lang="th-TH" altLang="en-US">
                 <a:solidFill>
                   <a:srgbClr val="24333D"/>
                 </a:solidFill>
@@ -8015,29 +8353,18 @@
               </a:rPr>
               <a:t>ผมอายุ...ปี</a:t>
             </a:r>
-            <a:r>
-              <a:rPr sz="2230" b="0" i="1" lang="en-US" altLang="en-US">
-                <a:solidFill>
-                  <a:srgbClr val="566873"/>
-                </a:solidFill>
-                <a:latin typeface="Sarabun"/>
-                <a:ea typeface="Sarabun"/>
-                <a:cs typeface="Sarabun"/>
-              </a:rPr>
-              <a:t> (phǒm aa-yú ... bpii)</a:t>
-            </a:r>
-          </a:p>
-        </p:txBody>
-      </p:sp>
-      <p:sp>
-        <p:nvSpPr>
-          <p:cNvPr id="17" name="TextBox 16"/>
+          </a:p>
+        </p:txBody>
+      </p:sp>
+      <p:sp>
+        <p:nvSpPr>
+          <p:cNvPr id="19" name="TextBox 18"/>
           <p:cNvSpPr txBox="1"/>
           <p:nvPr/>
         </p:nvSpPr>
         <p:spPr>
           <a:xfrm>
-            <a:off x="1078992" y="4764024"/>
+            <a:off x="1078992" y="4389120"/>
             <a:ext cx="6613855" cy="274320"/>
           </a:xfrm>
           <a:prstGeom prst="rect">
@@ -8053,6 +8380,43 @@
           <a:p>
             <a:pPr algn="l"/>
             <a:r>
+              <a:rPr sz="1700" b="0" i="1" lang="en-US" altLang="en-US">
+                <a:solidFill>
+                  <a:srgbClr val="566873"/>
+                </a:solidFill>
+                <a:latin typeface="Sarabun"/>
+                <a:ea typeface="Sarabun"/>
+                <a:cs typeface="Sarabun"/>
+              </a:rPr>
+              <a:t>phǒm aa-yú ... bpii</a:t>
+            </a:r>
+          </a:p>
+        </p:txBody>
+      </p:sp>
+      <p:sp>
+        <p:nvSpPr>
+          <p:cNvPr id="20" name="TextBox 19"/>
+          <p:cNvSpPr txBox="1"/>
+          <p:nvPr/>
+        </p:nvSpPr>
+        <p:spPr>
+          <a:xfrm>
+            <a:off x="1078992" y="4764024"/>
+            <a:ext cx="6613855" cy="274320"/>
+          </a:xfrm>
+          <a:prstGeom prst="rect">
+            <a:avLst/>
+          </a:prstGeom>
+          <a:noFill/>
+        </p:spPr>
+        <p:txBody>
+          <a:bodyPr wrap="square" anchor="t">
+            <a:spAutoFit/>
+          </a:bodyPr>
+          <a:lstStyle/>
+          <a:p>
+            <a:pPr algn="l"/>
+            <a:r>
               <a:rPr sz="1700" b="0" i="0" lang="en-US" altLang="en-US">
                 <a:solidFill>
                   <a:srgbClr val="82909A"/>
@@ -8068,7 +8432,7 @@
       </p:sp>
       <p:sp>
         <p:nvSpPr>
-          <p:cNvPr id="18" name="Rounded Rectangle 17"/>
+          <p:cNvPr id="21" name="Rounded Rectangle 20"/>
           <p:cNvSpPr/>
           <p:nvPr/>
         </p:nvSpPr>
@@ -8109,7 +8473,7 @@
       </p:sp>
       <p:sp>
         <p:nvSpPr>
-          <p:cNvPr id="19" name="Rectangle 18"/>
+          <p:cNvPr id="22" name="Rectangle 21"/>
           <p:cNvSpPr/>
           <p:nvPr/>
         </p:nvSpPr>
@@ -8152,14 +8516,14 @@
       </p:sp>
       <p:sp>
         <p:nvSpPr>
-          <p:cNvPr id="20" name="TextBox 19"/>
+          <p:cNvPr id="23" name="TextBox 22"/>
           <p:cNvSpPr txBox="1"/>
           <p:nvPr/>
         </p:nvSpPr>
         <p:spPr>
           <a:xfrm>
-            <a:off x="1078992" y="5276088"/>
-            <a:ext cx="6613855" cy="658368"/>
+            <a:off x="1078992" y="5303520"/>
+            <a:ext cx="6613855" cy="320040"/>
           </a:xfrm>
           <a:prstGeom prst="rect">
             <a:avLst/>
@@ -8174,7 +8538,7 @@
           <a:p>
             <a:pPr algn="l"/>
             <a:r>
-              <a:rPr sz="3600" b="1" i="0" lang="th-TH" altLang="en-US">
+              <a:rPr sz="1700" b="0" i="0" lang="th-TH" altLang="en-US">
                 <a:solidFill>
                   <a:srgbClr val="24333D"/>
                 </a:solidFill>
@@ -8184,8 +8548,34 @@
               </a:rPr>
               <a:t>ฉันอายุ...ปี</a:t>
             </a:r>
-            <a:r>
-              <a:rPr sz="2230" b="0" i="1" lang="en-US" altLang="en-US">
+          </a:p>
+        </p:txBody>
+      </p:sp>
+      <p:sp>
+        <p:nvSpPr>
+          <p:cNvPr id="24" name="TextBox 23"/>
+          <p:cNvSpPr txBox="1"/>
+          <p:nvPr/>
+        </p:nvSpPr>
+        <p:spPr>
+          <a:xfrm>
+            <a:off x="1078992" y="5669280"/>
+            <a:ext cx="6613855" cy="274320"/>
+          </a:xfrm>
+          <a:prstGeom prst="rect">
+            <a:avLst/>
+          </a:prstGeom>
+          <a:noFill/>
+        </p:spPr>
+        <p:txBody>
+          <a:bodyPr wrap="square" anchor="t">
+            <a:spAutoFit/>
+          </a:bodyPr>
+          <a:lstStyle/>
+          <a:p>
+            <a:pPr algn="l"/>
+            <a:r>
+              <a:rPr sz="1700" b="0" i="1" lang="en-US" altLang="en-US">
                 <a:solidFill>
                   <a:srgbClr val="566873"/>
                 </a:solidFill>
@@ -8193,14 +8583,14 @@
                 <a:ea typeface="Sarabun"/>
                 <a:cs typeface="Sarabun"/>
               </a:rPr>
-              <a:t> (chǎn aa-yú ... bpii)</a:t>
-            </a:r>
-          </a:p>
-        </p:txBody>
-      </p:sp>
-      <p:sp>
-        <p:nvSpPr>
-          <p:cNvPr id="21" name="TextBox 20"/>
+              <a:t>chǎn aa-yú ... bpii</a:t>
+            </a:r>
+          </a:p>
+        </p:txBody>
+      </p:sp>
+      <p:sp>
+        <p:nvSpPr>
+          <p:cNvPr id="25" name="TextBox 24"/>
           <p:cNvSpPr txBox="1"/>
           <p:nvPr/>
         </p:nvSpPr>
@@ -8582,8 +8972,8 @@
         </p:nvSpPr>
         <p:spPr>
           <a:xfrm>
-            <a:off x="1078992" y="1435608"/>
-            <a:ext cx="6613855" cy="658368"/>
+            <a:off x="1078992" y="1463040"/>
+            <a:ext cx="6613855" cy="320040"/>
           </a:xfrm>
           <a:prstGeom prst="rect">
             <a:avLst/>
@@ -8598,7 +8988,7 @@
           <a:p>
             <a:pPr algn="l"/>
             <a:r>
-              <a:rPr sz="3600" b="1" i="0" lang="th-TH" altLang="en-US">
+              <a:rPr sz="1700" b="0" i="0" lang="th-TH" altLang="en-US">
                 <a:solidFill>
                   <a:srgbClr val="24333D"/>
                 </a:solidFill>
@@ -8607,17 +8997,6 @@
                 <a:cs typeface="Sarabun"/>
               </a:rPr>
               <a:t>สี่</a:t>
-            </a:r>
-            <a:r>
-              <a:rPr sz="2230" b="0" i="1" lang="en-US" altLang="en-US">
-                <a:solidFill>
-                  <a:srgbClr val="566873"/>
-                </a:solidFill>
-                <a:latin typeface="Sarabun"/>
-                <a:ea typeface="Sarabun"/>
-                <a:cs typeface="Sarabun"/>
-              </a:rPr>
-              <a:t> (sìi)</a:t>
             </a:r>
           </a:p>
         </p:txBody>
@@ -8630,7 +9009,7 @@
         </p:nvSpPr>
         <p:spPr>
           <a:xfrm>
-            <a:off x="1078992" y="2203704"/>
+            <a:off x="1078992" y="1828800"/>
             <a:ext cx="6613855" cy="274320"/>
           </a:xfrm>
           <a:prstGeom prst="rect">
@@ -8646,6 +9025,43 @@
           <a:p>
             <a:pPr algn="l"/>
             <a:r>
+              <a:rPr sz="1700" b="0" i="1" lang="en-US" altLang="en-US">
+                <a:solidFill>
+                  <a:srgbClr val="566873"/>
+                </a:solidFill>
+                <a:latin typeface="Sarabun"/>
+                <a:ea typeface="Sarabun"/>
+                <a:cs typeface="Sarabun"/>
+              </a:rPr>
+              <a:t>sìi</a:t>
+            </a:r>
+          </a:p>
+        </p:txBody>
+      </p:sp>
+      <p:sp>
+        <p:nvSpPr>
+          <p:cNvPr id="10" name="TextBox 9"/>
+          <p:cNvSpPr txBox="1"/>
+          <p:nvPr/>
+        </p:nvSpPr>
+        <p:spPr>
+          <a:xfrm>
+            <a:off x="1078992" y="2203704"/>
+            <a:ext cx="6613855" cy="274320"/>
+          </a:xfrm>
+          <a:prstGeom prst="rect">
+            <a:avLst/>
+          </a:prstGeom>
+          <a:noFill/>
+        </p:spPr>
+        <p:txBody>
+          <a:bodyPr wrap="square" anchor="t">
+            <a:spAutoFit/>
+          </a:bodyPr>
+          <a:lstStyle/>
+          <a:p>
+            <a:pPr algn="l"/>
+            <a:r>
               <a:rPr sz="1700" b="0" i="0" lang="en-US" altLang="en-US">
                 <a:solidFill>
                   <a:srgbClr val="82909A"/>
@@ -8661,7 +9077,7 @@
       </p:sp>
       <p:sp>
         <p:nvSpPr>
-          <p:cNvPr id="10" name="Rounded Rectangle 9"/>
+          <p:cNvPr id="11" name="Rounded Rectangle 10"/>
           <p:cNvSpPr/>
           <p:nvPr/>
         </p:nvSpPr>
@@ -8702,7 +9118,7 @@
       </p:sp>
       <p:sp>
         <p:nvSpPr>
-          <p:cNvPr id="11" name="Rectangle 10"/>
+          <p:cNvPr id="12" name="Rectangle 11"/>
           <p:cNvSpPr/>
           <p:nvPr/>
         </p:nvSpPr>
@@ -8745,14 +9161,14 @@
       </p:sp>
       <p:sp>
         <p:nvSpPr>
-          <p:cNvPr id="12" name="TextBox 11"/>
+          <p:cNvPr id="13" name="TextBox 12"/>
           <p:cNvSpPr txBox="1"/>
           <p:nvPr/>
         </p:nvSpPr>
         <p:spPr>
           <a:xfrm>
-            <a:off x="1078992" y="3191256"/>
-            <a:ext cx="6613855" cy="658368"/>
+            <a:off x="1078992" y="3218688"/>
+            <a:ext cx="6613855" cy="320040"/>
           </a:xfrm>
           <a:prstGeom prst="rect">
             <a:avLst/>
@@ -8767,7 +9183,7 @@
           <a:p>
             <a:pPr algn="l"/>
             <a:r>
-              <a:rPr sz="3600" b="1" i="0" lang="th-TH" altLang="en-US">
+              <a:rPr sz="1700" b="0" i="0" lang="th-TH" altLang="en-US">
                 <a:solidFill>
                   <a:srgbClr val="24333D"/>
                 </a:solidFill>
@@ -8777,29 +9193,18 @@
               </a:rPr>
               <a:t>สี</a:t>
             </a:r>
-            <a:r>
-              <a:rPr sz="2230" b="0" i="1" lang="en-US" altLang="en-US">
-                <a:solidFill>
-                  <a:srgbClr val="566873"/>
-                </a:solidFill>
-                <a:latin typeface="Sarabun"/>
-                <a:ea typeface="Sarabun"/>
-                <a:cs typeface="Sarabun"/>
-              </a:rPr>
-              <a:t> (sǐi)</a:t>
-            </a:r>
-          </a:p>
-        </p:txBody>
-      </p:sp>
-      <p:sp>
-        <p:nvSpPr>
-          <p:cNvPr id="13" name="TextBox 12"/>
+          </a:p>
+        </p:txBody>
+      </p:sp>
+      <p:sp>
+        <p:nvSpPr>
+          <p:cNvPr id="14" name="TextBox 13"/>
           <p:cNvSpPr txBox="1"/>
           <p:nvPr/>
         </p:nvSpPr>
         <p:spPr>
           <a:xfrm>
-            <a:off x="1078992" y="3959352"/>
+            <a:off x="1078992" y="3584448"/>
             <a:ext cx="6613855" cy="274320"/>
           </a:xfrm>
           <a:prstGeom prst="rect">
@@ -8815,6 +9220,43 @@
           <a:p>
             <a:pPr algn="l"/>
             <a:r>
+              <a:rPr sz="1700" b="0" i="1" lang="en-US" altLang="en-US">
+                <a:solidFill>
+                  <a:srgbClr val="566873"/>
+                </a:solidFill>
+                <a:latin typeface="Sarabun"/>
+                <a:ea typeface="Sarabun"/>
+                <a:cs typeface="Sarabun"/>
+              </a:rPr>
+              <a:t>sǐi</a:t>
+            </a:r>
+          </a:p>
+        </p:txBody>
+      </p:sp>
+      <p:sp>
+        <p:nvSpPr>
+          <p:cNvPr id="15" name="TextBox 14"/>
+          <p:cNvSpPr txBox="1"/>
+          <p:nvPr/>
+        </p:nvSpPr>
+        <p:spPr>
+          <a:xfrm>
+            <a:off x="1078992" y="3959352"/>
+            <a:ext cx="6613855" cy="274320"/>
+          </a:xfrm>
+          <a:prstGeom prst="rect">
+            <a:avLst/>
+          </a:prstGeom>
+          <a:noFill/>
+        </p:spPr>
+        <p:txBody>
+          <a:bodyPr wrap="square" anchor="t">
+            <a:spAutoFit/>
+          </a:bodyPr>
+          <a:lstStyle/>
+          <a:p>
+            <a:pPr algn="l"/>
+            <a:r>
               <a:rPr sz="1700" b="0" i="0" lang="en-US" altLang="en-US">
                 <a:solidFill>
                   <a:srgbClr val="82909A"/>
@@ -8830,7 +9272,7 @@
       </p:sp>
       <p:sp>
         <p:nvSpPr>
-          <p:cNvPr id="14" name="Rounded Rectangle 13"/>
+          <p:cNvPr id="16" name="Rounded Rectangle 15"/>
           <p:cNvSpPr/>
           <p:nvPr/>
         </p:nvSpPr>
@@ -8871,7 +9313,7 @@
       </p:sp>
       <p:sp>
         <p:nvSpPr>
-          <p:cNvPr id="15" name="Rectangle 14"/>
+          <p:cNvPr id="17" name="Rectangle 16"/>
           <p:cNvSpPr/>
           <p:nvPr/>
         </p:nvSpPr>
@@ -8914,14 +9356,14 @@
       </p:sp>
       <p:sp>
         <p:nvSpPr>
-          <p:cNvPr id="16" name="TextBox 15"/>
+          <p:cNvPr id="18" name="TextBox 17"/>
           <p:cNvSpPr txBox="1"/>
           <p:nvPr/>
         </p:nvSpPr>
         <p:spPr>
           <a:xfrm>
-            <a:off x="1078992" y="4946904"/>
-            <a:ext cx="6613855" cy="658368"/>
+            <a:off x="1078992" y="4974336"/>
+            <a:ext cx="6613855" cy="320040"/>
           </a:xfrm>
           <a:prstGeom prst="rect">
             <a:avLst/>
@@ -8936,7 +9378,7 @@
           <a:p>
             <a:pPr algn="l"/>
             <a:r>
-              <a:rPr sz="3600" b="1" i="0" lang="th-TH" altLang="en-US">
+              <a:rPr sz="1700" b="0" i="0" lang="th-TH" altLang="en-US">
                 <a:solidFill>
                   <a:srgbClr val="24333D"/>
                 </a:solidFill>
@@ -8946,8 +9388,34 @@
               </a:rPr>
               <a:t>เก้า</a:t>
             </a:r>
-            <a:r>
-              <a:rPr sz="2230" b="0" i="1" lang="en-US" altLang="en-US">
+          </a:p>
+        </p:txBody>
+      </p:sp>
+      <p:sp>
+        <p:nvSpPr>
+          <p:cNvPr id="19" name="TextBox 18"/>
+          <p:cNvSpPr txBox="1"/>
+          <p:nvPr/>
+        </p:nvSpPr>
+        <p:spPr>
+          <a:xfrm>
+            <a:off x="1078992" y="5340096"/>
+            <a:ext cx="6613855" cy="274320"/>
+          </a:xfrm>
+          <a:prstGeom prst="rect">
+            <a:avLst/>
+          </a:prstGeom>
+          <a:noFill/>
+        </p:spPr>
+        <p:txBody>
+          <a:bodyPr wrap="square" anchor="t">
+            <a:spAutoFit/>
+          </a:bodyPr>
+          <a:lstStyle/>
+          <a:p>
+            <a:pPr algn="l"/>
+            <a:r>
+              <a:rPr sz="1700" b="0" i="1" lang="en-US" altLang="en-US">
                 <a:solidFill>
                   <a:srgbClr val="566873"/>
                 </a:solidFill>
@@ -8955,14 +9423,14 @@
                 <a:ea typeface="Sarabun"/>
                 <a:cs typeface="Sarabun"/>
               </a:rPr>
-              <a:t> (gâo)</a:t>
-            </a:r>
-          </a:p>
-        </p:txBody>
-      </p:sp>
-      <p:sp>
-        <p:nvSpPr>
-          <p:cNvPr id="17" name="TextBox 16"/>
+              <a:t>gâo</a:t>
+            </a:r>
+          </a:p>
+        </p:txBody>
+      </p:sp>
+      <p:sp>
+        <p:nvSpPr>
+          <p:cNvPr id="20" name="TextBox 19"/>
           <p:cNvSpPr txBox="1"/>
           <p:nvPr/>
         </p:nvSpPr>
@@ -9262,7 +9730,7 @@
         <p:spPr>
           <a:xfrm>
             <a:off x="1965960" y="1069848"/>
-            <a:ext cx="5836615" cy="384048"/>
+            <a:ext cx="5836615" cy="228600"/>
           </a:xfrm>
           <a:prstGeom prst="rect">
             <a:avLst/>
@@ -9277,7 +9745,7 @@
           <a:p>
             <a:pPr algn="l"/>
             <a:r>
-              <a:rPr sz="2600" b="1" i="0" lang="th-TH" altLang="en-US">
+              <a:rPr sz="1700" b="0" i="0" lang="th-TH" altLang="en-US">
                 <a:solidFill>
                   <a:srgbClr val="24333D"/>
                 </a:solidFill>
@@ -9286,17 +9754,6 @@
                 <a:cs typeface="Sarabun"/>
               </a:rPr>
               <a:t>สวัสดีครับ</a:t>
-            </a:r>
-            <a:r>
-              <a:rPr sz="1700" b="0" i="1" lang="en-US" altLang="en-US">
-                <a:solidFill>
-                  <a:srgbClr val="566873"/>
-                </a:solidFill>
-                <a:latin typeface="Sarabun"/>
-                <a:ea typeface="Sarabun"/>
-                <a:cs typeface="Sarabun"/>
-              </a:rPr>
-              <a:t> (sà-wàt-dii khráp)</a:t>
             </a:r>
           </a:p>
         </p:txBody>
@@ -9309,8 +9766,8 @@
         </p:nvSpPr>
         <p:spPr>
           <a:xfrm>
-            <a:off x="1965960" y="1353312"/>
-            <a:ext cx="5836615" cy="228600"/>
+            <a:off x="1965960" y="1298448"/>
+            <a:ext cx="5836615" cy="201168"/>
           </a:xfrm>
           <a:prstGeom prst="rect">
             <a:avLst/>
@@ -9325,7 +9782,7 @@
           <a:p>
             <a:pPr algn="l"/>
             <a:r>
-              <a:rPr sz="1300" b="0" i="0" lang="en-US" altLang="en-US">
+              <a:rPr sz="1700" b="0" i="1" lang="en-US" altLang="en-US">
                 <a:solidFill>
                   <a:srgbClr val="566873"/>
                 </a:solidFill>
@@ -9333,6 +9790,43 @@
                 <a:ea typeface="Sarabun"/>
                 <a:cs typeface="Sarabun"/>
               </a:rPr>
+              <a:t>sà-wàt-dii khráp</a:t>
+            </a:r>
+          </a:p>
+        </p:txBody>
+      </p:sp>
+      <p:sp>
+        <p:nvSpPr>
+          <p:cNvPr id="9" name="TextBox 8"/>
+          <p:cNvSpPr txBox="1"/>
+          <p:nvPr/>
+        </p:nvSpPr>
+        <p:spPr>
+          <a:xfrm>
+            <a:off x="1965960" y="1499616"/>
+            <a:ext cx="5836615" cy="201168"/>
+          </a:xfrm>
+          <a:prstGeom prst="rect">
+            <a:avLst/>
+          </a:prstGeom>
+          <a:noFill/>
+        </p:spPr>
+        <p:txBody>
+          <a:bodyPr wrap="square" anchor="t">
+            <a:spAutoFit/>
+          </a:bodyPr>
+          <a:lstStyle/>
+          <a:p>
+            <a:pPr algn="l"/>
+            <a:r>
+              <a:rPr sz="1700" b="0" i="0" lang="en-US" altLang="en-US">
+                <a:solidFill>
+                  <a:srgbClr val="566873"/>
+                </a:solidFill>
+                <a:latin typeface="Sarabun"/>
+                <a:ea typeface="Sarabun"/>
+                <a:cs typeface="Sarabun"/>
+              </a:rPr>
               <a:t>Hello.</a:t>
             </a:r>
           </a:p>
@@ -9340,13 +9834,13 @@
       </p:sp>
       <p:sp>
         <p:nvSpPr>
-          <p:cNvPr id="9" name="Rounded Rectangle 8"/>
+          <p:cNvPr id="10" name="Rounded Rectangle 9"/>
           <p:cNvSpPr/>
           <p:nvPr/>
         </p:nvSpPr>
         <p:spPr>
           <a:xfrm>
-            <a:off x="731520" y="1874520"/>
+            <a:off x="731520" y="2011680"/>
             <a:ext cx="1051560" cy="274320"/>
           </a:xfrm>
           <a:prstGeom prst="roundRect">
@@ -9396,14 +9890,14 @@
       </p:sp>
       <p:sp>
         <p:nvSpPr>
-          <p:cNvPr id="10" name="TextBox 9"/>
+          <p:cNvPr id="11" name="TextBox 10"/>
           <p:cNvSpPr txBox="1"/>
           <p:nvPr/>
         </p:nvSpPr>
         <p:spPr>
           <a:xfrm>
-            <a:off x="1965960" y="1847088"/>
-            <a:ext cx="5836615" cy="384048"/>
+            <a:off x="1965960" y="1984248"/>
+            <a:ext cx="5836615" cy="228600"/>
           </a:xfrm>
           <a:prstGeom prst="rect">
             <a:avLst/>
@@ -9418,7 +9912,7 @@
           <a:p>
             <a:pPr algn="l"/>
             <a:r>
-              <a:rPr sz="2600" b="1" i="0" lang="th-TH" altLang="en-US">
+              <a:rPr sz="1700" b="0" i="0" lang="th-TH" altLang="en-US">
                 <a:solidFill>
                   <a:srgbClr val="24333D"/>
                 </a:solidFill>
@@ -9428,30 +9922,19 @@
               </a:rPr>
               <a:t>สวัสดีค่ะ เบอร์ห้องอะไรคะ</a:t>
             </a:r>
-            <a:r>
-              <a:rPr sz="1700" b="0" i="1" lang="en-US" altLang="en-US">
-                <a:solidFill>
-                  <a:srgbClr val="566873"/>
-                </a:solidFill>
-                <a:latin typeface="Sarabun"/>
-                <a:ea typeface="Sarabun"/>
-                <a:cs typeface="Sarabun"/>
-              </a:rPr>
-              <a:t> (sà-wàt-dii khâ ber hâwng à-rai khá)</a:t>
-            </a:r>
-          </a:p>
-        </p:txBody>
-      </p:sp>
-      <p:sp>
-        <p:nvSpPr>
-          <p:cNvPr id="11" name="TextBox 10"/>
+          </a:p>
+        </p:txBody>
+      </p:sp>
+      <p:sp>
+        <p:nvSpPr>
+          <p:cNvPr id="12" name="TextBox 11"/>
           <p:cNvSpPr txBox="1"/>
           <p:nvPr/>
         </p:nvSpPr>
         <p:spPr>
           <a:xfrm>
-            <a:off x="1965960" y="2130552"/>
-            <a:ext cx="5836615" cy="228600"/>
+            <a:off x="1965960" y="2212848"/>
+            <a:ext cx="5836615" cy="201168"/>
           </a:xfrm>
           <a:prstGeom prst="rect">
             <a:avLst/>
@@ -9466,7 +9949,7 @@
           <a:p>
             <a:pPr algn="l"/>
             <a:r>
-              <a:rPr sz="1300" b="0" i="0" lang="en-US" altLang="en-US">
+              <a:rPr sz="1700" b="0" i="1" lang="en-US" altLang="en-US">
                 <a:solidFill>
                   <a:srgbClr val="566873"/>
                 </a:solidFill>
@@ -9474,6 +9957,43 @@
                 <a:ea typeface="Sarabun"/>
                 <a:cs typeface="Sarabun"/>
               </a:rPr>
+              <a:t>sà-wàt-dii khâ ber hâwng à-rai khá</a:t>
+            </a:r>
+          </a:p>
+        </p:txBody>
+      </p:sp>
+      <p:sp>
+        <p:nvSpPr>
+          <p:cNvPr id="13" name="TextBox 12"/>
+          <p:cNvSpPr txBox="1"/>
+          <p:nvPr/>
+        </p:nvSpPr>
+        <p:spPr>
+          <a:xfrm>
+            <a:off x="1965960" y="2414016"/>
+            <a:ext cx="5836615" cy="201168"/>
+          </a:xfrm>
+          <a:prstGeom prst="rect">
+            <a:avLst/>
+          </a:prstGeom>
+          <a:noFill/>
+        </p:spPr>
+        <p:txBody>
+          <a:bodyPr wrap="square" anchor="t">
+            <a:spAutoFit/>
+          </a:bodyPr>
+          <a:lstStyle/>
+          <a:p>
+            <a:pPr algn="l"/>
+            <a:r>
+              <a:rPr sz="1700" b="0" i="0" lang="en-US" altLang="en-US">
+                <a:solidFill>
+                  <a:srgbClr val="566873"/>
+                </a:solidFill>
+                <a:latin typeface="Sarabun"/>
+                <a:ea typeface="Sarabun"/>
+                <a:cs typeface="Sarabun"/>
+              </a:rPr>
               <a:t>Hello. What room number?</a:t>
             </a:r>
           </a:p>
@@ -9481,13 +10001,13 @@
       </p:sp>
       <p:sp>
         <p:nvSpPr>
-          <p:cNvPr id="12" name="Rounded Rectangle 11"/>
+          <p:cNvPr id="14" name="Rounded Rectangle 13"/>
           <p:cNvSpPr/>
           <p:nvPr/>
         </p:nvSpPr>
         <p:spPr>
           <a:xfrm>
-            <a:off x="731520" y="2651760"/>
+            <a:off x="731520" y="2926080"/>
             <a:ext cx="1051560" cy="274320"/>
           </a:xfrm>
           <a:prstGeom prst="roundRect">
@@ -9537,14 +10057,14 @@
       </p:sp>
       <p:sp>
         <p:nvSpPr>
-          <p:cNvPr id="13" name="TextBox 12"/>
+          <p:cNvPr id="15" name="TextBox 14"/>
           <p:cNvSpPr txBox="1"/>
           <p:nvPr/>
         </p:nvSpPr>
         <p:spPr>
           <a:xfrm>
-            <a:off x="1965960" y="2624328"/>
-            <a:ext cx="5836615" cy="384048"/>
+            <a:off x="1965960" y="2898648"/>
+            <a:ext cx="8823960" cy="228600"/>
           </a:xfrm>
           <a:prstGeom prst="rect">
             <a:avLst/>
@@ -9559,7 +10079,7 @@
           <a:p>
             <a:pPr algn="l"/>
             <a:r>
-              <a:rPr sz="2600" b="1" i="0" lang="th-TH" altLang="en-US">
+              <a:rPr sz="1700" b="0" i="0" lang="th-TH" altLang="en-US">
                 <a:solidFill>
                   <a:srgbClr val="24333D"/>
                 </a:solidFill>
@@ -9569,30 +10089,19 @@
               </a:rPr>
               <a:t>ห้า-ศูนย์-สองครับ</a:t>
             </a:r>
-            <a:r>
-              <a:rPr sz="1700" b="0" i="1" lang="en-US" altLang="en-US">
-                <a:solidFill>
-                  <a:srgbClr val="566873"/>
-                </a:solidFill>
-                <a:latin typeface="Sarabun"/>
-                <a:ea typeface="Sarabun"/>
-                <a:cs typeface="Sarabun"/>
-              </a:rPr>
-              <a:t> (hâa-sǔun-sǎawng khráp)</a:t>
-            </a:r>
-          </a:p>
-        </p:txBody>
-      </p:sp>
-      <p:sp>
-        <p:nvSpPr>
-          <p:cNvPr id="14" name="TextBox 13"/>
+          </a:p>
+        </p:txBody>
+      </p:sp>
+      <p:sp>
+        <p:nvSpPr>
+          <p:cNvPr id="16" name="TextBox 15"/>
           <p:cNvSpPr txBox="1"/>
           <p:nvPr/>
         </p:nvSpPr>
         <p:spPr>
           <a:xfrm>
-            <a:off x="1965960" y="2907792"/>
-            <a:ext cx="5836615" cy="228600"/>
+            <a:off x="1965960" y="3127248"/>
+            <a:ext cx="8823960" cy="201168"/>
           </a:xfrm>
           <a:prstGeom prst="rect">
             <a:avLst/>
@@ -9607,7 +10116,7 @@
           <a:p>
             <a:pPr algn="l"/>
             <a:r>
-              <a:rPr sz="1300" b="0" i="0" lang="en-US" altLang="en-US">
+              <a:rPr sz="1700" b="0" i="1" lang="en-US" altLang="en-US">
                 <a:solidFill>
                   <a:srgbClr val="566873"/>
                 </a:solidFill>
@@ -9615,6 +10124,43 @@
                 <a:ea typeface="Sarabun"/>
                 <a:cs typeface="Sarabun"/>
               </a:rPr>
+              <a:t>hâa-sǔun-sǎawng khráp</a:t>
+            </a:r>
+          </a:p>
+        </p:txBody>
+      </p:sp>
+      <p:sp>
+        <p:nvSpPr>
+          <p:cNvPr id="17" name="TextBox 16"/>
+          <p:cNvSpPr txBox="1"/>
+          <p:nvPr/>
+        </p:nvSpPr>
+        <p:spPr>
+          <a:xfrm>
+            <a:off x="1965960" y="3328416"/>
+            <a:ext cx="8823960" cy="201168"/>
+          </a:xfrm>
+          <a:prstGeom prst="rect">
+            <a:avLst/>
+          </a:prstGeom>
+          <a:noFill/>
+        </p:spPr>
+        <p:txBody>
+          <a:bodyPr wrap="square" anchor="t">
+            <a:spAutoFit/>
+          </a:bodyPr>
+          <a:lstStyle/>
+          <a:p>
+            <a:pPr algn="l"/>
+            <a:r>
+              <a:rPr sz="1700" b="0" i="0" lang="en-US" altLang="en-US">
+                <a:solidFill>
+                  <a:srgbClr val="566873"/>
+                </a:solidFill>
+                <a:latin typeface="Sarabun"/>
+                <a:ea typeface="Sarabun"/>
+                <a:cs typeface="Sarabun"/>
+              </a:rPr>
               <a:t>502.</a:t>
             </a:r>
           </a:p>
@@ -9622,13 +10168,13 @@
       </p:sp>
       <p:sp>
         <p:nvSpPr>
-          <p:cNvPr id="15" name="Rounded Rectangle 14"/>
+          <p:cNvPr id="18" name="Rounded Rectangle 17"/>
           <p:cNvSpPr/>
           <p:nvPr/>
         </p:nvSpPr>
         <p:spPr>
           <a:xfrm>
-            <a:off x="731520" y="3429000"/>
+            <a:off x="731520" y="3840480"/>
             <a:ext cx="1051560" cy="274320"/>
           </a:xfrm>
           <a:prstGeom prst="roundRect">
@@ -9678,14 +10224,14 @@
       </p:sp>
       <p:sp>
         <p:nvSpPr>
-          <p:cNvPr id="16" name="TextBox 15"/>
+          <p:cNvPr id="19" name="TextBox 18"/>
           <p:cNvSpPr txBox="1"/>
           <p:nvPr/>
         </p:nvSpPr>
         <p:spPr>
           <a:xfrm>
-            <a:off x="1965960" y="3401568"/>
-            <a:ext cx="8823960" cy="384048"/>
+            <a:off x="1965960" y="3813048"/>
+            <a:ext cx="8823960" cy="228600"/>
           </a:xfrm>
           <a:prstGeom prst="rect">
             <a:avLst/>
@@ -9700,7 +10246,7 @@
           <a:p>
             <a:pPr algn="l"/>
             <a:r>
-              <a:rPr sz="2600" b="1" i="0" lang="th-TH" altLang="en-US">
+              <a:rPr sz="1700" b="0" i="0" lang="th-TH" altLang="en-US">
                 <a:solidFill>
                   <a:srgbClr val="24333D"/>
                 </a:solidFill>
@@ -9710,30 +10256,19 @@
               </a:rPr>
               <a:t>ค่ะ คุณอายุเท่าไหร่คะ</a:t>
             </a:r>
-            <a:r>
-              <a:rPr sz="1700" b="0" i="1" lang="en-US" altLang="en-US">
-                <a:solidFill>
-                  <a:srgbClr val="566873"/>
-                </a:solidFill>
-                <a:latin typeface="Sarabun"/>
-                <a:ea typeface="Sarabun"/>
-                <a:cs typeface="Sarabun"/>
-              </a:rPr>
-              <a:t> (khâ khun aa-yú thâo-rài khá)</a:t>
-            </a:r>
-          </a:p>
-        </p:txBody>
-      </p:sp>
-      <p:sp>
-        <p:nvSpPr>
-          <p:cNvPr id="17" name="TextBox 16"/>
+          </a:p>
+        </p:txBody>
+      </p:sp>
+      <p:sp>
+        <p:nvSpPr>
+          <p:cNvPr id="20" name="TextBox 19"/>
           <p:cNvSpPr txBox="1"/>
           <p:nvPr/>
         </p:nvSpPr>
         <p:spPr>
           <a:xfrm>
-            <a:off x="1965960" y="3685032"/>
-            <a:ext cx="8823960" cy="228600"/>
+            <a:off x="1965960" y="4041648"/>
+            <a:ext cx="8823960" cy="201168"/>
           </a:xfrm>
           <a:prstGeom prst="rect">
             <a:avLst/>
@@ -9748,7 +10283,7 @@
           <a:p>
             <a:pPr algn="l"/>
             <a:r>
-              <a:rPr sz="1300" b="0" i="0" lang="en-US" altLang="en-US">
+              <a:rPr sz="1700" b="0" i="1" lang="en-US" altLang="en-US">
                 <a:solidFill>
                   <a:srgbClr val="566873"/>
                 </a:solidFill>
@@ -9756,6 +10291,43 @@
                 <a:ea typeface="Sarabun"/>
                 <a:cs typeface="Sarabun"/>
               </a:rPr>
+              <a:t>khâ khun aa-yú thâo-rài khá</a:t>
+            </a:r>
+          </a:p>
+        </p:txBody>
+      </p:sp>
+      <p:sp>
+        <p:nvSpPr>
+          <p:cNvPr id="21" name="TextBox 20"/>
+          <p:cNvSpPr txBox="1"/>
+          <p:nvPr/>
+        </p:nvSpPr>
+        <p:spPr>
+          <a:xfrm>
+            <a:off x="1965960" y="4242816"/>
+            <a:ext cx="8823960" cy="201168"/>
+          </a:xfrm>
+          <a:prstGeom prst="rect">
+            <a:avLst/>
+          </a:prstGeom>
+          <a:noFill/>
+        </p:spPr>
+        <p:txBody>
+          <a:bodyPr wrap="square" anchor="t">
+            <a:spAutoFit/>
+          </a:bodyPr>
+          <a:lstStyle/>
+          <a:p>
+            <a:pPr algn="l"/>
+            <a:r>
+              <a:rPr sz="1700" b="0" i="0" lang="en-US" altLang="en-US">
+                <a:solidFill>
+                  <a:srgbClr val="566873"/>
+                </a:solidFill>
+                <a:latin typeface="Sarabun"/>
+                <a:ea typeface="Sarabun"/>
+                <a:cs typeface="Sarabun"/>
+              </a:rPr>
               <a:t>How old are you?</a:t>
             </a:r>
           </a:p>
@@ -9763,13 +10335,13 @@
       </p:sp>
       <p:sp>
         <p:nvSpPr>
-          <p:cNvPr id="18" name="Rounded Rectangle 17"/>
+          <p:cNvPr id="22" name="Rounded Rectangle 21"/>
           <p:cNvSpPr/>
           <p:nvPr/>
         </p:nvSpPr>
         <p:spPr>
           <a:xfrm>
-            <a:off x="731520" y="4206240"/>
+            <a:off x="731520" y="4754880"/>
             <a:ext cx="1051560" cy="274320"/>
           </a:xfrm>
           <a:prstGeom prst="roundRect">
@@ -9819,14 +10391,14 @@
       </p:sp>
       <p:sp>
         <p:nvSpPr>
-          <p:cNvPr id="19" name="TextBox 18"/>
+          <p:cNvPr id="23" name="TextBox 22"/>
           <p:cNvSpPr txBox="1"/>
           <p:nvPr/>
         </p:nvSpPr>
         <p:spPr>
           <a:xfrm>
-            <a:off x="1965960" y="4178808"/>
-            <a:ext cx="8823960" cy="384048"/>
+            <a:off x="1965960" y="4727448"/>
+            <a:ext cx="8823960" cy="228600"/>
           </a:xfrm>
           <a:prstGeom prst="rect">
             <a:avLst/>
@@ -9841,7 +10413,7 @@
           <a:p>
             <a:pPr algn="l"/>
             <a:r>
-              <a:rPr sz="2600" b="1" i="0" lang="th-TH" altLang="en-US">
+              <a:rPr sz="1700" b="0" i="0" lang="th-TH" altLang="en-US">
                 <a:solidFill>
                   <a:srgbClr val="24333D"/>
                 </a:solidFill>
@@ -9851,30 +10423,19 @@
               </a:rPr>
               <a:t>ผมอายุสามสิบปีครับ</a:t>
             </a:r>
-            <a:r>
-              <a:rPr sz="1700" b="0" i="1" lang="en-US" altLang="en-US">
-                <a:solidFill>
-                  <a:srgbClr val="566873"/>
-                </a:solidFill>
-                <a:latin typeface="Sarabun"/>
-                <a:ea typeface="Sarabun"/>
-                <a:cs typeface="Sarabun"/>
-              </a:rPr>
-              <a:t> (phǒm aa-yú sǎam-sìp bpii khráp)</a:t>
-            </a:r>
-          </a:p>
-        </p:txBody>
-      </p:sp>
-      <p:sp>
-        <p:nvSpPr>
-          <p:cNvPr id="20" name="TextBox 19"/>
+          </a:p>
+        </p:txBody>
+      </p:sp>
+      <p:sp>
+        <p:nvSpPr>
+          <p:cNvPr id="24" name="TextBox 23"/>
           <p:cNvSpPr txBox="1"/>
           <p:nvPr/>
         </p:nvSpPr>
         <p:spPr>
           <a:xfrm>
-            <a:off x="1965960" y="4462272"/>
-            <a:ext cx="8823960" cy="228600"/>
+            <a:off x="1965960" y="4956048"/>
+            <a:ext cx="8823960" cy="201168"/>
           </a:xfrm>
           <a:prstGeom prst="rect">
             <a:avLst/>
@@ -9889,7 +10450,7 @@
           <a:p>
             <a:pPr algn="l"/>
             <a:r>
-              <a:rPr sz="1300" b="0" i="0" lang="en-US" altLang="en-US">
+              <a:rPr sz="1700" b="0" i="1" lang="en-US" altLang="en-US">
                 <a:solidFill>
                   <a:srgbClr val="566873"/>
                 </a:solidFill>
@@ -9897,77 +10458,21 @@
                 <a:ea typeface="Sarabun"/>
                 <a:cs typeface="Sarabun"/>
               </a:rPr>
-              <a:t>I am thirty.</a:t>
-            </a:r>
-          </a:p>
-        </p:txBody>
-      </p:sp>
-      <p:sp>
-        <p:nvSpPr>
-          <p:cNvPr id="21" name="Rounded Rectangle 20"/>
-          <p:cNvSpPr/>
-          <p:nvPr/>
-        </p:nvSpPr>
-        <p:spPr>
-          <a:xfrm>
-            <a:off x="731520" y="4983480"/>
-            <a:ext cx="1051560" cy="274320"/>
-          </a:xfrm>
-          <a:prstGeom prst="roundRect">
-            <a:avLst>
-              <a:gd name="adj" fmla="val 28000"/>
-            </a:avLst>
-          </a:prstGeom>
-          <a:solidFill>
-            <a:srgbClr val="C96F4A"/>
-          </a:solidFill>
-          <a:ln>
-            <a:noFill/>
-          </a:ln>
-        </p:spPr>
-        <p:style>
-          <a:lnRef idx="1">
-            <a:schemeClr val="accent1"/>
-          </a:lnRef>
-          <a:fillRef idx="3">
-            <a:schemeClr val="accent1"/>
-          </a:fillRef>
-          <a:effectRef idx="2">
-            <a:schemeClr val="accent1"/>
-          </a:effectRef>
-          <a:fontRef idx="minor">
-            <a:schemeClr val="lt1"/>
-          </a:fontRef>
-        </p:style>
-        <p:txBody>
-          <a:bodyPr rtlCol="0" anchor="ctr" wrap="none"/>
-          <a:lstStyle/>
-          <a:p>
-            <a:pPr algn="ctr"/>
-            <a:r>
-              <a:rPr sz="1200" b="1" lang="en-US" altLang="en-US">
-                <a:solidFill>
-                  <a:srgbClr val="FFFFFF"/>
-                </a:solidFill>
-                <a:latin typeface="Sarabun"/>
-                <a:ea typeface="Sarabun"/>
-                <a:cs typeface="Sarabun"/>
-              </a:rPr>
-              <a:t>Staff</a:t>
-            </a:r>
-          </a:p>
-        </p:txBody>
-      </p:sp>
-      <p:sp>
-        <p:nvSpPr>
-          <p:cNvPr id="22" name="TextBox 21"/>
+              <a:t>phǒm aa-yú sǎam-sìp bpii khráp</a:t>
+            </a:r>
+          </a:p>
+        </p:txBody>
+      </p:sp>
+      <p:sp>
+        <p:nvSpPr>
+          <p:cNvPr id="25" name="TextBox 24"/>
           <p:cNvSpPr txBox="1"/>
           <p:nvPr/>
         </p:nvSpPr>
         <p:spPr>
           <a:xfrm>
-            <a:off x="1965960" y="4956048"/>
-            <a:ext cx="8823960" cy="384048"/>
+            <a:off x="1965960" y="5157216"/>
+            <a:ext cx="8823960" cy="201168"/>
           </a:xfrm>
           <a:prstGeom prst="rect">
             <a:avLst/>
@@ -9982,18 +10487,7 @@
           <a:p>
             <a:pPr algn="l"/>
             <a:r>
-              <a:rPr sz="2600" b="1" i="0" lang="th-TH" altLang="en-US">
-                <a:solidFill>
-                  <a:srgbClr val="24333D"/>
-                </a:solidFill>
-                <a:latin typeface="Sarabun"/>
-                <a:ea typeface="Sarabun"/>
-                <a:cs typeface="Sarabun"/>
-              </a:rPr>
-              <a:t>ขอบคุณค่ะ</a:t>
-            </a:r>
-            <a:r>
-              <a:rPr sz="1700" b="0" i="1" lang="en-US" altLang="en-US">
+              <a:rPr sz="1700" b="0" i="0" lang="en-US" altLang="en-US">
                 <a:solidFill>
                   <a:srgbClr val="566873"/>
                 </a:solidFill>
@@ -10001,44 +10495,7 @@
                 <a:ea typeface="Sarabun"/>
                 <a:cs typeface="Sarabun"/>
               </a:rPr>
-              <a:t> (khàawp-khun khâ)</a:t>
-            </a:r>
-          </a:p>
-        </p:txBody>
-      </p:sp>
-      <p:sp>
-        <p:nvSpPr>
-          <p:cNvPr id="23" name="TextBox 22"/>
-          <p:cNvSpPr txBox="1"/>
-          <p:nvPr/>
-        </p:nvSpPr>
-        <p:spPr>
-          <a:xfrm>
-            <a:off x="1965960" y="5239512"/>
-            <a:ext cx="8823960" cy="228600"/>
-          </a:xfrm>
-          <a:prstGeom prst="rect">
-            <a:avLst/>
-          </a:prstGeom>
-          <a:noFill/>
-        </p:spPr>
-        <p:txBody>
-          <a:bodyPr wrap="square" anchor="t">
-            <a:spAutoFit/>
-          </a:bodyPr>
-          <a:lstStyle/>
-          <a:p>
-            <a:pPr algn="l"/>
-            <a:r>
-              <a:rPr sz="1300" b="0" i="0" lang="en-US" altLang="en-US">
-                <a:solidFill>
-                  <a:srgbClr val="566873"/>
-                </a:solidFill>
-                <a:latin typeface="Sarabun"/>
-                <a:ea typeface="Sarabun"/>
-                <a:cs typeface="Sarabun"/>
-              </a:rPr>
-              <a:t>Thank you.</a:t>
+              <a:t>I am thirty.</a:t>
             </a:r>
           </a:p>
         </p:txBody>

--- a/course/modules/M01/L004/M01-L004-canva-deck.pptx
+++ b/course/modules/M01/L004/M01-L004-canva-deck.pptx
@@ -14,6 +14,8 @@
     <p:sldId id="262" r:id="rId14"/>
     <p:sldId id="263" r:id="rId15"/>
     <p:sldId id="264" r:id="rId16"/>
+    <p:sldId id="265" r:id="rId17"/>
+    <p:sldId id="266" r:id="rId18"/>
   </p:sldIdLst>
   <p:sldSz cx="12191695" cy="6858000" type="screen4x3"/>
   <p:notesSz cx="6858000" cy="9144000"/>
@@ -517,17 +519,7 @@
           </a:p>
           <a:p>
             <a:r>
-              <a:t>• Listen and repeat: ศูนย์, หนึ่ง, สอง, สาม, สี่, ห้า. Now backwards.</a:t>
-            </a:r>
-          </a:p>
-          <a:p>
-            <a:r>
-              <a:t>• Pause-and-produce: I say a number in English. Say the Thai before I show it. Two. Four. Zero. Five.</a:t>
-            </a:r>
-          </a:p>
-          <a:p>
-            <a:r>
-              <a:t>• Room number drill: room 301? สาม-ศูนย์-หนึ่ง. Room 205? สอง-ศูนย์-ห้า. Your turn.</a:t>
+              <a:t>• Teach the first six Thai digits with listen-repeat-use.</a:t>
             </a:r>
           </a:p>
           <a:p/>
@@ -605,17 +597,17 @@
           </a:p>
           <a:p>
             <a:r>
-              <a:t>• Response-building: I ask เบอร์อะไร. Room 409? สี่-ศูนย์-เก้า. Room 108? หนึ่ง-ศูนย์-แปด.</a:t>
-            </a:r>
-          </a:p>
-          <a:p>
-            <a:r>
-              <a:t>• Substitution: build your age sentence. Thirty? ผมอายุสามสิบปีครับ. Twenty-five? ฉันอายุยี่สิบห้าปีค่ะ.</a:t>
-            </a:r>
-          </a:p>
-          <a:p>
-            <a:r>
-              <a:t>• Pause-and-produce: someone asks คุณอายุเท่าไหร่. Say your real age in Thai.</a:t>
+              <a:t>• Listen and repeat: ศูนย์, หนึ่ง, สอง, สาม, สี่, ห้า. Now backwards.</a:t>
+            </a:r>
+          </a:p>
+          <a:p>
+            <a:r>
+              <a:t>• Pause-and-produce: I say a number in English. Say the Thai before I show it. Two. Four. Zero. Five.</a:t>
+            </a:r>
+          </a:p>
+          <a:p>
+            <a:r>
+              <a:t>• Room number drill: room 301? สาม-ศูนย์-หนึ่ง. Room 205? สอง-ศูนย์-ห้า. Your turn.</a:t>
             </a:r>
           </a:p>
           <a:p/>
@@ -642,6 +634,172 @@
 </file>
 
 <file path=ppt/notesSlides/notesSlide3.xml><?xml version="1.0" encoding="utf-8"?>
+<p:notes xmlns:a="http://schemas.openxmlformats.org/drawingml/2006/main" xmlns:p="http://schemas.openxmlformats.org/presentationml/2006/main" xmlns:r="http://schemas.openxmlformats.org/officeDocument/2006/relationships">
+  <p:cSld>
+    <p:spTree>
+      <p:nvGrpSpPr>
+        <p:cNvPr id="1" name=""/>
+        <p:cNvGrpSpPr/>
+        <p:nvPr/>
+      </p:nvGrpSpPr>
+      <p:grpSpPr>
+        <a:xfrm>
+          <a:off x="0" y="0"/>
+          <a:ext cx="0" cy="0"/>
+          <a:chOff x="0" y="0"/>
+          <a:chExt cx="0" cy="0"/>
+        </a:xfrm>
+      </p:grpSpPr>
+      <p:sp>
+        <p:nvSpPr>
+          <p:cNvPr id="2" name="Slide Image Placeholder 1"/>
+          <p:cNvSpPr>
+            <a:spLocks noGrp="1"/>
+          </p:cNvSpPr>
+          <p:nvPr>
+            <p:ph type="sldImg" idx="2"/>
+          </p:nvPr>
+        </p:nvSpPr>
+        <p:spPr/>
+      </p:sp>
+      <p:sp>
+        <p:nvSpPr>
+          <p:cNvPr id="3" name="Notes Placeholder 2"/>
+          <p:cNvSpPr>
+            <a:spLocks noGrp="1"/>
+          </p:cNvSpPr>
+          <p:nvPr>
+            <p:ph type="body" idx="3" sz="quarter"/>
+          </p:nvPr>
+        </p:nvSpPr>
+        <p:spPr/>
+        <p:txBody>
+          <a:bodyPr/>
+          <a:lstStyle/>
+          <a:p/>
+          <a:p/>
+          <a:p>
+            <a:r>
+              <a:t>[Practice — moved to notes, no room on slide]</a:t>
+            </a:r>
+          </a:p>
+          <a:p>
+            <a:r>
+              <a:t>• Complete the digit set and practise the full 0-10 count in queue and floor scenarios.</a:t>
+            </a:r>
+          </a:p>
+          <a:p/>
+        </p:txBody>
+      </p:sp>
+      <p:sp>
+        <p:nvSpPr>
+          <p:cNvPr id="4" name="Slide Number Placeholder 3"/>
+          <p:cNvSpPr>
+            <a:spLocks noGrp="1"/>
+          </p:cNvSpPr>
+          <p:nvPr>
+            <p:ph type="sldNum" idx="5" sz="quarter"/>
+          </p:nvPr>
+        </p:nvSpPr>
+        <p:spPr/>
+      </p:sp>
+    </p:spTree>
+  </p:cSld>
+  <p:clrMapOvr>
+    <a:masterClrMapping/>
+  </p:clrMapOvr>
+</p:notes>
+</file>
+
+<file path=ppt/notesSlides/notesSlide4.xml><?xml version="1.0" encoding="utf-8"?>
+<p:notes xmlns:a="http://schemas.openxmlformats.org/drawingml/2006/main" xmlns:p="http://schemas.openxmlformats.org/presentationml/2006/main" xmlns:r="http://schemas.openxmlformats.org/officeDocument/2006/relationships">
+  <p:cSld>
+    <p:spTree>
+      <p:nvGrpSpPr>
+        <p:cNvPr id="1" name=""/>
+        <p:cNvGrpSpPr/>
+        <p:nvPr/>
+      </p:nvGrpSpPr>
+      <p:grpSpPr>
+        <a:xfrm>
+          <a:off x="0" y="0"/>
+          <a:ext cx="0" cy="0"/>
+          <a:chOff x="0" y="0"/>
+          <a:chExt cx="0" cy="0"/>
+        </a:xfrm>
+      </p:grpSpPr>
+      <p:sp>
+        <p:nvSpPr>
+          <p:cNvPr id="2" name="Slide Image Placeholder 1"/>
+          <p:cNvSpPr>
+            <a:spLocks noGrp="1"/>
+          </p:cNvSpPr>
+          <p:nvPr>
+            <p:ph type="sldImg" idx="2"/>
+          </p:nvPr>
+        </p:nvSpPr>
+        <p:spPr/>
+      </p:sp>
+      <p:sp>
+        <p:nvSpPr>
+          <p:cNvPr id="3" name="Notes Placeholder 2"/>
+          <p:cNvSpPr>
+            <a:spLocks noGrp="1"/>
+          </p:cNvSpPr>
+          <p:nvPr>
+            <p:ph type="body" idx="3" sz="quarter"/>
+          </p:nvPr>
+        </p:nvSpPr>
+        <p:spPr/>
+        <p:txBody>
+          <a:bodyPr/>
+          <a:lstStyle/>
+          <a:p/>
+          <a:p/>
+          <a:p>
+            <a:r>
+              <a:t>[Practice — moved to notes, no room on slide]</a:t>
+            </a:r>
+          </a:p>
+          <a:p>
+            <a:r>
+              <a:t>• Response-building: I ask เบอร์อะไร. Room 409? สี่-ศูนย์-เก้า. Room 108? หนึ่ง-ศูนย์-แปด.</a:t>
+            </a:r>
+          </a:p>
+          <a:p>
+            <a:r>
+              <a:t>• Substitution: build your age sentence. Thirty? ผมอายุสามสิบปีครับ. Twenty-five? ฉันอายุยี่สิบห้าปีค่ะ.</a:t>
+            </a:r>
+          </a:p>
+          <a:p>
+            <a:r>
+              <a:t>• Pause-and-produce: someone asks คุณอายุเท่าไหร่. Say your real age in Thai.</a:t>
+            </a:r>
+          </a:p>
+          <a:p/>
+        </p:txBody>
+      </p:sp>
+      <p:sp>
+        <p:nvSpPr>
+          <p:cNvPr id="4" name="Slide Number Placeholder 3"/>
+          <p:cNvSpPr>
+            <a:spLocks noGrp="1"/>
+          </p:cNvSpPr>
+          <p:nvPr>
+            <p:ph type="sldNum" idx="5" sz="quarter"/>
+          </p:nvPr>
+        </p:nvSpPr>
+        <p:spPr/>
+      </p:sp>
+    </p:spTree>
+  </p:cSld>
+  <p:clrMapOvr>
+    <a:masterClrMapping/>
+  </p:clrMapOvr>
+</p:notes>
+</file>
+
+<file path=ppt/notesSlides/notesSlide5.xml><?xml version="1.0" encoding="utf-8"?>
 <p:notes xmlns:a="http://schemas.openxmlformats.org/drawingml/2006/main" xmlns:p="http://schemas.openxmlformats.org/presentationml/2006/main" xmlns:r="http://schemas.openxmlformats.org/officeDocument/2006/relationships">
   <p:cSld>
     <p:spTree>
@@ -4166,6 +4324,1234 @@
 </p:sld>
 </file>
 
+<file path=ppt/slides/slide10.xml><?xml version="1.0" encoding="utf-8"?>
+<p:sld xmlns:a="http://schemas.openxmlformats.org/drawingml/2006/main" xmlns:p="http://schemas.openxmlformats.org/presentationml/2006/main" xmlns:r="http://schemas.openxmlformats.org/officeDocument/2006/relationships">
+  <p:cSld>
+    <p:bg>
+      <p:bgPr>
+        <a:solidFill>
+          <a:srgbClr val="F5F7F8"/>
+        </a:solidFill>
+        <a:effectLst/>
+      </p:bgPr>
+    </p:bg>
+    <p:spTree>
+      <p:nvGrpSpPr>
+        <p:cNvPr id="1" name=""/>
+        <p:cNvGrpSpPr/>
+        <p:nvPr/>
+      </p:nvGrpSpPr>
+      <p:grpSpPr/>
+      <p:sp>
+        <p:nvSpPr>
+          <p:cNvPr id="2" name="__pip_placeholder__"/>
+          <p:cNvSpPr/>
+          <p:nvPr/>
+        </p:nvSpPr>
+        <p:spPr>
+          <a:xfrm>
+            <a:off x="8351215" y="0"/>
+            <a:ext cx="3840480" cy="2880360"/>
+          </a:xfrm>
+          <a:prstGeom prst="rect">
+            <a:avLst/>
+          </a:prstGeom>
+          <a:solidFill>
+            <a:srgbClr val="DBE7EC">
+              <a:alpha val="30000"/>
+            </a:srgbClr>
+          </a:solidFill>
+          <a:ln w="19050">
+            <a:solidFill>
+              <a:srgbClr val="355C7D"/>
+            </a:solidFill>
+            <a:prstDash val="sysDash"/>
+          </a:ln>
+        </p:spPr>
+        <p:style>
+          <a:lnRef idx="1">
+            <a:schemeClr val="accent1"/>
+          </a:lnRef>
+          <a:fillRef idx="3">
+            <a:schemeClr val="accent1"/>
+          </a:fillRef>
+          <a:effectRef idx="2">
+            <a:schemeClr val="accent1"/>
+          </a:effectRef>
+          <a:fontRef idx="minor">
+            <a:schemeClr val="lt1"/>
+          </a:fontRef>
+        </p:style>
+        <p:txBody>
+          <a:bodyPr rtlCol="0" anchor="ctr" wrap="none"/>
+          <a:lstStyle/>
+          <a:p>
+            <a:pPr algn="ctr"/>
+            <a:r>
+              <a:rPr sz="1800" b="1">
+                <a:solidFill>
+                  <a:srgbClr val="355C7D"/>
+                </a:solidFill>
+                <a:latin typeface="Sarabun"/>
+              </a:rPr>
+              <a:t>Nine</a:t>
+            </a:r>
+          </a:p>
+        </p:txBody>
+      </p:sp>
+      <p:sp>
+        <p:nvSpPr>
+          <p:cNvPr id="3" name="Rectangle 2"/>
+          <p:cNvSpPr/>
+          <p:nvPr/>
+        </p:nvSpPr>
+        <p:spPr>
+          <a:xfrm>
+            <a:off x="0" y="0"/>
+            <a:ext cx="12191695" cy="63500"/>
+          </a:xfrm>
+          <a:prstGeom prst="rect">
+            <a:avLst/>
+          </a:prstGeom>
+          <a:solidFill>
+            <a:srgbClr val="355C7D"/>
+          </a:solidFill>
+          <a:ln>
+            <a:noFill/>
+          </a:ln>
+        </p:spPr>
+        <p:style>
+          <a:lnRef idx="1">
+            <a:schemeClr val="accent1"/>
+          </a:lnRef>
+          <a:fillRef idx="3">
+            <a:schemeClr val="accent1"/>
+          </a:fillRef>
+          <a:effectRef idx="2">
+            <a:schemeClr val="accent1"/>
+          </a:effectRef>
+          <a:fontRef idx="minor">
+            <a:schemeClr val="lt1"/>
+          </a:fontRef>
+        </p:style>
+        <p:txBody>
+          <a:bodyPr rtlCol="0" anchor="ctr"/>
+          <a:lstStyle/>
+          <a:p>
+            <a:pPr algn="ctr"/>
+          </a:p>
+        </p:txBody>
+      </p:sp>
+      <p:sp>
+        <p:nvSpPr>
+          <p:cNvPr id="4" name="TextBox 3"/>
+          <p:cNvSpPr txBox="1"/>
+          <p:nvPr/>
+        </p:nvSpPr>
+        <p:spPr>
+          <a:xfrm>
+            <a:off x="731520" y="256032"/>
+            <a:ext cx="7071055" cy="256032"/>
+          </a:xfrm>
+          <a:prstGeom prst="rect">
+            <a:avLst/>
+          </a:prstGeom>
+          <a:noFill/>
+        </p:spPr>
+        <p:txBody>
+          <a:bodyPr wrap="square" anchor="t">
+            <a:spAutoFit/>
+          </a:bodyPr>
+          <a:lstStyle/>
+          <a:p>
+            <a:pPr algn="l"/>
+            <a:r>
+              <a:rPr sz="1200" b="1" i="0" lang="en-US" altLang="en-US">
+                <a:solidFill>
+                  <a:srgbClr val="355C7D"/>
+                </a:solidFill>
+                <a:latin typeface="Sarabun"/>
+                <a:ea typeface="Sarabun"/>
+                <a:cs typeface="Sarabun"/>
+              </a:rPr>
+              <a:t>Recap</a:t>
+            </a:r>
+          </a:p>
+        </p:txBody>
+      </p:sp>
+      <p:sp>
+        <p:nvSpPr>
+          <p:cNvPr id="5" name="TextBox 4"/>
+          <p:cNvSpPr txBox="1"/>
+          <p:nvPr/>
+        </p:nvSpPr>
+        <p:spPr>
+          <a:xfrm>
+            <a:off x="731520" y="530352"/>
+            <a:ext cx="7071055" cy="640080"/>
+          </a:xfrm>
+          <a:prstGeom prst="rect">
+            <a:avLst/>
+          </a:prstGeom>
+          <a:noFill/>
+        </p:spPr>
+        <p:txBody>
+          <a:bodyPr wrap="square" anchor="t">
+            <a:spAutoFit/>
+          </a:bodyPr>
+          <a:lstStyle/>
+          <a:p>
+            <a:pPr algn="l"/>
+            <a:r>
+              <a:rPr sz="3600" b="1" i="0" lang="en-US" altLang="en-US">
+                <a:solidFill>
+                  <a:srgbClr val="24333D"/>
+                </a:solidFill>
+                <a:latin typeface="Sarabun"/>
+                <a:ea typeface="Sarabun"/>
+                <a:cs typeface="Sarabun"/>
+              </a:rPr>
+              <a:t>Recap</a:t>
+            </a:r>
+          </a:p>
+        </p:txBody>
+      </p:sp>
+      <p:sp>
+        <p:nvSpPr>
+          <p:cNvPr id="6" name="TextBox 5"/>
+          <p:cNvSpPr txBox="1"/>
+          <p:nvPr/>
+        </p:nvSpPr>
+        <p:spPr>
+          <a:xfrm>
+            <a:off x="932688" y="1563624"/>
+            <a:ext cx="6705295" cy="228600"/>
+          </a:xfrm>
+          <a:prstGeom prst="rect">
+            <a:avLst/>
+          </a:prstGeom>
+          <a:noFill/>
+        </p:spPr>
+        <p:txBody>
+          <a:bodyPr wrap="square" anchor="t">
+            <a:spAutoFit/>
+          </a:bodyPr>
+          <a:lstStyle/>
+          <a:p>
+            <a:pPr algn="l"/>
+            <a:r>
+              <a:rPr sz="1700" b="1" i="0" lang="en-US" altLang="en-US">
+                <a:solidFill>
+                  <a:srgbClr val="355C7D"/>
+                </a:solidFill>
+                <a:latin typeface="Sarabun"/>
+                <a:ea typeface="Sarabun"/>
+                <a:cs typeface="Sarabun"/>
+              </a:rPr>
+              <a:t>What you can now do</a:t>
+            </a:r>
+          </a:p>
+        </p:txBody>
+      </p:sp>
+      <p:sp>
+        <p:nvSpPr>
+          <p:cNvPr id="7" name="Oval 6"/>
+          <p:cNvSpPr/>
+          <p:nvPr/>
+        </p:nvSpPr>
+        <p:spPr>
+          <a:xfrm>
+            <a:off x="932688" y="1947672"/>
+            <a:ext cx="82296" cy="82296"/>
+          </a:xfrm>
+          <a:prstGeom prst="ellipse">
+            <a:avLst/>
+          </a:prstGeom>
+          <a:solidFill>
+            <a:srgbClr val="355C7D"/>
+          </a:solidFill>
+          <a:ln>
+            <a:noFill/>
+          </a:ln>
+        </p:spPr>
+        <p:style>
+          <a:lnRef idx="1">
+            <a:schemeClr val="accent1"/>
+          </a:lnRef>
+          <a:fillRef idx="3">
+            <a:schemeClr val="accent1"/>
+          </a:fillRef>
+          <a:effectRef idx="2">
+            <a:schemeClr val="accent1"/>
+          </a:effectRef>
+          <a:fontRef idx="minor">
+            <a:schemeClr val="lt1"/>
+          </a:fontRef>
+        </p:style>
+        <p:txBody>
+          <a:bodyPr rtlCol="0" anchor="ctr"/>
+          <a:lstStyle/>
+          <a:p>
+            <a:pPr algn="ctr"/>
+          </a:p>
+        </p:txBody>
+      </p:sp>
+      <p:sp>
+        <p:nvSpPr>
+          <p:cNvPr id="8" name="TextBox 7"/>
+          <p:cNvSpPr txBox="1"/>
+          <p:nvPr/>
+        </p:nvSpPr>
+        <p:spPr>
+          <a:xfrm>
+            <a:off x="1078992" y="1856232"/>
+            <a:ext cx="6568135" cy="274320"/>
+          </a:xfrm>
+          <a:prstGeom prst="rect">
+            <a:avLst/>
+          </a:prstGeom>
+          <a:noFill/>
+        </p:spPr>
+        <p:txBody>
+          <a:bodyPr wrap="square" anchor="t">
+            <a:spAutoFit/>
+          </a:bodyPr>
+          <a:lstStyle/>
+          <a:p>
+            <a:pPr algn="l"/>
+            <a:r>
+              <a:rPr sz="1700" b="0" i="0" lang="en-US" altLang="en-US">
+                <a:solidFill>
+                  <a:srgbClr val="24333D"/>
+                </a:solidFill>
+                <a:latin typeface="Sarabun"/>
+                <a:ea typeface="Sarabun"/>
+                <a:cs typeface="Sarabun"/>
+              </a:rPr>
+              <a:t>Count 0 to 5 in Thai. Go.</a:t>
+            </a:r>
+          </a:p>
+        </p:txBody>
+      </p:sp>
+      <p:sp>
+        <p:nvSpPr>
+          <p:cNvPr id="9" name="Oval 8"/>
+          <p:cNvSpPr/>
+          <p:nvPr/>
+        </p:nvSpPr>
+        <p:spPr>
+          <a:xfrm>
+            <a:off x="932688" y="2276856"/>
+            <a:ext cx="82296" cy="82296"/>
+          </a:xfrm>
+          <a:prstGeom prst="ellipse">
+            <a:avLst/>
+          </a:prstGeom>
+          <a:solidFill>
+            <a:srgbClr val="355C7D"/>
+          </a:solidFill>
+          <a:ln>
+            <a:noFill/>
+          </a:ln>
+        </p:spPr>
+        <p:style>
+          <a:lnRef idx="1">
+            <a:schemeClr val="accent1"/>
+          </a:lnRef>
+          <a:fillRef idx="3">
+            <a:schemeClr val="accent1"/>
+          </a:fillRef>
+          <a:effectRef idx="2">
+            <a:schemeClr val="accent1"/>
+          </a:effectRef>
+          <a:fontRef idx="minor">
+            <a:schemeClr val="lt1"/>
+          </a:fontRef>
+        </p:style>
+        <p:txBody>
+          <a:bodyPr rtlCol="0" anchor="ctr"/>
+          <a:lstStyle/>
+          <a:p>
+            <a:pPr algn="ctr"/>
+          </a:p>
+        </p:txBody>
+      </p:sp>
+      <p:sp>
+        <p:nvSpPr>
+          <p:cNvPr id="10" name="TextBox 9"/>
+          <p:cNvSpPr txBox="1"/>
+          <p:nvPr/>
+        </p:nvSpPr>
+        <p:spPr>
+          <a:xfrm>
+            <a:off x="1078992" y="2185416"/>
+            <a:ext cx="6568135" cy="274320"/>
+          </a:xfrm>
+          <a:prstGeom prst="rect">
+            <a:avLst/>
+          </a:prstGeom>
+          <a:noFill/>
+        </p:spPr>
+        <p:txBody>
+          <a:bodyPr wrap="square" anchor="t">
+            <a:spAutoFit/>
+          </a:bodyPr>
+          <a:lstStyle/>
+          <a:p>
+            <a:pPr algn="l"/>
+            <a:r>
+              <a:rPr sz="1700" b="0" i="0" lang="en-US" altLang="en-US">
+                <a:solidFill>
+                  <a:srgbClr val="24333D"/>
+                </a:solidFill>
+                <a:latin typeface="Sarabun"/>
+                <a:ea typeface="Sarabun"/>
+                <a:cs typeface="Sarabun"/>
+              </a:rPr>
+              <a:t>Now 6 to 10.</a:t>
+            </a:r>
+          </a:p>
+        </p:txBody>
+      </p:sp>
+      <p:sp>
+        <p:nvSpPr>
+          <p:cNvPr id="11" name="Oval 10"/>
+          <p:cNvSpPr/>
+          <p:nvPr/>
+        </p:nvSpPr>
+        <p:spPr>
+          <a:xfrm>
+            <a:off x="932688" y="2606040"/>
+            <a:ext cx="82296" cy="82296"/>
+          </a:xfrm>
+          <a:prstGeom prst="ellipse">
+            <a:avLst/>
+          </a:prstGeom>
+          <a:solidFill>
+            <a:srgbClr val="355C7D"/>
+          </a:solidFill>
+          <a:ln>
+            <a:noFill/>
+          </a:ln>
+        </p:spPr>
+        <p:style>
+          <a:lnRef idx="1">
+            <a:schemeClr val="accent1"/>
+          </a:lnRef>
+          <a:fillRef idx="3">
+            <a:schemeClr val="accent1"/>
+          </a:fillRef>
+          <a:effectRef idx="2">
+            <a:schemeClr val="accent1"/>
+          </a:effectRef>
+          <a:fontRef idx="minor">
+            <a:schemeClr val="lt1"/>
+          </a:fontRef>
+        </p:style>
+        <p:txBody>
+          <a:bodyPr rtlCol="0" anchor="ctr"/>
+          <a:lstStyle/>
+          <a:p>
+            <a:pPr algn="ctr"/>
+          </a:p>
+        </p:txBody>
+      </p:sp>
+      <p:sp>
+        <p:nvSpPr>
+          <p:cNvPr id="12" name="TextBox 11"/>
+          <p:cNvSpPr txBox="1"/>
+          <p:nvPr/>
+        </p:nvSpPr>
+        <p:spPr>
+          <a:xfrm>
+            <a:off x="1078992" y="2514600"/>
+            <a:ext cx="6568135" cy="274320"/>
+          </a:xfrm>
+          <a:prstGeom prst="rect">
+            <a:avLst/>
+          </a:prstGeom>
+          <a:noFill/>
+        </p:spPr>
+        <p:txBody>
+          <a:bodyPr wrap="square" anchor="t">
+            <a:spAutoFit/>
+          </a:bodyPr>
+          <a:lstStyle/>
+          <a:p>
+            <a:pPr algn="l"/>
+            <a:r>
+              <a:rPr sz="1700" b="0" i="0" lang="en-US" altLang="en-US">
+                <a:solidFill>
+                  <a:srgbClr val="24333D"/>
+                </a:solidFill>
+                <a:latin typeface="Sarabun"/>
+                <a:ea typeface="Sarabun"/>
+                <a:cs typeface="Sarabun"/>
+              </a:rPr>
+              <a:t>Ask 'what number?' </a:t>
+            </a:r>
+            <a:r>
+              <a:rPr sz="1700" b="0" i="0" lang="th-TH" altLang="en-US">
+                <a:solidFill>
+                  <a:srgbClr val="24333D"/>
+                </a:solidFill>
+                <a:latin typeface="Sarabun"/>
+                <a:ea typeface="Sarabun"/>
+                <a:cs typeface="Sarabun"/>
+              </a:rPr>
+              <a:t>เบอร์อะไร</a:t>
+            </a:r>
+            <a:r>
+              <a:rPr sz="1700" b="0" i="1" lang="en-US" altLang="en-US">
+                <a:solidFill>
+                  <a:srgbClr val="566873"/>
+                </a:solidFill>
+                <a:latin typeface="Sarabun"/>
+                <a:ea typeface="Sarabun"/>
+                <a:cs typeface="Sarabun"/>
+              </a:rPr>
+              <a:t> (ber à-rai)</a:t>
+            </a:r>
+            <a:r>
+              <a:rPr sz="1700" b="0" i="0" lang="en-US" altLang="en-US">
+                <a:solidFill>
+                  <a:srgbClr val="24333D"/>
+                </a:solidFill>
+                <a:latin typeface="Sarabun"/>
+                <a:ea typeface="Sarabun"/>
+                <a:cs typeface="Sarabun"/>
+              </a:rPr>
+              <a:t>.</a:t>
+            </a:r>
+          </a:p>
+        </p:txBody>
+      </p:sp>
+      <p:sp>
+        <p:nvSpPr>
+          <p:cNvPr id="13" name="Oval 12"/>
+          <p:cNvSpPr/>
+          <p:nvPr/>
+        </p:nvSpPr>
+        <p:spPr>
+          <a:xfrm>
+            <a:off x="932688" y="2935224"/>
+            <a:ext cx="82296" cy="82296"/>
+          </a:xfrm>
+          <a:prstGeom prst="ellipse">
+            <a:avLst/>
+          </a:prstGeom>
+          <a:solidFill>
+            <a:srgbClr val="355C7D"/>
+          </a:solidFill>
+          <a:ln>
+            <a:noFill/>
+          </a:ln>
+        </p:spPr>
+        <p:style>
+          <a:lnRef idx="1">
+            <a:schemeClr val="accent1"/>
+          </a:lnRef>
+          <a:fillRef idx="3">
+            <a:schemeClr val="accent1"/>
+          </a:fillRef>
+          <a:effectRef idx="2">
+            <a:schemeClr val="accent1"/>
+          </a:effectRef>
+          <a:fontRef idx="minor">
+            <a:schemeClr val="lt1"/>
+          </a:fontRef>
+        </p:style>
+        <p:txBody>
+          <a:bodyPr rtlCol="0" anchor="ctr"/>
+          <a:lstStyle/>
+          <a:p>
+            <a:pPr algn="ctr"/>
+          </a:p>
+        </p:txBody>
+      </p:sp>
+      <p:sp>
+        <p:nvSpPr>
+          <p:cNvPr id="14" name="TextBox 13"/>
+          <p:cNvSpPr txBox="1"/>
+          <p:nvPr/>
+        </p:nvSpPr>
+        <p:spPr>
+          <a:xfrm>
+            <a:off x="1078992" y="2843784"/>
+            <a:ext cx="6568135" cy="274320"/>
+          </a:xfrm>
+          <a:prstGeom prst="rect">
+            <a:avLst/>
+          </a:prstGeom>
+          <a:noFill/>
+        </p:spPr>
+        <p:txBody>
+          <a:bodyPr wrap="square" anchor="t">
+            <a:spAutoFit/>
+          </a:bodyPr>
+          <a:lstStyle/>
+          <a:p>
+            <a:pPr algn="l"/>
+            <a:r>
+              <a:rPr sz="1700" b="0" i="0" lang="en-US" altLang="en-US">
+                <a:solidFill>
+                  <a:srgbClr val="24333D"/>
+                </a:solidFill>
+                <a:latin typeface="Sarabun"/>
+                <a:ea typeface="Sarabun"/>
+                <a:cs typeface="Sarabun"/>
+              </a:rPr>
+              <a:t>Say 'I am 30 years old' in Thai.</a:t>
+            </a:r>
+          </a:p>
+        </p:txBody>
+      </p:sp>
+      <p:sp>
+        <p:nvSpPr>
+          <p:cNvPr id="15" name="Oval 14"/>
+          <p:cNvSpPr/>
+          <p:nvPr/>
+        </p:nvSpPr>
+        <p:spPr>
+          <a:xfrm>
+            <a:off x="932688" y="3264408"/>
+            <a:ext cx="82296" cy="82296"/>
+          </a:xfrm>
+          <a:prstGeom prst="ellipse">
+            <a:avLst/>
+          </a:prstGeom>
+          <a:solidFill>
+            <a:srgbClr val="355C7D"/>
+          </a:solidFill>
+          <a:ln>
+            <a:noFill/>
+          </a:ln>
+        </p:spPr>
+        <p:style>
+          <a:lnRef idx="1">
+            <a:schemeClr val="accent1"/>
+          </a:lnRef>
+          <a:fillRef idx="3">
+            <a:schemeClr val="accent1"/>
+          </a:fillRef>
+          <a:effectRef idx="2">
+            <a:schemeClr val="accent1"/>
+          </a:effectRef>
+          <a:fontRef idx="minor">
+            <a:schemeClr val="lt1"/>
+          </a:fontRef>
+        </p:style>
+        <p:txBody>
+          <a:bodyPr rtlCol="0" anchor="ctr"/>
+          <a:lstStyle/>
+          <a:p>
+            <a:pPr algn="ctr"/>
+          </a:p>
+        </p:txBody>
+      </p:sp>
+      <p:sp>
+        <p:nvSpPr>
+          <p:cNvPr id="16" name="TextBox 15"/>
+          <p:cNvSpPr txBox="1"/>
+          <p:nvPr/>
+        </p:nvSpPr>
+        <p:spPr>
+          <a:xfrm>
+            <a:off x="1078992" y="3172968"/>
+            <a:ext cx="6568135" cy="274320"/>
+          </a:xfrm>
+          <a:prstGeom prst="rect">
+            <a:avLst/>
+          </a:prstGeom>
+          <a:noFill/>
+        </p:spPr>
+        <p:txBody>
+          <a:bodyPr wrap="square" anchor="t">
+            <a:spAutoFit/>
+          </a:bodyPr>
+          <a:lstStyle/>
+          <a:p>
+            <a:pPr algn="l"/>
+            <a:r>
+              <a:rPr sz="1700" b="0" i="0" lang="th-TH" altLang="en-US">
+                <a:solidFill>
+                  <a:srgbClr val="24333D"/>
+                </a:solidFill>
+                <a:latin typeface="Sarabun"/>
+                <a:ea typeface="Sarabun"/>
+                <a:cs typeface="Sarabun"/>
+              </a:rPr>
+              <a:t>สี่</a:t>
+            </a:r>
+            <a:r>
+              <a:rPr sz="1700" b="0" i="1" lang="en-US" altLang="en-US">
+                <a:solidFill>
+                  <a:srgbClr val="566873"/>
+                </a:solidFill>
+                <a:latin typeface="Sarabun"/>
+                <a:ea typeface="Sarabun"/>
+                <a:cs typeface="Sarabun"/>
+              </a:rPr>
+              <a:t> (sìi)</a:t>
+            </a:r>
+            <a:r>
+              <a:rPr sz="1700" b="0" i="0" lang="en-US" altLang="en-US">
+                <a:solidFill>
+                  <a:srgbClr val="24333D"/>
+                </a:solidFill>
+                <a:latin typeface="Sarabun"/>
+                <a:ea typeface="Sarabun"/>
+                <a:cs typeface="Sarabun"/>
+              </a:rPr>
+              <a:t> is low tone. Rising tone means what?</a:t>
+            </a:r>
+          </a:p>
+        </p:txBody>
+      </p:sp>
+      <p:sp>
+        <p:nvSpPr>
+          <p:cNvPr id="17" name="TextBox 16"/>
+          <p:cNvSpPr txBox="1"/>
+          <p:nvPr/>
+        </p:nvSpPr>
+        <p:spPr>
+          <a:xfrm>
+            <a:off x="932688" y="4306824"/>
+            <a:ext cx="9692640" cy="228600"/>
+          </a:xfrm>
+          <a:prstGeom prst="rect">
+            <a:avLst/>
+          </a:prstGeom>
+          <a:noFill/>
+        </p:spPr>
+        <p:txBody>
+          <a:bodyPr wrap="square" anchor="t">
+            <a:spAutoFit/>
+          </a:bodyPr>
+          <a:lstStyle/>
+          <a:p>
+            <a:pPr algn="l"/>
+            <a:r>
+              <a:rPr sz="1700" b="1" i="0" lang="en-US" altLang="en-US">
+                <a:solidFill>
+                  <a:srgbClr val="7A8F54"/>
+                </a:solidFill>
+                <a:latin typeface="Sarabun"/>
+                <a:ea typeface="Sarabun"/>
+                <a:cs typeface="Sarabun"/>
+              </a:rPr>
+              <a:t>Remember</a:t>
+            </a:r>
+          </a:p>
+        </p:txBody>
+      </p:sp>
+      <p:sp>
+        <p:nvSpPr>
+          <p:cNvPr id="18" name="Oval 17"/>
+          <p:cNvSpPr/>
+          <p:nvPr/>
+        </p:nvSpPr>
+        <p:spPr>
+          <a:xfrm>
+            <a:off x="932688" y="4690872"/>
+            <a:ext cx="82296" cy="82296"/>
+          </a:xfrm>
+          <a:prstGeom prst="ellipse">
+            <a:avLst/>
+          </a:prstGeom>
+          <a:solidFill>
+            <a:srgbClr val="7A8F54"/>
+          </a:solidFill>
+          <a:ln>
+            <a:noFill/>
+          </a:ln>
+        </p:spPr>
+        <p:style>
+          <a:lnRef idx="1">
+            <a:schemeClr val="accent1"/>
+          </a:lnRef>
+          <a:fillRef idx="3">
+            <a:schemeClr val="accent1"/>
+          </a:fillRef>
+          <a:effectRef idx="2">
+            <a:schemeClr val="accent1"/>
+          </a:effectRef>
+          <a:fontRef idx="minor">
+            <a:schemeClr val="lt1"/>
+          </a:fontRef>
+        </p:style>
+        <p:txBody>
+          <a:bodyPr rtlCol="0" anchor="ctr"/>
+          <a:lstStyle/>
+          <a:p>
+            <a:pPr algn="ctr"/>
+          </a:p>
+        </p:txBody>
+      </p:sp>
+      <p:sp>
+        <p:nvSpPr>
+          <p:cNvPr id="19" name="TextBox 18"/>
+          <p:cNvSpPr txBox="1"/>
+          <p:nvPr/>
+        </p:nvSpPr>
+        <p:spPr>
+          <a:xfrm>
+            <a:off x="1078992" y="4599432"/>
+            <a:ext cx="9555480" cy="274320"/>
+          </a:xfrm>
+          <a:prstGeom prst="rect">
+            <a:avLst/>
+          </a:prstGeom>
+          <a:noFill/>
+        </p:spPr>
+        <p:txBody>
+          <a:bodyPr wrap="square" anchor="t">
+            <a:spAutoFit/>
+          </a:bodyPr>
+          <a:lstStyle/>
+          <a:p>
+            <a:pPr algn="l"/>
+            <a:r>
+              <a:rPr sz="1700" b="0" i="0" lang="th-TH" altLang="en-US">
+                <a:solidFill>
+                  <a:srgbClr val="24333D"/>
+                </a:solidFill>
+                <a:latin typeface="Sarabun"/>
+                <a:ea typeface="Sarabun"/>
+                <a:cs typeface="Sarabun"/>
+              </a:rPr>
+              <a:t>สี่</a:t>
+            </a:r>
+            <a:r>
+              <a:rPr sz="1700" b="0" i="1" lang="en-US" altLang="en-US">
+                <a:solidFill>
+                  <a:srgbClr val="566873"/>
+                </a:solidFill>
+                <a:latin typeface="Sarabun"/>
+                <a:ea typeface="Sarabun"/>
+                <a:cs typeface="Sarabun"/>
+              </a:rPr>
+              <a:t> (sìi)</a:t>
+            </a:r>
+            <a:r>
+              <a:rPr sz="1700" b="0" i="0" lang="en-US" altLang="en-US">
+                <a:solidFill>
+                  <a:srgbClr val="24333D"/>
+                </a:solidFill>
+                <a:latin typeface="Sarabun"/>
+                <a:ea typeface="Sarabun"/>
+                <a:cs typeface="Sarabun"/>
+              </a:rPr>
+              <a:t> is low tone. Rising tone means what?</a:t>
+            </a:r>
+          </a:p>
+        </p:txBody>
+      </p:sp>
+    </p:spTree>
+  </p:cSld>
+  <p:clrMapOvr>
+    <a:masterClrMapping/>
+  </p:clrMapOvr>
+</p:sld>
+</file>
+
+<file path=ppt/slides/slide11.xml><?xml version="1.0" encoding="utf-8"?>
+<p:sld xmlns:a="http://schemas.openxmlformats.org/drawingml/2006/main" xmlns:p="http://schemas.openxmlformats.org/presentationml/2006/main" xmlns:r="http://schemas.openxmlformats.org/officeDocument/2006/relationships">
+  <p:cSld>
+    <p:bg>
+      <p:bgPr>
+        <a:solidFill>
+          <a:srgbClr val="F5F7F8"/>
+        </a:solidFill>
+        <a:effectLst/>
+      </p:bgPr>
+    </p:bg>
+    <p:spTree>
+      <p:nvGrpSpPr>
+        <p:cNvPr id="1" name=""/>
+        <p:cNvGrpSpPr/>
+        <p:nvPr/>
+      </p:nvGrpSpPr>
+      <p:grpSpPr/>
+      <p:sp>
+        <p:nvSpPr>
+          <p:cNvPr id="2" name="__pip_placeholder__"/>
+          <p:cNvSpPr/>
+          <p:nvPr/>
+        </p:nvSpPr>
+        <p:spPr>
+          <a:xfrm>
+            <a:off x="8351215" y="0"/>
+            <a:ext cx="3840480" cy="2880360"/>
+          </a:xfrm>
+          <a:prstGeom prst="rect">
+            <a:avLst/>
+          </a:prstGeom>
+          <a:solidFill>
+            <a:srgbClr val="DBE7EC">
+              <a:alpha val="30000"/>
+            </a:srgbClr>
+          </a:solidFill>
+          <a:ln w="19050">
+            <a:solidFill>
+              <a:srgbClr val="355C7D"/>
+            </a:solidFill>
+            <a:prstDash val="sysDash"/>
+          </a:ln>
+        </p:spPr>
+        <p:style>
+          <a:lnRef idx="1">
+            <a:schemeClr val="accent1"/>
+          </a:lnRef>
+          <a:fillRef idx="3">
+            <a:schemeClr val="accent1"/>
+          </a:fillRef>
+          <a:effectRef idx="2">
+            <a:schemeClr val="accent1"/>
+          </a:effectRef>
+          <a:fontRef idx="minor">
+            <a:schemeClr val="lt1"/>
+          </a:fontRef>
+        </p:style>
+        <p:txBody>
+          <a:bodyPr rtlCol="0" anchor="ctr" wrap="none"/>
+          <a:lstStyle/>
+          <a:p>
+            <a:pPr algn="ctr"/>
+            <a:r>
+              <a:rPr sz="1800" b="1">
+                <a:solidFill>
+                  <a:srgbClr val="355C7D"/>
+                </a:solidFill>
+                <a:latin typeface="Sarabun"/>
+              </a:rPr>
+              <a:t>Nine</a:t>
+            </a:r>
+          </a:p>
+        </p:txBody>
+      </p:sp>
+      <p:sp>
+        <p:nvSpPr>
+          <p:cNvPr id="3" name="Rectangle 2"/>
+          <p:cNvSpPr/>
+          <p:nvPr/>
+        </p:nvSpPr>
+        <p:spPr>
+          <a:xfrm>
+            <a:off x="0" y="0"/>
+            <a:ext cx="12191695" cy="63500"/>
+          </a:xfrm>
+          <a:prstGeom prst="rect">
+            <a:avLst/>
+          </a:prstGeom>
+          <a:solidFill>
+            <a:srgbClr val="355C7D"/>
+          </a:solidFill>
+          <a:ln>
+            <a:noFill/>
+          </a:ln>
+        </p:spPr>
+        <p:style>
+          <a:lnRef idx="1">
+            <a:schemeClr val="accent1"/>
+          </a:lnRef>
+          <a:fillRef idx="3">
+            <a:schemeClr val="accent1"/>
+          </a:fillRef>
+          <a:effectRef idx="2">
+            <a:schemeClr val="accent1"/>
+          </a:effectRef>
+          <a:fontRef idx="minor">
+            <a:schemeClr val="lt1"/>
+          </a:fontRef>
+        </p:style>
+        <p:txBody>
+          <a:bodyPr rtlCol="0" anchor="ctr"/>
+          <a:lstStyle/>
+          <a:p>
+            <a:pPr algn="ctr"/>
+          </a:p>
+        </p:txBody>
+      </p:sp>
+      <p:sp>
+        <p:nvSpPr>
+          <p:cNvPr id="4" name="TextBox 3"/>
+          <p:cNvSpPr txBox="1"/>
+          <p:nvPr/>
+        </p:nvSpPr>
+        <p:spPr>
+          <a:xfrm>
+            <a:off x="731520" y="256032"/>
+            <a:ext cx="7071055" cy="256032"/>
+          </a:xfrm>
+          <a:prstGeom prst="rect">
+            <a:avLst/>
+          </a:prstGeom>
+          <a:noFill/>
+        </p:spPr>
+        <p:txBody>
+          <a:bodyPr wrap="square" anchor="t">
+            <a:spAutoFit/>
+          </a:bodyPr>
+          <a:lstStyle/>
+          <a:p>
+            <a:pPr algn="l"/>
+            <a:r>
+              <a:rPr sz="1200" b="1" i="0" lang="en-US" altLang="en-US">
+                <a:solidFill>
+                  <a:srgbClr val="355C7D"/>
+                </a:solidFill>
+                <a:latin typeface="Sarabun"/>
+                <a:ea typeface="Sarabun"/>
+                <a:cs typeface="Sarabun"/>
+              </a:rPr>
+              <a:t>Closing</a:t>
+            </a:r>
+          </a:p>
+        </p:txBody>
+      </p:sp>
+      <p:sp>
+        <p:nvSpPr>
+          <p:cNvPr id="5" name="TextBox 4"/>
+          <p:cNvSpPr txBox="1"/>
+          <p:nvPr/>
+        </p:nvSpPr>
+        <p:spPr>
+          <a:xfrm>
+            <a:off x="731520" y="530352"/>
+            <a:ext cx="7071055" cy="640080"/>
+          </a:xfrm>
+          <a:prstGeom prst="rect">
+            <a:avLst/>
+          </a:prstGeom>
+          <a:noFill/>
+        </p:spPr>
+        <p:txBody>
+          <a:bodyPr wrap="square" anchor="t">
+            <a:spAutoFit/>
+          </a:bodyPr>
+          <a:lstStyle/>
+          <a:p>
+            <a:pPr algn="l"/>
+            <a:r>
+              <a:rPr sz="3600" b="1" i="0" lang="en-US" altLang="en-US">
+                <a:solidFill>
+                  <a:srgbClr val="24333D"/>
+                </a:solidFill>
+                <a:latin typeface="Sarabun"/>
+                <a:ea typeface="Sarabun"/>
+                <a:cs typeface="Sarabun"/>
+              </a:rPr>
+              <a:t>Closing</a:t>
+            </a:r>
+          </a:p>
+        </p:txBody>
+      </p:sp>
+      <p:sp>
+        <p:nvSpPr>
+          <p:cNvPr id="6" name="TextBox 5"/>
+          <p:cNvSpPr txBox="1"/>
+          <p:nvPr/>
+        </p:nvSpPr>
+        <p:spPr>
+          <a:xfrm>
+            <a:off x="932688" y="1746504"/>
+            <a:ext cx="6705295" cy="228600"/>
+          </a:xfrm>
+          <a:prstGeom prst="rect">
+            <a:avLst/>
+          </a:prstGeom>
+          <a:noFill/>
+        </p:spPr>
+        <p:txBody>
+          <a:bodyPr wrap="square" anchor="t">
+            <a:spAutoFit/>
+          </a:bodyPr>
+          <a:lstStyle/>
+          <a:p>
+            <a:pPr algn="l"/>
+            <a:r>
+              <a:rPr sz="1700" b="1" i="0" lang="en-US" altLang="en-US">
+                <a:solidFill>
+                  <a:srgbClr val="C96F4A"/>
+                </a:solidFill>
+                <a:latin typeface="Sarabun"/>
+                <a:ea typeface="Sarabun"/>
+                <a:cs typeface="Sarabun"/>
+              </a:rPr>
+              <a:t>Next steps</a:t>
+            </a:r>
+          </a:p>
+        </p:txBody>
+      </p:sp>
+      <p:sp>
+        <p:nvSpPr>
+          <p:cNvPr id="7" name="Oval 6"/>
+          <p:cNvSpPr/>
+          <p:nvPr/>
+        </p:nvSpPr>
+        <p:spPr>
+          <a:xfrm>
+            <a:off x="932688" y="2130552"/>
+            <a:ext cx="82296" cy="82296"/>
+          </a:xfrm>
+          <a:prstGeom prst="ellipse">
+            <a:avLst/>
+          </a:prstGeom>
+          <a:solidFill>
+            <a:srgbClr val="C96F4A"/>
+          </a:solidFill>
+          <a:ln>
+            <a:noFill/>
+          </a:ln>
+        </p:spPr>
+        <p:style>
+          <a:lnRef idx="1">
+            <a:schemeClr val="accent1"/>
+          </a:lnRef>
+          <a:fillRef idx="3">
+            <a:schemeClr val="accent1"/>
+          </a:fillRef>
+          <a:effectRef idx="2">
+            <a:schemeClr val="accent1"/>
+          </a:effectRef>
+          <a:fontRef idx="minor">
+            <a:schemeClr val="lt1"/>
+          </a:fontRef>
+        </p:style>
+        <p:txBody>
+          <a:bodyPr rtlCol="0" anchor="ctr"/>
+          <a:lstStyle/>
+          <a:p>
+            <a:pPr algn="ctr"/>
+          </a:p>
+        </p:txBody>
+      </p:sp>
+      <p:sp>
+        <p:nvSpPr>
+          <p:cNvPr id="8" name="TextBox 7"/>
+          <p:cNvSpPr txBox="1"/>
+          <p:nvPr/>
+        </p:nvSpPr>
+        <p:spPr>
+          <a:xfrm>
+            <a:off x="1078992" y="2039112"/>
+            <a:ext cx="6568135" cy="676656"/>
+          </a:xfrm>
+          <a:prstGeom prst="rect">
+            <a:avLst/>
+          </a:prstGeom>
+          <a:noFill/>
+        </p:spPr>
+        <p:txBody>
+          <a:bodyPr wrap="square" anchor="t">
+            <a:spAutoFit/>
+          </a:bodyPr>
+          <a:lstStyle/>
+          <a:p>
+            <a:pPr algn="l"/>
+            <a:r>
+              <a:rPr sz="1700" b="0" i="0" lang="en-US" altLang="en-US">
+                <a:solidFill>
+                  <a:srgbClr val="24333D"/>
+                </a:solidFill>
+                <a:latin typeface="Sarabun"/>
+                <a:ea typeface="Sarabun"/>
+                <a:cs typeface="Sarabun"/>
+              </a:rPr>
+              <a:t>By the end, you can count 0-10, ask what number, say your age, and handle digit-by-digit codes like room numbers.</a:t>
+            </a:r>
+          </a:p>
+        </p:txBody>
+      </p:sp>
+      <p:sp>
+        <p:nvSpPr>
+          <p:cNvPr id="9" name="Oval 8"/>
+          <p:cNvSpPr/>
+          <p:nvPr/>
+        </p:nvSpPr>
+        <p:spPr>
+          <a:xfrm>
+            <a:off x="932688" y="2862072"/>
+            <a:ext cx="82296" cy="82296"/>
+          </a:xfrm>
+          <a:prstGeom prst="ellipse">
+            <a:avLst/>
+          </a:prstGeom>
+          <a:solidFill>
+            <a:srgbClr val="C96F4A"/>
+          </a:solidFill>
+          <a:ln>
+            <a:noFill/>
+          </a:ln>
+        </p:spPr>
+        <p:style>
+          <a:lnRef idx="1">
+            <a:schemeClr val="accent1"/>
+          </a:lnRef>
+          <a:fillRef idx="3">
+            <a:schemeClr val="accent1"/>
+          </a:fillRef>
+          <a:effectRef idx="2">
+            <a:schemeClr val="accent1"/>
+          </a:effectRef>
+          <a:fontRef idx="minor">
+            <a:schemeClr val="lt1"/>
+          </a:fontRef>
+        </p:style>
+        <p:txBody>
+          <a:bodyPr rtlCol="0" anchor="ctr"/>
+          <a:lstStyle/>
+          <a:p>
+            <a:pPr algn="ctr"/>
+          </a:p>
+        </p:txBody>
+      </p:sp>
+      <p:sp>
+        <p:nvSpPr>
+          <p:cNvPr id="10" name="TextBox 9"/>
+          <p:cNvSpPr txBox="1"/>
+          <p:nvPr/>
+        </p:nvSpPr>
+        <p:spPr>
+          <a:xfrm>
+            <a:off x="1078992" y="2770632"/>
+            <a:ext cx="6568135" cy="274320"/>
+          </a:xfrm>
+          <a:prstGeom prst="rect">
+            <a:avLst/>
+          </a:prstGeom>
+          <a:noFill/>
+        </p:spPr>
+        <p:txBody>
+          <a:bodyPr wrap="square" anchor="t">
+            <a:spAutoFit/>
+          </a:bodyPr>
+          <a:lstStyle/>
+          <a:p>
+            <a:pPr algn="l"/>
+            <a:r>
+              <a:rPr sz="1700" b="0" i="0" lang="en-US" altLang="en-US">
+                <a:solidFill>
+                  <a:srgbClr val="24333D"/>
+                </a:solidFill>
+                <a:latin typeface="Sarabun"/>
+                <a:ea typeface="Sarabun"/>
+                <a:cs typeface="Sarabun"/>
+              </a:rPr>
+              <a:t>Next: First Contact and Courtesy continues.</a:t>
+            </a:r>
+          </a:p>
+        </p:txBody>
+      </p:sp>
+    </p:spTree>
+  </p:cSld>
+  <p:clrMapOvr>
+    <a:masterClrMapping/>
+  </p:clrMapOvr>
+</p:sld>
+</file>
+
 <file path=ppt/slides/slide2.xml><?xml version="1.0" encoding="utf-8"?>
 <p:sld xmlns:a="http://schemas.openxmlformats.org/drawingml/2006/main" xmlns:p="http://schemas.openxmlformats.org/presentationml/2006/main" xmlns:r="http://schemas.openxmlformats.org/officeDocument/2006/relationships">
   <p:cSld>
@@ -5027,7 +6413,7 @@
         <p:spPr>
           <a:xfrm>
             <a:off x="731520" y="1325880"/>
-            <a:ext cx="7071055" cy="804672"/>
+            <a:ext cx="7071055" cy="1572768"/>
           </a:xfrm>
           <a:prstGeom prst="roundRect">
             <a:avLst/>
@@ -5067,8 +6453,8 @@
         </p:nvSpPr>
         <p:spPr>
           <a:xfrm>
-            <a:off x="868680" y="1435608"/>
-            <a:ext cx="73152" cy="548640"/>
+            <a:off x="868680" y="1527048"/>
+            <a:ext cx="73152" cy="1143000"/>
           </a:xfrm>
           <a:prstGeom prst="rect">
             <a:avLst/>
@@ -5110,8 +6496,8 @@
         </p:nvSpPr>
         <p:spPr>
           <a:xfrm>
-            <a:off x="1078992" y="1399032"/>
-            <a:ext cx="6613855" cy="228600"/>
+            <a:off x="1078992" y="1463040"/>
+            <a:ext cx="6613855" cy="320040"/>
           </a:xfrm>
           <a:prstGeom prst="rect">
             <a:avLst/>
@@ -5147,8 +6533,8 @@
         </p:nvSpPr>
         <p:spPr>
           <a:xfrm>
-            <a:off x="1078992" y="1627632"/>
-            <a:ext cx="6613855" cy="201168"/>
+            <a:off x="1078992" y="1828800"/>
+            <a:ext cx="6613855" cy="274320"/>
           </a:xfrm>
           <a:prstGeom prst="rect">
             <a:avLst/>
@@ -5184,8 +6570,8 @@
         </p:nvSpPr>
         <p:spPr>
           <a:xfrm>
-            <a:off x="1078992" y="1828800"/>
-            <a:ext cx="6613855" cy="201168"/>
+            <a:off x="1078992" y="2203704"/>
+            <a:ext cx="6613855" cy="274320"/>
           </a:xfrm>
           <a:prstGeom prst="rect">
             <a:avLst/>
@@ -5221,8 +6607,8 @@
         </p:nvSpPr>
         <p:spPr>
           <a:xfrm>
-            <a:off x="731520" y="2130552"/>
-            <a:ext cx="7071055" cy="804672"/>
+            <a:off x="731520" y="3081528"/>
+            <a:ext cx="7071055" cy="1572768"/>
           </a:xfrm>
           <a:prstGeom prst="roundRect">
             <a:avLst/>
@@ -5262,8 +6648,8 @@
         </p:nvSpPr>
         <p:spPr>
           <a:xfrm>
-            <a:off x="868680" y="2240280"/>
-            <a:ext cx="73152" cy="548640"/>
+            <a:off x="868680" y="3282696"/>
+            <a:ext cx="73152" cy="1143000"/>
           </a:xfrm>
           <a:prstGeom prst="rect">
             <a:avLst/>
@@ -5305,8 +6691,8 @@
         </p:nvSpPr>
         <p:spPr>
           <a:xfrm>
-            <a:off x="1078992" y="2203704"/>
-            <a:ext cx="6613855" cy="228600"/>
+            <a:off x="1078992" y="3218688"/>
+            <a:ext cx="6613855" cy="320040"/>
           </a:xfrm>
           <a:prstGeom prst="rect">
             <a:avLst/>
@@ -5342,8 +6728,8 @@
         </p:nvSpPr>
         <p:spPr>
           <a:xfrm>
-            <a:off x="1078992" y="2432304"/>
-            <a:ext cx="6613855" cy="201168"/>
+            <a:off x="1078992" y="3584448"/>
+            <a:ext cx="6613855" cy="274320"/>
           </a:xfrm>
           <a:prstGeom prst="rect">
             <a:avLst/>
@@ -5379,8 +6765,8 @@
         </p:nvSpPr>
         <p:spPr>
           <a:xfrm>
-            <a:off x="1078992" y="2633472"/>
-            <a:ext cx="6613855" cy="201168"/>
+            <a:off x="1078992" y="3959352"/>
+            <a:ext cx="6613855" cy="274320"/>
           </a:xfrm>
           <a:prstGeom prst="rect">
             <a:avLst/>
@@ -5416,8 +6802,8 @@
         </p:nvSpPr>
         <p:spPr>
           <a:xfrm>
-            <a:off x="731520" y="2935224"/>
-            <a:ext cx="7071055" cy="804672"/>
+            <a:off x="731520" y="4837176"/>
+            <a:ext cx="7071055" cy="1572768"/>
           </a:xfrm>
           <a:prstGeom prst="roundRect">
             <a:avLst/>
@@ -5457,8 +6843,8 @@
         </p:nvSpPr>
         <p:spPr>
           <a:xfrm>
-            <a:off x="868680" y="3044952"/>
-            <a:ext cx="73152" cy="548640"/>
+            <a:off x="868680" y="5038344"/>
+            <a:ext cx="73152" cy="1143000"/>
           </a:xfrm>
           <a:prstGeom prst="rect">
             <a:avLst/>
@@ -5500,8 +6886,8 @@
         </p:nvSpPr>
         <p:spPr>
           <a:xfrm>
-            <a:off x="1078992" y="3008376"/>
-            <a:ext cx="6613855" cy="228600"/>
+            <a:off x="1078992" y="4974336"/>
+            <a:ext cx="6613855" cy="320040"/>
           </a:xfrm>
           <a:prstGeom prst="rect">
             <a:avLst/>
@@ -5537,8 +6923,8 @@
         </p:nvSpPr>
         <p:spPr>
           <a:xfrm>
-            <a:off x="1078992" y="3236976"/>
-            <a:ext cx="6613855" cy="201168"/>
+            <a:off x="1078992" y="5340096"/>
+            <a:ext cx="6613855" cy="274320"/>
           </a:xfrm>
           <a:prstGeom prst="rect">
             <a:avLst/>
@@ -5574,8 +6960,8 @@
         </p:nvSpPr>
         <p:spPr>
           <a:xfrm>
-            <a:off x="1078992" y="3438144"/>
-            <a:ext cx="6613855" cy="201168"/>
+            <a:off x="1078992" y="5715000"/>
+            <a:ext cx="6613855" cy="274320"/>
           </a:xfrm>
           <a:prstGeom prst="rect">
             <a:avLst/>
@@ -5599,591 +6985,6 @@
                 <a:cs typeface="Sarabun"/>
               </a:rPr>
               <a:t>2 — two</a:t>
-            </a:r>
-          </a:p>
-        </p:txBody>
-      </p:sp>
-      <p:sp>
-        <p:nvSpPr>
-          <p:cNvPr id="21" name="Rounded Rectangle 20"/>
-          <p:cNvSpPr/>
-          <p:nvPr/>
-        </p:nvSpPr>
-        <p:spPr>
-          <a:xfrm>
-            <a:off x="731520" y="3739896"/>
-            <a:ext cx="7071055" cy="804672"/>
-          </a:xfrm>
-          <a:prstGeom prst="roundRect">
-            <a:avLst/>
-          </a:prstGeom>
-          <a:noFill/>
-          <a:ln>
-            <a:noFill/>
-          </a:ln>
-        </p:spPr>
-        <p:style>
-          <a:lnRef idx="1">
-            <a:schemeClr val="accent1"/>
-          </a:lnRef>
-          <a:fillRef idx="3">
-            <a:schemeClr val="accent1"/>
-          </a:fillRef>
-          <a:effectRef idx="2">
-            <a:schemeClr val="accent1"/>
-          </a:effectRef>
-          <a:fontRef idx="minor">
-            <a:schemeClr val="lt1"/>
-          </a:fontRef>
-        </p:style>
-        <p:txBody>
-          <a:bodyPr rtlCol="0" anchor="ctr"/>
-          <a:lstStyle/>
-          <a:p>
-            <a:pPr algn="ctr"/>
-          </a:p>
-        </p:txBody>
-      </p:sp>
-      <p:sp>
-        <p:nvSpPr>
-          <p:cNvPr id="22" name="Rectangle 21"/>
-          <p:cNvSpPr/>
-          <p:nvPr/>
-        </p:nvSpPr>
-        <p:spPr>
-          <a:xfrm>
-            <a:off x="868680" y="3849624"/>
-            <a:ext cx="73152" cy="548640"/>
-          </a:xfrm>
-          <a:prstGeom prst="rect">
-            <a:avLst/>
-          </a:prstGeom>
-          <a:solidFill>
-            <a:srgbClr val="355C7D"/>
-          </a:solidFill>
-          <a:ln>
-            <a:noFill/>
-          </a:ln>
-        </p:spPr>
-        <p:style>
-          <a:lnRef idx="1">
-            <a:schemeClr val="accent1"/>
-          </a:lnRef>
-          <a:fillRef idx="3">
-            <a:schemeClr val="accent1"/>
-          </a:fillRef>
-          <a:effectRef idx="2">
-            <a:schemeClr val="accent1"/>
-          </a:effectRef>
-          <a:fontRef idx="minor">
-            <a:schemeClr val="lt1"/>
-          </a:fontRef>
-        </p:style>
-        <p:txBody>
-          <a:bodyPr rtlCol="0" anchor="ctr"/>
-          <a:lstStyle/>
-          <a:p>
-            <a:pPr algn="ctr"/>
-          </a:p>
-        </p:txBody>
-      </p:sp>
-      <p:sp>
-        <p:nvSpPr>
-          <p:cNvPr id="23" name="TextBox 22"/>
-          <p:cNvSpPr txBox="1"/>
-          <p:nvPr/>
-        </p:nvSpPr>
-        <p:spPr>
-          <a:xfrm>
-            <a:off x="1078992" y="3813048"/>
-            <a:ext cx="6613855" cy="228600"/>
-          </a:xfrm>
-          <a:prstGeom prst="rect">
-            <a:avLst/>
-          </a:prstGeom>
-          <a:noFill/>
-        </p:spPr>
-        <p:txBody>
-          <a:bodyPr wrap="square" anchor="t">
-            <a:spAutoFit/>
-          </a:bodyPr>
-          <a:lstStyle/>
-          <a:p>
-            <a:pPr algn="l"/>
-            <a:r>
-              <a:rPr sz="1700" b="0" i="0" lang="th-TH" altLang="en-US">
-                <a:solidFill>
-                  <a:srgbClr val="24333D"/>
-                </a:solidFill>
-                <a:latin typeface="Sarabun"/>
-                <a:ea typeface="Sarabun"/>
-                <a:cs typeface="Sarabun"/>
-              </a:rPr>
-              <a:t>สาม</a:t>
-            </a:r>
-          </a:p>
-        </p:txBody>
-      </p:sp>
-      <p:sp>
-        <p:nvSpPr>
-          <p:cNvPr id="24" name="TextBox 23"/>
-          <p:cNvSpPr txBox="1"/>
-          <p:nvPr/>
-        </p:nvSpPr>
-        <p:spPr>
-          <a:xfrm>
-            <a:off x="1078992" y="4041648"/>
-            <a:ext cx="6613855" cy="201168"/>
-          </a:xfrm>
-          <a:prstGeom prst="rect">
-            <a:avLst/>
-          </a:prstGeom>
-          <a:noFill/>
-        </p:spPr>
-        <p:txBody>
-          <a:bodyPr wrap="square" anchor="t">
-            <a:spAutoFit/>
-          </a:bodyPr>
-          <a:lstStyle/>
-          <a:p>
-            <a:pPr algn="l"/>
-            <a:r>
-              <a:rPr sz="1700" b="0" i="1" lang="en-US" altLang="en-US">
-                <a:solidFill>
-                  <a:srgbClr val="566873"/>
-                </a:solidFill>
-                <a:latin typeface="Sarabun"/>
-                <a:ea typeface="Sarabun"/>
-                <a:cs typeface="Sarabun"/>
-              </a:rPr>
-              <a:t>sǎam</a:t>
-            </a:r>
-          </a:p>
-        </p:txBody>
-      </p:sp>
-      <p:sp>
-        <p:nvSpPr>
-          <p:cNvPr id="25" name="TextBox 24"/>
-          <p:cNvSpPr txBox="1"/>
-          <p:nvPr/>
-        </p:nvSpPr>
-        <p:spPr>
-          <a:xfrm>
-            <a:off x="1078992" y="4242816"/>
-            <a:ext cx="6613855" cy="201168"/>
-          </a:xfrm>
-          <a:prstGeom prst="rect">
-            <a:avLst/>
-          </a:prstGeom>
-          <a:noFill/>
-        </p:spPr>
-        <p:txBody>
-          <a:bodyPr wrap="square" anchor="t">
-            <a:spAutoFit/>
-          </a:bodyPr>
-          <a:lstStyle/>
-          <a:p>
-            <a:pPr algn="l"/>
-            <a:r>
-              <a:rPr sz="1700" b="0" i="0" lang="en-US" altLang="en-US">
-                <a:solidFill>
-                  <a:srgbClr val="82909A"/>
-                </a:solidFill>
-                <a:latin typeface="Sarabun"/>
-                <a:ea typeface="Sarabun"/>
-                <a:cs typeface="Sarabun"/>
-              </a:rPr>
-              <a:t>3 — three</a:t>
-            </a:r>
-          </a:p>
-        </p:txBody>
-      </p:sp>
-      <p:sp>
-        <p:nvSpPr>
-          <p:cNvPr id="26" name="Rounded Rectangle 25"/>
-          <p:cNvSpPr/>
-          <p:nvPr/>
-        </p:nvSpPr>
-        <p:spPr>
-          <a:xfrm>
-            <a:off x="731520" y="4544568"/>
-            <a:ext cx="7071055" cy="804672"/>
-          </a:xfrm>
-          <a:prstGeom prst="roundRect">
-            <a:avLst/>
-          </a:prstGeom>
-          <a:noFill/>
-          <a:ln>
-            <a:noFill/>
-          </a:ln>
-        </p:spPr>
-        <p:style>
-          <a:lnRef idx="1">
-            <a:schemeClr val="accent1"/>
-          </a:lnRef>
-          <a:fillRef idx="3">
-            <a:schemeClr val="accent1"/>
-          </a:fillRef>
-          <a:effectRef idx="2">
-            <a:schemeClr val="accent1"/>
-          </a:effectRef>
-          <a:fontRef idx="minor">
-            <a:schemeClr val="lt1"/>
-          </a:fontRef>
-        </p:style>
-        <p:txBody>
-          <a:bodyPr rtlCol="0" anchor="ctr"/>
-          <a:lstStyle/>
-          <a:p>
-            <a:pPr algn="ctr"/>
-          </a:p>
-        </p:txBody>
-      </p:sp>
-      <p:sp>
-        <p:nvSpPr>
-          <p:cNvPr id="27" name="Rectangle 26"/>
-          <p:cNvSpPr/>
-          <p:nvPr/>
-        </p:nvSpPr>
-        <p:spPr>
-          <a:xfrm>
-            <a:off x="868680" y="4654296"/>
-            <a:ext cx="73152" cy="548640"/>
-          </a:xfrm>
-          <a:prstGeom prst="rect">
-            <a:avLst/>
-          </a:prstGeom>
-          <a:solidFill>
-            <a:srgbClr val="355C7D"/>
-          </a:solidFill>
-          <a:ln>
-            <a:noFill/>
-          </a:ln>
-        </p:spPr>
-        <p:style>
-          <a:lnRef idx="1">
-            <a:schemeClr val="accent1"/>
-          </a:lnRef>
-          <a:fillRef idx="3">
-            <a:schemeClr val="accent1"/>
-          </a:fillRef>
-          <a:effectRef idx="2">
-            <a:schemeClr val="accent1"/>
-          </a:effectRef>
-          <a:fontRef idx="minor">
-            <a:schemeClr val="lt1"/>
-          </a:fontRef>
-        </p:style>
-        <p:txBody>
-          <a:bodyPr rtlCol="0" anchor="ctr"/>
-          <a:lstStyle/>
-          <a:p>
-            <a:pPr algn="ctr"/>
-          </a:p>
-        </p:txBody>
-      </p:sp>
-      <p:sp>
-        <p:nvSpPr>
-          <p:cNvPr id="28" name="TextBox 27"/>
-          <p:cNvSpPr txBox="1"/>
-          <p:nvPr/>
-        </p:nvSpPr>
-        <p:spPr>
-          <a:xfrm>
-            <a:off x="1078992" y="4617720"/>
-            <a:ext cx="6613855" cy="228600"/>
-          </a:xfrm>
-          <a:prstGeom prst="rect">
-            <a:avLst/>
-          </a:prstGeom>
-          <a:noFill/>
-        </p:spPr>
-        <p:txBody>
-          <a:bodyPr wrap="square" anchor="t">
-            <a:spAutoFit/>
-          </a:bodyPr>
-          <a:lstStyle/>
-          <a:p>
-            <a:pPr algn="l"/>
-            <a:r>
-              <a:rPr sz="1700" b="0" i="0" lang="th-TH" altLang="en-US">
-                <a:solidFill>
-                  <a:srgbClr val="24333D"/>
-                </a:solidFill>
-                <a:latin typeface="Sarabun"/>
-                <a:ea typeface="Sarabun"/>
-                <a:cs typeface="Sarabun"/>
-              </a:rPr>
-              <a:t>สี่</a:t>
-            </a:r>
-          </a:p>
-        </p:txBody>
-      </p:sp>
-      <p:sp>
-        <p:nvSpPr>
-          <p:cNvPr id="29" name="TextBox 28"/>
-          <p:cNvSpPr txBox="1"/>
-          <p:nvPr/>
-        </p:nvSpPr>
-        <p:spPr>
-          <a:xfrm>
-            <a:off x="1078992" y="4846320"/>
-            <a:ext cx="6613855" cy="201168"/>
-          </a:xfrm>
-          <a:prstGeom prst="rect">
-            <a:avLst/>
-          </a:prstGeom>
-          <a:noFill/>
-        </p:spPr>
-        <p:txBody>
-          <a:bodyPr wrap="square" anchor="t">
-            <a:spAutoFit/>
-          </a:bodyPr>
-          <a:lstStyle/>
-          <a:p>
-            <a:pPr algn="l"/>
-            <a:r>
-              <a:rPr sz="1700" b="0" i="1" lang="en-US" altLang="en-US">
-                <a:solidFill>
-                  <a:srgbClr val="566873"/>
-                </a:solidFill>
-                <a:latin typeface="Sarabun"/>
-                <a:ea typeface="Sarabun"/>
-                <a:cs typeface="Sarabun"/>
-              </a:rPr>
-              <a:t>sìi</a:t>
-            </a:r>
-          </a:p>
-        </p:txBody>
-      </p:sp>
-      <p:sp>
-        <p:nvSpPr>
-          <p:cNvPr id="30" name="TextBox 29"/>
-          <p:cNvSpPr txBox="1"/>
-          <p:nvPr/>
-        </p:nvSpPr>
-        <p:spPr>
-          <a:xfrm>
-            <a:off x="1078992" y="5047488"/>
-            <a:ext cx="6613855" cy="201168"/>
-          </a:xfrm>
-          <a:prstGeom prst="rect">
-            <a:avLst/>
-          </a:prstGeom>
-          <a:noFill/>
-        </p:spPr>
-        <p:txBody>
-          <a:bodyPr wrap="square" anchor="t">
-            <a:spAutoFit/>
-          </a:bodyPr>
-          <a:lstStyle/>
-          <a:p>
-            <a:pPr algn="l"/>
-            <a:r>
-              <a:rPr sz="1700" b="0" i="0" lang="en-US" altLang="en-US">
-                <a:solidFill>
-                  <a:srgbClr val="82909A"/>
-                </a:solidFill>
-                <a:latin typeface="Sarabun"/>
-                <a:ea typeface="Sarabun"/>
-                <a:cs typeface="Sarabun"/>
-              </a:rPr>
-              <a:t>4 — four</a:t>
-            </a:r>
-          </a:p>
-        </p:txBody>
-      </p:sp>
-      <p:sp>
-        <p:nvSpPr>
-          <p:cNvPr id="31" name="Rounded Rectangle 30"/>
-          <p:cNvSpPr/>
-          <p:nvPr/>
-        </p:nvSpPr>
-        <p:spPr>
-          <a:xfrm>
-            <a:off x="731520" y="5349240"/>
-            <a:ext cx="7071055" cy="804672"/>
-          </a:xfrm>
-          <a:prstGeom prst="roundRect">
-            <a:avLst/>
-          </a:prstGeom>
-          <a:noFill/>
-          <a:ln>
-            <a:noFill/>
-          </a:ln>
-        </p:spPr>
-        <p:style>
-          <a:lnRef idx="1">
-            <a:schemeClr val="accent1"/>
-          </a:lnRef>
-          <a:fillRef idx="3">
-            <a:schemeClr val="accent1"/>
-          </a:fillRef>
-          <a:effectRef idx="2">
-            <a:schemeClr val="accent1"/>
-          </a:effectRef>
-          <a:fontRef idx="minor">
-            <a:schemeClr val="lt1"/>
-          </a:fontRef>
-        </p:style>
-        <p:txBody>
-          <a:bodyPr rtlCol="0" anchor="ctr"/>
-          <a:lstStyle/>
-          <a:p>
-            <a:pPr algn="ctr"/>
-          </a:p>
-        </p:txBody>
-      </p:sp>
-      <p:sp>
-        <p:nvSpPr>
-          <p:cNvPr id="32" name="Rectangle 31"/>
-          <p:cNvSpPr/>
-          <p:nvPr/>
-        </p:nvSpPr>
-        <p:spPr>
-          <a:xfrm>
-            <a:off x="868680" y="5458968"/>
-            <a:ext cx="73152" cy="548640"/>
-          </a:xfrm>
-          <a:prstGeom prst="rect">
-            <a:avLst/>
-          </a:prstGeom>
-          <a:solidFill>
-            <a:srgbClr val="355C7D"/>
-          </a:solidFill>
-          <a:ln>
-            <a:noFill/>
-          </a:ln>
-        </p:spPr>
-        <p:style>
-          <a:lnRef idx="1">
-            <a:schemeClr val="accent1"/>
-          </a:lnRef>
-          <a:fillRef idx="3">
-            <a:schemeClr val="accent1"/>
-          </a:fillRef>
-          <a:effectRef idx="2">
-            <a:schemeClr val="accent1"/>
-          </a:effectRef>
-          <a:fontRef idx="minor">
-            <a:schemeClr val="lt1"/>
-          </a:fontRef>
-        </p:style>
-        <p:txBody>
-          <a:bodyPr rtlCol="0" anchor="ctr"/>
-          <a:lstStyle/>
-          <a:p>
-            <a:pPr algn="ctr"/>
-          </a:p>
-        </p:txBody>
-      </p:sp>
-      <p:sp>
-        <p:nvSpPr>
-          <p:cNvPr id="33" name="TextBox 32"/>
-          <p:cNvSpPr txBox="1"/>
-          <p:nvPr/>
-        </p:nvSpPr>
-        <p:spPr>
-          <a:xfrm>
-            <a:off x="1078992" y="5422392"/>
-            <a:ext cx="6613855" cy="228600"/>
-          </a:xfrm>
-          <a:prstGeom prst="rect">
-            <a:avLst/>
-          </a:prstGeom>
-          <a:noFill/>
-        </p:spPr>
-        <p:txBody>
-          <a:bodyPr wrap="square" anchor="t">
-            <a:spAutoFit/>
-          </a:bodyPr>
-          <a:lstStyle/>
-          <a:p>
-            <a:pPr algn="l"/>
-            <a:r>
-              <a:rPr sz="1700" b="0" i="0" lang="th-TH" altLang="en-US">
-                <a:solidFill>
-                  <a:srgbClr val="24333D"/>
-                </a:solidFill>
-                <a:latin typeface="Sarabun"/>
-                <a:ea typeface="Sarabun"/>
-                <a:cs typeface="Sarabun"/>
-              </a:rPr>
-              <a:t>ห้า</a:t>
-            </a:r>
-          </a:p>
-        </p:txBody>
-      </p:sp>
-      <p:sp>
-        <p:nvSpPr>
-          <p:cNvPr id="34" name="TextBox 33"/>
-          <p:cNvSpPr txBox="1"/>
-          <p:nvPr/>
-        </p:nvSpPr>
-        <p:spPr>
-          <a:xfrm>
-            <a:off x="1078992" y="5650992"/>
-            <a:ext cx="6613855" cy="201168"/>
-          </a:xfrm>
-          <a:prstGeom prst="rect">
-            <a:avLst/>
-          </a:prstGeom>
-          <a:noFill/>
-        </p:spPr>
-        <p:txBody>
-          <a:bodyPr wrap="square" anchor="t">
-            <a:spAutoFit/>
-          </a:bodyPr>
-          <a:lstStyle/>
-          <a:p>
-            <a:pPr algn="l"/>
-            <a:r>
-              <a:rPr sz="1700" b="0" i="1" lang="en-US" altLang="en-US">
-                <a:solidFill>
-                  <a:srgbClr val="566873"/>
-                </a:solidFill>
-                <a:latin typeface="Sarabun"/>
-                <a:ea typeface="Sarabun"/>
-                <a:cs typeface="Sarabun"/>
-              </a:rPr>
-              <a:t>hâa</a:t>
-            </a:r>
-          </a:p>
-        </p:txBody>
-      </p:sp>
-      <p:sp>
-        <p:nvSpPr>
-          <p:cNvPr id="35" name="TextBox 34"/>
-          <p:cNvSpPr txBox="1"/>
-          <p:nvPr/>
-        </p:nvSpPr>
-        <p:spPr>
-          <a:xfrm>
-            <a:off x="1078992" y="5852160"/>
-            <a:ext cx="6613855" cy="201168"/>
-          </a:xfrm>
-          <a:prstGeom prst="rect">
-            <a:avLst/>
-          </a:prstGeom>
-          <a:noFill/>
-        </p:spPr>
-        <p:txBody>
-          <a:bodyPr wrap="square" anchor="t">
-            <a:spAutoFit/>
-          </a:bodyPr>
-          <a:lstStyle/>
-          <a:p>
-            <a:pPr algn="l"/>
-            <a:r>
-              <a:rPr sz="1700" b="0" i="0" lang="en-US" altLang="en-US">
-                <a:solidFill>
-                  <a:srgbClr val="82909A"/>
-                </a:solidFill>
-                <a:latin typeface="Sarabun"/>
-                <a:ea typeface="Sarabun"/>
-                <a:cs typeface="Sarabun"/>
-              </a:rPr>
-              <a:t>5 — five</a:t>
             </a:r>
           </a:p>
         </p:txBody>
@@ -6383,7 +7184,7 @@
                 <a:ea typeface="Sarabun"/>
                 <a:cs typeface="Sarabun"/>
               </a:rPr>
-              <a:t>Digits 6 to 10</a:t>
+              <a:t>Digits 0 to 5</a:t>
             </a:r>
           </a:p>
         </p:txBody>
@@ -6397,7 +7198,7 @@
         <p:spPr>
           <a:xfrm>
             <a:off x="731520" y="1325880"/>
-            <a:ext cx="7071055" cy="804672"/>
+            <a:ext cx="7071055" cy="1572768"/>
           </a:xfrm>
           <a:prstGeom prst="roundRect">
             <a:avLst/>
@@ -6437,8 +7238,8 @@
         </p:nvSpPr>
         <p:spPr>
           <a:xfrm>
-            <a:off x="868680" y="1435608"/>
-            <a:ext cx="73152" cy="548640"/>
+            <a:off x="868680" y="1527048"/>
+            <a:ext cx="73152" cy="1143000"/>
           </a:xfrm>
           <a:prstGeom prst="rect">
             <a:avLst/>
@@ -6480,8 +7281,8 @@
         </p:nvSpPr>
         <p:spPr>
           <a:xfrm>
-            <a:off x="1078992" y="1399032"/>
-            <a:ext cx="6613855" cy="228600"/>
+            <a:off x="1078992" y="1463040"/>
+            <a:ext cx="6613855" cy="320040"/>
           </a:xfrm>
           <a:prstGeom prst="rect">
             <a:avLst/>
@@ -6504,7 +7305,7 @@
                 <a:ea typeface="Sarabun"/>
                 <a:cs typeface="Sarabun"/>
               </a:rPr>
-              <a:t>หก</a:t>
+              <a:t>สาม</a:t>
             </a:r>
           </a:p>
         </p:txBody>
@@ -6517,8 +7318,8 @@
         </p:nvSpPr>
         <p:spPr>
           <a:xfrm>
-            <a:off x="1078992" y="1627632"/>
-            <a:ext cx="6613855" cy="201168"/>
+            <a:off x="1078992" y="1828800"/>
+            <a:ext cx="6613855" cy="274320"/>
           </a:xfrm>
           <a:prstGeom prst="rect">
             <a:avLst/>
@@ -6541,7 +7342,7 @@
                 <a:ea typeface="Sarabun"/>
                 <a:cs typeface="Sarabun"/>
               </a:rPr>
-              <a:t>hòk</a:t>
+              <a:t>sǎam</a:t>
             </a:r>
           </a:p>
         </p:txBody>
@@ -6554,8 +7355,8 @@
         </p:nvSpPr>
         <p:spPr>
           <a:xfrm>
-            <a:off x="1078992" y="1828800"/>
-            <a:ext cx="6613855" cy="201168"/>
+            <a:off x="1078992" y="2203704"/>
+            <a:ext cx="6613855" cy="274320"/>
           </a:xfrm>
           <a:prstGeom prst="rect">
             <a:avLst/>
@@ -6578,7 +7379,7 @@
                 <a:ea typeface="Sarabun"/>
                 <a:cs typeface="Sarabun"/>
               </a:rPr>
-              <a:t>6 — six</a:t>
+              <a:t>3 — three</a:t>
             </a:r>
           </a:p>
         </p:txBody>
@@ -6591,8 +7392,8 @@
         </p:nvSpPr>
         <p:spPr>
           <a:xfrm>
-            <a:off x="731520" y="2130552"/>
-            <a:ext cx="7071055" cy="804672"/>
+            <a:off x="731520" y="3081528"/>
+            <a:ext cx="7071055" cy="1572768"/>
           </a:xfrm>
           <a:prstGeom prst="roundRect">
             <a:avLst/>
@@ -6632,8 +7433,8 @@
         </p:nvSpPr>
         <p:spPr>
           <a:xfrm>
-            <a:off x="868680" y="2240280"/>
-            <a:ext cx="73152" cy="548640"/>
+            <a:off x="868680" y="3282696"/>
+            <a:ext cx="73152" cy="1143000"/>
           </a:xfrm>
           <a:prstGeom prst="rect">
             <a:avLst/>
@@ -6675,8 +7476,8 @@
         </p:nvSpPr>
         <p:spPr>
           <a:xfrm>
-            <a:off x="1078992" y="2203704"/>
-            <a:ext cx="6613855" cy="228600"/>
+            <a:off x="1078992" y="3218688"/>
+            <a:ext cx="6613855" cy="320040"/>
           </a:xfrm>
           <a:prstGeom prst="rect">
             <a:avLst/>
@@ -6699,7 +7500,7 @@
                 <a:ea typeface="Sarabun"/>
                 <a:cs typeface="Sarabun"/>
               </a:rPr>
-              <a:t>เจ็ด</a:t>
+              <a:t>สี่</a:t>
             </a:r>
           </a:p>
         </p:txBody>
@@ -6712,8 +7513,8 @@
         </p:nvSpPr>
         <p:spPr>
           <a:xfrm>
-            <a:off x="1078992" y="2432304"/>
-            <a:ext cx="6613855" cy="201168"/>
+            <a:off x="1078992" y="3584448"/>
+            <a:ext cx="6613855" cy="274320"/>
           </a:xfrm>
           <a:prstGeom prst="rect">
             <a:avLst/>
@@ -6736,7 +7537,7 @@
                 <a:ea typeface="Sarabun"/>
                 <a:cs typeface="Sarabun"/>
               </a:rPr>
-              <a:t>jèt</a:t>
+              <a:t>sìi</a:t>
             </a:r>
           </a:p>
         </p:txBody>
@@ -6749,8 +7550,8 @@
         </p:nvSpPr>
         <p:spPr>
           <a:xfrm>
-            <a:off x="1078992" y="2633472"/>
-            <a:ext cx="6613855" cy="201168"/>
+            <a:off x="1078992" y="3959352"/>
+            <a:ext cx="6613855" cy="274320"/>
           </a:xfrm>
           <a:prstGeom prst="rect">
             <a:avLst/>
@@ -6773,7 +7574,7 @@
                 <a:ea typeface="Sarabun"/>
                 <a:cs typeface="Sarabun"/>
               </a:rPr>
-              <a:t>7 — seven</a:t>
+              <a:t>4 — four</a:t>
             </a:r>
           </a:p>
         </p:txBody>
@@ -6786,8 +7587,8 @@
         </p:nvSpPr>
         <p:spPr>
           <a:xfrm>
-            <a:off x="731520" y="2935224"/>
-            <a:ext cx="7071055" cy="804672"/>
+            <a:off x="731520" y="4837176"/>
+            <a:ext cx="7071055" cy="1572768"/>
           </a:xfrm>
           <a:prstGeom prst="roundRect">
             <a:avLst/>
@@ -6827,8 +7628,8 @@
         </p:nvSpPr>
         <p:spPr>
           <a:xfrm>
-            <a:off x="868680" y="3044952"/>
-            <a:ext cx="73152" cy="548640"/>
+            <a:off x="868680" y="5038344"/>
+            <a:ext cx="73152" cy="1143000"/>
           </a:xfrm>
           <a:prstGeom prst="rect">
             <a:avLst/>
@@ -6870,8 +7671,8 @@
         </p:nvSpPr>
         <p:spPr>
           <a:xfrm>
-            <a:off x="1078992" y="3008376"/>
-            <a:ext cx="6613855" cy="228600"/>
+            <a:off x="1078992" y="4974336"/>
+            <a:ext cx="6613855" cy="320040"/>
           </a:xfrm>
           <a:prstGeom prst="rect">
             <a:avLst/>
@@ -6894,7 +7695,7 @@
                 <a:ea typeface="Sarabun"/>
                 <a:cs typeface="Sarabun"/>
               </a:rPr>
-              <a:t>แปด</a:t>
+              <a:t>ห้า</a:t>
             </a:r>
           </a:p>
         </p:txBody>
@@ -6907,8 +7708,8 @@
         </p:nvSpPr>
         <p:spPr>
           <a:xfrm>
-            <a:off x="1078992" y="3236976"/>
-            <a:ext cx="6613855" cy="201168"/>
+            <a:off x="1078992" y="5340096"/>
+            <a:ext cx="6613855" cy="274320"/>
           </a:xfrm>
           <a:prstGeom prst="rect">
             <a:avLst/>
@@ -6931,7 +7732,7 @@
                 <a:ea typeface="Sarabun"/>
                 <a:cs typeface="Sarabun"/>
               </a:rPr>
-              <a:t>bpàet</a:t>
+              <a:t>hâa</a:t>
             </a:r>
           </a:p>
         </p:txBody>
@@ -6944,8 +7745,8 @@
         </p:nvSpPr>
         <p:spPr>
           <a:xfrm>
-            <a:off x="1078992" y="3438144"/>
-            <a:ext cx="6613855" cy="201168"/>
+            <a:off x="1078992" y="5715000"/>
+            <a:ext cx="6613855" cy="274320"/>
           </a:xfrm>
           <a:prstGeom prst="rect">
             <a:avLst/>
@@ -6968,679 +7769,7 @@
                 <a:ea typeface="Sarabun"/>
                 <a:cs typeface="Sarabun"/>
               </a:rPr>
-              <a:t>8 — eight</a:t>
-            </a:r>
-          </a:p>
-        </p:txBody>
-      </p:sp>
-      <p:sp>
-        <p:nvSpPr>
-          <p:cNvPr id="21" name="Rounded Rectangle 20"/>
-          <p:cNvSpPr/>
-          <p:nvPr/>
-        </p:nvSpPr>
-        <p:spPr>
-          <a:xfrm>
-            <a:off x="731520" y="3739896"/>
-            <a:ext cx="7071055" cy="804672"/>
-          </a:xfrm>
-          <a:prstGeom prst="roundRect">
-            <a:avLst/>
-          </a:prstGeom>
-          <a:noFill/>
-          <a:ln>
-            <a:noFill/>
-          </a:ln>
-        </p:spPr>
-        <p:style>
-          <a:lnRef idx="1">
-            <a:schemeClr val="accent1"/>
-          </a:lnRef>
-          <a:fillRef idx="3">
-            <a:schemeClr val="accent1"/>
-          </a:fillRef>
-          <a:effectRef idx="2">
-            <a:schemeClr val="accent1"/>
-          </a:effectRef>
-          <a:fontRef idx="minor">
-            <a:schemeClr val="lt1"/>
-          </a:fontRef>
-        </p:style>
-        <p:txBody>
-          <a:bodyPr rtlCol="0" anchor="ctr"/>
-          <a:lstStyle/>
-          <a:p>
-            <a:pPr algn="ctr"/>
-          </a:p>
-        </p:txBody>
-      </p:sp>
-      <p:sp>
-        <p:nvSpPr>
-          <p:cNvPr id="22" name="Rectangle 21"/>
-          <p:cNvSpPr/>
-          <p:nvPr/>
-        </p:nvSpPr>
-        <p:spPr>
-          <a:xfrm>
-            <a:off x="868680" y="3849624"/>
-            <a:ext cx="73152" cy="548640"/>
-          </a:xfrm>
-          <a:prstGeom prst="rect">
-            <a:avLst/>
-          </a:prstGeom>
-          <a:solidFill>
-            <a:srgbClr val="355C7D"/>
-          </a:solidFill>
-          <a:ln>
-            <a:noFill/>
-          </a:ln>
-        </p:spPr>
-        <p:style>
-          <a:lnRef idx="1">
-            <a:schemeClr val="accent1"/>
-          </a:lnRef>
-          <a:fillRef idx="3">
-            <a:schemeClr val="accent1"/>
-          </a:fillRef>
-          <a:effectRef idx="2">
-            <a:schemeClr val="accent1"/>
-          </a:effectRef>
-          <a:fontRef idx="minor">
-            <a:schemeClr val="lt1"/>
-          </a:fontRef>
-        </p:style>
-        <p:txBody>
-          <a:bodyPr rtlCol="0" anchor="ctr"/>
-          <a:lstStyle/>
-          <a:p>
-            <a:pPr algn="ctr"/>
-          </a:p>
-        </p:txBody>
-      </p:sp>
-      <p:sp>
-        <p:nvSpPr>
-          <p:cNvPr id="23" name="TextBox 22"/>
-          <p:cNvSpPr txBox="1"/>
-          <p:nvPr/>
-        </p:nvSpPr>
-        <p:spPr>
-          <a:xfrm>
-            <a:off x="1078992" y="3813048"/>
-            <a:ext cx="6613855" cy="228600"/>
-          </a:xfrm>
-          <a:prstGeom prst="rect">
-            <a:avLst/>
-          </a:prstGeom>
-          <a:noFill/>
-        </p:spPr>
-        <p:txBody>
-          <a:bodyPr wrap="square" anchor="t">
-            <a:spAutoFit/>
-          </a:bodyPr>
-          <a:lstStyle/>
-          <a:p>
-            <a:pPr algn="l"/>
-            <a:r>
-              <a:rPr sz="1700" b="0" i="0" lang="th-TH" altLang="en-US">
-                <a:solidFill>
-                  <a:srgbClr val="24333D"/>
-                </a:solidFill>
-                <a:latin typeface="Sarabun"/>
-                <a:ea typeface="Sarabun"/>
-                <a:cs typeface="Sarabun"/>
-              </a:rPr>
-              <a:t>เก้า</a:t>
-            </a:r>
-          </a:p>
-        </p:txBody>
-      </p:sp>
-      <p:sp>
-        <p:nvSpPr>
-          <p:cNvPr id="24" name="TextBox 23"/>
-          <p:cNvSpPr txBox="1"/>
-          <p:nvPr/>
-        </p:nvSpPr>
-        <p:spPr>
-          <a:xfrm>
-            <a:off x="1078992" y="4041648"/>
-            <a:ext cx="6613855" cy="201168"/>
-          </a:xfrm>
-          <a:prstGeom prst="rect">
-            <a:avLst/>
-          </a:prstGeom>
-          <a:noFill/>
-        </p:spPr>
-        <p:txBody>
-          <a:bodyPr wrap="square" anchor="t">
-            <a:spAutoFit/>
-          </a:bodyPr>
-          <a:lstStyle/>
-          <a:p>
-            <a:pPr algn="l"/>
-            <a:r>
-              <a:rPr sz="1700" b="0" i="1" lang="en-US" altLang="en-US">
-                <a:solidFill>
-                  <a:srgbClr val="566873"/>
-                </a:solidFill>
-                <a:latin typeface="Sarabun"/>
-                <a:ea typeface="Sarabun"/>
-                <a:cs typeface="Sarabun"/>
-              </a:rPr>
-              <a:t>gâo</a:t>
-            </a:r>
-          </a:p>
-        </p:txBody>
-      </p:sp>
-      <p:sp>
-        <p:nvSpPr>
-          <p:cNvPr id="25" name="TextBox 24"/>
-          <p:cNvSpPr txBox="1"/>
-          <p:nvPr/>
-        </p:nvSpPr>
-        <p:spPr>
-          <a:xfrm>
-            <a:off x="1078992" y="4242816"/>
-            <a:ext cx="6613855" cy="201168"/>
-          </a:xfrm>
-          <a:prstGeom prst="rect">
-            <a:avLst/>
-          </a:prstGeom>
-          <a:noFill/>
-        </p:spPr>
-        <p:txBody>
-          <a:bodyPr wrap="square" anchor="t">
-            <a:spAutoFit/>
-          </a:bodyPr>
-          <a:lstStyle/>
-          <a:p>
-            <a:pPr algn="l"/>
-            <a:r>
-              <a:rPr sz="1700" b="0" i="0" lang="en-US" altLang="en-US">
-                <a:solidFill>
-                  <a:srgbClr val="82909A"/>
-                </a:solidFill>
-                <a:latin typeface="Sarabun"/>
-                <a:ea typeface="Sarabun"/>
-                <a:cs typeface="Sarabun"/>
-              </a:rPr>
-              <a:t>9 — nine</a:t>
-            </a:r>
-          </a:p>
-        </p:txBody>
-      </p:sp>
-      <p:sp>
-        <p:nvSpPr>
-          <p:cNvPr id="26" name="Rounded Rectangle 25"/>
-          <p:cNvSpPr/>
-          <p:nvPr/>
-        </p:nvSpPr>
-        <p:spPr>
-          <a:xfrm>
-            <a:off x="731520" y="4544568"/>
-            <a:ext cx="7071055" cy="804672"/>
-          </a:xfrm>
-          <a:prstGeom prst="roundRect">
-            <a:avLst/>
-          </a:prstGeom>
-          <a:noFill/>
-          <a:ln>
-            <a:noFill/>
-          </a:ln>
-        </p:spPr>
-        <p:style>
-          <a:lnRef idx="1">
-            <a:schemeClr val="accent1"/>
-          </a:lnRef>
-          <a:fillRef idx="3">
-            <a:schemeClr val="accent1"/>
-          </a:fillRef>
-          <a:effectRef idx="2">
-            <a:schemeClr val="accent1"/>
-          </a:effectRef>
-          <a:fontRef idx="minor">
-            <a:schemeClr val="lt1"/>
-          </a:fontRef>
-        </p:style>
-        <p:txBody>
-          <a:bodyPr rtlCol="0" anchor="ctr"/>
-          <a:lstStyle/>
-          <a:p>
-            <a:pPr algn="ctr"/>
-          </a:p>
-        </p:txBody>
-      </p:sp>
-      <p:sp>
-        <p:nvSpPr>
-          <p:cNvPr id="27" name="Rectangle 26"/>
-          <p:cNvSpPr/>
-          <p:nvPr/>
-        </p:nvSpPr>
-        <p:spPr>
-          <a:xfrm>
-            <a:off x="868680" y="4654296"/>
-            <a:ext cx="73152" cy="548640"/>
-          </a:xfrm>
-          <a:prstGeom prst="rect">
-            <a:avLst/>
-          </a:prstGeom>
-          <a:solidFill>
-            <a:srgbClr val="355C7D"/>
-          </a:solidFill>
-          <a:ln>
-            <a:noFill/>
-          </a:ln>
-        </p:spPr>
-        <p:style>
-          <a:lnRef idx="1">
-            <a:schemeClr val="accent1"/>
-          </a:lnRef>
-          <a:fillRef idx="3">
-            <a:schemeClr val="accent1"/>
-          </a:fillRef>
-          <a:effectRef idx="2">
-            <a:schemeClr val="accent1"/>
-          </a:effectRef>
-          <a:fontRef idx="minor">
-            <a:schemeClr val="lt1"/>
-          </a:fontRef>
-        </p:style>
-        <p:txBody>
-          <a:bodyPr rtlCol="0" anchor="ctr"/>
-          <a:lstStyle/>
-          <a:p>
-            <a:pPr algn="ctr"/>
-          </a:p>
-        </p:txBody>
-      </p:sp>
-      <p:sp>
-        <p:nvSpPr>
-          <p:cNvPr id="28" name="TextBox 27"/>
-          <p:cNvSpPr txBox="1"/>
-          <p:nvPr/>
-        </p:nvSpPr>
-        <p:spPr>
-          <a:xfrm>
-            <a:off x="1078992" y="4617720"/>
-            <a:ext cx="6613855" cy="228600"/>
-          </a:xfrm>
-          <a:prstGeom prst="rect">
-            <a:avLst/>
-          </a:prstGeom>
-          <a:noFill/>
-        </p:spPr>
-        <p:txBody>
-          <a:bodyPr wrap="square" anchor="t">
-            <a:spAutoFit/>
-          </a:bodyPr>
-          <a:lstStyle/>
-          <a:p>
-            <a:pPr algn="l"/>
-            <a:r>
-              <a:rPr sz="1700" b="0" i="0" lang="th-TH" altLang="en-US">
-                <a:solidFill>
-                  <a:srgbClr val="24333D"/>
-                </a:solidFill>
-                <a:latin typeface="Sarabun"/>
-                <a:ea typeface="Sarabun"/>
-                <a:cs typeface="Sarabun"/>
-              </a:rPr>
-              <a:t>สิบ</a:t>
-            </a:r>
-          </a:p>
-        </p:txBody>
-      </p:sp>
-      <p:sp>
-        <p:nvSpPr>
-          <p:cNvPr id="29" name="TextBox 28"/>
-          <p:cNvSpPr txBox="1"/>
-          <p:nvPr/>
-        </p:nvSpPr>
-        <p:spPr>
-          <a:xfrm>
-            <a:off x="1078992" y="4846320"/>
-            <a:ext cx="6613855" cy="201168"/>
-          </a:xfrm>
-          <a:prstGeom prst="rect">
-            <a:avLst/>
-          </a:prstGeom>
-          <a:noFill/>
-        </p:spPr>
-        <p:txBody>
-          <a:bodyPr wrap="square" anchor="t">
-            <a:spAutoFit/>
-          </a:bodyPr>
-          <a:lstStyle/>
-          <a:p>
-            <a:pPr algn="l"/>
-            <a:r>
-              <a:rPr sz="1700" b="0" i="1" lang="en-US" altLang="en-US">
-                <a:solidFill>
-                  <a:srgbClr val="566873"/>
-                </a:solidFill>
-                <a:latin typeface="Sarabun"/>
-                <a:ea typeface="Sarabun"/>
-                <a:cs typeface="Sarabun"/>
-              </a:rPr>
-              <a:t>sìp</a:t>
-            </a:r>
-          </a:p>
-        </p:txBody>
-      </p:sp>
-      <p:sp>
-        <p:nvSpPr>
-          <p:cNvPr id="30" name="TextBox 29"/>
-          <p:cNvSpPr txBox="1"/>
-          <p:nvPr/>
-        </p:nvSpPr>
-        <p:spPr>
-          <a:xfrm>
-            <a:off x="1078992" y="5047488"/>
-            <a:ext cx="6613855" cy="201168"/>
-          </a:xfrm>
-          <a:prstGeom prst="rect">
-            <a:avLst/>
-          </a:prstGeom>
-          <a:noFill/>
-        </p:spPr>
-        <p:txBody>
-          <a:bodyPr wrap="square" anchor="t">
-            <a:spAutoFit/>
-          </a:bodyPr>
-          <a:lstStyle/>
-          <a:p>
-            <a:pPr algn="l"/>
-            <a:r>
-              <a:rPr sz="1700" b="0" i="0" lang="en-US" altLang="en-US">
-                <a:solidFill>
-                  <a:srgbClr val="82909A"/>
-                </a:solidFill>
-                <a:latin typeface="Sarabun"/>
-                <a:ea typeface="Sarabun"/>
-                <a:cs typeface="Sarabun"/>
-              </a:rPr>
-              <a:t>10 — ten</a:t>
-            </a:r>
-          </a:p>
-        </p:txBody>
-      </p:sp>
-      <p:sp>
-        <p:nvSpPr>
-          <p:cNvPr id="31" name="TextBox 30"/>
-          <p:cNvSpPr txBox="1"/>
-          <p:nvPr/>
-        </p:nvSpPr>
-        <p:spPr>
-          <a:xfrm>
-            <a:off x="932688" y="5632704"/>
-            <a:ext cx="9692640" cy="228600"/>
-          </a:xfrm>
-          <a:prstGeom prst="rect">
-            <a:avLst/>
-          </a:prstGeom>
-          <a:noFill/>
-        </p:spPr>
-        <p:txBody>
-          <a:bodyPr wrap="square" anchor="t">
-            <a:spAutoFit/>
-          </a:bodyPr>
-          <a:lstStyle/>
-          <a:p>
-            <a:pPr algn="l"/>
-            <a:r>
-              <a:rPr sz="1700" b="1" i="0" lang="en-US" altLang="en-US">
-                <a:solidFill>
-                  <a:srgbClr val="C96F4A"/>
-                </a:solidFill>
-                <a:latin typeface="Sarabun"/>
-                <a:ea typeface="Sarabun"/>
-                <a:cs typeface="Sarabun"/>
-              </a:rPr>
-              <a:t>Practice</a:t>
-            </a:r>
-          </a:p>
-        </p:txBody>
-      </p:sp>
-      <p:sp>
-        <p:nvSpPr>
-          <p:cNvPr id="32" name="Oval 31"/>
-          <p:cNvSpPr/>
-          <p:nvPr/>
-        </p:nvSpPr>
-        <p:spPr>
-          <a:xfrm>
-            <a:off x="932688" y="6016752"/>
-            <a:ext cx="82296" cy="82296"/>
-          </a:xfrm>
-          <a:prstGeom prst="ellipse">
-            <a:avLst/>
-          </a:prstGeom>
-          <a:solidFill>
-            <a:srgbClr val="C96F4A"/>
-          </a:solidFill>
-          <a:ln>
-            <a:noFill/>
-          </a:ln>
-        </p:spPr>
-        <p:style>
-          <a:lnRef idx="1">
-            <a:schemeClr val="accent1"/>
-          </a:lnRef>
-          <a:fillRef idx="3">
-            <a:schemeClr val="accent1"/>
-          </a:fillRef>
-          <a:effectRef idx="2">
-            <a:schemeClr val="accent1"/>
-          </a:effectRef>
-          <a:fontRef idx="minor">
-            <a:schemeClr val="lt1"/>
-          </a:fontRef>
-        </p:style>
-        <p:txBody>
-          <a:bodyPr rtlCol="0" anchor="ctr"/>
-          <a:lstStyle/>
-          <a:p>
-            <a:pPr algn="ctr"/>
-          </a:p>
-        </p:txBody>
-      </p:sp>
-      <p:sp>
-        <p:nvSpPr>
-          <p:cNvPr id="33" name="TextBox 32"/>
-          <p:cNvSpPr txBox="1"/>
-          <p:nvPr/>
-        </p:nvSpPr>
-        <p:spPr>
-          <a:xfrm>
-            <a:off x="1078992" y="5925312"/>
-            <a:ext cx="9555480" cy="475488"/>
-          </a:xfrm>
-          <a:prstGeom prst="rect">
-            <a:avLst/>
-          </a:prstGeom>
-          <a:noFill/>
-        </p:spPr>
-        <p:txBody>
-          <a:bodyPr wrap="square" anchor="t">
-            <a:spAutoFit/>
-          </a:bodyPr>
-          <a:lstStyle/>
-          <a:p>
-            <a:pPr algn="l"/>
-            <a:r>
-              <a:rPr sz="1700" b="0" i="0" lang="en-US" altLang="en-US">
-                <a:solidFill>
-                  <a:srgbClr val="24333D"/>
-                </a:solidFill>
-                <a:latin typeface="Sarabun"/>
-                <a:ea typeface="Sarabun"/>
-                <a:cs typeface="Sarabun"/>
-              </a:rPr>
-              <a:t>Listen and repeat: </a:t>
-            </a:r>
-            <a:r>
-              <a:rPr sz="1700" b="0" i="0" lang="th-TH" altLang="en-US">
-                <a:solidFill>
-                  <a:srgbClr val="24333D"/>
-                </a:solidFill>
-                <a:latin typeface="Sarabun"/>
-                <a:ea typeface="Sarabun"/>
-                <a:cs typeface="Sarabun"/>
-              </a:rPr>
-              <a:t>หก</a:t>
-            </a:r>
-            <a:r>
-              <a:rPr sz="1700" b="0" i="1" lang="en-US" altLang="en-US">
-                <a:solidFill>
-                  <a:srgbClr val="566873"/>
-                </a:solidFill>
-                <a:latin typeface="Sarabun"/>
-                <a:ea typeface="Sarabun"/>
-                <a:cs typeface="Sarabun"/>
-              </a:rPr>
-              <a:t> (hòk)</a:t>
-            </a:r>
-            <a:r>
-              <a:rPr sz="1700" b="0" i="0" lang="en-US" altLang="en-US">
-                <a:solidFill>
-                  <a:srgbClr val="24333D"/>
-                </a:solidFill>
-                <a:latin typeface="Sarabun"/>
-                <a:ea typeface="Sarabun"/>
-                <a:cs typeface="Sarabun"/>
-              </a:rPr>
-              <a:t>, </a:t>
-            </a:r>
-            <a:r>
-              <a:rPr sz="1700" b="0" i="0" lang="th-TH" altLang="en-US">
-                <a:solidFill>
-                  <a:srgbClr val="24333D"/>
-                </a:solidFill>
-                <a:latin typeface="Sarabun"/>
-                <a:ea typeface="Sarabun"/>
-                <a:cs typeface="Sarabun"/>
-              </a:rPr>
-              <a:t>เจ็ด</a:t>
-            </a:r>
-            <a:r>
-              <a:rPr sz="1700" b="0" i="1" lang="en-US" altLang="en-US">
-                <a:solidFill>
-                  <a:srgbClr val="566873"/>
-                </a:solidFill>
-                <a:latin typeface="Sarabun"/>
-                <a:ea typeface="Sarabun"/>
-                <a:cs typeface="Sarabun"/>
-              </a:rPr>
-              <a:t> (jèt)</a:t>
-            </a:r>
-            <a:r>
-              <a:rPr sz="1700" b="0" i="0" lang="en-US" altLang="en-US">
-                <a:solidFill>
-                  <a:srgbClr val="24333D"/>
-                </a:solidFill>
-                <a:latin typeface="Sarabun"/>
-                <a:ea typeface="Sarabun"/>
-                <a:cs typeface="Sarabun"/>
-              </a:rPr>
-              <a:t>, </a:t>
-            </a:r>
-            <a:r>
-              <a:rPr sz="1700" b="0" i="0" lang="th-TH" altLang="en-US">
-                <a:solidFill>
-                  <a:srgbClr val="24333D"/>
-                </a:solidFill>
-                <a:latin typeface="Sarabun"/>
-                <a:ea typeface="Sarabun"/>
-                <a:cs typeface="Sarabun"/>
-              </a:rPr>
-              <a:t>แปด</a:t>
-            </a:r>
-            <a:r>
-              <a:rPr sz="1700" b="0" i="1" lang="en-US" altLang="en-US">
-                <a:solidFill>
-                  <a:srgbClr val="566873"/>
-                </a:solidFill>
-                <a:latin typeface="Sarabun"/>
-                <a:ea typeface="Sarabun"/>
-                <a:cs typeface="Sarabun"/>
-              </a:rPr>
-              <a:t> (bpàet)</a:t>
-            </a:r>
-            <a:r>
-              <a:rPr sz="1700" b="0" i="0" lang="en-US" altLang="en-US">
-                <a:solidFill>
-                  <a:srgbClr val="24333D"/>
-                </a:solidFill>
-                <a:latin typeface="Sarabun"/>
-                <a:ea typeface="Sarabun"/>
-                <a:cs typeface="Sarabun"/>
-              </a:rPr>
-              <a:t>, </a:t>
-            </a:r>
-            <a:r>
-              <a:rPr sz="1700" b="0" i="0" lang="th-TH" altLang="en-US">
-                <a:solidFill>
-                  <a:srgbClr val="24333D"/>
-                </a:solidFill>
-                <a:latin typeface="Sarabun"/>
-                <a:ea typeface="Sarabun"/>
-                <a:cs typeface="Sarabun"/>
-              </a:rPr>
-              <a:t>เก้า</a:t>
-            </a:r>
-            <a:r>
-              <a:rPr sz="1700" b="0" i="1" lang="en-US" altLang="en-US">
-                <a:solidFill>
-                  <a:srgbClr val="566873"/>
-                </a:solidFill>
-                <a:latin typeface="Sarabun"/>
-                <a:ea typeface="Sarabun"/>
-                <a:cs typeface="Sarabun"/>
-              </a:rPr>
-              <a:t> (gâo)</a:t>
-            </a:r>
-            <a:r>
-              <a:rPr sz="1700" b="0" i="0" lang="en-US" altLang="en-US">
-                <a:solidFill>
-                  <a:srgbClr val="24333D"/>
-                </a:solidFill>
-                <a:latin typeface="Sarabun"/>
-                <a:ea typeface="Sarabun"/>
-                <a:cs typeface="Sarabun"/>
-              </a:rPr>
-              <a:t>, </a:t>
-            </a:r>
-            <a:r>
-              <a:rPr sz="1700" b="0" i="0" lang="th-TH" altLang="en-US">
-                <a:solidFill>
-                  <a:srgbClr val="24333D"/>
-                </a:solidFill>
-                <a:latin typeface="Sarabun"/>
-                <a:ea typeface="Sarabun"/>
-                <a:cs typeface="Sarabun"/>
-              </a:rPr>
-              <a:t>สิบ</a:t>
-            </a:r>
-            <a:r>
-              <a:rPr sz="1700" b="0" i="1" lang="en-US" altLang="en-US">
-                <a:solidFill>
-                  <a:srgbClr val="566873"/>
-                </a:solidFill>
-                <a:latin typeface="Sarabun"/>
-                <a:ea typeface="Sarabun"/>
-                <a:cs typeface="Sarabun"/>
-              </a:rPr>
-              <a:t> (sìp)</a:t>
-            </a:r>
-            <a:r>
-              <a:rPr sz="1700" b="0" i="0" lang="en-US" altLang="en-US">
-                <a:solidFill>
-                  <a:srgbClr val="24333D"/>
-                </a:solidFill>
-                <a:latin typeface="Sarabun"/>
-                <a:ea typeface="Sarabun"/>
-                <a:cs typeface="Sarabun"/>
-              </a:rPr>
-              <a:t>. Now count 0 to 10 from memory.</a:t>
+              <a:t>5 — five</a:t>
             </a:r>
           </a:p>
         </p:txBody>
@@ -7840,7 +7969,7 @@
                 <a:ea typeface="Sarabun"/>
                 <a:cs typeface="Sarabun"/>
               </a:rPr>
-              <a:t>Ask what number and say your age</a:t>
+              <a:t>Digits 6 to 10</a:t>
             </a:r>
           </a:p>
         </p:txBody>
@@ -7961,7 +8090,7 @@
                 <a:ea typeface="Sarabun"/>
                 <a:cs typeface="Sarabun"/>
               </a:rPr>
-              <a:t>เบอร์อะไร</a:t>
+              <a:t>หก</a:t>
             </a:r>
           </a:p>
         </p:txBody>
@@ -7998,7 +8127,7 @@
                 <a:ea typeface="Sarabun"/>
                 <a:cs typeface="Sarabun"/>
               </a:rPr>
-              <a:t>ber à-rai</a:t>
+              <a:t>hòk</a:t>
             </a:r>
           </a:p>
         </p:txBody>
@@ -8035,7 +8164,7 @@
                 <a:ea typeface="Sarabun"/>
                 <a:cs typeface="Sarabun"/>
               </a:rPr>
-              <a:t>what number?</a:t>
+              <a:t>6 — six</a:t>
             </a:r>
           </a:p>
         </p:txBody>
@@ -8048,7 +8177,7 @@
         </p:nvSpPr>
         <p:spPr>
           <a:xfrm>
-            <a:off x="731520" y="2606040"/>
+            <a:off x="731520" y="3081528"/>
             <a:ext cx="7071055" cy="1572768"/>
           </a:xfrm>
           <a:prstGeom prst="roundRect">
@@ -8089,7 +8218,7 @@
         </p:nvSpPr>
         <p:spPr>
           <a:xfrm>
-            <a:off x="868680" y="2807208"/>
+            <a:off x="868680" y="3282696"/>
             <a:ext cx="73152" cy="1143000"/>
           </a:xfrm>
           <a:prstGeom prst="rect">
@@ -8132,7 +8261,7 @@
         </p:nvSpPr>
         <p:spPr>
           <a:xfrm>
-            <a:off x="1078992" y="2743200"/>
+            <a:off x="1078992" y="3218688"/>
             <a:ext cx="6613855" cy="320040"/>
           </a:xfrm>
           <a:prstGeom prst="rect">
@@ -8156,7 +8285,7 @@
                 <a:ea typeface="Sarabun"/>
                 <a:cs typeface="Sarabun"/>
               </a:rPr>
-              <a:t>อายุ...ปี</a:t>
+              <a:t>เจ็ด</a:t>
             </a:r>
           </a:p>
         </p:txBody>
@@ -8169,7 +8298,7 @@
         </p:nvSpPr>
         <p:spPr>
           <a:xfrm>
-            <a:off x="1078992" y="3108960"/>
+            <a:off x="1078992" y="3584448"/>
             <a:ext cx="6613855" cy="274320"/>
           </a:xfrm>
           <a:prstGeom prst="rect">
@@ -8193,7 +8322,7 @@
                 <a:ea typeface="Sarabun"/>
                 <a:cs typeface="Sarabun"/>
               </a:rPr>
-              <a:t>aa-yú ... bpii</a:t>
+              <a:t>jèt</a:t>
             </a:r>
           </a:p>
         </p:txBody>
@@ -8206,7 +8335,7 @@
         </p:nvSpPr>
         <p:spPr>
           <a:xfrm>
-            <a:off x="1078992" y="3483864"/>
+            <a:off x="1078992" y="3959352"/>
             <a:ext cx="6613855" cy="274320"/>
           </a:xfrm>
           <a:prstGeom prst="rect">
@@ -8230,7 +8359,7 @@
                 <a:ea typeface="Sarabun"/>
                 <a:cs typeface="Sarabun"/>
               </a:rPr>
-              <a:t>... years old</a:t>
+              <a:t>7 — seven</a:t>
             </a:r>
           </a:p>
         </p:txBody>
@@ -8243,7 +8372,7 @@
         </p:nvSpPr>
         <p:spPr>
           <a:xfrm>
-            <a:off x="731520" y="3886200"/>
+            <a:off x="731520" y="4837176"/>
             <a:ext cx="7071055" cy="1572768"/>
           </a:xfrm>
           <a:prstGeom prst="roundRect">
@@ -8284,7 +8413,7 @@
         </p:nvSpPr>
         <p:spPr>
           <a:xfrm>
-            <a:off x="868680" y="4087368"/>
+            <a:off x="868680" y="5038344"/>
             <a:ext cx="73152" cy="1143000"/>
           </a:xfrm>
           <a:prstGeom prst="rect">
@@ -8327,7 +8456,7 @@
         </p:nvSpPr>
         <p:spPr>
           <a:xfrm>
-            <a:off x="1078992" y="4023360"/>
+            <a:off x="1078992" y="4974336"/>
             <a:ext cx="6613855" cy="320040"/>
           </a:xfrm>
           <a:prstGeom prst="rect">
@@ -8351,7 +8480,7 @@
                 <a:ea typeface="Sarabun"/>
                 <a:cs typeface="Sarabun"/>
               </a:rPr>
-              <a:t>ผมอายุ...ปี</a:t>
+              <a:t>แปด</a:t>
             </a:r>
           </a:p>
         </p:txBody>
@@ -8364,7 +8493,7 @@
         </p:nvSpPr>
         <p:spPr>
           <a:xfrm>
-            <a:off x="1078992" y="4389120"/>
+            <a:off x="1078992" y="5340096"/>
             <a:ext cx="6613855" cy="274320"/>
           </a:xfrm>
           <a:prstGeom prst="rect">
@@ -8388,7 +8517,7 @@
                 <a:ea typeface="Sarabun"/>
                 <a:cs typeface="Sarabun"/>
               </a:rPr>
-              <a:t>phǒm aa-yú ... bpii</a:t>
+              <a:t>bpàet</a:t>
             </a:r>
           </a:p>
         </p:txBody>
@@ -8401,7 +8530,7 @@
         </p:nvSpPr>
         <p:spPr>
           <a:xfrm>
-            <a:off x="1078992" y="4764024"/>
+            <a:off x="1078992" y="5715000"/>
             <a:ext cx="6613855" cy="274320"/>
           </a:xfrm>
           <a:prstGeom prst="rect">
@@ -8425,202 +8554,7 @@
                 <a:ea typeface="Sarabun"/>
                 <a:cs typeface="Sarabun"/>
               </a:rPr>
-              <a:t>I am ... years old (male)</a:t>
-            </a:r>
-          </a:p>
-        </p:txBody>
-      </p:sp>
-      <p:sp>
-        <p:nvSpPr>
-          <p:cNvPr id="21" name="Rounded Rectangle 20"/>
-          <p:cNvSpPr/>
-          <p:nvPr/>
-        </p:nvSpPr>
-        <p:spPr>
-          <a:xfrm>
-            <a:off x="731520" y="5166360"/>
-            <a:ext cx="7071055" cy="1572768"/>
-          </a:xfrm>
-          <a:prstGeom prst="roundRect">
-            <a:avLst/>
-          </a:prstGeom>
-          <a:noFill/>
-          <a:ln>
-            <a:noFill/>
-          </a:ln>
-        </p:spPr>
-        <p:style>
-          <a:lnRef idx="1">
-            <a:schemeClr val="accent1"/>
-          </a:lnRef>
-          <a:fillRef idx="3">
-            <a:schemeClr val="accent1"/>
-          </a:fillRef>
-          <a:effectRef idx="2">
-            <a:schemeClr val="accent1"/>
-          </a:effectRef>
-          <a:fontRef idx="minor">
-            <a:schemeClr val="lt1"/>
-          </a:fontRef>
-        </p:style>
-        <p:txBody>
-          <a:bodyPr rtlCol="0" anchor="ctr"/>
-          <a:lstStyle/>
-          <a:p>
-            <a:pPr algn="ctr"/>
-          </a:p>
-        </p:txBody>
-      </p:sp>
-      <p:sp>
-        <p:nvSpPr>
-          <p:cNvPr id="22" name="Rectangle 21"/>
-          <p:cNvSpPr/>
-          <p:nvPr/>
-        </p:nvSpPr>
-        <p:spPr>
-          <a:xfrm>
-            <a:off x="868680" y="5367528"/>
-            <a:ext cx="73152" cy="1143000"/>
-          </a:xfrm>
-          <a:prstGeom prst="rect">
-            <a:avLst/>
-          </a:prstGeom>
-          <a:solidFill>
-            <a:srgbClr val="355C7D"/>
-          </a:solidFill>
-          <a:ln>
-            <a:noFill/>
-          </a:ln>
-        </p:spPr>
-        <p:style>
-          <a:lnRef idx="1">
-            <a:schemeClr val="accent1"/>
-          </a:lnRef>
-          <a:fillRef idx="3">
-            <a:schemeClr val="accent1"/>
-          </a:fillRef>
-          <a:effectRef idx="2">
-            <a:schemeClr val="accent1"/>
-          </a:effectRef>
-          <a:fontRef idx="minor">
-            <a:schemeClr val="lt1"/>
-          </a:fontRef>
-        </p:style>
-        <p:txBody>
-          <a:bodyPr rtlCol="0" anchor="ctr"/>
-          <a:lstStyle/>
-          <a:p>
-            <a:pPr algn="ctr"/>
-          </a:p>
-        </p:txBody>
-      </p:sp>
-      <p:sp>
-        <p:nvSpPr>
-          <p:cNvPr id="23" name="TextBox 22"/>
-          <p:cNvSpPr txBox="1"/>
-          <p:nvPr/>
-        </p:nvSpPr>
-        <p:spPr>
-          <a:xfrm>
-            <a:off x="1078992" y="5303520"/>
-            <a:ext cx="6613855" cy="320040"/>
-          </a:xfrm>
-          <a:prstGeom prst="rect">
-            <a:avLst/>
-          </a:prstGeom>
-          <a:noFill/>
-        </p:spPr>
-        <p:txBody>
-          <a:bodyPr wrap="square" anchor="t">
-            <a:spAutoFit/>
-          </a:bodyPr>
-          <a:lstStyle/>
-          <a:p>
-            <a:pPr algn="l"/>
-            <a:r>
-              <a:rPr sz="1700" b="0" i="0" lang="th-TH" altLang="en-US">
-                <a:solidFill>
-                  <a:srgbClr val="24333D"/>
-                </a:solidFill>
-                <a:latin typeface="Sarabun"/>
-                <a:ea typeface="Sarabun"/>
-                <a:cs typeface="Sarabun"/>
-              </a:rPr>
-              <a:t>ฉันอายุ...ปี</a:t>
-            </a:r>
-          </a:p>
-        </p:txBody>
-      </p:sp>
-      <p:sp>
-        <p:nvSpPr>
-          <p:cNvPr id="24" name="TextBox 23"/>
-          <p:cNvSpPr txBox="1"/>
-          <p:nvPr/>
-        </p:nvSpPr>
-        <p:spPr>
-          <a:xfrm>
-            <a:off x="1078992" y="5669280"/>
-            <a:ext cx="6613855" cy="274320"/>
-          </a:xfrm>
-          <a:prstGeom prst="rect">
-            <a:avLst/>
-          </a:prstGeom>
-          <a:noFill/>
-        </p:spPr>
-        <p:txBody>
-          <a:bodyPr wrap="square" anchor="t">
-            <a:spAutoFit/>
-          </a:bodyPr>
-          <a:lstStyle/>
-          <a:p>
-            <a:pPr algn="l"/>
-            <a:r>
-              <a:rPr sz="1700" b="0" i="1" lang="en-US" altLang="en-US">
-                <a:solidFill>
-                  <a:srgbClr val="566873"/>
-                </a:solidFill>
-                <a:latin typeface="Sarabun"/>
-                <a:ea typeface="Sarabun"/>
-                <a:cs typeface="Sarabun"/>
-              </a:rPr>
-              <a:t>chǎn aa-yú ... bpii</a:t>
-            </a:r>
-          </a:p>
-        </p:txBody>
-      </p:sp>
-      <p:sp>
-        <p:nvSpPr>
-          <p:cNvPr id="25" name="TextBox 24"/>
-          <p:cNvSpPr txBox="1"/>
-          <p:nvPr/>
-        </p:nvSpPr>
-        <p:spPr>
-          <a:xfrm>
-            <a:off x="1078992" y="6044184"/>
-            <a:ext cx="6613855" cy="274320"/>
-          </a:xfrm>
-          <a:prstGeom prst="rect">
-            <a:avLst/>
-          </a:prstGeom>
-          <a:noFill/>
-        </p:spPr>
-        <p:txBody>
-          <a:bodyPr wrap="square" anchor="t">
-            <a:spAutoFit/>
-          </a:bodyPr>
-          <a:lstStyle/>
-          <a:p>
-            <a:pPr algn="l"/>
-            <a:r>
-              <a:rPr sz="1700" b="0" i="0" lang="en-US" altLang="en-US">
-                <a:solidFill>
-                  <a:srgbClr val="82909A"/>
-                </a:solidFill>
-                <a:latin typeface="Sarabun"/>
-                <a:ea typeface="Sarabun"/>
-                <a:cs typeface="Sarabun"/>
-              </a:rPr>
-              <a:t>I am ... years old</a:t>
+              <a:t>8 — eight</a:t>
             </a:r>
           </a:p>
         </p:txBody>
@@ -8820,62 +8754,7 @@
                 <a:ea typeface="Sarabun"/>
                 <a:cs typeface="Sarabun"/>
               </a:rPr>
-              <a:t>Pronunciation: </a:t>
-            </a:r>
-            <a:r>
-              <a:rPr sz="3600" b="1" i="0" lang="th-TH" altLang="en-US">
-                <a:solidFill>
-                  <a:srgbClr val="24333D"/>
-                </a:solidFill>
-                <a:latin typeface="Sarabun"/>
-                <a:ea typeface="Sarabun"/>
-                <a:cs typeface="Sarabun"/>
-              </a:rPr>
-              <a:t>สี่</a:t>
-            </a:r>
-            <a:r>
-              <a:rPr sz="2230" b="0" i="1" lang="en-US" altLang="en-US">
-                <a:solidFill>
-                  <a:srgbClr val="566873"/>
-                </a:solidFill>
-                <a:latin typeface="Sarabun"/>
-                <a:ea typeface="Sarabun"/>
-                <a:cs typeface="Sarabun"/>
-              </a:rPr>
-              <a:t> (sìi)</a:t>
-            </a:r>
-            <a:r>
-              <a:rPr sz="3600" b="1" i="0" lang="en-US" altLang="en-US">
-                <a:solidFill>
-                  <a:srgbClr val="24333D"/>
-                </a:solidFill>
-                <a:latin typeface="Sarabun"/>
-                <a:ea typeface="Sarabun"/>
-                <a:cs typeface="Sarabun"/>
-              </a:rPr>
-              <a:t> vs </a:t>
-            </a:r>
-            <a:r>
-              <a:rPr sz="3600" b="1" i="0" lang="th-TH" altLang="en-US">
-                <a:solidFill>
-                  <a:srgbClr val="24333D"/>
-                </a:solidFill>
-                <a:latin typeface="Sarabun"/>
-                <a:ea typeface="Sarabun"/>
-                <a:cs typeface="Sarabun"/>
-              </a:rPr>
-              <a:t>สี</a:t>
-            </a:r>
-            <a:r>
-              <a:rPr sz="2230" b="0" i="1" lang="en-US" altLang="en-US">
-                <a:solidFill>
-                  <a:srgbClr val="566873"/>
-                </a:solidFill>
-                <a:latin typeface="Sarabun"/>
-                <a:ea typeface="Sarabun"/>
-                <a:cs typeface="Sarabun"/>
-              </a:rPr>
-              <a:t> (sǐi)</a:t>
+              <a:t>Digits 6 to 10</a:t>
             </a:r>
           </a:p>
         </p:txBody>
@@ -8996,7 +8875,7 @@
                 <a:ea typeface="Sarabun"/>
                 <a:cs typeface="Sarabun"/>
               </a:rPr>
-              <a:t>สี่</a:t>
+              <a:t>เก้า</a:t>
             </a:r>
           </a:p>
         </p:txBody>
@@ -9033,7 +8912,7 @@
                 <a:ea typeface="Sarabun"/>
                 <a:cs typeface="Sarabun"/>
               </a:rPr>
-              <a:t>sìi</a:t>
+              <a:t>gâo</a:t>
             </a:r>
           </a:p>
         </p:txBody>
@@ -9070,7 +8949,7 @@
                 <a:ea typeface="Sarabun"/>
                 <a:cs typeface="Sarabun"/>
               </a:rPr>
-              <a:t>four — low tone (voice stays low)</a:t>
+              <a:t>9 — nine</a:t>
             </a:r>
           </a:p>
         </p:txBody>
@@ -9191,7 +9070,7 @@
                 <a:ea typeface="Sarabun"/>
                 <a:cs typeface="Sarabun"/>
               </a:rPr>
-              <a:t>สี</a:t>
+              <a:t>สิบ</a:t>
             </a:r>
           </a:p>
         </p:txBody>
@@ -9228,7 +9107,7 @@
                 <a:ea typeface="Sarabun"/>
                 <a:cs typeface="Sarabun"/>
               </a:rPr>
-              <a:t>sǐi</a:t>
+              <a:t>sìp</a:t>
             </a:r>
           </a:p>
         </p:txBody>
@@ -9265,26 +9144,65 @@
                 <a:ea typeface="Sarabun"/>
                 <a:cs typeface="Sarabun"/>
               </a:rPr>
-              <a:t>colour — rising tone (voice lifts)</a:t>
-            </a:r>
-          </a:p>
-        </p:txBody>
-      </p:sp>
-      <p:sp>
-        <p:nvSpPr>
-          <p:cNvPr id="16" name="Rounded Rectangle 15"/>
+              <a:t>10 — ten</a:t>
+            </a:r>
+          </a:p>
+        </p:txBody>
+      </p:sp>
+      <p:sp>
+        <p:nvSpPr>
+          <p:cNvPr id="16" name="TextBox 15"/>
+          <p:cNvSpPr txBox="1"/>
+          <p:nvPr/>
+        </p:nvSpPr>
+        <p:spPr>
+          <a:xfrm>
+            <a:off x="932688" y="5120640"/>
+            <a:ext cx="9692640" cy="228600"/>
+          </a:xfrm>
+          <a:prstGeom prst="rect">
+            <a:avLst/>
+          </a:prstGeom>
+          <a:noFill/>
+        </p:spPr>
+        <p:txBody>
+          <a:bodyPr wrap="square" anchor="t">
+            <a:spAutoFit/>
+          </a:bodyPr>
+          <a:lstStyle/>
+          <a:p>
+            <a:pPr algn="l"/>
+            <a:r>
+              <a:rPr sz="1700" b="1" i="0" lang="en-US" altLang="en-US">
+                <a:solidFill>
+                  <a:srgbClr val="C96F4A"/>
+                </a:solidFill>
+                <a:latin typeface="Sarabun"/>
+                <a:ea typeface="Sarabun"/>
+                <a:cs typeface="Sarabun"/>
+              </a:rPr>
+              <a:t>Practice</a:t>
+            </a:r>
+          </a:p>
+        </p:txBody>
+      </p:sp>
+      <p:sp>
+        <p:nvSpPr>
+          <p:cNvPr id="17" name="Oval 16"/>
           <p:cNvSpPr/>
           <p:nvPr/>
         </p:nvSpPr>
         <p:spPr>
           <a:xfrm>
-            <a:off x="731520" y="4837176"/>
-            <a:ext cx="7071055" cy="1572768"/>
-          </a:xfrm>
-          <a:prstGeom prst="roundRect">
-            <a:avLst/>
-          </a:prstGeom>
-          <a:noFill/>
+            <a:off x="932688" y="5504688"/>
+            <a:ext cx="82296" cy="82296"/>
+          </a:xfrm>
+          <a:prstGeom prst="ellipse">
+            <a:avLst/>
+          </a:prstGeom>
+          <a:solidFill>
+            <a:srgbClr val="C96F4A"/>
+          </a:solidFill>
           <a:ln>
             <a:noFill/>
           </a:ln>
@@ -9313,20 +9231,222 @@
       </p:sp>
       <p:sp>
         <p:nvSpPr>
-          <p:cNvPr id="17" name="Rectangle 16"/>
+          <p:cNvPr id="18" name="TextBox 17"/>
+          <p:cNvSpPr txBox="1"/>
+          <p:nvPr/>
+        </p:nvSpPr>
+        <p:spPr>
+          <a:xfrm>
+            <a:off x="1078992" y="5413248"/>
+            <a:ext cx="9555480" cy="475488"/>
+          </a:xfrm>
+          <a:prstGeom prst="rect">
+            <a:avLst/>
+          </a:prstGeom>
+          <a:noFill/>
+        </p:spPr>
+        <p:txBody>
+          <a:bodyPr wrap="square" anchor="t">
+            <a:spAutoFit/>
+          </a:bodyPr>
+          <a:lstStyle/>
+          <a:p>
+            <a:pPr algn="l"/>
+            <a:r>
+              <a:rPr sz="1700" b="0" i="0" lang="en-US" altLang="en-US">
+                <a:solidFill>
+                  <a:srgbClr val="24333D"/>
+                </a:solidFill>
+                <a:latin typeface="Sarabun"/>
+                <a:ea typeface="Sarabun"/>
+                <a:cs typeface="Sarabun"/>
+              </a:rPr>
+              <a:t>Listen and repeat: </a:t>
+            </a:r>
+            <a:r>
+              <a:rPr sz="1700" b="0" i="0" lang="th-TH" altLang="en-US">
+                <a:solidFill>
+                  <a:srgbClr val="24333D"/>
+                </a:solidFill>
+                <a:latin typeface="Sarabun"/>
+                <a:ea typeface="Sarabun"/>
+                <a:cs typeface="Sarabun"/>
+              </a:rPr>
+              <a:t>หก</a:t>
+            </a:r>
+            <a:r>
+              <a:rPr sz="1700" b="0" i="1" lang="en-US" altLang="en-US">
+                <a:solidFill>
+                  <a:srgbClr val="566873"/>
+                </a:solidFill>
+                <a:latin typeface="Sarabun"/>
+                <a:ea typeface="Sarabun"/>
+                <a:cs typeface="Sarabun"/>
+              </a:rPr>
+              <a:t> (hòk)</a:t>
+            </a:r>
+            <a:r>
+              <a:rPr sz="1700" b="0" i="0" lang="en-US" altLang="en-US">
+                <a:solidFill>
+                  <a:srgbClr val="24333D"/>
+                </a:solidFill>
+                <a:latin typeface="Sarabun"/>
+                <a:ea typeface="Sarabun"/>
+                <a:cs typeface="Sarabun"/>
+              </a:rPr>
+              <a:t>, </a:t>
+            </a:r>
+            <a:r>
+              <a:rPr sz="1700" b="0" i="0" lang="th-TH" altLang="en-US">
+                <a:solidFill>
+                  <a:srgbClr val="24333D"/>
+                </a:solidFill>
+                <a:latin typeface="Sarabun"/>
+                <a:ea typeface="Sarabun"/>
+                <a:cs typeface="Sarabun"/>
+              </a:rPr>
+              <a:t>เจ็ด</a:t>
+            </a:r>
+            <a:r>
+              <a:rPr sz="1700" b="0" i="1" lang="en-US" altLang="en-US">
+                <a:solidFill>
+                  <a:srgbClr val="566873"/>
+                </a:solidFill>
+                <a:latin typeface="Sarabun"/>
+                <a:ea typeface="Sarabun"/>
+                <a:cs typeface="Sarabun"/>
+              </a:rPr>
+              <a:t> (jèt)</a:t>
+            </a:r>
+            <a:r>
+              <a:rPr sz="1700" b="0" i="0" lang="en-US" altLang="en-US">
+                <a:solidFill>
+                  <a:srgbClr val="24333D"/>
+                </a:solidFill>
+                <a:latin typeface="Sarabun"/>
+                <a:ea typeface="Sarabun"/>
+                <a:cs typeface="Sarabun"/>
+              </a:rPr>
+              <a:t>, </a:t>
+            </a:r>
+            <a:r>
+              <a:rPr sz="1700" b="0" i="0" lang="th-TH" altLang="en-US">
+                <a:solidFill>
+                  <a:srgbClr val="24333D"/>
+                </a:solidFill>
+                <a:latin typeface="Sarabun"/>
+                <a:ea typeface="Sarabun"/>
+                <a:cs typeface="Sarabun"/>
+              </a:rPr>
+              <a:t>แปด</a:t>
+            </a:r>
+            <a:r>
+              <a:rPr sz="1700" b="0" i="1" lang="en-US" altLang="en-US">
+                <a:solidFill>
+                  <a:srgbClr val="566873"/>
+                </a:solidFill>
+                <a:latin typeface="Sarabun"/>
+                <a:ea typeface="Sarabun"/>
+                <a:cs typeface="Sarabun"/>
+              </a:rPr>
+              <a:t> (bpàet)</a:t>
+            </a:r>
+            <a:r>
+              <a:rPr sz="1700" b="0" i="0" lang="en-US" altLang="en-US">
+                <a:solidFill>
+                  <a:srgbClr val="24333D"/>
+                </a:solidFill>
+                <a:latin typeface="Sarabun"/>
+                <a:ea typeface="Sarabun"/>
+                <a:cs typeface="Sarabun"/>
+              </a:rPr>
+              <a:t>, </a:t>
+            </a:r>
+            <a:r>
+              <a:rPr sz="1700" b="0" i="0" lang="th-TH" altLang="en-US">
+                <a:solidFill>
+                  <a:srgbClr val="24333D"/>
+                </a:solidFill>
+                <a:latin typeface="Sarabun"/>
+                <a:ea typeface="Sarabun"/>
+                <a:cs typeface="Sarabun"/>
+              </a:rPr>
+              <a:t>เก้า</a:t>
+            </a:r>
+            <a:r>
+              <a:rPr sz="1700" b="0" i="1" lang="en-US" altLang="en-US">
+                <a:solidFill>
+                  <a:srgbClr val="566873"/>
+                </a:solidFill>
+                <a:latin typeface="Sarabun"/>
+                <a:ea typeface="Sarabun"/>
+                <a:cs typeface="Sarabun"/>
+              </a:rPr>
+              <a:t> (gâo)</a:t>
+            </a:r>
+            <a:r>
+              <a:rPr sz="1700" b="0" i="0" lang="en-US" altLang="en-US">
+                <a:solidFill>
+                  <a:srgbClr val="24333D"/>
+                </a:solidFill>
+                <a:latin typeface="Sarabun"/>
+                <a:ea typeface="Sarabun"/>
+                <a:cs typeface="Sarabun"/>
+              </a:rPr>
+              <a:t>, </a:t>
+            </a:r>
+            <a:r>
+              <a:rPr sz="1700" b="0" i="0" lang="th-TH" altLang="en-US">
+                <a:solidFill>
+                  <a:srgbClr val="24333D"/>
+                </a:solidFill>
+                <a:latin typeface="Sarabun"/>
+                <a:ea typeface="Sarabun"/>
+                <a:cs typeface="Sarabun"/>
+              </a:rPr>
+              <a:t>สิบ</a:t>
+            </a:r>
+            <a:r>
+              <a:rPr sz="1700" b="0" i="1" lang="en-US" altLang="en-US">
+                <a:solidFill>
+                  <a:srgbClr val="566873"/>
+                </a:solidFill>
+                <a:latin typeface="Sarabun"/>
+                <a:ea typeface="Sarabun"/>
+                <a:cs typeface="Sarabun"/>
+              </a:rPr>
+              <a:t> (sìp)</a:t>
+            </a:r>
+            <a:r>
+              <a:rPr sz="1700" b="0" i="0" lang="en-US" altLang="en-US">
+                <a:solidFill>
+                  <a:srgbClr val="24333D"/>
+                </a:solidFill>
+                <a:latin typeface="Sarabun"/>
+                <a:ea typeface="Sarabun"/>
+                <a:cs typeface="Sarabun"/>
+              </a:rPr>
+              <a:t>. Now count 0 to 10 from memory.</a:t>
+            </a:r>
+          </a:p>
+        </p:txBody>
+      </p:sp>
+      <p:sp>
+        <p:nvSpPr>
+          <p:cNvPr id="19" name="Oval 18"/>
           <p:cNvSpPr/>
           <p:nvPr/>
         </p:nvSpPr>
         <p:spPr>
           <a:xfrm>
-            <a:off x="868680" y="5038344"/>
-            <a:ext cx="73152" cy="1143000"/>
-          </a:xfrm>
-          <a:prstGeom prst="rect">
+            <a:off x="932688" y="6035040"/>
+            <a:ext cx="82296" cy="82296"/>
+          </a:xfrm>
+          <a:prstGeom prst="ellipse">
             <a:avLst/>
           </a:prstGeom>
           <a:solidFill>
-            <a:srgbClr val="355C7D"/>
+            <a:srgbClr val="C96F4A"/>
           </a:solidFill>
           <a:ln>
             <a:noFill/>
@@ -9356,14 +9476,14 @@
       </p:sp>
       <p:sp>
         <p:nvSpPr>
-          <p:cNvPr id="18" name="TextBox 17"/>
+          <p:cNvPr id="20" name="TextBox 19"/>
           <p:cNvSpPr txBox="1"/>
           <p:nvPr/>
         </p:nvSpPr>
         <p:spPr>
           <a:xfrm>
-            <a:off x="1078992" y="4974336"/>
-            <a:ext cx="6613855" cy="320040"/>
+            <a:off x="1078992" y="5943600"/>
+            <a:ext cx="9555480" cy="475488"/>
           </a:xfrm>
           <a:prstGeom prst="rect">
             <a:avLst/>
@@ -9378,6 +9498,17 @@
           <a:p>
             <a:pPr algn="l"/>
             <a:r>
+              <a:rPr sz="1700" b="0" i="0" lang="en-US" altLang="en-US">
+                <a:solidFill>
+                  <a:srgbClr val="24333D"/>
+                </a:solidFill>
+                <a:latin typeface="Sarabun"/>
+                <a:ea typeface="Sarabun"/>
+                <a:cs typeface="Sarabun"/>
+              </a:rPr>
+              <a:t>Pause-and-produce: Seven? </a:t>
+            </a:r>
+            <a:r>
               <a:rPr sz="1700" b="0" i="0" lang="th-TH" altLang="en-US">
                 <a:solidFill>
                   <a:srgbClr val="24333D"/>
@@ -9386,34 +9517,140 @@
                 <a:ea typeface="Sarabun"/>
                 <a:cs typeface="Sarabun"/>
               </a:rPr>
+              <a:t>เจ็ด</a:t>
+            </a:r>
+            <a:r>
+              <a:rPr sz="1700" b="0" i="1" lang="en-US" altLang="en-US">
+                <a:solidFill>
+                  <a:srgbClr val="566873"/>
+                </a:solidFill>
+                <a:latin typeface="Sarabun"/>
+                <a:ea typeface="Sarabun"/>
+                <a:cs typeface="Sarabun"/>
+              </a:rPr>
+              <a:t> (jèt)</a:t>
+            </a:r>
+            <a:r>
+              <a:rPr sz="1700" b="0" i="0" lang="en-US" altLang="en-US">
+                <a:solidFill>
+                  <a:srgbClr val="24333D"/>
+                </a:solidFill>
+                <a:latin typeface="Sarabun"/>
+                <a:ea typeface="Sarabun"/>
+                <a:cs typeface="Sarabun"/>
+              </a:rPr>
+              <a:t>. Ten? </a:t>
+            </a:r>
+            <a:r>
+              <a:rPr sz="1700" b="0" i="0" lang="th-TH" altLang="en-US">
+                <a:solidFill>
+                  <a:srgbClr val="24333D"/>
+                </a:solidFill>
+                <a:latin typeface="Sarabun"/>
+                <a:ea typeface="Sarabun"/>
+                <a:cs typeface="Sarabun"/>
+              </a:rPr>
+              <a:t>สิบ</a:t>
+            </a:r>
+            <a:r>
+              <a:rPr sz="1700" b="0" i="1" lang="en-US" altLang="en-US">
+                <a:solidFill>
+                  <a:srgbClr val="566873"/>
+                </a:solidFill>
+                <a:latin typeface="Sarabun"/>
+                <a:ea typeface="Sarabun"/>
+                <a:cs typeface="Sarabun"/>
+              </a:rPr>
+              <a:t> (sìp)</a:t>
+            </a:r>
+            <a:r>
+              <a:rPr sz="1700" b="0" i="0" lang="en-US" altLang="en-US">
+                <a:solidFill>
+                  <a:srgbClr val="24333D"/>
+                </a:solidFill>
+                <a:latin typeface="Sarabun"/>
+                <a:ea typeface="Sarabun"/>
+                <a:cs typeface="Sarabun"/>
+              </a:rPr>
+              <a:t>. Eight? </a:t>
+            </a:r>
+            <a:r>
+              <a:rPr sz="1700" b="0" i="0" lang="th-TH" altLang="en-US">
+                <a:solidFill>
+                  <a:srgbClr val="24333D"/>
+                </a:solidFill>
+                <a:latin typeface="Sarabun"/>
+                <a:ea typeface="Sarabun"/>
+                <a:cs typeface="Sarabun"/>
+              </a:rPr>
+              <a:t>แปด</a:t>
+            </a:r>
+            <a:r>
+              <a:rPr sz="1700" b="0" i="1" lang="en-US" altLang="en-US">
+                <a:solidFill>
+                  <a:srgbClr val="566873"/>
+                </a:solidFill>
+                <a:latin typeface="Sarabun"/>
+                <a:ea typeface="Sarabun"/>
+                <a:cs typeface="Sarabun"/>
+              </a:rPr>
+              <a:t> (bpàet)</a:t>
+            </a:r>
+            <a:r>
+              <a:rPr sz="1700" b="0" i="0" lang="en-US" altLang="en-US">
+                <a:solidFill>
+                  <a:srgbClr val="24333D"/>
+                </a:solidFill>
+                <a:latin typeface="Sarabun"/>
+                <a:ea typeface="Sarabun"/>
+                <a:cs typeface="Sarabun"/>
+              </a:rPr>
+              <a:t>. Six? </a:t>
+            </a:r>
+            <a:r>
+              <a:rPr sz="1700" b="0" i="0" lang="th-TH" altLang="en-US">
+                <a:solidFill>
+                  <a:srgbClr val="24333D"/>
+                </a:solidFill>
+                <a:latin typeface="Sarabun"/>
+                <a:ea typeface="Sarabun"/>
+                <a:cs typeface="Sarabun"/>
+              </a:rPr>
+              <a:t>หก</a:t>
+            </a:r>
+            <a:r>
+              <a:rPr sz="1700" b="0" i="1" lang="en-US" altLang="en-US">
+                <a:solidFill>
+                  <a:srgbClr val="566873"/>
+                </a:solidFill>
+                <a:latin typeface="Sarabun"/>
+                <a:ea typeface="Sarabun"/>
+                <a:cs typeface="Sarabun"/>
+              </a:rPr>
+              <a:t> (hòk)</a:t>
+            </a:r>
+            <a:r>
+              <a:rPr sz="1700" b="0" i="0" lang="en-US" altLang="en-US">
+                <a:solidFill>
+                  <a:srgbClr val="24333D"/>
+                </a:solidFill>
+                <a:latin typeface="Sarabun"/>
+                <a:ea typeface="Sarabun"/>
+                <a:cs typeface="Sarabun"/>
+              </a:rPr>
+              <a:t>. Nine? </a:t>
+            </a:r>
+            <a:r>
+              <a:rPr sz="1700" b="0" i="0" lang="th-TH" altLang="en-US">
+                <a:solidFill>
+                  <a:srgbClr val="24333D"/>
+                </a:solidFill>
+                <a:latin typeface="Sarabun"/>
+                <a:ea typeface="Sarabun"/>
+                <a:cs typeface="Sarabun"/>
+              </a:rPr>
               <a:t>เก้า</a:t>
             </a:r>
-          </a:p>
-        </p:txBody>
-      </p:sp>
-      <p:sp>
-        <p:nvSpPr>
-          <p:cNvPr id="19" name="TextBox 18"/>
-          <p:cNvSpPr txBox="1"/>
-          <p:nvPr/>
-        </p:nvSpPr>
-        <p:spPr>
-          <a:xfrm>
-            <a:off x="1078992" y="5340096"/>
-            <a:ext cx="6613855" cy="274320"/>
-          </a:xfrm>
-          <a:prstGeom prst="rect">
-            <a:avLst/>
-          </a:prstGeom>
-          <a:noFill/>
-        </p:spPr>
-        <p:txBody>
-          <a:bodyPr wrap="square" anchor="t">
-            <a:spAutoFit/>
-          </a:bodyPr>
-          <a:lstStyle/>
-          <a:p>
-            <a:pPr algn="l"/>
             <a:r>
               <a:rPr sz="1700" b="0" i="1" lang="en-US" altLang="en-US">
                 <a:solidFill>
@@ -9423,44 +9660,18 @@
                 <a:ea typeface="Sarabun"/>
                 <a:cs typeface="Sarabun"/>
               </a:rPr>
-              <a:t>gâo</a:t>
-            </a:r>
-          </a:p>
-        </p:txBody>
-      </p:sp>
-      <p:sp>
-        <p:nvSpPr>
-          <p:cNvPr id="20" name="TextBox 19"/>
-          <p:cNvSpPr txBox="1"/>
-          <p:nvPr/>
-        </p:nvSpPr>
-        <p:spPr>
-          <a:xfrm>
-            <a:off x="1078992" y="5715000"/>
-            <a:ext cx="6613855" cy="274320"/>
-          </a:xfrm>
-          <a:prstGeom prst="rect">
-            <a:avLst/>
-          </a:prstGeom>
-          <a:noFill/>
-        </p:spPr>
-        <p:txBody>
-          <a:bodyPr wrap="square" anchor="t">
-            <a:spAutoFit/>
-          </a:bodyPr>
-          <a:lstStyle/>
-          <a:p>
-            <a:pPr algn="l"/>
+              <a:t> (gâo)</a:t>
+            </a:r>
             <a:r>
               <a:rPr sz="1700" b="0" i="0" lang="en-US" altLang="en-US">
                 <a:solidFill>
-                  <a:srgbClr val="82909A"/>
-                </a:solidFill>
-                <a:latin typeface="Sarabun"/>
-                <a:ea typeface="Sarabun"/>
-                <a:cs typeface="Sarabun"/>
-              </a:rPr>
-              <a:t>nine — falling tone (voice drops)</a:t>
+                  <a:srgbClr val="24333D"/>
+                </a:solidFill>
+                <a:latin typeface="Sarabun"/>
+                <a:ea typeface="Sarabun"/>
+                <a:cs typeface="Sarabun"/>
+              </a:rPr>
+              <a:t>.</a:t>
             </a:r>
           </a:p>
         </p:txBody>
@@ -9623,7 +9834,7 @@
                 <a:ea typeface="Sarabun"/>
                 <a:cs typeface="Sarabun"/>
               </a:rPr>
-              <a:t>Roleplay</a:t>
+              <a:t>Teaching slide</a:t>
             </a:r>
           </a:p>
         </p:txBody>
@@ -9660,7 +9871,7 @@
                 <a:ea typeface="Sarabun"/>
                 <a:cs typeface="Sarabun"/>
               </a:rPr>
-              <a:t>Roleplay</a:t>
+              <a:t>Ask what number and say your age</a:t>
             </a:r>
           </a:p>
         </p:txBody>
@@ -9673,17 +9884,13 @@
         </p:nvSpPr>
         <p:spPr>
           <a:xfrm>
-            <a:off x="731520" y="1097280"/>
-            <a:ext cx="1051560" cy="274320"/>
+            <a:off x="731520" y="1325880"/>
+            <a:ext cx="7071055" cy="1572768"/>
           </a:xfrm>
           <a:prstGeom prst="roundRect">
-            <a:avLst>
-              <a:gd name="adj" fmla="val 28000"/>
-            </a:avLst>
-          </a:prstGeom>
-          <a:solidFill>
-            <a:srgbClr val="7A8F54"/>
-          </a:solidFill>
+            <a:avLst/>
+          </a:prstGeom>
+          <a:noFill/>
           <a:ln>
             <a:noFill/>
           </a:ln>
@@ -9703,153 +9910,29 @@
           </a:fontRef>
         </p:style>
         <p:txBody>
-          <a:bodyPr rtlCol="0" anchor="ctr" wrap="none"/>
+          <a:bodyPr rtlCol="0" anchor="ctr"/>
           <a:lstStyle/>
           <a:p>
             <a:pPr algn="ctr"/>
-            <a:r>
-              <a:rPr sz="1200" b="1" lang="en-US" altLang="en-US">
-                <a:solidFill>
-                  <a:srgbClr val="FFFFFF"/>
-                </a:solidFill>
-                <a:latin typeface="Sarabun"/>
-                <a:ea typeface="Sarabun"/>
-                <a:cs typeface="Sarabun"/>
-              </a:rPr>
-              <a:t>You</a:t>
-            </a:r>
-          </a:p>
-        </p:txBody>
-      </p:sp>
-      <p:sp>
-        <p:nvSpPr>
-          <p:cNvPr id="7" name="TextBox 6"/>
-          <p:cNvSpPr txBox="1"/>
-          <p:nvPr/>
-        </p:nvSpPr>
-        <p:spPr>
-          <a:xfrm>
-            <a:off x="1965960" y="1069848"/>
-            <a:ext cx="5836615" cy="228600"/>
-          </a:xfrm>
-          <a:prstGeom prst="rect">
-            <a:avLst/>
-          </a:prstGeom>
-          <a:noFill/>
-        </p:spPr>
-        <p:txBody>
-          <a:bodyPr wrap="square" anchor="t">
-            <a:spAutoFit/>
-          </a:bodyPr>
-          <a:lstStyle/>
-          <a:p>
-            <a:pPr algn="l"/>
-            <a:r>
-              <a:rPr sz="1700" b="0" i="0" lang="th-TH" altLang="en-US">
-                <a:solidFill>
-                  <a:srgbClr val="24333D"/>
-                </a:solidFill>
-                <a:latin typeface="Sarabun"/>
-                <a:ea typeface="Sarabun"/>
-                <a:cs typeface="Sarabun"/>
-              </a:rPr>
-              <a:t>สวัสดีครับ</a:t>
-            </a:r>
-          </a:p>
-        </p:txBody>
-      </p:sp>
-      <p:sp>
-        <p:nvSpPr>
-          <p:cNvPr id="8" name="TextBox 7"/>
-          <p:cNvSpPr txBox="1"/>
-          <p:nvPr/>
-        </p:nvSpPr>
-        <p:spPr>
-          <a:xfrm>
-            <a:off x="1965960" y="1298448"/>
-            <a:ext cx="5836615" cy="201168"/>
-          </a:xfrm>
-          <a:prstGeom prst="rect">
-            <a:avLst/>
-          </a:prstGeom>
-          <a:noFill/>
-        </p:spPr>
-        <p:txBody>
-          <a:bodyPr wrap="square" anchor="t">
-            <a:spAutoFit/>
-          </a:bodyPr>
-          <a:lstStyle/>
-          <a:p>
-            <a:pPr algn="l"/>
-            <a:r>
-              <a:rPr sz="1700" b="0" i="1" lang="en-US" altLang="en-US">
-                <a:solidFill>
-                  <a:srgbClr val="566873"/>
-                </a:solidFill>
-                <a:latin typeface="Sarabun"/>
-                <a:ea typeface="Sarabun"/>
-                <a:cs typeface="Sarabun"/>
-              </a:rPr>
-              <a:t>sà-wàt-dii khráp</a:t>
-            </a:r>
-          </a:p>
-        </p:txBody>
-      </p:sp>
-      <p:sp>
-        <p:nvSpPr>
-          <p:cNvPr id="9" name="TextBox 8"/>
-          <p:cNvSpPr txBox="1"/>
-          <p:nvPr/>
-        </p:nvSpPr>
-        <p:spPr>
-          <a:xfrm>
-            <a:off x="1965960" y="1499616"/>
-            <a:ext cx="5836615" cy="201168"/>
-          </a:xfrm>
-          <a:prstGeom prst="rect">
-            <a:avLst/>
-          </a:prstGeom>
-          <a:noFill/>
-        </p:spPr>
-        <p:txBody>
-          <a:bodyPr wrap="square" anchor="t">
-            <a:spAutoFit/>
-          </a:bodyPr>
-          <a:lstStyle/>
-          <a:p>
-            <a:pPr algn="l"/>
-            <a:r>
-              <a:rPr sz="1700" b="0" i="0" lang="en-US" altLang="en-US">
-                <a:solidFill>
-                  <a:srgbClr val="566873"/>
-                </a:solidFill>
-                <a:latin typeface="Sarabun"/>
-                <a:ea typeface="Sarabun"/>
-                <a:cs typeface="Sarabun"/>
-              </a:rPr>
-              <a:t>Hello.</a:t>
-            </a:r>
-          </a:p>
-        </p:txBody>
-      </p:sp>
-      <p:sp>
-        <p:nvSpPr>
-          <p:cNvPr id="10" name="Rounded Rectangle 9"/>
+          </a:p>
+        </p:txBody>
+      </p:sp>
+      <p:sp>
+        <p:nvSpPr>
+          <p:cNvPr id="7" name="Rectangle 6"/>
           <p:cNvSpPr/>
           <p:nvPr/>
         </p:nvSpPr>
         <p:spPr>
           <a:xfrm>
-            <a:off x="731520" y="2011680"/>
-            <a:ext cx="1051560" cy="274320"/>
-          </a:xfrm>
-          <a:prstGeom prst="roundRect">
-            <a:avLst>
-              <a:gd name="adj" fmla="val 28000"/>
-            </a:avLst>
+            <a:off x="868680" y="1527048"/>
+            <a:ext cx="73152" cy="1143000"/>
+          </a:xfrm>
+          <a:prstGeom prst="rect">
+            <a:avLst/>
           </a:prstGeom>
           <a:solidFill>
-            <a:srgbClr val="C96F4A"/>
+            <a:srgbClr val="355C7D"/>
           </a:solidFill>
           <a:ln>
             <a:noFill/>
@@ -9870,34 +9953,23 @@
           </a:fontRef>
         </p:style>
         <p:txBody>
-          <a:bodyPr rtlCol="0" anchor="ctr" wrap="none"/>
+          <a:bodyPr rtlCol="0" anchor="ctr"/>
           <a:lstStyle/>
           <a:p>
             <a:pPr algn="ctr"/>
-            <a:r>
-              <a:rPr sz="1200" b="1" lang="en-US" altLang="en-US">
-                <a:solidFill>
-                  <a:srgbClr val="FFFFFF"/>
-                </a:solidFill>
-                <a:latin typeface="Sarabun"/>
-                <a:ea typeface="Sarabun"/>
-                <a:cs typeface="Sarabun"/>
-              </a:rPr>
-              <a:t>Staff</a:t>
-            </a:r>
-          </a:p>
-        </p:txBody>
-      </p:sp>
-      <p:sp>
-        <p:nvSpPr>
-          <p:cNvPr id="11" name="TextBox 10"/>
+          </a:p>
+        </p:txBody>
+      </p:sp>
+      <p:sp>
+        <p:nvSpPr>
+          <p:cNvPr id="8" name="TextBox 7"/>
           <p:cNvSpPr txBox="1"/>
           <p:nvPr/>
         </p:nvSpPr>
         <p:spPr>
           <a:xfrm>
-            <a:off x="1965960" y="1984248"/>
-            <a:ext cx="5836615" cy="228600"/>
+            <a:off x="1078992" y="1463040"/>
+            <a:ext cx="6613855" cy="320040"/>
           </a:xfrm>
           <a:prstGeom prst="rect">
             <a:avLst/>
@@ -9920,21 +9992,21 @@
                 <a:ea typeface="Sarabun"/>
                 <a:cs typeface="Sarabun"/>
               </a:rPr>
-              <a:t>สวัสดีค่ะ เบอร์ห้องอะไรคะ</a:t>
-            </a:r>
-          </a:p>
-        </p:txBody>
-      </p:sp>
-      <p:sp>
-        <p:nvSpPr>
-          <p:cNvPr id="12" name="TextBox 11"/>
+              <a:t>เบอร์อะไร</a:t>
+            </a:r>
+          </a:p>
+        </p:txBody>
+      </p:sp>
+      <p:sp>
+        <p:nvSpPr>
+          <p:cNvPr id="9" name="TextBox 8"/>
           <p:cNvSpPr txBox="1"/>
           <p:nvPr/>
         </p:nvSpPr>
         <p:spPr>
           <a:xfrm>
-            <a:off x="1965960" y="2212848"/>
-            <a:ext cx="5836615" cy="201168"/>
+            <a:off x="1078992" y="1828800"/>
+            <a:ext cx="6613855" cy="274320"/>
           </a:xfrm>
           <a:prstGeom prst="rect">
             <a:avLst/>
@@ -9957,21 +10029,21 @@
                 <a:ea typeface="Sarabun"/>
                 <a:cs typeface="Sarabun"/>
               </a:rPr>
-              <a:t>sà-wàt-dii khâ ber hâwng à-rai khá</a:t>
-            </a:r>
-          </a:p>
-        </p:txBody>
-      </p:sp>
-      <p:sp>
-        <p:nvSpPr>
-          <p:cNvPr id="13" name="TextBox 12"/>
+              <a:t>ber à-rai</a:t>
+            </a:r>
+          </a:p>
+        </p:txBody>
+      </p:sp>
+      <p:sp>
+        <p:nvSpPr>
+          <p:cNvPr id="10" name="TextBox 9"/>
           <p:cNvSpPr txBox="1"/>
           <p:nvPr/>
         </p:nvSpPr>
         <p:spPr>
           <a:xfrm>
-            <a:off x="1965960" y="2414016"/>
-            <a:ext cx="5836615" cy="201168"/>
+            <a:off x="1078992" y="2203704"/>
+            <a:ext cx="6613855" cy="274320"/>
           </a:xfrm>
           <a:prstGeom prst="rect">
             <a:avLst/>
@@ -9988,36 +10060,32 @@
             <a:r>
               <a:rPr sz="1700" b="0" i="0" lang="en-US" altLang="en-US">
                 <a:solidFill>
-                  <a:srgbClr val="566873"/>
-                </a:solidFill>
-                <a:latin typeface="Sarabun"/>
-                <a:ea typeface="Sarabun"/>
-                <a:cs typeface="Sarabun"/>
-              </a:rPr>
-              <a:t>Hello. What room number?</a:t>
-            </a:r>
-          </a:p>
-        </p:txBody>
-      </p:sp>
-      <p:sp>
-        <p:nvSpPr>
-          <p:cNvPr id="14" name="Rounded Rectangle 13"/>
+                  <a:srgbClr val="82909A"/>
+                </a:solidFill>
+                <a:latin typeface="Sarabun"/>
+                <a:ea typeface="Sarabun"/>
+                <a:cs typeface="Sarabun"/>
+              </a:rPr>
+              <a:t>what number?</a:t>
+            </a:r>
+          </a:p>
+        </p:txBody>
+      </p:sp>
+      <p:sp>
+        <p:nvSpPr>
+          <p:cNvPr id="11" name="Rounded Rectangle 10"/>
           <p:cNvSpPr/>
           <p:nvPr/>
         </p:nvSpPr>
         <p:spPr>
           <a:xfrm>
-            <a:off x="731520" y="2926080"/>
-            <a:ext cx="1051560" cy="274320"/>
+            <a:off x="731520" y="2606040"/>
+            <a:ext cx="7071055" cy="1572768"/>
           </a:xfrm>
           <a:prstGeom prst="roundRect">
-            <a:avLst>
-              <a:gd name="adj" fmla="val 28000"/>
-            </a:avLst>
-          </a:prstGeom>
-          <a:solidFill>
-            <a:srgbClr val="7A8F54"/>
-          </a:solidFill>
+            <a:avLst/>
+          </a:prstGeom>
+          <a:noFill/>
           <a:ln>
             <a:noFill/>
           </a:ln>
@@ -10037,153 +10105,29 @@
           </a:fontRef>
         </p:style>
         <p:txBody>
-          <a:bodyPr rtlCol="0" anchor="ctr" wrap="none"/>
+          <a:bodyPr rtlCol="0" anchor="ctr"/>
           <a:lstStyle/>
           <a:p>
             <a:pPr algn="ctr"/>
-            <a:r>
-              <a:rPr sz="1200" b="1" lang="en-US" altLang="en-US">
-                <a:solidFill>
-                  <a:srgbClr val="FFFFFF"/>
-                </a:solidFill>
-                <a:latin typeface="Sarabun"/>
-                <a:ea typeface="Sarabun"/>
-                <a:cs typeface="Sarabun"/>
-              </a:rPr>
-              <a:t>You</a:t>
-            </a:r>
-          </a:p>
-        </p:txBody>
-      </p:sp>
-      <p:sp>
-        <p:nvSpPr>
-          <p:cNvPr id="15" name="TextBox 14"/>
-          <p:cNvSpPr txBox="1"/>
-          <p:nvPr/>
-        </p:nvSpPr>
-        <p:spPr>
-          <a:xfrm>
-            <a:off x="1965960" y="2898648"/>
-            <a:ext cx="8823960" cy="228600"/>
-          </a:xfrm>
-          <a:prstGeom prst="rect">
-            <a:avLst/>
-          </a:prstGeom>
-          <a:noFill/>
-        </p:spPr>
-        <p:txBody>
-          <a:bodyPr wrap="square" anchor="t">
-            <a:spAutoFit/>
-          </a:bodyPr>
-          <a:lstStyle/>
-          <a:p>
-            <a:pPr algn="l"/>
-            <a:r>
-              <a:rPr sz="1700" b="0" i="0" lang="th-TH" altLang="en-US">
-                <a:solidFill>
-                  <a:srgbClr val="24333D"/>
-                </a:solidFill>
-                <a:latin typeface="Sarabun"/>
-                <a:ea typeface="Sarabun"/>
-                <a:cs typeface="Sarabun"/>
-              </a:rPr>
-              <a:t>ห้า-ศูนย์-สองครับ</a:t>
-            </a:r>
-          </a:p>
-        </p:txBody>
-      </p:sp>
-      <p:sp>
-        <p:nvSpPr>
-          <p:cNvPr id="16" name="TextBox 15"/>
-          <p:cNvSpPr txBox="1"/>
-          <p:nvPr/>
-        </p:nvSpPr>
-        <p:spPr>
-          <a:xfrm>
-            <a:off x="1965960" y="3127248"/>
-            <a:ext cx="8823960" cy="201168"/>
-          </a:xfrm>
-          <a:prstGeom prst="rect">
-            <a:avLst/>
-          </a:prstGeom>
-          <a:noFill/>
-        </p:spPr>
-        <p:txBody>
-          <a:bodyPr wrap="square" anchor="t">
-            <a:spAutoFit/>
-          </a:bodyPr>
-          <a:lstStyle/>
-          <a:p>
-            <a:pPr algn="l"/>
-            <a:r>
-              <a:rPr sz="1700" b="0" i="1" lang="en-US" altLang="en-US">
-                <a:solidFill>
-                  <a:srgbClr val="566873"/>
-                </a:solidFill>
-                <a:latin typeface="Sarabun"/>
-                <a:ea typeface="Sarabun"/>
-                <a:cs typeface="Sarabun"/>
-              </a:rPr>
-              <a:t>hâa-sǔun-sǎawng khráp</a:t>
-            </a:r>
-          </a:p>
-        </p:txBody>
-      </p:sp>
-      <p:sp>
-        <p:nvSpPr>
-          <p:cNvPr id="17" name="TextBox 16"/>
-          <p:cNvSpPr txBox="1"/>
-          <p:nvPr/>
-        </p:nvSpPr>
-        <p:spPr>
-          <a:xfrm>
-            <a:off x="1965960" y="3328416"/>
-            <a:ext cx="8823960" cy="201168"/>
-          </a:xfrm>
-          <a:prstGeom prst="rect">
-            <a:avLst/>
-          </a:prstGeom>
-          <a:noFill/>
-        </p:spPr>
-        <p:txBody>
-          <a:bodyPr wrap="square" anchor="t">
-            <a:spAutoFit/>
-          </a:bodyPr>
-          <a:lstStyle/>
-          <a:p>
-            <a:pPr algn="l"/>
-            <a:r>
-              <a:rPr sz="1700" b="0" i="0" lang="en-US" altLang="en-US">
-                <a:solidFill>
-                  <a:srgbClr val="566873"/>
-                </a:solidFill>
-                <a:latin typeface="Sarabun"/>
-                <a:ea typeface="Sarabun"/>
-                <a:cs typeface="Sarabun"/>
-              </a:rPr>
-              <a:t>502.</a:t>
-            </a:r>
-          </a:p>
-        </p:txBody>
-      </p:sp>
-      <p:sp>
-        <p:nvSpPr>
-          <p:cNvPr id="18" name="Rounded Rectangle 17"/>
+          </a:p>
+        </p:txBody>
+      </p:sp>
+      <p:sp>
+        <p:nvSpPr>
+          <p:cNvPr id="12" name="Rectangle 11"/>
           <p:cNvSpPr/>
           <p:nvPr/>
         </p:nvSpPr>
         <p:spPr>
           <a:xfrm>
-            <a:off x="731520" y="3840480"/>
-            <a:ext cx="1051560" cy="274320"/>
-          </a:xfrm>
-          <a:prstGeom prst="roundRect">
-            <a:avLst>
-              <a:gd name="adj" fmla="val 28000"/>
-            </a:avLst>
+            <a:off x="868680" y="2807208"/>
+            <a:ext cx="73152" cy="1143000"/>
+          </a:xfrm>
+          <a:prstGeom prst="rect">
+            <a:avLst/>
           </a:prstGeom>
           <a:solidFill>
-            <a:srgbClr val="C96F4A"/>
+            <a:srgbClr val="355C7D"/>
           </a:solidFill>
           <a:ln>
             <a:noFill/>
@@ -10204,34 +10148,23 @@
           </a:fontRef>
         </p:style>
         <p:txBody>
-          <a:bodyPr rtlCol="0" anchor="ctr" wrap="none"/>
+          <a:bodyPr rtlCol="0" anchor="ctr"/>
           <a:lstStyle/>
           <a:p>
             <a:pPr algn="ctr"/>
-            <a:r>
-              <a:rPr sz="1200" b="1" lang="en-US" altLang="en-US">
-                <a:solidFill>
-                  <a:srgbClr val="FFFFFF"/>
-                </a:solidFill>
-                <a:latin typeface="Sarabun"/>
-                <a:ea typeface="Sarabun"/>
-                <a:cs typeface="Sarabun"/>
-              </a:rPr>
-              <a:t>Staff</a:t>
-            </a:r>
-          </a:p>
-        </p:txBody>
-      </p:sp>
-      <p:sp>
-        <p:nvSpPr>
-          <p:cNvPr id="19" name="TextBox 18"/>
+          </a:p>
+        </p:txBody>
+      </p:sp>
+      <p:sp>
+        <p:nvSpPr>
+          <p:cNvPr id="13" name="TextBox 12"/>
           <p:cNvSpPr txBox="1"/>
           <p:nvPr/>
         </p:nvSpPr>
         <p:spPr>
           <a:xfrm>
-            <a:off x="1965960" y="3813048"/>
-            <a:ext cx="8823960" cy="228600"/>
+            <a:off x="1078992" y="2743200"/>
+            <a:ext cx="6613855" cy="320040"/>
           </a:xfrm>
           <a:prstGeom prst="rect">
             <a:avLst/>
@@ -10254,21 +10187,21 @@
                 <a:ea typeface="Sarabun"/>
                 <a:cs typeface="Sarabun"/>
               </a:rPr>
-              <a:t>ค่ะ คุณอายุเท่าไหร่คะ</a:t>
-            </a:r>
-          </a:p>
-        </p:txBody>
-      </p:sp>
-      <p:sp>
-        <p:nvSpPr>
-          <p:cNvPr id="20" name="TextBox 19"/>
+              <a:t>อายุ...ปี</a:t>
+            </a:r>
+          </a:p>
+        </p:txBody>
+      </p:sp>
+      <p:sp>
+        <p:nvSpPr>
+          <p:cNvPr id="14" name="TextBox 13"/>
           <p:cNvSpPr txBox="1"/>
           <p:nvPr/>
         </p:nvSpPr>
         <p:spPr>
           <a:xfrm>
-            <a:off x="1965960" y="4041648"/>
-            <a:ext cx="8823960" cy="201168"/>
+            <a:off x="1078992" y="3108960"/>
+            <a:ext cx="6613855" cy="274320"/>
           </a:xfrm>
           <a:prstGeom prst="rect">
             <a:avLst/>
@@ -10291,21 +10224,21 @@
                 <a:ea typeface="Sarabun"/>
                 <a:cs typeface="Sarabun"/>
               </a:rPr>
-              <a:t>khâ khun aa-yú thâo-rài khá</a:t>
-            </a:r>
-          </a:p>
-        </p:txBody>
-      </p:sp>
-      <p:sp>
-        <p:nvSpPr>
-          <p:cNvPr id="21" name="TextBox 20"/>
+              <a:t>aa-yú ... bpii</a:t>
+            </a:r>
+          </a:p>
+        </p:txBody>
+      </p:sp>
+      <p:sp>
+        <p:nvSpPr>
+          <p:cNvPr id="15" name="TextBox 14"/>
           <p:cNvSpPr txBox="1"/>
           <p:nvPr/>
         </p:nvSpPr>
         <p:spPr>
           <a:xfrm>
-            <a:off x="1965960" y="4242816"/>
-            <a:ext cx="8823960" cy="201168"/>
+            <a:off x="1078992" y="3483864"/>
+            <a:ext cx="6613855" cy="274320"/>
           </a:xfrm>
           <a:prstGeom prst="rect">
             <a:avLst/>
@@ -10322,36 +10255,32 @@
             <a:r>
               <a:rPr sz="1700" b="0" i="0" lang="en-US" altLang="en-US">
                 <a:solidFill>
-                  <a:srgbClr val="566873"/>
-                </a:solidFill>
-                <a:latin typeface="Sarabun"/>
-                <a:ea typeface="Sarabun"/>
-                <a:cs typeface="Sarabun"/>
-              </a:rPr>
-              <a:t>How old are you?</a:t>
-            </a:r>
-          </a:p>
-        </p:txBody>
-      </p:sp>
-      <p:sp>
-        <p:nvSpPr>
-          <p:cNvPr id="22" name="Rounded Rectangle 21"/>
+                  <a:srgbClr val="82909A"/>
+                </a:solidFill>
+                <a:latin typeface="Sarabun"/>
+                <a:ea typeface="Sarabun"/>
+                <a:cs typeface="Sarabun"/>
+              </a:rPr>
+              <a:t>... years old</a:t>
+            </a:r>
+          </a:p>
+        </p:txBody>
+      </p:sp>
+      <p:sp>
+        <p:nvSpPr>
+          <p:cNvPr id="16" name="Rounded Rectangle 15"/>
           <p:cNvSpPr/>
           <p:nvPr/>
         </p:nvSpPr>
         <p:spPr>
           <a:xfrm>
-            <a:off x="731520" y="4754880"/>
-            <a:ext cx="1051560" cy="274320"/>
+            <a:off x="731520" y="3886200"/>
+            <a:ext cx="7071055" cy="1572768"/>
           </a:xfrm>
           <a:prstGeom prst="roundRect">
-            <a:avLst>
-              <a:gd name="adj" fmla="val 28000"/>
-            </a:avLst>
-          </a:prstGeom>
-          <a:solidFill>
-            <a:srgbClr val="7A8F54"/>
-          </a:solidFill>
+            <a:avLst/>
+          </a:prstGeom>
+          <a:noFill/>
           <a:ln>
             <a:noFill/>
           </a:ln>
@@ -10371,34 +10300,66 @@
           </a:fontRef>
         </p:style>
         <p:txBody>
-          <a:bodyPr rtlCol="0" anchor="ctr" wrap="none"/>
+          <a:bodyPr rtlCol="0" anchor="ctr"/>
           <a:lstStyle/>
           <a:p>
             <a:pPr algn="ctr"/>
-            <a:r>
-              <a:rPr sz="1200" b="1" lang="en-US" altLang="en-US">
-                <a:solidFill>
-                  <a:srgbClr val="FFFFFF"/>
-                </a:solidFill>
-                <a:latin typeface="Sarabun"/>
-                <a:ea typeface="Sarabun"/>
-                <a:cs typeface="Sarabun"/>
-              </a:rPr>
-              <a:t>You</a:t>
-            </a:r>
-          </a:p>
-        </p:txBody>
-      </p:sp>
-      <p:sp>
-        <p:nvSpPr>
-          <p:cNvPr id="23" name="TextBox 22"/>
+          </a:p>
+        </p:txBody>
+      </p:sp>
+      <p:sp>
+        <p:nvSpPr>
+          <p:cNvPr id="17" name="Rectangle 16"/>
+          <p:cNvSpPr/>
+          <p:nvPr/>
+        </p:nvSpPr>
+        <p:spPr>
+          <a:xfrm>
+            <a:off x="868680" y="4087368"/>
+            <a:ext cx="73152" cy="1143000"/>
+          </a:xfrm>
+          <a:prstGeom prst="rect">
+            <a:avLst/>
+          </a:prstGeom>
+          <a:solidFill>
+            <a:srgbClr val="355C7D"/>
+          </a:solidFill>
+          <a:ln>
+            <a:noFill/>
+          </a:ln>
+        </p:spPr>
+        <p:style>
+          <a:lnRef idx="1">
+            <a:schemeClr val="accent1"/>
+          </a:lnRef>
+          <a:fillRef idx="3">
+            <a:schemeClr val="accent1"/>
+          </a:fillRef>
+          <a:effectRef idx="2">
+            <a:schemeClr val="accent1"/>
+          </a:effectRef>
+          <a:fontRef idx="minor">
+            <a:schemeClr val="lt1"/>
+          </a:fontRef>
+        </p:style>
+        <p:txBody>
+          <a:bodyPr rtlCol="0" anchor="ctr"/>
+          <a:lstStyle/>
+          <a:p>
+            <a:pPr algn="ctr"/>
+          </a:p>
+        </p:txBody>
+      </p:sp>
+      <p:sp>
+        <p:nvSpPr>
+          <p:cNvPr id="18" name="TextBox 17"/>
           <p:cNvSpPr txBox="1"/>
           <p:nvPr/>
         </p:nvSpPr>
         <p:spPr>
           <a:xfrm>
-            <a:off x="1965960" y="4727448"/>
-            <a:ext cx="8823960" cy="228600"/>
+            <a:off x="1078992" y="4023360"/>
+            <a:ext cx="6613855" cy="320040"/>
           </a:xfrm>
           <a:prstGeom prst="rect">
             <a:avLst/>
@@ -10421,21 +10382,21 @@
                 <a:ea typeface="Sarabun"/>
                 <a:cs typeface="Sarabun"/>
               </a:rPr>
-              <a:t>ผมอายุสามสิบปีครับ</a:t>
-            </a:r>
-          </a:p>
-        </p:txBody>
-      </p:sp>
-      <p:sp>
-        <p:nvSpPr>
-          <p:cNvPr id="24" name="TextBox 23"/>
+              <a:t>ผมอายุ...ปี</a:t>
+            </a:r>
+          </a:p>
+        </p:txBody>
+      </p:sp>
+      <p:sp>
+        <p:nvSpPr>
+          <p:cNvPr id="19" name="TextBox 18"/>
           <p:cNvSpPr txBox="1"/>
           <p:nvPr/>
         </p:nvSpPr>
         <p:spPr>
           <a:xfrm>
-            <a:off x="1965960" y="4956048"/>
-            <a:ext cx="8823960" cy="201168"/>
+            <a:off x="1078992" y="4389120"/>
+            <a:ext cx="6613855" cy="274320"/>
           </a:xfrm>
           <a:prstGeom prst="rect">
             <a:avLst/>
@@ -10458,21 +10419,21 @@
                 <a:ea typeface="Sarabun"/>
                 <a:cs typeface="Sarabun"/>
               </a:rPr>
-              <a:t>phǒm aa-yú sǎam-sìp bpii khráp</a:t>
-            </a:r>
-          </a:p>
-        </p:txBody>
-      </p:sp>
-      <p:sp>
-        <p:nvSpPr>
-          <p:cNvPr id="25" name="TextBox 24"/>
+              <a:t>phǒm aa-yú ... bpii</a:t>
+            </a:r>
+          </a:p>
+        </p:txBody>
+      </p:sp>
+      <p:sp>
+        <p:nvSpPr>
+          <p:cNvPr id="20" name="TextBox 19"/>
           <p:cNvSpPr txBox="1"/>
           <p:nvPr/>
         </p:nvSpPr>
         <p:spPr>
           <a:xfrm>
-            <a:off x="1965960" y="5157216"/>
-            <a:ext cx="8823960" cy="201168"/>
+            <a:off x="1078992" y="4764024"/>
+            <a:ext cx="6613855" cy="274320"/>
           </a:xfrm>
           <a:prstGeom prst="rect">
             <a:avLst/>
@@ -10489,13 +10450,208 @@
             <a:r>
               <a:rPr sz="1700" b="0" i="0" lang="en-US" altLang="en-US">
                 <a:solidFill>
+                  <a:srgbClr val="82909A"/>
+                </a:solidFill>
+                <a:latin typeface="Sarabun"/>
+                <a:ea typeface="Sarabun"/>
+                <a:cs typeface="Sarabun"/>
+              </a:rPr>
+              <a:t>I am ... years old (male)</a:t>
+            </a:r>
+          </a:p>
+        </p:txBody>
+      </p:sp>
+      <p:sp>
+        <p:nvSpPr>
+          <p:cNvPr id="21" name="Rounded Rectangle 20"/>
+          <p:cNvSpPr/>
+          <p:nvPr/>
+        </p:nvSpPr>
+        <p:spPr>
+          <a:xfrm>
+            <a:off x="731520" y="5166360"/>
+            <a:ext cx="7071055" cy="1572768"/>
+          </a:xfrm>
+          <a:prstGeom prst="roundRect">
+            <a:avLst/>
+          </a:prstGeom>
+          <a:noFill/>
+          <a:ln>
+            <a:noFill/>
+          </a:ln>
+        </p:spPr>
+        <p:style>
+          <a:lnRef idx="1">
+            <a:schemeClr val="accent1"/>
+          </a:lnRef>
+          <a:fillRef idx="3">
+            <a:schemeClr val="accent1"/>
+          </a:fillRef>
+          <a:effectRef idx="2">
+            <a:schemeClr val="accent1"/>
+          </a:effectRef>
+          <a:fontRef idx="minor">
+            <a:schemeClr val="lt1"/>
+          </a:fontRef>
+        </p:style>
+        <p:txBody>
+          <a:bodyPr rtlCol="0" anchor="ctr"/>
+          <a:lstStyle/>
+          <a:p>
+            <a:pPr algn="ctr"/>
+          </a:p>
+        </p:txBody>
+      </p:sp>
+      <p:sp>
+        <p:nvSpPr>
+          <p:cNvPr id="22" name="Rectangle 21"/>
+          <p:cNvSpPr/>
+          <p:nvPr/>
+        </p:nvSpPr>
+        <p:spPr>
+          <a:xfrm>
+            <a:off x="868680" y="5367528"/>
+            <a:ext cx="73152" cy="1143000"/>
+          </a:xfrm>
+          <a:prstGeom prst="rect">
+            <a:avLst/>
+          </a:prstGeom>
+          <a:solidFill>
+            <a:srgbClr val="355C7D"/>
+          </a:solidFill>
+          <a:ln>
+            <a:noFill/>
+          </a:ln>
+        </p:spPr>
+        <p:style>
+          <a:lnRef idx="1">
+            <a:schemeClr val="accent1"/>
+          </a:lnRef>
+          <a:fillRef idx="3">
+            <a:schemeClr val="accent1"/>
+          </a:fillRef>
+          <a:effectRef idx="2">
+            <a:schemeClr val="accent1"/>
+          </a:effectRef>
+          <a:fontRef idx="minor">
+            <a:schemeClr val="lt1"/>
+          </a:fontRef>
+        </p:style>
+        <p:txBody>
+          <a:bodyPr rtlCol="0" anchor="ctr"/>
+          <a:lstStyle/>
+          <a:p>
+            <a:pPr algn="ctr"/>
+          </a:p>
+        </p:txBody>
+      </p:sp>
+      <p:sp>
+        <p:nvSpPr>
+          <p:cNvPr id="23" name="TextBox 22"/>
+          <p:cNvSpPr txBox="1"/>
+          <p:nvPr/>
+        </p:nvSpPr>
+        <p:spPr>
+          <a:xfrm>
+            <a:off x="1078992" y="5303520"/>
+            <a:ext cx="6613855" cy="320040"/>
+          </a:xfrm>
+          <a:prstGeom prst="rect">
+            <a:avLst/>
+          </a:prstGeom>
+          <a:noFill/>
+        </p:spPr>
+        <p:txBody>
+          <a:bodyPr wrap="square" anchor="t">
+            <a:spAutoFit/>
+          </a:bodyPr>
+          <a:lstStyle/>
+          <a:p>
+            <a:pPr algn="l"/>
+            <a:r>
+              <a:rPr sz="1700" b="0" i="0" lang="th-TH" altLang="en-US">
+                <a:solidFill>
+                  <a:srgbClr val="24333D"/>
+                </a:solidFill>
+                <a:latin typeface="Sarabun"/>
+                <a:ea typeface="Sarabun"/>
+                <a:cs typeface="Sarabun"/>
+              </a:rPr>
+              <a:t>ฉันอายุ...ปี</a:t>
+            </a:r>
+          </a:p>
+        </p:txBody>
+      </p:sp>
+      <p:sp>
+        <p:nvSpPr>
+          <p:cNvPr id="24" name="TextBox 23"/>
+          <p:cNvSpPr txBox="1"/>
+          <p:nvPr/>
+        </p:nvSpPr>
+        <p:spPr>
+          <a:xfrm>
+            <a:off x="1078992" y="5669280"/>
+            <a:ext cx="6613855" cy="274320"/>
+          </a:xfrm>
+          <a:prstGeom prst="rect">
+            <a:avLst/>
+          </a:prstGeom>
+          <a:noFill/>
+        </p:spPr>
+        <p:txBody>
+          <a:bodyPr wrap="square" anchor="t">
+            <a:spAutoFit/>
+          </a:bodyPr>
+          <a:lstStyle/>
+          <a:p>
+            <a:pPr algn="l"/>
+            <a:r>
+              <a:rPr sz="1700" b="0" i="1" lang="en-US" altLang="en-US">
+                <a:solidFill>
                   <a:srgbClr val="566873"/>
                 </a:solidFill>
                 <a:latin typeface="Sarabun"/>
                 <a:ea typeface="Sarabun"/>
                 <a:cs typeface="Sarabun"/>
               </a:rPr>
-              <a:t>I am thirty.</a:t>
+              <a:t>chǎn aa-yú ... bpii</a:t>
+            </a:r>
+          </a:p>
+        </p:txBody>
+      </p:sp>
+      <p:sp>
+        <p:nvSpPr>
+          <p:cNvPr id="25" name="TextBox 24"/>
+          <p:cNvSpPr txBox="1"/>
+          <p:nvPr/>
+        </p:nvSpPr>
+        <p:spPr>
+          <a:xfrm>
+            <a:off x="1078992" y="6044184"/>
+            <a:ext cx="6613855" cy="274320"/>
+          </a:xfrm>
+          <a:prstGeom prst="rect">
+            <a:avLst/>
+          </a:prstGeom>
+          <a:noFill/>
+        </p:spPr>
+        <p:txBody>
+          <a:bodyPr wrap="square" anchor="t">
+            <a:spAutoFit/>
+          </a:bodyPr>
+          <a:lstStyle/>
+          <a:p>
+            <a:pPr algn="l"/>
+            <a:r>
+              <a:rPr sz="1700" b="0" i="0" lang="en-US" altLang="en-US">
+                <a:solidFill>
+                  <a:srgbClr val="82909A"/>
+                </a:solidFill>
+                <a:latin typeface="Sarabun"/>
+                <a:ea typeface="Sarabun"/>
+                <a:cs typeface="Sarabun"/>
+              </a:rPr>
+              <a:t>I am ... years old</a:t>
             </a:r>
           </a:p>
         </p:txBody>
@@ -10658,7 +10814,7 @@
                 <a:ea typeface="Sarabun"/>
                 <a:cs typeface="Sarabun"/>
               </a:rPr>
-              <a:t>Recap</a:t>
+              <a:t>Teaching slide</a:t>
             </a:r>
           </a:p>
         </p:txBody>
@@ -10695,60 +10851,119 @@
                 <a:ea typeface="Sarabun"/>
                 <a:cs typeface="Sarabun"/>
               </a:rPr>
-              <a:t>Recap</a:t>
-            </a:r>
-          </a:p>
-        </p:txBody>
-      </p:sp>
-      <p:sp>
-        <p:nvSpPr>
-          <p:cNvPr id="6" name="TextBox 5"/>
-          <p:cNvSpPr txBox="1"/>
-          <p:nvPr/>
-        </p:nvSpPr>
-        <p:spPr>
-          <a:xfrm>
-            <a:off x="932688" y="1563624"/>
-            <a:ext cx="6705295" cy="228600"/>
-          </a:xfrm>
-          <a:prstGeom prst="rect">
-            <a:avLst/>
-          </a:prstGeom>
-          <a:noFill/>
-        </p:spPr>
-        <p:txBody>
-          <a:bodyPr wrap="square" anchor="t">
-            <a:spAutoFit/>
-          </a:bodyPr>
-          <a:lstStyle/>
-          <a:p>
-            <a:pPr algn="l"/>
-            <a:r>
-              <a:rPr sz="1700" b="1" i="0" lang="en-US" altLang="en-US">
-                <a:solidFill>
-                  <a:srgbClr val="355C7D"/>
-                </a:solidFill>
-                <a:latin typeface="Sarabun"/>
-                <a:ea typeface="Sarabun"/>
-                <a:cs typeface="Sarabun"/>
-              </a:rPr>
-              <a:t>What you can now do</a:t>
-            </a:r>
-          </a:p>
-        </p:txBody>
-      </p:sp>
-      <p:sp>
-        <p:nvSpPr>
-          <p:cNvPr id="7" name="Oval 6"/>
+              <a:t>Pronunciation: </a:t>
+            </a:r>
+            <a:r>
+              <a:rPr sz="3600" b="1" i="0" lang="th-TH" altLang="en-US">
+                <a:solidFill>
+                  <a:srgbClr val="24333D"/>
+                </a:solidFill>
+                <a:latin typeface="Sarabun"/>
+                <a:ea typeface="Sarabun"/>
+                <a:cs typeface="Sarabun"/>
+              </a:rPr>
+              <a:t>สี่</a:t>
+            </a:r>
+            <a:r>
+              <a:rPr sz="2230" b="0" i="1" lang="en-US" altLang="en-US">
+                <a:solidFill>
+                  <a:srgbClr val="566873"/>
+                </a:solidFill>
+                <a:latin typeface="Sarabun"/>
+                <a:ea typeface="Sarabun"/>
+                <a:cs typeface="Sarabun"/>
+              </a:rPr>
+              <a:t> (sìi)</a:t>
+            </a:r>
+            <a:r>
+              <a:rPr sz="3600" b="1" i="0" lang="en-US" altLang="en-US">
+                <a:solidFill>
+                  <a:srgbClr val="24333D"/>
+                </a:solidFill>
+                <a:latin typeface="Sarabun"/>
+                <a:ea typeface="Sarabun"/>
+                <a:cs typeface="Sarabun"/>
+              </a:rPr>
+              <a:t> vs </a:t>
+            </a:r>
+            <a:r>
+              <a:rPr sz="3600" b="1" i="0" lang="th-TH" altLang="en-US">
+                <a:solidFill>
+                  <a:srgbClr val="24333D"/>
+                </a:solidFill>
+                <a:latin typeface="Sarabun"/>
+                <a:ea typeface="Sarabun"/>
+                <a:cs typeface="Sarabun"/>
+              </a:rPr>
+              <a:t>สี</a:t>
+            </a:r>
+            <a:r>
+              <a:rPr sz="2230" b="0" i="1" lang="en-US" altLang="en-US">
+                <a:solidFill>
+                  <a:srgbClr val="566873"/>
+                </a:solidFill>
+                <a:latin typeface="Sarabun"/>
+                <a:ea typeface="Sarabun"/>
+                <a:cs typeface="Sarabun"/>
+              </a:rPr>
+              <a:t> (sǐi)</a:t>
+            </a:r>
+          </a:p>
+        </p:txBody>
+      </p:sp>
+      <p:sp>
+        <p:nvSpPr>
+          <p:cNvPr id="6" name="Rounded Rectangle 5"/>
           <p:cNvSpPr/>
           <p:nvPr/>
         </p:nvSpPr>
         <p:spPr>
           <a:xfrm>
-            <a:off x="932688" y="1947672"/>
-            <a:ext cx="82296" cy="82296"/>
-          </a:xfrm>
-          <a:prstGeom prst="ellipse">
+            <a:off x="731520" y="1325880"/>
+            <a:ext cx="7071055" cy="1572768"/>
+          </a:xfrm>
+          <a:prstGeom prst="roundRect">
+            <a:avLst/>
+          </a:prstGeom>
+          <a:noFill/>
+          <a:ln>
+            <a:noFill/>
+          </a:ln>
+        </p:spPr>
+        <p:style>
+          <a:lnRef idx="1">
+            <a:schemeClr val="accent1"/>
+          </a:lnRef>
+          <a:fillRef idx="3">
+            <a:schemeClr val="accent1"/>
+          </a:fillRef>
+          <a:effectRef idx="2">
+            <a:schemeClr val="accent1"/>
+          </a:effectRef>
+          <a:fontRef idx="minor">
+            <a:schemeClr val="lt1"/>
+          </a:fontRef>
+        </p:style>
+        <p:txBody>
+          <a:bodyPr rtlCol="0" anchor="ctr"/>
+          <a:lstStyle/>
+          <a:p>
+            <a:pPr algn="ctr"/>
+          </a:p>
+        </p:txBody>
+      </p:sp>
+      <p:sp>
+        <p:nvSpPr>
+          <p:cNvPr id="7" name="Rectangle 6"/>
+          <p:cNvSpPr/>
+          <p:nvPr/>
+        </p:nvSpPr>
+        <p:spPr>
+          <a:xfrm>
+            <a:off x="868680" y="1527048"/>
+            <a:ext cx="73152" cy="1143000"/>
+          </a:xfrm>
+          <a:prstGeom prst="rect">
             <a:avLst/>
           </a:prstGeom>
           <a:solidFill>
@@ -10788,8 +11003,8 @@
         </p:nvSpPr>
         <p:spPr>
           <a:xfrm>
-            <a:off x="1078992" y="1856232"/>
-            <a:ext cx="6568135" cy="274320"/>
+            <a:off x="1078992" y="1463040"/>
+            <a:ext cx="6613855" cy="320040"/>
           </a:xfrm>
           <a:prstGeom prst="rect">
             <a:avLst/>
@@ -10804,31 +11019,146 @@
           <a:p>
             <a:pPr algn="l"/>
             <a:r>
+              <a:rPr sz="1700" b="0" i="0" lang="th-TH" altLang="en-US">
+                <a:solidFill>
+                  <a:srgbClr val="24333D"/>
+                </a:solidFill>
+                <a:latin typeface="Sarabun"/>
+                <a:ea typeface="Sarabun"/>
+                <a:cs typeface="Sarabun"/>
+              </a:rPr>
+              <a:t>สี่</a:t>
+            </a:r>
+          </a:p>
+        </p:txBody>
+      </p:sp>
+      <p:sp>
+        <p:nvSpPr>
+          <p:cNvPr id="9" name="TextBox 8"/>
+          <p:cNvSpPr txBox="1"/>
+          <p:nvPr/>
+        </p:nvSpPr>
+        <p:spPr>
+          <a:xfrm>
+            <a:off x="1078992" y="1828800"/>
+            <a:ext cx="6613855" cy="274320"/>
+          </a:xfrm>
+          <a:prstGeom prst="rect">
+            <a:avLst/>
+          </a:prstGeom>
+          <a:noFill/>
+        </p:spPr>
+        <p:txBody>
+          <a:bodyPr wrap="square" anchor="t">
+            <a:spAutoFit/>
+          </a:bodyPr>
+          <a:lstStyle/>
+          <a:p>
+            <a:pPr algn="l"/>
+            <a:r>
+              <a:rPr sz="1700" b="0" i="1" lang="en-US" altLang="en-US">
+                <a:solidFill>
+                  <a:srgbClr val="566873"/>
+                </a:solidFill>
+                <a:latin typeface="Sarabun"/>
+                <a:ea typeface="Sarabun"/>
+                <a:cs typeface="Sarabun"/>
+              </a:rPr>
+              <a:t>sìi</a:t>
+            </a:r>
+          </a:p>
+        </p:txBody>
+      </p:sp>
+      <p:sp>
+        <p:nvSpPr>
+          <p:cNvPr id="10" name="TextBox 9"/>
+          <p:cNvSpPr txBox="1"/>
+          <p:nvPr/>
+        </p:nvSpPr>
+        <p:spPr>
+          <a:xfrm>
+            <a:off x="1078992" y="2203704"/>
+            <a:ext cx="6613855" cy="274320"/>
+          </a:xfrm>
+          <a:prstGeom prst="rect">
+            <a:avLst/>
+          </a:prstGeom>
+          <a:noFill/>
+        </p:spPr>
+        <p:txBody>
+          <a:bodyPr wrap="square" anchor="t">
+            <a:spAutoFit/>
+          </a:bodyPr>
+          <a:lstStyle/>
+          <a:p>
+            <a:pPr algn="l"/>
+            <a:r>
               <a:rPr sz="1700" b="0" i="0" lang="en-US" altLang="en-US">
                 <a:solidFill>
-                  <a:srgbClr val="24333D"/>
-                </a:solidFill>
-                <a:latin typeface="Sarabun"/>
-                <a:ea typeface="Sarabun"/>
-                <a:cs typeface="Sarabun"/>
-              </a:rPr>
-              <a:t>Count 0 to 5 in Thai. Go.</a:t>
-            </a:r>
-          </a:p>
-        </p:txBody>
-      </p:sp>
-      <p:sp>
-        <p:nvSpPr>
-          <p:cNvPr id="9" name="Oval 8"/>
+                  <a:srgbClr val="82909A"/>
+                </a:solidFill>
+                <a:latin typeface="Sarabun"/>
+                <a:ea typeface="Sarabun"/>
+                <a:cs typeface="Sarabun"/>
+              </a:rPr>
+              <a:t>four — low tone (voice stays low)</a:t>
+            </a:r>
+          </a:p>
+        </p:txBody>
+      </p:sp>
+      <p:sp>
+        <p:nvSpPr>
+          <p:cNvPr id="11" name="Rounded Rectangle 10"/>
           <p:cNvSpPr/>
           <p:nvPr/>
         </p:nvSpPr>
         <p:spPr>
           <a:xfrm>
-            <a:off x="932688" y="2276856"/>
-            <a:ext cx="82296" cy="82296"/>
-          </a:xfrm>
-          <a:prstGeom prst="ellipse">
+            <a:off x="731520" y="3081528"/>
+            <a:ext cx="7071055" cy="1572768"/>
+          </a:xfrm>
+          <a:prstGeom prst="roundRect">
+            <a:avLst/>
+          </a:prstGeom>
+          <a:noFill/>
+          <a:ln>
+            <a:noFill/>
+          </a:ln>
+        </p:spPr>
+        <p:style>
+          <a:lnRef idx="1">
+            <a:schemeClr val="accent1"/>
+          </a:lnRef>
+          <a:fillRef idx="3">
+            <a:schemeClr val="accent1"/>
+          </a:fillRef>
+          <a:effectRef idx="2">
+            <a:schemeClr val="accent1"/>
+          </a:effectRef>
+          <a:fontRef idx="minor">
+            <a:schemeClr val="lt1"/>
+          </a:fontRef>
+        </p:style>
+        <p:txBody>
+          <a:bodyPr rtlCol="0" anchor="ctr"/>
+          <a:lstStyle/>
+          <a:p>
+            <a:pPr algn="ctr"/>
+          </a:p>
+        </p:txBody>
+      </p:sp>
+      <p:sp>
+        <p:nvSpPr>
+          <p:cNvPr id="12" name="Rectangle 11"/>
+          <p:cNvSpPr/>
+          <p:nvPr/>
+        </p:nvSpPr>
+        <p:spPr>
+          <a:xfrm>
+            <a:off x="868680" y="3282696"/>
+            <a:ext cx="73152" cy="1143000"/>
+          </a:xfrm>
+          <a:prstGeom prst="rect">
             <a:avLst/>
           </a:prstGeom>
           <a:solidFill>
@@ -10862,14 +11192,14 @@
       </p:sp>
       <p:sp>
         <p:nvSpPr>
-          <p:cNvPr id="10" name="TextBox 9"/>
+          <p:cNvPr id="13" name="TextBox 12"/>
           <p:cNvSpPr txBox="1"/>
           <p:nvPr/>
         </p:nvSpPr>
         <p:spPr>
           <a:xfrm>
-            <a:off x="1078992" y="2185416"/>
-            <a:ext cx="6568135" cy="274320"/>
+            <a:off x="1078992" y="3218688"/>
+            <a:ext cx="6613855" cy="320040"/>
           </a:xfrm>
           <a:prstGeom prst="rect">
             <a:avLst/>
@@ -10884,31 +11214,146 @@
           <a:p>
             <a:pPr algn="l"/>
             <a:r>
+              <a:rPr sz="1700" b="0" i="0" lang="th-TH" altLang="en-US">
+                <a:solidFill>
+                  <a:srgbClr val="24333D"/>
+                </a:solidFill>
+                <a:latin typeface="Sarabun"/>
+                <a:ea typeface="Sarabun"/>
+                <a:cs typeface="Sarabun"/>
+              </a:rPr>
+              <a:t>สี</a:t>
+            </a:r>
+          </a:p>
+        </p:txBody>
+      </p:sp>
+      <p:sp>
+        <p:nvSpPr>
+          <p:cNvPr id="14" name="TextBox 13"/>
+          <p:cNvSpPr txBox="1"/>
+          <p:nvPr/>
+        </p:nvSpPr>
+        <p:spPr>
+          <a:xfrm>
+            <a:off x="1078992" y="3584448"/>
+            <a:ext cx="6613855" cy="274320"/>
+          </a:xfrm>
+          <a:prstGeom prst="rect">
+            <a:avLst/>
+          </a:prstGeom>
+          <a:noFill/>
+        </p:spPr>
+        <p:txBody>
+          <a:bodyPr wrap="square" anchor="t">
+            <a:spAutoFit/>
+          </a:bodyPr>
+          <a:lstStyle/>
+          <a:p>
+            <a:pPr algn="l"/>
+            <a:r>
+              <a:rPr sz="1700" b="0" i="1" lang="en-US" altLang="en-US">
+                <a:solidFill>
+                  <a:srgbClr val="566873"/>
+                </a:solidFill>
+                <a:latin typeface="Sarabun"/>
+                <a:ea typeface="Sarabun"/>
+                <a:cs typeface="Sarabun"/>
+              </a:rPr>
+              <a:t>sǐi</a:t>
+            </a:r>
+          </a:p>
+        </p:txBody>
+      </p:sp>
+      <p:sp>
+        <p:nvSpPr>
+          <p:cNvPr id="15" name="TextBox 14"/>
+          <p:cNvSpPr txBox="1"/>
+          <p:nvPr/>
+        </p:nvSpPr>
+        <p:spPr>
+          <a:xfrm>
+            <a:off x="1078992" y="3959352"/>
+            <a:ext cx="6613855" cy="274320"/>
+          </a:xfrm>
+          <a:prstGeom prst="rect">
+            <a:avLst/>
+          </a:prstGeom>
+          <a:noFill/>
+        </p:spPr>
+        <p:txBody>
+          <a:bodyPr wrap="square" anchor="t">
+            <a:spAutoFit/>
+          </a:bodyPr>
+          <a:lstStyle/>
+          <a:p>
+            <a:pPr algn="l"/>
+            <a:r>
               <a:rPr sz="1700" b="0" i="0" lang="en-US" altLang="en-US">
                 <a:solidFill>
-                  <a:srgbClr val="24333D"/>
-                </a:solidFill>
-                <a:latin typeface="Sarabun"/>
-                <a:ea typeface="Sarabun"/>
-                <a:cs typeface="Sarabun"/>
-              </a:rPr>
-              <a:t>Now 6 to 10.</a:t>
-            </a:r>
-          </a:p>
-        </p:txBody>
-      </p:sp>
-      <p:sp>
-        <p:nvSpPr>
-          <p:cNvPr id="11" name="Oval 10"/>
+                  <a:srgbClr val="82909A"/>
+                </a:solidFill>
+                <a:latin typeface="Sarabun"/>
+                <a:ea typeface="Sarabun"/>
+                <a:cs typeface="Sarabun"/>
+              </a:rPr>
+              <a:t>colour — rising tone (voice lifts)</a:t>
+            </a:r>
+          </a:p>
+        </p:txBody>
+      </p:sp>
+      <p:sp>
+        <p:nvSpPr>
+          <p:cNvPr id="16" name="Rounded Rectangle 15"/>
           <p:cNvSpPr/>
           <p:nvPr/>
         </p:nvSpPr>
         <p:spPr>
           <a:xfrm>
-            <a:off x="932688" y="2606040"/>
-            <a:ext cx="82296" cy="82296"/>
-          </a:xfrm>
-          <a:prstGeom prst="ellipse">
+            <a:off x="731520" y="4837176"/>
+            <a:ext cx="7071055" cy="1572768"/>
+          </a:xfrm>
+          <a:prstGeom prst="roundRect">
+            <a:avLst/>
+          </a:prstGeom>
+          <a:noFill/>
+          <a:ln>
+            <a:noFill/>
+          </a:ln>
+        </p:spPr>
+        <p:style>
+          <a:lnRef idx="1">
+            <a:schemeClr val="accent1"/>
+          </a:lnRef>
+          <a:fillRef idx="3">
+            <a:schemeClr val="accent1"/>
+          </a:fillRef>
+          <a:effectRef idx="2">
+            <a:schemeClr val="accent1"/>
+          </a:effectRef>
+          <a:fontRef idx="minor">
+            <a:schemeClr val="lt1"/>
+          </a:fontRef>
+        </p:style>
+        <p:txBody>
+          <a:bodyPr rtlCol="0" anchor="ctr"/>
+          <a:lstStyle/>
+          <a:p>
+            <a:pPr algn="ctr"/>
+          </a:p>
+        </p:txBody>
+      </p:sp>
+      <p:sp>
+        <p:nvSpPr>
+          <p:cNvPr id="17" name="Rectangle 16"/>
+          <p:cNvSpPr/>
+          <p:nvPr/>
+        </p:nvSpPr>
+        <p:spPr>
+          <a:xfrm>
+            <a:off x="868680" y="5038344"/>
+            <a:ext cx="73152" cy="1143000"/>
+          </a:xfrm>
+          <a:prstGeom prst="rect">
             <a:avLst/>
           </a:prstGeom>
           <a:solidFill>
@@ -10942,14 +11387,14 @@
       </p:sp>
       <p:sp>
         <p:nvSpPr>
-          <p:cNvPr id="12" name="TextBox 11"/>
+          <p:cNvPr id="18" name="TextBox 17"/>
           <p:cNvSpPr txBox="1"/>
           <p:nvPr/>
         </p:nvSpPr>
         <p:spPr>
           <a:xfrm>
-            <a:off x="1078992" y="2514600"/>
-            <a:ext cx="6568135" cy="274320"/>
+            <a:off x="1078992" y="4974336"/>
+            <a:ext cx="6613855" cy="320040"/>
           </a:xfrm>
           <a:prstGeom prst="rect">
             <a:avLst/>
@@ -10964,7 +11409,7 @@
           <a:p>
             <a:pPr algn="l"/>
             <a:r>
-              <a:rPr sz="1700" b="0" i="0" lang="en-US" altLang="en-US">
+              <a:rPr sz="1700" b="0" i="0" lang="th-TH" altLang="en-US">
                 <a:solidFill>
                   <a:srgbClr val="24333D"/>
                 </a:solidFill>
@@ -10972,97 +11417,21 @@
                 <a:ea typeface="Sarabun"/>
                 <a:cs typeface="Sarabun"/>
               </a:rPr>
-              <a:t>Ask 'what number?' </a:t>
-            </a:r>
-            <a:r>
-              <a:rPr sz="1700" b="0" i="0" lang="th-TH" altLang="en-US">
-                <a:solidFill>
-                  <a:srgbClr val="24333D"/>
-                </a:solidFill>
-                <a:latin typeface="Sarabun"/>
-                <a:ea typeface="Sarabun"/>
-                <a:cs typeface="Sarabun"/>
-              </a:rPr>
-              <a:t>เบอร์อะไร</a:t>
-            </a:r>
-            <a:r>
-              <a:rPr sz="1700" b="0" i="1" lang="en-US" altLang="en-US">
-                <a:solidFill>
-                  <a:srgbClr val="566873"/>
-                </a:solidFill>
-                <a:latin typeface="Sarabun"/>
-                <a:ea typeface="Sarabun"/>
-                <a:cs typeface="Sarabun"/>
-              </a:rPr>
-              <a:t> (ber à-rai)</a:t>
-            </a:r>
-            <a:r>
-              <a:rPr sz="1700" b="0" i="0" lang="en-US" altLang="en-US">
-                <a:solidFill>
-                  <a:srgbClr val="24333D"/>
-                </a:solidFill>
-                <a:latin typeface="Sarabun"/>
-                <a:ea typeface="Sarabun"/>
-                <a:cs typeface="Sarabun"/>
-              </a:rPr>
-              <a:t>.</a:t>
-            </a:r>
-          </a:p>
-        </p:txBody>
-      </p:sp>
-      <p:sp>
-        <p:nvSpPr>
-          <p:cNvPr id="13" name="Oval 12"/>
-          <p:cNvSpPr/>
-          <p:nvPr/>
-        </p:nvSpPr>
-        <p:spPr>
-          <a:xfrm>
-            <a:off x="932688" y="2935224"/>
-            <a:ext cx="82296" cy="82296"/>
-          </a:xfrm>
-          <a:prstGeom prst="ellipse">
-            <a:avLst/>
-          </a:prstGeom>
-          <a:solidFill>
-            <a:srgbClr val="355C7D"/>
-          </a:solidFill>
-          <a:ln>
-            <a:noFill/>
-          </a:ln>
-        </p:spPr>
-        <p:style>
-          <a:lnRef idx="1">
-            <a:schemeClr val="accent1"/>
-          </a:lnRef>
-          <a:fillRef idx="3">
-            <a:schemeClr val="accent1"/>
-          </a:fillRef>
-          <a:effectRef idx="2">
-            <a:schemeClr val="accent1"/>
-          </a:effectRef>
-          <a:fontRef idx="minor">
-            <a:schemeClr val="lt1"/>
-          </a:fontRef>
-        </p:style>
-        <p:txBody>
-          <a:bodyPr rtlCol="0" anchor="ctr"/>
-          <a:lstStyle/>
-          <a:p>
-            <a:pPr algn="ctr"/>
-          </a:p>
-        </p:txBody>
-      </p:sp>
-      <p:sp>
-        <p:nvSpPr>
-          <p:cNvPr id="14" name="TextBox 13"/>
+              <a:t>เก้า</a:t>
+            </a:r>
+          </a:p>
+        </p:txBody>
+      </p:sp>
+      <p:sp>
+        <p:nvSpPr>
+          <p:cNvPr id="19" name="TextBox 18"/>
           <p:cNvSpPr txBox="1"/>
           <p:nvPr/>
         </p:nvSpPr>
         <p:spPr>
           <a:xfrm>
-            <a:off x="1078992" y="2843784"/>
-            <a:ext cx="6568135" cy="274320"/>
+            <a:off x="1078992" y="5340096"/>
+            <a:ext cx="6613855" cy="274320"/>
           </a:xfrm>
           <a:prstGeom prst="rect">
             <a:avLst/>
@@ -11077,72 +11446,29 @@
           <a:p>
             <a:pPr algn="l"/>
             <a:r>
-              <a:rPr sz="1700" b="0" i="0" lang="en-US" altLang="en-US">
-                <a:solidFill>
-                  <a:srgbClr val="24333D"/>
-                </a:solidFill>
-                <a:latin typeface="Sarabun"/>
-                <a:ea typeface="Sarabun"/>
-                <a:cs typeface="Sarabun"/>
-              </a:rPr>
-              <a:t>Say 'I am 30 years old' in Thai.</a:t>
-            </a:r>
-          </a:p>
-        </p:txBody>
-      </p:sp>
-      <p:sp>
-        <p:nvSpPr>
-          <p:cNvPr id="15" name="Oval 14"/>
-          <p:cNvSpPr/>
-          <p:nvPr/>
-        </p:nvSpPr>
-        <p:spPr>
-          <a:xfrm>
-            <a:off x="932688" y="3264408"/>
-            <a:ext cx="82296" cy="82296"/>
-          </a:xfrm>
-          <a:prstGeom prst="ellipse">
-            <a:avLst/>
-          </a:prstGeom>
-          <a:solidFill>
-            <a:srgbClr val="355C7D"/>
-          </a:solidFill>
-          <a:ln>
-            <a:noFill/>
-          </a:ln>
-        </p:spPr>
-        <p:style>
-          <a:lnRef idx="1">
-            <a:schemeClr val="accent1"/>
-          </a:lnRef>
-          <a:fillRef idx="3">
-            <a:schemeClr val="accent1"/>
-          </a:fillRef>
-          <a:effectRef idx="2">
-            <a:schemeClr val="accent1"/>
-          </a:effectRef>
-          <a:fontRef idx="minor">
-            <a:schemeClr val="lt1"/>
-          </a:fontRef>
-        </p:style>
-        <p:txBody>
-          <a:bodyPr rtlCol="0" anchor="ctr"/>
-          <a:lstStyle/>
-          <a:p>
-            <a:pPr algn="ctr"/>
-          </a:p>
-        </p:txBody>
-      </p:sp>
-      <p:sp>
-        <p:nvSpPr>
-          <p:cNvPr id="16" name="TextBox 15"/>
+              <a:rPr sz="1700" b="0" i="1" lang="en-US" altLang="en-US">
+                <a:solidFill>
+                  <a:srgbClr val="566873"/>
+                </a:solidFill>
+                <a:latin typeface="Sarabun"/>
+                <a:ea typeface="Sarabun"/>
+                <a:cs typeface="Sarabun"/>
+              </a:rPr>
+              <a:t>gâo</a:t>
+            </a:r>
+          </a:p>
+        </p:txBody>
+      </p:sp>
+      <p:sp>
+        <p:nvSpPr>
+          <p:cNvPr id="20" name="TextBox 19"/>
           <p:cNvSpPr txBox="1"/>
           <p:nvPr/>
         </p:nvSpPr>
         <p:spPr>
           <a:xfrm>
-            <a:off x="1078992" y="3172968"/>
-            <a:ext cx="6568135" cy="274320"/>
+            <a:off x="1078992" y="5715000"/>
+            <a:ext cx="6613855" cy="274320"/>
           </a:xfrm>
           <a:prstGeom prst="rect">
             <a:avLst/>
@@ -11157,176 +11483,15 @@
           <a:p>
             <a:pPr algn="l"/>
             <a:r>
-              <a:rPr sz="1700" b="0" i="0" lang="th-TH" altLang="en-US">
-                <a:solidFill>
-                  <a:srgbClr val="24333D"/>
-                </a:solidFill>
-                <a:latin typeface="Sarabun"/>
-                <a:ea typeface="Sarabun"/>
-                <a:cs typeface="Sarabun"/>
-              </a:rPr>
-              <a:t>สี่</a:t>
-            </a:r>
-            <a:r>
-              <a:rPr sz="1700" b="0" i="1" lang="en-US" altLang="en-US">
-                <a:solidFill>
-                  <a:srgbClr val="566873"/>
-                </a:solidFill>
-                <a:latin typeface="Sarabun"/>
-                <a:ea typeface="Sarabun"/>
-                <a:cs typeface="Sarabun"/>
-              </a:rPr>
-              <a:t> (sìi)</a:t>
-            </a:r>
-            <a:r>
               <a:rPr sz="1700" b="0" i="0" lang="en-US" altLang="en-US">
                 <a:solidFill>
-                  <a:srgbClr val="24333D"/>
-                </a:solidFill>
-                <a:latin typeface="Sarabun"/>
-                <a:ea typeface="Sarabun"/>
-                <a:cs typeface="Sarabun"/>
-              </a:rPr>
-              <a:t> is low tone. Rising tone means what?</a:t>
-            </a:r>
-          </a:p>
-        </p:txBody>
-      </p:sp>
-      <p:sp>
-        <p:nvSpPr>
-          <p:cNvPr id="17" name="TextBox 16"/>
-          <p:cNvSpPr txBox="1"/>
-          <p:nvPr/>
-        </p:nvSpPr>
-        <p:spPr>
-          <a:xfrm>
-            <a:off x="932688" y="4306824"/>
-            <a:ext cx="9692640" cy="228600"/>
-          </a:xfrm>
-          <a:prstGeom prst="rect">
-            <a:avLst/>
-          </a:prstGeom>
-          <a:noFill/>
-        </p:spPr>
-        <p:txBody>
-          <a:bodyPr wrap="square" anchor="t">
-            <a:spAutoFit/>
-          </a:bodyPr>
-          <a:lstStyle/>
-          <a:p>
-            <a:pPr algn="l"/>
-            <a:r>
-              <a:rPr sz="1700" b="1" i="0" lang="en-US" altLang="en-US">
-                <a:solidFill>
-                  <a:srgbClr val="7A8F54"/>
-                </a:solidFill>
-                <a:latin typeface="Sarabun"/>
-                <a:ea typeface="Sarabun"/>
-                <a:cs typeface="Sarabun"/>
-              </a:rPr>
-              <a:t>Remember</a:t>
-            </a:r>
-          </a:p>
-        </p:txBody>
-      </p:sp>
-      <p:sp>
-        <p:nvSpPr>
-          <p:cNvPr id="18" name="Oval 17"/>
-          <p:cNvSpPr/>
-          <p:nvPr/>
-        </p:nvSpPr>
-        <p:spPr>
-          <a:xfrm>
-            <a:off x="932688" y="4690872"/>
-            <a:ext cx="82296" cy="82296"/>
-          </a:xfrm>
-          <a:prstGeom prst="ellipse">
-            <a:avLst/>
-          </a:prstGeom>
-          <a:solidFill>
-            <a:srgbClr val="7A8F54"/>
-          </a:solidFill>
-          <a:ln>
-            <a:noFill/>
-          </a:ln>
-        </p:spPr>
-        <p:style>
-          <a:lnRef idx="1">
-            <a:schemeClr val="accent1"/>
-          </a:lnRef>
-          <a:fillRef idx="3">
-            <a:schemeClr val="accent1"/>
-          </a:fillRef>
-          <a:effectRef idx="2">
-            <a:schemeClr val="accent1"/>
-          </a:effectRef>
-          <a:fontRef idx="minor">
-            <a:schemeClr val="lt1"/>
-          </a:fontRef>
-        </p:style>
-        <p:txBody>
-          <a:bodyPr rtlCol="0" anchor="ctr"/>
-          <a:lstStyle/>
-          <a:p>
-            <a:pPr algn="ctr"/>
-          </a:p>
-        </p:txBody>
-      </p:sp>
-      <p:sp>
-        <p:nvSpPr>
-          <p:cNvPr id="19" name="TextBox 18"/>
-          <p:cNvSpPr txBox="1"/>
-          <p:nvPr/>
-        </p:nvSpPr>
-        <p:spPr>
-          <a:xfrm>
-            <a:off x="1078992" y="4599432"/>
-            <a:ext cx="9555480" cy="274320"/>
-          </a:xfrm>
-          <a:prstGeom prst="rect">
-            <a:avLst/>
-          </a:prstGeom>
-          <a:noFill/>
-        </p:spPr>
-        <p:txBody>
-          <a:bodyPr wrap="square" anchor="t">
-            <a:spAutoFit/>
-          </a:bodyPr>
-          <a:lstStyle/>
-          <a:p>
-            <a:pPr algn="l"/>
-            <a:r>
-              <a:rPr sz="1700" b="0" i="0" lang="th-TH" altLang="en-US">
-                <a:solidFill>
-                  <a:srgbClr val="24333D"/>
-                </a:solidFill>
-                <a:latin typeface="Sarabun"/>
-                <a:ea typeface="Sarabun"/>
-                <a:cs typeface="Sarabun"/>
-              </a:rPr>
-              <a:t>สี่</a:t>
-            </a:r>
-            <a:r>
-              <a:rPr sz="1700" b="0" i="1" lang="en-US" altLang="en-US">
-                <a:solidFill>
-                  <a:srgbClr val="566873"/>
-                </a:solidFill>
-                <a:latin typeface="Sarabun"/>
-                <a:ea typeface="Sarabun"/>
-                <a:cs typeface="Sarabun"/>
-              </a:rPr>
-              <a:t> (sìi)</a:t>
-            </a:r>
-            <a:r>
-              <a:rPr sz="1700" b="0" i="0" lang="en-US" altLang="en-US">
-                <a:solidFill>
-                  <a:srgbClr val="24333D"/>
-                </a:solidFill>
-                <a:latin typeface="Sarabun"/>
-                <a:ea typeface="Sarabun"/>
-                <a:cs typeface="Sarabun"/>
-              </a:rPr>
-              <a:t> is low tone. Rising tone means what?</a:t>
+                  <a:srgbClr val="82909A"/>
+                </a:solidFill>
+                <a:latin typeface="Sarabun"/>
+                <a:ea typeface="Sarabun"/>
+                <a:cs typeface="Sarabun"/>
+              </a:rPr>
+              <a:t>nine — falling tone (voice drops)</a:t>
             </a:r>
           </a:p>
         </p:txBody>
@@ -11489,7 +11654,7 @@
                 <a:ea typeface="Sarabun"/>
                 <a:cs typeface="Sarabun"/>
               </a:rPr>
-              <a:t>Closing</a:t>
+              <a:t>Roleplay</a:t>
             </a:r>
           </a:p>
         </p:txBody>
@@ -11526,21 +11691,77 @@
                 <a:ea typeface="Sarabun"/>
                 <a:cs typeface="Sarabun"/>
               </a:rPr>
-              <a:t>Closing</a:t>
-            </a:r>
-          </a:p>
-        </p:txBody>
-      </p:sp>
-      <p:sp>
-        <p:nvSpPr>
-          <p:cNvPr id="6" name="TextBox 5"/>
+              <a:t>Roleplay</a:t>
+            </a:r>
+          </a:p>
+        </p:txBody>
+      </p:sp>
+      <p:sp>
+        <p:nvSpPr>
+          <p:cNvPr id="6" name="Rounded Rectangle 5"/>
+          <p:cNvSpPr/>
+          <p:nvPr/>
+        </p:nvSpPr>
+        <p:spPr>
+          <a:xfrm>
+            <a:off x="731520" y="1097280"/>
+            <a:ext cx="1051560" cy="274320"/>
+          </a:xfrm>
+          <a:prstGeom prst="roundRect">
+            <a:avLst>
+              <a:gd name="adj" fmla="val 28000"/>
+            </a:avLst>
+          </a:prstGeom>
+          <a:solidFill>
+            <a:srgbClr val="7A8F54"/>
+          </a:solidFill>
+          <a:ln>
+            <a:noFill/>
+          </a:ln>
+        </p:spPr>
+        <p:style>
+          <a:lnRef idx="1">
+            <a:schemeClr val="accent1"/>
+          </a:lnRef>
+          <a:fillRef idx="3">
+            <a:schemeClr val="accent1"/>
+          </a:fillRef>
+          <a:effectRef idx="2">
+            <a:schemeClr val="accent1"/>
+          </a:effectRef>
+          <a:fontRef idx="minor">
+            <a:schemeClr val="lt1"/>
+          </a:fontRef>
+        </p:style>
+        <p:txBody>
+          <a:bodyPr rtlCol="0" anchor="ctr" wrap="none"/>
+          <a:lstStyle/>
+          <a:p>
+            <a:pPr algn="ctr"/>
+            <a:r>
+              <a:rPr sz="1200" b="1" lang="en-US" altLang="en-US">
+                <a:solidFill>
+                  <a:srgbClr val="FFFFFF"/>
+                </a:solidFill>
+                <a:latin typeface="Sarabun"/>
+                <a:ea typeface="Sarabun"/>
+                <a:cs typeface="Sarabun"/>
+              </a:rPr>
+              <a:t>You</a:t>
+            </a:r>
+          </a:p>
+        </p:txBody>
+      </p:sp>
+      <p:sp>
+        <p:nvSpPr>
+          <p:cNvPr id="7" name="TextBox 6"/>
           <p:cNvSpPr txBox="1"/>
           <p:nvPr/>
         </p:nvSpPr>
         <p:spPr>
           <a:xfrm>
-            <a:off x="932688" y="1746504"/>
-            <a:ext cx="6705295" cy="228600"/>
+            <a:off x="1965960" y="1069848"/>
+            <a:ext cx="5836615" cy="228600"/>
           </a:xfrm>
           <a:prstGeom prst="rect">
             <a:avLst/>
@@ -11555,32 +11776,108 @@
           <a:p>
             <a:pPr algn="l"/>
             <a:r>
-              <a:rPr sz="1700" b="1" i="0" lang="en-US" altLang="en-US">
-                <a:solidFill>
-                  <a:srgbClr val="C96F4A"/>
-                </a:solidFill>
-                <a:latin typeface="Sarabun"/>
-                <a:ea typeface="Sarabun"/>
-                <a:cs typeface="Sarabun"/>
-              </a:rPr>
-              <a:t>Next steps</a:t>
-            </a:r>
-          </a:p>
-        </p:txBody>
-      </p:sp>
-      <p:sp>
-        <p:nvSpPr>
-          <p:cNvPr id="7" name="Oval 6"/>
+              <a:rPr sz="1700" b="0" i="0" lang="th-TH" altLang="en-US">
+                <a:solidFill>
+                  <a:srgbClr val="24333D"/>
+                </a:solidFill>
+                <a:latin typeface="Sarabun"/>
+                <a:ea typeface="Sarabun"/>
+                <a:cs typeface="Sarabun"/>
+              </a:rPr>
+              <a:t>สวัสดีครับ</a:t>
+            </a:r>
+          </a:p>
+        </p:txBody>
+      </p:sp>
+      <p:sp>
+        <p:nvSpPr>
+          <p:cNvPr id="8" name="TextBox 7"/>
+          <p:cNvSpPr txBox="1"/>
+          <p:nvPr/>
+        </p:nvSpPr>
+        <p:spPr>
+          <a:xfrm>
+            <a:off x="1965960" y="1298448"/>
+            <a:ext cx="5836615" cy="201168"/>
+          </a:xfrm>
+          <a:prstGeom prst="rect">
+            <a:avLst/>
+          </a:prstGeom>
+          <a:noFill/>
+        </p:spPr>
+        <p:txBody>
+          <a:bodyPr wrap="square" anchor="t">
+            <a:spAutoFit/>
+          </a:bodyPr>
+          <a:lstStyle/>
+          <a:p>
+            <a:pPr algn="l"/>
+            <a:r>
+              <a:rPr sz="1700" b="0" i="1" lang="en-US" altLang="en-US">
+                <a:solidFill>
+                  <a:srgbClr val="566873"/>
+                </a:solidFill>
+                <a:latin typeface="Sarabun"/>
+                <a:ea typeface="Sarabun"/>
+                <a:cs typeface="Sarabun"/>
+              </a:rPr>
+              <a:t>sà-wàt-dii khráp</a:t>
+            </a:r>
+          </a:p>
+        </p:txBody>
+      </p:sp>
+      <p:sp>
+        <p:nvSpPr>
+          <p:cNvPr id="9" name="TextBox 8"/>
+          <p:cNvSpPr txBox="1"/>
+          <p:nvPr/>
+        </p:nvSpPr>
+        <p:spPr>
+          <a:xfrm>
+            <a:off x="1965960" y="1499616"/>
+            <a:ext cx="5836615" cy="201168"/>
+          </a:xfrm>
+          <a:prstGeom prst="rect">
+            <a:avLst/>
+          </a:prstGeom>
+          <a:noFill/>
+        </p:spPr>
+        <p:txBody>
+          <a:bodyPr wrap="square" anchor="t">
+            <a:spAutoFit/>
+          </a:bodyPr>
+          <a:lstStyle/>
+          <a:p>
+            <a:pPr algn="l"/>
+            <a:r>
+              <a:rPr sz="1700" b="0" i="0" lang="en-US" altLang="en-US">
+                <a:solidFill>
+                  <a:srgbClr val="566873"/>
+                </a:solidFill>
+                <a:latin typeface="Sarabun"/>
+                <a:ea typeface="Sarabun"/>
+                <a:cs typeface="Sarabun"/>
+              </a:rPr>
+              <a:t>Hello.</a:t>
+            </a:r>
+          </a:p>
+        </p:txBody>
+      </p:sp>
+      <p:sp>
+        <p:nvSpPr>
+          <p:cNvPr id="10" name="Rounded Rectangle 9"/>
           <p:cNvSpPr/>
           <p:nvPr/>
         </p:nvSpPr>
         <p:spPr>
           <a:xfrm>
-            <a:off x="932688" y="2130552"/>
-            <a:ext cx="82296" cy="82296"/>
-          </a:xfrm>
-          <a:prstGeom prst="ellipse">
-            <a:avLst/>
+            <a:off x="731520" y="2011680"/>
+            <a:ext cx="1051560" cy="274320"/>
+          </a:xfrm>
+          <a:prstGeom prst="roundRect">
+            <a:avLst>
+              <a:gd name="adj" fmla="val 28000"/>
+            </a:avLst>
           </a:prstGeom>
           <a:solidFill>
             <a:srgbClr val="C96F4A"/>
@@ -11604,23 +11901,34 @@
           </a:fontRef>
         </p:style>
         <p:txBody>
-          <a:bodyPr rtlCol="0" anchor="ctr"/>
+          <a:bodyPr rtlCol="0" anchor="ctr" wrap="none"/>
           <a:lstStyle/>
           <a:p>
             <a:pPr algn="ctr"/>
-          </a:p>
-        </p:txBody>
-      </p:sp>
-      <p:sp>
-        <p:nvSpPr>
-          <p:cNvPr id="8" name="TextBox 7"/>
+            <a:r>
+              <a:rPr sz="1200" b="1" lang="en-US" altLang="en-US">
+                <a:solidFill>
+                  <a:srgbClr val="FFFFFF"/>
+                </a:solidFill>
+                <a:latin typeface="Sarabun"/>
+                <a:ea typeface="Sarabun"/>
+                <a:cs typeface="Sarabun"/>
+              </a:rPr>
+              <a:t>Staff</a:t>
+            </a:r>
+          </a:p>
+        </p:txBody>
+      </p:sp>
+      <p:sp>
+        <p:nvSpPr>
+          <p:cNvPr id="11" name="TextBox 10"/>
           <p:cNvSpPr txBox="1"/>
           <p:nvPr/>
         </p:nvSpPr>
         <p:spPr>
           <a:xfrm>
-            <a:off x="1078992" y="2039112"/>
-            <a:ext cx="6568135" cy="676656"/>
+            <a:off x="1965960" y="1984248"/>
+            <a:ext cx="5836615" cy="228600"/>
           </a:xfrm>
           <a:prstGeom prst="rect">
             <a:avLst/>
@@ -11635,32 +11943,275 @@
           <a:p>
             <a:pPr algn="l"/>
             <a:r>
+              <a:rPr sz="1700" b="0" i="0" lang="th-TH" altLang="en-US">
+                <a:solidFill>
+                  <a:srgbClr val="24333D"/>
+                </a:solidFill>
+                <a:latin typeface="Sarabun"/>
+                <a:ea typeface="Sarabun"/>
+                <a:cs typeface="Sarabun"/>
+              </a:rPr>
+              <a:t>สวัสดีค่ะ เบอร์ห้องอะไรคะ</a:t>
+            </a:r>
+          </a:p>
+        </p:txBody>
+      </p:sp>
+      <p:sp>
+        <p:nvSpPr>
+          <p:cNvPr id="12" name="TextBox 11"/>
+          <p:cNvSpPr txBox="1"/>
+          <p:nvPr/>
+        </p:nvSpPr>
+        <p:spPr>
+          <a:xfrm>
+            <a:off x="1965960" y="2212848"/>
+            <a:ext cx="5836615" cy="201168"/>
+          </a:xfrm>
+          <a:prstGeom prst="rect">
+            <a:avLst/>
+          </a:prstGeom>
+          <a:noFill/>
+        </p:spPr>
+        <p:txBody>
+          <a:bodyPr wrap="square" anchor="t">
+            <a:spAutoFit/>
+          </a:bodyPr>
+          <a:lstStyle/>
+          <a:p>
+            <a:pPr algn="l"/>
+            <a:r>
+              <a:rPr sz="1700" b="0" i="1" lang="en-US" altLang="en-US">
+                <a:solidFill>
+                  <a:srgbClr val="566873"/>
+                </a:solidFill>
+                <a:latin typeface="Sarabun"/>
+                <a:ea typeface="Sarabun"/>
+                <a:cs typeface="Sarabun"/>
+              </a:rPr>
+              <a:t>sà-wàt-dii khâ ber hâwng à-rai khá</a:t>
+            </a:r>
+          </a:p>
+        </p:txBody>
+      </p:sp>
+      <p:sp>
+        <p:nvSpPr>
+          <p:cNvPr id="13" name="TextBox 12"/>
+          <p:cNvSpPr txBox="1"/>
+          <p:nvPr/>
+        </p:nvSpPr>
+        <p:spPr>
+          <a:xfrm>
+            <a:off x="1965960" y="2414016"/>
+            <a:ext cx="5836615" cy="201168"/>
+          </a:xfrm>
+          <a:prstGeom prst="rect">
+            <a:avLst/>
+          </a:prstGeom>
+          <a:noFill/>
+        </p:spPr>
+        <p:txBody>
+          <a:bodyPr wrap="square" anchor="t">
+            <a:spAutoFit/>
+          </a:bodyPr>
+          <a:lstStyle/>
+          <a:p>
+            <a:pPr algn="l"/>
+            <a:r>
               <a:rPr sz="1700" b="0" i="0" lang="en-US" altLang="en-US">
                 <a:solidFill>
+                  <a:srgbClr val="566873"/>
+                </a:solidFill>
+                <a:latin typeface="Sarabun"/>
+                <a:ea typeface="Sarabun"/>
+                <a:cs typeface="Sarabun"/>
+              </a:rPr>
+              <a:t>Hello. What room number?</a:t>
+            </a:r>
+          </a:p>
+        </p:txBody>
+      </p:sp>
+      <p:sp>
+        <p:nvSpPr>
+          <p:cNvPr id="14" name="Rounded Rectangle 13"/>
+          <p:cNvSpPr/>
+          <p:nvPr/>
+        </p:nvSpPr>
+        <p:spPr>
+          <a:xfrm>
+            <a:off x="731520" y="2926080"/>
+            <a:ext cx="1051560" cy="274320"/>
+          </a:xfrm>
+          <a:prstGeom prst="roundRect">
+            <a:avLst>
+              <a:gd name="adj" fmla="val 28000"/>
+            </a:avLst>
+          </a:prstGeom>
+          <a:solidFill>
+            <a:srgbClr val="7A8F54"/>
+          </a:solidFill>
+          <a:ln>
+            <a:noFill/>
+          </a:ln>
+        </p:spPr>
+        <p:style>
+          <a:lnRef idx="1">
+            <a:schemeClr val="accent1"/>
+          </a:lnRef>
+          <a:fillRef idx="3">
+            <a:schemeClr val="accent1"/>
+          </a:fillRef>
+          <a:effectRef idx="2">
+            <a:schemeClr val="accent1"/>
+          </a:effectRef>
+          <a:fontRef idx="minor">
+            <a:schemeClr val="lt1"/>
+          </a:fontRef>
+        </p:style>
+        <p:txBody>
+          <a:bodyPr rtlCol="0" anchor="ctr" wrap="none"/>
+          <a:lstStyle/>
+          <a:p>
+            <a:pPr algn="ctr"/>
+            <a:r>
+              <a:rPr sz="1200" b="1" lang="en-US" altLang="en-US">
+                <a:solidFill>
+                  <a:srgbClr val="FFFFFF"/>
+                </a:solidFill>
+                <a:latin typeface="Sarabun"/>
+                <a:ea typeface="Sarabun"/>
+                <a:cs typeface="Sarabun"/>
+              </a:rPr>
+              <a:t>You</a:t>
+            </a:r>
+          </a:p>
+        </p:txBody>
+      </p:sp>
+      <p:sp>
+        <p:nvSpPr>
+          <p:cNvPr id="15" name="TextBox 14"/>
+          <p:cNvSpPr txBox="1"/>
+          <p:nvPr/>
+        </p:nvSpPr>
+        <p:spPr>
+          <a:xfrm>
+            <a:off x="1965960" y="2898648"/>
+            <a:ext cx="8823960" cy="228600"/>
+          </a:xfrm>
+          <a:prstGeom prst="rect">
+            <a:avLst/>
+          </a:prstGeom>
+          <a:noFill/>
+        </p:spPr>
+        <p:txBody>
+          <a:bodyPr wrap="square" anchor="t">
+            <a:spAutoFit/>
+          </a:bodyPr>
+          <a:lstStyle/>
+          <a:p>
+            <a:pPr algn="l"/>
+            <a:r>
+              <a:rPr sz="1700" b="0" i="0" lang="th-TH" altLang="en-US">
+                <a:solidFill>
                   <a:srgbClr val="24333D"/>
                 </a:solidFill>
                 <a:latin typeface="Sarabun"/>
                 <a:ea typeface="Sarabun"/>
                 <a:cs typeface="Sarabun"/>
               </a:rPr>
-              <a:t>By the end, you can count 0-10, ask what number, say your age, and handle digit-by-digit codes like room numbers.</a:t>
-            </a:r>
-          </a:p>
-        </p:txBody>
-      </p:sp>
-      <p:sp>
-        <p:nvSpPr>
-          <p:cNvPr id="9" name="Oval 8"/>
+              <a:t>ห้า-ศูนย์-สองครับ</a:t>
+            </a:r>
+          </a:p>
+        </p:txBody>
+      </p:sp>
+      <p:sp>
+        <p:nvSpPr>
+          <p:cNvPr id="16" name="TextBox 15"/>
+          <p:cNvSpPr txBox="1"/>
+          <p:nvPr/>
+        </p:nvSpPr>
+        <p:spPr>
+          <a:xfrm>
+            <a:off x="1965960" y="3127248"/>
+            <a:ext cx="8823960" cy="201168"/>
+          </a:xfrm>
+          <a:prstGeom prst="rect">
+            <a:avLst/>
+          </a:prstGeom>
+          <a:noFill/>
+        </p:spPr>
+        <p:txBody>
+          <a:bodyPr wrap="square" anchor="t">
+            <a:spAutoFit/>
+          </a:bodyPr>
+          <a:lstStyle/>
+          <a:p>
+            <a:pPr algn="l"/>
+            <a:r>
+              <a:rPr sz="1700" b="0" i="1" lang="en-US" altLang="en-US">
+                <a:solidFill>
+                  <a:srgbClr val="566873"/>
+                </a:solidFill>
+                <a:latin typeface="Sarabun"/>
+                <a:ea typeface="Sarabun"/>
+                <a:cs typeface="Sarabun"/>
+              </a:rPr>
+              <a:t>hâa-sǔun-sǎawng khráp</a:t>
+            </a:r>
+          </a:p>
+        </p:txBody>
+      </p:sp>
+      <p:sp>
+        <p:nvSpPr>
+          <p:cNvPr id="17" name="TextBox 16"/>
+          <p:cNvSpPr txBox="1"/>
+          <p:nvPr/>
+        </p:nvSpPr>
+        <p:spPr>
+          <a:xfrm>
+            <a:off x="1965960" y="3328416"/>
+            <a:ext cx="8823960" cy="201168"/>
+          </a:xfrm>
+          <a:prstGeom prst="rect">
+            <a:avLst/>
+          </a:prstGeom>
+          <a:noFill/>
+        </p:spPr>
+        <p:txBody>
+          <a:bodyPr wrap="square" anchor="t">
+            <a:spAutoFit/>
+          </a:bodyPr>
+          <a:lstStyle/>
+          <a:p>
+            <a:pPr algn="l"/>
+            <a:r>
+              <a:rPr sz="1700" b="0" i="0" lang="en-US" altLang="en-US">
+                <a:solidFill>
+                  <a:srgbClr val="566873"/>
+                </a:solidFill>
+                <a:latin typeface="Sarabun"/>
+                <a:ea typeface="Sarabun"/>
+                <a:cs typeface="Sarabun"/>
+              </a:rPr>
+              <a:t>502.</a:t>
+            </a:r>
+          </a:p>
+        </p:txBody>
+      </p:sp>
+      <p:sp>
+        <p:nvSpPr>
+          <p:cNvPr id="18" name="Rounded Rectangle 17"/>
           <p:cNvSpPr/>
           <p:nvPr/>
         </p:nvSpPr>
         <p:spPr>
           <a:xfrm>
-            <a:off x="932688" y="2862072"/>
-            <a:ext cx="82296" cy="82296"/>
-          </a:xfrm>
-          <a:prstGeom prst="ellipse">
-            <a:avLst/>
+            <a:off x="731520" y="3840480"/>
+            <a:ext cx="1051560" cy="274320"/>
+          </a:xfrm>
+          <a:prstGeom prst="roundRect">
+            <a:avLst>
+              <a:gd name="adj" fmla="val 28000"/>
+            </a:avLst>
           </a:prstGeom>
           <a:solidFill>
             <a:srgbClr val="C96F4A"/>
@@ -11684,23 +12235,34 @@
           </a:fontRef>
         </p:style>
         <p:txBody>
-          <a:bodyPr rtlCol="0" anchor="ctr"/>
+          <a:bodyPr rtlCol="0" anchor="ctr" wrap="none"/>
           <a:lstStyle/>
           <a:p>
             <a:pPr algn="ctr"/>
-          </a:p>
-        </p:txBody>
-      </p:sp>
-      <p:sp>
-        <p:nvSpPr>
-          <p:cNvPr id="10" name="TextBox 9"/>
+            <a:r>
+              <a:rPr sz="1200" b="1" lang="en-US" altLang="en-US">
+                <a:solidFill>
+                  <a:srgbClr val="FFFFFF"/>
+                </a:solidFill>
+                <a:latin typeface="Sarabun"/>
+                <a:ea typeface="Sarabun"/>
+                <a:cs typeface="Sarabun"/>
+              </a:rPr>
+              <a:t>Staff</a:t>
+            </a:r>
+          </a:p>
+        </p:txBody>
+      </p:sp>
+      <p:sp>
+        <p:nvSpPr>
+          <p:cNvPr id="19" name="TextBox 18"/>
           <p:cNvSpPr txBox="1"/>
           <p:nvPr/>
         </p:nvSpPr>
         <p:spPr>
           <a:xfrm>
-            <a:off x="1078992" y="2770632"/>
-            <a:ext cx="6568135" cy="274320"/>
+            <a:off x="1965960" y="3813048"/>
+            <a:ext cx="8823960" cy="228600"/>
           </a:xfrm>
           <a:prstGeom prst="rect">
             <a:avLst/>
@@ -11715,15 +12277,256 @@
           <a:p>
             <a:pPr algn="l"/>
             <a:r>
+              <a:rPr sz="1700" b="0" i="0" lang="th-TH" altLang="en-US">
+                <a:solidFill>
+                  <a:srgbClr val="24333D"/>
+                </a:solidFill>
+                <a:latin typeface="Sarabun"/>
+                <a:ea typeface="Sarabun"/>
+                <a:cs typeface="Sarabun"/>
+              </a:rPr>
+              <a:t>ค่ะ คุณอายุเท่าไหร่คะ</a:t>
+            </a:r>
+          </a:p>
+        </p:txBody>
+      </p:sp>
+      <p:sp>
+        <p:nvSpPr>
+          <p:cNvPr id="20" name="TextBox 19"/>
+          <p:cNvSpPr txBox="1"/>
+          <p:nvPr/>
+        </p:nvSpPr>
+        <p:spPr>
+          <a:xfrm>
+            <a:off x="1965960" y="4041648"/>
+            <a:ext cx="8823960" cy="201168"/>
+          </a:xfrm>
+          <a:prstGeom prst="rect">
+            <a:avLst/>
+          </a:prstGeom>
+          <a:noFill/>
+        </p:spPr>
+        <p:txBody>
+          <a:bodyPr wrap="square" anchor="t">
+            <a:spAutoFit/>
+          </a:bodyPr>
+          <a:lstStyle/>
+          <a:p>
+            <a:pPr algn="l"/>
+            <a:r>
+              <a:rPr sz="1700" b="0" i="1" lang="en-US" altLang="en-US">
+                <a:solidFill>
+                  <a:srgbClr val="566873"/>
+                </a:solidFill>
+                <a:latin typeface="Sarabun"/>
+                <a:ea typeface="Sarabun"/>
+                <a:cs typeface="Sarabun"/>
+              </a:rPr>
+              <a:t>khâ khun aa-yú thâo-rài khá</a:t>
+            </a:r>
+          </a:p>
+        </p:txBody>
+      </p:sp>
+      <p:sp>
+        <p:nvSpPr>
+          <p:cNvPr id="21" name="TextBox 20"/>
+          <p:cNvSpPr txBox="1"/>
+          <p:nvPr/>
+        </p:nvSpPr>
+        <p:spPr>
+          <a:xfrm>
+            <a:off x="1965960" y="4242816"/>
+            <a:ext cx="8823960" cy="201168"/>
+          </a:xfrm>
+          <a:prstGeom prst="rect">
+            <a:avLst/>
+          </a:prstGeom>
+          <a:noFill/>
+        </p:spPr>
+        <p:txBody>
+          <a:bodyPr wrap="square" anchor="t">
+            <a:spAutoFit/>
+          </a:bodyPr>
+          <a:lstStyle/>
+          <a:p>
+            <a:pPr algn="l"/>
+            <a:r>
               <a:rPr sz="1700" b="0" i="0" lang="en-US" altLang="en-US">
                 <a:solidFill>
+                  <a:srgbClr val="566873"/>
+                </a:solidFill>
+                <a:latin typeface="Sarabun"/>
+                <a:ea typeface="Sarabun"/>
+                <a:cs typeface="Sarabun"/>
+              </a:rPr>
+              <a:t>How old are you?</a:t>
+            </a:r>
+          </a:p>
+        </p:txBody>
+      </p:sp>
+      <p:sp>
+        <p:nvSpPr>
+          <p:cNvPr id="22" name="Rounded Rectangle 21"/>
+          <p:cNvSpPr/>
+          <p:nvPr/>
+        </p:nvSpPr>
+        <p:spPr>
+          <a:xfrm>
+            <a:off x="731520" y="4754880"/>
+            <a:ext cx="1051560" cy="274320"/>
+          </a:xfrm>
+          <a:prstGeom prst="roundRect">
+            <a:avLst>
+              <a:gd name="adj" fmla="val 28000"/>
+            </a:avLst>
+          </a:prstGeom>
+          <a:solidFill>
+            <a:srgbClr val="7A8F54"/>
+          </a:solidFill>
+          <a:ln>
+            <a:noFill/>
+          </a:ln>
+        </p:spPr>
+        <p:style>
+          <a:lnRef idx="1">
+            <a:schemeClr val="accent1"/>
+          </a:lnRef>
+          <a:fillRef idx="3">
+            <a:schemeClr val="accent1"/>
+          </a:fillRef>
+          <a:effectRef idx="2">
+            <a:schemeClr val="accent1"/>
+          </a:effectRef>
+          <a:fontRef idx="minor">
+            <a:schemeClr val="lt1"/>
+          </a:fontRef>
+        </p:style>
+        <p:txBody>
+          <a:bodyPr rtlCol="0" anchor="ctr" wrap="none"/>
+          <a:lstStyle/>
+          <a:p>
+            <a:pPr algn="ctr"/>
+            <a:r>
+              <a:rPr sz="1200" b="1" lang="en-US" altLang="en-US">
+                <a:solidFill>
+                  <a:srgbClr val="FFFFFF"/>
+                </a:solidFill>
+                <a:latin typeface="Sarabun"/>
+                <a:ea typeface="Sarabun"/>
+                <a:cs typeface="Sarabun"/>
+              </a:rPr>
+              <a:t>You</a:t>
+            </a:r>
+          </a:p>
+        </p:txBody>
+      </p:sp>
+      <p:sp>
+        <p:nvSpPr>
+          <p:cNvPr id="23" name="TextBox 22"/>
+          <p:cNvSpPr txBox="1"/>
+          <p:nvPr/>
+        </p:nvSpPr>
+        <p:spPr>
+          <a:xfrm>
+            <a:off x="1965960" y="4727448"/>
+            <a:ext cx="8823960" cy="228600"/>
+          </a:xfrm>
+          <a:prstGeom prst="rect">
+            <a:avLst/>
+          </a:prstGeom>
+          <a:noFill/>
+        </p:spPr>
+        <p:txBody>
+          <a:bodyPr wrap="square" anchor="t">
+            <a:spAutoFit/>
+          </a:bodyPr>
+          <a:lstStyle/>
+          <a:p>
+            <a:pPr algn="l"/>
+            <a:r>
+              <a:rPr sz="1700" b="0" i="0" lang="th-TH" altLang="en-US">
+                <a:solidFill>
                   <a:srgbClr val="24333D"/>
                 </a:solidFill>
                 <a:latin typeface="Sarabun"/>
                 <a:ea typeface="Sarabun"/>
                 <a:cs typeface="Sarabun"/>
               </a:rPr>
-              <a:t>Next: First Contact and Courtesy continues.</a:t>
+              <a:t>ผมอายุสามสิบปีครับ</a:t>
+            </a:r>
+          </a:p>
+        </p:txBody>
+      </p:sp>
+      <p:sp>
+        <p:nvSpPr>
+          <p:cNvPr id="24" name="TextBox 23"/>
+          <p:cNvSpPr txBox="1"/>
+          <p:nvPr/>
+        </p:nvSpPr>
+        <p:spPr>
+          <a:xfrm>
+            <a:off x="1965960" y="4956048"/>
+            <a:ext cx="8823960" cy="201168"/>
+          </a:xfrm>
+          <a:prstGeom prst="rect">
+            <a:avLst/>
+          </a:prstGeom>
+          <a:noFill/>
+        </p:spPr>
+        <p:txBody>
+          <a:bodyPr wrap="square" anchor="t">
+            <a:spAutoFit/>
+          </a:bodyPr>
+          <a:lstStyle/>
+          <a:p>
+            <a:pPr algn="l"/>
+            <a:r>
+              <a:rPr sz="1700" b="0" i="1" lang="en-US" altLang="en-US">
+                <a:solidFill>
+                  <a:srgbClr val="566873"/>
+                </a:solidFill>
+                <a:latin typeface="Sarabun"/>
+                <a:ea typeface="Sarabun"/>
+                <a:cs typeface="Sarabun"/>
+              </a:rPr>
+              <a:t>phǒm aa-yú sǎam-sìp bpii khráp</a:t>
+            </a:r>
+          </a:p>
+        </p:txBody>
+      </p:sp>
+      <p:sp>
+        <p:nvSpPr>
+          <p:cNvPr id="25" name="TextBox 24"/>
+          <p:cNvSpPr txBox="1"/>
+          <p:nvPr/>
+        </p:nvSpPr>
+        <p:spPr>
+          <a:xfrm>
+            <a:off x="1965960" y="5157216"/>
+            <a:ext cx="8823960" cy="201168"/>
+          </a:xfrm>
+          <a:prstGeom prst="rect">
+            <a:avLst/>
+          </a:prstGeom>
+          <a:noFill/>
+        </p:spPr>
+        <p:txBody>
+          <a:bodyPr wrap="square" anchor="t">
+            <a:spAutoFit/>
+          </a:bodyPr>
+          <a:lstStyle/>
+          <a:p>
+            <a:pPr algn="l"/>
+            <a:r>
+              <a:rPr sz="1700" b="0" i="0" lang="en-US" altLang="en-US">
+                <a:solidFill>
+                  <a:srgbClr val="566873"/>
+                </a:solidFill>
+                <a:latin typeface="Sarabun"/>
+                <a:ea typeface="Sarabun"/>
+                <a:cs typeface="Sarabun"/>
+              </a:rPr>
+              <a:t>I am thirty.</a:t>
             </a:r>
           </a:p>
         </p:txBody>

--- a/course/modules/M01/L004/M01-L004-canva-deck.pptx
+++ b/course/modules/M01/L004/M01-L004-canva-deck.pptx
@@ -519,7 +519,17 @@
           </a:p>
           <a:p>
             <a:r>
-              <a:t>• Teach the first six Thai digits with listen-repeat-use.</a:t>
+              <a:t>• Listen and repeat: ศูนย์, หนึ่ง, สอง. Say each one clearly after me.</a:t>
+            </a:r>
+          </a:p>
+          <a:p>
+            <a:r>
+              <a:t>• Pause-and-produce: count from zero to two in Thai. Go.</a:t>
+            </a:r>
+          </a:p>
+          <a:p>
+            <a:r>
+              <a:t>• Discrimination drill: I say a number. Is it ศูนย์, หนึ่ง, or สอง? Point to the answer.</a:t>
             </a:r>
           </a:p>
           <a:p/>
@@ -597,17 +607,17 @@
           </a:p>
           <a:p>
             <a:r>
-              <a:t>• Listen and repeat: ศูนย์, หนึ่ง, สอง, สาม, สี่, ห้า. Now backwards.</a:t>
-            </a:r>
-          </a:p>
-          <a:p>
-            <a:r>
-              <a:t>• Pause-and-produce: I say a number in English. Say the Thai before I show it. Two. Four. Zero. Five.</a:t>
-            </a:r>
-          </a:p>
-          <a:p>
-            <a:r>
-              <a:t>• Room number drill: room 301? สาม-ศูนย์-หนึ่ง. Room 205? สอง-ศูนย์-ห้า. Your turn.</a:t>
+              <a:t>• Listen and repeat: สาม, สี่, ห้า. Say each one after me.</a:t>
+            </a:r>
+          </a:p>
+          <a:p>
+            <a:r>
+              <a:t>• Pause-and-produce: count from zero to five in Thai. Go.</a:t>
+            </a:r>
+          </a:p>
+          <a:p>
+            <a:r>
+              <a:t>• Substitution drill: I say a numeral. You say the Thai word. 3 — your turn. 1 — your turn. 5 — your turn. 0 — your turn.</a:t>
             </a:r>
           </a:p>
           <a:p/>
@@ -685,7 +695,17 @@
           </a:p>
           <a:p>
             <a:r>
-              <a:t>• Complete the digit set and practise the full 0-10 count in queue and floor scenarios.</a:t>
+              <a:t>• Listen and repeat: หก, เจ็ด, แปด. Say each one after me.</a:t>
+            </a:r>
+          </a:p>
+          <a:p>
+            <a:r>
+              <a:t>• Pause-and-produce: count from zero to eight. Go.</a:t>
+            </a:r>
+          </a:p>
+          <a:p>
+            <a:r>
+              <a:t>• Discrimination drill: I say a number between zero and eight. Say the English meaning before I show it.</a:t>
             </a:r>
           </a:p>
           <a:p/>
@@ -763,17 +783,22 @@
           </a:p>
           <a:p>
             <a:r>
-              <a:t>• Response-building: I ask เบอร์อะไร. Room 409? สี่-ศูนย์-เก้า. Room 108? หนึ่ง-ศูนย์-แปด.</a:t>
-            </a:r>
-          </a:p>
-          <a:p>
-            <a:r>
-              <a:t>• Substitution: build your age sentence. Thirty? ผมอายุสามสิบปีครับ. Twenty-five? ฉันอายุยี่สิบห้าปีค่ะ.</a:t>
-            </a:r>
-          </a:p>
-          <a:p>
-            <a:r>
-              <a:t>• Pause-and-produce: someone asks คุณอายุเท่าไหร่. Say your real age in Thai.</a:t>
+              <a:t>• Response-building: I ask เบอร์อะไรครับ. Give me a three-digit number using Thai digits. Your turn.</a:t>
+            </a:r>
+          </a:p>
+          <a:p>
+            <a:r>
+              <a:t>• Substitution drill: say your age using ฉันอายุ...ปี. Try with สิบ, then with เก้า, then with ห้า.</a:t>
+            </a:r>
+          </a:p>
+          <a:p>
+            <a:r>
+              <a:t>• Substitution drill: say a room number using ห้อง. Try ห้องสาม, ห้องหก, ห้องสิบ.</a:t>
+            </a:r>
+          </a:p>
+          <a:p>
+            <a:r>
+              <a:t>• Pause-and-produce: I say a room number in English. You say it in Thai. Room 4 — your turn. Room 9 — your turn.</a:t>
             </a:r>
           </a:p>
           <a:p/>
@@ -851,12 +876,12 @@
           </a:p>
           <a:p>
             <a:r>
-              <a:t>• Tone echo: สี่ sìi — repeat low. สี sǐi — repeat rising.</a:t>
-            </a:r>
-          </a:p>
-          <a:p>
-            <a:r>
-              <a:t>• Minimal pair: I say one. Is it four or colour? Answer before I show it.</a:t>
+              <a:t>• Tone echo: I say สาม. Repeat. Now I say ห้า. Repeat. Can you hear the tone difference?</a:t>
+            </a:r>
+          </a:p>
+          <a:p>
+            <a:r>
+              <a:t>• Minimal pair choice: I say two numbers. Which one has the rising tone — สาม or ห้า? Point before I tell you.</a:t>
             </a:r>
           </a:p>
           <a:p/>
@@ -4708,7 +4733,7 @@
                 <a:ea typeface="Sarabun"/>
                 <a:cs typeface="Sarabun"/>
               </a:rPr>
-              <a:t>Now 6 to 10.</a:t>
+              <a:t>Count 6 to 10 in Thai. Go.</a:t>
             </a:r>
           </a:p>
         </p:txBody>
@@ -4788,40 +4813,7 @@
                 <a:ea typeface="Sarabun"/>
                 <a:cs typeface="Sarabun"/>
               </a:rPr>
-              <a:t>Ask 'what number?' </a:t>
-            </a:r>
-            <a:r>
-              <a:rPr sz="1700" b="0" i="0" lang="th-TH" altLang="en-US">
-                <a:solidFill>
-                  <a:srgbClr val="24333D"/>
-                </a:solidFill>
-                <a:latin typeface="Sarabun"/>
-                <a:ea typeface="Sarabun"/>
-                <a:cs typeface="Sarabun"/>
-              </a:rPr>
-              <a:t>เบอร์อะไร</a:t>
-            </a:r>
-            <a:r>
-              <a:rPr sz="1700" b="0" i="1" lang="en-US" altLang="en-US">
-                <a:solidFill>
-                  <a:srgbClr val="566873"/>
-                </a:solidFill>
-                <a:latin typeface="Sarabun"/>
-                <a:ea typeface="Sarabun"/>
-                <a:cs typeface="Sarabun"/>
-              </a:rPr>
-              <a:t> (ber à-rai)</a:t>
-            </a:r>
-            <a:r>
-              <a:rPr sz="1700" b="0" i="0" lang="en-US" altLang="en-US">
-                <a:solidFill>
-                  <a:srgbClr val="24333D"/>
-                </a:solidFill>
-                <a:latin typeface="Sarabun"/>
-                <a:ea typeface="Sarabun"/>
-                <a:cs typeface="Sarabun"/>
-              </a:rPr>
-              <a:t>.</a:t>
+              <a:t>How do you ask 'what number?' in Thai?</a:t>
             </a:r>
           </a:p>
         </p:txBody>
@@ -4901,7 +4893,7 @@
                 <a:ea typeface="Sarabun"/>
                 <a:cs typeface="Sarabun"/>
               </a:rPr>
-              <a:t>Say 'I am 30 years old' in Thai.</a:t>
+              <a:t>Say 'I am ten years old' in Thai.</a:t>
             </a:r>
           </a:p>
         </p:txBody>
@@ -4973,7 +4965,7 @@
           <a:p>
             <a:pPr algn="l"/>
             <a:r>
-              <a:rPr sz="1700" b="0" i="0" lang="th-TH" altLang="en-US">
+              <a:rPr sz="1700" b="0" i="0" lang="en-US" altLang="en-US">
                 <a:solidFill>
                   <a:srgbClr val="24333D"/>
                 </a:solidFill>
@@ -4981,29 +4973,7 @@
                 <a:ea typeface="Sarabun"/>
                 <a:cs typeface="Sarabun"/>
               </a:rPr>
-              <a:t>สี่</a:t>
-            </a:r>
-            <a:r>
-              <a:rPr sz="1700" b="0" i="1" lang="en-US" altLang="en-US">
-                <a:solidFill>
-                  <a:srgbClr val="566873"/>
-                </a:solidFill>
-                <a:latin typeface="Sarabun"/>
-                <a:ea typeface="Sarabun"/>
-                <a:cs typeface="Sarabun"/>
-              </a:rPr>
-              <a:t> (sìi)</a:t>
-            </a:r>
-            <a:r>
-              <a:rPr sz="1700" b="0" i="0" lang="en-US" altLang="en-US">
-                <a:solidFill>
-                  <a:srgbClr val="24333D"/>
-                </a:solidFill>
-                <a:latin typeface="Sarabun"/>
-                <a:ea typeface="Sarabun"/>
-                <a:cs typeface="Sarabun"/>
-              </a:rPr>
-              <a:t> is low tone. Rising tone means what?</a:t>
+              <a:t>Say 'room seven' in Thai.</a:t>
             </a:r>
           </a:p>
         </p:txBody>
@@ -5112,7 +5082,7 @@
           <a:p>
             <a:pPr algn="l"/>
             <a:r>
-              <a:rPr sz="1700" b="0" i="0" lang="th-TH" altLang="en-US">
+              <a:rPr sz="1700" b="0" i="0" lang="en-US" altLang="en-US">
                 <a:solidFill>
                   <a:srgbClr val="24333D"/>
                 </a:solidFill>
@@ -5120,29 +5090,7 @@
                 <a:ea typeface="Sarabun"/>
                 <a:cs typeface="Sarabun"/>
               </a:rPr>
-              <a:t>สี่</a:t>
-            </a:r>
-            <a:r>
-              <a:rPr sz="1700" b="0" i="1" lang="en-US" altLang="en-US">
-                <a:solidFill>
-                  <a:srgbClr val="566873"/>
-                </a:solidFill>
-                <a:latin typeface="Sarabun"/>
-                <a:ea typeface="Sarabun"/>
-                <a:cs typeface="Sarabun"/>
-              </a:rPr>
-              <a:t> (sìi)</a:t>
-            </a:r>
-            <a:r>
-              <a:rPr sz="1700" b="0" i="0" lang="en-US" altLang="en-US">
-                <a:solidFill>
-                  <a:srgbClr val="24333D"/>
-                </a:solidFill>
-                <a:latin typeface="Sarabun"/>
-                <a:ea typeface="Sarabun"/>
-                <a:cs typeface="Sarabun"/>
-              </a:rPr>
-              <a:t> is low tone. Rising tone means what?</a:t>
+              <a:t>Say 'room seven' in Thai.</a:t>
             </a:r>
           </a:p>
         </p:txBody>
@@ -5436,7 +5384,7 @@
         <p:spPr>
           <a:xfrm>
             <a:off x="1078992" y="2039112"/>
-            <a:ext cx="6568135" cy="676656"/>
+            <a:ext cx="6568135" cy="475488"/>
           </a:xfrm>
           <a:prstGeom prst="rect">
             <a:avLst/>
@@ -5459,7 +5407,7 @@
                 <a:ea typeface="Sarabun"/>
                 <a:cs typeface="Sarabun"/>
               </a:rPr>
-              <a:t>By the end, you can count 0-10, ask what number, say your age, and handle digit-by-digit codes like room numbers.</a:t>
+              <a:t>By the end, you can count to ten, say your age, ask for a number, and give a room number in Thai.</a:t>
             </a:r>
           </a:p>
         </p:txBody>
@@ -5472,7 +5420,7 @@
         </p:nvSpPr>
         <p:spPr>
           <a:xfrm>
-            <a:off x="932688" y="2862072"/>
+            <a:off x="932688" y="2660904"/>
             <a:ext cx="82296" cy="82296"/>
           </a:xfrm>
           <a:prstGeom prst="ellipse">
@@ -5515,7 +5463,7 @@
         </p:nvSpPr>
         <p:spPr>
           <a:xfrm>
-            <a:off x="1078992" y="2770632"/>
+            <a:off x="1078992" y="2569464"/>
             <a:ext cx="6568135" cy="274320"/>
           </a:xfrm>
           <a:prstGeom prst="rect">
@@ -6399,7 +6347,7 @@
                 <a:ea typeface="Sarabun"/>
                 <a:cs typeface="Sarabun"/>
               </a:rPr>
-              <a:t>Digits 0 to 5</a:t>
+              <a:t>Zero, one, two</a:t>
             </a:r>
           </a:p>
         </p:txBody>
@@ -7184,7 +7132,7 @@
                 <a:ea typeface="Sarabun"/>
                 <a:cs typeface="Sarabun"/>
               </a:rPr>
-              <a:t>Digits 0 to 5</a:t>
+              <a:t>Three, four, five</a:t>
             </a:r>
           </a:p>
         </p:txBody>
@@ -7969,7 +7917,7 @@
                 <a:ea typeface="Sarabun"/>
                 <a:cs typeface="Sarabun"/>
               </a:rPr>
-              <a:t>Digits 6 to 10</a:t>
+              <a:t>Six, seven, eight</a:t>
             </a:r>
           </a:p>
         </p:txBody>
@@ -8517,7 +8465,7 @@
                 <a:ea typeface="Sarabun"/>
                 <a:cs typeface="Sarabun"/>
               </a:rPr>
-              <a:t>bpàet</a:t>
+              <a:t>bpàaet</a:t>
             </a:r>
           </a:p>
         </p:txBody>
@@ -8754,7 +8702,7 @@
                 <a:ea typeface="Sarabun"/>
                 <a:cs typeface="Sarabun"/>
               </a:rPr>
-              <a:t>Digits 6 to 10</a:t>
+              <a:t>Nine, ten — the full count</a:t>
             </a:r>
           </a:p>
         </p:txBody>
@@ -9238,7 +9186,7 @@
         <p:spPr>
           <a:xfrm>
             <a:off x="1078992" y="5413248"/>
-            <a:ext cx="9555480" cy="475488"/>
+            <a:ext cx="9555480" cy="274320"/>
           </a:xfrm>
           <a:prstGeom prst="rect">
             <a:avLst/>
@@ -9272,7 +9220,7 @@
                 <a:ea typeface="Sarabun"/>
                 <a:cs typeface="Sarabun"/>
               </a:rPr>
-              <a:t>หก</a:t>
+              <a:t>เก้า</a:t>
             </a:r>
             <a:r>
               <a:rPr sz="1700" b="0" i="1" lang="en-US" altLang="en-US">
@@ -9283,7 +9231,7 @@
                 <a:ea typeface="Sarabun"/>
                 <a:cs typeface="Sarabun"/>
               </a:rPr>
-              <a:t> (hòk)</a:t>
+              <a:t> (gâo)</a:t>
             </a:r>
             <a:r>
               <a:rPr sz="1700" b="0" i="0" lang="en-US" altLang="en-US">
@@ -9305,7 +9253,7 @@
                 <a:ea typeface="Sarabun"/>
                 <a:cs typeface="Sarabun"/>
               </a:rPr>
-              <a:t>เจ็ด</a:t>
+              <a:t>สิบ</a:t>
             </a:r>
             <a:r>
               <a:rPr sz="1700" b="0" i="1" lang="en-US" altLang="en-US">
@@ -9316,7 +9264,7 @@
                 <a:ea typeface="Sarabun"/>
                 <a:cs typeface="Sarabun"/>
               </a:rPr>
-              <a:t> (jèt)</a:t>
+              <a:t> (sìp)</a:t>
             </a:r>
             <a:r>
               <a:rPr sz="1700" b="0" i="0" lang="en-US" altLang="en-US">
@@ -9327,106 +9275,7 @@
                 <a:ea typeface="Sarabun"/>
                 <a:cs typeface="Sarabun"/>
               </a:rPr>
-              <a:t>, </a:t>
-            </a:r>
-            <a:r>
-              <a:rPr sz="1700" b="0" i="0" lang="th-TH" altLang="en-US">
-                <a:solidFill>
-                  <a:srgbClr val="24333D"/>
-                </a:solidFill>
-                <a:latin typeface="Sarabun"/>
-                <a:ea typeface="Sarabun"/>
-                <a:cs typeface="Sarabun"/>
-              </a:rPr>
-              <a:t>แปด</a:t>
-            </a:r>
-            <a:r>
-              <a:rPr sz="1700" b="0" i="1" lang="en-US" altLang="en-US">
-                <a:solidFill>
-                  <a:srgbClr val="566873"/>
-                </a:solidFill>
-                <a:latin typeface="Sarabun"/>
-                <a:ea typeface="Sarabun"/>
-                <a:cs typeface="Sarabun"/>
-              </a:rPr>
-              <a:t> (bpàet)</a:t>
-            </a:r>
-            <a:r>
-              <a:rPr sz="1700" b="0" i="0" lang="en-US" altLang="en-US">
-                <a:solidFill>
-                  <a:srgbClr val="24333D"/>
-                </a:solidFill>
-                <a:latin typeface="Sarabun"/>
-                <a:ea typeface="Sarabun"/>
-                <a:cs typeface="Sarabun"/>
-              </a:rPr>
-              <a:t>, </a:t>
-            </a:r>
-            <a:r>
-              <a:rPr sz="1700" b="0" i="0" lang="th-TH" altLang="en-US">
-                <a:solidFill>
-                  <a:srgbClr val="24333D"/>
-                </a:solidFill>
-                <a:latin typeface="Sarabun"/>
-                <a:ea typeface="Sarabun"/>
-                <a:cs typeface="Sarabun"/>
-              </a:rPr>
-              <a:t>เก้า</a:t>
-            </a:r>
-            <a:r>
-              <a:rPr sz="1700" b="0" i="1" lang="en-US" altLang="en-US">
-                <a:solidFill>
-                  <a:srgbClr val="566873"/>
-                </a:solidFill>
-                <a:latin typeface="Sarabun"/>
-                <a:ea typeface="Sarabun"/>
-                <a:cs typeface="Sarabun"/>
-              </a:rPr>
-              <a:t> (gâo)</a:t>
-            </a:r>
-            <a:r>
-              <a:rPr sz="1700" b="0" i="0" lang="en-US" altLang="en-US">
-                <a:solidFill>
-                  <a:srgbClr val="24333D"/>
-                </a:solidFill>
-                <a:latin typeface="Sarabun"/>
-                <a:ea typeface="Sarabun"/>
-                <a:cs typeface="Sarabun"/>
-              </a:rPr>
-              <a:t>, </a:t>
-            </a:r>
-            <a:r>
-              <a:rPr sz="1700" b="0" i="0" lang="th-TH" altLang="en-US">
-                <a:solidFill>
-                  <a:srgbClr val="24333D"/>
-                </a:solidFill>
-                <a:latin typeface="Sarabun"/>
-                <a:ea typeface="Sarabun"/>
-                <a:cs typeface="Sarabun"/>
-              </a:rPr>
-              <a:t>สิบ</a:t>
-            </a:r>
-            <a:r>
-              <a:rPr sz="1700" b="0" i="1" lang="en-US" altLang="en-US">
-                <a:solidFill>
-                  <a:srgbClr val="566873"/>
-                </a:solidFill>
-                <a:latin typeface="Sarabun"/>
-                <a:ea typeface="Sarabun"/>
-                <a:cs typeface="Sarabun"/>
-              </a:rPr>
-              <a:t> (sìp)</a:t>
-            </a:r>
-            <a:r>
-              <a:rPr sz="1700" b="0" i="0" lang="en-US" altLang="en-US">
-                <a:solidFill>
-                  <a:srgbClr val="24333D"/>
-                </a:solidFill>
-                <a:latin typeface="Sarabun"/>
-                <a:ea typeface="Sarabun"/>
-                <a:cs typeface="Sarabun"/>
-              </a:rPr>
-              <a:t>. Now count 0 to 10 from memory.</a:t>
+              <a:t>. Say each one after me.</a:t>
             </a:r>
           </a:p>
         </p:txBody>
@@ -9439,7 +9288,7 @@
         </p:nvSpPr>
         <p:spPr>
           <a:xfrm>
-            <a:off x="932688" y="6035040"/>
+            <a:off x="932688" y="5833872"/>
             <a:ext cx="82296" cy="82296"/>
           </a:xfrm>
           <a:prstGeom prst="ellipse">
@@ -9482,8 +9331,8 @@
         </p:nvSpPr>
         <p:spPr>
           <a:xfrm>
-            <a:off x="1078992" y="5943600"/>
-            <a:ext cx="9555480" cy="475488"/>
+            <a:off x="1078992" y="5742432"/>
+            <a:ext cx="9555480" cy="274320"/>
           </a:xfrm>
           <a:prstGeom prst="rect">
             <a:avLst/>
@@ -9506,172 +9355,7 @@
                 <a:ea typeface="Sarabun"/>
                 <a:cs typeface="Sarabun"/>
               </a:rPr>
-              <a:t>Pause-and-produce: Seven? </a:t>
-            </a:r>
-            <a:r>
-              <a:rPr sz="1700" b="0" i="0" lang="th-TH" altLang="en-US">
-                <a:solidFill>
-                  <a:srgbClr val="24333D"/>
-                </a:solidFill>
-                <a:latin typeface="Sarabun"/>
-                <a:ea typeface="Sarabun"/>
-                <a:cs typeface="Sarabun"/>
-              </a:rPr>
-              <a:t>เจ็ด</a:t>
-            </a:r>
-            <a:r>
-              <a:rPr sz="1700" b="0" i="1" lang="en-US" altLang="en-US">
-                <a:solidFill>
-                  <a:srgbClr val="566873"/>
-                </a:solidFill>
-                <a:latin typeface="Sarabun"/>
-                <a:ea typeface="Sarabun"/>
-                <a:cs typeface="Sarabun"/>
-              </a:rPr>
-              <a:t> (jèt)</a:t>
-            </a:r>
-            <a:r>
-              <a:rPr sz="1700" b="0" i="0" lang="en-US" altLang="en-US">
-                <a:solidFill>
-                  <a:srgbClr val="24333D"/>
-                </a:solidFill>
-                <a:latin typeface="Sarabun"/>
-                <a:ea typeface="Sarabun"/>
-                <a:cs typeface="Sarabun"/>
-              </a:rPr>
-              <a:t>. Ten? </a:t>
-            </a:r>
-            <a:r>
-              <a:rPr sz="1700" b="0" i="0" lang="th-TH" altLang="en-US">
-                <a:solidFill>
-                  <a:srgbClr val="24333D"/>
-                </a:solidFill>
-                <a:latin typeface="Sarabun"/>
-                <a:ea typeface="Sarabun"/>
-                <a:cs typeface="Sarabun"/>
-              </a:rPr>
-              <a:t>สิบ</a:t>
-            </a:r>
-            <a:r>
-              <a:rPr sz="1700" b="0" i="1" lang="en-US" altLang="en-US">
-                <a:solidFill>
-                  <a:srgbClr val="566873"/>
-                </a:solidFill>
-                <a:latin typeface="Sarabun"/>
-                <a:ea typeface="Sarabun"/>
-                <a:cs typeface="Sarabun"/>
-              </a:rPr>
-              <a:t> (sìp)</a:t>
-            </a:r>
-            <a:r>
-              <a:rPr sz="1700" b="0" i="0" lang="en-US" altLang="en-US">
-                <a:solidFill>
-                  <a:srgbClr val="24333D"/>
-                </a:solidFill>
-                <a:latin typeface="Sarabun"/>
-                <a:ea typeface="Sarabun"/>
-                <a:cs typeface="Sarabun"/>
-              </a:rPr>
-              <a:t>. Eight? </a:t>
-            </a:r>
-            <a:r>
-              <a:rPr sz="1700" b="0" i="0" lang="th-TH" altLang="en-US">
-                <a:solidFill>
-                  <a:srgbClr val="24333D"/>
-                </a:solidFill>
-                <a:latin typeface="Sarabun"/>
-                <a:ea typeface="Sarabun"/>
-                <a:cs typeface="Sarabun"/>
-              </a:rPr>
-              <a:t>แปด</a:t>
-            </a:r>
-            <a:r>
-              <a:rPr sz="1700" b="0" i="1" lang="en-US" altLang="en-US">
-                <a:solidFill>
-                  <a:srgbClr val="566873"/>
-                </a:solidFill>
-                <a:latin typeface="Sarabun"/>
-                <a:ea typeface="Sarabun"/>
-                <a:cs typeface="Sarabun"/>
-              </a:rPr>
-              <a:t> (bpàet)</a:t>
-            </a:r>
-            <a:r>
-              <a:rPr sz="1700" b="0" i="0" lang="en-US" altLang="en-US">
-                <a:solidFill>
-                  <a:srgbClr val="24333D"/>
-                </a:solidFill>
-                <a:latin typeface="Sarabun"/>
-                <a:ea typeface="Sarabun"/>
-                <a:cs typeface="Sarabun"/>
-              </a:rPr>
-              <a:t>. Six? </a:t>
-            </a:r>
-            <a:r>
-              <a:rPr sz="1700" b="0" i="0" lang="th-TH" altLang="en-US">
-                <a:solidFill>
-                  <a:srgbClr val="24333D"/>
-                </a:solidFill>
-                <a:latin typeface="Sarabun"/>
-                <a:ea typeface="Sarabun"/>
-                <a:cs typeface="Sarabun"/>
-              </a:rPr>
-              <a:t>หก</a:t>
-            </a:r>
-            <a:r>
-              <a:rPr sz="1700" b="0" i="1" lang="en-US" altLang="en-US">
-                <a:solidFill>
-                  <a:srgbClr val="566873"/>
-                </a:solidFill>
-                <a:latin typeface="Sarabun"/>
-                <a:ea typeface="Sarabun"/>
-                <a:cs typeface="Sarabun"/>
-              </a:rPr>
-              <a:t> (hòk)</a:t>
-            </a:r>
-            <a:r>
-              <a:rPr sz="1700" b="0" i="0" lang="en-US" altLang="en-US">
-                <a:solidFill>
-                  <a:srgbClr val="24333D"/>
-                </a:solidFill>
-                <a:latin typeface="Sarabun"/>
-                <a:ea typeface="Sarabun"/>
-                <a:cs typeface="Sarabun"/>
-              </a:rPr>
-              <a:t>. Nine? </a:t>
-            </a:r>
-            <a:r>
-              <a:rPr sz="1700" b="0" i="0" lang="th-TH" altLang="en-US">
-                <a:solidFill>
-                  <a:srgbClr val="24333D"/>
-                </a:solidFill>
-                <a:latin typeface="Sarabun"/>
-                <a:ea typeface="Sarabun"/>
-                <a:cs typeface="Sarabun"/>
-              </a:rPr>
-              <a:t>เก้า</a:t>
-            </a:r>
-            <a:r>
-              <a:rPr sz="1700" b="0" i="1" lang="en-US" altLang="en-US">
-                <a:solidFill>
-                  <a:srgbClr val="566873"/>
-                </a:solidFill>
-                <a:latin typeface="Sarabun"/>
-                <a:ea typeface="Sarabun"/>
-                <a:cs typeface="Sarabun"/>
-              </a:rPr>
-              <a:t> (gâo)</a:t>
-            </a:r>
-            <a:r>
-              <a:rPr sz="1700" b="0" i="0" lang="en-US" altLang="en-US">
-                <a:solidFill>
-                  <a:srgbClr val="24333D"/>
-                </a:solidFill>
-                <a:latin typeface="Sarabun"/>
-                <a:ea typeface="Sarabun"/>
-                <a:cs typeface="Sarabun"/>
-              </a:rPr>
-              <a:t>.</a:t>
+              <a:t>Pause-and-produce: count from zero to ten in Thai. The full sequence. Go.</a:t>
             </a:r>
           </a:p>
         </p:txBody>
@@ -9871,7 +9555,7 @@
                 <a:ea typeface="Sarabun"/>
                 <a:cs typeface="Sarabun"/>
               </a:rPr>
-              <a:t>Ask what number and say your age</a:t>
+              <a:t>Numbers in real life</a:t>
             </a:r>
           </a:p>
         </p:txBody>
@@ -10079,7 +9763,7 @@
         </p:nvSpPr>
         <p:spPr>
           <a:xfrm>
-            <a:off x="731520" y="2606040"/>
+            <a:off x="731520" y="3081528"/>
             <a:ext cx="7071055" cy="1572768"/>
           </a:xfrm>
           <a:prstGeom prst="roundRect">
@@ -10120,7 +9804,7 @@
         </p:nvSpPr>
         <p:spPr>
           <a:xfrm>
-            <a:off x="868680" y="2807208"/>
+            <a:off x="868680" y="3282696"/>
             <a:ext cx="73152" cy="1143000"/>
           </a:xfrm>
           <a:prstGeom prst="rect">
@@ -10163,7 +9847,7 @@
         </p:nvSpPr>
         <p:spPr>
           <a:xfrm>
-            <a:off x="1078992" y="2743200"/>
+            <a:off x="1078992" y="3218688"/>
             <a:ext cx="6613855" cy="320040"/>
           </a:xfrm>
           <a:prstGeom prst="rect">
@@ -10187,7 +9871,7 @@
                 <a:ea typeface="Sarabun"/>
                 <a:cs typeface="Sarabun"/>
               </a:rPr>
-              <a:t>อายุ...ปี</a:t>
+              <a:t>ฉันอายุ...ปี</a:t>
             </a:r>
           </a:p>
         </p:txBody>
@@ -10200,7 +9884,7 @@
         </p:nvSpPr>
         <p:spPr>
           <a:xfrm>
-            <a:off x="1078992" y="3108960"/>
+            <a:off x="1078992" y="3584448"/>
             <a:ext cx="6613855" cy="274320"/>
           </a:xfrm>
           <a:prstGeom prst="rect">
@@ -10224,7 +9908,7 @@
                 <a:ea typeface="Sarabun"/>
                 <a:cs typeface="Sarabun"/>
               </a:rPr>
-              <a:t>aa-yú ... bpii</a:t>
+              <a:t>chǎn aa-yú ... bpii</a:t>
             </a:r>
           </a:p>
         </p:txBody>
@@ -10237,7 +9921,7 @@
         </p:nvSpPr>
         <p:spPr>
           <a:xfrm>
-            <a:off x="1078992" y="3483864"/>
+            <a:off x="1078992" y="3959352"/>
             <a:ext cx="6613855" cy="274320"/>
           </a:xfrm>
           <a:prstGeom prst="rect">
@@ -10261,7 +9945,7 @@
                 <a:ea typeface="Sarabun"/>
                 <a:cs typeface="Sarabun"/>
               </a:rPr>
-              <a:t>... years old</a:t>
+              <a:t>I am ... years old</a:t>
             </a:r>
           </a:p>
         </p:txBody>
@@ -10274,7 +9958,7 @@
         </p:nvSpPr>
         <p:spPr>
           <a:xfrm>
-            <a:off x="731520" y="3886200"/>
+            <a:off x="731520" y="4837176"/>
             <a:ext cx="7071055" cy="1572768"/>
           </a:xfrm>
           <a:prstGeom prst="roundRect">
@@ -10315,7 +9999,7 @@
         </p:nvSpPr>
         <p:spPr>
           <a:xfrm>
-            <a:off x="868680" y="4087368"/>
+            <a:off x="868680" y="5038344"/>
             <a:ext cx="73152" cy="1143000"/>
           </a:xfrm>
           <a:prstGeom prst="rect">
@@ -10358,7 +10042,7 @@
         </p:nvSpPr>
         <p:spPr>
           <a:xfrm>
-            <a:off x="1078992" y="4023360"/>
+            <a:off x="1078992" y="4974336"/>
             <a:ext cx="6613855" cy="320040"/>
           </a:xfrm>
           <a:prstGeom prst="rect">
@@ -10382,7 +10066,7 @@
                 <a:ea typeface="Sarabun"/>
                 <a:cs typeface="Sarabun"/>
               </a:rPr>
-              <a:t>ผมอายุ...ปี</a:t>
+              <a:t>ห้อง...</a:t>
             </a:r>
           </a:p>
         </p:txBody>
@@ -10395,7 +10079,7 @@
         </p:nvSpPr>
         <p:spPr>
           <a:xfrm>
-            <a:off x="1078992" y="4389120"/>
+            <a:off x="1078992" y="5340096"/>
             <a:ext cx="6613855" cy="274320"/>
           </a:xfrm>
           <a:prstGeom prst="rect">
@@ -10419,7 +10103,7 @@
                 <a:ea typeface="Sarabun"/>
                 <a:cs typeface="Sarabun"/>
               </a:rPr>
-              <a:t>phǒm aa-yú ... bpii</a:t>
+              <a:t>hâwng ...</a:t>
             </a:r>
           </a:p>
         </p:txBody>
@@ -10432,7 +10116,7 @@
         </p:nvSpPr>
         <p:spPr>
           <a:xfrm>
-            <a:off x="1078992" y="4764024"/>
+            <a:off x="1078992" y="5715000"/>
             <a:ext cx="6613855" cy="274320"/>
           </a:xfrm>
           <a:prstGeom prst="rect">
@@ -10456,202 +10140,7 @@
                 <a:ea typeface="Sarabun"/>
                 <a:cs typeface="Sarabun"/>
               </a:rPr>
-              <a:t>I am ... years old (male)</a:t>
-            </a:r>
-          </a:p>
-        </p:txBody>
-      </p:sp>
-      <p:sp>
-        <p:nvSpPr>
-          <p:cNvPr id="21" name="Rounded Rectangle 20"/>
-          <p:cNvSpPr/>
-          <p:nvPr/>
-        </p:nvSpPr>
-        <p:spPr>
-          <a:xfrm>
-            <a:off x="731520" y="5166360"/>
-            <a:ext cx="7071055" cy="1572768"/>
-          </a:xfrm>
-          <a:prstGeom prst="roundRect">
-            <a:avLst/>
-          </a:prstGeom>
-          <a:noFill/>
-          <a:ln>
-            <a:noFill/>
-          </a:ln>
-        </p:spPr>
-        <p:style>
-          <a:lnRef idx="1">
-            <a:schemeClr val="accent1"/>
-          </a:lnRef>
-          <a:fillRef idx="3">
-            <a:schemeClr val="accent1"/>
-          </a:fillRef>
-          <a:effectRef idx="2">
-            <a:schemeClr val="accent1"/>
-          </a:effectRef>
-          <a:fontRef idx="minor">
-            <a:schemeClr val="lt1"/>
-          </a:fontRef>
-        </p:style>
-        <p:txBody>
-          <a:bodyPr rtlCol="0" anchor="ctr"/>
-          <a:lstStyle/>
-          <a:p>
-            <a:pPr algn="ctr"/>
-          </a:p>
-        </p:txBody>
-      </p:sp>
-      <p:sp>
-        <p:nvSpPr>
-          <p:cNvPr id="22" name="Rectangle 21"/>
-          <p:cNvSpPr/>
-          <p:nvPr/>
-        </p:nvSpPr>
-        <p:spPr>
-          <a:xfrm>
-            <a:off x="868680" y="5367528"/>
-            <a:ext cx="73152" cy="1143000"/>
-          </a:xfrm>
-          <a:prstGeom prst="rect">
-            <a:avLst/>
-          </a:prstGeom>
-          <a:solidFill>
-            <a:srgbClr val="355C7D"/>
-          </a:solidFill>
-          <a:ln>
-            <a:noFill/>
-          </a:ln>
-        </p:spPr>
-        <p:style>
-          <a:lnRef idx="1">
-            <a:schemeClr val="accent1"/>
-          </a:lnRef>
-          <a:fillRef idx="3">
-            <a:schemeClr val="accent1"/>
-          </a:fillRef>
-          <a:effectRef idx="2">
-            <a:schemeClr val="accent1"/>
-          </a:effectRef>
-          <a:fontRef idx="minor">
-            <a:schemeClr val="lt1"/>
-          </a:fontRef>
-        </p:style>
-        <p:txBody>
-          <a:bodyPr rtlCol="0" anchor="ctr"/>
-          <a:lstStyle/>
-          <a:p>
-            <a:pPr algn="ctr"/>
-          </a:p>
-        </p:txBody>
-      </p:sp>
-      <p:sp>
-        <p:nvSpPr>
-          <p:cNvPr id="23" name="TextBox 22"/>
-          <p:cNvSpPr txBox="1"/>
-          <p:nvPr/>
-        </p:nvSpPr>
-        <p:spPr>
-          <a:xfrm>
-            <a:off x="1078992" y="5303520"/>
-            <a:ext cx="6613855" cy="320040"/>
-          </a:xfrm>
-          <a:prstGeom prst="rect">
-            <a:avLst/>
-          </a:prstGeom>
-          <a:noFill/>
-        </p:spPr>
-        <p:txBody>
-          <a:bodyPr wrap="square" anchor="t">
-            <a:spAutoFit/>
-          </a:bodyPr>
-          <a:lstStyle/>
-          <a:p>
-            <a:pPr algn="l"/>
-            <a:r>
-              <a:rPr sz="1700" b="0" i="0" lang="th-TH" altLang="en-US">
-                <a:solidFill>
-                  <a:srgbClr val="24333D"/>
-                </a:solidFill>
-                <a:latin typeface="Sarabun"/>
-                <a:ea typeface="Sarabun"/>
-                <a:cs typeface="Sarabun"/>
-              </a:rPr>
-              <a:t>ฉันอายุ...ปี</a:t>
-            </a:r>
-          </a:p>
-        </p:txBody>
-      </p:sp>
-      <p:sp>
-        <p:nvSpPr>
-          <p:cNvPr id="24" name="TextBox 23"/>
-          <p:cNvSpPr txBox="1"/>
-          <p:nvPr/>
-        </p:nvSpPr>
-        <p:spPr>
-          <a:xfrm>
-            <a:off x="1078992" y="5669280"/>
-            <a:ext cx="6613855" cy="274320"/>
-          </a:xfrm>
-          <a:prstGeom prst="rect">
-            <a:avLst/>
-          </a:prstGeom>
-          <a:noFill/>
-        </p:spPr>
-        <p:txBody>
-          <a:bodyPr wrap="square" anchor="t">
-            <a:spAutoFit/>
-          </a:bodyPr>
-          <a:lstStyle/>
-          <a:p>
-            <a:pPr algn="l"/>
-            <a:r>
-              <a:rPr sz="1700" b="0" i="1" lang="en-US" altLang="en-US">
-                <a:solidFill>
-                  <a:srgbClr val="566873"/>
-                </a:solidFill>
-                <a:latin typeface="Sarabun"/>
-                <a:ea typeface="Sarabun"/>
-                <a:cs typeface="Sarabun"/>
-              </a:rPr>
-              <a:t>chǎn aa-yú ... bpii</a:t>
-            </a:r>
-          </a:p>
-        </p:txBody>
-      </p:sp>
-      <p:sp>
-        <p:nvSpPr>
-          <p:cNvPr id="25" name="TextBox 24"/>
-          <p:cNvSpPr txBox="1"/>
-          <p:nvPr/>
-        </p:nvSpPr>
-        <p:spPr>
-          <a:xfrm>
-            <a:off x="1078992" y="6044184"/>
-            <a:ext cx="6613855" cy="274320"/>
-          </a:xfrm>
-          <a:prstGeom prst="rect">
-            <a:avLst/>
-          </a:prstGeom>
-          <a:noFill/>
-        </p:spPr>
-        <p:txBody>
-          <a:bodyPr wrap="square" anchor="t">
-            <a:spAutoFit/>
-          </a:bodyPr>
-          <a:lstStyle/>
-          <a:p>
-            <a:pPr algn="l"/>
-            <a:r>
-              <a:rPr sz="1700" b="0" i="0" lang="en-US" altLang="en-US">
-                <a:solidFill>
-                  <a:srgbClr val="82909A"/>
-                </a:solidFill>
-                <a:latin typeface="Sarabun"/>
-                <a:ea typeface="Sarabun"/>
-                <a:cs typeface="Sarabun"/>
-              </a:rPr>
-              <a:t>I am ... years old</a:t>
+              <a:t>room ...</a:t>
             </a:r>
           </a:p>
         </p:txBody>
@@ -10843,7 +10332,7 @@
           <a:p>
             <a:pPr algn="l"/>
             <a:r>
-              <a:rPr sz="3600" b="1" i="0" lang="en-US" altLang="en-US">
+              <a:rPr sz="2800" b="1" i="0" lang="en-US" altLang="en-US">
                 <a:solidFill>
                   <a:srgbClr val="24333D"/>
                 </a:solidFill>
@@ -10851,62 +10340,7 @@
                 <a:ea typeface="Sarabun"/>
                 <a:cs typeface="Sarabun"/>
               </a:rPr>
-              <a:t>Pronunciation: </a:t>
-            </a:r>
-            <a:r>
-              <a:rPr sz="3600" b="1" i="0" lang="th-TH" altLang="en-US">
-                <a:solidFill>
-                  <a:srgbClr val="24333D"/>
-                </a:solidFill>
-                <a:latin typeface="Sarabun"/>
-                <a:ea typeface="Sarabun"/>
-                <a:cs typeface="Sarabun"/>
-              </a:rPr>
-              <a:t>สี่</a:t>
-            </a:r>
-            <a:r>
-              <a:rPr sz="2230" b="0" i="1" lang="en-US" altLang="en-US">
-                <a:solidFill>
-                  <a:srgbClr val="566873"/>
-                </a:solidFill>
-                <a:latin typeface="Sarabun"/>
-                <a:ea typeface="Sarabun"/>
-                <a:cs typeface="Sarabun"/>
-              </a:rPr>
-              <a:t> (sìi)</a:t>
-            </a:r>
-            <a:r>
-              <a:rPr sz="3600" b="1" i="0" lang="en-US" altLang="en-US">
-                <a:solidFill>
-                  <a:srgbClr val="24333D"/>
-                </a:solidFill>
-                <a:latin typeface="Sarabun"/>
-                <a:ea typeface="Sarabun"/>
-                <a:cs typeface="Sarabun"/>
-              </a:rPr>
-              <a:t> vs </a:t>
-            </a:r>
-            <a:r>
-              <a:rPr sz="3600" b="1" i="0" lang="th-TH" altLang="en-US">
-                <a:solidFill>
-                  <a:srgbClr val="24333D"/>
-                </a:solidFill>
-                <a:latin typeface="Sarabun"/>
-                <a:ea typeface="Sarabun"/>
-                <a:cs typeface="Sarabun"/>
-              </a:rPr>
-              <a:t>สี</a:t>
-            </a:r>
-            <a:r>
-              <a:rPr sz="2230" b="0" i="1" lang="en-US" altLang="en-US">
-                <a:solidFill>
-                  <a:srgbClr val="566873"/>
-                </a:solidFill>
-                <a:latin typeface="Sarabun"/>
-                <a:ea typeface="Sarabun"/>
-                <a:cs typeface="Sarabun"/>
-              </a:rPr>
-              <a:t> (sǐi)</a:t>
+              <a:t>Pronunciation: tones in Thai numbers</a:t>
             </a:r>
           </a:p>
         </p:txBody>
@@ -11027,7 +10461,7 @@
                 <a:ea typeface="Sarabun"/>
                 <a:cs typeface="Sarabun"/>
               </a:rPr>
-              <a:t>สี่</a:t>
+              <a:t>สาม</a:t>
             </a:r>
           </a:p>
         </p:txBody>
@@ -11064,7 +10498,7 @@
                 <a:ea typeface="Sarabun"/>
                 <a:cs typeface="Sarabun"/>
               </a:rPr>
-              <a:t>sìi</a:t>
+              <a:t>sǎam</a:t>
             </a:r>
           </a:p>
         </p:txBody>
@@ -11101,7 +10535,7 @@
                 <a:ea typeface="Sarabun"/>
                 <a:cs typeface="Sarabun"/>
               </a:rPr>
-              <a:t>four — low tone (voice stays low)</a:t>
+              <a:t>rising tone ↗</a:t>
             </a:r>
           </a:p>
         </p:txBody>
@@ -11222,7 +10656,7 @@
                 <a:ea typeface="Sarabun"/>
                 <a:cs typeface="Sarabun"/>
               </a:rPr>
-              <a:t>สี</a:t>
+              <a:t>ห้า</a:t>
             </a:r>
           </a:p>
         </p:txBody>
@@ -11259,7 +10693,7 @@
                 <a:ea typeface="Sarabun"/>
                 <a:cs typeface="Sarabun"/>
               </a:rPr>
-              <a:t>sǐi</a:t>
+              <a:t>hâa</a:t>
             </a:r>
           </a:p>
         </p:txBody>
@@ -11296,7 +10730,7 @@
                 <a:ea typeface="Sarabun"/>
                 <a:cs typeface="Sarabun"/>
               </a:rPr>
-              <a:t>colour — rising tone (voice lifts)</a:t>
+              <a:t>falling tone ↘</a:t>
             </a:r>
           </a:p>
         </p:txBody>
@@ -11417,7 +10851,7 @@
                 <a:ea typeface="Sarabun"/>
                 <a:cs typeface="Sarabun"/>
               </a:rPr>
-              <a:t>เก้า</a:t>
+              <a:t>สี่</a:t>
             </a:r>
           </a:p>
         </p:txBody>
@@ -11454,7 +10888,7 @@
                 <a:ea typeface="Sarabun"/>
                 <a:cs typeface="Sarabun"/>
               </a:rPr>
-              <a:t>gâo</a:t>
+              <a:t>sìi</a:t>
             </a:r>
           </a:p>
         </p:txBody>
@@ -11491,7 +10925,7 @@
                 <a:ea typeface="Sarabun"/>
                 <a:cs typeface="Sarabun"/>
               </a:rPr>
-              <a:t>nine — falling tone (voice drops)</a:t>
+              <a:t>low tone →</a:t>
             </a:r>
           </a:p>
         </p:txBody>
@@ -11747,7 +11181,7 @@
                 <a:ea typeface="Sarabun"/>
                 <a:cs typeface="Sarabun"/>
               </a:rPr>
-              <a:t>You</a:t>
+              <a:t>Staff</a:t>
             </a:r>
           </a:p>
         </p:txBody>
@@ -11784,7 +11218,7 @@
                 <a:ea typeface="Sarabun"/>
                 <a:cs typeface="Sarabun"/>
               </a:rPr>
-              <a:t>สวัสดีครับ</a:t>
+              <a:t>สวัสดีค่ะ ห้องอะไรคะ</a:t>
             </a:r>
           </a:p>
         </p:txBody>
@@ -11821,7 +11255,7 @@
                 <a:ea typeface="Sarabun"/>
                 <a:cs typeface="Sarabun"/>
               </a:rPr>
-              <a:t>sà-wàt-dii khráp</a:t>
+              <a:t>sà-wàt-dii khâ hâwng à-rai khá</a:t>
             </a:r>
           </a:p>
         </p:txBody>
@@ -11858,7 +11292,7 @@
                 <a:ea typeface="Sarabun"/>
                 <a:cs typeface="Sarabun"/>
               </a:rPr>
-              <a:t>Hello.</a:t>
+              <a:t>Hello. What room?</a:t>
             </a:r>
           </a:p>
         </p:txBody>
@@ -11914,7 +11348,7 @@
                 <a:ea typeface="Sarabun"/>
                 <a:cs typeface="Sarabun"/>
               </a:rPr>
-              <a:t>Staff</a:t>
+              <a:t>You</a:t>
             </a:r>
           </a:p>
         </p:txBody>
@@ -11951,7 +11385,7 @@
                 <a:ea typeface="Sarabun"/>
                 <a:cs typeface="Sarabun"/>
               </a:rPr>
-              <a:t>สวัสดีค่ะ เบอร์ห้องอะไรคะ</a:t>
+              <a:t>ห้องห้าครับ</a:t>
             </a:r>
           </a:p>
         </p:txBody>
@@ -11988,7 +11422,7 @@
                 <a:ea typeface="Sarabun"/>
                 <a:cs typeface="Sarabun"/>
               </a:rPr>
-              <a:t>sà-wàt-dii khâ ber hâwng à-rai khá</a:t>
+              <a:t>hâwng hâa khráp</a:t>
             </a:r>
           </a:p>
         </p:txBody>
@@ -12025,7 +11459,7 @@
                 <a:ea typeface="Sarabun"/>
                 <a:cs typeface="Sarabun"/>
               </a:rPr>
-              <a:t>Hello. What room number?</a:t>
+              <a:t>Room five.</a:t>
             </a:r>
           </a:p>
         </p:txBody>
@@ -12081,7 +11515,7 @@
                 <a:ea typeface="Sarabun"/>
                 <a:cs typeface="Sarabun"/>
               </a:rPr>
-              <a:t>You</a:t>
+              <a:t>Staff</a:t>
             </a:r>
           </a:p>
         </p:txBody>
@@ -12118,7 +11552,7 @@
                 <a:ea typeface="Sarabun"/>
                 <a:cs typeface="Sarabun"/>
               </a:rPr>
-              <a:t>ห้า-ศูนย์-สองครับ</a:t>
+              <a:t>อายุเท่าไหร่คะ</a:t>
             </a:r>
           </a:p>
         </p:txBody>
@@ -12155,7 +11589,7 @@
                 <a:ea typeface="Sarabun"/>
                 <a:cs typeface="Sarabun"/>
               </a:rPr>
-              <a:t>hâa-sǔun-sǎawng khráp</a:t>
+              <a:t>aa-yú thâo-rài khá</a:t>
             </a:r>
           </a:p>
         </p:txBody>
@@ -12192,7 +11626,7 @@
                 <a:ea typeface="Sarabun"/>
                 <a:cs typeface="Sarabun"/>
               </a:rPr>
-              <a:t>502.</a:t>
+              <a:t>How old are you?</a:t>
             </a:r>
           </a:p>
         </p:txBody>
@@ -12248,7 +11682,7 @@
                 <a:ea typeface="Sarabun"/>
                 <a:cs typeface="Sarabun"/>
               </a:rPr>
-              <a:t>Staff</a:t>
+              <a:t>You</a:t>
             </a:r>
           </a:p>
         </p:txBody>
@@ -12285,7 +11719,7 @@
                 <a:ea typeface="Sarabun"/>
                 <a:cs typeface="Sarabun"/>
               </a:rPr>
-              <a:t>ค่ะ คุณอายุเท่าไหร่คะ</a:t>
+              <a:t>ฉันอายุสามสิบปีครับ</a:t>
             </a:r>
           </a:p>
         </p:txBody>
@@ -12322,7 +11756,7 @@
                 <a:ea typeface="Sarabun"/>
                 <a:cs typeface="Sarabun"/>
               </a:rPr>
-              <a:t>khâ khun aa-yú thâo-rài khá</a:t>
+              <a:t>chǎn aa-yú sǎam-sìp bpii khráp</a:t>
             </a:r>
           </a:p>
         </p:txBody>
@@ -12359,7 +11793,7 @@
                 <a:ea typeface="Sarabun"/>
                 <a:cs typeface="Sarabun"/>
               </a:rPr>
-              <a:t>How old are you?</a:t>
+              <a:t>I am thirty years old.</a:t>
             </a:r>
           </a:p>
         </p:txBody>
@@ -12415,7 +11849,7 @@
                 <a:ea typeface="Sarabun"/>
                 <a:cs typeface="Sarabun"/>
               </a:rPr>
-              <a:t>You</a:t>
+              <a:t>Staff</a:t>
             </a:r>
           </a:p>
         </p:txBody>
@@ -12452,7 +11886,7 @@
                 <a:ea typeface="Sarabun"/>
                 <a:cs typeface="Sarabun"/>
               </a:rPr>
-              <a:t>ผมอายุสามสิบปีครับ</a:t>
+              <a:t>เบอร์อะไรคะ</a:t>
             </a:r>
           </a:p>
         </p:txBody>
@@ -12489,7 +11923,7 @@
                 <a:ea typeface="Sarabun"/>
                 <a:cs typeface="Sarabun"/>
               </a:rPr>
-              <a:t>phǒm aa-yú sǎam-sìp bpii khráp</a:t>
+              <a:t>ber à-rai khá</a:t>
             </a:r>
           </a:p>
         </p:txBody>
@@ -12526,7 +11960,7 @@
                 <a:ea typeface="Sarabun"/>
                 <a:cs typeface="Sarabun"/>
               </a:rPr>
-              <a:t>I am thirty.</a:t>
+              <a:t>What is your number?</a:t>
             </a:r>
           </a:p>
         </p:txBody>
